--- a/benchmarks/eplb_rebalance/presentation/eplb_migration_batching.pptx
+++ b/benchmarks/eplb_rebalance/presentation/eplb_migration_batching.pptx
@@ -8,17 +8,18 @@
     <p:sldId id="256" r:id="rId3"/>
     <p:sldId id="257" r:id="rId4"/>
     <p:sldId id="258" r:id="rId5"/>
-    <p:sldId id="273" r:id="rId6"/>
-    <p:sldId id="259" r:id="rId7"/>
-    <p:sldId id="261" r:id="rId8"/>
-    <p:sldId id="263" r:id="rId9"/>
-    <p:sldId id="270" r:id="rId10"/>
-    <p:sldId id="264" r:id="rId11"/>
-    <p:sldId id="271" r:id="rId12"/>
-    <p:sldId id="265" r:id="rId13"/>
-    <p:sldId id="266" r:id="rId14"/>
-    <p:sldId id="269" r:id="rId15"/>
-    <p:sldId id="272" r:id="rId16"/>
+    <p:sldId id="274" r:id="rId6"/>
+    <p:sldId id="273" r:id="rId7"/>
+    <p:sldId id="275" r:id="rId8"/>
+    <p:sldId id="261" r:id="rId9"/>
+    <p:sldId id="263" r:id="rId10"/>
+    <p:sldId id="259" r:id="rId11"/>
+    <p:sldId id="264" r:id="rId12"/>
+    <p:sldId id="271" r:id="rId13"/>
+    <p:sldId id="265" r:id="rId14"/>
+    <p:sldId id="266" r:id="rId15"/>
+    <p:sldId id="269" r:id="rId16"/>
+    <p:sldId id="272" r:id="rId17"/>
   </p:sldIdLst>
   <p:sldSz cx="12191365" cy="6858000" type="screen4x3"/>
   <p:notesSz cx="6858000" cy="9144000"/>
@@ -120,7 +121,7 @@
   <p:extLst>
     <p:ext uri="{EFAFB233-063F-42B5-8137-9DF3F51BA10A}">
       <p15:sldGuideLst xmlns:p15="http://schemas.microsoft.com/office/powerpoint/2012/main">
-        <p15:guide id="1" orient="horz" pos="2090" userDrawn="1">
+        <p15:guide id="1" orient="horz" pos="2115" userDrawn="1">
           <p15:clr>
             <a:srgbClr val="A4A3A4"/>
           </p15:clr>
@@ -3076,23 +3077,25 @@
       <p:grpSpPr/>
       <p:sp>
         <p:nvSpPr>
-          <p:cNvPr id="2" name="Rectangle 1"/>
+          <p:cNvPr id="3" name="Rectangle 2"/>
           <p:cNvSpPr/>
           <p:nvPr/>
         </p:nvSpPr>
         <p:spPr>
           <a:xfrm>
             <a:off x="0" y="0"/>
-            <a:ext cx="12191695" cy="6858000"/>
+            <a:ext cx="6496050" cy="6858000"/>
           </a:xfrm>
           <a:prstGeom prst="rect">
             <a:avLst/>
           </a:prstGeom>
           <a:solidFill>
-            <a:srgbClr val="F7F9FC"/>
+            <a:srgbClr val="EDF3FA"/>
           </a:solidFill>
-          <a:ln>
-            <a:noFill/>
+          <a:ln w="12700">
+            <a:solidFill>
+              <a:srgbClr val="EDF3FA"/>
+            </a:solidFill>
           </a:ln>
         </p:spPr>
         <p:style>
@@ -3119,51 +3122,6 @@
       </p:sp>
       <p:sp>
         <p:nvSpPr>
-          <p:cNvPr id="3" name="Rectangle 2"/>
-          <p:cNvSpPr/>
-          <p:nvPr/>
-        </p:nvSpPr>
-        <p:spPr>
-          <a:xfrm>
-            <a:off x="0" y="0"/>
-            <a:ext cx="6496050" cy="6858000"/>
-          </a:xfrm>
-          <a:prstGeom prst="rect">
-            <a:avLst/>
-          </a:prstGeom>
-          <a:solidFill>
-            <a:srgbClr val="EDF3FA"/>
-          </a:solidFill>
-          <a:ln w="12700">
-            <a:solidFill>
-              <a:srgbClr val="EDF3FA"/>
-            </a:solidFill>
-          </a:ln>
-        </p:spPr>
-        <p:style>
-          <a:lnRef idx="1">
-            <a:schemeClr val="accent1"/>
-          </a:lnRef>
-          <a:fillRef idx="3">
-            <a:schemeClr val="accent1"/>
-          </a:fillRef>
-          <a:effectRef idx="2">
-            <a:schemeClr val="accent1"/>
-          </a:effectRef>
-          <a:fontRef idx="minor">
-            <a:schemeClr val="lt1"/>
-          </a:fontRef>
-        </p:style>
-        <p:txBody>
-          <a:bodyPr rtlCol="0" anchor="ctr"/>
-          <a:lstStyle/>
-          <a:p>
-            <a:pPr algn="ctr"/>
-          </a:p>
-        </p:txBody>
-      </p:sp>
-      <p:sp>
-        <p:nvSpPr>
           <p:cNvPr id="4" name="TextBox 3"/>
           <p:cNvSpPr txBox="1"/>
           <p:nvPr/>
@@ -3260,6 +3218,124 @@
                 <a:srgbClr val="162236"/>
               </a:solidFill>
               <a:latin typeface="Aptos"/>
+            </a:endParaRPr>
+          </a:p>
+        </p:txBody>
+      </p:sp>
+      <p:sp>
+        <p:nvSpPr>
+          <p:cNvPr id="6" name="文本框 5"/>
+          <p:cNvSpPr txBox="1"/>
+          <p:nvPr/>
+        </p:nvSpPr>
+        <p:spPr>
+          <a:xfrm>
+            <a:off x="7345045" y="5066665"/>
+            <a:ext cx="4064000" cy="922020"/>
+          </a:xfrm>
+          <a:prstGeom prst="rect">
+            <a:avLst/>
+          </a:prstGeom>
+          <a:noFill/>
+        </p:spPr>
+        <p:txBody>
+          <a:bodyPr wrap="square" rtlCol="0">
+            <a:spAutoFit/>
+          </a:bodyPr>
+          <a:p>
+            <a:pPr algn="r"/>
+            <a:r>
+              <a:rPr lang="en-US" altLang="zh-CN">
+                <a:ln/>
+                <a:solidFill>
+                  <a:schemeClr val="accent1"/>
+                </a:solidFill>
+                <a:effectLst>
+                  <a:outerShdw blurRad="38100" dist="25400" dir="5400000" algn="ctr" rotWithShape="0">
+                    <a:srgbClr val="6E747A">
+                      <a:alpha val="43000"/>
+                    </a:srgbClr>
+                  </a:outerShdw>
+                </a:effectLst>
+              </a:rPr>
+              <a:t>WU CAO</a:t>
+            </a:r>
+            <a:endParaRPr lang="en-US" altLang="zh-CN">
+              <a:ln/>
+              <a:solidFill>
+                <a:schemeClr val="accent1"/>
+              </a:solidFill>
+              <a:effectLst>
+                <a:outerShdw blurRad="38100" dist="25400" dir="5400000" algn="ctr" rotWithShape="0">
+                  <a:srgbClr val="6E747A">
+                    <a:alpha val="43000"/>
+                  </a:srgbClr>
+                </a:outerShdw>
+              </a:effectLst>
+            </a:endParaRPr>
+          </a:p>
+          <a:p>
+            <a:pPr algn="r"/>
+            <a:r>
+              <a:rPr lang="en-US" altLang="zh-CN">
+                <a:ln/>
+                <a:solidFill>
+                  <a:schemeClr val="accent1"/>
+                </a:solidFill>
+                <a:effectLst>
+                  <a:outerShdw blurRad="38100" dist="25400" dir="5400000" algn="ctr" rotWithShape="0">
+                    <a:srgbClr val="6E747A">
+                      <a:alpha val="43000"/>
+                    </a:srgbClr>
+                  </a:outerShdw>
+                </a:effectLst>
+              </a:rPr>
+              <a:t>HPC</a:t>
+            </a:r>
+            <a:endParaRPr lang="en-US" altLang="zh-CN">
+              <a:ln/>
+              <a:solidFill>
+                <a:schemeClr val="accent1"/>
+              </a:solidFill>
+              <a:effectLst>
+                <a:outerShdw blurRad="38100" dist="25400" dir="5400000" algn="ctr" rotWithShape="0">
+                  <a:srgbClr val="6E747A">
+                    <a:alpha val="43000"/>
+                  </a:srgbClr>
+                </a:outerShdw>
+              </a:effectLst>
+            </a:endParaRPr>
+          </a:p>
+          <a:p>
+            <a:pPr algn="r"/>
+            <a:r>
+              <a:rPr lang="en-US" altLang="zh-CN">
+                <a:ln/>
+                <a:solidFill>
+                  <a:schemeClr val="accent1"/>
+                </a:solidFill>
+                <a:effectLst>
+                  <a:outerShdw blurRad="38100" dist="25400" dir="5400000" algn="ctr" rotWithShape="0">
+                    <a:srgbClr val="6E747A">
+                      <a:alpha val="43000"/>
+                    </a:srgbClr>
+                  </a:outerShdw>
+                </a:effectLst>
+              </a:rPr>
+              <a:t>Oct.2026</a:t>
+            </a:r>
+            <a:endParaRPr lang="en-US" altLang="zh-CN">
+              <a:ln/>
+              <a:solidFill>
+                <a:schemeClr val="accent1"/>
+              </a:solidFill>
+              <a:effectLst>
+                <a:outerShdw blurRad="38100" dist="25400" dir="5400000" algn="ctr" rotWithShape="0">
+                  <a:srgbClr val="6E747A">
+                    <a:alpha val="43000"/>
+                  </a:srgbClr>
+                </a:outerShdw>
+              </a:effectLst>
             </a:endParaRPr>
           </a:p>
         </p:txBody>
@@ -3284,23 +3360,160 @@
       <p:grpSpPr/>
       <p:sp>
         <p:nvSpPr>
-          <p:cNvPr id="2" name="Rectangle 1"/>
-          <p:cNvSpPr/>
+          <p:cNvPr id="3" name="TextBox 2"/>
+          <p:cNvSpPr txBox="1"/>
           <p:nvPr/>
         </p:nvSpPr>
         <p:spPr>
           <a:xfrm>
-            <a:off x="0" y="0"/>
-            <a:ext cx="12191365" cy="6858000"/>
+            <a:off x="502920" y="210312"/>
+            <a:ext cx="2560320" cy="256032"/>
           </a:xfrm>
           <a:prstGeom prst="rect">
             <a:avLst/>
           </a:prstGeom>
+          <a:noFill/>
+        </p:spPr>
+        <p:txBody>
+          <a:bodyPr wrap="none" lIns="36576" tIns="36576" rIns="36576" bIns="36576" anchor="ctr">
+            <a:spAutoFit/>
+          </a:bodyPr>
+          <a:lstStyle/>
+          <a:p>
+            <a:pPr algn="l"/>
+            <a:r>
+              <a:rPr sz="1000" b="1">
+                <a:solidFill>
+                  <a:srgbClr val="0D8AA6"/>
+                </a:solidFill>
+                <a:latin typeface="Aptos"/>
+              </a:rPr>
+              <a:t>PART II · E2E</a:t>
+            </a:r>
+            <a:endParaRPr sz="1000" b="1">
+              <a:solidFill>
+                <a:srgbClr val="0D8AA6"/>
+              </a:solidFill>
+              <a:latin typeface="Aptos"/>
+            </a:endParaRPr>
+          </a:p>
+        </p:txBody>
+      </p:sp>
+      <p:sp>
+        <p:nvSpPr>
+          <p:cNvPr id="4" name="TextBox 3"/>
+          <p:cNvSpPr txBox="1"/>
+          <p:nvPr/>
+        </p:nvSpPr>
+        <p:spPr>
+          <a:xfrm>
+            <a:off x="502920" y="515112"/>
+            <a:ext cx="3053715" cy="487680"/>
+          </a:xfrm>
+          <a:prstGeom prst="rect">
+            <a:avLst/>
+          </a:prstGeom>
+          <a:noFill/>
+        </p:spPr>
+        <p:txBody>
+          <a:bodyPr wrap="none" lIns="36576" tIns="36576" rIns="36576" bIns="36576" anchor="ctr">
+            <a:spAutoFit/>
+          </a:bodyPr>
+          <a:lstStyle/>
+          <a:p>
+            <a:pPr algn="l"/>
+            <a:r>
+              <a:rPr lang="en-US" sz="2700" b="1">
+                <a:solidFill>
+                  <a:srgbClr val="162236"/>
+                </a:solidFill>
+                <a:latin typeface="Aptos"/>
+              </a:rPr>
+              <a:t>Experiment</a:t>
+            </a:r>
+            <a:r>
+              <a:rPr lang="en-US" sz="2700" b="1">
+                <a:solidFill>
+                  <a:srgbClr val="162236"/>
+                </a:solidFill>
+                <a:latin typeface="Aptos"/>
+              </a:rPr>
+              <a:t>s </a:t>
+            </a:r>
+            <a:r>
+              <a:rPr lang="en-US" sz="2700" b="1">
+                <a:solidFill>
+                  <a:srgbClr val="162236"/>
+                </a:solidFill>
+                <a:latin typeface="Aptos"/>
+              </a:rPr>
+              <a:t>setup</a:t>
+            </a:r>
+            <a:endParaRPr lang="en-US" sz="2700" b="1">
+              <a:solidFill>
+                <a:srgbClr val="162236"/>
+              </a:solidFill>
+              <a:latin typeface="Aptos"/>
+            </a:endParaRPr>
+          </a:p>
+        </p:txBody>
+      </p:sp>
+      <p:cxnSp>
+        <p:nvCxnSpPr>
+          <p:cNvPr id="6" name="Connector 5"/>
+          <p:cNvCxnSpPr/>
+          <p:nvPr/>
+        </p:nvCxnSpPr>
+        <p:spPr>
+          <a:xfrm>
+            <a:off x="530352" y="1251712"/>
+            <a:ext cx="11128248" cy="0"/>
+          </a:xfrm>
+          <a:prstGeom prst="line">
+            <a:avLst/>
+          </a:prstGeom>
+          <a:ln w="12700">
+            <a:solidFill>
+              <a:srgbClr val="D8E2EF"/>
+            </a:solidFill>
+          </a:ln>
+        </p:spPr>
+        <p:style>
+          <a:lnRef idx="2">
+            <a:schemeClr val="accent1"/>
+          </a:lnRef>
+          <a:fillRef idx="0">
+            <a:schemeClr val="accent1"/>
+          </a:fillRef>
+          <a:effectRef idx="1">
+            <a:schemeClr val="accent1"/>
+          </a:effectRef>
+          <a:fontRef idx="minor">
+            <a:schemeClr val="tx1"/>
+          </a:fontRef>
+        </p:style>
+      </p:cxnSp>
+      <p:sp>
+        <p:nvSpPr>
+          <p:cNvPr id="7" name="Rounded Rectangle 6"/>
+          <p:cNvSpPr/>
+          <p:nvPr/>
+        </p:nvSpPr>
+        <p:spPr>
+          <a:xfrm>
+            <a:off x="567055" y="1572895"/>
+            <a:ext cx="11102975" cy="4987925"/>
+          </a:xfrm>
+          <a:prstGeom prst="roundRect">
+            <a:avLst/>
+          </a:prstGeom>
           <a:solidFill>
-            <a:srgbClr val="F7F9FC"/>
+            <a:srgbClr val="FFFFFF"/>
           </a:solidFill>
-          <a:ln>
-            <a:noFill/>
+          <a:ln w="12700">
+            <a:solidFill>
+              <a:srgbClr val="3366D6"/>
+            </a:solidFill>
           </a:ln>
         </p:spPr>
         <p:style>
@@ -3327,146 +3540,25 @@
       </p:sp>
       <p:sp>
         <p:nvSpPr>
-          <p:cNvPr id="3" name="TextBox 2"/>
-          <p:cNvSpPr txBox="1"/>
-          <p:nvPr/>
-        </p:nvSpPr>
-        <p:spPr>
-          <a:xfrm>
-            <a:off x="502920" y="210312"/>
-            <a:ext cx="2560320" cy="256032"/>
-          </a:xfrm>
-          <a:prstGeom prst="rect">
-            <a:avLst/>
-          </a:prstGeom>
-          <a:noFill/>
-        </p:spPr>
-        <p:txBody>
-          <a:bodyPr wrap="none" lIns="36576" tIns="27432" rIns="36576" bIns="27432" anchor="ctr">
-            <a:spAutoFit/>
-          </a:bodyPr>
-          <a:lstStyle/>
-          <a:p>
-            <a:pPr algn="l"/>
-            <a:r>
-              <a:rPr sz="1000" b="1">
-                <a:solidFill>
-                  <a:srgbClr val="0D8AA6"/>
-                </a:solidFill>
-                <a:latin typeface="Aptos"/>
-              </a:rPr>
-              <a:t>PART II · E2E</a:t>
-            </a:r>
-            <a:endParaRPr sz="1000" b="1">
-              <a:solidFill>
-                <a:srgbClr val="0D8AA6"/>
-              </a:solidFill>
-              <a:latin typeface="Aptos"/>
-            </a:endParaRPr>
-          </a:p>
-        </p:txBody>
-      </p:sp>
-      <p:sp>
-        <p:nvSpPr>
-          <p:cNvPr id="4" name="TextBox 3"/>
-          <p:cNvSpPr txBox="1"/>
-          <p:nvPr/>
-        </p:nvSpPr>
-        <p:spPr>
-          <a:xfrm>
-            <a:off x="502920" y="512064"/>
-            <a:ext cx="10972800" cy="484632"/>
-          </a:xfrm>
-          <a:prstGeom prst="rect">
-            <a:avLst/>
-          </a:prstGeom>
-          <a:noFill/>
-        </p:spPr>
-        <p:txBody>
-          <a:bodyPr wrap="none" lIns="36576" tIns="27432" rIns="36576" bIns="27432" anchor="ctr">
-            <a:spAutoFit/>
-          </a:bodyPr>
-          <a:lstStyle/>
-          <a:p>
-            <a:pPr algn="l"/>
-            <a:r>
-              <a:rPr sz="2700" b="1">
-                <a:solidFill>
-                  <a:srgbClr val="162236"/>
-                </a:solidFill>
-                <a:latin typeface="Aptos"/>
-              </a:rPr>
-              <a:t>Benchmark Command</a:t>
-            </a:r>
-            <a:endParaRPr sz="2700" b="1">
-              <a:solidFill>
-                <a:srgbClr val="162236"/>
-              </a:solidFill>
-              <a:latin typeface="Aptos"/>
-            </a:endParaRPr>
-          </a:p>
-        </p:txBody>
-      </p:sp>
-      <p:sp>
-        <p:nvSpPr>
-          <p:cNvPr id="5" name="TextBox 4"/>
-          <p:cNvSpPr txBox="1"/>
-          <p:nvPr/>
-        </p:nvSpPr>
-        <p:spPr>
-          <a:xfrm>
-            <a:off x="530352" y="987552"/>
-            <a:ext cx="10972800" cy="320040"/>
-          </a:xfrm>
-          <a:prstGeom prst="rect">
-            <a:avLst/>
-          </a:prstGeom>
-          <a:noFill/>
-        </p:spPr>
-        <p:txBody>
-          <a:bodyPr wrap="none" lIns="36576" tIns="27432" rIns="36576" bIns="27432" anchor="ctr">
-            <a:spAutoFit/>
-          </a:bodyPr>
-          <a:lstStyle/>
-          <a:p>
-            <a:pPr algn="l"/>
-            <a:r>
-              <a:rPr sz="1200" b="0">
-                <a:solidFill>
-                  <a:srgbClr val="596C85"/>
-                </a:solidFill>
-                <a:latin typeface="Aptos"/>
-              </a:rPr>
-              <a:t>The off/on runs use the same request stream and a fresh server.</a:t>
-            </a:r>
-            <a:endParaRPr sz="1200" b="0">
-              <a:solidFill>
-                <a:srgbClr val="596C85"/>
-              </a:solidFill>
-              <a:latin typeface="Aptos"/>
-            </a:endParaRPr>
-          </a:p>
-        </p:txBody>
-      </p:sp>
-      <p:sp>
-        <p:nvSpPr>
-          <p:cNvPr id="6" name="Rectangle 5"/>
+          <p:cNvPr id="8" name="Rounded Rectangle 7"/>
           <p:cNvSpPr/>
           <p:nvPr/>
         </p:nvSpPr>
         <p:spPr>
           <a:xfrm>
-            <a:off x="530352" y="1307592"/>
-            <a:ext cx="11128248" cy="10972"/>
-          </a:xfrm>
-          <a:prstGeom prst="rect">
+            <a:off x="2702052" y="2440432"/>
+            <a:ext cx="1234440" cy="1216152"/>
+          </a:xfrm>
+          <a:prstGeom prst="roundRect">
             <a:avLst/>
           </a:prstGeom>
           <a:solidFill>
-            <a:srgbClr val="D8E2EF"/>
+            <a:srgbClr val="EDF3FA"/>
           </a:solidFill>
-          <a:ln>
-            <a:noFill/>
+          <a:ln w="12700">
+            <a:solidFill>
+              <a:srgbClr val="0D8AA6"/>
+            </a:solidFill>
           </a:ln>
         </p:spPr>
         <p:style>
@@ -3493,24 +3585,142 @@
       </p:sp>
       <p:sp>
         <p:nvSpPr>
-          <p:cNvPr id="7" name="Rounded Rectangle 6"/>
+          <p:cNvPr id="9" name="TextBox 8"/>
+          <p:cNvSpPr txBox="1"/>
+          <p:nvPr/>
+        </p:nvSpPr>
+        <p:spPr>
+          <a:xfrm>
+            <a:off x="2775204" y="2550160"/>
+            <a:ext cx="1078992" cy="256032"/>
+          </a:xfrm>
+          <a:prstGeom prst="rect">
+            <a:avLst/>
+          </a:prstGeom>
+          <a:noFill/>
+        </p:spPr>
+        <p:txBody>
+          <a:bodyPr wrap="none" lIns="36576" tIns="36576" rIns="36576" bIns="36576" anchor="ctr">
+            <a:spAutoFit/>
+          </a:bodyPr>
+          <a:lstStyle/>
+          <a:p>
+            <a:pPr algn="ctr"/>
+            <a:r>
+              <a:rPr sz="1100" b="1">
+                <a:solidFill>
+                  <a:srgbClr val="0D8AA6"/>
+                </a:solidFill>
+                <a:latin typeface="Aptos"/>
+              </a:rPr>
+              <a:t>NODE 0</a:t>
+            </a:r>
+            <a:endParaRPr sz="1100" b="1">
+              <a:solidFill>
+                <a:srgbClr val="0D8AA6"/>
+              </a:solidFill>
+              <a:latin typeface="Aptos"/>
+            </a:endParaRPr>
+          </a:p>
+        </p:txBody>
+      </p:sp>
+      <p:sp>
+        <p:nvSpPr>
+          <p:cNvPr id="10" name="TextBox 9"/>
+          <p:cNvSpPr txBox="1"/>
+          <p:nvPr/>
+        </p:nvSpPr>
+        <p:spPr>
+          <a:xfrm>
+            <a:off x="2775204" y="2915920"/>
+            <a:ext cx="1078992" cy="502920"/>
+          </a:xfrm>
+          <a:prstGeom prst="rect">
+            <a:avLst/>
+          </a:prstGeom>
+          <a:noFill/>
+        </p:spPr>
+        <p:txBody>
+          <a:bodyPr wrap="none" lIns="36576" tIns="36576" rIns="36576" bIns="36576" anchor="ctr">
+            <a:spAutoFit/>
+          </a:bodyPr>
+          <a:lstStyle/>
+          <a:p>
+            <a:pPr algn="ctr"/>
+            <a:r>
+              <a:rPr sz="1300" b="1">
+                <a:solidFill>
+                  <a:srgbClr val="162236"/>
+                </a:solidFill>
+                <a:latin typeface="Aptos"/>
+              </a:rPr>
+              <a:t>RTX 6000
+24 GB</a:t>
+            </a:r>
+            <a:endParaRPr sz="1300" b="1">
+              <a:solidFill>
+                <a:srgbClr val="162236"/>
+              </a:solidFill>
+              <a:latin typeface="Aptos"/>
+            </a:endParaRPr>
+          </a:p>
+        </p:txBody>
+      </p:sp>
+      <p:cxnSp>
+        <p:nvCxnSpPr>
+          <p:cNvPr id="11" name="Connector 10"/>
+          <p:cNvCxnSpPr/>
+          <p:nvPr/>
+        </p:nvCxnSpPr>
+        <p:spPr>
+          <a:xfrm>
+            <a:off x="3323844" y="3665728"/>
+            <a:ext cx="0" cy="713232"/>
+          </a:xfrm>
+          <a:prstGeom prst="line">
+            <a:avLst/>
+          </a:prstGeom>
+          <a:ln w="38100">
+            <a:solidFill>
+              <a:srgbClr val="139B67"/>
+            </a:solidFill>
+          </a:ln>
+        </p:spPr>
+        <p:style>
+          <a:lnRef idx="2">
+            <a:schemeClr val="accent1"/>
+          </a:lnRef>
+          <a:fillRef idx="0">
+            <a:schemeClr val="accent1"/>
+          </a:fillRef>
+          <a:effectRef idx="1">
+            <a:schemeClr val="accent1"/>
+          </a:effectRef>
+          <a:fontRef idx="minor">
+            <a:schemeClr val="tx1"/>
+          </a:fontRef>
+        </p:style>
+      </p:cxnSp>
+      <p:sp>
+        <p:nvSpPr>
+          <p:cNvPr id="12" name="Rounded Rectangle 11"/>
           <p:cNvSpPr/>
           <p:nvPr/>
         </p:nvSpPr>
         <p:spPr>
           <a:xfrm>
-            <a:off x="621792" y="1572768"/>
-            <a:ext cx="10954512" cy="4507992"/>
+            <a:off x="4366260" y="2440432"/>
+            <a:ext cx="1234440" cy="1216152"/>
           </a:xfrm>
           <a:prstGeom prst="roundRect">
             <a:avLst/>
           </a:prstGeom>
           <a:solidFill>
-            <a:srgbClr val="FFFFFF"/>
+            <a:srgbClr val="EDF3FA"/>
           </a:solidFill>
           <a:ln w="12700">
             <a:solidFill>
-              <a:srgbClr val="3366D6"/>
+              <a:srgbClr val="0D8AA6"/>
             </a:solidFill>
           </a:ln>
         </p:spPr>
@@ -3538,14 +3748,14 @@
       </p:sp>
       <p:sp>
         <p:nvSpPr>
-          <p:cNvPr id="8" name="TextBox 7"/>
+          <p:cNvPr id="13" name="TextBox 12"/>
           <p:cNvSpPr txBox="1"/>
           <p:nvPr/>
         </p:nvSpPr>
         <p:spPr>
           <a:xfrm>
-            <a:off x="914400" y="1847088"/>
-            <a:ext cx="10378440" cy="3246120"/>
+            <a:off x="4439412" y="2550160"/>
+            <a:ext cx="1078992" cy="256032"/>
           </a:xfrm>
           <a:prstGeom prst="rect">
             <a:avLst/>
@@ -3553,46 +3763,117 @@
           <a:noFill/>
         </p:spPr>
         <p:txBody>
-          <a:bodyPr wrap="none" lIns="36576" tIns="27432" rIns="36576" bIns="27432" anchor="t">
+          <a:bodyPr wrap="none" lIns="36576" tIns="36576" rIns="36576" bIns="36576" anchor="ctr">
             <a:spAutoFit/>
           </a:bodyPr>
           <a:lstStyle/>
           <a:p>
-            <a:pPr algn="l"/>
-            <a:r>
-              <a:rPr sz="1600" b="0">
+            <a:pPr algn="ctr"/>
+            <a:r>
+              <a:rPr sz="1100" b="1">
+                <a:solidFill>
+                  <a:srgbClr val="0D8AA6"/>
+                </a:solidFill>
+                <a:latin typeface="Aptos"/>
+              </a:rPr>
+              <a:t>NODE 1</a:t>
+            </a:r>
+            <a:endParaRPr sz="1100" b="1">
+              <a:solidFill>
+                <a:srgbClr val="0D8AA6"/>
+              </a:solidFill>
+              <a:latin typeface="Aptos"/>
+            </a:endParaRPr>
+          </a:p>
+        </p:txBody>
+      </p:sp>
+      <p:sp>
+        <p:nvSpPr>
+          <p:cNvPr id="14" name="TextBox 13"/>
+          <p:cNvSpPr txBox="1"/>
+          <p:nvPr/>
+        </p:nvSpPr>
+        <p:spPr>
+          <a:xfrm>
+            <a:off x="4439412" y="2915920"/>
+            <a:ext cx="1078992" cy="502920"/>
+          </a:xfrm>
+          <a:prstGeom prst="rect">
+            <a:avLst/>
+          </a:prstGeom>
+          <a:noFill/>
+        </p:spPr>
+        <p:txBody>
+          <a:bodyPr wrap="none" lIns="36576" tIns="36576" rIns="36576" bIns="36576" anchor="ctr">
+            <a:spAutoFit/>
+          </a:bodyPr>
+          <a:lstStyle/>
+          <a:p>
+            <a:pPr algn="ctr"/>
+            <a:r>
+              <a:rPr sz="1300" b="1">
                 <a:solidFill>
                   <a:srgbClr val="162236"/>
                 </a:solidFill>
-                <a:latin typeface="Consolas" panose="020B0609020204030204"/>
+                <a:latin typeface="Aptos"/>
               </a:rPr>
-              <a:t>vllm bench serve --backend vllm --model "$MODEL" --port 8000 \
-  --dataset-name random --random-prefix-len 300 \
-  --random-input-len 200 --random-output-len 300 \
-  --num-prompts 500 --max-concurrency 32 --seed 0 --temperature 0 \
-  --percentile-metrics ttft,tpot,e2el --metric-percentiles 50,99 \
-  --ignore-eos --disable-tqdm --save-result \
-  --result-dir "$RESULTS" --result-filename bench.json</a:t>
-            </a:r>
-            <a:endParaRPr sz="1600" b="0">
+              <a:t>RTX 6000
+24 GB</a:t>
+            </a:r>
+            <a:endParaRPr sz="1300" b="1">
               <a:solidFill>
                 <a:srgbClr val="162236"/>
               </a:solidFill>
-              <a:latin typeface="Consolas" panose="020B0609020204030204"/>
+              <a:latin typeface="Aptos"/>
             </a:endParaRPr>
           </a:p>
         </p:txBody>
       </p:sp>
-      <p:sp>
-        <p:nvSpPr>
-          <p:cNvPr id="9" name="Rounded Rectangle 8"/>
+      <p:cxnSp>
+        <p:nvCxnSpPr>
+          <p:cNvPr id="15" name="Connector 14"/>
+          <p:cNvCxnSpPr/>
+          <p:nvPr/>
+        </p:nvCxnSpPr>
+        <p:spPr>
+          <a:xfrm>
+            <a:off x="4988052" y="3665728"/>
+            <a:ext cx="0" cy="713232"/>
+          </a:xfrm>
+          <a:prstGeom prst="line">
+            <a:avLst/>
+          </a:prstGeom>
+          <a:ln w="38100">
+            <a:solidFill>
+              <a:srgbClr val="139B67"/>
+            </a:solidFill>
+          </a:ln>
+        </p:spPr>
+        <p:style>
+          <a:lnRef idx="2">
+            <a:schemeClr val="accent1"/>
+          </a:lnRef>
+          <a:fillRef idx="0">
+            <a:schemeClr val="accent1"/>
+          </a:fillRef>
+          <a:effectRef idx="1">
+            <a:schemeClr val="accent1"/>
+          </a:effectRef>
+          <a:fontRef idx="minor">
+            <a:schemeClr val="tx1"/>
+          </a:fontRef>
+        </p:style>
+      </p:cxnSp>
+      <p:sp>
+        <p:nvSpPr>
+          <p:cNvPr id="16" name="Rounded Rectangle 15"/>
           <p:cNvSpPr/>
           <p:nvPr/>
         </p:nvSpPr>
         <p:spPr>
           <a:xfrm>
-            <a:off x="914400" y="5285232"/>
-            <a:ext cx="10378440" cy="475488"/>
+            <a:off x="6030468" y="2440432"/>
+            <a:ext cx="1234440" cy="1216152"/>
           </a:xfrm>
           <a:prstGeom prst="roundRect">
             <a:avLst/>
@@ -3602,7 +3883,7 @@
           </a:solidFill>
           <a:ln w="12700">
             <a:solidFill>
-              <a:srgbClr val="139B67"/>
+              <a:srgbClr val="0D8AA6"/>
             </a:solidFill>
           </a:ln>
         </p:spPr>
@@ -3630,14 +3911,14 @@
       </p:sp>
       <p:sp>
         <p:nvSpPr>
-          <p:cNvPr id="10" name="TextBox 9"/>
+          <p:cNvPr id="17" name="TextBox 16"/>
           <p:cNvSpPr txBox="1"/>
           <p:nvPr/>
         </p:nvSpPr>
         <p:spPr>
           <a:xfrm>
-            <a:off x="1097280" y="5385816"/>
-            <a:ext cx="10012680" cy="246888"/>
+            <a:off x="6103620" y="2550160"/>
+            <a:ext cx="1078992" cy="256032"/>
           </a:xfrm>
           <a:prstGeom prst="rect">
             <a:avLst/>
@@ -3645,7 +3926,7 @@
           <a:noFill/>
         </p:spPr>
         <p:txBody>
-          <a:bodyPr wrap="none" lIns="36576" tIns="27432" rIns="36576" bIns="27432" anchor="ctr">
+          <a:bodyPr wrap="none" lIns="36576" tIns="36576" rIns="36576" bIns="36576" anchor="ctr">
             <a:spAutoFit/>
           </a:bodyPr>
           <a:lstStyle/>
@@ -3654,15 +3935,413 @@
             <a:r>
               <a:rPr sz="1100" b="1">
                 <a:solidFill>
-                  <a:srgbClr val="139B67"/>
+                  <a:srgbClr val="0D8AA6"/>
                 </a:solidFill>
                 <a:latin typeface="Aptos"/>
               </a:rPr>
-              <a:t>500 prompts  ·  concurrency 32  ·  deterministic decoding  ·  TTFT / TPOT / E2EL P50 and P99</a:t>
+              <a:t>NODE 2</a:t>
             </a:r>
             <a:endParaRPr sz="1100" b="1">
               <a:solidFill>
-                <a:srgbClr val="139B67"/>
+                <a:srgbClr val="0D8AA6"/>
+              </a:solidFill>
+              <a:latin typeface="Aptos"/>
+            </a:endParaRPr>
+          </a:p>
+        </p:txBody>
+      </p:sp>
+      <p:sp>
+        <p:nvSpPr>
+          <p:cNvPr id="18" name="TextBox 17"/>
+          <p:cNvSpPr txBox="1"/>
+          <p:nvPr/>
+        </p:nvSpPr>
+        <p:spPr>
+          <a:xfrm>
+            <a:off x="6103620" y="2915920"/>
+            <a:ext cx="1078992" cy="502920"/>
+          </a:xfrm>
+          <a:prstGeom prst="rect">
+            <a:avLst/>
+          </a:prstGeom>
+          <a:noFill/>
+        </p:spPr>
+        <p:txBody>
+          <a:bodyPr wrap="none" lIns="36576" tIns="36576" rIns="36576" bIns="36576" anchor="ctr">
+            <a:spAutoFit/>
+          </a:bodyPr>
+          <a:lstStyle/>
+          <a:p>
+            <a:pPr algn="ctr"/>
+            <a:r>
+              <a:rPr sz="1300" b="1">
+                <a:solidFill>
+                  <a:srgbClr val="162236"/>
+                </a:solidFill>
+                <a:latin typeface="Aptos"/>
+              </a:rPr>
+              <a:t>RTX 6000
+24 GB</a:t>
+            </a:r>
+            <a:endParaRPr sz="1300" b="1">
+              <a:solidFill>
+                <a:srgbClr val="162236"/>
+              </a:solidFill>
+              <a:latin typeface="Aptos"/>
+            </a:endParaRPr>
+          </a:p>
+        </p:txBody>
+      </p:sp>
+      <p:cxnSp>
+        <p:nvCxnSpPr>
+          <p:cNvPr id="19" name="Connector 18"/>
+          <p:cNvCxnSpPr/>
+          <p:nvPr/>
+        </p:nvCxnSpPr>
+        <p:spPr>
+          <a:xfrm>
+            <a:off x="6652260" y="3665728"/>
+            <a:ext cx="0" cy="713232"/>
+          </a:xfrm>
+          <a:prstGeom prst="line">
+            <a:avLst/>
+          </a:prstGeom>
+          <a:ln w="38100">
+            <a:solidFill>
+              <a:srgbClr val="139B67"/>
+            </a:solidFill>
+          </a:ln>
+        </p:spPr>
+        <p:style>
+          <a:lnRef idx="2">
+            <a:schemeClr val="accent1"/>
+          </a:lnRef>
+          <a:fillRef idx="0">
+            <a:schemeClr val="accent1"/>
+          </a:fillRef>
+          <a:effectRef idx="1">
+            <a:schemeClr val="accent1"/>
+          </a:effectRef>
+          <a:fontRef idx="minor">
+            <a:schemeClr val="tx1"/>
+          </a:fontRef>
+        </p:style>
+      </p:cxnSp>
+      <p:sp>
+        <p:nvSpPr>
+          <p:cNvPr id="20" name="Rounded Rectangle 19"/>
+          <p:cNvSpPr/>
+          <p:nvPr/>
+        </p:nvSpPr>
+        <p:spPr>
+          <a:xfrm>
+            <a:off x="7694676" y="2440432"/>
+            <a:ext cx="1234440" cy="1216152"/>
+          </a:xfrm>
+          <a:prstGeom prst="roundRect">
+            <a:avLst/>
+          </a:prstGeom>
+          <a:solidFill>
+            <a:srgbClr val="EDF3FA"/>
+          </a:solidFill>
+          <a:ln w="12700">
+            <a:solidFill>
+              <a:srgbClr val="0D8AA6"/>
+            </a:solidFill>
+          </a:ln>
+        </p:spPr>
+        <p:style>
+          <a:lnRef idx="1">
+            <a:schemeClr val="accent1"/>
+          </a:lnRef>
+          <a:fillRef idx="3">
+            <a:schemeClr val="accent1"/>
+          </a:fillRef>
+          <a:effectRef idx="2">
+            <a:schemeClr val="accent1"/>
+          </a:effectRef>
+          <a:fontRef idx="minor">
+            <a:schemeClr val="lt1"/>
+          </a:fontRef>
+        </p:style>
+        <p:txBody>
+          <a:bodyPr rtlCol="0" anchor="ctr"/>
+          <a:lstStyle/>
+          <a:p>
+            <a:pPr algn="ctr"/>
+          </a:p>
+        </p:txBody>
+      </p:sp>
+      <p:sp>
+        <p:nvSpPr>
+          <p:cNvPr id="21" name="TextBox 20"/>
+          <p:cNvSpPr txBox="1"/>
+          <p:nvPr/>
+        </p:nvSpPr>
+        <p:spPr>
+          <a:xfrm>
+            <a:off x="7767828" y="2550160"/>
+            <a:ext cx="1078992" cy="256032"/>
+          </a:xfrm>
+          <a:prstGeom prst="rect">
+            <a:avLst/>
+          </a:prstGeom>
+          <a:noFill/>
+        </p:spPr>
+        <p:txBody>
+          <a:bodyPr wrap="none" lIns="36576" tIns="36576" rIns="36576" bIns="36576" anchor="ctr">
+            <a:spAutoFit/>
+          </a:bodyPr>
+          <a:lstStyle/>
+          <a:p>
+            <a:pPr algn="ctr"/>
+            <a:r>
+              <a:rPr sz="1100" b="1">
+                <a:solidFill>
+                  <a:srgbClr val="0D8AA6"/>
+                </a:solidFill>
+                <a:latin typeface="Aptos"/>
+              </a:rPr>
+              <a:t>NODE 3</a:t>
+            </a:r>
+            <a:endParaRPr sz="1100" b="1">
+              <a:solidFill>
+                <a:srgbClr val="0D8AA6"/>
+              </a:solidFill>
+              <a:latin typeface="Aptos"/>
+            </a:endParaRPr>
+          </a:p>
+        </p:txBody>
+      </p:sp>
+      <p:sp>
+        <p:nvSpPr>
+          <p:cNvPr id="22" name="TextBox 21"/>
+          <p:cNvSpPr txBox="1"/>
+          <p:nvPr/>
+        </p:nvSpPr>
+        <p:spPr>
+          <a:xfrm>
+            <a:off x="7767828" y="2915920"/>
+            <a:ext cx="1078992" cy="502920"/>
+          </a:xfrm>
+          <a:prstGeom prst="rect">
+            <a:avLst/>
+          </a:prstGeom>
+          <a:noFill/>
+        </p:spPr>
+        <p:txBody>
+          <a:bodyPr wrap="none" lIns="36576" tIns="36576" rIns="36576" bIns="36576" anchor="ctr">
+            <a:spAutoFit/>
+          </a:bodyPr>
+          <a:lstStyle/>
+          <a:p>
+            <a:pPr algn="ctr"/>
+            <a:r>
+              <a:rPr sz="1300" b="1">
+                <a:solidFill>
+                  <a:srgbClr val="162236"/>
+                </a:solidFill>
+                <a:latin typeface="Aptos"/>
+              </a:rPr>
+              <a:t>RTX 6000
+24 GB</a:t>
+            </a:r>
+            <a:endParaRPr sz="1300" b="1">
+              <a:solidFill>
+                <a:srgbClr val="162236"/>
+              </a:solidFill>
+              <a:latin typeface="Aptos"/>
+            </a:endParaRPr>
+          </a:p>
+        </p:txBody>
+      </p:sp>
+      <p:cxnSp>
+        <p:nvCxnSpPr>
+          <p:cNvPr id="23" name="Connector 22"/>
+          <p:cNvCxnSpPr/>
+          <p:nvPr/>
+        </p:nvCxnSpPr>
+        <p:spPr>
+          <a:xfrm>
+            <a:off x="8316468" y="3665728"/>
+            <a:ext cx="0" cy="713232"/>
+          </a:xfrm>
+          <a:prstGeom prst="line">
+            <a:avLst/>
+          </a:prstGeom>
+          <a:ln w="38100">
+            <a:solidFill>
+              <a:srgbClr val="139B67"/>
+            </a:solidFill>
+          </a:ln>
+        </p:spPr>
+        <p:style>
+          <a:lnRef idx="2">
+            <a:schemeClr val="accent1"/>
+          </a:lnRef>
+          <a:fillRef idx="0">
+            <a:schemeClr val="accent1"/>
+          </a:fillRef>
+          <a:effectRef idx="1">
+            <a:schemeClr val="accent1"/>
+          </a:effectRef>
+          <a:fontRef idx="minor">
+            <a:schemeClr val="tx1"/>
+          </a:fontRef>
+        </p:style>
+      </p:cxnSp>
+      <p:cxnSp>
+        <p:nvCxnSpPr>
+          <p:cNvPr id="24" name="Connector 23"/>
+          <p:cNvCxnSpPr/>
+          <p:nvPr/>
+        </p:nvCxnSpPr>
+        <p:spPr>
+          <a:xfrm>
+            <a:off x="3296412" y="4378960"/>
+            <a:ext cx="5010912" cy="0"/>
+          </a:xfrm>
+          <a:prstGeom prst="line">
+            <a:avLst/>
+          </a:prstGeom>
+          <a:ln w="63500">
+            <a:solidFill>
+              <a:srgbClr val="139B67"/>
+            </a:solidFill>
+          </a:ln>
+        </p:spPr>
+        <p:style>
+          <a:lnRef idx="2">
+            <a:schemeClr val="accent1"/>
+          </a:lnRef>
+          <a:fillRef idx="0">
+            <a:schemeClr val="accent1"/>
+          </a:fillRef>
+          <a:effectRef idx="1">
+            <a:schemeClr val="accent1"/>
+          </a:effectRef>
+          <a:fontRef idx="minor">
+            <a:schemeClr val="tx1"/>
+          </a:fontRef>
+        </p:style>
+      </p:cxnSp>
+      <p:sp>
+        <p:nvSpPr>
+          <p:cNvPr id="26" name="TextBox 25"/>
+          <p:cNvSpPr txBox="1"/>
+          <p:nvPr/>
+        </p:nvSpPr>
+        <p:spPr>
+          <a:xfrm>
+            <a:off x="2811780" y="5311648"/>
+            <a:ext cx="2743200" cy="320040"/>
+          </a:xfrm>
+          <a:prstGeom prst="rect">
+            <a:avLst/>
+          </a:prstGeom>
+          <a:noFill/>
+        </p:spPr>
+        <p:txBody>
+          <a:bodyPr wrap="none" lIns="36576" tIns="36576" rIns="36576" bIns="36576" anchor="ctr">
+            <a:spAutoFit/>
+          </a:bodyPr>
+          <a:lstStyle/>
+          <a:p>
+            <a:pPr algn="ctr"/>
+            <a:r>
+              <a:rPr sz="1300" b="1">
+                <a:solidFill>
+                  <a:srgbClr val="162236"/>
+                </a:solidFill>
+                <a:latin typeface="Aptos"/>
+              </a:rPr>
+              <a:t>Qwen3-30B-A3B-Instruct-2507</a:t>
+            </a:r>
+            <a:endParaRPr sz="1300" b="1">
+              <a:solidFill>
+                <a:srgbClr val="162236"/>
+              </a:solidFill>
+              <a:latin typeface="Aptos"/>
+            </a:endParaRPr>
+          </a:p>
+        </p:txBody>
+      </p:sp>
+      <p:sp>
+        <p:nvSpPr>
+          <p:cNvPr id="27" name="TextBox 26"/>
+          <p:cNvSpPr txBox="1"/>
+          <p:nvPr/>
+        </p:nvSpPr>
+        <p:spPr>
+          <a:xfrm>
+            <a:off x="5646420" y="5311648"/>
+            <a:ext cx="1280160" cy="320040"/>
+          </a:xfrm>
+          <a:prstGeom prst="rect">
+            <a:avLst/>
+          </a:prstGeom>
+          <a:noFill/>
+        </p:spPr>
+        <p:txBody>
+          <a:bodyPr wrap="none" lIns="36576" tIns="36576" rIns="36576" bIns="36576" anchor="ctr">
+            <a:spAutoFit/>
+          </a:bodyPr>
+          <a:lstStyle/>
+          <a:p>
+            <a:pPr algn="ctr"/>
+            <a:r>
+              <a:rPr sz="1300" b="1">
+                <a:solidFill>
+                  <a:srgbClr val="162236"/>
+                </a:solidFill>
+                <a:latin typeface="Aptos"/>
+              </a:rPr>
+              <a:t>TP = EP = 4</a:t>
+            </a:r>
+            <a:endParaRPr sz="1300" b="1">
+              <a:solidFill>
+                <a:srgbClr val="162236"/>
+              </a:solidFill>
+              <a:latin typeface="Aptos"/>
+            </a:endParaRPr>
+          </a:p>
+        </p:txBody>
+      </p:sp>
+      <p:sp>
+        <p:nvSpPr>
+          <p:cNvPr id="28" name="TextBox 27"/>
+          <p:cNvSpPr txBox="1"/>
+          <p:nvPr/>
+        </p:nvSpPr>
+        <p:spPr>
+          <a:xfrm>
+            <a:off x="7292340" y="5311648"/>
+            <a:ext cx="1280160" cy="320040"/>
+          </a:xfrm>
+          <a:prstGeom prst="rect">
+            <a:avLst/>
+          </a:prstGeom>
+          <a:noFill/>
+        </p:spPr>
+        <p:txBody>
+          <a:bodyPr wrap="none" lIns="36576" tIns="36576" rIns="36576" bIns="36576" anchor="ctr">
+            <a:spAutoFit/>
+          </a:bodyPr>
+          <a:lstStyle/>
+          <a:p>
+            <a:pPr algn="ctr"/>
+            <a:r>
+              <a:rPr sz="1300" b="1">
+                <a:solidFill>
+                  <a:srgbClr val="162236"/>
+                </a:solidFill>
+                <a:latin typeface="Aptos"/>
+              </a:rPr>
+              <a:t>async EPLB</a:t>
+            </a:r>
+            <a:endParaRPr sz="1300" b="1">
+              <a:solidFill>
+                <a:srgbClr val="162236"/>
               </a:solidFill>
               <a:latin typeface="Aptos"/>
             </a:endParaRPr>
@@ -3689,14 +4368,14 @@
       <p:grpSpPr/>
       <p:sp>
         <p:nvSpPr>
-          <p:cNvPr id="3" name="TextBox 2"/>
+          <p:cNvPr id="4" name="TextBox 3"/>
           <p:cNvSpPr txBox="1"/>
           <p:nvPr/>
         </p:nvSpPr>
         <p:spPr>
           <a:xfrm>
-            <a:off x="502920" y="210312"/>
-            <a:ext cx="2560320" cy="256032"/>
+            <a:off x="502920" y="512064"/>
+            <a:ext cx="10972800" cy="484632"/>
           </a:xfrm>
           <a:prstGeom prst="rect">
             <a:avLst/>
@@ -3704,30 +4383,228 @@
           <a:noFill/>
         </p:spPr>
         <p:txBody>
-          <a:bodyPr wrap="none" lIns="36576" tIns="36576" rIns="36576" bIns="36576" anchor="ctr">
+          <a:bodyPr wrap="none" lIns="36576" tIns="27432" rIns="36576" bIns="27432" anchor="ctr">
             <a:spAutoFit/>
           </a:bodyPr>
           <a:lstStyle/>
           <a:p>
             <a:pPr algn="l"/>
             <a:r>
-              <a:rPr sz="1000" b="1">
+              <a:rPr sz="2700" b="1">
                 <a:solidFill>
-                  <a:srgbClr val="0D8AA6"/>
+                  <a:srgbClr val="162236"/>
                 </a:solidFill>
                 <a:latin typeface="Aptos"/>
               </a:rPr>
-              <a:t>PART II · E2E</a:t>
-            </a:r>
-            <a:endParaRPr sz="1000" b="1">
+              <a:t>Benchmark Command</a:t>
+            </a:r>
+            <a:endParaRPr sz="2700" b="1">
               <a:solidFill>
-                <a:srgbClr val="0D8AA6"/>
+                <a:srgbClr val="162236"/>
               </a:solidFill>
               <a:latin typeface="Aptos"/>
             </a:endParaRPr>
           </a:p>
         </p:txBody>
       </p:sp>
+      <p:sp>
+        <p:nvSpPr>
+          <p:cNvPr id="6" name="Rectangle 5"/>
+          <p:cNvSpPr/>
+          <p:nvPr/>
+        </p:nvSpPr>
+        <p:spPr>
+          <a:xfrm>
+            <a:off x="530352" y="1307592"/>
+            <a:ext cx="11128248" cy="10972"/>
+          </a:xfrm>
+          <a:prstGeom prst="rect">
+            <a:avLst/>
+          </a:prstGeom>
+          <a:solidFill>
+            <a:srgbClr val="D8E2EF"/>
+          </a:solidFill>
+          <a:ln>
+            <a:noFill/>
+          </a:ln>
+        </p:spPr>
+        <p:style>
+          <a:lnRef idx="1">
+            <a:schemeClr val="accent1"/>
+          </a:lnRef>
+          <a:fillRef idx="3">
+            <a:schemeClr val="accent1"/>
+          </a:fillRef>
+          <a:effectRef idx="2">
+            <a:schemeClr val="accent1"/>
+          </a:effectRef>
+          <a:fontRef idx="minor">
+            <a:schemeClr val="lt1"/>
+          </a:fontRef>
+        </p:style>
+        <p:txBody>
+          <a:bodyPr rtlCol="0" anchor="ctr"/>
+          <a:lstStyle/>
+          <a:p>
+            <a:pPr algn="ctr"/>
+          </a:p>
+        </p:txBody>
+      </p:sp>
+      <p:sp>
+        <p:nvSpPr>
+          <p:cNvPr id="7" name="Rounded Rectangle 6"/>
+          <p:cNvSpPr/>
+          <p:nvPr/>
+        </p:nvSpPr>
+        <p:spPr>
+          <a:xfrm>
+            <a:off x="621792" y="1572768"/>
+            <a:ext cx="10954512" cy="4507992"/>
+          </a:xfrm>
+          <a:prstGeom prst="roundRect">
+            <a:avLst/>
+          </a:prstGeom>
+          <a:solidFill>
+            <a:srgbClr val="FFFFFF"/>
+          </a:solidFill>
+          <a:ln w="12700">
+            <a:solidFill>
+              <a:srgbClr val="3366D6"/>
+            </a:solidFill>
+          </a:ln>
+        </p:spPr>
+        <p:style>
+          <a:lnRef idx="1">
+            <a:schemeClr val="accent1"/>
+          </a:lnRef>
+          <a:fillRef idx="3">
+            <a:schemeClr val="accent1"/>
+          </a:fillRef>
+          <a:effectRef idx="2">
+            <a:schemeClr val="accent1"/>
+          </a:effectRef>
+          <a:fontRef idx="minor">
+            <a:schemeClr val="lt1"/>
+          </a:fontRef>
+        </p:style>
+        <p:txBody>
+          <a:bodyPr rtlCol="0" anchor="ctr"/>
+          <a:lstStyle/>
+          <a:p>
+            <a:pPr algn="ctr"/>
+          </a:p>
+        </p:txBody>
+      </p:sp>
+      <p:sp>
+        <p:nvSpPr>
+          <p:cNvPr id="8" name="TextBox 7"/>
+          <p:cNvSpPr txBox="1"/>
+          <p:nvPr/>
+        </p:nvSpPr>
+        <p:spPr>
+          <a:xfrm>
+            <a:off x="1576705" y="2338705"/>
+            <a:ext cx="8352155" cy="2445385"/>
+          </a:xfrm>
+          <a:prstGeom prst="rect">
+            <a:avLst/>
+          </a:prstGeom>
+          <a:noFill/>
+        </p:spPr>
+        <p:txBody>
+          <a:bodyPr wrap="none" lIns="36576" tIns="27432" rIns="36576" bIns="27432" anchor="t">
+            <a:noAutofit/>
+          </a:bodyPr>
+          <a:lstStyle/>
+          <a:p>
+            <a:pPr algn="l"/>
+            <a:r>
+              <a:rPr sz="2000" b="0">
+                <a:solidFill>
+                  <a:srgbClr val="FF0000"/>
+                </a:solidFill>
+                <a:latin typeface="Consolas" panose="020B0609020204030204"/>
+              </a:rPr>
+              <a:t>vllm bench</a:t>
+            </a:r>
+            <a:r>
+              <a:rPr sz="2000" b="0">
+                <a:solidFill>
+                  <a:srgbClr val="162236"/>
+                </a:solidFill>
+                <a:latin typeface="Consolas" panose="020B0609020204030204"/>
+              </a:rPr>
+              <a:t> serve --backend vllm --model "$MODEL" --port 8000 \
+  --dataset-name random --random-prefix-len 300 \
+  --random-input-len 200 --random-output-len 300 \
+  --</a:t>
+            </a:r>
+            <a:r>
+              <a:rPr sz="2000" b="1">
+                <a:solidFill>
+                  <a:srgbClr val="FF0000"/>
+                </a:solidFill>
+                <a:latin typeface="Consolas" panose="020B0609020204030204"/>
+              </a:rPr>
+              <a:t>num-prompts 500 --max-concurrency 32</a:t>
+            </a:r>
+            <a:r>
+              <a:rPr sz="2000" b="0">
+                <a:solidFill>
+                  <a:srgbClr val="162236"/>
+                </a:solidFill>
+                <a:latin typeface="Consolas" panose="020B0609020204030204"/>
+              </a:rPr>
+              <a:t> --seed 0 --temperature 0 \
+  --percentile-metrics </a:t>
+            </a:r>
+            <a:r>
+              <a:rPr sz="2000" b="1">
+                <a:solidFill>
+                  <a:srgbClr val="FF0000"/>
+                </a:solidFill>
+                <a:latin typeface="Consolas" panose="020B0609020204030204"/>
+              </a:rPr>
+              <a:t>ttft,tpot,e2el --metric-percentiles 50,99</a:t>
+            </a:r>
+            <a:r>
+              <a:rPr sz="2000" b="0">
+                <a:solidFill>
+                  <a:srgbClr val="162236"/>
+                </a:solidFill>
+                <a:latin typeface="Consolas" panose="020B0609020204030204"/>
+              </a:rPr>
+              <a:t> \
+  --ignore-eos --disable-tqdm --save-result \
+  --result-dir "$RESULTS" --result-filename bench.json</a:t>
+            </a:r>
+            <a:endParaRPr sz="2000" b="0">
+              <a:solidFill>
+                <a:srgbClr val="162236"/>
+              </a:solidFill>
+              <a:latin typeface="Consolas" panose="020B0609020204030204"/>
+            </a:endParaRPr>
+          </a:p>
+        </p:txBody>
+      </p:sp>
+    </p:spTree>
+  </p:cSld>
+  <p:clrMapOvr>
+    <a:masterClrMapping/>
+  </p:clrMapOvr>
+</p:sld>
+</file>
+
+<file path=ppt/slides/slide12.xml><?xml version="1.0" encoding="utf-8"?>
+<p:sld xmlns:a="http://schemas.openxmlformats.org/drawingml/2006/main" xmlns:r="http://schemas.openxmlformats.org/officeDocument/2006/relationships" xmlns:p="http://schemas.openxmlformats.org/presentationml/2006/main">
+  <p:cSld>
+    <p:spTree>
+      <p:nvGrpSpPr>
+        <p:cNvPr id="1" name=""/>
+        <p:cNvGrpSpPr/>
+        <p:nvPr/>
+      </p:nvGrpSpPr>
+      <p:grpSpPr/>
       <p:sp>
         <p:nvSpPr>
           <p:cNvPr id="4" name="TextBox 3"/>
@@ -3786,7 +4663,7 @@
         </p:nvCxnSpPr>
         <p:spPr>
           <a:xfrm>
-            <a:off x="530352" y="1307592"/>
+            <a:off x="530352" y="1078992"/>
             <a:ext cx="11128248" cy="0"/>
           </a:xfrm>
           <a:prstGeom prst="line">
@@ -4572,7 +5449,7 @@
 </p:sld>
 </file>
 
-<file path=ppt/slides/slide12.xml><?xml version="1.0" encoding="utf-8"?>
+<file path=ppt/slides/slide13.xml><?xml version="1.0" encoding="utf-8"?>
 <p:sld xmlns:a="http://schemas.openxmlformats.org/drawingml/2006/main" xmlns:r="http://schemas.openxmlformats.org/officeDocument/2006/relationships" xmlns:p="http://schemas.openxmlformats.org/presentationml/2006/main">
   <p:cSld>
     <p:spTree>
@@ -4584,90 +5461,6 @@
       <p:grpSpPr/>
       <p:sp>
         <p:nvSpPr>
-          <p:cNvPr id="2" name="Rectangle 1"/>
-          <p:cNvSpPr/>
-          <p:nvPr/>
-        </p:nvSpPr>
-        <p:spPr>
-          <a:xfrm>
-            <a:off x="0" y="0"/>
-            <a:ext cx="12191695" cy="6858000"/>
-          </a:xfrm>
-          <a:prstGeom prst="rect">
-            <a:avLst/>
-          </a:prstGeom>
-          <a:solidFill>
-            <a:srgbClr val="F7F9FC"/>
-          </a:solidFill>
-          <a:ln>
-            <a:noFill/>
-          </a:ln>
-        </p:spPr>
-        <p:style>
-          <a:lnRef idx="1">
-            <a:schemeClr val="accent1"/>
-          </a:lnRef>
-          <a:fillRef idx="3">
-            <a:schemeClr val="accent1"/>
-          </a:fillRef>
-          <a:effectRef idx="2">
-            <a:schemeClr val="accent1"/>
-          </a:effectRef>
-          <a:fontRef idx="minor">
-            <a:schemeClr val="lt1"/>
-          </a:fontRef>
-        </p:style>
-        <p:txBody>
-          <a:bodyPr rtlCol="0" anchor="ctr"/>
-          <a:lstStyle/>
-          <a:p>
-            <a:pPr algn="ctr"/>
-          </a:p>
-        </p:txBody>
-      </p:sp>
-      <p:sp>
-        <p:nvSpPr>
-          <p:cNvPr id="3" name="TextBox 2"/>
-          <p:cNvSpPr txBox="1"/>
-          <p:nvPr/>
-        </p:nvSpPr>
-        <p:spPr>
-          <a:xfrm>
-            <a:off x="502920" y="210312"/>
-            <a:ext cx="2560320" cy="256032"/>
-          </a:xfrm>
-          <a:prstGeom prst="rect">
-            <a:avLst/>
-          </a:prstGeom>
-          <a:noFill/>
-        </p:spPr>
-        <p:txBody>
-          <a:bodyPr wrap="none" lIns="36576" tIns="36576" rIns="36576" bIns="36576" anchor="ctr">
-            <a:spAutoFit/>
-          </a:bodyPr>
-          <a:lstStyle/>
-          <a:p>
-            <a:pPr algn="l"/>
-            <a:r>
-              <a:rPr sz="1000" b="1">
-                <a:solidFill>
-                  <a:srgbClr val="0D8AA6"/>
-                </a:solidFill>
-                <a:latin typeface="Aptos"/>
-              </a:rPr>
-              <a:t>PART II · E2E</a:t>
-            </a:r>
-            <a:endParaRPr sz="1000" b="1">
-              <a:solidFill>
-                <a:srgbClr val="0D8AA6"/>
-              </a:solidFill>
-              <a:latin typeface="Aptos"/>
-            </a:endParaRPr>
-          </a:p>
-        </p:txBody>
-      </p:sp>
-      <p:sp>
-        <p:nvSpPr>
           <p:cNvPr id="4" name="TextBox 3"/>
           <p:cNvSpPr txBox="1"/>
           <p:nvPr/>
@@ -4716,47 +5509,6 @@
           </a:p>
         </p:txBody>
       </p:sp>
-      <p:sp>
-        <p:nvSpPr>
-          <p:cNvPr id="5" name="TextBox 4"/>
-          <p:cNvSpPr txBox="1"/>
-          <p:nvPr/>
-        </p:nvSpPr>
-        <p:spPr>
-          <a:xfrm>
-            <a:off x="530352" y="987552"/>
-            <a:ext cx="10972800" cy="320040"/>
-          </a:xfrm>
-          <a:prstGeom prst="rect">
-            <a:avLst/>
-          </a:prstGeom>
-          <a:noFill/>
-        </p:spPr>
-        <p:txBody>
-          <a:bodyPr wrap="none" lIns="36576" tIns="36576" rIns="36576" bIns="36576" anchor="ctr">
-            <a:spAutoFit/>
-          </a:bodyPr>
-          <a:lstStyle/>
-          <a:p>
-            <a:pPr algn="l"/>
-            <a:r>
-              <a:rPr sz="1200" b="0">
-                <a:solidFill>
-                  <a:srgbClr val="596C85"/>
-                </a:solidFill>
-                <a:latin typeface="Aptos"/>
-              </a:rPr>
-              <a:t>One-second Linux RX+TX samples on the head node</a:t>
-            </a:r>
-            <a:endParaRPr sz="1200" b="0">
-              <a:solidFill>
-                <a:srgbClr val="596C85"/>
-              </a:solidFill>
-              <a:latin typeface="Aptos"/>
-            </a:endParaRPr>
-          </a:p>
-        </p:txBody>
-      </p:sp>
       <p:cxnSp>
         <p:nvCxnSpPr>
           <p:cNvPr id="6" name="Connector 5"/>
@@ -4765,7 +5517,7 @@
         </p:nvCxnSpPr>
         <p:spPr>
           <a:xfrm>
-            <a:off x="530352" y="1307592"/>
+            <a:off x="530352" y="1018032"/>
             <a:ext cx="11128248" cy="0"/>
           </a:xfrm>
           <a:prstGeom prst="line">
@@ -5268,716 +6020,6 @@
                 <a:latin typeface="Aptos"/>
               </a:rPr>
               <a:t>head-node NIC P99</a:t>
-            </a:r>
-            <a:endParaRPr sz="1000" b="0">
-              <a:solidFill>
-                <a:srgbClr val="596C85"/>
-              </a:solidFill>
-              <a:latin typeface="Aptos"/>
-            </a:endParaRPr>
-          </a:p>
-        </p:txBody>
-      </p:sp>
-      <p:sp>
-        <p:nvSpPr>
-          <p:cNvPr id="18" name="TextBox 17"/>
-          <p:cNvSpPr txBox="1"/>
-          <p:nvPr/>
-        </p:nvSpPr>
-        <p:spPr>
-          <a:xfrm>
-            <a:off x="9985248" y="5779008"/>
-            <a:ext cx="1810512" cy="493776"/>
-          </a:xfrm>
-          <a:prstGeom prst="rect">
-            <a:avLst/>
-          </a:prstGeom>
-          <a:noFill/>
-        </p:spPr>
-        <p:txBody>
-          <a:bodyPr wrap="none" lIns="36576" tIns="36576" rIns="36576" bIns="36576" anchor="ctr">
-            <a:spAutoFit/>
-          </a:bodyPr>
-          <a:lstStyle/>
-          <a:p>
-            <a:pPr algn="ctr"/>
-            <a:r>
-              <a:rPr sz="1000" b="1">
-                <a:solidFill>
-                  <a:srgbClr val="162236"/>
-                </a:solidFill>
-                <a:latin typeface="Aptos"/>
-              </a:rPr>
-              <a:t>Less bursty migration traffic leaves more headroom for inference.</a:t>
-            </a:r>
-            <a:endParaRPr sz="1000" b="1">
-              <a:solidFill>
-                <a:srgbClr val="162236"/>
-              </a:solidFill>
-              <a:latin typeface="Aptos"/>
-            </a:endParaRPr>
-          </a:p>
-        </p:txBody>
-      </p:sp>
-    </p:spTree>
-  </p:cSld>
-  <p:clrMapOvr>
-    <a:masterClrMapping/>
-  </p:clrMapOvr>
-</p:sld>
-</file>
-
-<file path=ppt/slides/slide13.xml><?xml version="1.0" encoding="utf-8"?>
-<p:sld xmlns:a="http://schemas.openxmlformats.org/drawingml/2006/main" xmlns:r="http://schemas.openxmlformats.org/officeDocument/2006/relationships" xmlns:p="http://schemas.openxmlformats.org/presentationml/2006/main">
-  <p:cSld>
-    <p:spTree>
-      <p:nvGrpSpPr>
-        <p:cNvPr id="1" name=""/>
-        <p:cNvGrpSpPr/>
-        <p:nvPr/>
-      </p:nvGrpSpPr>
-      <p:grpSpPr/>
-      <p:sp>
-        <p:nvSpPr>
-          <p:cNvPr id="2" name="Rectangle 1"/>
-          <p:cNvSpPr/>
-          <p:nvPr/>
-        </p:nvSpPr>
-        <p:spPr>
-          <a:xfrm>
-            <a:off x="0" y="0"/>
-            <a:ext cx="12191695" cy="6858000"/>
-          </a:xfrm>
-          <a:prstGeom prst="rect">
-            <a:avLst/>
-          </a:prstGeom>
-          <a:solidFill>
-            <a:srgbClr val="F7F9FC"/>
-          </a:solidFill>
-          <a:ln>
-            <a:noFill/>
-          </a:ln>
-        </p:spPr>
-        <p:style>
-          <a:lnRef idx="1">
-            <a:schemeClr val="accent1"/>
-          </a:lnRef>
-          <a:fillRef idx="3">
-            <a:schemeClr val="accent1"/>
-          </a:fillRef>
-          <a:effectRef idx="2">
-            <a:schemeClr val="accent1"/>
-          </a:effectRef>
-          <a:fontRef idx="minor">
-            <a:schemeClr val="lt1"/>
-          </a:fontRef>
-        </p:style>
-        <p:txBody>
-          <a:bodyPr rtlCol="0" anchor="ctr"/>
-          <a:lstStyle/>
-          <a:p>
-            <a:pPr algn="ctr"/>
-          </a:p>
-        </p:txBody>
-      </p:sp>
-      <p:sp>
-        <p:nvSpPr>
-          <p:cNvPr id="3" name="TextBox 2"/>
-          <p:cNvSpPr txBox="1"/>
-          <p:nvPr/>
-        </p:nvSpPr>
-        <p:spPr>
-          <a:xfrm>
-            <a:off x="502920" y="210312"/>
-            <a:ext cx="2560320" cy="256032"/>
-          </a:xfrm>
-          <a:prstGeom prst="rect">
-            <a:avLst/>
-          </a:prstGeom>
-          <a:noFill/>
-        </p:spPr>
-        <p:txBody>
-          <a:bodyPr wrap="none" lIns="36576" tIns="36576" rIns="36576" bIns="36576" anchor="ctr">
-            <a:spAutoFit/>
-          </a:bodyPr>
-          <a:lstStyle/>
-          <a:p>
-            <a:pPr algn="l"/>
-            <a:r>
-              <a:rPr sz="1000" b="1">
-                <a:solidFill>
-                  <a:srgbClr val="0D8AA6"/>
-                </a:solidFill>
-                <a:latin typeface="Aptos"/>
-              </a:rPr>
-              <a:t>PART II · PROFILING</a:t>
-            </a:r>
-            <a:endParaRPr sz="1000" b="1">
-              <a:solidFill>
-                <a:srgbClr val="0D8AA6"/>
-              </a:solidFill>
-              <a:latin typeface="Aptos"/>
-            </a:endParaRPr>
-          </a:p>
-        </p:txBody>
-      </p:sp>
-      <p:sp>
-        <p:nvSpPr>
-          <p:cNvPr id="4" name="TextBox 3"/>
-          <p:cNvSpPr txBox="1"/>
-          <p:nvPr/>
-        </p:nvSpPr>
-        <p:spPr>
-          <a:xfrm>
-            <a:off x="502920" y="475488"/>
-            <a:ext cx="11155680" cy="566928"/>
-          </a:xfrm>
-          <a:prstGeom prst="rect">
-            <a:avLst/>
-          </a:prstGeom>
-          <a:noFill/>
-        </p:spPr>
-        <p:txBody>
-          <a:bodyPr wrap="none" lIns="36576" tIns="36576" rIns="36576" bIns="36576" anchor="ctr">
-            <a:spAutoFit/>
-          </a:bodyPr>
-          <a:lstStyle/>
-          <a:p>
-            <a:pPr algn="l"/>
-            <a:r>
-              <a:rPr sz="2700" b="1">
-                <a:solidFill>
-                  <a:srgbClr val="162236"/>
-                </a:solidFill>
-                <a:latin typeface="Aptos"/>
-              </a:rPr>
-              <a:t>The optimization pays for itself by a wide margin</a:t>
-            </a:r>
-            <a:endParaRPr sz="2700" b="1">
-              <a:solidFill>
-                <a:srgbClr val="162236"/>
-              </a:solidFill>
-              <a:latin typeface="Aptos"/>
-            </a:endParaRPr>
-          </a:p>
-        </p:txBody>
-      </p:sp>
-      <p:sp>
-        <p:nvSpPr>
-          <p:cNvPr id="5" name="TextBox 4"/>
-          <p:cNvSpPr txBox="1"/>
-          <p:nvPr/>
-        </p:nvSpPr>
-        <p:spPr>
-          <a:xfrm>
-            <a:off x="530352" y="987552"/>
-            <a:ext cx="10972800" cy="320040"/>
-          </a:xfrm>
-          <a:prstGeom prst="rect">
-            <a:avLst/>
-          </a:prstGeom>
-          <a:noFill/>
-        </p:spPr>
-        <p:txBody>
-          <a:bodyPr wrap="none" lIns="36576" tIns="36576" rIns="36576" bIns="36576" anchor="ctr">
-            <a:spAutoFit/>
-          </a:bodyPr>
-          <a:lstStyle/>
-          <a:p>
-            <a:pPr algn="l"/>
-            <a:r>
-              <a:rPr sz="1200" b="0">
-                <a:solidFill>
-                  <a:srgbClr val="596C85"/>
-                </a:solidFill>
-                <a:latin typeface="Aptos"/>
-              </a:rPr>
-              <a:t>Profiling cost is compared with the independent clean E2E A/B run</a:t>
-            </a:r>
-            <a:endParaRPr sz="1200" b="0">
-              <a:solidFill>
-                <a:srgbClr val="596C85"/>
-              </a:solidFill>
-              <a:latin typeface="Aptos"/>
-            </a:endParaRPr>
-          </a:p>
-        </p:txBody>
-      </p:sp>
-      <p:cxnSp>
-        <p:nvCxnSpPr>
-          <p:cNvPr id="6" name="Connector 5"/>
-          <p:cNvCxnSpPr/>
-          <p:nvPr/>
-        </p:nvCxnSpPr>
-        <p:spPr>
-          <a:xfrm>
-            <a:off x="530352" y="1307592"/>
-            <a:ext cx="11128248" cy="0"/>
-          </a:xfrm>
-          <a:prstGeom prst="line">
-            <a:avLst/>
-          </a:prstGeom>
-          <a:ln w="12700">
-            <a:solidFill>
-              <a:srgbClr val="D8E2EF"/>
-            </a:solidFill>
-          </a:ln>
-        </p:spPr>
-        <p:style>
-          <a:lnRef idx="2">
-            <a:schemeClr val="accent1"/>
-          </a:lnRef>
-          <a:fillRef idx="0">
-            <a:schemeClr val="accent1"/>
-          </a:fillRef>
-          <a:effectRef idx="1">
-            <a:schemeClr val="accent1"/>
-          </a:effectRef>
-          <a:fontRef idx="minor">
-            <a:schemeClr val="tx1"/>
-          </a:fontRef>
-        </p:style>
-      </p:cxnSp>
-      <p:sp>
-        <p:nvSpPr>
-          <p:cNvPr id="7" name="Rounded Rectangle 6"/>
-          <p:cNvSpPr/>
-          <p:nvPr/>
-        </p:nvSpPr>
-        <p:spPr>
-          <a:xfrm>
-            <a:off x="566928" y="1536192"/>
-            <a:ext cx="8549640" cy="4736592"/>
-          </a:xfrm>
-          <a:prstGeom prst="roundRect">
-            <a:avLst/>
-          </a:prstGeom>
-          <a:solidFill>
-            <a:srgbClr val="FFFFFF"/>
-          </a:solidFill>
-          <a:ln w="12700">
-            <a:solidFill>
-              <a:srgbClr val="139B67"/>
-            </a:solidFill>
-          </a:ln>
-        </p:spPr>
-        <p:style>
-          <a:lnRef idx="1">
-            <a:schemeClr val="accent1"/>
-          </a:lnRef>
-          <a:fillRef idx="3">
-            <a:schemeClr val="accent1"/>
-          </a:fillRef>
-          <a:effectRef idx="2">
-            <a:schemeClr val="accent1"/>
-          </a:effectRef>
-          <a:fontRef idx="minor">
-            <a:schemeClr val="lt1"/>
-          </a:fontRef>
-        </p:style>
-        <p:txBody>
-          <a:bodyPr rtlCol="0" anchor="ctr"/>
-          <a:lstStyle/>
-          <a:p>
-            <a:pPr algn="ctr"/>
-          </a:p>
-        </p:txBody>
-      </p:sp>
-      <p:pic>
-        <p:nvPicPr>
-          <p:cNvPr id="8" name="Picture 7" descr="scheduler_cost_vs_saved.png"/>
-          <p:cNvPicPr>
-            <a:picLocks noChangeAspect="1"/>
-          </p:cNvPicPr>
-          <p:nvPr/>
-        </p:nvPicPr>
-        <p:blipFill>
-          <a:blip r:embed="rId1"/>
-          <a:stretch>
-            <a:fillRect/>
-          </a:stretch>
-        </p:blipFill>
-        <p:spPr>
-          <a:xfrm>
-            <a:off x="1495043" y="1673352"/>
-            <a:ext cx="6693408" cy="4462272"/>
-          </a:xfrm>
-          <a:prstGeom prst="rect">
-            <a:avLst/>
-          </a:prstGeom>
-        </p:spPr>
-      </p:pic>
-      <p:sp>
-        <p:nvSpPr>
-          <p:cNvPr id="9" name="Rounded Rectangle 8"/>
-          <p:cNvSpPr/>
-          <p:nvPr/>
-        </p:nvSpPr>
-        <p:spPr>
-          <a:xfrm>
-            <a:off x="9418320" y="1810512"/>
-            <a:ext cx="2221992" cy="1051560"/>
-          </a:xfrm>
-          <a:prstGeom prst="roundRect">
-            <a:avLst/>
-          </a:prstGeom>
-          <a:solidFill>
-            <a:srgbClr val="FFFFFF"/>
-          </a:solidFill>
-          <a:ln w="12700">
-            <a:solidFill>
-              <a:srgbClr val="D8E2EF"/>
-            </a:solidFill>
-          </a:ln>
-        </p:spPr>
-        <p:style>
-          <a:lnRef idx="1">
-            <a:schemeClr val="accent1"/>
-          </a:lnRef>
-          <a:fillRef idx="3">
-            <a:schemeClr val="accent1"/>
-          </a:fillRef>
-          <a:effectRef idx="2">
-            <a:schemeClr val="accent1"/>
-          </a:effectRef>
-          <a:fontRef idx="minor">
-            <a:schemeClr val="lt1"/>
-          </a:fontRef>
-        </p:style>
-        <p:txBody>
-          <a:bodyPr rtlCol="0" anchor="ctr"/>
-          <a:lstStyle/>
-          <a:p>
-            <a:pPr algn="ctr"/>
-          </a:p>
-        </p:txBody>
-      </p:sp>
-      <p:sp>
-        <p:nvSpPr>
-          <p:cNvPr id="10" name="TextBox 9"/>
-          <p:cNvSpPr txBox="1"/>
-          <p:nvPr/>
-        </p:nvSpPr>
-        <p:spPr>
-          <a:xfrm>
-            <a:off x="9528048" y="1920240"/>
-            <a:ext cx="2002536" cy="429768"/>
-          </a:xfrm>
-          <a:prstGeom prst="rect">
-            <a:avLst/>
-          </a:prstGeom>
-          <a:noFill/>
-        </p:spPr>
-        <p:txBody>
-          <a:bodyPr wrap="none" lIns="36576" tIns="36576" rIns="36576" bIns="36576" anchor="ctr">
-            <a:spAutoFit/>
-          </a:bodyPr>
-          <a:lstStyle/>
-          <a:p>
-            <a:pPr algn="ctr"/>
-            <a:r>
-              <a:rPr sz="2500" b="1">
-                <a:solidFill>
-                  <a:srgbClr val="D77A0B"/>
-                </a:solidFill>
-                <a:latin typeface="Aptos"/>
-              </a:rPr>
-              <a:t>302.081 ms</a:t>
-            </a:r>
-            <a:endParaRPr sz="2500" b="1">
-              <a:solidFill>
-                <a:srgbClr val="D77A0B"/>
-              </a:solidFill>
-              <a:latin typeface="Aptos"/>
-            </a:endParaRPr>
-          </a:p>
-        </p:txBody>
-      </p:sp>
-      <p:sp>
-        <p:nvSpPr>
-          <p:cNvPr id="11" name="TextBox 10"/>
-          <p:cNvSpPr txBox="1"/>
-          <p:nvPr/>
-        </p:nvSpPr>
-        <p:spPr>
-          <a:xfrm>
-            <a:off x="9528048" y="2386584"/>
-            <a:ext cx="2002536" cy="292608"/>
-          </a:xfrm>
-          <a:prstGeom prst="rect">
-            <a:avLst/>
-          </a:prstGeom>
-          <a:noFill/>
-        </p:spPr>
-        <p:txBody>
-          <a:bodyPr wrap="none" lIns="36576" tIns="36576" rIns="36576" bIns="36576" anchor="ctr">
-            <a:spAutoFit/>
-          </a:bodyPr>
-          <a:lstStyle/>
-          <a:p>
-            <a:pPr algn="ctr"/>
-            <a:r>
-              <a:rPr sz="1000" b="0">
-                <a:solidFill>
-                  <a:srgbClr val="596C85"/>
-                </a:solidFill>
-                <a:latin typeface="Aptos"/>
-              </a:rPr>
-              <a:t>worst-rank total scheduler cost</a:t>
-            </a:r>
-            <a:endParaRPr sz="1000" b="0">
-              <a:solidFill>
-                <a:srgbClr val="596C85"/>
-              </a:solidFill>
-              <a:latin typeface="Aptos"/>
-            </a:endParaRPr>
-          </a:p>
-        </p:txBody>
-      </p:sp>
-      <p:sp>
-        <p:nvSpPr>
-          <p:cNvPr id="12" name="Rounded Rectangle 11"/>
-          <p:cNvSpPr/>
-          <p:nvPr/>
-        </p:nvSpPr>
-        <p:spPr>
-          <a:xfrm>
-            <a:off x="9418320" y="3218688"/>
-            <a:ext cx="2221992" cy="1051560"/>
-          </a:xfrm>
-          <a:prstGeom prst="roundRect">
-            <a:avLst/>
-          </a:prstGeom>
-          <a:solidFill>
-            <a:srgbClr val="FFFFFF"/>
-          </a:solidFill>
-          <a:ln w="12700">
-            <a:solidFill>
-              <a:srgbClr val="D8E2EF"/>
-            </a:solidFill>
-          </a:ln>
-        </p:spPr>
-        <p:style>
-          <a:lnRef idx="1">
-            <a:schemeClr val="accent1"/>
-          </a:lnRef>
-          <a:fillRef idx="3">
-            <a:schemeClr val="accent1"/>
-          </a:fillRef>
-          <a:effectRef idx="2">
-            <a:schemeClr val="accent1"/>
-          </a:effectRef>
-          <a:fontRef idx="minor">
-            <a:schemeClr val="lt1"/>
-          </a:fontRef>
-        </p:style>
-        <p:txBody>
-          <a:bodyPr rtlCol="0" anchor="ctr"/>
-          <a:lstStyle/>
-          <a:p>
-            <a:pPr algn="ctr"/>
-          </a:p>
-        </p:txBody>
-      </p:sp>
-      <p:sp>
-        <p:nvSpPr>
-          <p:cNvPr id="13" name="TextBox 12"/>
-          <p:cNvSpPr txBox="1"/>
-          <p:nvPr/>
-        </p:nvSpPr>
-        <p:spPr>
-          <a:xfrm>
-            <a:off x="9528048" y="3328416"/>
-            <a:ext cx="2002536" cy="429768"/>
-          </a:xfrm>
-          <a:prstGeom prst="rect">
-            <a:avLst/>
-          </a:prstGeom>
-          <a:noFill/>
-        </p:spPr>
-        <p:txBody>
-          <a:bodyPr wrap="none" lIns="36576" tIns="36576" rIns="36576" bIns="36576" anchor="ctr">
-            <a:spAutoFit/>
-          </a:bodyPr>
-          <a:lstStyle/>
-          <a:p>
-            <a:pPr algn="ctr"/>
-            <a:r>
-              <a:rPr sz="2500" b="1">
-                <a:solidFill>
-                  <a:srgbClr val="139B67"/>
-                </a:solidFill>
-                <a:latin typeface="Aptos"/>
-              </a:rPr>
-              <a:t>105.932 s</a:t>
-            </a:r>
-            <a:endParaRPr sz="2500" b="1">
-              <a:solidFill>
-                <a:srgbClr val="139B67"/>
-              </a:solidFill>
-              <a:latin typeface="Aptos"/>
-            </a:endParaRPr>
-          </a:p>
-        </p:txBody>
-      </p:sp>
-      <p:sp>
-        <p:nvSpPr>
-          <p:cNvPr id="14" name="TextBox 13"/>
-          <p:cNvSpPr txBox="1"/>
-          <p:nvPr/>
-        </p:nvSpPr>
-        <p:spPr>
-          <a:xfrm>
-            <a:off x="9528048" y="3794760"/>
-            <a:ext cx="2002536" cy="292608"/>
-          </a:xfrm>
-          <a:prstGeom prst="rect">
-            <a:avLst/>
-          </a:prstGeom>
-          <a:noFill/>
-        </p:spPr>
-        <p:txBody>
-          <a:bodyPr wrap="none" lIns="36576" tIns="36576" rIns="36576" bIns="36576" anchor="ctr">
-            <a:spAutoFit/>
-          </a:bodyPr>
-          <a:lstStyle/>
-          <a:p>
-            <a:pPr algn="ctr"/>
-            <a:r>
-              <a:rPr sz="1000" b="0">
-                <a:solidFill>
-                  <a:srgbClr val="596C85"/>
-                </a:solidFill>
-                <a:latin typeface="Aptos"/>
-              </a:rPr>
-              <a:t>serving time saved</a:t>
-            </a:r>
-            <a:endParaRPr sz="1000" b="0">
-              <a:solidFill>
-                <a:srgbClr val="596C85"/>
-              </a:solidFill>
-              <a:latin typeface="Aptos"/>
-            </a:endParaRPr>
-          </a:p>
-        </p:txBody>
-      </p:sp>
-      <p:sp>
-        <p:nvSpPr>
-          <p:cNvPr id="15" name="Rounded Rectangle 14"/>
-          <p:cNvSpPr/>
-          <p:nvPr/>
-        </p:nvSpPr>
-        <p:spPr>
-          <a:xfrm>
-            <a:off x="9418320" y="4626864"/>
-            <a:ext cx="2221992" cy="1051560"/>
-          </a:xfrm>
-          <a:prstGeom prst="roundRect">
-            <a:avLst/>
-          </a:prstGeom>
-          <a:solidFill>
-            <a:srgbClr val="FFFFFF"/>
-          </a:solidFill>
-          <a:ln w="12700">
-            <a:solidFill>
-              <a:srgbClr val="D8E2EF"/>
-            </a:solidFill>
-          </a:ln>
-        </p:spPr>
-        <p:style>
-          <a:lnRef idx="1">
-            <a:schemeClr val="accent1"/>
-          </a:lnRef>
-          <a:fillRef idx="3">
-            <a:schemeClr val="accent1"/>
-          </a:fillRef>
-          <a:effectRef idx="2">
-            <a:schemeClr val="accent1"/>
-          </a:effectRef>
-          <a:fontRef idx="minor">
-            <a:schemeClr val="lt1"/>
-          </a:fontRef>
-        </p:style>
-        <p:txBody>
-          <a:bodyPr rtlCol="0" anchor="ctr"/>
-          <a:lstStyle/>
-          <a:p>
-            <a:pPr algn="ctr"/>
-          </a:p>
-        </p:txBody>
-      </p:sp>
-      <p:sp>
-        <p:nvSpPr>
-          <p:cNvPr id="16" name="TextBox 15"/>
-          <p:cNvSpPr txBox="1"/>
-          <p:nvPr/>
-        </p:nvSpPr>
-        <p:spPr>
-          <a:xfrm>
-            <a:off x="9528048" y="4736592"/>
-            <a:ext cx="2002536" cy="429768"/>
-          </a:xfrm>
-          <a:prstGeom prst="rect">
-            <a:avLst/>
-          </a:prstGeom>
-          <a:noFill/>
-        </p:spPr>
-        <p:txBody>
-          <a:bodyPr wrap="none" lIns="36576" tIns="36576" rIns="36576" bIns="36576" anchor="ctr">
-            <a:spAutoFit/>
-          </a:bodyPr>
-          <a:lstStyle/>
-          <a:p>
-            <a:pPr algn="ctr"/>
-            <a:r>
-              <a:rPr sz="2500" b="1">
-                <a:solidFill>
-                  <a:srgbClr val="0D8AA6"/>
-                </a:solidFill>
-                <a:latin typeface="Aptos"/>
-              </a:rPr>
-              <a:t>0.285%</a:t>
-            </a:r>
-            <a:endParaRPr sz="2500" b="1">
-              <a:solidFill>
-                <a:srgbClr val="0D8AA6"/>
-              </a:solidFill>
-              <a:latin typeface="Aptos"/>
-            </a:endParaRPr>
-          </a:p>
-        </p:txBody>
-      </p:sp>
-      <p:sp>
-        <p:nvSpPr>
-          <p:cNvPr id="17" name="TextBox 16"/>
-          <p:cNvSpPr txBox="1"/>
-          <p:nvPr/>
-        </p:nvSpPr>
-        <p:spPr>
-          <a:xfrm>
-            <a:off x="9528048" y="5202936"/>
-            <a:ext cx="2002536" cy="292608"/>
-          </a:xfrm>
-          <a:prstGeom prst="rect">
-            <a:avLst/>
-          </a:prstGeom>
-          <a:noFill/>
-        </p:spPr>
-        <p:txBody>
-          <a:bodyPr wrap="none" lIns="36576" tIns="36576" rIns="36576" bIns="36576" anchor="ctr">
-            <a:spAutoFit/>
-          </a:bodyPr>
-          <a:lstStyle/>
-          <a:p>
-            <a:pPr algn="ctr"/>
-            <a:r>
-              <a:rPr sz="1000" b="0">
-                <a:solidFill>
-                  <a:srgbClr val="596C85"/>
-                </a:solidFill>
-                <a:latin typeface="Aptos"/>
-              </a:rPr>
-              <a:t>cost / saved time</a:t>
             </a:r>
             <a:endParaRPr sz="1000" b="0">
               <a:solidFill>
@@ -6008,6 +6050,550 @@
       <p:grpSpPr/>
       <p:sp>
         <p:nvSpPr>
+          <p:cNvPr id="4" name="TextBox 3"/>
+          <p:cNvSpPr txBox="1"/>
+          <p:nvPr/>
+        </p:nvSpPr>
+        <p:spPr>
+          <a:xfrm>
+            <a:off x="502920" y="475488"/>
+            <a:ext cx="11155680" cy="566928"/>
+          </a:xfrm>
+          <a:prstGeom prst="rect">
+            <a:avLst/>
+          </a:prstGeom>
+          <a:noFill/>
+        </p:spPr>
+        <p:txBody>
+          <a:bodyPr wrap="none" lIns="36576" tIns="36576" rIns="36576" bIns="36576" anchor="ctr">
+            <a:spAutoFit/>
+          </a:bodyPr>
+          <a:lstStyle/>
+          <a:p>
+            <a:pPr algn="l"/>
+            <a:r>
+              <a:rPr sz="2700" b="1">
+                <a:solidFill>
+                  <a:srgbClr val="162236"/>
+                </a:solidFill>
+                <a:latin typeface="Aptos"/>
+              </a:rPr>
+              <a:t>The optimization pays for itself by a wide margin</a:t>
+            </a:r>
+            <a:endParaRPr sz="2700" b="1">
+              <a:solidFill>
+                <a:srgbClr val="162236"/>
+              </a:solidFill>
+              <a:latin typeface="Aptos"/>
+            </a:endParaRPr>
+          </a:p>
+        </p:txBody>
+      </p:sp>
+      <p:cxnSp>
+        <p:nvCxnSpPr>
+          <p:cNvPr id="6" name="Connector 5"/>
+          <p:cNvCxnSpPr/>
+          <p:nvPr/>
+        </p:nvCxnSpPr>
+        <p:spPr>
+          <a:xfrm>
+            <a:off x="530352" y="1307592"/>
+            <a:ext cx="11128248" cy="0"/>
+          </a:xfrm>
+          <a:prstGeom prst="line">
+            <a:avLst/>
+          </a:prstGeom>
+          <a:ln w="12700">
+            <a:solidFill>
+              <a:srgbClr val="D8E2EF"/>
+            </a:solidFill>
+          </a:ln>
+        </p:spPr>
+        <p:style>
+          <a:lnRef idx="2">
+            <a:schemeClr val="accent1"/>
+          </a:lnRef>
+          <a:fillRef idx="0">
+            <a:schemeClr val="accent1"/>
+          </a:fillRef>
+          <a:effectRef idx="1">
+            <a:schemeClr val="accent1"/>
+          </a:effectRef>
+          <a:fontRef idx="minor">
+            <a:schemeClr val="tx1"/>
+          </a:fontRef>
+        </p:style>
+      </p:cxnSp>
+      <p:sp>
+        <p:nvSpPr>
+          <p:cNvPr id="7" name="Rounded Rectangle 6"/>
+          <p:cNvSpPr/>
+          <p:nvPr/>
+        </p:nvSpPr>
+        <p:spPr>
+          <a:xfrm>
+            <a:off x="566928" y="1536192"/>
+            <a:ext cx="8549640" cy="4736592"/>
+          </a:xfrm>
+          <a:prstGeom prst="roundRect">
+            <a:avLst/>
+          </a:prstGeom>
+          <a:solidFill>
+            <a:srgbClr val="FFFFFF"/>
+          </a:solidFill>
+          <a:ln w="12700">
+            <a:solidFill>
+              <a:srgbClr val="139B67"/>
+            </a:solidFill>
+          </a:ln>
+        </p:spPr>
+        <p:style>
+          <a:lnRef idx="1">
+            <a:schemeClr val="accent1"/>
+          </a:lnRef>
+          <a:fillRef idx="3">
+            <a:schemeClr val="accent1"/>
+          </a:fillRef>
+          <a:effectRef idx="2">
+            <a:schemeClr val="accent1"/>
+          </a:effectRef>
+          <a:fontRef idx="minor">
+            <a:schemeClr val="lt1"/>
+          </a:fontRef>
+        </p:style>
+        <p:txBody>
+          <a:bodyPr rtlCol="0" anchor="ctr"/>
+          <a:lstStyle/>
+          <a:p>
+            <a:pPr algn="ctr"/>
+          </a:p>
+        </p:txBody>
+      </p:sp>
+      <p:pic>
+        <p:nvPicPr>
+          <p:cNvPr id="8" name="Picture 7" descr="scheduler_cost_vs_saved.png"/>
+          <p:cNvPicPr>
+            <a:picLocks noChangeAspect="1"/>
+          </p:cNvPicPr>
+          <p:nvPr/>
+        </p:nvPicPr>
+        <p:blipFill>
+          <a:blip r:embed="rId1"/>
+          <a:stretch>
+            <a:fillRect/>
+          </a:stretch>
+        </p:blipFill>
+        <p:spPr>
+          <a:xfrm>
+            <a:off x="1495043" y="1673352"/>
+            <a:ext cx="6693408" cy="4462272"/>
+          </a:xfrm>
+          <a:prstGeom prst="rect">
+            <a:avLst/>
+          </a:prstGeom>
+        </p:spPr>
+      </p:pic>
+      <p:sp>
+        <p:nvSpPr>
+          <p:cNvPr id="9" name="Rounded Rectangle 8"/>
+          <p:cNvSpPr/>
+          <p:nvPr/>
+        </p:nvSpPr>
+        <p:spPr>
+          <a:xfrm>
+            <a:off x="9418320" y="1810512"/>
+            <a:ext cx="2221992" cy="1051560"/>
+          </a:xfrm>
+          <a:prstGeom prst="roundRect">
+            <a:avLst/>
+          </a:prstGeom>
+          <a:solidFill>
+            <a:srgbClr val="FFFFFF"/>
+          </a:solidFill>
+          <a:ln w="12700">
+            <a:solidFill>
+              <a:srgbClr val="D8E2EF"/>
+            </a:solidFill>
+          </a:ln>
+        </p:spPr>
+        <p:style>
+          <a:lnRef idx="1">
+            <a:schemeClr val="accent1"/>
+          </a:lnRef>
+          <a:fillRef idx="3">
+            <a:schemeClr val="accent1"/>
+          </a:fillRef>
+          <a:effectRef idx="2">
+            <a:schemeClr val="accent1"/>
+          </a:effectRef>
+          <a:fontRef idx="minor">
+            <a:schemeClr val="lt1"/>
+          </a:fontRef>
+        </p:style>
+        <p:txBody>
+          <a:bodyPr rtlCol="0" anchor="ctr"/>
+          <a:lstStyle/>
+          <a:p>
+            <a:pPr algn="ctr"/>
+          </a:p>
+        </p:txBody>
+      </p:sp>
+      <p:sp>
+        <p:nvSpPr>
+          <p:cNvPr id="10" name="TextBox 9"/>
+          <p:cNvSpPr txBox="1"/>
+          <p:nvPr/>
+        </p:nvSpPr>
+        <p:spPr>
+          <a:xfrm>
+            <a:off x="9528048" y="1920240"/>
+            <a:ext cx="2002536" cy="429768"/>
+          </a:xfrm>
+          <a:prstGeom prst="rect">
+            <a:avLst/>
+          </a:prstGeom>
+          <a:noFill/>
+        </p:spPr>
+        <p:txBody>
+          <a:bodyPr wrap="none" lIns="36576" tIns="36576" rIns="36576" bIns="36576" anchor="ctr">
+            <a:spAutoFit/>
+          </a:bodyPr>
+          <a:lstStyle/>
+          <a:p>
+            <a:pPr algn="ctr"/>
+            <a:r>
+              <a:rPr sz="2500" b="1">
+                <a:solidFill>
+                  <a:srgbClr val="D77A0B"/>
+                </a:solidFill>
+                <a:latin typeface="Aptos"/>
+              </a:rPr>
+              <a:t>302.081 ms</a:t>
+            </a:r>
+            <a:endParaRPr sz="2500" b="1">
+              <a:solidFill>
+                <a:srgbClr val="D77A0B"/>
+              </a:solidFill>
+              <a:latin typeface="Aptos"/>
+            </a:endParaRPr>
+          </a:p>
+        </p:txBody>
+      </p:sp>
+      <p:sp>
+        <p:nvSpPr>
+          <p:cNvPr id="11" name="TextBox 10"/>
+          <p:cNvSpPr txBox="1"/>
+          <p:nvPr/>
+        </p:nvSpPr>
+        <p:spPr>
+          <a:xfrm>
+            <a:off x="9528048" y="2386584"/>
+            <a:ext cx="2002536" cy="292608"/>
+          </a:xfrm>
+          <a:prstGeom prst="rect">
+            <a:avLst/>
+          </a:prstGeom>
+          <a:noFill/>
+        </p:spPr>
+        <p:txBody>
+          <a:bodyPr wrap="none" lIns="36576" tIns="36576" rIns="36576" bIns="36576" anchor="ctr">
+            <a:spAutoFit/>
+          </a:bodyPr>
+          <a:lstStyle/>
+          <a:p>
+            <a:pPr algn="ctr"/>
+            <a:r>
+              <a:rPr sz="1000" b="0">
+                <a:solidFill>
+                  <a:srgbClr val="596C85"/>
+                </a:solidFill>
+                <a:latin typeface="Aptos"/>
+              </a:rPr>
+              <a:t>worst-rank total scheduler cost</a:t>
+            </a:r>
+            <a:endParaRPr sz="1000" b="0">
+              <a:solidFill>
+                <a:srgbClr val="596C85"/>
+              </a:solidFill>
+              <a:latin typeface="Aptos"/>
+            </a:endParaRPr>
+          </a:p>
+        </p:txBody>
+      </p:sp>
+      <p:sp>
+        <p:nvSpPr>
+          <p:cNvPr id="12" name="Rounded Rectangle 11"/>
+          <p:cNvSpPr/>
+          <p:nvPr/>
+        </p:nvSpPr>
+        <p:spPr>
+          <a:xfrm>
+            <a:off x="9418320" y="3218688"/>
+            <a:ext cx="2221992" cy="1051560"/>
+          </a:xfrm>
+          <a:prstGeom prst="roundRect">
+            <a:avLst/>
+          </a:prstGeom>
+          <a:solidFill>
+            <a:srgbClr val="FFFFFF"/>
+          </a:solidFill>
+          <a:ln w="12700">
+            <a:solidFill>
+              <a:srgbClr val="D8E2EF"/>
+            </a:solidFill>
+          </a:ln>
+        </p:spPr>
+        <p:style>
+          <a:lnRef idx="1">
+            <a:schemeClr val="accent1"/>
+          </a:lnRef>
+          <a:fillRef idx="3">
+            <a:schemeClr val="accent1"/>
+          </a:fillRef>
+          <a:effectRef idx="2">
+            <a:schemeClr val="accent1"/>
+          </a:effectRef>
+          <a:fontRef idx="minor">
+            <a:schemeClr val="lt1"/>
+          </a:fontRef>
+        </p:style>
+        <p:txBody>
+          <a:bodyPr rtlCol="0" anchor="ctr"/>
+          <a:lstStyle/>
+          <a:p>
+            <a:pPr algn="ctr"/>
+          </a:p>
+        </p:txBody>
+      </p:sp>
+      <p:sp>
+        <p:nvSpPr>
+          <p:cNvPr id="13" name="TextBox 12"/>
+          <p:cNvSpPr txBox="1"/>
+          <p:nvPr/>
+        </p:nvSpPr>
+        <p:spPr>
+          <a:xfrm>
+            <a:off x="9528048" y="3328416"/>
+            <a:ext cx="2002536" cy="429768"/>
+          </a:xfrm>
+          <a:prstGeom prst="rect">
+            <a:avLst/>
+          </a:prstGeom>
+          <a:noFill/>
+        </p:spPr>
+        <p:txBody>
+          <a:bodyPr wrap="none" lIns="36576" tIns="36576" rIns="36576" bIns="36576" anchor="ctr">
+            <a:spAutoFit/>
+          </a:bodyPr>
+          <a:lstStyle/>
+          <a:p>
+            <a:pPr algn="ctr"/>
+            <a:r>
+              <a:rPr sz="2500" b="1">
+                <a:solidFill>
+                  <a:srgbClr val="139B67"/>
+                </a:solidFill>
+                <a:latin typeface="Aptos"/>
+              </a:rPr>
+              <a:t>105.932 s</a:t>
+            </a:r>
+            <a:endParaRPr sz="2500" b="1">
+              <a:solidFill>
+                <a:srgbClr val="139B67"/>
+              </a:solidFill>
+              <a:latin typeface="Aptos"/>
+            </a:endParaRPr>
+          </a:p>
+        </p:txBody>
+      </p:sp>
+      <p:sp>
+        <p:nvSpPr>
+          <p:cNvPr id="14" name="TextBox 13"/>
+          <p:cNvSpPr txBox="1"/>
+          <p:nvPr/>
+        </p:nvSpPr>
+        <p:spPr>
+          <a:xfrm>
+            <a:off x="9528048" y="3794760"/>
+            <a:ext cx="2002536" cy="292608"/>
+          </a:xfrm>
+          <a:prstGeom prst="rect">
+            <a:avLst/>
+          </a:prstGeom>
+          <a:noFill/>
+        </p:spPr>
+        <p:txBody>
+          <a:bodyPr wrap="none" lIns="36576" tIns="36576" rIns="36576" bIns="36576" anchor="ctr">
+            <a:spAutoFit/>
+          </a:bodyPr>
+          <a:lstStyle/>
+          <a:p>
+            <a:pPr algn="ctr"/>
+            <a:r>
+              <a:rPr sz="1000" b="0">
+                <a:solidFill>
+                  <a:srgbClr val="596C85"/>
+                </a:solidFill>
+                <a:latin typeface="Aptos"/>
+              </a:rPr>
+              <a:t>serving time saved</a:t>
+            </a:r>
+            <a:endParaRPr sz="1000" b="0">
+              <a:solidFill>
+                <a:srgbClr val="596C85"/>
+              </a:solidFill>
+              <a:latin typeface="Aptos"/>
+            </a:endParaRPr>
+          </a:p>
+        </p:txBody>
+      </p:sp>
+      <p:sp>
+        <p:nvSpPr>
+          <p:cNvPr id="15" name="Rounded Rectangle 14"/>
+          <p:cNvSpPr/>
+          <p:nvPr/>
+        </p:nvSpPr>
+        <p:spPr>
+          <a:xfrm>
+            <a:off x="9418320" y="4626864"/>
+            <a:ext cx="2221992" cy="1051560"/>
+          </a:xfrm>
+          <a:prstGeom prst="roundRect">
+            <a:avLst/>
+          </a:prstGeom>
+          <a:solidFill>
+            <a:srgbClr val="FFFFFF"/>
+          </a:solidFill>
+          <a:ln w="12700">
+            <a:solidFill>
+              <a:srgbClr val="D8E2EF"/>
+            </a:solidFill>
+          </a:ln>
+        </p:spPr>
+        <p:style>
+          <a:lnRef idx="1">
+            <a:schemeClr val="accent1"/>
+          </a:lnRef>
+          <a:fillRef idx="3">
+            <a:schemeClr val="accent1"/>
+          </a:fillRef>
+          <a:effectRef idx="2">
+            <a:schemeClr val="accent1"/>
+          </a:effectRef>
+          <a:fontRef idx="minor">
+            <a:schemeClr val="lt1"/>
+          </a:fontRef>
+        </p:style>
+        <p:txBody>
+          <a:bodyPr rtlCol="0" anchor="ctr"/>
+          <a:lstStyle/>
+          <a:p>
+            <a:pPr algn="ctr"/>
+          </a:p>
+        </p:txBody>
+      </p:sp>
+      <p:sp>
+        <p:nvSpPr>
+          <p:cNvPr id="16" name="TextBox 15"/>
+          <p:cNvSpPr txBox="1"/>
+          <p:nvPr/>
+        </p:nvSpPr>
+        <p:spPr>
+          <a:xfrm>
+            <a:off x="9528048" y="4736592"/>
+            <a:ext cx="2002536" cy="429768"/>
+          </a:xfrm>
+          <a:prstGeom prst="rect">
+            <a:avLst/>
+          </a:prstGeom>
+          <a:noFill/>
+        </p:spPr>
+        <p:txBody>
+          <a:bodyPr wrap="none" lIns="36576" tIns="36576" rIns="36576" bIns="36576" anchor="ctr">
+            <a:spAutoFit/>
+          </a:bodyPr>
+          <a:lstStyle/>
+          <a:p>
+            <a:pPr algn="ctr"/>
+            <a:r>
+              <a:rPr sz="2500" b="1">
+                <a:solidFill>
+                  <a:srgbClr val="0D8AA6"/>
+                </a:solidFill>
+                <a:latin typeface="Aptos"/>
+              </a:rPr>
+              <a:t>0.285%</a:t>
+            </a:r>
+            <a:endParaRPr sz="2500" b="1">
+              <a:solidFill>
+                <a:srgbClr val="0D8AA6"/>
+              </a:solidFill>
+              <a:latin typeface="Aptos"/>
+            </a:endParaRPr>
+          </a:p>
+        </p:txBody>
+      </p:sp>
+      <p:sp>
+        <p:nvSpPr>
+          <p:cNvPr id="17" name="TextBox 16"/>
+          <p:cNvSpPr txBox="1"/>
+          <p:nvPr/>
+        </p:nvSpPr>
+        <p:spPr>
+          <a:xfrm>
+            <a:off x="9528048" y="5202936"/>
+            <a:ext cx="2002536" cy="292608"/>
+          </a:xfrm>
+          <a:prstGeom prst="rect">
+            <a:avLst/>
+          </a:prstGeom>
+          <a:noFill/>
+        </p:spPr>
+        <p:txBody>
+          <a:bodyPr wrap="none" lIns="36576" tIns="36576" rIns="36576" bIns="36576" anchor="ctr">
+            <a:spAutoFit/>
+          </a:bodyPr>
+          <a:lstStyle/>
+          <a:p>
+            <a:pPr algn="ctr"/>
+            <a:r>
+              <a:rPr sz="1000" b="0">
+                <a:solidFill>
+                  <a:srgbClr val="596C85"/>
+                </a:solidFill>
+                <a:latin typeface="Aptos"/>
+              </a:rPr>
+              <a:t>cost / saved time</a:t>
+            </a:r>
+            <a:endParaRPr sz="1000" b="0">
+              <a:solidFill>
+                <a:srgbClr val="596C85"/>
+              </a:solidFill>
+              <a:latin typeface="Aptos"/>
+            </a:endParaRPr>
+          </a:p>
+        </p:txBody>
+      </p:sp>
+    </p:spTree>
+  </p:cSld>
+  <p:clrMapOvr>
+    <a:masterClrMapping/>
+  </p:clrMapOvr>
+</p:sld>
+</file>
+
+<file path=ppt/slides/slide15.xml><?xml version="1.0" encoding="utf-8"?>
+<p:sld xmlns:a="http://schemas.openxmlformats.org/drawingml/2006/main" xmlns:r="http://schemas.openxmlformats.org/officeDocument/2006/relationships" xmlns:p="http://schemas.openxmlformats.org/presentationml/2006/main">
+  <p:cSld>
+    <p:spTree>
+      <p:nvGrpSpPr>
+        <p:cNvPr id="1" name=""/>
+        <p:cNvGrpSpPr/>
+        <p:nvPr/>
+      </p:nvGrpSpPr>
+      <p:grpSpPr/>
+      <p:sp>
+        <p:nvSpPr>
           <p:cNvPr id="3" name="TextBox 2"/>
           <p:cNvSpPr txBox="1"/>
           <p:nvPr/>
@@ -6237,57 +6823,14 @@
       <p:grpSpPr/>
       <p:sp>
         <p:nvSpPr>
-          <p:cNvPr id="2" name="Rectangle 1"/>
-          <p:cNvSpPr/>
-          <p:nvPr/>
-        </p:nvSpPr>
-        <p:spPr>
-          <a:xfrm>
-            <a:off x="0" y="0"/>
-            <a:ext cx="12191695" cy="6858000"/>
-          </a:xfrm>
-          <a:prstGeom prst="rect">
-            <a:avLst/>
-          </a:prstGeom>
-          <a:solidFill>
-            <a:srgbClr val="F7F9FC"/>
-          </a:solidFill>
-          <a:ln>
-            <a:noFill/>
-          </a:ln>
-        </p:spPr>
-        <p:style>
-          <a:lnRef idx="1">
-            <a:schemeClr val="accent1"/>
-          </a:lnRef>
-          <a:fillRef idx="3">
-            <a:schemeClr val="accent1"/>
-          </a:fillRef>
-          <a:effectRef idx="2">
-            <a:schemeClr val="accent1"/>
-          </a:effectRef>
-          <a:fontRef idx="minor">
-            <a:schemeClr val="lt1"/>
-          </a:fontRef>
-        </p:style>
-        <p:txBody>
-          <a:bodyPr rtlCol="0" anchor="ctr"/>
-          <a:lstStyle/>
-          <a:p>
-            <a:pPr algn="ctr"/>
-          </a:p>
-        </p:txBody>
-      </p:sp>
-      <p:sp>
-        <p:nvSpPr>
           <p:cNvPr id="3" name="TextBox 2"/>
           <p:cNvSpPr txBox="1"/>
           <p:nvPr/>
         </p:nvSpPr>
         <p:spPr>
           <a:xfrm>
-            <a:off x="502920" y="475488"/>
-            <a:ext cx="11155680" cy="566928"/>
+            <a:off x="502920" y="515112"/>
+            <a:ext cx="1260475" cy="487680"/>
           </a:xfrm>
           <a:prstGeom prst="rect">
             <a:avLst/>
@@ -6302,58 +6845,17 @@
           <a:p>
             <a:pPr algn="l"/>
             <a:r>
-              <a:rPr sz="2700" b="1">
+              <a:rPr lang="en-US" altLang="zh-CN" sz="2700" b="1">
                 <a:solidFill>
                   <a:srgbClr val="162236"/>
                 </a:solidFill>
                 <a:latin typeface="Aptos"/>
               </a:rPr>
-              <a:t>Roadmap</a:t>
-            </a:r>
-            <a:endParaRPr sz="2700" b="1">
+              <a:t>Outline</a:t>
+            </a:r>
+            <a:endParaRPr lang="en-US" altLang="zh-CN" sz="2700" b="1">
               <a:solidFill>
                 <a:srgbClr val="162236"/>
-              </a:solidFill>
-              <a:latin typeface="Aptos"/>
-            </a:endParaRPr>
-          </a:p>
-        </p:txBody>
-      </p:sp>
-      <p:sp>
-        <p:nvSpPr>
-          <p:cNvPr id="4" name="TextBox 3"/>
-          <p:cNvSpPr txBox="1"/>
-          <p:nvPr/>
-        </p:nvSpPr>
-        <p:spPr>
-          <a:xfrm>
-            <a:off x="530352" y="987552"/>
-            <a:ext cx="10972800" cy="320040"/>
-          </a:xfrm>
-          <a:prstGeom prst="rect">
-            <a:avLst/>
-          </a:prstGeom>
-          <a:noFill/>
-        </p:spPr>
-        <p:txBody>
-          <a:bodyPr wrap="none" lIns="36576" tIns="36576" rIns="36576" bIns="36576" anchor="ctr">
-            <a:spAutoFit/>
-          </a:bodyPr>
-          <a:lstStyle/>
-          <a:p>
-            <a:pPr algn="l"/>
-            <a:r>
-              <a:rPr sz="1200" b="0">
-                <a:solidFill>
-                  <a:srgbClr val="596C85"/>
-                </a:solidFill>
-                <a:latin typeface="Aptos"/>
-              </a:rPr>
-              <a:t>Two questions: can contention be optimized, and does it help real serving?</a:t>
-            </a:r>
-            <a:endParaRPr sz="1200" b="0">
-              <a:solidFill>
-                <a:srgbClr val="596C85"/>
               </a:solidFill>
               <a:latin typeface="Aptos"/>
             </a:endParaRPr>
@@ -6399,7 +6901,11 @@
         <p:nvSpPr>
           <p:cNvPr id="6" name="Rounded Rectangle 5"/>
           <p:cNvSpPr/>
-          <p:nvPr/>
+          <p:nvPr>
+            <p:custDataLst>
+              <p:tags r:id="rId1"/>
+            </p:custDataLst>
+          </p:nvPr>
         </p:nvSpPr>
         <p:spPr>
           <a:xfrm>
@@ -6444,7 +6950,11 @@
         <p:nvSpPr>
           <p:cNvPr id="7" name="TextBox 6"/>
           <p:cNvSpPr txBox="1"/>
-          <p:nvPr/>
+          <p:nvPr>
+            <p:custDataLst>
+              <p:tags r:id="rId2"/>
+            </p:custDataLst>
+          </p:nvPr>
         </p:nvSpPr>
         <p:spPr>
           <a:xfrm>
@@ -6485,12 +6995,16 @@
         <p:nvSpPr>
           <p:cNvPr id="8" name="TextBox 7"/>
           <p:cNvSpPr txBox="1"/>
-          <p:nvPr/>
-        </p:nvSpPr>
-        <p:spPr>
-          <a:xfrm>
-            <a:off x="1673352" y="1828800"/>
-            <a:ext cx="3886200" cy="384048"/>
+          <p:nvPr>
+            <p:custDataLst>
+              <p:tags r:id="rId3"/>
+            </p:custDataLst>
+          </p:nvPr>
+        </p:nvSpPr>
+        <p:spPr>
+          <a:xfrm>
+            <a:off x="1673352" y="1676972"/>
+            <a:ext cx="2930525" cy="687705"/>
           </a:xfrm>
           <a:prstGeom prst="rect">
             <a:avLst/>
@@ -6505,28 +7019,50 @@
           <a:p>
             <a:pPr algn="l"/>
             <a:r>
-              <a:rPr sz="2000" b="1">
+              <a:rPr lang="en-US" altLang="zh-CN" sz="2000" b="1">
                 <a:solidFill>
                   <a:srgbClr val="162236"/>
                 </a:solidFill>
                 <a:latin typeface="Aptos"/>
               </a:rPr>
-              <a:t>Upstream impact</a:t>
-            </a:r>
-            <a:endParaRPr sz="2000" b="1">
+              <a:t>Research achievement&amp;</a:t>
+            </a:r>
+            <a:endParaRPr lang="en-US" altLang="zh-CN" sz="2000" b="1">
               <a:solidFill>
                 <a:srgbClr val="162236"/>
               </a:solidFill>
               <a:latin typeface="Aptos"/>
             </a:endParaRPr>
           </a:p>
+          <a:p>
+            <a:pPr algn="l"/>
+            <a:r>
+              <a:rPr lang="en-US" altLang="zh-CN" sz="2000" b="1">
+                <a:solidFill>
+                  <a:srgbClr val="162236"/>
+                </a:solidFill>
+                <a:latin typeface="Aptos"/>
+              </a:rPr>
+              <a:t>background</a:t>
+            </a:r>
+            <a:endParaRPr lang="en-US" altLang="zh-CN" sz="2000" b="1">
+              <a:solidFill>
+                <a:srgbClr val="162236"/>
+              </a:solidFill>
+              <a:latin typeface="Aptos"/>
+            </a:endParaRPr>
+          </a:p>
         </p:txBody>
       </p:sp>
       <p:sp>
         <p:nvSpPr>
           <p:cNvPr id="9" name="TextBox 8"/>
           <p:cNvSpPr txBox="1"/>
-          <p:nvPr/>
+          <p:nvPr>
+            <p:custDataLst>
+              <p:tags r:id="rId4"/>
+            </p:custDataLst>
+          </p:nvPr>
         </p:nvSpPr>
         <p:spPr>
           <a:xfrm>
@@ -6567,7 +7103,11 @@
         <p:nvSpPr>
           <p:cNvPr id="10" name="Rounded Rectangle 9"/>
           <p:cNvSpPr/>
-          <p:nvPr/>
+          <p:nvPr>
+            <p:custDataLst>
+              <p:tags r:id="rId5"/>
+            </p:custDataLst>
+          </p:nvPr>
         </p:nvSpPr>
         <p:spPr>
           <a:xfrm>
@@ -6612,7 +7152,11 @@
         <p:nvSpPr>
           <p:cNvPr id="11" name="TextBox 10"/>
           <p:cNvSpPr txBox="1"/>
-          <p:nvPr/>
+          <p:nvPr>
+            <p:custDataLst>
+              <p:tags r:id="rId6"/>
+            </p:custDataLst>
+          </p:nvPr>
         </p:nvSpPr>
         <p:spPr>
           <a:xfrm>
@@ -6653,7 +7197,11 @@
         <p:nvSpPr>
           <p:cNvPr id="12" name="TextBox 11"/>
           <p:cNvSpPr txBox="1"/>
-          <p:nvPr/>
+          <p:nvPr>
+            <p:custDataLst>
+              <p:tags r:id="rId7"/>
+            </p:custDataLst>
+          </p:nvPr>
         </p:nvSpPr>
         <p:spPr>
           <a:xfrm>
@@ -6694,12 +7242,16 @@
         <p:nvSpPr>
           <p:cNvPr id="13" name="TextBox 12"/>
           <p:cNvSpPr txBox="1"/>
-          <p:nvPr/>
-        </p:nvSpPr>
-        <p:spPr>
-          <a:xfrm>
-            <a:off x="7342632" y="2322576"/>
-            <a:ext cx="3886200" cy="347472"/>
+          <p:nvPr>
+            <p:custDataLst>
+              <p:tags r:id="rId8"/>
+            </p:custDataLst>
+          </p:nvPr>
+        </p:nvSpPr>
+        <p:spPr>
+          <a:xfrm>
+            <a:off x="7342632" y="2368042"/>
+            <a:ext cx="1511935" cy="256540"/>
           </a:xfrm>
           <a:prstGeom prst="rect">
             <a:avLst/>
@@ -6720,7 +7272,7 @@
                 </a:solidFill>
                 <a:latin typeface="Aptos"/>
               </a:rPr>
-              <a:t>Theoretical optimum and trade-off</a:t>
+              <a:t>Theoretical optimum </a:t>
             </a:r>
             <a:endParaRPr sz="1200" b="0">
               <a:solidFill>
@@ -6735,7 +7287,11 @@
         <p:nvSpPr>
           <p:cNvPr id="14" name="Rounded Rectangle 13"/>
           <p:cNvSpPr/>
-          <p:nvPr/>
+          <p:nvPr>
+            <p:custDataLst>
+              <p:tags r:id="rId9"/>
+            </p:custDataLst>
+          </p:nvPr>
         </p:nvSpPr>
         <p:spPr>
           <a:xfrm>
@@ -6780,7 +7336,11 @@
         <p:nvSpPr>
           <p:cNvPr id="15" name="TextBox 14"/>
           <p:cNvSpPr txBox="1"/>
-          <p:nvPr/>
+          <p:nvPr>
+            <p:custDataLst>
+              <p:tags r:id="rId10"/>
+            </p:custDataLst>
+          </p:nvPr>
         </p:nvSpPr>
         <p:spPr>
           <a:xfrm>
@@ -6821,7 +7381,11 @@
         <p:nvSpPr>
           <p:cNvPr id="16" name="TextBox 15"/>
           <p:cNvSpPr txBox="1"/>
-          <p:nvPr/>
+          <p:nvPr>
+            <p:custDataLst>
+              <p:tags r:id="rId11"/>
+            </p:custDataLst>
+          </p:nvPr>
         </p:nvSpPr>
         <p:spPr>
           <a:xfrm>
@@ -6862,7 +7426,11 @@
         <p:nvSpPr>
           <p:cNvPr id="17" name="TextBox 16"/>
           <p:cNvSpPr txBox="1"/>
-          <p:nvPr/>
+          <p:nvPr>
+            <p:custDataLst>
+              <p:tags r:id="rId12"/>
+            </p:custDataLst>
+          </p:nvPr>
         </p:nvSpPr>
         <p:spPr>
           <a:xfrm>
@@ -6903,7 +7471,11 @@
         <p:nvSpPr>
           <p:cNvPr id="18" name="Rounded Rectangle 17"/>
           <p:cNvSpPr/>
-          <p:nvPr/>
+          <p:nvPr>
+            <p:custDataLst>
+              <p:tags r:id="rId13"/>
+            </p:custDataLst>
+          </p:nvPr>
         </p:nvSpPr>
         <p:spPr>
           <a:xfrm>
@@ -6948,7 +7520,11 @@
         <p:nvSpPr>
           <p:cNvPr id="19" name="TextBox 18"/>
           <p:cNvSpPr txBox="1"/>
-          <p:nvPr/>
+          <p:nvPr>
+            <p:custDataLst>
+              <p:tags r:id="rId14"/>
+            </p:custDataLst>
+          </p:nvPr>
         </p:nvSpPr>
         <p:spPr>
           <a:xfrm>
@@ -6989,7 +7565,11 @@
         <p:nvSpPr>
           <p:cNvPr id="20" name="TextBox 19"/>
           <p:cNvSpPr txBox="1"/>
-          <p:nvPr/>
+          <p:nvPr>
+            <p:custDataLst>
+              <p:tags r:id="rId15"/>
+            </p:custDataLst>
+          </p:nvPr>
         </p:nvSpPr>
         <p:spPr>
           <a:xfrm>
@@ -7030,7 +7610,11 @@
         <p:nvSpPr>
           <p:cNvPr id="21" name="TextBox 20"/>
           <p:cNvSpPr txBox="1"/>
-          <p:nvPr/>
+          <p:nvPr>
+            <p:custDataLst>
+              <p:tags r:id="rId16"/>
+            </p:custDataLst>
+          </p:nvPr>
         </p:nvSpPr>
         <p:spPr>
           <a:xfrm>
@@ -7085,49 +7669,6 @@
         <p:nvPr/>
       </p:nvGrpSpPr>
       <p:grpSpPr/>
-      <p:sp>
-        <p:nvSpPr>
-          <p:cNvPr id="2" name="Rectangle 1"/>
-          <p:cNvSpPr/>
-          <p:nvPr/>
-        </p:nvSpPr>
-        <p:spPr>
-          <a:xfrm>
-            <a:off x="0" y="0"/>
-            <a:ext cx="12191695" cy="6858000"/>
-          </a:xfrm>
-          <a:prstGeom prst="rect">
-            <a:avLst/>
-          </a:prstGeom>
-          <a:solidFill>
-            <a:srgbClr val="F7F9FC"/>
-          </a:solidFill>
-          <a:ln>
-            <a:noFill/>
-          </a:ln>
-        </p:spPr>
-        <p:style>
-          <a:lnRef idx="1">
-            <a:schemeClr val="accent1"/>
-          </a:lnRef>
-          <a:fillRef idx="3">
-            <a:schemeClr val="accent1"/>
-          </a:fillRef>
-          <a:effectRef idx="2">
-            <a:schemeClr val="accent1"/>
-          </a:effectRef>
-          <a:fontRef idx="minor">
-            <a:schemeClr val="lt1"/>
-          </a:fontRef>
-        </p:style>
-        <p:txBody>
-          <a:bodyPr rtlCol="0" anchor="ctr"/>
-          <a:lstStyle/>
-          <a:p>
-            <a:pPr algn="ctr"/>
-          </a:p>
-        </p:txBody>
-      </p:sp>
       <p:sp>
         <p:nvSpPr>
           <p:cNvPr id="3" name="TextBox 2"/>
@@ -7243,8 +7784,8 @@
         </p:nvSpPr>
         <p:spPr>
           <a:xfrm>
-            <a:off x="9378315" y="2641600"/>
-            <a:ext cx="2331720" cy="1051560"/>
+            <a:off x="6528435" y="5579745"/>
+            <a:ext cx="2331720" cy="732790"/>
           </a:xfrm>
           <a:prstGeom prst="roundRect">
             <a:avLst/>
@@ -7292,7 +7833,7 @@
         </p:nvSpPr>
         <p:spPr>
           <a:xfrm>
-            <a:off x="9522968" y="2751328"/>
+            <a:off x="6638163" y="5731383"/>
             <a:ext cx="2112263" cy="429768"/>
           </a:xfrm>
           <a:prstGeom prst="rect">
@@ -7327,58 +7868,13 @@
       </p:sp>
       <p:sp>
         <p:nvSpPr>
-          <p:cNvPr id="10" name="TextBox 9"/>
-          <p:cNvSpPr txBox="1"/>
-          <p:nvPr>
-            <p:custDataLst>
-              <p:tags r:id="rId5"/>
-            </p:custDataLst>
-          </p:nvPr>
-        </p:nvSpPr>
-        <p:spPr>
-          <a:xfrm>
-            <a:off x="9550908" y="3217672"/>
-            <a:ext cx="2112263" cy="292608"/>
-          </a:xfrm>
-          <a:prstGeom prst="rect">
-            <a:avLst/>
-          </a:prstGeom>
-          <a:noFill/>
-        </p:spPr>
-        <p:txBody>
-          <a:bodyPr wrap="none" lIns="36576" tIns="36576" rIns="36576" bIns="36576" anchor="ctr">
-            <a:spAutoFit/>
-          </a:bodyPr>
-          <a:lstStyle/>
-          <a:p>
-            <a:pPr algn="ctr"/>
-            <a:r>
-              <a:rPr sz="1000" b="0">
-                <a:solidFill>
-                  <a:srgbClr val="596C85"/>
-                </a:solidFill>
-                <a:latin typeface="Aptos"/>
-              </a:rPr>
-              <a:t>into vllm-project/vllm:main</a:t>
-            </a:r>
-            <a:endParaRPr sz="1000" b="0">
-              <a:solidFill>
-                <a:srgbClr val="596C85"/>
-              </a:solidFill>
-              <a:latin typeface="Aptos"/>
-            </a:endParaRPr>
-          </a:p>
-        </p:txBody>
-      </p:sp>
-      <p:sp>
-        <p:nvSpPr>
           <p:cNvPr id="17" name="TextBox 16"/>
           <p:cNvSpPr txBox="1"/>
           <p:nvPr/>
         </p:nvSpPr>
         <p:spPr>
           <a:xfrm>
-            <a:off x="9189593" y="4435983"/>
+            <a:off x="9414383" y="6374003"/>
             <a:ext cx="2578608" cy="310896"/>
           </a:xfrm>
           <a:prstGeom prst="rect">
@@ -7409,6 +7905,135 @@
               </a:solidFill>
               <a:latin typeface="Aptos"/>
               <a:hlinkClick r:id="rId1"/>
+            </a:endParaRPr>
+          </a:p>
+        </p:txBody>
+      </p:sp>
+      <p:sp>
+        <p:nvSpPr>
+          <p:cNvPr id="4" name="文本框 3"/>
+          <p:cNvSpPr txBox="1"/>
+          <p:nvPr/>
+        </p:nvSpPr>
+        <p:spPr>
+          <a:xfrm>
+            <a:off x="9358630" y="2706370"/>
+            <a:ext cx="2578735" cy="2306955"/>
+          </a:xfrm>
+          <a:prstGeom prst="rect">
+            <a:avLst/>
+          </a:prstGeom>
+          <a:noFill/>
+        </p:spPr>
+        <p:txBody>
+          <a:bodyPr wrap="square" rtlCol="0">
+            <a:spAutoFit/>
+          </a:bodyPr>
+          <a:p>
+            <a:r>
+              <a:rPr lang="en-US" altLang="zh-CN" b="1">
+                <a:ln/>
+                <a:solidFill>
+                  <a:schemeClr val="tx1"/>
+                </a:solidFill>
+                <a:effectLst>
+                  <a:outerShdw blurRad="38100" dist="19050" dir="2700000" algn="tl" rotWithShape="0">
+                    <a:schemeClr val="dk1">
+                      <a:alpha val="40000"/>
+                    </a:schemeClr>
+                  </a:outerShdw>
+                </a:effectLst>
+              </a:rPr>
+              <a:t>What problem did I solve?</a:t>
+            </a:r>
+            <a:endParaRPr lang="en-US" altLang="zh-CN" b="1">
+              <a:ln/>
+              <a:solidFill>
+                <a:schemeClr val="tx1"/>
+              </a:solidFill>
+              <a:effectLst>
+                <a:outerShdw blurRad="38100" dist="19050" dir="2700000" algn="tl" rotWithShape="0">
+                  <a:schemeClr val="dk1">
+                    <a:alpha val="40000"/>
+                  </a:schemeClr>
+                </a:outerShdw>
+              </a:effectLst>
+            </a:endParaRPr>
+          </a:p>
+          <a:p>
+            <a:endParaRPr lang="en-US" altLang="zh-CN">
+              <a:ln/>
+              <a:solidFill>
+                <a:schemeClr val="accent1"/>
+              </a:solidFill>
+              <a:effectLst>
+                <a:outerShdw blurRad="38100" dist="25400" dir="5400000" algn="ctr" rotWithShape="0">
+                  <a:srgbClr val="6E747A">
+                    <a:alpha val="43000"/>
+                  </a:srgbClr>
+                </a:outerShdw>
+              </a:effectLst>
+            </a:endParaRPr>
+          </a:p>
+          <a:p>
+            <a:r>
+              <a:rPr lang="en-US" altLang="zh-CN">
+                <a:ln/>
+                <a:solidFill>
+                  <a:schemeClr val="accent1"/>
+                </a:solidFill>
+                <a:effectLst>
+                  <a:outerShdw blurRad="38100" dist="25400" dir="5400000" algn="ctr" rotWithShape="0">
+                    <a:srgbClr val="6E747A">
+                      <a:alpha val="43000"/>
+                    </a:srgbClr>
+                  </a:outerShdw>
+                </a:effectLst>
+              </a:rPr>
+              <a:t>Accelerated inference by reducing network contention during expert migration.</a:t>
+            </a:r>
+            <a:endParaRPr lang="en-US" altLang="zh-CN">
+              <a:ln/>
+              <a:solidFill>
+                <a:schemeClr val="accent1"/>
+              </a:solidFill>
+              <a:effectLst>
+                <a:outerShdw blurRad="38100" dist="25400" dir="5400000" algn="ctr" rotWithShape="0">
+                  <a:srgbClr val="6E747A">
+                    <a:alpha val="43000"/>
+                  </a:srgbClr>
+                </a:outerShdw>
+              </a:effectLst>
+            </a:endParaRPr>
+          </a:p>
+          <a:p>
+            <a:endParaRPr lang="en-US" altLang="zh-CN">
+              <a:ln/>
+              <a:solidFill>
+                <a:schemeClr val="accent1"/>
+              </a:solidFill>
+              <a:effectLst>
+                <a:outerShdw blurRad="38100" dist="25400" dir="5400000" algn="ctr" rotWithShape="0">
+                  <a:srgbClr val="6E747A">
+                    <a:alpha val="43000"/>
+                  </a:srgbClr>
+                </a:outerShdw>
+              </a:effectLst>
+            </a:endParaRPr>
+          </a:p>
+          <a:p>
+            <a:endParaRPr lang="en-US" altLang="zh-CN">
+              <a:ln/>
+              <a:solidFill>
+                <a:schemeClr val="accent1"/>
+              </a:solidFill>
+              <a:effectLst>
+                <a:outerShdw blurRad="38100" dist="25400" dir="5400000" algn="ctr" rotWithShape="0">
+                  <a:srgbClr val="6E747A">
+                    <a:alpha val="43000"/>
+                  </a:srgbClr>
+                </a:outerShdw>
+              </a:effectLst>
             </a:endParaRPr>
           </a:p>
         </p:txBody>
@@ -7422,6 +8047,133 @@
 </file>
 
 <file path=ppt/slides/slide4.xml><?xml version="1.0" encoding="utf-8"?>
+<p:sld xmlns:a="http://schemas.openxmlformats.org/drawingml/2006/main" xmlns:r="http://schemas.openxmlformats.org/officeDocument/2006/relationships" xmlns:p="http://schemas.openxmlformats.org/presentationml/2006/main">
+  <p:cSld>
+    <p:spTree>
+      <p:nvGrpSpPr>
+        <p:cNvPr id="1" name=""/>
+        <p:cNvGrpSpPr/>
+        <p:nvPr/>
+      </p:nvGrpSpPr>
+      <p:grpSpPr/>
+      <p:sp>
+        <p:nvSpPr>
+          <p:cNvPr id="3" name="TextBox 2"/>
+          <p:cNvSpPr txBox="1"/>
+          <p:nvPr/>
+        </p:nvSpPr>
+        <p:spPr>
+          <a:xfrm>
+            <a:off x="502920" y="515112"/>
+            <a:ext cx="2870200" cy="487680"/>
+          </a:xfrm>
+          <a:prstGeom prst="rect">
+            <a:avLst/>
+          </a:prstGeom>
+          <a:noFill/>
+        </p:spPr>
+        <p:txBody>
+          <a:bodyPr wrap="none" lIns="36576" tIns="36576" rIns="36576" bIns="36576" anchor="ctr">
+            <a:spAutoFit/>
+          </a:bodyPr>
+          <a:lstStyle/>
+          <a:p>
+            <a:pPr algn="l"/>
+            <a:r>
+              <a:rPr lang="en-US" sz="2700" b="1">
+                <a:solidFill>
+                  <a:srgbClr val="162236"/>
+                </a:solidFill>
+                <a:latin typeface="Aptos"/>
+              </a:rPr>
+              <a:t>Background-</a:t>
+            </a:r>
+            <a:r>
+              <a:rPr lang="en-US" sz="2700" b="1">
+                <a:solidFill>
+                  <a:srgbClr val="162236"/>
+                </a:solidFill>
+                <a:latin typeface="Aptos"/>
+              </a:rPr>
+              <a:t>MoE</a:t>
+            </a:r>
+            <a:endParaRPr lang="en-US" sz="2700" b="1">
+              <a:solidFill>
+                <a:srgbClr val="162236"/>
+              </a:solidFill>
+              <a:latin typeface="Aptos"/>
+            </a:endParaRPr>
+          </a:p>
+        </p:txBody>
+      </p:sp>
+      <p:cxnSp>
+        <p:nvCxnSpPr>
+          <p:cNvPr id="5" name="Connector 4"/>
+          <p:cNvCxnSpPr/>
+          <p:nvPr/>
+        </p:nvCxnSpPr>
+        <p:spPr>
+          <a:xfrm>
+            <a:off x="530352" y="1098042"/>
+            <a:ext cx="11128248" cy="0"/>
+          </a:xfrm>
+          <a:prstGeom prst="line">
+            <a:avLst/>
+          </a:prstGeom>
+          <a:ln w="12700">
+            <a:solidFill>
+              <a:srgbClr val="D8E2EF"/>
+            </a:solidFill>
+          </a:ln>
+        </p:spPr>
+        <p:style>
+          <a:lnRef idx="2">
+            <a:schemeClr val="accent1"/>
+          </a:lnRef>
+          <a:fillRef idx="0">
+            <a:schemeClr val="accent1"/>
+          </a:fillRef>
+          <a:effectRef idx="1">
+            <a:schemeClr val="accent1"/>
+          </a:effectRef>
+          <a:fontRef idx="minor">
+            <a:schemeClr val="tx1"/>
+          </a:fontRef>
+        </p:style>
+      </p:cxnSp>
+      <p:pic>
+        <p:nvPicPr>
+          <p:cNvPr id="2" name="图片 1"/>
+          <p:cNvPicPr>
+            <a:picLocks noChangeAspect="1"/>
+          </p:cNvPicPr>
+          <p:nvPr/>
+        </p:nvPicPr>
+        <p:blipFill>
+          <a:blip r:embed="rId1"/>
+          <a:stretch>
+            <a:fillRect/>
+          </a:stretch>
+        </p:blipFill>
+        <p:spPr>
+          <a:xfrm>
+            <a:off x="1410335" y="1247775"/>
+            <a:ext cx="9254490" cy="5610225"/>
+          </a:xfrm>
+          <a:prstGeom prst="rect">
+            <a:avLst/>
+          </a:prstGeom>
+        </p:spPr>
+      </p:pic>
+    </p:spTree>
+  </p:cSld>
+  <p:clrMapOvr>
+    <a:masterClrMapping/>
+  </p:clrMapOvr>
+</p:sld>
+</file>
+
+<file path=ppt/slides/slide5.xml><?xml version="1.0" encoding="utf-8"?>
 <p:sld xmlns:a="http://schemas.openxmlformats.org/drawingml/2006/main" xmlns:r="http://schemas.openxmlformats.org/officeDocument/2006/relationships" xmlns:p="http://schemas.openxmlformats.org/presentationml/2006/main">
   <p:cSld>
     <p:spTree>
@@ -8206,7 +8958,7 @@
 </p:sld>
 </file>
 
-<file path=ppt/slides/slide5.xml><?xml version="1.0" encoding="utf-8"?>
+<file path=ppt/slides/slide6.xml><?xml version="1.0" encoding="utf-8"?>
 <p:sld xmlns:a="http://schemas.openxmlformats.org/drawingml/2006/main" xmlns:r="http://schemas.openxmlformats.org/officeDocument/2006/relationships" xmlns:p="http://schemas.openxmlformats.org/presentationml/2006/main">
   <p:cSld>
     <p:spTree>
@@ -8216,49 +8968,6 @@
         <p:nvPr/>
       </p:nvGrpSpPr>
       <p:grpSpPr/>
-      <p:sp>
-        <p:nvSpPr>
-          <p:cNvPr id="2" name="Rectangle 1"/>
-          <p:cNvSpPr/>
-          <p:nvPr/>
-        </p:nvSpPr>
-        <p:spPr>
-          <a:xfrm>
-            <a:off x="0" y="0"/>
-            <a:ext cx="12191695" cy="6858000"/>
-          </a:xfrm>
-          <a:prstGeom prst="rect">
-            <a:avLst/>
-          </a:prstGeom>
-          <a:solidFill>
-            <a:srgbClr val="F7F9FC"/>
-          </a:solidFill>
-          <a:ln>
-            <a:noFill/>
-          </a:ln>
-        </p:spPr>
-        <p:style>
-          <a:lnRef idx="1">
-            <a:schemeClr val="accent1"/>
-          </a:lnRef>
-          <a:fillRef idx="3">
-            <a:schemeClr val="accent1"/>
-          </a:fillRef>
-          <a:effectRef idx="2">
-            <a:schemeClr val="accent1"/>
-          </a:effectRef>
-          <a:fontRef idx="minor">
-            <a:schemeClr val="lt1"/>
-          </a:fontRef>
-        </p:style>
-        <p:txBody>
-          <a:bodyPr rtlCol="0" anchor="ctr"/>
-          <a:lstStyle/>
-          <a:p>
-            <a:pPr algn="ctr"/>
-          </a:p>
-        </p:txBody>
-      </p:sp>
       <p:pic>
         <p:nvPicPr>
           <p:cNvPr id="19" name="Picture 9" descr="example_hotspot_links.png"/>
@@ -8283,47 +8992,6 @@
           </a:prstGeom>
         </p:spPr>
       </p:pic>
-      <p:sp>
-        <p:nvSpPr>
-          <p:cNvPr id="20" name="TextBox 2"/>
-          <p:cNvSpPr txBox="1"/>
-          <p:nvPr/>
-        </p:nvSpPr>
-        <p:spPr>
-          <a:xfrm>
-            <a:off x="502920" y="175387"/>
-            <a:ext cx="2560320" cy="256032"/>
-          </a:xfrm>
-          <a:prstGeom prst="rect">
-            <a:avLst/>
-          </a:prstGeom>
-          <a:noFill/>
-        </p:spPr>
-        <p:txBody>
-          <a:bodyPr wrap="none" lIns="36576" tIns="36576" rIns="36576" bIns="36576" anchor="ctr">
-            <a:spAutoFit/>
-          </a:bodyPr>
-          <a:lstStyle/>
-          <a:p>
-            <a:pPr algn="l"/>
-            <a:r>
-              <a:rPr sz="1000" b="1">
-                <a:solidFill>
-                  <a:srgbClr val="0D8AA6"/>
-                </a:solidFill>
-                <a:latin typeface="Aptos"/>
-              </a:rPr>
-              <a:t>PART I · ILP</a:t>
-            </a:r>
-            <a:endParaRPr sz="1000" b="1">
-              <a:solidFill>
-                <a:srgbClr val="0D8AA6"/>
-              </a:solidFill>
-              <a:latin typeface="Aptos"/>
-            </a:endParaRPr>
-          </a:p>
-        </p:txBody>
-      </p:sp>
       <p:sp>
         <p:nvSpPr>
           <p:cNvPr id="21" name="TextBox 3"/>
@@ -8417,7 +9085,7 @@
 </p:sld>
 </file>
 
-<file path=ppt/slides/slide6.xml><?xml version="1.0" encoding="utf-8"?>
+<file path=ppt/slides/slide7.xml><?xml version="1.0" encoding="utf-8"?>
 <p:sld xmlns:a="http://schemas.openxmlformats.org/drawingml/2006/main" xmlns:r="http://schemas.openxmlformats.org/officeDocument/2006/relationships" xmlns:p="http://schemas.openxmlformats.org/presentationml/2006/main">
   <p:cSld>
     <p:spTree>
@@ -8593,7 +9261,7 @@
         </p:blipFill>
         <p:spPr>
           <a:xfrm>
-            <a:off x="128270" y="2835275"/>
+            <a:off x="174625" y="1277620"/>
             <a:ext cx="7173595" cy="1866900"/>
           </a:xfrm>
           <a:prstGeom prst="rect">
@@ -8609,7 +9277,7 @@
         </p:nvSpPr>
         <p:spPr>
           <a:xfrm>
-            <a:off x="7301865" y="3369945"/>
+            <a:off x="7348220" y="1884680"/>
             <a:ext cx="807085" cy="652145"/>
           </a:xfrm>
           <a:prstGeom prst="rightArrow">
@@ -8637,182 +9305,2141 @@
           </a:p>
         </p:txBody>
       </p:sp>
-    </p:spTree>
-  </p:cSld>
-  <p:clrMapOvr>
-    <a:masterClrMapping/>
-  </p:clrMapOvr>
-</p:sld>
-</file>
-
-<file path=ppt/slides/slide7.xml><?xml version="1.0" encoding="utf-8"?>
-<p:sld xmlns:a="http://schemas.openxmlformats.org/drawingml/2006/main" xmlns:r="http://schemas.openxmlformats.org/officeDocument/2006/relationships" xmlns:p="http://schemas.openxmlformats.org/presentationml/2006/main">
-  <p:cSld>
-    <p:spTree>
-      <p:nvGrpSpPr>
-        <p:cNvPr id="1" name=""/>
-        <p:cNvGrpSpPr/>
-        <p:nvPr/>
-      </p:nvGrpSpPr>
-      <p:grpSpPr/>
-      <p:sp>
-        <p:nvSpPr>
-          <p:cNvPr id="3" name="TextBox 2"/>
-          <p:cNvSpPr txBox="1"/>
-          <p:nvPr/>
-        </p:nvSpPr>
-        <p:spPr>
-          <a:xfrm>
-            <a:off x="685800" y="960120"/>
-            <a:ext cx="4114800" cy="320040"/>
-          </a:xfrm>
-          <a:prstGeom prst="rect">
-            <a:avLst/>
-          </a:prstGeom>
-          <a:noFill/>
-        </p:spPr>
-        <p:txBody>
-          <a:bodyPr wrap="none" lIns="36576" tIns="36576" rIns="36576" bIns="36576" anchor="ctr">
-            <a:spAutoFit/>
-          </a:bodyPr>
-          <a:lstStyle/>
-          <a:p>
-            <a:pPr algn="l"/>
-            <a:r>
-              <a:rPr sz="1300" b="1">
-                <a:solidFill>
-                  <a:srgbClr val="139B67"/>
-                </a:solidFill>
-                <a:latin typeface="Aptos"/>
-              </a:rPr>
-              <a:t>PART II</a:t>
-            </a:r>
-            <a:endParaRPr sz="1300" b="1">
-              <a:solidFill>
-                <a:srgbClr val="139B67"/>
-              </a:solidFill>
-              <a:latin typeface="Aptos"/>
-            </a:endParaRPr>
-          </a:p>
-        </p:txBody>
-      </p:sp>
-      <p:sp>
-        <p:nvSpPr>
-          <p:cNvPr id="4" name="TextBox 3"/>
-          <p:cNvSpPr txBox="1"/>
-          <p:nvPr/>
-        </p:nvSpPr>
-        <p:spPr>
-          <a:xfrm>
-            <a:off x="685800" y="1417320"/>
-            <a:ext cx="10607040" cy="1143000"/>
-          </a:xfrm>
-          <a:prstGeom prst="rect">
-            <a:avLst/>
-          </a:prstGeom>
-          <a:noFill/>
-        </p:spPr>
-        <p:txBody>
-          <a:bodyPr wrap="none" lIns="36576" tIns="36576" rIns="36576" bIns="36576" anchor="ctr">
-            <a:spAutoFit/>
-          </a:bodyPr>
-          <a:lstStyle/>
-          <a:p>
-            <a:pPr algn="l"/>
-            <a:r>
-              <a:rPr sz="4200" b="1">
-                <a:solidFill>
-                  <a:srgbClr val="162236"/>
-                </a:solidFill>
-                <a:latin typeface="Aptos"/>
-              </a:rPr>
-              <a:t>Real-system experiments</a:t>
-            </a:r>
-            <a:endParaRPr sz="4200" b="1">
-              <a:solidFill>
-                <a:srgbClr val="162236"/>
-              </a:solidFill>
-              <a:latin typeface="Aptos"/>
-            </a:endParaRPr>
-          </a:p>
-        </p:txBody>
-      </p:sp>
-      <p:sp>
-        <p:nvSpPr>
-          <p:cNvPr id="5" name="TextBox 4"/>
-          <p:cNvSpPr txBox="1"/>
-          <p:nvPr/>
-        </p:nvSpPr>
-        <p:spPr>
-          <a:xfrm>
-            <a:off x="713232" y="2788920"/>
-            <a:ext cx="8961120" cy="685800"/>
-          </a:xfrm>
-          <a:prstGeom prst="rect">
-            <a:avLst/>
-          </a:prstGeom>
-          <a:noFill/>
-        </p:spPr>
-        <p:txBody>
-          <a:bodyPr wrap="none" lIns="36576" tIns="36576" rIns="36576" bIns="36576" anchor="ctr">
-            <a:spAutoFit/>
-          </a:bodyPr>
-          <a:lstStyle/>
-          <a:p>
-            <a:pPr algn="l"/>
-            <a:r>
-              <a:rPr sz="1800" b="0">
-                <a:solidFill>
-                  <a:srgbClr val="596C85"/>
-                </a:solidFill>
-                <a:latin typeface="Aptos"/>
-              </a:rPr>
-              <a:t>E2E serving validates the benefit; Nsight profiling measures the cost.</a:t>
-            </a:r>
-            <a:endParaRPr sz="1800" b="0">
-              <a:solidFill>
-                <a:srgbClr val="596C85"/>
-              </a:solidFill>
-              <a:latin typeface="Aptos"/>
-            </a:endParaRPr>
-          </a:p>
-        </p:txBody>
-      </p:sp>
-      <p:cxnSp>
-        <p:nvCxnSpPr>
-          <p:cNvPr id="6" name="Connector 5"/>
-          <p:cNvCxnSpPr/>
-          <p:nvPr/>
-        </p:nvCxnSpPr>
-        <p:spPr>
-          <a:xfrm>
-            <a:off x="731647" y="3886200"/>
-            <a:ext cx="10030968" cy="0"/>
-          </a:xfrm>
-          <a:prstGeom prst="line">
-            <a:avLst/>
-          </a:prstGeom>
-          <a:ln w="50800">
-            <a:solidFill>
-              <a:srgbClr val="139B67"/>
-            </a:solidFill>
-          </a:ln>
-        </p:spPr>
-        <p:style>
-          <a:lnRef idx="2">
-            <a:schemeClr val="accent1"/>
-          </a:lnRef>
-          <a:fillRef idx="0">
-            <a:schemeClr val="accent1"/>
-          </a:fillRef>
-          <a:effectRef idx="1">
-            <a:schemeClr val="accent1"/>
-          </a:effectRef>
-          <a:fontRef idx="minor">
-            <a:schemeClr val="tx1"/>
-          </a:fontRef>
-        </p:style>
-      </p:cxnSp>
+      <mc:AlternateContent xmlns:mc="http://schemas.openxmlformats.org/markup-compatibility/2006">
+        <mc:Choice xmlns:a14="http://schemas.microsoft.com/office/drawing/2010/main" Requires="a14">
+          <p:sp>
+            <p:nvSpPr>
+              <p:cNvPr id="2" name="文本框 1"/>
+              <p:cNvSpPr txBox="1"/>
+              <p:nvPr/>
+            </p:nvSpPr>
+            <p:spPr>
+              <a:xfrm>
+                <a:off x="174625" y="3875405"/>
+                <a:ext cx="1236345" cy="352425"/>
+              </a:xfrm>
+              <a:prstGeom prst="rect">
+                <a:avLst/>
+              </a:prstGeom>
+              <a:noFill/>
+            </p:spPr>
+            <p:txBody>
+              <a:bodyPr wrap="square" rtlCol="0">
+                <a:noAutofit/>
+              </a:bodyPr>
+              <a:p>
+                <a14:m>
+                  <m:oMathPara xmlns:m="http://schemas.openxmlformats.org/officeDocument/2006/math">
+                    <m:oMathParaPr>
+                      <m:jc m:val="centerGroup"/>
+                    </m:oMathParaPr>
+                    <m:oMath xmlns:m="http://schemas.openxmlformats.org/officeDocument/2006/math">
+                      <m:r>
+                        <a:rPr lang="en-US" altLang="zh-CN" i="1">
+                          <a:latin typeface="Cambria Math" panose="02040503050406030204" charset="0"/>
+                          <a:cs typeface="Cambria Math" panose="02040503050406030204" charset="0"/>
+                        </a:rPr>
+                        <m:t>𝑚𝑖𝑛</m:t>
+                      </m:r>
+                      <m:r>
+                        <a:rPr lang="en-US" altLang="zh-CN" i="1">
+                          <a:latin typeface="Cambria Math" panose="02040503050406030204" charset="0"/>
+                          <a:cs typeface="Cambria Math" panose="02040503050406030204" charset="0"/>
+                        </a:rPr>
+                        <m:t> </m:t>
+                      </m:r>
+                      <m:r>
+                        <a:rPr lang="en-US" altLang="zh-CN" i="1">
+                          <a:latin typeface="Cambria Math" panose="02040503050406030204" charset="0"/>
+                          <a:cs typeface="Cambria Math" panose="02040503050406030204" charset="0"/>
+                        </a:rPr>
+                        <m:t>𝑇</m:t>
+                      </m:r>
+                      <m:r>
+                        <a:rPr lang="en-US" altLang="zh-CN" i="1">
+                          <a:latin typeface="Cambria Math" panose="02040503050406030204" charset="0"/>
+                          <a:cs typeface="Cambria Math" panose="02040503050406030204" charset="0"/>
+                        </a:rPr>
+                        <m:t> </m:t>
+                      </m:r>
+                      <m:r>
+                        <m:rPr>
+                          <m:sty m:val="p"/>
+                        </m:rPr>
+                        <a:rPr lang="en-US" altLang="zh-CN" i="1">
+                          <a:latin typeface="Cambria Math" panose="02040503050406030204" charset="0"/>
+                          <a:cs typeface="Cambria Math" panose="02040503050406030204" charset="0"/>
+                        </a:rPr>
+                        <m:t>infer</m:t>
+                      </m:r>
+                      <m:r>
+                        <a:rPr lang="en-US" altLang="zh-CN" i="1">
+                          <a:latin typeface="Cambria Math" panose="02040503050406030204" charset="0"/>
+                          <a:cs typeface="Cambria Math" panose="02040503050406030204" charset="0"/>
+                        </a:rPr>
+                        <m:t> ​ </m:t>
+                      </m:r>
+                    </m:oMath>
+                  </m:oMathPara>
+                </a14:m>
+                <a:endParaRPr lang="en-US" altLang="zh-CN" i="1">
+                  <a:latin typeface="Cambria Math" panose="02040503050406030204" charset="0"/>
+                  <a:cs typeface="Cambria Math" panose="02040503050406030204" charset="0"/>
+                </a:endParaRPr>
+              </a:p>
+            </p:txBody>
+          </p:sp>
+        </mc:Choice>
+        <mc:Fallback>
+          <p:sp>
+            <p:nvSpPr>
+              <p:cNvPr id="2" name="文本框 1"/>
+              <p:cNvSpPr txBox="1">
+                <a:spLocks noRot="1" noChangeAspect="1" noMove="1" noResize="1" noEditPoints="1" noAdjustHandles="1" noChangeArrowheads="1" noChangeShapeType="1" noTextEdit="1"/>
+              </p:cNvSpPr>
+              <p:nvPr/>
+            </p:nvSpPr>
+            <p:spPr>
+              <a:xfrm>
+                <a:off x="174625" y="3875405"/>
+                <a:ext cx="1236345" cy="352425"/>
+              </a:xfrm>
+              <a:prstGeom prst="rect">
+                <a:avLst/>
+              </a:prstGeom>
+              <a:blipFill rotWithShape="1">
+                <a:blip r:embed="rId3"/>
+                <a:stretch>
+                  <a:fillRect r="-4109"/>
+                </a:stretch>
+              </a:blipFill>
+            </p:spPr>
+            <p:txBody>
+              <a:bodyPr/>
+              <a:lstStyle/>
+              <a:p>
+                <a:r>
+                  <a:rPr lang="zh-CN" altLang="en-US">
+                    <a:noFill/>
+                  </a:rPr>
+                  <a:t> </a:t>
+                </a:r>
+              </a:p>
+            </p:txBody>
+          </p:sp>
+        </mc:Fallback>
+      </mc:AlternateContent>
+      <mc:AlternateContent xmlns:mc="http://schemas.openxmlformats.org/markup-compatibility/2006">
+        <mc:Choice xmlns:a14="http://schemas.microsoft.com/office/drawing/2010/main" Requires="a14">
+          <p:sp>
+            <p:nvSpPr>
+              <p:cNvPr id="11" name="文本框 10"/>
+              <p:cNvSpPr txBox="1"/>
+              <p:nvPr/>
+            </p:nvSpPr>
+            <p:spPr>
+              <a:xfrm>
+                <a:off x="0" y="4227830"/>
+                <a:ext cx="3394710" cy="728980"/>
+              </a:xfrm>
+              <a:prstGeom prst="rect">
+                <a:avLst/>
+              </a:prstGeom>
+              <a:noFill/>
+            </p:spPr>
+            <p:txBody>
+              <a:bodyPr wrap="none" rtlCol="0" anchor="t">
+                <a:noAutofit/>
+              </a:bodyPr>
+              <a:p>
+                <a:pPr algn="l"/>
+                <a14:m>
+                  <m:oMathPara xmlns:m="http://schemas.openxmlformats.org/officeDocument/2006/math">
+                    <m:oMathParaPr>
+                      <m:jc m:val="centerGroup"/>
+                    </m:oMathParaPr>
+                    <m:oMath xmlns:m="http://schemas.openxmlformats.org/officeDocument/2006/math">
+                      <m:borderBox>
+                        <m:borderBoxPr>
+                          <m:ctrlPr>
+                            <a:rPr lang="en-US" altLang="zh-CN" i="1">
+                              <a:latin typeface="Cambria Math" panose="02040503050406030204" charset="0"/>
+                              <a:cs typeface="Cambria Math" panose="02040503050406030204" charset="0"/>
+                            </a:rPr>
+                          </m:ctrlPr>
+                        </m:borderBoxPr>
+                        <m:e>
+                          <m:func>
+                            <m:funcPr>
+                              <m:ctrlPr>
+                                <a:rPr lang="en-US" altLang="zh-CN" i="1">
+                                  <a:latin typeface="Cambria Math" panose="02040503050406030204" charset="0"/>
+                                  <a:cs typeface="Cambria Math" panose="02040503050406030204" charset="0"/>
+                                </a:rPr>
+                              </m:ctrlPr>
+                            </m:funcPr>
+                            <m:fName>
+                              <m:limLow>
+                                <m:limLowPr>
+                                  <m:ctrlPr>
+                                    <a:rPr lang="en-US" altLang="zh-CN">
+                                      <a:latin typeface="Cambria Math" panose="02040503050406030204" charset="0"/>
+                                      <a:cs typeface="Cambria Math" panose="02040503050406030204" charset="0"/>
+                                    </a:rPr>
+                                  </m:ctrlPr>
+                                </m:limLowPr>
+                                <m:e>
+                                  <m:r>
+                                    <a:rPr lang="en-US" altLang="zh-CN">
+                                      <a:latin typeface="Cambria Math" panose="02040503050406030204" charset="0"/>
+                                      <a:cs typeface="Cambria Math" panose="02040503050406030204" charset="0"/>
+                                    </a:rPr>
+                                    <m:t>min</m:t>
+                                  </m:r>
+                                </m:e>
+                                <m:lim/>
+                              </m:limLow>
+                            </m:fName>
+                            <m:e>
+                              <m:sSub>
+                                <m:sSubPr>
+                                  <m:ctrlPr>
+                                    <a:rPr lang="en-US" altLang="zh-CN" i="1">
+                                      <a:latin typeface="Cambria Math" panose="02040503050406030204" charset="0"/>
+                                      <a:cs typeface="Cambria Math" panose="02040503050406030204" charset="0"/>
+                                    </a:rPr>
+                                  </m:ctrlPr>
+                                </m:sSubPr>
+                                <m:e>
+                                  <m:r>
+                                    <a:rPr lang="en-US" altLang="zh-CN" i="1">
+                                      <a:latin typeface="Cambria Math" panose="02040503050406030204" charset="0"/>
+                                      <a:cs typeface="Cambria Math" panose="02040503050406030204" charset="0"/>
+                                    </a:rPr>
+                                    <m:t>𝑇</m:t>
+                                  </m:r>
+                                </m:e>
+                                <m:sub>
+                                  <m:r>
+                                    <a:rPr lang="en-US" altLang="zh-CN" i="1">
+                                      <a:latin typeface="Cambria Math" panose="02040503050406030204" charset="0"/>
+                                      <a:ea typeface="MS Mincho" charset="0"/>
+                                      <a:cs typeface="Cambria Math" panose="02040503050406030204" charset="0"/>
+                                    </a:rPr>
+                                    <m:t>0</m:t>
+                                  </m:r>
+                                </m:sub>
+                              </m:sSub>
+                            </m:e>
+                          </m:func>
+                          <m:d>
+                            <m:dPr>
+                              <m:ctrlPr>
+                                <a:rPr lang="en-US" altLang="zh-CN" i="1">
+                                  <a:latin typeface="Cambria Math" panose="02040503050406030204" charset="0"/>
+                                  <a:cs typeface="Cambria Math" panose="02040503050406030204" charset="0"/>
+                                </a:rPr>
+                              </m:ctrlPr>
+                            </m:dPr>
+                            <m:e>
+                              <m:r>
+                                <a:rPr lang="en-US" altLang="zh-CN" i="1">
+                                  <a:latin typeface="Cambria Math" panose="02040503050406030204" charset="0"/>
+                                  <a:ea typeface="MS Mincho" charset="0"/>
+                                  <a:cs typeface="Cambria Math" panose="02040503050406030204" charset="0"/>
+                                </a:rPr>
+                                <m:t>1+</m:t>
+                              </m:r>
+                              <m:func>
+                                <m:funcPr>
+                                  <m:ctrlPr>
+                                    <a:rPr lang="en-US" altLang="zh-CN" i="1">
+                                      <a:latin typeface="Cambria Math" panose="02040503050406030204" charset="0"/>
+                                      <a:cs typeface="Cambria Math" panose="02040503050406030204" charset="0"/>
+                                    </a:rPr>
+                                  </m:ctrlPr>
+                                </m:funcPr>
+                                <m:fName>
+                                  <m:limLow>
+                                    <m:limLowPr>
+                                      <m:ctrlPr>
+                                        <a:rPr lang="en-US" altLang="zh-CN" i="1">
+                                          <a:latin typeface="Cambria Math" panose="02040503050406030204" charset="0"/>
+                                          <a:cs typeface="Cambria Math" panose="02040503050406030204" charset="0"/>
+                                        </a:rPr>
+                                      </m:ctrlPr>
+                                    </m:limLowPr>
+                                    <m:e>
+                                      <m:r>
+                                        <a:rPr lang="en-US" altLang="zh-CN" i="1">
+                                          <a:latin typeface="Cambria Math" panose="02040503050406030204" charset="0"/>
+                                          <a:cs typeface="Cambria Math" panose="02040503050406030204" charset="0"/>
+                                        </a:rPr>
+                                        <m:t>max</m:t>
+                                      </m:r>
+                                    </m:e>
+                                    <m:lim>
+                                      <m:r>
+                                        <a:rPr lang="en-US" altLang="zh-CN" i="1">
+                                          <a:latin typeface="Cambria Math" panose="02040503050406030204" charset="0"/>
+                                          <a:cs typeface="Cambria Math" panose="02040503050406030204" charset="0"/>
+                                        </a:rPr>
+                                        <m:t>𝑒</m:t>
+                                      </m:r>
+                                      <m:r>
+                                        <a:rPr lang="en-US" altLang="zh-CN" i="1">
+                                          <a:latin typeface="Cambria Math" panose="02040503050406030204" charset="0"/>
+                                          <a:ea typeface="MS Mincho" charset="0"/>
+                                          <a:cs typeface="Cambria Math" panose="02040503050406030204" charset="0"/>
+                                        </a:rPr>
+                                        <m:t>,</m:t>
+                                      </m:r>
+                                      <m:r>
+                                        <a:rPr lang="en-US" altLang="zh-CN" i="1">
+                                          <a:latin typeface="Cambria Math" panose="02040503050406030204" charset="0"/>
+                                          <a:cs typeface="Cambria Math" panose="02040503050406030204" charset="0"/>
+                                        </a:rPr>
+                                        <m:t>𝑏</m:t>
+                                      </m:r>
+                                    </m:lim>
+                                  </m:limLow>
+                                </m:fName>
+                                <m:e>
+                                  <m:f>
+                                    <m:fPr>
+                                      <m:ctrlPr>
+                                        <a:rPr lang="en-US" altLang="zh-CN" i="1">
+                                          <a:latin typeface="Cambria Math" panose="02040503050406030204" charset="0"/>
+                                          <a:cs typeface="Cambria Math" panose="02040503050406030204" charset="0"/>
+                                        </a:rPr>
+                                      </m:ctrlPr>
+                                    </m:fPr>
+                                    <m:num>
+                                      <m:sSub>
+                                        <m:sSubPr>
+                                          <m:ctrlPr>
+                                            <a:rPr lang="en-US" altLang="zh-CN" i="1">
+                                              <a:latin typeface="Cambria Math" panose="02040503050406030204" charset="0"/>
+                                              <a:cs typeface="Cambria Math" panose="02040503050406030204" charset="0"/>
+                                            </a:rPr>
+                                          </m:ctrlPr>
+                                        </m:sSubPr>
+                                        <m:e>
+                                          <m:r>
+                                            <a:rPr lang="en-US" altLang="zh-CN" i="1">
+                                              <a:latin typeface="Cambria Math" panose="02040503050406030204" charset="0"/>
+                                              <a:cs typeface="Cambria Math" panose="02040503050406030204" charset="0"/>
+                                            </a:rPr>
+                                            <m:t>𝐿</m:t>
+                                          </m:r>
+                                        </m:e>
+                                        <m:sub>
+                                          <m:r>
+                                            <a:rPr lang="en-US" altLang="zh-CN" i="1">
+                                              <a:latin typeface="Cambria Math" panose="02040503050406030204" charset="0"/>
+                                              <a:cs typeface="Cambria Math" panose="02040503050406030204" charset="0"/>
+                                            </a:rPr>
+                                            <m:t>𝑒</m:t>
+                                          </m:r>
+                                          <m:r>
+                                            <a:rPr lang="en-US" altLang="zh-CN" i="1">
+                                              <a:latin typeface="Cambria Math" panose="02040503050406030204" charset="0"/>
+                                              <a:ea typeface="MS Mincho" charset="0"/>
+                                              <a:cs typeface="Cambria Math" panose="02040503050406030204" charset="0"/>
+                                            </a:rPr>
+                                            <m:t>,</m:t>
+                                          </m:r>
+                                          <m:r>
+                                            <a:rPr lang="en-US" altLang="zh-CN" i="1">
+                                              <a:latin typeface="Cambria Math" panose="02040503050406030204" charset="0"/>
+                                              <a:cs typeface="Cambria Math" panose="02040503050406030204" charset="0"/>
+                                            </a:rPr>
+                                            <m:t>𝑏</m:t>
+                                          </m:r>
+                                        </m:sub>
+                                      </m:sSub>
+                                    </m:num>
+                                    <m:den>
+                                      <m:sSub>
+                                        <m:sSubPr>
+                                          <m:ctrlPr>
+                                            <a:rPr lang="en-US" altLang="zh-CN" i="1">
+                                              <a:latin typeface="Cambria Math" panose="02040503050406030204" charset="0"/>
+                                              <a:cs typeface="Cambria Math" panose="02040503050406030204" charset="0"/>
+                                            </a:rPr>
+                                          </m:ctrlPr>
+                                        </m:sSubPr>
+                                        <m:e>
+                                          <m:r>
+                                            <a:rPr lang="en-US" altLang="zh-CN" i="1">
+                                              <a:latin typeface="Cambria Math" panose="02040503050406030204" charset="0"/>
+                                              <a:cs typeface="Cambria Math" panose="02040503050406030204" charset="0"/>
+                                            </a:rPr>
+                                            <m:t>𝐶</m:t>
+                                          </m:r>
+                                        </m:e>
+                                        <m:sub>
+                                          <m:r>
+                                            <a:rPr lang="en-US" altLang="zh-CN" i="1">
+                                              <a:latin typeface="Cambria Math" panose="02040503050406030204" charset="0"/>
+                                              <a:cs typeface="Cambria Math" panose="02040503050406030204" charset="0"/>
+                                            </a:rPr>
+                                            <m:t>𝑒</m:t>
+                                          </m:r>
+                                        </m:sub>
+                                      </m:sSub>
+                                      <m:r>
+                                        <a:rPr lang="en-US" altLang="zh-CN" i="1">
+                                          <a:latin typeface="Cambria Math" panose="02040503050406030204" charset="0"/>
+                                          <a:ea typeface="MS Mincho" charset="0"/>
+                                          <a:cs typeface="Cambria Math" panose="02040503050406030204" charset="0"/>
+                                        </a:rPr>
+                                        <m:t>(1−</m:t>
+                                      </m:r>
+                                      <m:r>
+                                        <a:rPr lang="en-US" altLang="zh-CN" i="1">
+                                          <a:latin typeface="Cambria Math" panose="02040503050406030204" charset="0"/>
+                                          <a:ea typeface="MS Mincho" charset="0"/>
+                                          <a:cs typeface="Cambria Math" panose="02040503050406030204" charset="0"/>
+                                        </a:rPr>
+                                        <m:t>𝜌</m:t>
+                                      </m:r>
+                                      <m:r>
+                                        <a:rPr lang="en-US" altLang="zh-CN" i="1">
+                                          <a:latin typeface="Cambria Math" panose="02040503050406030204" charset="0"/>
+                                          <a:ea typeface="MS Mincho" charset="0"/>
+                                          <a:cs typeface="Cambria Math" panose="02040503050406030204" charset="0"/>
+                                        </a:rPr>
+                                        <m:t>)</m:t>
+                                      </m:r>
+                                    </m:den>
+                                  </m:f>
+                                </m:e>
+                              </m:func>
+                            </m:e>
+                          </m:d>
+                        </m:e>
+                      </m:borderBox>
+                    </m:oMath>
+                  </m:oMathPara>
+                </a14:m>
+                <a:endParaRPr lang="en-US" altLang="zh-CN" i="1">
+                  <a:latin typeface="Cambria Math" panose="02040503050406030204" charset="0"/>
+                  <a:cs typeface="Cambria Math" panose="02040503050406030204" charset="0"/>
+                </a:endParaRPr>
+              </a:p>
+            </p:txBody>
+          </p:sp>
+        </mc:Choice>
+        <mc:Fallback>
+          <p:sp>
+            <p:nvSpPr>
+              <p:cNvPr id="11" name="文本框 10"/>
+              <p:cNvSpPr txBox="1">
+                <a:spLocks noRot="1" noChangeAspect="1" noMove="1" noResize="1" noEditPoints="1" noAdjustHandles="1" noChangeArrowheads="1" noChangeShapeType="1" noTextEdit="1"/>
+              </p:cNvSpPr>
+              <p:nvPr/>
+            </p:nvSpPr>
+            <p:spPr>
+              <a:xfrm>
+                <a:off x="0" y="4227830"/>
+                <a:ext cx="3394710" cy="728980"/>
+              </a:xfrm>
+              <a:prstGeom prst="rect">
+                <a:avLst/>
+              </a:prstGeom>
+              <a:blipFill rotWithShape="1">
+                <a:blip r:embed="rId4"/>
+                <a:stretch>
+                  <a:fillRect/>
+                </a:stretch>
+              </a:blipFill>
+            </p:spPr>
+            <p:txBody>
+              <a:bodyPr/>
+              <a:lstStyle/>
+              <a:p>
+                <a:r>
+                  <a:rPr lang="zh-CN" altLang="en-US">
+                    <a:noFill/>
+                  </a:rPr>
+                  <a:t> </a:t>
+                </a:r>
+              </a:p>
+            </p:txBody>
+          </p:sp>
+        </mc:Fallback>
+      </mc:AlternateContent>
+      <mc:AlternateContent xmlns:mc="http://schemas.openxmlformats.org/markup-compatibility/2006">
+        <mc:Choice xmlns:a14="http://schemas.microsoft.com/office/drawing/2010/main" Requires="a14">
+          <p:sp>
+            <p:nvSpPr>
+              <p:cNvPr id="13" name="文本框 12"/>
+              <p:cNvSpPr txBox="1"/>
+              <p:nvPr/>
+            </p:nvSpPr>
+            <p:spPr>
+              <a:xfrm>
+                <a:off x="0" y="5090160"/>
+                <a:ext cx="3256280" cy="606425"/>
+              </a:xfrm>
+              <a:prstGeom prst="rect">
+                <a:avLst/>
+              </a:prstGeom>
+              <a:noFill/>
+            </p:spPr>
+            <p:txBody>
+              <a:bodyPr wrap="none" rtlCol="0" anchor="t">
+                <a:noAutofit/>
+              </a:bodyPr>
+              <a:p>
+                <a:pPr algn="l"/>
+                <a14:m>
+                  <m:oMathPara xmlns:m="http://schemas.openxmlformats.org/officeDocument/2006/math">
+                    <m:oMathParaPr>
+                      <m:jc m:val="centerGroup"/>
+                    </m:oMathParaPr>
+                    <m:oMath xmlns:m="http://schemas.openxmlformats.org/officeDocument/2006/math">
+                      <m:sSub>
+                        <m:sSubPr>
+                          <m:ctrlPr>
+                            <a:rPr lang="en-US" altLang="zh-CN" i="1">
+                              <a:latin typeface="Cambria Math" panose="02040503050406030204" charset="0"/>
+                              <a:cs typeface="Cambria Math" panose="02040503050406030204" charset="0"/>
+                            </a:rPr>
+                          </m:ctrlPr>
+                        </m:sSubPr>
+                        <m:e>
+                          <m:r>
+                            <a:rPr lang="en-US" altLang="zh-CN" i="1">
+                              <a:latin typeface="Cambria Math" panose="02040503050406030204" charset="0"/>
+                              <a:cs typeface="Cambria Math" panose="02040503050406030204" charset="0"/>
+                            </a:rPr>
+                            <m:t>𝐿</m:t>
+                          </m:r>
+                        </m:e>
+                        <m:sub>
+                          <m:r>
+                            <a:rPr lang="en-US" altLang="zh-CN" i="1">
+                              <a:latin typeface="Cambria Math" panose="02040503050406030204" charset="0"/>
+                              <a:cs typeface="Cambria Math" panose="02040503050406030204" charset="0"/>
+                            </a:rPr>
+                            <m:t>𝑒</m:t>
+                          </m:r>
+                          <m:r>
+                            <a:rPr lang="en-US" altLang="zh-CN" i="1">
+                              <a:latin typeface="Cambria Math" panose="02040503050406030204" charset="0"/>
+                              <a:ea typeface="MS Mincho" charset="0"/>
+                              <a:cs typeface="Cambria Math" panose="02040503050406030204" charset="0"/>
+                            </a:rPr>
+                            <m:t>,</m:t>
+                          </m:r>
+                          <m:r>
+                            <a:rPr lang="en-US" altLang="zh-CN" i="1">
+                              <a:latin typeface="Cambria Math" panose="02040503050406030204" charset="0"/>
+                              <a:cs typeface="Cambria Math" panose="02040503050406030204" charset="0"/>
+                            </a:rPr>
+                            <m:t>𝑏</m:t>
+                          </m:r>
+                        </m:sub>
+                      </m:sSub>
+                      <m:r>
+                        <a:rPr lang="en-US" altLang="zh-CN" i="1">
+                          <a:latin typeface="Cambria Math" panose="02040503050406030204" charset="0"/>
+                          <a:ea typeface="MS Mincho" charset="0"/>
+                          <a:cs typeface="Cambria Math" panose="02040503050406030204" charset="0"/>
+                        </a:rPr>
+                        <m:t>=</m:t>
+                      </m:r>
+                      <m:nary>
+                        <m:naryPr>
+                          <m:chr m:val="∑"/>
+                          <m:limLoc m:val="subSup"/>
+                          <m:supHide m:val="on"/>
+                          <m:ctrlPr>
+                            <a:rPr lang="en-US" altLang="zh-CN" i="1">
+                              <a:latin typeface="Cambria Math" panose="02040503050406030204" charset="0"/>
+                              <a:cs typeface="Cambria Math" panose="02040503050406030204" charset="0"/>
+                            </a:rPr>
+                          </m:ctrlPr>
+                        </m:naryPr>
+                        <m:sub>
+                          <m:r>
+                            <a:rPr lang="en-US" altLang="zh-CN" i="1">
+                              <a:latin typeface="Cambria Math" panose="02040503050406030204" charset="0"/>
+                              <a:cs typeface="Cambria Math" panose="02040503050406030204" charset="0"/>
+                            </a:rPr>
+                            <m:t>𝑝</m:t>
+                          </m:r>
+                          <m:r>
+                            <a:rPr lang="en-US" altLang="zh-CN" i="1">
+                              <a:latin typeface="Cambria Math" panose="02040503050406030204" charset="0"/>
+                              <a:ea typeface="MS Mincho" charset="0"/>
+                              <a:cs typeface="Cambria Math" panose="02040503050406030204" charset="0"/>
+                            </a:rPr>
+                            <m:t>∈</m:t>
+                          </m:r>
+                          <m:r>
+                            <a:rPr lang="en-US" altLang="zh-CN" i="1">
+                              <a:latin typeface="Cambria Math" panose="02040503050406030204" charset="0"/>
+                              <a:cs typeface="Cambria Math" panose="02040503050406030204" charset="0"/>
+                            </a:rPr>
+                            <m:t>𝑃</m:t>
+                          </m:r>
+                        </m:sub>
+                        <m:sup/>
+                        <m:e>
+                          <m:sSub>
+                            <m:sSubPr>
+                              <m:ctrlPr>
+                                <a:rPr lang="en-US" altLang="zh-CN" i="1">
+                                  <a:latin typeface="Cambria Math" panose="02040503050406030204" charset="0"/>
+                                  <a:cs typeface="Cambria Math" panose="02040503050406030204" charset="0"/>
+                                </a:rPr>
+                              </m:ctrlPr>
+                            </m:sSubPr>
+                            <m:e>
+                              <m:r>
+                                <a:rPr lang="en-US" altLang="zh-CN" i="1">
+                                  <a:latin typeface="Cambria Math" panose="02040503050406030204" charset="0"/>
+                                  <a:cs typeface="Cambria Math" panose="02040503050406030204" charset="0"/>
+                                </a:rPr>
+                                <m:t>𝑤</m:t>
+                              </m:r>
+                            </m:e>
+                            <m:sub>
+                              <m:r>
+                                <a:rPr lang="en-US" altLang="zh-CN" i="1">
+                                  <a:latin typeface="Cambria Math" panose="02040503050406030204" charset="0"/>
+                                  <a:cs typeface="Cambria Math" panose="02040503050406030204" charset="0"/>
+                                </a:rPr>
+                                <m:t>𝑝</m:t>
+                              </m:r>
+                            </m:sub>
+                          </m:sSub>
+                        </m:e>
+                      </m:nary>
+                      <m:sSub>
+                        <m:sSubPr>
+                          <m:ctrlPr>
+                            <a:rPr lang="en-US" altLang="zh-CN" i="1">
+                              <a:latin typeface="Cambria Math" panose="02040503050406030204" charset="0"/>
+                              <a:cs typeface="Cambria Math" panose="02040503050406030204" charset="0"/>
+                            </a:rPr>
+                          </m:ctrlPr>
+                        </m:sSubPr>
+                        <m:e>
+                          <m:r>
+                            <a:rPr lang="en-US" altLang="zh-CN" i="1">
+                              <a:latin typeface="Cambria Math" panose="02040503050406030204" charset="0"/>
+                              <a:cs typeface="Cambria Math" panose="02040503050406030204" charset="0"/>
+                            </a:rPr>
+                            <m:t>𝑓</m:t>
+                          </m:r>
+                        </m:e>
+                        <m:sub>
+                          <m:r>
+                            <a:rPr lang="en-US" altLang="zh-CN" i="1">
+                              <a:latin typeface="Cambria Math" panose="02040503050406030204" charset="0"/>
+                              <a:cs typeface="Cambria Math" panose="02040503050406030204" charset="0"/>
+                            </a:rPr>
+                            <m:t>𝑝</m:t>
+                          </m:r>
+                          <m:r>
+                            <a:rPr lang="en-US" altLang="zh-CN" i="1">
+                              <a:latin typeface="Cambria Math" panose="02040503050406030204" charset="0"/>
+                              <a:ea typeface="MS Mincho" charset="0"/>
+                              <a:cs typeface="Cambria Math" panose="02040503050406030204" charset="0"/>
+                            </a:rPr>
+                            <m:t>,</m:t>
+                          </m:r>
+                          <m:r>
+                            <a:rPr lang="en-US" altLang="zh-CN" i="1">
+                              <a:latin typeface="Cambria Math" panose="02040503050406030204" charset="0"/>
+                              <a:cs typeface="Cambria Math" panose="02040503050406030204" charset="0"/>
+                            </a:rPr>
+                            <m:t>𝑒</m:t>
+                          </m:r>
+                        </m:sub>
+                      </m:sSub>
+                      <m:sSub>
+                        <m:sSubPr>
+                          <m:ctrlPr>
+                            <a:rPr lang="en-US" altLang="zh-CN" i="1">
+                              <a:latin typeface="Cambria Math" panose="02040503050406030204" charset="0"/>
+                              <a:cs typeface="Cambria Math" panose="02040503050406030204" charset="0"/>
+                            </a:rPr>
+                          </m:ctrlPr>
+                        </m:sSubPr>
+                        <m:e>
+                          <m:r>
+                            <a:rPr lang="en-US" altLang="zh-CN" i="1">
+                              <a:latin typeface="Cambria Math" panose="02040503050406030204" charset="0"/>
+                              <a:cs typeface="Cambria Math" panose="02040503050406030204" charset="0"/>
+                            </a:rPr>
+                            <m:t>𝑥</m:t>
+                          </m:r>
+                        </m:e>
+                        <m:sub>
+                          <m:r>
+                            <a:rPr lang="en-US" altLang="zh-CN" i="1">
+                              <a:latin typeface="Cambria Math" panose="02040503050406030204" charset="0"/>
+                              <a:cs typeface="Cambria Math" panose="02040503050406030204" charset="0"/>
+                            </a:rPr>
+                            <m:t>𝑝</m:t>
+                          </m:r>
+                          <m:r>
+                            <a:rPr lang="en-US" altLang="zh-CN" i="1">
+                              <a:latin typeface="Cambria Math" panose="02040503050406030204" charset="0"/>
+                              <a:ea typeface="MS Mincho" charset="0"/>
+                              <a:cs typeface="Cambria Math" panose="02040503050406030204" charset="0"/>
+                            </a:rPr>
+                            <m:t>,</m:t>
+                          </m:r>
+                          <m:r>
+                            <a:rPr lang="en-US" altLang="zh-CN" i="1">
+                              <a:latin typeface="Cambria Math" panose="02040503050406030204" charset="0"/>
+                              <a:cs typeface="Cambria Math" panose="02040503050406030204" charset="0"/>
+                            </a:rPr>
+                            <m:t>𝑏</m:t>
+                          </m:r>
+                        </m:sub>
+                      </m:sSub>
+                    </m:oMath>
+                  </m:oMathPara>
+                </a14:m>
+                <a:endParaRPr lang="en-US" altLang="zh-CN" i="1">
+                  <a:latin typeface="Cambria Math" panose="02040503050406030204" charset="0"/>
+                  <a:cs typeface="Cambria Math" panose="02040503050406030204" charset="0"/>
+                </a:endParaRPr>
+              </a:p>
+            </p:txBody>
+          </p:sp>
+        </mc:Choice>
+        <mc:Fallback>
+          <p:sp>
+            <p:nvSpPr>
+              <p:cNvPr id="13" name="文本框 12"/>
+              <p:cNvSpPr txBox="1">
+                <a:spLocks noRot="1" noChangeAspect="1" noMove="1" noResize="1" noEditPoints="1" noAdjustHandles="1" noChangeArrowheads="1" noChangeShapeType="1" noTextEdit="1"/>
+              </p:cNvSpPr>
+              <p:nvPr/>
+            </p:nvSpPr>
+            <p:spPr>
+              <a:xfrm>
+                <a:off x="0" y="5090160"/>
+                <a:ext cx="3256280" cy="606425"/>
+              </a:xfrm>
+              <a:prstGeom prst="rect">
+                <a:avLst/>
+              </a:prstGeom>
+              <a:blipFill rotWithShape="1">
+                <a:blip r:embed="rId5"/>
+                <a:stretch>
+                  <a:fillRect/>
+                </a:stretch>
+              </a:blipFill>
+            </p:spPr>
+            <p:txBody>
+              <a:bodyPr/>
+              <a:lstStyle/>
+              <a:p>
+                <a:r>
+                  <a:rPr lang="zh-CN" altLang="en-US">
+                    <a:noFill/>
+                  </a:rPr>
+                  <a:t> </a:t>
+                </a:r>
+              </a:p>
+            </p:txBody>
+          </p:sp>
+        </mc:Fallback>
+      </mc:AlternateContent>
+      <mc:AlternateContent xmlns:mc="http://schemas.openxmlformats.org/markup-compatibility/2006">
+        <mc:Choice xmlns:a14="http://schemas.microsoft.com/office/drawing/2010/main" Requires="a14">
+          <p:sp>
+            <p:nvSpPr>
+              <p:cNvPr id="22" name="文本框 21"/>
+              <p:cNvSpPr txBox="1"/>
+              <p:nvPr/>
+            </p:nvSpPr>
+            <p:spPr>
+              <a:xfrm>
+                <a:off x="3217164" y="3424809"/>
+                <a:ext cx="4714875" cy="352425"/>
+              </a:xfrm>
+              <a:prstGeom prst="rect">
+                <a:avLst/>
+              </a:prstGeom>
+              <a:noFill/>
+            </p:spPr>
+            <p:txBody>
+              <a:bodyPr wrap="none" rtlCol="0" anchor="t">
+                <a:spAutoFit/>
+              </a:bodyPr>
+              <a:p>
+                <a:pPr algn="l"/>
+                <a14:m>
+                  <m:oMathPara xmlns:m="http://schemas.openxmlformats.org/officeDocument/2006/math">
+                    <m:oMathParaPr>
+                      <m:jc m:val="centerGroup"/>
+                    </m:oMathParaPr>
+                    <m:oMath xmlns:m="http://schemas.openxmlformats.org/officeDocument/2006/math">
+                      <m:r>
+                        <a:rPr lang="en-US" altLang="zh-CN" i="1">
+                          <a:latin typeface="Cambria Math" panose="02040503050406030204" charset="0"/>
+                          <a:cs typeface="Cambria Math" panose="02040503050406030204" charset="0"/>
+                        </a:rPr>
+                        <m:t>(</m:t>
+                      </m:r>
+                      <m:sSub>
+                        <m:sSubPr>
+                          <m:ctrlPr>
+                            <a:rPr lang="en-US" altLang="zh-CN" i="1">
+                              <a:latin typeface="Cambria Math" panose="02040503050406030204" charset="0"/>
+                              <a:cs typeface="Cambria Math" panose="02040503050406030204" charset="0"/>
+                            </a:rPr>
+                          </m:ctrlPr>
+                        </m:sSubPr>
+                        <m:e>
+                          <m:r>
+                            <a:rPr lang="en-US" altLang="zh-CN" i="1">
+                              <a:latin typeface="Cambria Math" panose="02040503050406030204" charset="0"/>
+                              <a:cs typeface="Cambria Math" panose="02040503050406030204" charset="0"/>
+                            </a:rPr>
+                            <m:t>𝐿</m:t>
+                          </m:r>
+                        </m:e>
+                        <m:sub>
+                          <m:r>
+                            <a:rPr lang="en-US" altLang="zh-CN" i="1">
+                              <a:latin typeface="Cambria Math" panose="02040503050406030204" charset="0"/>
+                              <a:cs typeface="Cambria Math" panose="02040503050406030204" charset="0"/>
+                            </a:rPr>
+                            <m:t>𝑒</m:t>
+                          </m:r>
+                          <m:r>
+                            <a:rPr lang="en-US" altLang="zh-CN" i="1">
+                              <a:latin typeface="Cambria Math" panose="02040503050406030204" charset="0"/>
+                              <a:cs typeface="Cambria Math" panose="02040503050406030204" charset="0"/>
+                            </a:rPr>
+                            <m:t>,</m:t>
+                          </m:r>
+                          <m:r>
+                            <a:rPr lang="en-US" altLang="zh-CN" i="1">
+                              <a:latin typeface="Cambria Math" panose="02040503050406030204" charset="0"/>
+                              <a:cs typeface="Cambria Math" panose="02040503050406030204" charset="0"/>
+                            </a:rPr>
+                            <m:t>𝑏</m:t>
+                          </m:r>
+                        </m:sub>
+                      </m:sSub>
+                      <m:r>
+                        <a:rPr lang="en-US" altLang="zh-CN" i="1">
+                          <a:latin typeface="Cambria Math" panose="02040503050406030204" charset="0"/>
+                          <a:cs typeface="Cambria Math" panose="02040503050406030204" charset="0"/>
+                        </a:rPr>
+                        <m:t>):</m:t>
+                      </m:r>
+                      <m:r>
+                        <a:rPr lang="en-US" altLang="zh-CN" i="1">
+                          <a:latin typeface="Cambria Math" panose="02040503050406030204" charset="0"/>
+                          <a:cs typeface="Cambria Math" panose="02040503050406030204" charset="0"/>
+                        </a:rPr>
+                        <m:t>𝑚𝑖𝑔𝑟𝑎𝑡𝑖𝑜𝑛</m:t>
+                      </m:r>
+                      <m:r>
+                        <a:rPr lang="en-US" altLang="zh-CN" i="1">
+                          <a:latin typeface="Cambria Math" panose="02040503050406030204" charset="0"/>
+                          <a:cs typeface="Cambria Math" panose="02040503050406030204" charset="0"/>
+                        </a:rPr>
+                        <m:t> </m:t>
+                      </m:r>
+                      <m:r>
+                        <a:rPr lang="en-US" altLang="zh-CN" i="1">
+                          <a:latin typeface="Cambria Math" panose="02040503050406030204" charset="0"/>
+                          <a:cs typeface="Cambria Math" panose="02040503050406030204" charset="0"/>
+                        </a:rPr>
+                        <m:t>𝑙𝑜𝑎𝑑</m:t>
+                      </m:r>
+                      <m:r>
+                        <a:rPr lang="en-US" altLang="zh-CN" i="1">
+                          <a:latin typeface="Cambria Math" panose="02040503050406030204" charset="0"/>
+                          <a:cs typeface="Cambria Math" panose="02040503050406030204" charset="0"/>
+                        </a:rPr>
+                        <m:t> </m:t>
+                      </m:r>
+                      <m:r>
+                        <a:rPr lang="en-US" altLang="zh-CN" i="1">
+                          <a:latin typeface="Cambria Math" panose="02040503050406030204" charset="0"/>
+                          <a:cs typeface="Cambria Math" panose="02040503050406030204" charset="0"/>
+                        </a:rPr>
+                        <m:t>𝑜𝑛</m:t>
+                      </m:r>
+                      <m:r>
+                        <a:rPr lang="en-US" altLang="zh-CN" i="1">
+                          <a:latin typeface="Cambria Math" panose="02040503050406030204" charset="0"/>
+                          <a:cs typeface="Cambria Math" panose="02040503050406030204" charset="0"/>
+                        </a:rPr>
+                        <m:t> </m:t>
+                      </m:r>
+                      <m:r>
+                        <a:rPr lang="en-US" altLang="zh-CN" i="1">
+                          <a:latin typeface="Cambria Math" panose="02040503050406030204" charset="0"/>
+                          <a:cs typeface="Cambria Math" panose="02040503050406030204" charset="0"/>
+                        </a:rPr>
+                        <m:t>𝑙𝑖𝑛𝑘</m:t>
+                      </m:r>
+                      <m:r>
+                        <a:rPr lang="en-US" altLang="zh-CN" i="1">
+                          <a:latin typeface="Cambria Math" panose="02040503050406030204" charset="0"/>
+                          <a:cs typeface="Cambria Math" panose="02040503050406030204" charset="0"/>
+                        </a:rPr>
+                        <m:t>(</m:t>
+                      </m:r>
+                      <m:r>
+                        <a:rPr lang="en-US" altLang="zh-CN" i="1">
+                          <a:latin typeface="Cambria Math" panose="02040503050406030204" charset="0"/>
+                          <a:cs typeface="Cambria Math" panose="02040503050406030204" charset="0"/>
+                        </a:rPr>
+                        <m:t>𝑒</m:t>
+                      </m:r>
+                      <m:r>
+                        <a:rPr lang="en-US" altLang="zh-CN" i="1">
+                          <a:latin typeface="Cambria Math" panose="02040503050406030204" charset="0"/>
+                          <a:cs typeface="Cambria Math" panose="02040503050406030204" charset="0"/>
+                        </a:rPr>
+                        <m:t>) </m:t>
+                      </m:r>
+                      <m:r>
+                        <a:rPr lang="en-US" altLang="zh-CN" i="1">
+                          <a:latin typeface="Cambria Math" panose="02040503050406030204" charset="0"/>
+                          <a:cs typeface="Cambria Math" panose="02040503050406030204" charset="0"/>
+                        </a:rPr>
+                        <m:t>𝑖𝑛</m:t>
+                      </m:r>
+                      <m:r>
+                        <a:rPr lang="en-US" altLang="zh-CN" i="1">
+                          <a:latin typeface="Cambria Math" panose="02040503050406030204" charset="0"/>
+                          <a:cs typeface="Cambria Math" panose="02040503050406030204" charset="0"/>
+                        </a:rPr>
+                        <m:t> </m:t>
+                      </m:r>
+                      <m:r>
+                        <a:rPr lang="en-US" altLang="zh-CN" i="1">
+                          <a:latin typeface="Cambria Math" panose="02040503050406030204" charset="0"/>
+                          <a:cs typeface="Cambria Math" panose="02040503050406030204" charset="0"/>
+                        </a:rPr>
+                        <m:t>𝑏𝑎𝑡𝑐ℎ</m:t>
+                      </m:r>
+                      <m:r>
+                        <a:rPr lang="en-US" altLang="zh-CN" i="1">
+                          <a:latin typeface="Cambria Math" panose="02040503050406030204" charset="0"/>
+                          <a:cs typeface="Cambria Math" panose="02040503050406030204" charset="0"/>
+                        </a:rPr>
+                        <m:t>(</m:t>
+                      </m:r>
+                      <m:r>
+                        <a:rPr lang="en-US" altLang="zh-CN" i="1">
+                          <a:latin typeface="Cambria Math" panose="02040503050406030204" charset="0"/>
+                          <a:cs typeface="Cambria Math" panose="02040503050406030204" charset="0"/>
+                        </a:rPr>
+                        <m:t>𝑏</m:t>
+                      </m:r>
+                      <m:r>
+                        <a:rPr lang="en-US" altLang="zh-CN" i="1">
+                          <a:latin typeface="Cambria Math" panose="02040503050406030204" charset="0"/>
+                          <a:cs typeface="Cambria Math" panose="02040503050406030204" charset="0"/>
+                        </a:rPr>
+                        <m:t>).</m:t>
+                      </m:r>
+                    </m:oMath>
+                  </m:oMathPara>
+                </a14:m>
+                <a:endParaRPr lang="en-US" altLang="zh-CN" i="1">
+                  <a:latin typeface="Cambria Math" panose="02040503050406030204" charset="0"/>
+                  <a:cs typeface="Cambria Math" panose="02040503050406030204" charset="0"/>
+                </a:endParaRPr>
+              </a:p>
+            </p:txBody>
+          </p:sp>
+        </mc:Choice>
+        <mc:Fallback>
+          <p:sp>
+            <p:nvSpPr>
+              <p:cNvPr id="22" name="文本框 21"/>
+              <p:cNvSpPr txBox="1">
+                <a:spLocks noRot="1" noChangeAspect="1" noMove="1" noResize="1" noEditPoints="1" noAdjustHandles="1" noChangeArrowheads="1" noChangeShapeType="1" noTextEdit="1"/>
+              </p:cNvSpPr>
+              <p:nvPr/>
+            </p:nvSpPr>
+            <p:spPr>
+              <a:xfrm>
+                <a:off x="3217164" y="3424809"/>
+                <a:ext cx="4714875" cy="352425"/>
+              </a:xfrm>
+              <a:prstGeom prst="rect">
+                <a:avLst/>
+              </a:prstGeom>
+              <a:blipFill rotWithShape="1">
+                <a:blip r:embed="rId6"/>
+                <a:stretch>
+                  <a:fillRect l="-5" t="-72" r="5" b="72"/>
+                </a:stretch>
+              </a:blipFill>
+            </p:spPr>
+            <p:txBody>
+              <a:bodyPr/>
+              <a:lstStyle/>
+              <a:p>
+                <a:r>
+                  <a:rPr lang="zh-CN" altLang="en-US">
+                    <a:noFill/>
+                  </a:rPr>
+                  <a:t> </a:t>
+                </a:r>
+              </a:p>
+            </p:txBody>
+          </p:sp>
+        </mc:Fallback>
+      </mc:AlternateContent>
+      <mc:AlternateContent xmlns:mc="http://schemas.openxmlformats.org/markup-compatibility/2006">
+        <mc:Choice xmlns:a14="http://schemas.microsoft.com/office/drawing/2010/main" Requires="a14">
+          <p:sp>
+            <p:nvSpPr>
+              <p:cNvPr id="24" name="文本框 23"/>
+              <p:cNvSpPr txBox="1"/>
+              <p:nvPr/>
+            </p:nvSpPr>
+            <p:spPr>
+              <a:xfrm>
+                <a:off x="3186684" y="3808984"/>
+                <a:ext cx="2778125" cy="368300"/>
+              </a:xfrm>
+              <a:prstGeom prst="rect">
+                <a:avLst/>
+              </a:prstGeom>
+              <a:noFill/>
+            </p:spPr>
+            <p:txBody>
+              <a:bodyPr wrap="none" rtlCol="0" anchor="t">
+                <a:spAutoFit/>
+              </a:bodyPr>
+              <a:p>
+                <a:pPr algn="l"/>
+                <a14:m>
+                  <m:oMathPara xmlns:m="http://schemas.openxmlformats.org/officeDocument/2006/math">
+                    <m:oMathParaPr>
+                      <m:jc m:val="centerGroup"/>
+                    </m:oMathParaPr>
+                    <m:oMath xmlns:m="http://schemas.openxmlformats.org/officeDocument/2006/math">
+                      <m:r>
+                        <a:rPr lang="en-US" altLang="zh-CN" i="1">
+                          <a:latin typeface="Cambria Math" panose="02040503050406030204" charset="0"/>
+                          <a:cs typeface="Cambria Math" panose="02040503050406030204" charset="0"/>
+                        </a:rPr>
+                        <m:t>(</m:t>
+                      </m:r>
+                      <m:sSub>
+                        <m:sSubPr>
+                          <m:ctrlPr>
+                            <a:rPr lang="en-US" altLang="zh-CN" i="1">
+                              <a:latin typeface="Cambria Math" panose="02040503050406030204" charset="0"/>
+                              <a:cs typeface="Cambria Math" panose="02040503050406030204" charset="0"/>
+                            </a:rPr>
+                          </m:ctrlPr>
+                        </m:sSubPr>
+                        <m:e>
+                          <m:r>
+                            <a:rPr lang="en-US" altLang="zh-CN" i="1">
+                              <a:latin typeface="Cambria Math" panose="02040503050406030204" charset="0"/>
+                              <a:cs typeface="Cambria Math" panose="02040503050406030204" charset="0"/>
+                            </a:rPr>
+                            <m:t>𝐶</m:t>
+                          </m:r>
+                        </m:e>
+                        <m:sub>
+                          <m:r>
+                            <a:rPr lang="en-US" altLang="zh-CN" i="1">
+                              <a:latin typeface="Cambria Math" panose="02040503050406030204" charset="0"/>
+                              <a:cs typeface="Cambria Math" panose="02040503050406030204" charset="0"/>
+                            </a:rPr>
+                            <m:t>𝑒</m:t>
+                          </m:r>
+                        </m:sub>
+                      </m:sSub>
+                      <m:r>
+                        <a:rPr lang="en-US" altLang="zh-CN" i="1">
+                          <a:latin typeface="Cambria Math" panose="02040503050406030204" charset="0"/>
+                          <a:cs typeface="Cambria Math" panose="02040503050406030204" charset="0"/>
+                        </a:rPr>
+                        <m:t>):</m:t>
+                      </m:r>
+                      <m:r>
+                        <a:rPr lang="en-US" altLang="zh-CN" i="1">
+                          <a:latin typeface="Cambria Math" panose="02040503050406030204" charset="0"/>
+                          <a:cs typeface="Cambria Math" panose="02040503050406030204" charset="0"/>
+                        </a:rPr>
+                        <m:t>𝑐𝑎𝑝𝑎𝑐𝑖𝑡𝑦</m:t>
+                      </m:r>
+                      <m:r>
+                        <a:rPr lang="en-US" altLang="zh-CN" i="1">
+                          <a:latin typeface="Cambria Math" panose="02040503050406030204" charset="0"/>
+                          <a:cs typeface="Cambria Math" panose="02040503050406030204" charset="0"/>
+                        </a:rPr>
+                        <m:t> </m:t>
+                      </m:r>
+                      <m:r>
+                        <a:rPr lang="en-US" altLang="zh-CN" i="1">
+                          <a:latin typeface="Cambria Math" panose="02040503050406030204" charset="0"/>
+                          <a:cs typeface="Cambria Math" panose="02040503050406030204" charset="0"/>
+                        </a:rPr>
+                        <m:t>𝑜𝑓</m:t>
+                      </m:r>
+                      <m:r>
+                        <a:rPr lang="en-US" altLang="zh-CN" i="1">
+                          <a:latin typeface="Cambria Math" panose="02040503050406030204" charset="0"/>
+                          <a:cs typeface="Cambria Math" panose="02040503050406030204" charset="0"/>
+                        </a:rPr>
+                        <m:t> </m:t>
+                      </m:r>
+                      <m:r>
+                        <a:rPr lang="en-US" altLang="zh-CN" i="1">
+                          <a:latin typeface="Cambria Math" panose="02040503050406030204" charset="0"/>
+                          <a:cs typeface="Cambria Math" panose="02040503050406030204" charset="0"/>
+                        </a:rPr>
+                        <m:t>𝑙𝑖𝑛𝑘</m:t>
+                      </m:r>
+                      <m:r>
+                        <a:rPr lang="en-US" altLang="zh-CN" i="1">
+                          <a:latin typeface="Cambria Math" panose="02040503050406030204" charset="0"/>
+                          <a:cs typeface="Cambria Math" panose="02040503050406030204" charset="0"/>
+                        </a:rPr>
+                        <m:t>(</m:t>
+                      </m:r>
+                      <m:r>
+                        <a:rPr lang="en-US" altLang="zh-CN" i="1">
+                          <a:latin typeface="Cambria Math" panose="02040503050406030204" charset="0"/>
+                          <a:cs typeface="Cambria Math" panose="02040503050406030204" charset="0"/>
+                        </a:rPr>
+                        <m:t>𝑒</m:t>
+                      </m:r>
+                      <m:r>
+                        <a:rPr lang="en-US" altLang="zh-CN" i="1">
+                          <a:latin typeface="Cambria Math" panose="02040503050406030204" charset="0"/>
+                          <a:cs typeface="Cambria Math" panose="02040503050406030204" charset="0"/>
+                        </a:rPr>
+                        <m:t>).</m:t>
+                      </m:r>
+                    </m:oMath>
+                  </m:oMathPara>
+                </a14:m>
+                <a:endParaRPr lang="en-US" altLang="zh-CN" i="1">
+                  <a:latin typeface="Cambria Math" panose="02040503050406030204" charset="0"/>
+                  <a:cs typeface="Cambria Math" panose="02040503050406030204" charset="0"/>
+                </a:endParaRPr>
+              </a:p>
+            </p:txBody>
+          </p:sp>
+        </mc:Choice>
+        <mc:Fallback>
+          <p:sp>
+            <p:nvSpPr>
+              <p:cNvPr id="24" name="文本框 23"/>
+              <p:cNvSpPr txBox="1">
+                <a:spLocks noRot="1" noChangeAspect="1" noMove="1" noResize="1" noEditPoints="1" noAdjustHandles="1" noChangeArrowheads="1" noChangeShapeType="1" noTextEdit="1"/>
+              </p:cNvSpPr>
+              <p:nvPr/>
+            </p:nvSpPr>
+            <p:spPr>
+              <a:xfrm>
+                <a:off x="3186684" y="3808984"/>
+                <a:ext cx="2778125" cy="368300"/>
+              </a:xfrm>
+              <a:prstGeom prst="rect">
+                <a:avLst/>
+              </a:prstGeom>
+              <a:blipFill rotWithShape="1">
+                <a:blip r:embed="rId7"/>
+                <a:stretch>
+                  <a:fillRect l="-9" t="-69" r="9" b="69"/>
+                </a:stretch>
+              </a:blipFill>
+            </p:spPr>
+            <p:txBody>
+              <a:bodyPr/>
+              <a:lstStyle/>
+              <a:p>
+                <a:r>
+                  <a:rPr lang="zh-CN" altLang="en-US">
+                    <a:noFill/>
+                  </a:rPr>
+                  <a:t> </a:t>
+                </a:r>
+              </a:p>
+            </p:txBody>
+          </p:sp>
+        </mc:Fallback>
+      </mc:AlternateContent>
+      <mc:AlternateContent xmlns:mc="http://schemas.openxmlformats.org/markup-compatibility/2006">
+        <mc:Choice xmlns:a14="http://schemas.microsoft.com/office/drawing/2010/main" Requires="a14">
+          <p:sp>
+            <p:nvSpPr>
+              <p:cNvPr id="25" name="文本框 24"/>
+              <p:cNvSpPr txBox="1"/>
+              <p:nvPr/>
+            </p:nvSpPr>
+            <p:spPr>
+              <a:xfrm>
+                <a:off x="3239389" y="4524629"/>
+                <a:ext cx="5172710" cy="361950"/>
+              </a:xfrm>
+              <a:prstGeom prst="rect">
+                <a:avLst/>
+              </a:prstGeom>
+              <a:noFill/>
+            </p:spPr>
+            <p:txBody>
+              <a:bodyPr wrap="none" rtlCol="0" anchor="t">
+                <a:spAutoFit/>
+              </a:bodyPr>
+              <a:p>
+                <a:pPr algn="l"/>
+                <a14:m>
+                  <m:oMathPara xmlns:m="http://schemas.openxmlformats.org/officeDocument/2006/math">
+                    <m:oMathParaPr>
+                      <m:jc m:val="centerGroup"/>
+                    </m:oMathParaPr>
+                    <m:oMath xmlns:m="http://schemas.openxmlformats.org/officeDocument/2006/math">
+                      <m:r>
+                        <a:rPr lang="en-US" altLang="zh-CN" i="1">
+                          <a:latin typeface="Cambria Math" panose="02040503050406030204" charset="0"/>
+                          <a:cs typeface="Cambria Math" panose="02040503050406030204" charset="0"/>
+                        </a:rPr>
+                        <m:t>(</m:t>
+                      </m:r>
+                      <m:r>
+                        <a:rPr lang="en-US" altLang="zh-CN" i="1">
+                          <a:latin typeface="Cambria Math" panose="02040503050406030204" charset="0"/>
+                          <a:cs typeface="Cambria Math" panose="02040503050406030204" charset="0"/>
+                        </a:rPr>
+                        <m:t>𝜌</m:t>
+                      </m:r>
+                      <m:r>
+                        <a:rPr lang="en-US" altLang="zh-CN" i="1">
+                          <a:latin typeface="Cambria Math" panose="02040503050406030204" charset="0"/>
+                          <a:cs typeface="Cambria Math" panose="02040503050406030204" charset="0"/>
+                        </a:rPr>
+                        <m:t>):</m:t>
+                      </m:r>
+                      <m:r>
+                        <a:rPr lang="en-US" altLang="zh-CN" i="1">
+                          <a:latin typeface="Cambria Math" panose="02040503050406030204" charset="0"/>
+                          <a:cs typeface="Cambria Math" panose="02040503050406030204" charset="0"/>
+                        </a:rPr>
+                        <m:t>𝑓𝑟𝑎𝑐𝑡𝑖𝑜𝑛</m:t>
+                      </m:r>
+                      <m:r>
+                        <a:rPr lang="en-US" altLang="zh-CN" i="1">
+                          <a:latin typeface="Cambria Math" panose="02040503050406030204" charset="0"/>
+                          <a:cs typeface="Cambria Math" panose="02040503050406030204" charset="0"/>
+                        </a:rPr>
+                        <m:t> </m:t>
+                      </m:r>
+                      <m:r>
+                        <a:rPr lang="en-US" altLang="zh-CN" i="1">
+                          <a:latin typeface="Cambria Math" panose="02040503050406030204" charset="0"/>
+                          <a:cs typeface="Cambria Math" panose="02040503050406030204" charset="0"/>
+                        </a:rPr>
+                        <m:t>𝑜𝑓</m:t>
+                      </m:r>
+                      <m:r>
+                        <a:rPr lang="en-US" altLang="zh-CN" i="1">
+                          <a:latin typeface="Cambria Math" panose="02040503050406030204" charset="0"/>
+                          <a:cs typeface="Cambria Math" panose="02040503050406030204" charset="0"/>
+                        </a:rPr>
+                        <m:t> </m:t>
+                      </m:r>
+                      <m:r>
+                        <a:rPr lang="en-US" altLang="zh-CN" i="1">
+                          <a:latin typeface="Cambria Math" panose="02040503050406030204" charset="0"/>
+                          <a:cs typeface="Cambria Math" panose="02040503050406030204" charset="0"/>
+                        </a:rPr>
+                        <m:t>𝑐𝑎𝑝𝑎𝑐𝑖𝑡𝑦</m:t>
+                      </m:r>
+                      <m:r>
+                        <a:rPr lang="en-US" altLang="zh-CN" i="1">
+                          <a:latin typeface="Cambria Math" panose="02040503050406030204" charset="0"/>
+                          <a:cs typeface="Cambria Math" panose="02040503050406030204" charset="0"/>
+                        </a:rPr>
+                        <m:t> </m:t>
+                      </m:r>
+                      <m:r>
+                        <a:rPr lang="en-US" altLang="zh-CN" i="1">
+                          <a:latin typeface="Cambria Math" panose="02040503050406030204" charset="0"/>
+                          <a:cs typeface="Cambria Math" panose="02040503050406030204" charset="0"/>
+                        </a:rPr>
+                        <m:t>𝑢𝑠𝑒𝑑</m:t>
+                      </m:r>
+                      <m:r>
+                        <a:rPr lang="en-US" altLang="zh-CN" i="1">
+                          <a:latin typeface="Cambria Math" panose="02040503050406030204" charset="0"/>
+                          <a:cs typeface="Cambria Math" panose="02040503050406030204" charset="0"/>
+                        </a:rPr>
+                        <m:t> </m:t>
+                      </m:r>
+                      <m:r>
+                        <a:rPr lang="en-US" altLang="zh-CN" i="1">
+                          <a:latin typeface="Cambria Math" panose="02040503050406030204" charset="0"/>
+                          <a:cs typeface="Cambria Math" panose="02040503050406030204" charset="0"/>
+                        </a:rPr>
+                        <m:t>𝑏𝑦</m:t>
+                      </m:r>
+                      <m:r>
+                        <a:rPr lang="en-US" altLang="zh-CN" i="1">
+                          <a:latin typeface="Cambria Math" panose="02040503050406030204" charset="0"/>
+                          <a:cs typeface="Cambria Math" panose="02040503050406030204" charset="0"/>
+                        </a:rPr>
+                        <m:t> </m:t>
+                      </m:r>
+                      <m:r>
+                        <a:rPr lang="en-US" altLang="zh-CN" i="1">
+                          <a:latin typeface="Cambria Math" panose="02040503050406030204" charset="0"/>
+                          <a:cs typeface="Cambria Math" panose="02040503050406030204" charset="0"/>
+                        </a:rPr>
+                        <m:t>𝑖𝑛𝑓𝑒𝑟𝑒𝑛𝑐𝑒</m:t>
+                      </m:r>
+                      <m:r>
+                        <a:rPr lang="en-US" altLang="zh-CN" i="1">
+                          <a:latin typeface="Cambria Math" panose="02040503050406030204" charset="0"/>
+                          <a:cs typeface="Cambria Math" panose="02040503050406030204" charset="0"/>
+                        </a:rPr>
+                        <m:t>.(</m:t>
+                      </m:r>
+                      <m:sSub>
+                        <m:sSubPr>
+                          <m:ctrlPr>
+                            <a:rPr lang="en-US" altLang="zh-CN" i="1">
+                              <a:latin typeface="Cambria Math" panose="02040503050406030204" charset="0"/>
+                              <a:cs typeface="Cambria Math" panose="02040503050406030204" charset="0"/>
+                            </a:rPr>
+                          </m:ctrlPr>
+                        </m:sSubPr>
+                        <m:e>
+                          <m:r>
+                            <a:rPr lang="en-US" altLang="zh-CN" i="1">
+                              <a:latin typeface="Cambria Math" panose="02040503050406030204" charset="0"/>
+                              <a:cs typeface="Cambria Math" panose="02040503050406030204" charset="0"/>
+                            </a:rPr>
+                            <m:t>𝑤</m:t>
+                          </m:r>
+                        </m:e>
+                        <m:sub>
+                          <m:r>
+                            <a:rPr lang="en-US" altLang="zh-CN" i="1">
+                              <a:latin typeface="Cambria Math" panose="02040503050406030204" charset="0"/>
+                              <a:cs typeface="Cambria Math" panose="02040503050406030204" charset="0"/>
+                            </a:rPr>
+                            <m:t>𝑝</m:t>
+                          </m:r>
+                        </m:sub>
+                      </m:sSub>
+                      <m:r>
+                        <a:rPr lang="en-US" altLang="zh-CN" i="1">
+                          <a:latin typeface="Cambria Math" panose="02040503050406030204" charset="0"/>
+                          <a:cs typeface="Cambria Math" panose="02040503050406030204" charset="0"/>
+                        </a:rPr>
+                        <m:t>)</m:t>
+                      </m:r>
+                    </m:oMath>
+                  </m:oMathPara>
+                </a14:m>
+                <a:endParaRPr lang="en-US" altLang="zh-CN" i="1">
+                  <a:latin typeface="Cambria Math" panose="02040503050406030204" charset="0"/>
+                  <a:cs typeface="Cambria Math" panose="02040503050406030204" charset="0"/>
+                </a:endParaRPr>
+              </a:p>
+            </p:txBody>
+          </p:sp>
+        </mc:Choice>
+        <mc:Fallback>
+          <p:sp>
+            <p:nvSpPr>
+              <p:cNvPr id="25" name="文本框 24"/>
+              <p:cNvSpPr txBox="1">
+                <a:spLocks noRot="1" noChangeAspect="1" noMove="1" noResize="1" noEditPoints="1" noAdjustHandles="1" noChangeArrowheads="1" noChangeShapeType="1" noTextEdit="1"/>
+              </p:cNvSpPr>
+              <p:nvPr/>
+            </p:nvSpPr>
+            <p:spPr>
+              <a:xfrm>
+                <a:off x="3239389" y="4524629"/>
+                <a:ext cx="5172710" cy="361950"/>
+              </a:xfrm>
+              <a:prstGeom prst="rect">
+                <a:avLst/>
+              </a:prstGeom>
+              <a:blipFill rotWithShape="1">
+                <a:blip r:embed="rId8"/>
+                <a:stretch>
+                  <a:fillRect l="-5" t="-70" r="5" b="70"/>
+                </a:stretch>
+              </a:blipFill>
+            </p:spPr>
+            <p:txBody>
+              <a:bodyPr/>
+              <a:lstStyle/>
+              <a:p>
+                <a:r>
+                  <a:rPr lang="zh-CN" altLang="en-US">
+                    <a:noFill/>
+                  </a:rPr>
+                  <a:t> </a:t>
+                </a:r>
+              </a:p>
+            </p:txBody>
+          </p:sp>
+        </mc:Fallback>
+      </mc:AlternateContent>
+      <mc:AlternateContent xmlns:mc="http://schemas.openxmlformats.org/markup-compatibility/2006">
+        <mc:Choice xmlns:a14="http://schemas.microsoft.com/office/drawing/2010/main" Requires="a14">
+          <p:sp>
+            <p:nvSpPr>
+              <p:cNvPr id="29" name="文本框 28"/>
+              <p:cNvSpPr txBox="1"/>
+              <p:nvPr/>
+            </p:nvSpPr>
+            <p:spPr>
+              <a:xfrm>
+                <a:off x="3231515" y="4157980"/>
+                <a:ext cx="3611880" cy="366395"/>
+              </a:xfrm>
+              <a:prstGeom prst="rect">
+                <a:avLst/>
+              </a:prstGeom>
+              <a:noFill/>
+            </p:spPr>
+            <p:txBody>
+              <a:bodyPr wrap="none" rtlCol="0" anchor="t">
+                <a:noAutofit/>
+              </a:bodyPr>
+              <a:p>
+                <a:pPr algn="l"/>
+                <a14:m>
+                  <m:oMathPara xmlns:m="http://schemas.openxmlformats.org/officeDocument/2006/math">
+                    <m:oMathParaPr>
+                      <m:jc m:val="centerGroup"/>
+                    </m:oMathParaPr>
+                    <m:oMath xmlns:m="http://schemas.openxmlformats.org/officeDocument/2006/math">
+                      <m:r>
+                        <a:rPr lang="en-US" altLang="zh-CN" i="1">
+                          <a:latin typeface="Cambria Math" panose="02040503050406030204" charset="0"/>
+                          <a:cs typeface="Cambria Math" panose="02040503050406030204" charset="0"/>
+                        </a:rPr>
+                        <m:t>(</m:t>
+                      </m:r>
+                      <m:sSub>
+                        <m:sSubPr>
+                          <m:ctrlPr>
+                            <a:rPr lang="en-US" altLang="zh-CN" i="1">
+                              <a:latin typeface="Cambria Math" panose="02040503050406030204" charset="0"/>
+                              <a:cs typeface="Cambria Math" panose="02040503050406030204" charset="0"/>
+                            </a:rPr>
+                          </m:ctrlPr>
+                        </m:sSubPr>
+                        <m:e>
+                          <m:r>
+                            <a:rPr lang="en-US" altLang="zh-CN" i="1">
+                              <a:latin typeface="Cambria Math" panose="02040503050406030204" charset="0"/>
+                              <a:cs typeface="Cambria Math" panose="02040503050406030204" charset="0"/>
+                            </a:rPr>
+                            <m:t>𝑤</m:t>
+                          </m:r>
+                        </m:e>
+                        <m:sub>
+                          <m:r>
+                            <a:rPr lang="en-US" altLang="zh-CN" i="1">
+                              <a:latin typeface="Cambria Math" panose="02040503050406030204" charset="0"/>
+                              <a:cs typeface="Cambria Math" panose="02040503050406030204" charset="0"/>
+                            </a:rPr>
+                            <m:t>𝑝</m:t>
+                          </m:r>
+                        </m:sub>
+                      </m:sSub>
+                      <m:r>
+                        <a:rPr lang="en-US" altLang="zh-CN" i="1">
+                          <a:latin typeface="Cambria Math" panose="02040503050406030204" charset="0"/>
+                          <a:cs typeface="Cambria Math" panose="02040503050406030204" charset="0"/>
+                        </a:rPr>
+                        <m:t>):</m:t>
+                      </m:r>
+                      <m:r>
+                        <a:rPr lang="en-US" altLang="zh-CN" i="1">
+                          <a:latin typeface="Cambria Math" panose="02040503050406030204" charset="0"/>
+                          <a:cs typeface="Cambria Math" panose="02040503050406030204" charset="0"/>
+                        </a:rPr>
+                        <m:t>𝑛𝑢𝑚𝑏𝑒𝑟</m:t>
+                      </m:r>
+                      <m:r>
+                        <a:rPr lang="en-US" altLang="zh-CN" i="1">
+                          <a:latin typeface="Cambria Math" panose="02040503050406030204" charset="0"/>
+                          <a:cs typeface="Cambria Math" panose="02040503050406030204" charset="0"/>
+                        </a:rPr>
+                        <m:t> </m:t>
+                      </m:r>
+                      <m:r>
+                        <a:rPr lang="en-US" altLang="zh-CN" i="1">
+                          <a:latin typeface="Cambria Math" panose="02040503050406030204" charset="0"/>
+                          <a:cs typeface="Cambria Math" panose="02040503050406030204" charset="0"/>
+                        </a:rPr>
+                        <m:t>𝑜𝑓</m:t>
+                      </m:r>
+                      <m:r>
+                        <a:rPr lang="en-US" altLang="zh-CN" i="1">
+                          <a:latin typeface="Cambria Math" panose="02040503050406030204" charset="0"/>
+                          <a:cs typeface="Cambria Math" panose="02040503050406030204" charset="0"/>
+                        </a:rPr>
+                        <m:t> </m:t>
+                      </m:r>
+                      <m:r>
+                        <a:rPr lang="en-US" altLang="zh-CN" i="1">
+                          <a:latin typeface="Cambria Math" panose="02040503050406030204" charset="0"/>
+                          <a:cs typeface="Cambria Math" panose="02040503050406030204" charset="0"/>
+                        </a:rPr>
+                        <m:t>𝑒𝑥𝑝𝑒𝑟𝑡𝑠</m:t>
+                      </m:r>
+                      <m:r>
+                        <a:rPr lang="en-US" altLang="zh-CN" i="1">
+                          <a:latin typeface="Cambria Math" panose="02040503050406030204" charset="0"/>
+                          <a:cs typeface="Cambria Math" panose="02040503050406030204" charset="0"/>
+                        </a:rPr>
+                        <m:t> </m:t>
+                      </m:r>
+                      <m:r>
+                        <a:rPr lang="en-US" altLang="zh-CN" i="1">
+                          <a:latin typeface="Cambria Math" panose="02040503050406030204" charset="0"/>
+                          <a:cs typeface="Cambria Math" panose="02040503050406030204" charset="0"/>
+                        </a:rPr>
+                        <m:t>𝑖𝑛</m:t>
+                      </m:r>
+                      <m:r>
+                        <a:rPr lang="en-US" altLang="zh-CN" i="1">
+                          <a:latin typeface="Cambria Math" panose="02040503050406030204" charset="0"/>
+                          <a:cs typeface="Cambria Math" panose="02040503050406030204" charset="0"/>
+                        </a:rPr>
+                        <m:t> </m:t>
+                      </m:r>
+                      <m:r>
+                        <a:rPr lang="en-US" altLang="zh-CN" i="1">
+                          <a:latin typeface="Cambria Math" panose="02040503050406030204" charset="0"/>
+                          <a:cs typeface="Cambria Math" panose="02040503050406030204" charset="0"/>
+                        </a:rPr>
+                        <m:t>𝑓𝑙𝑜𝑤</m:t>
+                      </m:r>
+                      <m:r>
+                        <a:rPr lang="en-US" altLang="zh-CN" i="1">
+                          <a:latin typeface="Cambria Math" panose="02040503050406030204" charset="0"/>
+                          <a:cs typeface="Cambria Math" panose="02040503050406030204" charset="0"/>
+                        </a:rPr>
+                        <m:t>(</m:t>
+                      </m:r>
+                      <m:r>
+                        <a:rPr lang="en-US" altLang="zh-CN" i="1">
+                          <a:latin typeface="Cambria Math" panose="02040503050406030204" charset="0"/>
+                          <a:cs typeface="Cambria Math" panose="02040503050406030204" charset="0"/>
+                        </a:rPr>
+                        <m:t>𝑝</m:t>
+                      </m:r>
+                      <m:r>
+                        <a:rPr lang="en-US" altLang="zh-CN" i="1">
+                          <a:latin typeface="Cambria Math" panose="02040503050406030204" charset="0"/>
+                          <a:cs typeface="Cambria Math" panose="02040503050406030204" charset="0"/>
+                        </a:rPr>
+                        <m:t>).</m:t>
+                      </m:r>
+                    </m:oMath>
+                  </m:oMathPara>
+                </a14:m>
+                <a:endParaRPr lang="en-US" altLang="zh-CN" i="1">
+                  <a:latin typeface="Cambria Math" panose="02040503050406030204" charset="0"/>
+                  <a:cs typeface="Cambria Math" panose="02040503050406030204" charset="0"/>
+                </a:endParaRPr>
+              </a:p>
+            </p:txBody>
+          </p:sp>
+        </mc:Choice>
+        <mc:Fallback>
+          <p:sp>
+            <p:nvSpPr>
+              <p:cNvPr id="29" name="文本框 28"/>
+              <p:cNvSpPr txBox="1">
+                <a:spLocks noRot="1" noChangeAspect="1" noMove="1" noResize="1" noEditPoints="1" noAdjustHandles="1" noChangeArrowheads="1" noChangeShapeType="1" noTextEdit="1"/>
+              </p:cNvSpPr>
+              <p:nvPr/>
+            </p:nvSpPr>
+            <p:spPr>
+              <a:xfrm>
+                <a:off x="3231515" y="4157980"/>
+                <a:ext cx="3611880" cy="366395"/>
+              </a:xfrm>
+              <a:prstGeom prst="rect">
+                <a:avLst/>
+              </a:prstGeom>
+              <a:blipFill rotWithShape="1">
+                <a:blip r:embed="rId9"/>
+                <a:stretch>
+                  <a:fillRect r="-5520"/>
+                </a:stretch>
+              </a:blipFill>
+            </p:spPr>
+            <p:txBody>
+              <a:bodyPr/>
+              <a:lstStyle/>
+              <a:p>
+                <a:r>
+                  <a:rPr lang="zh-CN" altLang="en-US">
+                    <a:noFill/>
+                  </a:rPr>
+                  <a:t> </a:t>
+                </a:r>
+              </a:p>
+            </p:txBody>
+          </p:sp>
+        </mc:Fallback>
+      </mc:AlternateContent>
+      <mc:AlternateContent xmlns:mc="http://schemas.openxmlformats.org/markup-compatibility/2006">
+        <mc:Choice xmlns:a14="http://schemas.microsoft.com/office/drawing/2010/main" Requires="a14">
+          <p:sp>
+            <p:nvSpPr>
+              <p:cNvPr id="31" name="文本框 30"/>
+              <p:cNvSpPr txBox="1"/>
+              <p:nvPr/>
+            </p:nvSpPr>
+            <p:spPr>
+              <a:xfrm>
+                <a:off x="3232404" y="4890389"/>
+                <a:ext cx="5357495" cy="374015"/>
+              </a:xfrm>
+              <a:prstGeom prst="rect">
+                <a:avLst/>
+              </a:prstGeom>
+              <a:noFill/>
+            </p:spPr>
+            <p:txBody>
+              <a:bodyPr wrap="none" rtlCol="0" anchor="t">
+                <a:spAutoFit/>
+              </a:bodyPr>
+              <a:p>
+                <a:pPr algn="l"/>
+                <a14:m>
+                  <m:oMathPara xmlns:m="http://schemas.openxmlformats.org/officeDocument/2006/math">
+                    <m:oMathParaPr>
+                      <m:jc m:val="centerGroup"/>
+                    </m:oMathParaPr>
+                    <m:oMath xmlns:m="http://schemas.openxmlformats.org/officeDocument/2006/math">
+                      <m:r>
+                        <a:rPr lang="en-US" altLang="zh-CN" i="1">
+                          <a:latin typeface="Cambria Math" panose="02040503050406030204" charset="0"/>
+                          <a:cs typeface="Cambria Math" panose="02040503050406030204" charset="0"/>
+                        </a:rPr>
+                        <m:t>(</m:t>
+                      </m:r>
+                      <m:sSub>
+                        <m:sSubPr>
+                          <m:ctrlPr>
+                            <a:rPr lang="en-US" altLang="zh-CN" i="1">
+                              <a:latin typeface="Cambria Math" panose="02040503050406030204" charset="0"/>
+                              <a:cs typeface="Cambria Math" panose="02040503050406030204" charset="0"/>
+                            </a:rPr>
+                          </m:ctrlPr>
+                        </m:sSubPr>
+                        <m:e>
+                          <m:r>
+                            <a:rPr lang="en-US" altLang="zh-CN" i="1">
+                              <a:latin typeface="Cambria Math" panose="02040503050406030204" charset="0"/>
+                              <a:cs typeface="Cambria Math" panose="02040503050406030204" charset="0"/>
+                            </a:rPr>
+                            <m:t>𝑓</m:t>
+                          </m:r>
+                        </m:e>
+                        <m:sub>
+                          <m:r>
+                            <a:rPr lang="en-US" altLang="zh-CN" i="1">
+                              <a:latin typeface="Cambria Math" panose="02040503050406030204" charset="0"/>
+                              <a:cs typeface="Cambria Math" panose="02040503050406030204" charset="0"/>
+                            </a:rPr>
+                            <m:t>𝑝</m:t>
+                          </m:r>
+                          <m:r>
+                            <a:rPr lang="en-US" altLang="zh-CN" i="1">
+                              <a:latin typeface="Cambria Math" panose="02040503050406030204" charset="0"/>
+                              <a:cs typeface="Cambria Math" panose="02040503050406030204" charset="0"/>
+                            </a:rPr>
+                            <m:t>,</m:t>
+                          </m:r>
+                          <m:r>
+                            <a:rPr lang="en-US" altLang="zh-CN" i="1">
+                              <a:latin typeface="Cambria Math" panose="02040503050406030204" charset="0"/>
+                              <a:cs typeface="Cambria Math" panose="02040503050406030204" charset="0"/>
+                            </a:rPr>
+                            <m:t>𝑒</m:t>
+                          </m:r>
+                        </m:sub>
+                      </m:sSub>
+                      <m:r>
+                        <a:rPr lang="en-US" altLang="zh-CN" i="1">
+                          <a:latin typeface="Cambria Math" panose="02040503050406030204" charset="0"/>
+                          <a:cs typeface="Cambria Math" panose="02040503050406030204" charset="0"/>
+                        </a:rPr>
+                        <m:t>):</m:t>
+                      </m:r>
+                      <m:r>
+                        <a:rPr lang="en-US" altLang="zh-CN" i="1">
+                          <a:latin typeface="Cambria Math" panose="02040503050406030204" charset="0"/>
+                          <a:cs typeface="Cambria Math" panose="02040503050406030204" charset="0"/>
+                        </a:rPr>
+                        <m:t>𝑓𝑟𝑎𝑐𝑡𝑖𝑜𝑛</m:t>
+                      </m:r>
+                      <m:r>
+                        <a:rPr lang="en-US" altLang="zh-CN" i="1">
+                          <a:latin typeface="Cambria Math" panose="02040503050406030204" charset="0"/>
+                          <a:cs typeface="Cambria Math" panose="02040503050406030204" charset="0"/>
+                        </a:rPr>
+                        <m:t> </m:t>
+                      </m:r>
+                      <m:r>
+                        <a:rPr lang="en-US" altLang="zh-CN" i="1">
+                          <a:latin typeface="Cambria Math" panose="02040503050406030204" charset="0"/>
+                          <a:cs typeface="Cambria Math" panose="02040503050406030204" charset="0"/>
+                        </a:rPr>
+                        <m:t>𝑜𝑓</m:t>
+                      </m:r>
+                      <m:r>
+                        <a:rPr lang="en-US" altLang="zh-CN" i="1">
+                          <a:latin typeface="Cambria Math" panose="02040503050406030204" charset="0"/>
+                          <a:cs typeface="Cambria Math" panose="02040503050406030204" charset="0"/>
+                        </a:rPr>
+                        <m:t> </m:t>
+                      </m:r>
+                      <m:r>
+                        <a:rPr lang="en-US" altLang="zh-CN" i="1">
+                          <a:latin typeface="Cambria Math" panose="02040503050406030204" charset="0"/>
+                          <a:cs typeface="Cambria Math" panose="02040503050406030204" charset="0"/>
+                        </a:rPr>
+                        <m:t>𝑓𝑙𝑜𝑤</m:t>
+                      </m:r>
+                      <m:r>
+                        <a:rPr lang="en-US" altLang="zh-CN" i="1">
+                          <a:latin typeface="Cambria Math" panose="02040503050406030204" charset="0"/>
+                          <a:cs typeface="Cambria Math" panose="02040503050406030204" charset="0"/>
+                        </a:rPr>
+                        <m:t>(</m:t>
+                      </m:r>
+                      <m:r>
+                        <a:rPr lang="en-US" altLang="zh-CN" i="1">
+                          <a:latin typeface="Cambria Math" panose="02040503050406030204" charset="0"/>
+                          <a:cs typeface="Cambria Math" panose="02040503050406030204" charset="0"/>
+                        </a:rPr>
+                        <m:t>𝑝</m:t>
+                      </m:r>
+                      <m:r>
+                        <a:rPr lang="en-US" altLang="zh-CN" i="1">
+                          <a:latin typeface="Cambria Math" panose="02040503050406030204" charset="0"/>
+                          <a:cs typeface="Cambria Math" panose="02040503050406030204" charset="0"/>
+                        </a:rPr>
+                        <m:t>) </m:t>
+                      </m:r>
+                      <m:r>
+                        <a:rPr lang="en-US" altLang="zh-CN" i="1">
+                          <a:latin typeface="Cambria Math" panose="02040503050406030204" charset="0"/>
+                          <a:cs typeface="Cambria Math" panose="02040503050406030204" charset="0"/>
+                        </a:rPr>
+                        <m:t>𝑟𝑜𝑢𝑡𝑒𝑑</m:t>
+                      </m:r>
+                      <m:r>
+                        <a:rPr lang="en-US" altLang="zh-CN" i="1">
+                          <a:latin typeface="Cambria Math" panose="02040503050406030204" charset="0"/>
+                          <a:cs typeface="Cambria Math" panose="02040503050406030204" charset="0"/>
+                        </a:rPr>
+                        <m:t> </m:t>
+                      </m:r>
+                      <m:r>
+                        <a:rPr lang="en-US" altLang="zh-CN" i="1">
+                          <a:latin typeface="Cambria Math" panose="02040503050406030204" charset="0"/>
+                          <a:cs typeface="Cambria Math" panose="02040503050406030204" charset="0"/>
+                        </a:rPr>
+                        <m:t>𝑡ℎ𝑟𝑜𝑢𝑔ℎ</m:t>
+                      </m:r>
+                      <m:r>
+                        <a:rPr lang="en-US" altLang="zh-CN" i="1">
+                          <a:latin typeface="Cambria Math" panose="02040503050406030204" charset="0"/>
+                          <a:cs typeface="Cambria Math" panose="02040503050406030204" charset="0"/>
+                        </a:rPr>
+                        <m:t> </m:t>
+                      </m:r>
+                      <m:r>
+                        <a:rPr lang="en-US" altLang="zh-CN" i="1">
+                          <a:latin typeface="Cambria Math" panose="02040503050406030204" charset="0"/>
+                          <a:cs typeface="Cambria Math" panose="02040503050406030204" charset="0"/>
+                        </a:rPr>
+                        <m:t>𝑙𝑖𝑛𝑘</m:t>
+                      </m:r>
+                      <m:r>
+                        <a:rPr lang="en-US" altLang="zh-CN" i="1">
+                          <a:latin typeface="Cambria Math" panose="02040503050406030204" charset="0"/>
+                          <a:cs typeface="Cambria Math" panose="02040503050406030204" charset="0"/>
+                        </a:rPr>
+                        <m:t>(</m:t>
+                      </m:r>
+                      <m:r>
+                        <a:rPr lang="en-US" altLang="zh-CN" i="1">
+                          <a:latin typeface="Cambria Math" panose="02040503050406030204" charset="0"/>
+                          <a:cs typeface="Cambria Math" panose="02040503050406030204" charset="0"/>
+                        </a:rPr>
+                        <m:t>𝑒</m:t>
+                      </m:r>
+                      <m:r>
+                        <a:rPr lang="en-US" altLang="zh-CN" i="1">
+                          <a:latin typeface="Cambria Math" panose="02040503050406030204" charset="0"/>
+                          <a:cs typeface="Cambria Math" panose="02040503050406030204" charset="0"/>
+                        </a:rPr>
+                        <m:t>).</m:t>
+                      </m:r>
+                    </m:oMath>
+                  </m:oMathPara>
+                </a14:m>
+                <a:endParaRPr lang="en-US" altLang="zh-CN" i="1">
+                  <a:latin typeface="Cambria Math" panose="02040503050406030204" charset="0"/>
+                  <a:cs typeface="Cambria Math" panose="02040503050406030204" charset="0"/>
+                </a:endParaRPr>
+              </a:p>
+            </p:txBody>
+          </p:sp>
+        </mc:Choice>
+        <mc:Fallback>
+          <p:sp>
+            <p:nvSpPr>
+              <p:cNvPr id="31" name="文本框 30"/>
+              <p:cNvSpPr txBox="1">
+                <a:spLocks noRot="1" noChangeAspect="1" noMove="1" noResize="1" noEditPoints="1" noAdjustHandles="1" noChangeArrowheads="1" noChangeShapeType="1" noTextEdit="1"/>
+              </p:cNvSpPr>
+              <p:nvPr/>
+            </p:nvSpPr>
+            <p:spPr>
+              <a:xfrm>
+                <a:off x="3232404" y="4890389"/>
+                <a:ext cx="5357495" cy="374015"/>
+              </a:xfrm>
+              <a:prstGeom prst="rect">
+                <a:avLst/>
+              </a:prstGeom>
+              <a:blipFill rotWithShape="1">
+                <a:blip r:embed="rId10"/>
+                <a:stretch>
+                  <a:fillRect l="-5" t="-68" r="5" b="68"/>
+                </a:stretch>
+              </a:blipFill>
+            </p:spPr>
+            <p:txBody>
+              <a:bodyPr/>
+              <a:lstStyle/>
+              <a:p>
+                <a:r>
+                  <a:rPr lang="zh-CN" altLang="en-US">
+                    <a:noFill/>
+                  </a:rPr>
+                  <a:t> </a:t>
+                </a:r>
+              </a:p>
+            </p:txBody>
+          </p:sp>
+        </mc:Fallback>
+      </mc:AlternateContent>
+      <mc:AlternateContent xmlns:mc="http://schemas.openxmlformats.org/markup-compatibility/2006">
+        <mc:Choice xmlns:a14="http://schemas.microsoft.com/office/drawing/2010/main" Requires="a14">
+          <p:sp>
+            <p:nvSpPr>
+              <p:cNvPr id="32" name="文本框 31"/>
+              <p:cNvSpPr txBox="1"/>
+              <p:nvPr/>
+            </p:nvSpPr>
+            <p:spPr>
+              <a:xfrm>
+                <a:off x="2708910" y="5295900"/>
+                <a:ext cx="4436110" cy="687070"/>
+              </a:xfrm>
+              <a:prstGeom prst="rect">
+                <a:avLst/>
+              </a:prstGeom>
+              <a:noFill/>
+            </p:spPr>
+            <p:txBody>
+              <a:bodyPr wrap="none" rtlCol="0" anchor="t">
+                <a:noAutofit/>
+              </a:bodyPr>
+              <a:p>
+                <a:pPr algn="l"/>
+                <a14:m>
+                  <m:oMathPara xmlns:m="http://schemas.openxmlformats.org/officeDocument/2006/math">
+                    <m:oMathParaPr>
+                      <m:jc m:val="centerGroup"/>
+                    </m:oMathParaPr>
+                    <m:oMath xmlns:m="http://schemas.openxmlformats.org/officeDocument/2006/math">
+                      <m:r>
+                        <a:rPr lang="en-US" altLang="zh-CN" i="1">
+                          <a:latin typeface="Cambria Math" panose="02040503050406030204" charset="0"/>
+                          <a:cs typeface="Cambria Math" panose="02040503050406030204" charset="0"/>
+                        </a:rPr>
+                        <m:t>(</m:t>
+                      </m:r>
+                      <m:sSub>
+                        <m:sSubPr>
+                          <m:ctrlPr>
+                            <a:rPr lang="en-US" altLang="zh-CN" i="1">
+                              <a:latin typeface="Cambria Math" panose="02040503050406030204" charset="0"/>
+                              <a:cs typeface="Cambria Math" panose="02040503050406030204" charset="0"/>
+                            </a:rPr>
+                          </m:ctrlPr>
+                        </m:sSubPr>
+                        <m:e>
+                          <m:r>
+                            <a:rPr lang="en-US" altLang="zh-CN" i="1">
+                              <a:latin typeface="Cambria Math" panose="02040503050406030204" charset="0"/>
+                              <a:cs typeface="Cambria Math" panose="02040503050406030204" charset="0"/>
+                            </a:rPr>
+                            <m:t>𝑥</m:t>
+                          </m:r>
+                        </m:e>
+                        <m:sub>
+                          <m:r>
+                            <a:rPr lang="en-US" altLang="zh-CN" i="1">
+                              <a:latin typeface="Cambria Math" panose="02040503050406030204" charset="0"/>
+                              <a:cs typeface="Cambria Math" panose="02040503050406030204" charset="0"/>
+                            </a:rPr>
+                            <m:t>𝑝</m:t>
+                          </m:r>
+                          <m:r>
+                            <a:rPr lang="en-US" altLang="zh-CN" i="1">
+                              <a:latin typeface="Cambria Math" panose="02040503050406030204" charset="0"/>
+                              <a:cs typeface="Cambria Math" panose="02040503050406030204" charset="0"/>
+                            </a:rPr>
+                            <m:t>,</m:t>
+                          </m:r>
+                          <m:r>
+                            <a:rPr lang="en-US" altLang="zh-CN" i="1">
+                              <a:latin typeface="Cambria Math" panose="02040503050406030204" charset="0"/>
+                              <a:cs typeface="Cambria Math" panose="02040503050406030204" charset="0"/>
+                            </a:rPr>
+                            <m:t>𝑏</m:t>
+                          </m:r>
+                        </m:sub>
+                      </m:sSub>
+                      <m:r>
+                        <a:rPr lang="en-US" altLang="zh-CN" i="1">
+                          <a:latin typeface="Cambria Math" panose="02040503050406030204" charset="0"/>
+                          <a:cs typeface="Cambria Math" panose="02040503050406030204" charset="0"/>
+                        </a:rPr>
+                        <m:t>):1 </m:t>
+                      </m:r>
+                      <m:r>
+                        <a:rPr lang="en-US" altLang="zh-CN" i="1">
+                          <a:latin typeface="Cambria Math" panose="02040503050406030204" charset="0"/>
+                          <a:cs typeface="Cambria Math" panose="02040503050406030204" charset="0"/>
+                        </a:rPr>
+                        <m:t>𝑖𝑓</m:t>
+                      </m:r>
+                      <m:r>
+                        <a:rPr lang="en-US" altLang="zh-CN" i="1">
+                          <a:latin typeface="Cambria Math" panose="02040503050406030204" charset="0"/>
+                          <a:cs typeface="Cambria Math" panose="02040503050406030204" charset="0"/>
+                        </a:rPr>
+                        <m:t> </m:t>
+                      </m:r>
+                      <m:r>
+                        <a:rPr lang="en-US" altLang="zh-CN" i="1">
+                          <a:latin typeface="Cambria Math" panose="02040503050406030204" charset="0"/>
+                          <a:cs typeface="Cambria Math" panose="02040503050406030204" charset="0"/>
+                        </a:rPr>
+                        <m:t>𝑓𝑙𝑜𝑤</m:t>
+                      </m:r>
+                      <m:r>
+                        <a:rPr lang="en-US" altLang="zh-CN" i="1">
+                          <a:latin typeface="Cambria Math" panose="02040503050406030204" charset="0"/>
+                          <a:cs typeface="Cambria Math" panose="02040503050406030204" charset="0"/>
+                        </a:rPr>
+                        <m:t>(</m:t>
+                      </m:r>
+                      <m:r>
+                        <a:rPr lang="en-US" altLang="zh-CN" i="1">
+                          <a:latin typeface="Cambria Math" panose="02040503050406030204" charset="0"/>
+                          <a:cs typeface="Cambria Math" panose="02040503050406030204" charset="0"/>
+                        </a:rPr>
+                        <m:t>𝑝</m:t>
+                      </m:r>
+                      <m:r>
+                        <a:rPr lang="en-US" altLang="zh-CN" i="1">
+                          <a:latin typeface="Cambria Math" panose="02040503050406030204" charset="0"/>
+                          <a:cs typeface="Cambria Math" panose="02040503050406030204" charset="0"/>
+                        </a:rPr>
+                        <m:t>) </m:t>
+                      </m:r>
+                      <m:r>
+                        <a:rPr lang="en-US" altLang="zh-CN" i="1">
+                          <a:latin typeface="Cambria Math" panose="02040503050406030204" charset="0"/>
+                          <a:cs typeface="Cambria Math" panose="02040503050406030204" charset="0"/>
+                        </a:rPr>
+                        <m:t>𝑖𝑠</m:t>
+                      </m:r>
+                      <m:r>
+                        <a:rPr lang="en-US" altLang="zh-CN" i="1">
+                          <a:latin typeface="Cambria Math" panose="02040503050406030204" charset="0"/>
+                          <a:cs typeface="Cambria Math" panose="02040503050406030204" charset="0"/>
+                        </a:rPr>
+                        <m:t> </m:t>
+                      </m:r>
+                      <m:r>
+                        <a:rPr lang="en-US" altLang="zh-CN" i="1">
+                          <a:latin typeface="Cambria Math" panose="02040503050406030204" charset="0"/>
+                          <a:cs typeface="Cambria Math" panose="02040503050406030204" charset="0"/>
+                        </a:rPr>
+                        <m:t>𝑎𝑠𝑠𝑖𝑔𝑛𝑒𝑑</m:t>
+                      </m:r>
+                      <m:r>
+                        <a:rPr lang="en-US" altLang="zh-CN" i="1">
+                          <a:latin typeface="Cambria Math" panose="02040503050406030204" charset="0"/>
+                          <a:cs typeface="Cambria Math" panose="02040503050406030204" charset="0"/>
+                        </a:rPr>
+                        <m:t> </m:t>
+                      </m:r>
+                    </m:oMath>
+                  </m:oMathPara>
+                </a14:m>
+                <a:endParaRPr lang="en-US" altLang="zh-CN" i="1">
+                  <a:latin typeface="Cambria Math" panose="02040503050406030204" charset="0"/>
+                  <a:cs typeface="Cambria Math" panose="02040503050406030204" charset="0"/>
+                </a:endParaRPr>
+              </a:p>
+              <a:p>
+                <a:pPr algn="l"/>
+                <a14:m>
+                  <m:oMathPara xmlns:m="http://schemas.openxmlformats.org/officeDocument/2006/math">
+                    <m:oMathParaPr>
+                      <m:jc m:val="centerGroup"/>
+                    </m:oMathParaPr>
+                    <m:oMath xmlns:m="http://schemas.openxmlformats.org/officeDocument/2006/math">
+                      <m:r>
+                        <a:rPr lang="en-US" altLang="zh-CN" i="1">
+                          <a:latin typeface="Cambria Math" panose="02040503050406030204" charset="0"/>
+                          <a:cs typeface="Cambria Math" panose="02040503050406030204" charset="0"/>
+                        </a:rPr>
+                        <m:t>𝑡𝑜</m:t>
+                      </m:r>
+                      <m:r>
+                        <a:rPr lang="en-US" altLang="zh-CN" i="1">
+                          <a:latin typeface="Cambria Math" panose="02040503050406030204" charset="0"/>
+                          <a:cs typeface="Cambria Math" panose="02040503050406030204" charset="0"/>
+                        </a:rPr>
+                        <m:t> </m:t>
+                      </m:r>
+                      <m:r>
+                        <a:rPr lang="en-US" altLang="zh-CN" i="1">
+                          <a:latin typeface="Cambria Math" panose="02040503050406030204" charset="0"/>
+                          <a:cs typeface="Cambria Math" panose="02040503050406030204" charset="0"/>
+                        </a:rPr>
+                        <m:t>𝑏𝑎𝑡𝑐ℎ</m:t>
+                      </m:r>
+                      <m:r>
+                        <a:rPr lang="en-US" altLang="zh-CN" i="1">
+                          <a:latin typeface="Cambria Math" panose="02040503050406030204" charset="0"/>
+                          <a:cs typeface="Cambria Math" panose="02040503050406030204" charset="0"/>
+                        </a:rPr>
+                        <m:t>(</m:t>
+                      </m:r>
+                      <m:r>
+                        <a:rPr lang="en-US" altLang="zh-CN" i="1">
+                          <a:latin typeface="Cambria Math" panose="02040503050406030204" charset="0"/>
+                          <a:cs typeface="Cambria Math" panose="02040503050406030204" charset="0"/>
+                        </a:rPr>
+                        <m:t>𝑏</m:t>
+                      </m:r>
+                      <m:r>
+                        <a:rPr lang="en-US" altLang="zh-CN" i="1">
+                          <a:latin typeface="Cambria Math" panose="02040503050406030204" charset="0"/>
+                          <a:cs typeface="Cambria Math" panose="02040503050406030204" charset="0"/>
+                        </a:rPr>
+                        <m:t>),</m:t>
+                      </m:r>
+                      <m:r>
+                        <a:rPr lang="en-US" altLang="zh-CN" i="1">
+                          <a:latin typeface="Cambria Math" panose="02040503050406030204" charset="0"/>
+                          <a:cs typeface="Cambria Math" panose="02040503050406030204" charset="0"/>
+                        </a:rPr>
+                        <m:t>𝑜𝑡ℎ𝑒𝑟𝑤𝑖𝑠𝑒</m:t>
+                      </m:r>
+                      <m:r>
+                        <a:rPr lang="en-US" altLang="zh-CN" i="1">
+                          <a:latin typeface="Cambria Math" panose="02040503050406030204" charset="0"/>
+                          <a:cs typeface="Cambria Math" panose="02040503050406030204" charset="0"/>
+                        </a:rPr>
+                        <m:t> </m:t>
+                      </m:r>
+                      <m:r>
+                        <a:rPr lang="en-US" altLang="zh-CN" i="1">
+                          <a:latin typeface="Cambria Math" panose="02040503050406030204" charset="0"/>
+                          <a:cs typeface="Cambria Math" panose="02040503050406030204" charset="0"/>
+                        </a:rPr>
+                        <m:t>0.</m:t>
+                      </m:r>
+                    </m:oMath>
+                  </m:oMathPara>
+                </a14:m>
+                <a:endParaRPr lang="en-US" altLang="zh-CN" i="1">
+                  <a:latin typeface="Cambria Math" panose="02040503050406030204" charset="0"/>
+                  <a:cs typeface="Cambria Math" panose="02040503050406030204" charset="0"/>
+                </a:endParaRPr>
+              </a:p>
+            </p:txBody>
+          </p:sp>
+        </mc:Choice>
+        <mc:Fallback>
+          <p:sp>
+            <p:nvSpPr>
+              <p:cNvPr id="32" name="文本框 31"/>
+              <p:cNvSpPr txBox="1">
+                <a:spLocks noRot="1" noChangeAspect="1" noMove="1" noResize="1" noEditPoints="1" noAdjustHandles="1" noChangeArrowheads="1" noChangeShapeType="1" noTextEdit="1"/>
+              </p:cNvSpPr>
+              <p:nvPr/>
+            </p:nvSpPr>
+            <p:spPr>
+              <a:xfrm>
+                <a:off x="2708910" y="5295900"/>
+                <a:ext cx="4436110" cy="687070"/>
+              </a:xfrm>
+              <a:prstGeom prst="rect">
+                <a:avLst/>
+              </a:prstGeom>
+              <a:blipFill rotWithShape="1">
+                <a:blip r:embed="rId11"/>
+                <a:stretch>
+                  <a:fillRect/>
+                </a:stretch>
+              </a:blipFill>
+            </p:spPr>
+            <p:txBody>
+              <a:bodyPr/>
+              <a:lstStyle/>
+              <a:p>
+                <a:r>
+                  <a:rPr lang="zh-CN" altLang="en-US">
+                    <a:noFill/>
+                  </a:rPr>
+                  <a:t> </a:t>
+                </a:r>
+              </a:p>
+            </p:txBody>
+          </p:sp>
+        </mc:Fallback>
+      </mc:AlternateContent>
     </p:spTree>
   </p:cSld>
   <p:clrMapOvr>
@@ -8833,14 +11460,14 @@
       <p:grpSpPr/>
       <p:sp>
         <p:nvSpPr>
-          <p:cNvPr id="3" name="TextBox 2"/>
+          <p:cNvPr id="4" name="TextBox 3"/>
           <p:cNvSpPr txBox="1"/>
           <p:nvPr/>
         </p:nvSpPr>
         <p:spPr>
           <a:xfrm>
-            <a:off x="502920" y="210312"/>
-            <a:ext cx="2560320" cy="256032"/>
+            <a:off x="685800" y="1417320"/>
+            <a:ext cx="10607040" cy="1143000"/>
           </a:xfrm>
           <a:prstGeom prst="rect">
             <a:avLst/>
@@ -8848,63 +11475,22 @@
           <a:noFill/>
         </p:spPr>
         <p:txBody>
-          <a:bodyPr wrap="none" lIns="36576" tIns="18288" rIns="36576" bIns="18288" anchor="ctr">
+          <a:bodyPr wrap="none" lIns="36576" tIns="36576" rIns="36576" bIns="36576" anchor="ctr">
             <a:spAutoFit/>
           </a:bodyPr>
           <a:lstStyle/>
           <a:p>
             <a:pPr algn="l"/>
             <a:r>
-              <a:rPr sz="1000" b="1">
-                <a:solidFill>
-                  <a:srgbClr val="0D8AA6"/>
-                </a:solidFill>
-                <a:latin typeface="Aptos"/>
-              </a:rPr>
-              <a:t>PART II · E2E</a:t>
-            </a:r>
-            <a:endParaRPr sz="1000" b="1">
-              <a:solidFill>
-                <a:srgbClr val="0D8AA6"/>
-              </a:solidFill>
-              <a:latin typeface="Aptos"/>
-            </a:endParaRPr>
-          </a:p>
-        </p:txBody>
-      </p:sp>
-      <p:sp>
-        <p:nvSpPr>
-          <p:cNvPr id="4" name="TextBox 3"/>
-          <p:cNvSpPr txBox="1"/>
-          <p:nvPr/>
-        </p:nvSpPr>
-        <p:spPr>
-          <a:xfrm>
-            <a:off x="502920" y="528955"/>
-            <a:ext cx="1721485" cy="450850"/>
-          </a:xfrm>
-          <a:prstGeom prst="rect">
-            <a:avLst/>
-          </a:prstGeom>
-          <a:noFill/>
-        </p:spPr>
-        <p:txBody>
-          <a:bodyPr wrap="none" lIns="36576" tIns="18288" rIns="36576" bIns="18288" anchor="ctr">
-            <a:spAutoFit/>
-          </a:bodyPr>
-          <a:lstStyle/>
-          <a:p>
-            <a:pPr algn="l"/>
-            <a:r>
-              <a:rPr lang="en-US" sz="2700" b="1">
+              <a:rPr sz="4200" b="1">
                 <a:solidFill>
                   <a:srgbClr val="162236"/>
                 </a:solidFill>
                 <a:latin typeface="Aptos"/>
               </a:rPr>
-              <a:t>Algorithm</a:t>
-            </a:r>
-            <a:endParaRPr lang="en-US" sz="2700" b="1">
+              <a:t>Real-system experiments</a:t>
+            </a:r>
+            <a:endParaRPr sz="4200" b="1">
               <a:solidFill>
                 <a:srgbClr val="162236"/>
               </a:solidFill>
@@ -8921,8 +11507,8 @@
         </p:nvSpPr>
         <p:spPr>
           <a:xfrm>
-            <a:off x="530352" y="987552"/>
-            <a:ext cx="10972800" cy="320040"/>
+            <a:off x="713232" y="2788920"/>
+            <a:ext cx="8961120" cy="685800"/>
           </a:xfrm>
           <a:prstGeom prst="rect">
             <a:avLst/>
@@ -8930,22 +11516,22 @@
           <a:noFill/>
         </p:spPr>
         <p:txBody>
-          <a:bodyPr wrap="none" lIns="36576" tIns="18288" rIns="36576" bIns="18288" anchor="ctr">
+          <a:bodyPr wrap="none" lIns="36576" tIns="36576" rIns="36576" bIns="36576" anchor="ctr">
             <a:spAutoFit/>
           </a:bodyPr>
           <a:lstStyle/>
           <a:p>
             <a:pPr algn="l"/>
             <a:r>
-              <a:rPr sz="1200" b="0">
+              <a:rPr sz="1800" b="0">
                 <a:solidFill>
                   <a:srgbClr val="596C85"/>
                 </a:solidFill>
                 <a:latin typeface="Aptos"/>
               </a:rPr>
-              <a:t>Group expert moves by rank pair, then separate flows that share a rank.</a:t>
-            </a:r>
-            <a:endParaRPr sz="1200" b="0">
+              <a:t>E2E serving validates the benefit; Nsight profiling measures the cost.</a:t>
+            </a:r>
+            <a:endParaRPr sz="1800" b="0">
               <a:solidFill>
                 <a:srgbClr val="596C85"/>
               </a:solidFill>
@@ -8962,2316 +11548,13 @@
         </p:nvCxnSpPr>
         <p:spPr>
           <a:xfrm>
-            <a:off x="530352" y="1307592"/>
-            <a:ext cx="11128248" cy="0"/>
+            <a:off x="731647" y="3886200"/>
+            <a:ext cx="10030968" cy="0"/>
           </a:xfrm>
           <a:prstGeom prst="line">
             <a:avLst/>
           </a:prstGeom>
-          <a:ln w="12700">
-            <a:solidFill>
-              <a:srgbClr val="D8E2EF"/>
-            </a:solidFill>
-          </a:ln>
-        </p:spPr>
-        <p:style>
-          <a:lnRef idx="2">
-            <a:schemeClr val="accent1"/>
-          </a:lnRef>
-          <a:fillRef idx="0">
-            <a:schemeClr val="accent1"/>
-          </a:fillRef>
-          <a:effectRef idx="1">
-            <a:schemeClr val="accent1"/>
-          </a:effectRef>
-          <a:fontRef idx="minor">
-            <a:schemeClr val="tx1"/>
-          </a:fontRef>
-        </p:style>
-      </p:cxnSp>
-      <p:sp>
-        <p:nvSpPr>
-          <p:cNvPr id="7" name="Rounded Rectangle 6"/>
-          <p:cNvSpPr/>
-          <p:nvPr/>
-        </p:nvSpPr>
-        <p:spPr>
-          <a:xfrm>
-            <a:off x="502920" y="1572895"/>
-            <a:ext cx="2907665" cy="3467100"/>
-          </a:xfrm>
-          <a:prstGeom prst="roundRect">
-            <a:avLst/>
-          </a:prstGeom>
-          <a:solidFill>
-            <a:srgbClr val="FFFFFF"/>
-          </a:solidFill>
-          <a:ln w="12700">
-            <a:solidFill>
-              <a:srgbClr val="3366D6"/>
-            </a:solidFill>
-          </a:ln>
-        </p:spPr>
-        <p:style>
-          <a:lnRef idx="1">
-            <a:schemeClr val="accent1"/>
-          </a:lnRef>
-          <a:fillRef idx="3">
-            <a:schemeClr val="accent1"/>
-          </a:fillRef>
-          <a:effectRef idx="2">
-            <a:schemeClr val="accent1"/>
-          </a:effectRef>
-          <a:fontRef idx="minor">
-            <a:schemeClr val="lt1"/>
-          </a:fontRef>
-        </p:style>
-        <p:txBody>
-          <a:bodyPr rtlCol="0" anchor="ctr"/>
-          <a:lstStyle/>
-          <a:p>
-            <a:pPr algn="ctr"/>
-          </a:p>
-        </p:txBody>
-      </p:sp>
-      <p:sp>
-        <p:nvSpPr>
-          <p:cNvPr id="8" name="TextBox 7"/>
-          <p:cNvSpPr txBox="1"/>
-          <p:nvPr/>
-        </p:nvSpPr>
-        <p:spPr>
-          <a:xfrm>
-            <a:off x="685800" y="1709928"/>
-            <a:ext cx="2542032" cy="292608"/>
-          </a:xfrm>
-          <a:prstGeom prst="rect">
-            <a:avLst/>
-          </a:prstGeom>
-          <a:noFill/>
-        </p:spPr>
-        <p:txBody>
-          <a:bodyPr wrap="none" lIns="36576" tIns="18288" rIns="36576" bIns="18288" anchor="ctr">
-            <a:spAutoFit/>
-          </a:bodyPr>
-          <a:lstStyle/>
-          <a:p>
-            <a:pPr algn="l"/>
-            <a:r>
-              <a:rPr sz="1400" b="1">
-                <a:solidFill>
-                  <a:srgbClr val="3366D6"/>
-                </a:solidFill>
-                <a:latin typeface="Aptos"/>
-              </a:rPr>
-              <a:t>1  Expert moves</a:t>
-            </a:r>
-            <a:endParaRPr sz="1400" b="1">
-              <a:solidFill>
-                <a:srgbClr val="3366D6"/>
-              </a:solidFill>
-              <a:latin typeface="Aptos"/>
-            </a:endParaRPr>
-          </a:p>
-        </p:txBody>
-      </p:sp>
-      <p:sp>
-        <p:nvSpPr>
-          <p:cNvPr id="9" name="Rounded Rectangle 8"/>
-          <p:cNvSpPr/>
-          <p:nvPr/>
-        </p:nvSpPr>
-        <p:spPr>
-          <a:xfrm>
-            <a:off x="3703320" y="1572895"/>
-            <a:ext cx="3246120" cy="3519170"/>
-          </a:xfrm>
-          <a:prstGeom prst="roundRect">
-            <a:avLst/>
-          </a:prstGeom>
-          <a:solidFill>
-            <a:srgbClr val="FFFFFF"/>
-          </a:solidFill>
-          <a:ln w="12700">
-            <a:solidFill>
-              <a:srgbClr val="0D8AA6"/>
-            </a:solidFill>
-          </a:ln>
-        </p:spPr>
-        <p:style>
-          <a:lnRef idx="1">
-            <a:schemeClr val="accent1"/>
-          </a:lnRef>
-          <a:fillRef idx="3">
-            <a:schemeClr val="accent1"/>
-          </a:fillRef>
-          <a:effectRef idx="2">
-            <a:schemeClr val="accent1"/>
-          </a:effectRef>
-          <a:fontRef idx="minor">
-            <a:schemeClr val="lt1"/>
-          </a:fontRef>
-        </p:style>
-        <p:txBody>
-          <a:bodyPr rtlCol="0" anchor="ctr"/>
-          <a:lstStyle/>
-          <a:p>
-            <a:pPr algn="ctr"/>
-          </a:p>
-        </p:txBody>
-      </p:sp>
-      <p:sp>
-        <p:nvSpPr>
-          <p:cNvPr id="10" name="TextBox 9"/>
-          <p:cNvSpPr txBox="1"/>
-          <p:nvPr/>
-        </p:nvSpPr>
-        <p:spPr>
-          <a:xfrm>
-            <a:off x="3886200" y="1709928"/>
-            <a:ext cx="2880360" cy="292608"/>
-          </a:xfrm>
-          <a:prstGeom prst="rect">
-            <a:avLst/>
-          </a:prstGeom>
-          <a:noFill/>
-        </p:spPr>
-        <p:txBody>
-          <a:bodyPr wrap="none" lIns="36576" tIns="18288" rIns="36576" bIns="18288" anchor="ctr">
-            <a:spAutoFit/>
-          </a:bodyPr>
-          <a:lstStyle/>
-          <a:p>
-            <a:pPr algn="l"/>
-            <a:r>
-              <a:rPr sz="1400" b="1">
-                <a:solidFill>
-                  <a:srgbClr val="0D8AA6"/>
-                </a:solidFill>
-                <a:latin typeface="Aptos"/>
-              </a:rPr>
-              <a:t>2  Coalesce by rank pair</a:t>
-            </a:r>
-            <a:endParaRPr sz="1400" b="1">
-              <a:solidFill>
-                <a:srgbClr val="0D8AA6"/>
-              </a:solidFill>
-              <a:latin typeface="Aptos"/>
-            </a:endParaRPr>
-          </a:p>
-        </p:txBody>
-      </p:sp>
-      <p:sp>
-        <p:nvSpPr>
-          <p:cNvPr id="11" name="Rounded Rectangle 10"/>
-          <p:cNvSpPr/>
-          <p:nvPr/>
-        </p:nvSpPr>
-        <p:spPr>
-          <a:xfrm>
-            <a:off x="7242175" y="1572895"/>
-            <a:ext cx="4443730" cy="3389630"/>
-          </a:xfrm>
-          <a:prstGeom prst="roundRect">
-            <a:avLst/>
-          </a:prstGeom>
-          <a:solidFill>
-            <a:srgbClr val="FFFFFF"/>
-          </a:solidFill>
-          <a:ln w="12700">
-            <a:solidFill>
-              <a:srgbClr val="139B67"/>
-            </a:solidFill>
-          </a:ln>
-        </p:spPr>
-        <p:style>
-          <a:lnRef idx="1">
-            <a:schemeClr val="accent1"/>
-          </a:lnRef>
-          <a:fillRef idx="3">
-            <a:schemeClr val="accent1"/>
-          </a:fillRef>
-          <a:effectRef idx="2">
-            <a:schemeClr val="accent1"/>
-          </a:effectRef>
-          <a:fontRef idx="minor">
-            <a:schemeClr val="lt1"/>
-          </a:fontRef>
-        </p:style>
-        <p:txBody>
-          <a:bodyPr rtlCol="0" anchor="ctr"/>
-          <a:lstStyle/>
-          <a:p>
-            <a:pPr algn="ctr"/>
-          </a:p>
-        </p:txBody>
-      </p:sp>
-      <p:sp>
-        <p:nvSpPr>
-          <p:cNvPr id="12" name="TextBox 11"/>
-          <p:cNvSpPr txBox="1"/>
-          <p:nvPr/>
-        </p:nvSpPr>
-        <p:spPr>
-          <a:xfrm>
-            <a:off x="7424927" y="1709928"/>
-            <a:ext cx="4078224" cy="292608"/>
-          </a:xfrm>
-          <a:prstGeom prst="rect">
-            <a:avLst/>
-          </a:prstGeom>
-          <a:noFill/>
-        </p:spPr>
-        <p:txBody>
-          <a:bodyPr wrap="none" lIns="36576" tIns="18288" rIns="36576" bIns="18288" anchor="ctr">
-            <a:spAutoFit/>
-          </a:bodyPr>
-          <a:lstStyle/>
-          <a:p>
-            <a:pPr algn="l"/>
-            <a:r>
-              <a:rPr sz="1400" b="1">
-                <a:solidFill>
-                  <a:srgbClr val="139B67"/>
-                </a:solidFill>
-                <a:latin typeface="Aptos"/>
-              </a:rPr>
-              <a:t>3  Build batches</a:t>
-            </a:r>
-            <a:endParaRPr sz="1400" b="1">
-              <a:solidFill>
-                <a:srgbClr val="139B67"/>
-              </a:solidFill>
-              <a:latin typeface="Aptos"/>
-            </a:endParaRPr>
-          </a:p>
-        </p:txBody>
-      </p:sp>
-      <p:sp>
-        <p:nvSpPr>
-          <p:cNvPr id="13" name="Rounded Rectangle 12"/>
-          <p:cNvSpPr/>
-          <p:nvPr/>
-        </p:nvSpPr>
-        <p:spPr>
-          <a:xfrm>
-            <a:off x="777240" y="2084831"/>
-            <a:ext cx="2359152" cy="393192"/>
-          </a:xfrm>
-          <a:prstGeom prst="roundRect">
-            <a:avLst/>
-          </a:prstGeom>
-          <a:solidFill>
-            <a:srgbClr val="EDF3FA"/>
-          </a:solidFill>
-          <a:ln w="12700">
-            <a:solidFill>
-              <a:srgbClr val="3366D6"/>
-            </a:solidFill>
-          </a:ln>
-        </p:spPr>
-        <p:style>
-          <a:lnRef idx="1">
-            <a:schemeClr val="accent1"/>
-          </a:lnRef>
-          <a:fillRef idx="3">
-            <a:schemeClr val="accent1"/>
-          </a:fillRef>
-          <a:effectRef idx="2">
-            <a:schemeClr val="accent1"/>
-          </a:effectRef>
-          <a:fontRef idx="minor">
-            <a:schemeClr val="lt1"/>
-          </a:fontRef>
-        </p:style>
-        <p:txBody>
-          <a:bodyPr rtlCol="0" anchor="ctr"/>
-          <a:lstStyle/>
-          <a:p>
-            <a:pPr algn="ctr"/>
-          </a:p>
-        </p:txBody>
-      </p:sp>
-      <p:sp>
-        <p:nvSpPr>
-          <p:cNvPr id="14" name="TextBox 13"/>
-          <p:cNvSpPr txBox="1"/>
-          <p:nvPr/>
-        </p:nvSpPr>
-        <p:spPr>
-          <a:xfrm>
-            <a:off x="914400" y="2130551"/>
-            <a:ext cx="411480" cy="256032"/>
-          </a:xfrm>
-          <a:prstGeom prst="rect">
-            <a:avLst/>
-          </a:prstGeom>
-          <a:noFill/>
-        </p:spPr>
-        <p:txBody>
-          <a:bodyPr wrap="none" lIns="36576" tIns="18288" rIns="36576" bIns="18288" anchor="ctr">
-            <a:spAutoFit/>
-          </a:bodyPr>
-          <a:lstStyle/>
-          <a:p>
-            <a:pPr algn="ctr"/>
-            <a:r>
-              <a:rPr sz="1100" b="1">
-                <a:solidFill>
-                  <a:srgbClr val="3366D6"/>
-                </a:solidFill>
-                <a:latin typeface="Aptos"/>
-              </a:rPr>
-              <a:t>E1</a:t>
-            </a:r>
-            <a:endParaRPr sz="1100" b="1">
-              <a:solidFill>
-                <a:srgbClr val="3366D6"/>
-              </a:solidFill>
-              <a:latin typeface="Aptos"/>
-            </a:endParaRPr>
-          </a:p>
-        </p:txBody>
-      </p:sp>
-      <p:sp>
-        <p:nvSpPr>
-          <p:cNvPr id="15" name="TextBox 14"/>
-          <p:cNvSpPr txBox="1"/>
-          <p:nvPr/>
-        </p:nvSpPr>
-        <p:spPr>
-          <a:xfrm>
-            <a:off x="1389888" y="2130551"/>
-            <a:ext cx="1508760" cy="256032"/>
-          </a:xfrm>
-          <a:prstGeom prst="rect">
-            <a:avLst/>
-          </a:prstGeom>
-          <a:noFill/>
-        </p:spPr>
-        <p:txBody>
-          <a:bodyPr wrap="none" lIns="36576" tIns="18288" rIns="36576" bIns="18288" anchor="ctr">
-            <a:spAutoFit/>
-          </a:bodyPr>
-          <a:lstStyle/>
-          <a:p>
-            <a:pPr algn="ctr"/>
-            <a:r>
-              <a:rPr sz="1300" b="1">
-                <a:solidFill>
-                  <a:srgbClr val="162236"/>
-                </a:solidFill>
-                <a:latin typeface="Aptos"/>
-              </a:rPr>
-              <a:t>0 → 1</a:t>
-            </a:r>
-            <a:endParaRPr sz="1300" b="1">
-              <a:solidFill>
-                <a:srgbClr val="162236"/>
-              </a:solidFill>
-              <a:latin typeface="Aptos"/>
-            </a:endParaRPr>
-          </a:p>
-        </p:txBody>
-      </p:sp>
-      <p:sp>
-        <p:nvSpPr>
-          <p:cNvPr id="16" name="Rounded Rectangle 15"/>
-          <p:cNvSpPr/>
-          <p:nvPr/>
-        </p:nvSpPr>
-        <p:spPr>
-          <a:xfrm>
-            <a:off x="777240" y="2642615"/>
-            <a:ext cx="2359152" cy="393192"/>
-          </a:xfrm>
-          <a:prstGeom prst="roundRect">
-            <a:avLst/>
-          </a:prstGeom>
-          <a:solidFill>
-            <a:srgbClr val="EDF3FA"/>
-          </a:solidFill>
-          <a:ln w="12700">
-            <a:solidFill>
-              <a:srgbClr val="3366D6"/>
-            </a:solidFill>
-          </a:ln>
-        </p:spPr>
-        <p:style>
-          <a:lnRef idx="1">
-            <a:schemeClr val="accent1"/>
-          </a:lnRef>
-          <a:fillRef idx="3">
-            <a:schemeClr val="accent1"/>
-          </a:fillRef>
-          <a:effectRef idx="2">
-            <a:schemeClr val="accent1"/>
-          </a:effectRef>
-          <a:fontRef idx="minor">
-            <a:schemeClr val="lt1"/>
-          </a:fontRef>
-        </p:style>
-        <p:txBody>
-          <a:bodyPr rtlCol="0" anchor="ctr"/>
-          <a:lstStyle/>
-          <a:p>
-            <a:pPr algn="ctr"/>
-          </a:p>
-        </p:txBody>
-      </p:sp>
-      <p:sp>
-        <p:nvSpPr>
-          <p:cNvPr id="17" name="TextBox 16"/>
-          <p:cNvSpPr txBox="1"/>
-          <p:nvPr/>
-        </p:nvSpPr>
-        <p:spPr>
-          <a:xfrm>
-            <a:off x="914400" y="2688335"/>
-            <a:ext cx="411480" cy="256032"/>
-          </a:xfrm>
-          <a:prstGeom prst="rect">
-            <a:avLst/>
-          </a:prstGeom>
-          <a:noFill/>
-        </p:spPr>
-        <p:txBody>
-          <a:bodyPr wrap="none" lIns="36576" tIns="18288" rIns="36576" bIns="18288" anchor="ctr">
-            <a:spAutoFit/>
-          </a:bodyPr>
-          <a:lstStyle/>
-          <a:p>
-            <a:pPr algn="ctr"/>
-            <a:r>
-              <a:rPr sz="1100" b="1">
-                <a:solidFill>
-                  <a:srgbClr val="3366D6"/>
-                </a:solidFill>
-                <a:latin typeface="Aptos"/>
-              </a:rPr>
-              <a:t>E7</a:t>
-            </a:r>
-            <a:endParaRPr sz="1100" b="1">
-              <a:solidFill>
-                <a:srgbClr val="3366D6"/>
-              </a:solidFill>
-              <a:latin typeface="Aptos"/>
-            </a:endParaRPr>
-          </a:p>
-        </p:txBody>
-      </p:sp>
-      <p:sp>
-        <p:nvSpPr>
-          <p:cNvPr id="18" name="TextBox 17"/>
-          <p:cNvSpPr txBox="1"/>
-          <p:nvPr/>
-        </p:nvSpPr>
-        <p:spPr>
-          <a:xfrm>
-            <a:off x="1389888" y="2688335"/>
-            <a:ext cx="1508760" cy="256032"/>
-          </a:xfrm>
-          <a:prstGeom prst="rect">
-            <a:avLst/>
-          </a:prstGeom>
-          <a:noFill/>
-        </p:spPr>
-        <p:txBody>
-          <a:bodyPr wrap="none" lIns="36576" tIns="18288" rIns="36576" bIns="18288" anchor="ctr">
-            <a:spAutoFit/>
-          </a:bodyPr>
-          <a:lstStyle/>
-          <a:p>
-            <a:pPr algn="ctr"/>
-            <a:r>
-              <a:rPr sz="1300" b="1">
-                <a:solidFill>
-                  <a:srgbClr val="162236"/>
-                </a:solidFill>
-                <a:latin typeface="Aptos"/>
-              </a:rPr>
-              <a:t>0 → 1</a:t>
-            </a:r>
-            <a:endParaRPr sz="1300" b="1">
-              <a:solidFill>
-                <a:srgbClr val="162236"/>
-              </a:solidFill>
-              <a:latin typeface="Aptos"/>
-            </a:endParaRPr>
-          </a:p>
-        </p:txBody>
-      </p:sp>
-      <p:sp>
-        <p:nvSpPr>
-          <p:cNvPr id="19" name="Rounded Rectangle 18"/>
-          <p:cNvSpPr/>
-          <p:nvPr/>
-        </p:nvSpPr>
-        <p:spPr>
-          <a:xfrm>
-            <a:off x="777240" y="3200400"/>
-            <a:ext cx="2359152" cy="393192"/>
-          </a:xfrm>
-          <a:prstGeom prst="roundRect">
-            <a:avLst/>
-          </a:prstGeom>
-          <a:solidFill>
-            <a:srgbClr val="EDF3FA"/>
-          </a:solidFill>
-          <a:ln w="12700">
-            <a:solidFill>
-              <a:srgbClr val="139B67"/>
-            </a:solidFill>
-          </a:ln>
-        </p:spPr>
-        <p:style>
-          <a:lnRef idx="1">
-            <a:schemeClr val="accent1"/>
-          </a:lnRef>
-          <a:fillRef idx="3">
-            <a:schemeClr val="accent1"/>
-          </a:fillRef>
-          <a:effectRef idx="2">
-            <a:schemeClr val="accent1"/>
-          </a:effectRef>
-          <a:fontRef idx="minor">
-            <a:schemeClr val="lt1"/>
-          </a:fontRef>
-        </p:style>
-        <p:txBody>
-          <a:bodyPr rtlCol="0" anchor="ctr"/>
-          <a:lstStyle/>
-          <a:p>
-            <a:pPr algn="ctr"/>
-          </a:p>
-        </p:txBody>
-      </p:sp>
-      <p:sp>
-        <p:nvSpPr>
-          <p:cNvPr id="20" name="TextBox 19"/>
-          <p:cNvSpPr txBox="1"/>
-          <p:nvPr/>
-        </p:nvSpPr>
-        <p:spPr>
-          <a:xfrm>
-            <a:off x="914400" y="3246120"/>
-            <a:ext cx="411480" cy="256032"/>
-          </a:xfrm>
-          <a:prstGeom prst="rect">
-            <a:avLst/>
-          </a:prstGeom>
-          <a:noFill/>
-        </p:spPr>
-        <p:txBody>
-          <a:bodyPr wrap="none" lIns="36576" tIns="18288" rIns="36576" bIns="18288" anchor="ctr">
-            <a:spAutoFit/>
-          </a:bodyPr>
-          <a:lstStyle/>
-          <a:p>
-            <a:pPr algn="ctr"/>
-            <a:r>
-              <a:rPr sz="1100" b="1">
-                <a:solidFill>
-                  <a:srgbClr val="139B67"/>
-                </a:solidFill>
-                <a:latin typeface="Aptos"/>
-              </a:rPr>
-              <a:t>E3</a:t>
-            </a:r>
-            <a:endParaRPr sz="1100" b="1">
-              <a:solidFill>
-                <a:srgbClr val="139B67"/>
-              </a:solidFill>
-              <a:latin typeface="Aptos"/>
-            </a:endParaRPr>
-          </a:p>
-        </p:txBody>
-      </p:sp>
-      <p:sp>
-        <p:nvSpPr>
-          <p:cNvPr id="21" name="TextBox 20"/>
-          <p:cNvSpPr txBox="1"/>
-          <p:nvPr/>
-        </p:nvSpPr>
-        <p:spPr>
-          <a:xfrm>
-            <a:off x="1389888" y="3246120"/>
-            <a:ext cx="1508760" cy="256032"/>
-          </a:xfrm>
-          <a:prstGeom prst="rect">
-            <a:avLst/>
-          </a:prstGeom>
-          <a:noFill/>
-        </p:spPr>
-        <p:txBody>
-          <a:bodyPr wrap="none" lIns="36576" tIns="18288" rIns="36576" bIns="18288" anchor="ctr">
-            <a:spAutoFit/>
-          </a:bodyPr>
-          <a:lstStyle/>
-          <a:p>
-            <a:pPr algn="ctr"/>
-            <a:r>
-              <a:rPr sz="1300" b="1">
-                <a:solidFill>
-                  <a:srgbClr val="162236"/>
-                </a:solidFill>
-                <a:latin typeface="Aptos"/>
-              </a:rPr>
-              <a:t>2 → 3</a:t>
-            </a:r>
-            <a:endParaRPr sz="1300" b="1">
-              <a:solidFill>
-                <a:srgbClr val="162236"/>
-              </a:solidFill>
-              <a:latin typeface="Aptos"/>
-            </a:endParaRPr>
-          </a:p>
-        </p:txBody>
-      </p:sp>
-      <p:sp>
-        <p:nvSpPr>
-          <p:cNvPr id="22" name="Rounded Rectangle 21"/>
-          <p:cNvSpPr/>
-          <p:nvPr/>
-        </p:nvSpPr>
-        <p:spPr>
-          <a:xfrm>
-            <a:off x="777240" y="3758183"/>
-            <a:ext cx="2359152" cy="393192"/>
-          </a:xfrm>
-          <a:prstGeom prst="roundRect">
-            <a:avLst/>
-          </a:prstGeom>
-          <a:solidFill>
-            <a:srgbClr val="EDF3FA"/>
-          </a:solidFill>
-          <a:ln w="12700">
-            <a:solidFill>
-              <a:srgbClr val="A24BC4"/>
-            </a:solidFill>
-          </a:ln>
-        </p:spPr>
-        <p:style>
-          <a:lnRef idx="1">
-            <a:schemeClr val="accent1"/>
-          </a:lnRef>
-          <a:fillRef idx="3">
-            <a:schemeClr val="accent1"/>
-          </a:fillRef>
-          <a:effectRef idx="2">
-            <a:schemeClr val="accent1"/>
-          </a:effectRef>
-          <a:fontRef idx="minor">
-            <a:schemeClr val="lt1"/>
-          </a:fontRef>
-        </p:style>
-        <p:txBody>
-          <a:bodyPr rtlCol="0" anchor="ctr"/>
-          <a:lstStyle/>
-          <a:p>
-            <a:pPr algn="ctr"/>
-          </a:p>
-        </p:txBody>
-      </p:sp>
-      <p:sp>
-        <p:nvSpPr>
-          <p:cNvPr id="23" name="TextBox 22"/>
-          <p:cNvSpPr txBox="1"/>
-          <p:nvPr/>
-        </p:nvSpPr>
-        <p:spPr>
-          <a:xfrm>
-            <a:off x="914400" y="3803903"/>
-            <a:ext cx="411480" cy="256032"/>
-          </a:xfrm>
-          <a:prstGeom prst="rect">
-            <a:avLst/>
-          </a:prstGeom>
-          <a:noFill/>
-        </p:spPr>
-        <p:txBody>
-          <a:bodyPr wrap="none" lIns="36576" tIns="18288" rIns="36576" bIns="18288" anchor="ctr">
-            <a:spAutoFit/>
-          </a:bodyPr>
-          <a:lstStyle/>
-          <a:p>
-            <a:pPr algn="ctr"/>
-            <a:r>
-              <a:rPr sz="1100" b="1">
-                <a:solidFill>
-                  <a:srgbClr val="A24BC4"/>
-                </a:solidFill>
-                <a:latin typeface="Aptos"/>
-              </a:rPr>
-              <a:t>E4</a:t>
-            </a:r>
-            <a:endParaRPr sz="1100" b="1">
-              <a:solidFill>
-                <a:srgbClr val="A24BC4"/>
-              </a:solidFill>
-              <a:latin typeface="Aptos"/>
-            </a:endParaRPr>
-          </a:p>
-        </p:txBody>
-      </p:sp>
-      <p:sp>
-        <p:nvSpPr>
-          <p:cNvPr id="24" name="TextBox 23"/>
-          <p:cNvSpPr txBox="1"/>
-          <p:nvPr/>
-        </p:nvSpPr>
-        <p:spPr>
-          <a:xfrm>
-            <a:off x="1389888" y="3803903"/>
-            <a:ext cx="1508760" cy="256032"/>
-          </a:xfrm>
-          <a:prstGeom prst="rect">
-            <a:avLst/>
-          </a:prstGeom>
-          <a:noFill/>
-        </p:spPr>
-        <p:txBody>
-          <a:bodyPr wrap="none" lIns="36576" tIns="18288" rIns="36576" bIns="18288" anchor="ctr">
-            <a:spAutoFit/>
-          </a:bodyPr>
-          <a:lstStyle/>
-          <a:p>
-            <a:pPr algn="ctr"/>
-            <a:r>
-              <a:rPr sz="1300" b="1">
-                <a:solidFill>
-                  <a:srgbClr val="162236"/>
-                </a:solidFill>
-                <a:latin typeface="Aptos"/>
-              </a:rPr>
-              <a:t>1 → 2</a:t>
-            </a:r>
-            <a:endParaRPr sz="1300" b="1">
-              <a:solidFill>
-                <a:srgbClr val="162236"/>
-              </a:solidFill>
-              <a:latin typeface="Aptos"/>
-            </a:endParaRPr>
-          </a:p>
-        </p:txBody>
-      </p:sp>
-      <p:sp>
-        <p:nvSpPr>
-          <p:cNvPr id="25" name="Rounded Rectangle 24"/>
-          <p:cNvSpPr/>
-          <p:nvPr/>
-        </p:nvSpPr>
-        <p:spPr>
-          <a:xfrm>
-            <a:off x="777240" y="4315968"/>
-            <a:ext cx="2359152" cy="393192"/>
-          </a:xfrm>
-          <a:prstGeom prst="roundRect">
-            <a:avLst/>
-          </a:prstGeom>
-          <a:solidFill>
-            <a:srgbClr val="EDF3FA"/>
-          </a:solidFill>
-          <a:ln w="12700">
-            <a:solidFill>
-              <a:srgbClr val="D77A0B"/>
-            </a:solidFill>
-          </a:ln>
-        </p:spPr>
-        <p:style>
-          <a:lnRef idx="1">
-            <a:schemeClr val="accent1"/>
-          </a:lnRef>
-          <a:fillRef idx="3">
-            <a:schemeClr val="accent1"/>
-          </a:fillRef>
-          <a:effectRef idx="2">
-            <a:schemeClr val="accent1"/>
-          </a:effectRef>
-          <a:fontRef idx="minor">
-            <a:schemeClr val="lt1"/>
-          </a:fontRef>
-        </p:style>
-        <p:txBody>
-          <a:bodyPr rtlCol="0" anchor="ctr"/>
-          <a:lstStyle/>
-          <a:p>
-            <a:pPr algn="ctr"/>
-          </a:p>
-        </p:txBody>
-      </p:sp>
-      <p:sp>
-        <p:nvSpPr>
-          <p:cNvPr id="26" name="TextBox 25"/>
-          <p:cNvSpPr txBox="1"/>
-          <p:nvPr/>
-        </p:nvSpPr>
-        <p:spPr>
-          <a:xfrm>
-            <a:off x="914400" y="4361688"/>
-            <a:ext cx="411480" cy="256032"/>
-          </a:xfrm>
-          <a:prstGeom prst="rect">
-            <a:avLst/>
-          </a:prstGeom>
-          <a:noFill/>
-        </p:spPr>
-        <p:txBody>
-          <a:bodyPr wrap="none" lIns="36576" tIns="18288" rIns="36576" bIns="18288" anchor="ctr">
-            <a:spAutoFit/>
-          </a:bodyPr>
-          <a:lstStyle/>
-          <a:p>
-            <a:pPr algn="ctr"/>
-            <a:r>
-              <a:rPr sz="1100" b="1">
-                <a:solidFill>
-                  <a:srgbClr val="D77A0B"/>
-                </a:solidFill>
-                <a:latin typeface="Aptos"/>
-              </a:rPr>
-              <a:t>E9</a:t>
-            </a:r>
-            <a:endParaRPr sz="1100" b="1">
-              <a:solidFill>
-                <a:srgbClr val="D77A0B"/>
-              </a:solidFill>
-              <a:latin typeface="Aptos"/>
-            </a:endParaRPr>
-          </a:p>
-        </p:txBody>
-      </p:sp>
-      <p:sp>
-        <p:nvSpPr>
-          <p:cNvPr id="27" name="TextBox 26"/>
-          <p:cNvSpPr txBox="1"/>
-          <p:nvPr/>
-        </p:nvSpPr>
-        <p:spPr>
-          <a:xfrm>
-            <a:off x="1389888" y="4361688"/>
-            <a:ext cx="1508760" cy="256032"/>
-          </a:xfrm>
-          <a:prstGeom prst="rect">
-            <a:avLst/>
-          </a:prstGeom>
-          <a:noFill/>
-        </p:spPr>
-        <p:txBody>
-          <a:bodyPr wrap="none" lIns="36576" tIns="18288" rIns="36576" bIns="18288" anchor="ctr">
-            <a:spAutoFit/>
-          </a:bodyPr>
-          <a:lstStyle/>
-          <a:p>
-            <a:pPr algn="ctr"/>
-            <a:r>
-              <a:rPr sz="1300" b="1">
-                <a:solidFill>
-                  <a:srgbClr val="162236"/>
-                </a:solidFill>
-                <a:latin typeface="Aptos"/>
-              </a:rPr>
-              <a:t>0 → 3</a:t>
-            </a:r>
-            <a:endParaRPr sz="1300" b="1">
-              <a:solidFill>
-                <a:srgbClr val="162236"/>
-              </a:solidFill>
-              <a:latin typeface="Aptos"/>
-            </a:endParaRPr>
-          </a:p>
-        </p:txBody>
-      </p:sp>
-      <p:sp>
-        <p:nvSpPr>
-          <p:cNvPr id="29" name="Rounded Rectangle 28"/>
-          <p:cNvSpPr/>
-          <p:nvPr/>
-        </p:nvSpPr>
-        <p:spPr>
-          <a:xfrm>
-            <a:off x="3968496" y="2112264"/>
-            <a:ext cx="2724912" cy="493776"/>
-          </a:xfrm>
-          <a:prstGeom prst="roundRect">
-            <a:avLst/>
-          </a:prstGeom>
-          <a:solidFill>
-            <a:srgbClr val="EDF3FA"/>
-          </a:solidFill>
-          <a:ln w="12700">
-            <a:solidFill>
-              <a:srgbClr val="3366D6"/>
-            </a:solidFill>
-          </a:ln>
-        </p:spPr>
-        <p:style>
-          <a:lnRef idx="1">
-            <a:schemeClr val="accent1"/>
-          </a:lnRef>
-          <a:fillRef idx="3">
-            <a:schemeClr val="accent1"/>
-          </a:fillRef>
-          <a:effectRef idx="2">
-            <a:schemeClr val="accent1"/>
-          </a:effectRef>
-          <a:fontRef idx="minor">
-            <a:schemeClr val="lt1"/>
-          </a:fontRef>
-        </p:style>
-        <p:txBody>
-          <a:bodyPr rtlCol="0" anchor="ctr"/>
-          <a:lstStyle/>
-          <a:p>
-            <a:pPr algn="ctr"/>
-          </a:p>
-        </p:txBody>
-      </p:sp>
-      <p:sp>
-        <p:nvSpPr>
-          <p:cNvPr id="30" name="TextBox 29"/>
-          <p:cNvSpPr txBox="1"/>
-          <p:nvPr/>
-        </p:nvSpPr>
-        <p:spPr>
-          <a:xfrm>
-            <a:off x="4087368" y="2176272"/>
-            <a:ext cx="658368" cy="256032"/>
-          </a:xfrm>
-          <a:prstGeom prst="rect">
-            <a:avLst/>
-          </a:prstGeom>
-          <a:noFill/>
-        </p:spPr>
-        <p:txBody>
-          <a:bodyPr wrap="none" lIns="36576" tIns="18288" rIns="36576" bIns="18288" anchor="ctr">
-            <a:spAutoFit/>
-          </a:bodyPr>
-          <a:lstStyle/>
-          <a:p>
-            <a:pPr algn="l"/>
-            <a:r>
-              <a:rPr sz="1000" b="1">
-                <a:solidFill>
-                  <a:srgbClr val="3366D6"/>
-                </a:solidFill>
-                <a:latin typeface="Aptos"/>
-              </a:rPr>
-              <a:t>Flow A</a:t>
-            </a:r>
-            <a:endParaRPr sz="1000" b="1">
-              <a:solidFill>
-                <a:srgbClr val="3366D6"/>
-              </a:solidFill>
-              <a:latin typeface="Aptos"/>
-            </a:endParaRPr>
-          </a:p>
-        </p:txBody>
-      </p:sp>
-      <p:sp>
-        <p:nvSpPr>
-          <p:cNvPr id="31" name="TextBox 30"/>
-          <p:cNvSpPr txBox="1"/>
-          <p:nvPr/>
-        </p:nvSpPr>
-        <p:spPr>
-          <a:xfrm>
-            <a:off x="4736592" y="2167128"/>
-            <a:ext cx="713232" cy="265176"/>
-          </a:xfrm>
-          <a:prstGeom prst="rect">
-            <a:avLst/>
-          </a:prstGeom>
-          <a:noFill/>
-        </p:spPr>
-        <p:txBody>
-          <a:bodyPr wrap="none" lIns="36576" tIns="18288" rIns="36576" bIns="18288" anchor="ctr">
-            <a:spAutoFit/>
-          </a:bodyPr>
-          <a:lstStyle/>
-          <a:p>
-            <a:pPr algn="ctr"/>
-            <a:r>
-              <a:rPr sz="1200" b="1">
-                <a:solidFill>
-                  <a:srgbClr val="162236"/>
-                </a:solidFill>
-                <a:latin typeface="Aptos"/>
-              </a:rPr>
-              <a:t>0 → 1</a:t>
-            </a:r>
-            <a:endParaRPr sz="1200" b="1">
-              <a:solidFill>
-                <a:srgbClr val="162236"/>
-              </a:solidFill>
-              <a:latin typeface="Aptos"/>
-            </a:endParaRPr>
-          </a:p>
-        </p:txBody>
-      </p:sp>
-      <p:sp>
-        <p:nvSpPr>
-          <p:cNvPr id="32" name="TextBox 31"/>
-          <p:cNvSpPr txBox="1"/>
-          <p:nvPr/>
-        </p:nvSpPr>
-        <p:spPr>
-          <a:xfrm>
-            <a:off x="5468112" y="2176272"/>
-            <a:ext cx="1060704" cy="256032"/>
-          </a:xfrm>
-          <a:prstGeom prst="rect">
-            <a:avLst/>
-          </a:prstGeom>
-          <a:noFill/>
-        </p:spPr>
-        <p:txBody>
-          <a:bodyPr wrap="none" lIns="36576" tIns="18288" rIns="36576" bIns="18288" anchor="ctr">
-            <a:spAutoFit/>
-          </a:bodyPr>
-          <a:lstStyle/>
-          <a:p>
-            <a:pPr algn="ctr"/>
-            <a:r>
-              <a:rPr sz="1000" b="1">
-                <a:solidFill>
-                  <a:srgbClr val="596C85"/>
-                </a:solidFill>
-                <a:latin typeface="Aptos"/>
-              </a:rPr>
-              <a:t>{E1, E7}</a:t>
-            </a:r>
-            <a:endParaRPr sz="1000" b="1">
-              <a:solidFill>
-                <a:srgbClr val="596C85"/>
-              </a:solidFill>
-              <a:latin typeface="Aptos"/>
-            </a:endParaRPr>
-          </a:p>
-        </p:txBody>
-      </p:sp>
-      <p:sp>
-        <p:nvSpPr>
-          <p:cNvPr id="33" name="Rounded Rectangle 32"/>
-          <p:cNvSpPr/>
-          <p:nvPr/>
-        </p:nvSpPr>
-        <p:spPr>
-          <a:xfrm>
-            <a:off x="3968496" y="2770632"/>
-            <a:ext cx="2724912" cy="493776"/>
-          </a:xfrm>
-          <a:prstGeom prst="roundRect">
-            <a:avLst/>
-          </a:prstGeom>
-          <a:solidFill>
-            <a:srgbClr val="EDF3FA"/>
-          </a:solidFill>
-          <a:ln w="12700">
-            <a:solidFill>
-              <a:srgbClr val="139B67"/>
-            </a:solidFill>
-          </a:ln>
-        </p:spPr>
-        <p:style>
-          <a:lnRef idx="1">
-            <a:schemeClr val="accent1"/>
-          </a:lnRef>
-          <a:fillRef idx="3">
-            <a:schemeClr val="accent1"/>
-          </a:fillRef>
-          <a:effectRef idx="2">
-            <a:schemeClr val="accent1"/>
-          </a:effectRef>
-          <a:fontRef idx="minor">
-            <a:schemeClr val="lt1"/>
-          </a:fontRef>
-        </p:style>
-        <p:txBody>
-          <a:bodyPr rtlCol="0" anchor="ctr"/>
-          <a:lstStyle/>
-          <a:p>
-            <a:pPr algn="ctr"/>
-          </a:p>
-        </p:txBody>
-      </p:sp>
-      <p:sp>
-        <p:nvSpPr>
-          <p:cNvPr id="34" name="TextBox 33"/>
-          <p:cNvSpPr txBox="1"/>
-          <p:nvPr/>
-        </p:nvSpPr>
-        <p:spPr>
-          <a:xfrm>
-            <a:off x="4087368" y="2834640"/>
-            <a:ext cx="658368" cy="256032"/>
-          </a:xfrm>
-          <a:prstGeom prst="rect">
-            <a:avLst/>
-          </a:prstGeom>
-          <a:noFill/>
-        </p:spPr>
-        <p:txBody>
-          <a:bodyPr wrap="none" lIns="36576" tIns="18288" rIns="36576" bIns="18288" anchor="ctr">
-            <a:spAutoFit/>
-          </a:bodyPr>
-          <a:lstStyle/>
-          <a:p>
-            <a:pPr algn="l"/>
-            <a:r>
-              <a:rPr sz="1000" b="1">
-                <a:solidFill>
-                  <a:srgbClr val="139B67"/>
-                </a:solidFill>
-                <a:latin typeface="Aptos"/>
-              </a:rPr>
-              <a:t>Flow B</a:t>
-            </a:r>
-            <a:endParaRPr sz="1000" b="1">
-              <a:solidFill>
-                <a:srgbClr val="139B67"/>
-              </a:solidFill>
-              <a:latin typeface="Aptos"/>
-            </a:endParaRPr>
-          </a:p>
-        </p:txBody>
-      </p:sp>
-      <p:sp>
-        <p:nvSpPr>
-          <p:cNvPr id="35" name="TextBox 34"/>
-          <p:cNvSpPr txBox="1"/>
-          <p:nvPr/>
-        </p:nvSpPr>
-        <p:spPr>
-          <a:xfrm>
-            <a:off x="4736592" y="2825496"/>
-            <a:ext cx="713232" cy="265176"/>
-          </a:xfrm>
-          <a:prstGeom prst="rect">
-            <a:avLst/>
-          </a:prstGeom>
-          <a:noFill/>
-        </p:spPr>
-        <p:txBody>
-          <a:bodyPr wrap="none" lIns="36576" tIns="18288" rIns="36576" bIns="18288" anchor="ctr">
-            <a:spAutoFit/>
-          </a:bodyPr>
-          <a:lstStyle/>
-          <a:p>
-            <a:pPr algn="ctr"/>
-            <a:r>
-              <a:rPr sz="1200" b="1">
-                <a:solidFill>
-                  <a:srgbClr val="162236"/>
-                </a:solidFill>
-                <a:latin typeface="Aptos"/>
-              </a:rPr>
-              <a:t>2 → 3</a:t>
-            </a:r>
-            <a:endParaRPr sz="1200" b="1">
-              <a:solidFill>
-                <a:srgbClr val="162236"/>
-              </a:solidFill>
-              <a:latin typeface="Aptos"/>
-            </a:endParaRPr>
-          </a:p>
-        </p:txBody>
-      </p:sp>
-      <p:sp>
-        <p:nvSpPr>
-          <p:cNvPr id="36" name="TextBox 35"/>
-          <p:cNvSpPr txBox="1"/>
-          <p:nvPr/>
-        </p:nvSpPr>
-        <p:spPr>
-          <a:xfrm>
-            <a:off x="5468112" y="2834640"/>
-            <a:ext cx="1060704" cy="256032"/>
-          </a:xfrm>
-          <a:prstGeom prst="rect">
-            <a:avLst/>
-          </a:prstGeom>
-          <a:noFill/>
-        </p:spPr>
-        <p:txBody>
-          <a:bodyPr wrap="none" lIns="36576" tIns="18288" rIns="36576" bIns="18288" anchor="ctr">
-            <a:spAutoFit/>
-          </a:bodyPr>
-          <a:lstStyle/>
-          <a:p>
-            <a:pPr algn="ctr"/>
-            <a:r>
-              <a:rPr sz="1000" b="1">
-                <a:solidFill>
-                  <a:srgbClr val="596C85"/>
-                </a:solidFill>
-                <a:latin typeface="Aptos"/>
-              </a:rPr>
-              <a:t>{E3}</a:t>
-            </a:r>
-            <a:endParaRPr sz="1000" b="1">
-              <a:solidFill>
-                <a:srgbClr val="596C85"/>
-              </a:solidFill>
-              <a:latin typeface="Aptos"/>
-            </a:endParaRPr>
-          </a:p>
-        </p:txBody>
-      </p:sp>
-      <p:sp>
-        <p:nvSpPr>
-          <p:cNvPr id="37" name="Rounded Rectangle 36"/>
-          <p:cNvSpPr/>
-          <p:nvPr/>
-        </p:nvSpPr>
-        <p:spPr>
-          <a:xfrm>
-            <a:off x="3968496" y="3429000"/>
-            <a:ext cx="2724912" cy="493776"/>
-          </a:xfrm>
-          <a:prstGeom prst="roundRect">
-            <a:avLst/>
-          </a:prstGeom>
-          <a:solidFill>
-            <a:srgbClr val="EDF3FA"/>
-          </a:solidFill>
-          <a:ln w="12700">
-            <a:solidFill>
-              <a:srgbClr val="A24BC4"/>
-            </a:solidFill>
-          </a:ln>
-        </p:spPr>
-        <p:style>
-          <a:lnRef idx="1">
-            <a:schemeClr val="accent1"/>
-          </a:lnRef>
-          <a:fillRef idx="3">
-            <a:schemeClr val="accent1"/>
-          </a:fillRef>
-          <a:effectRef idx="2">
-            <a:schemeClr val="accent1"/>
-          </a:effectRef>
-          <a:fontRef idx="minor">
-            <a:schemeClr val="lt1"/>
-          </a:fontRef>
-        </p:style>
-        <p:txBody>
-          <a:bodyPr rtlCol="0" anchor="ctr"/>
-          <a:lstStyle/>
-          <a:p>
-            <a:pPr algn="ctr"/>
-          </a:p>
-        </p:txBody>
-      </p:sp>
-      <p:sp>
-        <p:nvSpPr>
-          <p:cNvPr id="38" name="TextBox 37"/>
-          <p:cNvSpPr txBox="1"/>
-          <p:nvPr/>
-        </p:nvSpPr>
-        <p:spPr>
-          <a:xfrm>
-            <a:off x="4087368" y="3493008"/>
-            <a:ext cx="658368" cy="256032"/>
-          </a:xfrm>
-          <a:prstGeom prst="rect">
-            <a:avLst/>
-          </a:prstGeom>
-          <a:noFill/>
-        </p:spPr>
-        <p:txBody>
-          <a:bodyPr wrap="none" lIns="36576" tIns="18288" rIns="36576" bIns="18288" anchor="ctr">
-            <a:spAutoFit/>
-          </a:bodyPr>
-          <a:lstStyle/>
-          <a:p>
-            <a:pPr algn="l"/>
-            <a:r>
-              <a:rPr sz="1000" b="1">
-                <a:solidFill>
-                  <a:srgbClr val="A24BC4"/>
-                </a:solidFill>
-                <a:latin typeface="Aptos"/>
-              </a:rPr>
-              <a:t>Flow C</a:t>
-            </a:r>
-            <a:endParaRPr sz="1000" b="1">
-              <a:solidFill>
-                <a:srgbClr val="A24BC4"/>
-              </a:solidFill>
-              <a:latin typeface="Aptos"/>
-            </a:endParaRPr>
-          </a:p>
-        </p:txBody>
-      </p:sp>
-      <p:sp>
-        <p:nvSpPr>
-          <p:cNvPr id="39" name="TextBox 38"/>
-          <p:cNvSpPr txBox="1"/>
-          <p:nvPr/>
-        </p:nvSpPr>
-        <p:spPr>
-          <a:xfrm>
-            <a:off x="4736592" y="3483864"/>
-            <a:ext cx="713232" cy="265176"/>
-          </a:xfrm>
-          <a:prstGeom prst="rect">
-            <a:avLst/>
-          </a:prstGeom>
-          <a:noFill/>
-        </p:spPr>
-        <p:txBody>
-          <a:bodyPr wrap="none" lIns="36576" tIns="18288" rIns="36576" bIns="18288" anchor="ctr">
-            <a:spAutoFit/>
-          </a:bodyPr>
-          <a:lstStyle/>
-          <a:p>
-            <a:pPr algn="ctr"/>
-            <a:r>
-              <a:rPr sz="1200" b="1">
-                <a:solidFill>
-                  <a:srgbClr val="162236"/>
-                </a:solidFill>
-                <a:latin typeface="Aptos"/>
-              </a:rPr>
-              <a:t>1 → 2</a:t>
-            </a:r>
-            <a:endParaRPr sz="1200" b="1">
-              <a:solidFill>
-                <a:srgbClr val="162236"/>
-              </a:solidFill>
-              <a:latin typeface="Aptos"/>
-            </a:endParaRPr>
-          </a:p>
-        </p:txBody>
-      </p:sp>
-      <p:sp>
-        <p:nvSpPr>
-          <p:cNvPr id="40" name="TextBox 39"/>
-          <p:cNvSpPr txBox="1"/>
-          <p:nvPr/>
-        </p:nvSpPr>
-        <p:spPr>
-          <a:xfrm>
-            <a:off x="5468112" y="3493008"/>
-            <a:ext cx="1060704" cy="256032"/>
-          </a:xfrm>
-          <a:prstGeom prst="rect">
-            <a:avLst/>
-          </a:prstGeom>
-          <a:noFill/>
-        </p:spPr>
-        <p:txBody>
-          <a:bodyPr wrap="none" lIns="36576" tIns="18288" rIns="36576" bIns="18288" anchor="ctr">
-            <a:spAutoFit/>
-          </a:bodyPr>
-          <a:lstStyle/>
-          <a:p>
-            <a:pPr algn="ctr"/>
-            <a:r>
-              <a:rPr sz="1000" b="1">
-                <a:solidFill>
-                  <a:srgbClr val="596C85"/>
-                </a:solidFill>
-                <a:latin typeface="Aptos"/>
-              </a:rPr>
-              <a:t>{E4}</a:t>
-            </a:r>
-            <a:endParaRPr sz="1000" b="1">
-              <a:solidFill>
-                <a:srgbClr val="596C85"/>
-              </a:solidFill>
-              <a:latin typeface="Aptos"/>
-            </a:endParaRPr>
-          </a:p>
-        </p:txBody>
-      </p:sp>
-      <p:sp>
-        <p:nvSpPr>
-          <p:cNvPr id="41" name="Rounded Rectangle 40"/>
-          <p:cNvSpPr/>
-          <p:nvPr/>
-        </p:nvSpPr>
-        <p:spPr>
-          <a:xfrm>
-            <a:off x="3968496" y="4087368"/>
-            <a:ext cx="2724912" cy="493776"/>
-          </a:xfrm>
-          <a:prstGeom prst="roundRect">
-            <a:avLst/>
-          </a:prstGeom>
-          <a:solidFill>
-            <a:srgbClr val="EDF3FA"/>
-          </a:solidFill>
-          <a:ln w="12700">
-            <a:solidFill>
-              <a:srgbClr val="D77A0B"/>
-            </a:solidFill>
-          </a:ln>
-        </p:spPr>
-        <p:style>
-          <a:lnRef idx="1">
-            <a:schemeClr val="accent1"/>
-          </a:lnRef>
-          <a:fillRef idx="3">
-            <a:schemeClr val="accent1"/>
-          </a:fillRef>
-          <a:effectRef idx="2">
-            <a:schemeClr val="accent1"/>
-          </a:effectRef>
-          <a:fontRef idx="minor">
-            <a:schemeClr val="lt1"/>
-          </a:fontRef>
-        </p:style>
-        <p:txBody>
-          <a:bodyPr rtlCol="0" anchor="ctr"/>
-          <a:lstStyle/>
-          <a:p>
-            <a:pPr algn="ctr"/>
-          </a:p>
-        </p:txBody>
-      </p:sp>
-      <p:sp>
-        <p:nvSpPr>
-          <p:cNvPr id="42" name="TextBox 41"/>
-          <p:cNvSpPr txBox="1"/>
-          <p:nvPr/>
-        </p:nvSpPr>
-        <p:spPr>
-          <a:xfrm>
-            <a:off x="4087368" y="4151376"/>
-            <a:ext cx="658368" cy="256032"/>
-          </a:xfrm>
-          <a:prstGeom prst="rect">
-            <a:avLst/>
-          </a:prstGeom>
-          <a:noFill/>
-        </p:spPr>
-        <p:txBody>
-          <a:bodyPr wrap="none" lIns="36576" tIns="18288" rIns="36576" bIns="18288" anchor="ctr">
-            <a:spAutoFit/>
-          </a:bodyPr>
-          <a:lstStyle/>
-          <a:p>
-            <a:pPr algn="l"/>
-            <a:r>
-              <a:rPr sz="1000" b="1">
-                <a:solidFill>
-                  <a:srgbClr val="D77A0B"/>
-                </a:solidFill>
-                <a:latin typeface="Aptos"/>
-              </a:rPr>
-              <a:t>Flow D</a:t>
-            </a:r>
-            <a:endParaRPr sz="1000" b="1">
-              <a:solidFill>
-                <a:srgbClr val="D77A0B"/>
-              </a:solidFill>
-              <a:latin typeface="Aptos"/>
-            </a:endParaRPr>
-          </a:p>
-        </p:txBody>
-      </p:sp>
-      <p:sp>
-        <p:nvSpPr>
-          <p:cNvPr id="43" name="TextBox 42"/>
-          <p:cNvSpPr txBox="1"/>
-          <p:nvPr/>
-        </p:nvSpPr>
-        <p:spPr>
-          <a:xfrm>
-            <a:off x="4736592" y="4142232"/>
-            <a:ext cx="713232" cy="265176"/>
-          </a:xfrm>
-          <a:prstGeom prst="rect">
-            <a:avLst/>
-          </a:prstGeom>
-          <a:noFill/>
-        </p:spPr>
-        <p:txBody>
-          <a:bodyPr wrap="none" lIns="36576" tIns="18288" rIns="36576" bIns="18288" anchor="ctr">
-            <a:spAutoFit/>
-          </a:bodyPr>
-          <a:lstStyle/>
-          <a:p>
-            <a:pPr algn="ctr"/>
-            <a:r>
-              <a:rPr sz="1200" b="1">
-                <a:solidFill>
-                  <a:srgbClr val="162236"/>
-                </a:solidFill>
-                <a:latin typeface="Aptos"/>
-              </a:rPr>
-              <a:t>0 → 3</a:t>
-            </a:r>
-            <a:endParaRPr sz="1200" b="1">
-              <a:solidFill>
-                <a:srgbClr val="162236"/>
-              </a:solidFill>
-              <a:latin typeface="Aptos"/>
-            </a:endParaRPr>
-          </a:p>
-        </p:txBody>
-      </p:sp>
-      <p:sp>
-        <p:nvSpPr>
-          <p:cNvPr id="44" name="TextBox 43"/>
-          <p:cNvSpPr txBox="1"/>
-          <p:nvPr/>
-        </p:nvSpPr>
-        <p:spPr>
-          <a:xfrm>
-            <a:off x="5468112" y="4151376"/>
-            <a:ext cx="1060704" cy="256032"/>
-          </a:xfrm>
-          <a:prstGeom prst="rect">
-            <a:avLst/>
-          </a:prstGeom>
-          <a:noFill/>
-        </p:spPr>
-        <p:txBody>
-          <a:bodyPr wrap="none" lIns="36576" tIns="18288" rIns="36576" bIns="18288" anchor="ctr">
-            <a:spAutoFit/>
-          </a:bodyPr>
-          <a:lstStyle/>
-          <a:p>
-            <a:pPr algn="ctr"/>
-            <a:r>
-              <a:rPr sz="1000" b="1">
-                <a:solidFill>
-                  <a:srgbClr val="596C85"/>
-                </a:solidFill>
-                <a:latin typeface="Aptos"/>
-              </a:rPr>
-              <a:t>{E9}</a:t>
-            </a:r>
-            <a:endParaRPr sz="1000" b="1">
-              <a:solidFill>
-                <a:srgbClr val="596C85"/>
-              </a:solidFill>
-              <a:latin typeface="Aptos"/>
-            </a:endParaRPr>
-          </a:p>
-        </p:txBody>
-      </p:sp>
-      <p:sp>
-        <p:nvSpPr>
-          <p:cNvPr id="45" name="TextBox 44"/>
-          <p:cNvSpPr txBox="1"/>
-          <p:nvPr/>
-        </p:nvSpPr>
-        <p:spPr>
-          <a:xfrm>
-            <a:off x="3996055" y="4709160"/>
-            <a:ext cx="2670175" cy="228600"/>
-          </a:xfrm>
-          <a:prstGeom prst="rect">
-            <a:avLst/>
-          </a:prstGeom>
-          <a:noFill/>
-        </p:spPr>
-        <p:txBody>
-          <a:bodyPr wrap="none" lIns="36576" tIns="18288" rIns="36576" bIns="18288" anchor="ctr">
-            <a:noAutofit/>
-          </a:bodyPr>
-          <a:lstStyle/>
-          <a:p>
-            <a:pPr algn="ctr"/>
-            <a:r>
-              <a:rPr sz="1000" b="0">
-                <a:solidFill>
-                  <a:srgbClr val="596C85"/>
-                </a:solidFill>
-                <a:latin typeface="Aptos"/>
-              </a:rPr>
-              <a:t>One flow = one directed (source, destination) pair.</a:t>
-            </a:r>
-            <a:endParaRPr sz="1000" b="0">
-              <a:solidFill>
-                <a:srgbClr val="596C85"/>
-              </a:solidFill>
-              <a:latin typeface="Aptos"/>
-            </a:endParaRPr>
-          </a:p>
-        </p:txBody>
-      </p:sp>
-      <p:sp>
-        <p:nvSpPr>
-          <p:cNvPr id="46" name="Rounded Rectangle 45"/>
-          <p:cNvSpPr/>
-          <p:nvPr/>
-        </p:nvSpPr>
-        <p:spPr>
-          <a:xfrm>
-            <a:off x="7516368" y="2048256"/>
-            <a:ext cx="3886200" cy="1207008"/>
-          </a:xfrm>
-          <a:prstGeom prst="roundRect">
-            <a:avLst/>
-          </a:prstGeom>
-          <a:solidFill>
-            <a:srgbClr val="EDF3FA"/>
-          </a:solidFill>
-          <a:ln w="12700">
-            <a:solidFill>
-              <a:srgbClr val="139B67"/>
-            </a:solidFill>
-          </a:ln>
-        </p:spPr>
-        <p:style>
-          <a:lnRef idx="1">
-            <a:schemeClr val="accent1"/>
-          </a:lnRef>
-          <a:fillRef idx="3">
-            <a:schemeClr val="accent1"/>
-          </a:fillRef>
-          <a:effectRef idx="2">
-            <a:schemeClr val="accent1"/>
-          </a:effectRef>
-          <a:fontRef idx="minor">
-            <a:schemeClr val="lt1"/>
-          </a:fontRef>
-        </p:style>
-        <p:txBody>
-          <a:bodyPr rtlCol="0" anchor="ctr"/>
-          <a:lstStyle/>
-          <a:p>
-            <a:pPr algn="ctr"/>
-          </a:p>
-        </p:txBody>
-      </p:sp>
-      <p:sp>
-        <p:nvSpPr>
-          <p:cNvPr id="47" name="TextBox 46"/>
-          <p:cNvSpPr txBox="1"/>
-          <p:nvPr/>
-        </p:nvSpPr>
-        <p:spPr>
-          <a:xfrm>
-            <a:off x="7699248" y="2167128"/>
-            <a:ext cx="841248" cy="274320"/>
-          </a:xfrm>
-          <a:prstGeom prst="rect">
-            <a:avLst/>
-          </a:prstGeom>
-          <a:noFill/>
-        </p:spPr>
-        <p:txBody>
-          <a:bodyPr wrap="none" lIns="36576" tIns="18288" rIns="36576" bIns="18288" anchor="ctr">
-            <a:spAutoFit/>
-          </a:bodyPr>
-          <a:lstStyle/>
-          <a:p>
-            <a:pPr algn="l"/>
-            <a:r>
-              <a:rPr sz="1300" b="1">
-                <a:solidFill>
-                  <a:srgbClr val="139B67"/>
-                </a:solidFill>
-                <a:latin typeface="Aptos"/>
-              </a:rPr>
-              <a:t>Batch 0</a:t>
-            </a:r>
-            <a:endParaRPr sz="1300" b="1">
-              <a:solidFill>
-                <a:srgbClr val="139B67"/>
-              </a:solidFill>
-              <a:latin typeface="Aptos"/>
-            </a:endParaRPr>
-          </a:p>
-        </p:txBody>
-      </p:sp>
-      <p:sp>
-        <p:nvSpPr>
-          <p:cNvPr id="48" name="TextBox 47"/>
-          <p:cNvSpPr txBox="1"/>
-          <p:nvPr/>
-        </p:nvSpPr>
-        <p:spPr>
-          <a:xfrm>
-            <a:off x="8577072" y="2139696"/>
-            <a:ext cx="1143000" cy="310896"/>
-          </a:xfrm>
-          <a:prstGeom prst="rect">
-            <a:avLst/>
-          </a:prstGeom>
-          <a:noFill/>
-        </p:spPr>
-        <p:txBody>
-          <a:bodyPr wrap="none" lIns="36576" tIns="18288" rIns="36576" bIns="18288" anchor="ctr">
-            <a:spAutoFit/>
-          </a:bodyPr>
-          <a:lstStyle/>
-          <a:p>
-            <a:pPr algn="ctr"/>
-            <a:r>
-              <a:rPr sz="1500" b="1">
-                <a:solidFill>
-                  <a:srgbClr val="162236"/>
-                </a:solidFill>
-                <a:latin typeface="Aptos"/>
-              </a:rPr>
-              <a:t>A: 0→1</a:t>
-            </a:r>
-            <a:endParaRPr sz="1500" b="1">
-              <a:solidFill>
-                <a:srgbClr val="162236"/>
-              </a:solidFill>
-              <a:latin typeface="Aptos"/>
-            </a:endParaRPr>
-          </a:p>
-        </p:txBody>
-      </p:sp>
-      <p:sp>
-        <p:nvSpPr>
-          <p:cNvPr id="49" name="TextBox 48"/>
-          <p:cNvSpPr txBox="1"/>
-          <p:nvPr/>
-        </p:nvSpPr>
-        <p:spPr>
-          <a:xfrm>
-            <a:off x="9710928" y="2139696"/>
-            <a:ext cx="256032" cy="310896"/>
-          </a:xfrm>
-          <a:prstGeom prst="rect">
-            <a:avLst/>
-          </a:prstGeom>
-          <a:noFill/>
-        </p:spPr>
-        <p:txBody>
-          <a:bodyPr wrap="none" lIns="36576" tIns="18288" rIns="36576" bIns="18288" anchor="ctr">
-            <a:spAutoFit/>
-          </a:bodyPr>
-          <a:lstStyle/>
-          <a:p>
-            <a:pPr algn="ctr"/>
-            <a:r>
-              <a:rPr sz="1500" b="1">
-                <a:solidFill>
-                  <a:srgbClr val="596C85"/>
-                </a:solidFill>
-                <a:latin typeface="Aptos"/>
-              </a:rPr>
-              <a:t>+</a:t>
-            </a:r>
-            <a:endParaRPr sz="1500" b="1">
-              <a:solidFill>
-                <a:srgbClr val="596C85"/>
-              </a:solidFill>
-              <a:latin typeface="Aptos"/>
-            </a:endParaRPr>
-          </a:p>
-        </p:txBody>
-      </p:sp>
-      <p:sp>
-        <p:nvSpPr>
-          <p:cNvPr id="50" name="TextBox 49"/>
-          <p:cNvSpPr txBox="1"/>
-          <p:nvPr/>
-        </p:nvSpPr>
-        <p:spPr>
-          <a:xfrm>
-            <a:off x="9976104" y="2139696"/>
-            <a:ext cx="1170432" cy="310896"/>
-          </a:xfrm>
-          <a:prstGeom prst="rect">
-            <a:avLst/>
-          </a:prstGeom>
-          <a:noFill/>
-        </p:spPr>
-        <p:txBody>
-          <a:bodyPr wrap="none" lIns="36576" tIns="18288" rIns="36576" bIns="18288" anchor="ctr">
-            <a:spAutoFit/>
-          </a:bodyPr>
-          <a:lstStyle/>
-          <a:p>
-            <a:pPr algn="ctr"/>
-            <a:r>
-              <a:rPr sz="1500" b="1">
-                <a:solidFill>
-                  <a:srgbClr val="162236"/>
-                </a:solidFill>
-                <a:latin typeface="Aptos"/>
-              </a:rPr>
-              <a:t>B: 2→3</a:t>
-            </a:r>
-            <a:endParaRPr sz="1500" b="1">
-              <a:solidFill>
-                <a:srgbClr val="162236"/>
-              </a:solidFill>
-              <a:latin typeface="Aptos"/>
-            </a:endParaRPr>
-          </a:p>
-        </p:txBody>
-      </p:sp>
-      <p:sp>
-        <p:nvSpPr>
-          <p:cNvPr id="51" name="TextBox 50"/>
-          <p:cNvSpPr txBox="1"/>
-          <p:nvPr/>
-        </p:nvSpPr>
-        <p:spPr>
-          <a:xfrm>
-            <a:off x="7717536" y="2624328"/>
-            <a:ext cx="3493008" cy="393192"/>
-          </a:xfrm>
-          <a:prstGeom prst="rect">
-            <a:avLst/>
-          </a:prstGeom>
-          <a:noFill/>
-        </p:spPr>
-        <p:txBody>
-          <a:bodyPr wrap="none" lIns="36576" tIns="18288" rIns="36576" bIns="18288" anchor="ctr">
-            <a:spAutoFit/>
-          </a:bodyPr>
-          <a:lstStyle/>
-          <a:p>
-            <a:pPr algn="ctr"/>
-            <a:r>
-              <a:rPr sz="900" b="0">
-                <a:solidFill>
-                  <a:srgbClr val="596C85"/>
-                </a:solidFill>
-                <a:latin typeface="Aptos"/>
-              </a:rPr>
-              <a:t>Runs concurrently — endpoints {0,1} and {2,3} do not overlap.</a:t>
-            </a:r>
-            <a:endParaRPr sz="900" b="0">
-              <a:solidFill>
-                <a:srgbClr val="596C85"/>
-              </a:solidFill>
-              <a:latin typeface="Aptos"/>
-            </a:endParaRPr>
-          </a:p>
-        </p:txBody>
-      </p:sp>
-      <p:sp>
-        <p:nvSpPr>
-          <p:cNvPr id="52" name="Rounded Rectangle 51"/>
-          <p:cNvSpPr/>
-          <p:nvPr/>
-        </p:nvSpPr>
-        <p:spPr>
-          <a:xfrm>
-            <a:off x="7516368" y="3483864"/>
-            <a:ext cx="3886200" cy="1207008"/>
-          </a:xfrm>
-          <a:prstGeom prst="roundRect">
-            <a:avLst/>
-          </a:prstGeom>
-          <a:solidFill>
-            <a:srgbClr val="EDF3FA"/>
-          </a:solidFill>
-          <a:ln w="12700">
-            <a:solidFill>
-              <a:srgbClr val="A24BC4"/>
-            </a:solidFill>
-          </a:ln>
-        </p:spPr>
-        <p:style>
-          <a:lnRef idx="1">
-            <a:schemeClr val="accent1"/>
-          </a:lnRef>
-          <a:fillRef idx="3">
-            <a:schemeClr val="accent1"/>
-          </a:fillRef>
-          <a:effectRef idx="2">
-            <a:schemeClr val="accent1"/>
-          </a:effectRef>
-          <a:fontRef idx="minor">
-            <a:schemeClr val="lt1"/>
-          </a:fontRef>
-        </p:style>
-        <p:txBody>
-          <a:bodyPr rtlCol="0" anchor="ctr"/>
-          <a:lstStyle/>
-          <a:p>
-            <a:pPr algn="ctr"/>
-          </a:p>
-        </p:txBody>
-      </p:sp>
-      <p:sp>
-        <p:nvSpPr>
-          <p:cNvPr id="53" name="TextBox 52"/>
-          <p:cNvSpPr txBox="1"/>
-          <p:nvPr/>
-        </p:nvSpPr>
-        <p:spPr>
-          <a:xfrm>
-            <a:off x="7699248" y="3602736"/>
-            <a:ext cx="841248" cy="274320"/>
-          </a:xfrm>
-          <a:prstGeom prst="rect">
-            <a:avLst/>
-          </a:prstGeom>
-          <a:noFill/>
-        </p:spPr>
-        <p:txBody>
-          <a:bodyPr wrap="none" lIns="36576" tIns="18288" rIns="36576" bIns="18288" anchor="ctr">
-            <a:spAutoFit/>
-          </a:bodyPr>
-          <a:lstStyle/>
-          <a:p>
-            <a:pPr algn="l"/>
-            <a:r>
-              <a:rPr sz="1300" b="1">
-                <a:solidFill>
-                  <a:srgbClr val="A24BC4"/>
-                </a:solidFill>
-                <a:latin typeface="Aptos"/>
-              </a:rPr>
-              <a:t>Batch 1</a:t>
-            </a:r>
-            <a:endParaRPr sz="1300" b="1">
-              <a:solidFill>
-                <a:srgbClr val="A24BC4"/>
-              </a:solidFill>
-              <a:latin typeface="Aptos"/>
-            </a:endParaRPr>
-          </a:p>
-        </p:txBody>
-      </p:sp>
-      <p:sp>
-        <p:nvSpPr>
-          <p:cNvPr id="54" name="TextBox 53"/>
-          <p:cNvSpPr txBox="1"/>
-          <p:nvPr/>
-        </p:nvSpPr>
-        <p:spPr>
-          <a:xfrm>
-            <a:off x="8577072" y="3575304"/>
-            <a:ext cx="1143000" cy="310896"/>
-          </a:xfrm>
-          <a:prstGeom prst="rect">
-            <a:avLst/>
-          </a:prstGeom>
-          <a:noFill/>
-        </p:spPr>
-        <p:txBody>
-          <a:bodyPr wrap="none" lIns="36576" tIns="18288" rIns="36576" bIns="18288" anchor="ctr">
-            <a:spAutoFit/>
-          </a:bodyPr>
-          <a:lstStyle/>
-          <a:p>
-            <a:pPr algn="ctr"/>
-            <a:r>
-              <a:rPr sz="1500" b="1">
-                <a:solidFill>
-                  <a:srgbClr val="162236"/>
-                </a:solidFill>
-                <a:latin typeface="Aptos"/>
-              </a:rPr>
-              <a:t>C: 1→2</a:t>
-            </a:r>
-            <a:endParaRPr sz="1500" b="1">
-              <a:solidFill>
-                <a:srgbClr val="162236"/>
-              </a:solidFill>
-              <a:latin typeface="Aptos"/>
-            </a:endParaRPr>
-          </a:p>
-        </p:txBody>
-      </p:sp>
-      <p:sp>
-        <p:nvSpPr>
-          <p:cNvPr id="55" name="TextBox 54"/>
-          <p:cNvSpPr txBox="1"/>
-          <p:nvPr/>
-        </p:nvSpPr>
-        <p:spPr>
-          <a:xfrm>
-            <a:off x="9710928" y="3575304"/>
-            <a:ext cx="256032" cy="310896"/>
-          </a:xfrm>
-          <a:prstGeom prst="rect">
-            <a:avLst/>
-          </a:prstGeom>
-          <a:noFill/>
-        </p:spPr>
-        <p:txBody>
-          <a:bodyPr wrap="none" lIns="36576" tIns="18288" rIns="36576" bIns="18288" anchor="ctr">
-            <a:spAutoFit/>
-          </a:bodyPr>
-          <a:lstStyle/>
-          <a:p>
-            <a:pPr algn="ctr"/>
-            <a:r>
-              <a:rPr sz="1500" b="1">
-                <a:solidFill>
-                  <a:srgbClr val="596C85"/>
-                </a:solidFill>
-                <a:latin typeface="Aptos"/>
-              </a:rPr>
-              <a:t>+</a:t>
-            </a:r>
-            <a:endParaRPr sz="1500" b="1">
-              <a:solidFill>
-                <a:srgbClr val="596C85"/>
-              </a:solidFill>
-              <a:latin typeface="Aptos"/>
-            </a:endParaRPr>
-          </a:p>
-        </p:txBody>
-      </p:sp>
-      <p:sp>
-        <p:nvSpPr>
-          <p:cNvPr id="56" name="TextBox 55"/>
-          <p:cNvSpPr txBox="1"/>
-          <p:nvPr/>
-        </p:nvSpPr>
-        <p:spPr>
-          <a:xfrm>
-            <a:off x="9976104" y="3575304"/>
-            <a:ext cx="1170432" cy="310896"/>
-          </a:xfrm>
-          <a:prstGeom prst="rect">
-            <a:avLst/>
-          </a:prstGeom>
-          <a:noFill/>
-        </p:spPr>
-        <p:txBody>
-          <a:bodyPr wrap="none" lIns="36576" tIns="18288" rIns="36576" bIns="18288" anchor="ctr">
-            <a:spAutoFit/>
-          </a:bodyPr>
-          <a:lstStyle/>
-          <a:p>
-            <a:pPr algn="ctr"/>
-            <a:r>
-              <a:rPr sz="1500" b="1">
-                <a:solidFill>
-                  <a:srgbClr val="162236"/>
-                </a:solidFill>
-                <a:latin typeface="Aptos"/>
-              </a:rPr>
-              <a:t>D: 0→3</a:t>
-            </a:r>
-            <a:endParaRPr sz="1500" b="1">
-              <a:solidFill>
-                <a:srgbClr val="162236"/>
-              </a:solidFill>
-              <a:latin typeface="Aptos"/>
-            </a:endParaRPr>
-          </a:p>
-        </p:txBody>
-      </p:sp>
-      <p:sp>
-        <p:nvSpPr>
-          <p:cNvPr id="57" name="TextBox 56"/>
-          <p:cNvSpPr txBox="1"/>
-          <p:nvPr/>
-        </p:nvSpPr>
-        <p:spPr>
-          <a:xfrm>
-            <a:off x="7717536" y="4059936"/>
-            <a:ext cx="3493008" cy="393192"/>
-          </a:xfrm>
-          <a:prstGeom prst="rect">
-            <a:avLst/>
-          </a:prstGeom>
-          <a:noFill/>
-        </p:spPr>
-        <p:txBody>
-          <a:bodyPr wrap="none" lIns="36576" tIns="18288" rIns="36576" bIns="18288" anchor="ctr">
-            <a:spAutoFit/>
-          </a:bodyPr>
-          <a:lstStyle/>
-          <a:p>
-            <a:pPr algn="ctr"/>
-            <a:r>
-              <a:rPr sz="900" b="0">
-                <a:solidFill>
-                  <a:srgbClr val="596C85"/>
-                </a:solidFill>
-                <a:latin typeface="Aptos"/>
-              </a:rPr>
-              <a:t>C conflicts with Batch 0; C and D are disjoint, so they share Batch 1.</a:t>
-            </a:r>
-            <a:endParaRPr sz="900" b="0">
-              <a:solidFill>
-                <a:srgbClr val="596C85"/>
-              </a:solidFill>
-              <a:latin typeface="Aptos"/>
-            </a:endParaRPr>
-          </a:p>
-        </p:txBody>
-      </p:sp>
-      <p:sp>
-        <p:nvSpPr>
-          <p:cNvPr id="58" name="Rounded Rectangle 57"/>
-          <p:cNvSpPr/>
-          <p:nvPr/>
-        </p:nvSpPr>
-        <p:spPr>
-          <a:xfrm>
-            <a:off x="6735445" y="5403850"/>
-            <a:ext cx="5029200" cy="494030"/>
-          </a:xfrm>
-          <a:prstGeom prst="roundRect">
-            <a:avLst/>
-          </a:prstGeom>
-          <a:solidFill>
-            <a:srgbClr val="FFFFFF"/>
-          </a:solidFill>
-          <a:ln w="12700">
-            <a:solidFill>
-              <a:srgbClr val="D77A0B"/>
-            </a:solidFill>
-          </a:ln>
-        </p:spPr>
-        <p:style>
-          <a:lnRef idx="1">
-            <a:schemeClr val="accent1"/>
-          </a:lnRef>
-          <a:fillRef idx="3">
-            <a:schemeClr val="accent1"/>
-          </a:fillRef>
-          <a:effectRef idx="2">
-            <a:schemeClr val="accent1"/>
-          </a:effectRef>
-          <a:fontRef idx="minor">
-            <a:schemeClr val="lt1"/>
-          </a:fontRef>
-        </p:style>
-        <p:txBody>
-          <a:bodyPr rtlCol="0" anchor="ctr"/>
-          <a:lstStyle/>
-          <a:p>
-            <a:pPr algn="ctr"/>
-          </a:p>
-        </p:txBody>
-      </p:sp>
-      <p:sp>
-        <p:nvSpPr>
-          <p:cNvPr id="59" name="TextBox 58"/>
-          <p:cNvSpPr txBox="1"/>
-          <p:nvPr/>
-        </p:nvSpPr>
-        <p:spPr>
-          <a:xfrm>
-            <a:off x="6939280" y="5530469"/>
-            <a:ext cx="502920" cy="246888"/>
-          </a:xfrm>
-          <a:prstGeom prst="rect">
-            <a:avLst/>
-          </a:prstGeom>
-          <a:noFill/>
-        </p:spPr>
-        <p:txBody>
-          <a:bodyPr wrap="none" lIns="36576" tIns="18288" rIns="36576" bIns="18288" anchor="ctr">
-            <a:spAutoFit/>
-          </a:bodyPr>
-          <a:lstStyle/>
-          <a:p>
-            <a:pPr algn="l"/>
-            <a:r>
-              <a:rPr sz="1100" b="1">
-                <a:solidFill>
-                  <a:srgbClr val="D77A0B"/>
-                </a:solidFill>
-                <a:latin typeface="Aptos"/>
-              </a:rPr>
-              <a:t>Rule</a:t>
-            </a:r>
-            <a:endParaRPr sz="1100" b="1">
-              <a:solidFill>
-                <a:srgbClr val="D77A0B"/>
-              </a:solidFill>
-              <a:latin typeface="Aptos"/>
-            </a:endParaRPr>
-          </a:p>
-        </p:txBody>
-      </p:sp>
-      <p:sp>
-        <p:nvSpPr>
-          <p:cNvPr id="60" name="TextBox 59"/>
-          <p:cNvSpPr txBox="1"/>
-          <p:nvPr/>
-        </p:nvSpPr>
-        <p:spPr>
-          <a:xfrm>
-            <a:off x="8070977" y="5495163"/>
-            <a:ext cx="2944368" cy="320040"/>
-          </a:xfrm>
-          <a:prstGeom prst="rect">
-            <a:avLst/>
-          </a:prstGeom>
-          <a:noFill/>
-        </p:spPr>
-        <p:txBody>
-          <a:bodyPr wrap="none" lIns="36576" tIns="18288" rIns="36576" bIns="18288" anchor="ctr">
-            <a:spAutoFit/>
-          </a:bodyPr>
-          <a:lstStyle/>
-          <a:p>
-            <a:pPr algn="ctr"/>
-            <a:r>
-              <a:rPr sz="1000" b="1">
-                <a:solidFill>
-                  <a:srgbClr val="162236"/>
-                </a:solidFill>
-                <a:latin typeface="Aptos"/>
-              </a:rPr>
-              <a:t>A rank can communicate with at most one peer in each batch.</a:t>
-            </a:r>
-            <a:endParaRPr sz="1000" b="1">
-              <a:solidFill>
-                <a:srgbClr val="162236"/>
-              </a:solidFill>
-              <a:latin typeface="Aptos"/>
-            </a:endParaRPr>
-          </a:p>
-        </p:txBody>
-      </p:sp>
-      <p:cxnSp>
-        <p:nvCxnSpPr>
-          <p:cNvPr id="61" name="Connector 60"/>
-          <p:cNvCxnSpPr/>
-          <p:nvPr/>
-        </p:nvCxnSpPr>
-        <p:spPr>
-          <a:xfrm>
-            <a:off x="3419856" y="3703320"/>
-            <a:ext cx="256031" cy="0"/>
-          </a:xfrm>
-          <a:prstGeom prst="line">
-            <a:avLst/>
-          </a:prstGeom>
-          <a:ln w="38100">
-            <a:solidFill>
-              <a:srgbClr val="0D8AA6"/>
-            </a:solidFill>
-          </a:ln>
-        </p:spPr>
-        <p:style>
-          <a:lnRef idx="2">
-            <a:schemeClr val="accent1"/>
-          </a:lnRef>
-          <a:fillRef idx="0">
-            <a:schemeClr val="accent1"/>
-          </a:fillRef>
-          <a:effectRef idx="1">
-            <a:schemeClr val="accent1"/>
-          </a:effectRef>
-          <a:fontRef idx="minor">
-            <a:schemeClr val="tx1"/>
-          </a:fontRef>
-        </p:style>
-      </p:cxnSp>
-      <p:cxnSp>
-        <p:nvCxnSpPr>
-          <p:cNvPr id="62" name="Connector 61"/>
-          <p:cNvCxnSpPr/>
-          <p:nvPr/>
-        </p:nvCxnSpPr>
-        <p:spPr>
-          <a:xfrm>
-            <a:off x="6967728" y="3703320"/>
-            <a:ext cx="256032" cy="0"/>
-          </a:xfrm>
-          <a:prstGeom prst="line">
-            <a:avLst/>
-          </a:prstGeom>
-          <a:ln w="38100">
+          <a:ln w="50800">
             <a:solidFill>
               <a:srgbClr val="139B67"/>
             </a:solidFill>
@@ -11312,55 +11595,14 @@
       <p:grpSpPr/>
       <p:sp>
         <p:nvSpPr>
-          <p:cNvPr id="3" name="TextBox 2"/>
+          <p:cNvPr id="21" name="TextBox 3"/>
           <p:cNvSpPr txBox="1"/>
           <p:nvPr/>
         </p:nvSpPr>
         <p:spPr>
           <a:xfrm>
-            <a:off x="502920" y="210312"/>
-            <a:ext cx="2560320" cy="256032"/>
-          </a:xfrm>
-          <a:prstGeom prst="rect">
-            <a:avLst/>
-          </a:prstGeom>
-          <a:noFill/>
-        </p:spPr>
-        <p:txBody>
-          <a:bodyPr wrap="none" lIns="36576" tIns="36576" rIns="36576" bIns="36576" anchor="ctr">
-            <a:spAutoFit/>
-          </a:bodyPr>
-          <a:lstStyle/>
-          <a:p>
-            <a:pPr algn="l"/>
-            <a:r>
-              <a:rPr sz="1000" b="1">
-                <a:solidFill>
-                  <a:srgbClr val="0D8AA6"/>
-                </a:solidFill>
-                <a:latin typeface="Aptos"/>
-              </a:rPr>
-              <a:t>PART II · E2E</a:t>
-            </a:r>
-            <a:endParaRPr sz="1000" b="1">
-              <a:solidFill>
-                <a:srgbClr val="0D8AA6"/>
-              </a:solidFill>
-              <a:latin typeface="Aptos"/>
-            </a:endParaRPr>
-          </a:p>
-        </p:txBody>
-      </p:sp>
-      <p:sp>
-        <p:nvSpPr>
-          <p:cNvPr id="4" name="TextBox 3"/>
-          <p:cNvSpPr txBox="1"/>
-          <p:nvPr/>
-        </p:nvSpPr>
-        <p:spPr>
-          <a:xfrm>
-            <a:off x="502920" y="515112"/>
-            <a:ext cx="3053715" cy="487680"/>
+            <a:off x="502920" y="480187"/>
+            <a:ext cx="1721485" cy="487680"/>
           </a:xfrm>
           <a:prstGeom prst="rect">
             <a:avLst/>
@@ -11381,25 +11623,7 @@
                 </a:solidFill>
                 <a:latin typeface="Aptos"/>
               </a:rPr>
-              <a:t>Experiment</a:t>
-            </a:r>
-            <a:r>
-              <a:rPr lang="en-US" sz="2700" b="1">
-                <a:solidFill>
-                  <a:srgbClr val="162236"/>
-                </a:solidFill>
-                <a:latin typeface="Aptos"/>
-              </a:rPr>
-              <a:t>s </a:t>
-            </a:r>
-            <a:r>
-              <a:rPr lang="en-US" sz="2700" b="1">
-                <a:solidFill>
-                  <a:srgbClr val="162236"/>
-                </a:solidFill>
-                <a:latin typeface="Aptos"/>
-              </a:rPr>
-              <a:t>setup</a:t>
+              <a:t>Algorithm</a:t>
             </a:r>
             <a:endParaRPr lang="en-US" sz="2700" b="1">
               <a:solidFill>
@@ -11412,13 +11636,13 @@
       </p:sp>
       <p:cxnSp>
         <p:nvCxnSpPr>
-          <p:cNvPr id="6" name="Connector 5"/>
+          <p:cNvPr id="22" name="Connector 5"/>
           <p:cNvCxnSpPr/>
           <p:nvPr/>
         </p:nvCxnSpPr>
         <p:spPr>
           <a:xfrm>
-            <a:off x="530352" y="1251712"/>
+            <a:off x="576072" y="1016762"/>
             <a:ext cx="11128248" cy="0"/>
           </a:xfrm>
           <a:prstGeom prst="line">
@@ -11447,104 +11671,14 @@
       </p:cxnSp>
       <p:sp>
         <p:nvSpPr>
-          <p:cNvPr id="7" name="Rounded Rectangle 6"/>
-          <p:cNvSpPr/>
-          <p:nvPr/>
-        </p:nvSpPr>
-        <p:spPr>
-          <a:xfrm>
-            <a:off x="567055" y="1572895"/>
-            <a:ext cx="11102975" cy="4987925"/>
-          </a:xfrm>
-          <a:prstGeom prst="roundRect">
-            <a:avLst/>
-          </a:prstGeom>
-          <a:solidFill>
-            <a:srgbClr val="FFFFFF"/>
-          </a:solidFill>
-          <a:ln w="12700">
-            <a:solidFill>
-              <a:srgbClr val="3366D6"/>
-            </a:solidFill>
-          </a:ln>
-        </p:spPr>
-        <p:style>
-          <a:lnRef idx="1">
-            <a:schemeClr val="accent1"/>
-          </a:lnRef>
-          <a:fillRef idx="3">
-            <a:schemeClr val="accent1"/>
-          </a:fillRef>
-          <a:effectRef idx="2">
-            <a:schemeClr val="accent1"/>
-          </a:effectRef>
-          <a:fontRef idx="minor">
-            <a:schemeClr val="lt1"/>
-          </a:fontRef>
-        </p:style>
-        <p:txBody>
-          <a:bodyPr rtlCol="0" anchor="ctr"/>
-          <a:lstStyle/>
-          <a:p>
-            <a:pPr algn="ctr"/>
-          </a:p>
-        </p:txBody>
-      </p:sp>
-      <p:sp>
-        <p:nvSpPr>
-          <p:cNvPr id="8" name="Rounded Rectangle 7"/>
-          <p:cNvSpPr/>
-          <p:nvPr/>
-        </p:nvSpPr>
-        <p:spPr>
-          <a:xfrm>
-            <a:off x="2702052" y="2440432"/>
-            <a:ext cx="1234440" cy="1216152"/>
-          </a:xfrm>
-          <a:prstGeom prst="roundRect">
-            <a:avLst/>
-          </a:prstGeom>
-          <a:solidFill>
-            <a:srgbClr val="EDF3FA"/>
-          </a:solidFill>
-          <a:ln w="12700">
-            <a:solidFill>
-              <a:srgbClr val="0D8AA6"/>
-            </a:solidFill>
-          </a:ln>
-        </p:spPr>
-        <p:style>
-          <a:lnRef idx="1">
-            <a:schemeClr val="accent1"/>
-          </a:lnRef>
-          <a:fillRef idx="3">
-            <a:schemeClr val="accent1"/>
-          </a:fillRef>
-          <a:effectRef idx="2">
-            <a:schemeClr val="accent1"/>
-          </a:effectRef>
-          <a:fontRef idx="minor">
-            <a:schemeClr val="lt1"/>
-          </a:fontRef>
-        </p:style>
-        <p:txBody>
-          <a:bodyPr rtlCol="0" anchor="ctr"/>
-          <a:lstStyle/>
-          <a:p>
-            <a:pPr algn="ctr"/>
-          </a:p>
-        </p:txBody>
-      </p:sp>
-      <p:sp>
-        <p:nvSpPr>
-          <p:cNvPr id="9" name="TextBox 8"/>
+          <p:cNvPr id="3" name="文本框 2"/>
           <p:cNvSpPr txBox="1"/>
           <p:nvPr/>
         </p:nvSpPr>
         <p:spPr>
           <a:xfrm>
-            <a:off x="2775204" y="2550160"/>
-            <a:ext cx="1078992" cy="256032"/>
+            <a:off x="1609090" y="2887345"/>
+            <a:ext cx="9499600" cy="1082675"/>
           </a:xfrm>
           <a:prstGeom prst="rect">
             <a:avLst/>
@@ -11552,750 +11686,42 @@
           <a:noFill/>
         </p:spPr>
         <p:txBody>
-          <a:bodyPr wrap="none" lIns="36576" tIns="36576" rIns="36576" bIns="36576" anchor="ctr">
-            <a:spAutoFit/>
+          <a:bodyPr wrap="square" rtlCol="0">
+            <a:noAutofit/>
           </a:bodyPr>
-          <a:lstStyle/>
-          <a:p>
-            <a:pPr algn="ctr"/>
-            <a:r>
-              <a:rPr sz="1100" b="1">
-                <a:solidFill>
-                  <a:srgbClr val="0D8AA6"/>
-                </a:solidFill>
-                <a:latin typeface="Aptos"/>
+          <a:p>
+            <a:r>
+              <a:rPr lang="en-US" altLang="zh-CN" sz="5400">
+                <a:ln/>
+                <a:gradFill>
+                  <a:gsLst>
+                    <a:gs pos="21000">
+                      <a:srgbClr val="53575C"/>
+                    </a:gs>
+                    <a:gs pos="88000">
+                      <a:srgbClr val="C5C7CA"/>
+                    </a:gs>
+                  </a:gsLst>
+                  <a:lin ang="5400000"/>
+                </a:gradFill>
+                <a:effectLst/>
               </a:rPr>
-              <a:t>NODE 0</a:t>
-            </a:r>
-            <a:endParaRPr sz="1100" b="1">
-              <a:solidFill>
-                <a:srgbClr val="0D8AA6"/>
-              </a:solidFill>
-              <a:latin typeface="Aptos"/>
-            </a:endParaRPr>
-          </a:p>
-        </p:txBody>
-      </p:sp>
-      <p:sp>
-        <p:nvSpPr>
-          <p:cNvPr id="10" name="TextBox 9"/>
-          <p:cNvSpPr txBox="1"/>
-          <p:nvPr/>
-        </p:nvSpPr>
-        <p:spPr>
-          <a:xfrm>
-            <a:off x="2775204" y="2915920"/>
-            <a:ext cx="1078992" cy="502920"/>
-          </a:xfrm>
-          <a:prstGeom prst="rect">
-            <a:avLst/>
-          </a:prstGeom>
-          <a:noFill/>
-        </p:spPr>
-        <p:txBody>
-          <a:bodyPr wrap="none" lIns="36576" tIns="36576" rIns="36576" bIns="36576" anchor="ctr">
-            <a:spAutoFit/>
-          </a:bodyPr>
-          <a:lstStyle/>
-          <a:p>
-            <a:pPr algn="ctr"/>
-            <a:r>
-              <a:rPr sz="1300" b="1">
-                <a:solidFill>
-                  <a:srgbClr val="162236"/>
-                </a:solidFill>
-                <a:latin typeface="Aptos"/>
-              </a:rPr>
-              <a:t>RTX 6000
-24 GB</a:t>
-            </a:r>
-            <a:endParaRPr sz="1300" b="1">
-              <a:solidFill>
-                <a:srgbClr val="162236"/>
-              </a:solidFill>
-              <a:latin typeface="Aptos"/>
-            </a:endParaRPr>
-          </a:p>
-        </p:txBody>
-      </p:sp>
-      <p:cxnSp>
-        <p:nvCxnSpPr>
-          <p:cNvPr id="11" name="Connector 10"/>
-          <p:cNvCxnSpPr/>
-          <p:nvPr/>
-        </p:nvCxnSpPr>
-        <p:spPr>
-          <a:xfrm>
-            <a:off x="3323844" y="3665728"/>
-            <a:ext cx="0" cy="713232"/>
-          </a:xfrm>
-          <a:prstGeom prst="line">
-            <a:avLst/>
-          </a:prstGeom>
-          <a:ln w="38100">
-            <a:solidFill>
-              <a:srgbClr val="139B67"/>
-            </a:solidFill>
-          </a:ln>
-        </p:spPr>
-        <p:style>
-          <a:lnRef idx="2">
-            <a:schemeClr val="accent1"/>
-          </a:lnRef>
-          <a:fillRef idx="0">
-            <a:schemeClr val="accent1"/>
-          </a:fillRef>
-          <a:effectRef idx="1">
-            <a:schemeClr val="accent1"/>
-          </a:effectRef>
-          <a:fontRef idx="minor">
-            <a:schemeClr val="tx1"/>
-          </a:fontRef>
-        </p:style>
-      </p:cxnSp>
-      <p:sp>
-        <p:nvSpPr>
-          <p:cNvPr id="12" name="Rounded Rectangle 11"/>
-          <p:cNvSpPr/>
-          <p:nvPr/>
-        </p:nvSpPr>
-        <p:spPr>
-          <a:xfrm>
-            <a:off x="4366260" y="2440432"/>
-            <a:ext cx="1234440" cy="1216152"/>
-          </a:xfrm>
-          <a:prstGeom prst="roundRect">
-            <a:avLst/>
-          </a:prstGeom>
-          <a:solidFill>
-            <a:srgbClr val="EDF3FA"/>
-          </a:solidFill>
-          <a:ln w="12700">
-            <a:solidFill>
-              <a:srgbClr val="0D8AA6"/>
-            </a:solidFill>
-          </a:ln>
-        </p:spPr>
-        <p:style>
-          <a:lnRef idx="1">
-            <a:schemeClr val="accent1"/>
-          </a:lnRef>
-          <a:fillRef idx="3">
-            <a:schemeClr val="accent1"/>
-          </a:fillRef>
-          <a:effectRef idx="2">
-            <a:schemeClr val="accent1"/>
-          </a:effectRef>
-          <a:fontRef idx="minor">
-            <a:schemeClr val="lt1"/>
-          </a:fontRef>
-        </p:style>
-        <p:txBody>
-          <a:bodyPr rtlCol="0" anchor="ctr"/>
-          <a:lstStyle/>
-          <a:p>
-            <a:pPr algn="ctr"/>
-          </a:p>
-        </p:txBody>
-      </p:sp>
-      <p:sp>
-        <p:nvSpPr>
-          <p:cNvPr id="13" name="TextBox 12"/>
-          <p:cNvSpPr txBox="1"/>
-          <p:nvPr/>
-        </p:nvSpPr>
-        <p:spPr>
-          <a:xfrm>
-            <a:off x="4439412" y="2550160"/>
-            <a:ext cx="1078992" cy="256032"/>
-          </a:xfrm>
-          <a:prstGeom prst="rect">
-            <a:avLst/>
-          </a:prstGeom>
-          <a:noFill/>
-        </p:spPr>
-        <p:txBody>
-          <a:bodyPr wrap="none" lIns="36576" tIns="36576" rIns="36576" bIns="36576" anchor="ctr">
-            <a:spAutoFit/>
-          </a:bodyPr>
-          <a:lstStyle/>
-          <a:p>
-            <a:pPr algn="ctr"/>
-            <a:r>
-              <a:rPr sz="1100" b="1">
-                <a:solidFill>
-                  <a:srgbClr val="0D8AA6"/>
-                </a:solidFill>
-                <a:latin typeface="Aptos"/>
-              </a:rPr>
-              <a:t>NODE 1</a:t>
-            </a:r>
-            <a:endParaRPr sz="1100" b="1">
-              <a:solidFill>
-                <a:srgbClr val="0D8AA6"/>
-              </a:solidFill>
-              <a:latin typeface="Aptos"/>
-            </a:endParaRPr>
-          </a:p>
-        </p:txBody>
-      </p:sp>
-      <p:sp>
-        <p:nvSpPr>
-          <p:cNvPr id="14" name="TextBox 13"/>
-          <p:cNvSpPr txBox="1"/>
-          <p:nvPr/>
-        </p:nvSpPr>
-        <p:spPr>
-          <a:xfrm>
-            <a:off x="4439412" y="2915920"/>
-            <a:ext cx="1078992" cy="502920"/>
-          </a:xfrm>
-          <a:prstGeom prst="rect">
-            <a:avLst/>
-          </a:prstGeom>
-          <a:noFill/>
-        </p:spPr>
-        <p:txBody>
-          <a:bodyPr wrap="none" lIns="36576" tIns="36576" rIns="36576" bIns="36576" anchor="ctr">
-            <a:spAutoFit/>
-          </a:bodyPr>
-          <a:lstStyle/>
-          <a:p>
-            <a:pPr algn="ctr"/>
-            <a:r>
-              <a:rPr sz="1300" b="1">
-                <a:solidFill>
-                  <a:srgbClr val="162236"/>
-                </a:solidFill>
-                <a:latin typeface="Aptos"/>
-              </a:rPr>
-              <a:t>RTX 6000
-24 GB</a:t>
-            </a:r>
-            <a:endParaRPr sz="1300" b="1">
-              <a:solidFill>
-                <a:srgbClr val="162236"/>
-              </a:solidFill>
-              <a:latin typeface="Aptos"/>
-            </a:endParaRPr>
-          </a:p>
-        </p:txBody>
-      </p:sp>
-      <p:cxnSp>
-        <p:nvCxnSpPr>
-          <p:cNvPr id="15" name="Connector 14"/>
-          <p:cNvCxnSpPr/>
-          <p:nvPr/>
-        </p:nvCxnSpPr>
-        <p:spPr>
-          <a:xfrm>
-            <a:off x="4988052" y="3665728"/>
-            <a:ext cx="0" cy="713232"/>
-          </a:xfrm>
-          <a:prstGeom prst="line">
-            <a:avLst/>
-          </a:prstGeom>
-          <a:ln w="38100">
-            <a:solidFill>
-              <a:srgbClr val="139B67"/>
-            </a:solidFill>
-          </a:ln>
-        </p:spPr>
-        <p:style>
-          <a:lnRef idx="2">
-            <a:schemeClr val="accent1"/>
-          </a:lnRef>
-          <a:fillRef idx="0">
-            <a:schemeClr val="accent1"/>
-          </a:fillRef>
-          <a:effectRef idx="1">
-            <a:schemeClr val="accent1"/>
-          </a:effectRef>
-          <a:fontRef idx="minor">
-            <a:schemeClr val="tx1"/>
-          </a:fontRef>
-        </p:style>
-      </p:cxnSp>
-      <p:sp>
-        <p:nvSpPr>
-          <p:cNvPr id="16" name="Rounded Rectangle 15"/>
-          <p:cNvSpPr/>
-          <p:nvPr/>
-        </p:nvSpPr>
-        <p:spPr>
-          <a:xfrm>
-            <a:off x="6030468" y="2440432"/>
-            <a:ext cx="1234440" cy="1216152"/>
-          </a:xfrm>
-          <a:prstGeom prst="roundRect">
-            <a:avLst/>
-          </a:prstGeom>
-          <a:solidFill>
-            <a:srgbClr val="EDF3FA"/>
-          </a:solidFill>
-          <a:ln w="12700">
-            <a:solidFill>
-              <a:srgbClr val="0D8AA6"/>
-            </a:solidFill>
-          </a:ln>
-        </p:spPr>
-        <p:style>
-          <a:lnRef idx="1">
-            <a:schemeClr val="accent1"/>
-          </a:lnRef>
-          <a:fillRef idx="3">
-            <a:schemeClr val="accent1"/>
-          </a:fillRef>
-          <a:effectRef idx="2">
-            <a:schemeClr val="accent1"/>
-          </a:effectRef>
-          <a:fontRef idx="minor">
-            <a:schemeClr val="lt1"/>
-          </a:fontRef>
-        </p:style>
-        <p:txBody>
-          <a:bodyPr rtlCol="0" anchor="ctr"/>
-          <a:lstStyle/>
-          <a:p>
-            <a:pPr algn="ctr"/>
-          </a:p>
-        </p:txBody>
-      </p:sp>
-      <p:sp>
-        <p:nvSpPr>
-          <p:cNvPr id="17" name="TextBox 16"/>
-          <p:cNvSpPr txBox="1"/>
-          <p:nvPr/>
-        </p:nvSpPr>
-        <p:spPr>
-          <a:xfrm>
-            <a:off x="6103620" y="2550160"/>
-            <a:ext cx="1078992" cy="256032"/>
-          </a:xfrm>
-          <a:prstGeom prst="rect">
-            <a:avLst/>
-          </a:prstGeom>
-          <a:noFill/>
-        </p:spPr>
-        <p:txBody>
-          <a:bodyPr wrap="none" lIns="36576" tIns="36576" rIns="36576" bIns="36576" anchor="ctr">
-            <a:spAutoFit/>
-          </a:bodyPr>
-          <a:lstStyle/>
-          <a:p>
-            <a:pPr algn="ctr"/>
-            <a:r>
-              <a:rPr sz="1100" b="1">
-                <a:solidFill>
-                  <a:srgbClr val="0D8AA6"/>
-                </a:solidFill>
-                <a:latin typeface="Aptos"/>
-              </a:rPr>
-              <a:t>NODE 2</a:t>
-            </a:r>
-            <a:endParaRPr sz="1100" b="1">
-              <a:solidFill>
-                <a:srgbClr val="0D8AA6"/>
-              </a:solidFill>
-              <a:latin typeface="Aptos"/>
-            </a:endParaRPr>
-          </a:p>
-        </p:txBody>
-      </p:sp>
-      <p:sp>
-        <p:nvSpPr>
-          <p:cNvPr id="18" name="TextBox 17"/>
-          <p:cNvSpPr txBox="1"/>
-          <p:nvPr/>
-        </p:nvSpPr>
-        <p:spPr>
-          <a:xfrm>
-            <a:off x="6103620" y="2915920"/>
-            <a:ext cx="1078992" cy="502920"/>
-          </a:xfrm>
-          <a:prstGeom prst="rect">
-            <a:avLst/>
-          </a:prstGeom>
-          <a:noFill/>
-        </p:spPr>
-        <p:txBody>
-          <a:bodyPr wrap="none" lIns="36576" tIns="36576" rIns="36576" bIns="36576" anchor="ctr">
-            <a:spAutoFit/>
-          </a:bodyPr>
-          <a:lstStyle/>
-          <a:p>
-            <a:pPr algn="ctr"/>
-            <a:r>
-              <a:rPr sz="1300" b="1">
-                <a:solidFill>
-                  <a:srgbClr val="162236"/>
-                </a:solidFill>
-                <a:latin typeface="Aptos"/>
-              </a:rPr>
-              <a:t>RTX 6000
-24 GB</a:t>
-            </a:r>
-            <a:endParaRPr sz="1300" b="1">
-              <a:solidFill>
-                <a:srgbClr val="162236"/>
-              </a:solidFill>
-              <a:latin typeface="Aptos"/>
-            </a:endParaRPr>
-          </a:p>
-        </p:txBody>
-      </p:sp>
-      <p:cxnSp>
-        <p:nvCxnSpPr>
-          <p:cNvPr id="19" name="Connector 18"/>
-          <p:cNvCxnSpPr/>
-          <p:nvPr/>
-        </p:nvCxnSpPr>
-        <p:spPr>
-          <a:xfrm>
-            <a:off x="6652260" y="3665728"/>
-            <a:ext cx="0" cy="713232"/>
-          </a:xfrm>
-          <a:prstGeom prst="line">
-            <a:avLst/>
-          </a:prstGeom>
-          <a:ln w="38100">
-            <a:solidFill>
-              <a:srgbClr val="139B67"/>
-            </a:solidFill>
-          </a:ln>
-        </p:spPr>
-        <p:style>
-          <a:lnRef idx="2">
-            <a:schemeClr val="accent1"/>
-          </a:lnRef>
-          <a:fillRef idx="0">
-            <a:schemeClr val="accent1"/>
-          </a:fillRef>
-          <a:effectRef idx="1">
-            <a:schemeClr val="accent1"/>
-          </a:effectRef>
-          <a:fontRef idx="minor">
-            <a:schemeClr val="tx1"/>
-          </a:fontRef>
-        </p:style>
-      </p:cxnSp>
-      <p:sp>
-        <p:nvSpPr>
-          <p:cNvPr id="20" name="Rounded Rectangle 19"/>
-          <p:cNvSpPr/>
-          <p:nvPr/>
-        </p:nvSpPr>
-        <p:spPr>
-          <a:xfrm>
-            <a:off x="7694676" y="2440432"/>
-            <a:ext cx="1234440" cy="1216152"/>
-          </a:xfrm>
-          <a:prstGeom prst="roundRect">
-            <a:avLst/>
-          </a:prstGeom>
-          <a:solidFill>
-            <a:srgbClr val="EDF3FA"/>
-          </a:solidFill>
-          <a:ln w="12700">
-            <a:solidFill>
-              <a:srgbClr val="0D8AA6"/>
-            </a:solidFill>
-          </a:ln>
-        </p:spPr>
-        <p:style>
-          <a:lnRef idx="1">
-            <a:schemeClr val="accent1"/>
-          </a:lnRef>
-          <a:fillRef idx="3">
-            <a:schemeClr val="accent1"/>
-          </a:fillRef>
-          <a:effectRef idx="2">
-            <a:schemeClr val="accent1"/>
-          </a:effectRef>
-          <a:fontRef idx="minor">
-            <a:schemeClr val="lt1"/>
-          </a:fontRef>
-        </p:style>
-        <p:txBody>
-          <a:bodyPr rtlCol="0" anchor="ctr"/>
-          <a:lstStyle/>
-          <a:p>
-            <a:pPr algn="ctr"/>
-          </a:p>
-        </p:txBody>
-      </p:sp>
-      <p:sp>
-        <p:nvSpPr>
-          <p:cNvPr id="21" name="TextBox 20"/>
-          <p:cNvSpPr txBox="1"/>
-          <p:nvPr/>
-        </p:nvSpPr>
-        <p:spPr>
-          <a:xfrm>
-            <a:off x="7767828" y="2550160"/>
-            <a:ext cx="1078992" cy="256032"/>
-          </a:xfrm>
-          <a:prstGeom prst="rect">
-            <a:avLst/>
-          </a:prstGeom>
-          <a:noFill/>
-        </p:spPr>
-        <p:txBody>
-          <a:bodyPr wrap="none" lIns="36576" tIns="36576" rIns="36576" bIns="36576" anchor="ctr">
-            <a:spAutoFit/>
-          </a:bodyPr>
-          <a:lstStyle/>
-          <a:p>
-            <a:pPr algn="ctr"/>
-            <a:r>
-              <a:rPr sz="1100" b="1">
-                <a:solidFill>
-                  <a:srgbClr val="0D8AA6"/>
-                </a:solidFill>
-                <a:latin typeface="Aptos"/>
-              </a:rPr>
-              <a:t>NODE 3</a:t>
-            </a:r>
-            <a:endParaRPr sz="1100" b="1">
-              <a:solidFill>
-                <a:srgbClr val="0D8AA6"/>
-              </a:solidFill>
-              <a:latin typeface="Aptos"/>
-            </a:endParaRPr>
-          </a:p>
-        </p:txBody>
-      </p:sp>
-      <p:sp>
-        <p:nvSpPr>
-          <p:cNvPr id="22" name="TextBox 21"/>
-          <p:cNvSpPr txBox="1"/>
-          <p:nvPr/>
-        </p:nvSpPr>
-        <p:spPr>
-          <a:xfrm>
-            <a:off x="7767828" y="2915920"/>
-            <a:ext cx="1078992" cy="502920"/>
-          </a:xfrm>
-          <a:prstGeom prst="rect">
-            <a:avLst/>
-          </a:prstGeom>
-          <a:noFill/>
-        </p:spPr>
-        <p:txBody>
-          <a:bodyPr wrap="none" lIns="36576" tIns="36576" rIns="36576" bIns="36576" anchor="ctr">
-            <a:spAutoFit/>
-          </a:bodyPr>
-          <a:lstStyle/>
-          <a:p>
-            <a:pPr algn="ctr"/>
-            <a:r>
-              <a:rPr sz="1300" b="1">
-                <a:solidFill>
-                  <a:srgbClr val="162236"/>
-                </a:solidFill>
-                <a:latin typeface="Aptos"/>
-              </a:rPr>
-              <a:t>RTX 6000
-24 GB</a:t>
-            </a:r>
-            <a:endParaRPr sz="1300" b="1">
-              <a:solidFill>
-                <a:srgbClr val="162236"/>
-              </a:solidFill>
-              <a:latin typeface="Aptos"/>
-            </a:endParaRPr>
-          </a:p>
-        </p:txBody>
-      </p:sp>
-      <p:cxnSp>
-        <p:nvCxnSpPr>
-          <p:cNvPr id="23" name="Connector 22"/>
-          <p:cNvCxnSpPr/>
-          <p:nvPr/>
-        </p:nvCxnSpPr>
-        <p:spPr>
-          <a:xfrm>
-            <a:off x="8316468" y="3665728"/>
-            <a:ext cx="0" cy="713232"/>
-          </a:xfrm>
-          <a:prstGeom prst="line">
-            <a:avLst/>
-          </a:prstGeom>
-          <a:ln w="38100">
-            <a:solidFill>
-              <a:srgbClr val="139B67"/>
-            </a:solidFill>
-          </a:ln>
-        </p:spPr>
-        <p:style>
-          <a:lnRef idx="2">
-            <a:schemeClr val="accent1"/>
-          </a:lnRef>
-          <a:fillRef idx="0">
-            <a:schemeClr val="accent1"/>
-          </a:fillRef>
-          <a:effectRef idx="1">
-            <a:schemeClr val="accent1"/>
-          </a:effectRef>
-          <a:fontRef idx="minor">
-            <a:schemeClr val="tx1"/>
-          </a:fontRef>
-        </p:style>
-      </p:cxnSp>
-      <p:cxnSp>
-        <p:nvCxnSpPr>
-          <p:cNvPr id="24" name="Connector 23"/>
-          <p:cNvCxnSpPr/>
-          <p:nvPr/>
-        </p:nvCxnSpPr>
-        <p:spPr>
-          <a:xfrm>
-            <a:off x="3296412" y="4378960"/>
-            <a:ext cx="5010912" cy="0"/>
-          </a:xfrm>
-          <a:prstGeom prst="line">
-            <a:avLst/>
-          </a:prstGeom>
-          <a:ln w="63500">
-            <a:solidFill>
-              <a:srgbClr val="139B67"/>
-            </a:solidFill>
-          </a:ln>
-        </p:spPr>
-        <p:style>
-          <a:lnRef idx="2">
-            <a:schemeClr val="accent1"/>
-          </a:lnRef>
-          <a:fillRef idx="0">
-            <a:schemeClr val="accent1"/>
-          </a:fillRef>
-          <a:effectRef idx="1">
-            <a:schemeClr val="accent1"/>
-          </a:effectRef>
-          <a:fontRef idx="minor">
-            <a:schemeClr val="tx1"/>
-          </a:fontRef>
-        </p:style>
-      </p:cxnSp>
-      <p:sp>
-        <p:nvSpPr>
-          <p:cNvPr id="26" name="TextBox 25"/>
-          <p:cNvSpPr txBox="1"/>
-          <p:nvPr/>
-        </p:nvSpPr>
-        <p:spPr>
-          <a:xfrm>
-            <a:off x="2811780" y="5311648"/>
-            <a:ext cx="2743200" cy="320040"/>
-          </a:xfrm>
-          <a:prstGeom prst="rect">
-            <a:avLst/>
-          </a:prstGeom>
-          <a:noFill/>
-        </p:spPr>
-        <p:txBody>
-          <a:bodyPr wrap="none" lIns="36576" tIns="36576" rIns="36576" bIns="36576" anchor="ctr">
-            <a:spAutoFit/>
-          </a:bodyPr>
-          <a:lstStyle/>
-          <a:p>
-            <a:pPr algn="ctr"/>
-            <a:r>
-              <a:rPr sz="1300" b="1">
-                <a:solidFill>
-                  <a:srgbClr val="162236"/>
-                </a:solidFill>
-                <a:latin typeface="Aptos"/>
-              </a:rPr>
-              <a:t>Qwen3-30B-A3B-Instruct-2507</a:t>
-            </a:r>
-            <a:endParaRPr sz="1300" b="1">
-              <a:solidFill>
-                <a:srgbClr val="162236"/>
-              </a:solidFill>
-              <a:latin typeface="Aptos"/>
-            </a:endParaRPr>
-          </a:p>
-        </p:txBody>
-      </p:sp>
-      <p:sp>
-        <p:nvSpPr>
-          <p:cNvPr id="27" name="TextBox 26"/>
-          <p:cNvSpPr txBox="1"/>
-          <p:nvPr/>
-        </p:nvSpPr>
-        <p:spPr>
-          <a:xfrm>
-            <a:off x="5646420" y="5311648"/>
-            <a:ext cx="1280160" cy="320040"/>
-          </a:xfrm>
-          <a:prstGeom prst="rect">
-            <a:avLst/>
-          </a:prstGeom>
-          <a:noFill/>
-        </p:spPr>
-        <p:txBody>
-          <a:bodyPr wrap="none" lIns="36576" tIns="36576" rIns="36576" bIns="36576" anchor="ctr">
-            <a:spAutoFit/>
-          </a:bodyPr>
-          <a:lstStyle/>
-          <a:p>
-            <a:pPr algn="ctr"/>
-            <a:r>
-              <a:rPr sz="1300" b="1">
-                <a:solidFill>
-                  <a:srgbClr val="162236"/>
-                </a:solidFill>
-                <a:latin typeface="Aptos"/>
-              </a:rPr>
-              <a:t>TP = EP = 4</a:t>
-            </a:r>
-            <a:endParaRPr sz="1300" b="1">
-              <a:solidFill>
-                <a:srgbClr val="162236"/>
-              </a:solidFill>
-              <a:latin typeface="Aptos"/>
-            </a:endParaRPr>
-          </a:p>
-        </p:txBody>
-      </p:sp>
-      <p:sp>
-        <p:nvSpPr>
-          <p:cNvPr id="28" name="TextBox 27"/>
-          <p:cNvSpPr txBox="1"/>
-          <p:nvPr/>
-        </p:nvSpPr>
-        <p:spPr>
-          <a:xfrm>
-            <a:off x="7292340" y="5311648"/>
-            <a:ext cx="1280160" cy="320040"/>
-          </a:xfrm>
-          <a:prstGeom prst="rect">
-            <a:avLst/>
-          </a:prstGeom>
-          <a:noFill/>
-        </p:spPr>
-        <p:txBody>
-          <a:bodyPr wrap="none" lIns="36576" tIns="36576" rIns="36576" bIns="36576" anchor="ctr">
-            <a:spAutoFit/>
-          </a:bodyPr>
-          <a:lstStyle/>
-          <a:p>
-            <a:pPr algn="ctr"/>
-            <a:r>
-              <a:rPr sz="1300" b="1">
-                <a:solidFill>
-                  <a:srgbClr val="162236"/>
-                </a:solidFill>
-                <a:latin typeface="Aptos"/>
-              </a:rPr>
-              <a:t>async EPLB</a:t>
-            </a:r>
-            <a:endParaRPr sz="1300" b="1">
-              <a:solidFill>
-                <a:srgbClr val="162236"/>
-              </a:solidFill>
-              <a:latin typeface="Aptos"/>
+              <a:t>Shown by an HTML animation...</a:t>
+            </a:r>
+            <a:endParaRPr lang="en-US" altLang="zh-CN" sz="5400">
+              <a:ln/>
+              <a:gradFill>
+                <a:gsLst>
+                  <a:gs pos="21000">
+                    <a:srgbClr val="53575C"/>
+                  </a:gs>
+                  <a:gs pos="88000">
+                    <a:srgbClr val="C5C7CA"/>
+                  </a:gs>
+                </a:gsLst>
+                <a:lin ang="5400000"/>
+              </a:gradFill>
+              <a:effectLst/>
             </a:endParaRPr>
           </a:p>
         </p:txBody>
@@ -12310,23 +11736,65 @@
 
 <file path=ppt/tags/tag1.xml><?xml version="1.0" encoding="utf-8"?>
 <p:tagLst xmlns:p="http://schemas.openxmlformats.org/presentationml/2006/main">
-  <p:tag name="KSO_WM_DIAGRAM_VIRTUALLY_FRAME" val="{&quot;height&quot;:284.4,&quot;left&quot;:723.6,&quot;top&quot;:133.2,&quot;width&quot;:183.6}"/>
+  <p:tag name="KSO_WM_DIAGRAM_VIRTUALLY_FRAME" val="{&quot;height&quot;:259.20000000000005,&quot;left&quot;:54,&quot;top&quot;:131.04000000000002,&quot;width&quot;:856.8}"/>
 </p:tagLst>
 </file>
 
 <file path=ppt/tags/tag10.xml><?xml version="1.0" encoding="utf-8"?>
 <p:tagLst xmlns:p="http://schemas.openxmlformats.org/presentationml/2006/main">
-  <p:tag name="KSO_WM_DIAGRAM_VIRTUALLY_FRAME" val="{&quot;height&quot;:298.79999999999995,&quot;left&quot;:788.4,&quot;top&quot;:138.24,&quot;width&quot;:138.96000000000004}"/>
+  <p:tag name="KSO_WM_DIAGRAM_VIRTUALLY_FRAME" val="{&quot;height&quot;:259.20000000000005,&quot;left&quot;:54,&quot;top&quot;:131.04000000000002,&quot;width&quot;:856.8}"/>
 </p:tagLst>
 </file>
 
 <file path=ppt/tags/tag11.xml><?xml version="1.0" encoding="utf-8"?>
 <p:tagLst xmlns:p="http://schemas.openxmlformats.org/presentationml/2006/main">
-  <p:tag name="KSO_WM_DIAGRAM_VIRTUALLY_FRAME" val="{&quot;height&quot;:298.79999999999995,&quot;left&quot;:788.4,&quot;top&quot;:138.24,&quot;width&quot;:138.96000000000004}"/>
+  <p:tag name="KSO_WM_DIAGRAM_VIRTUALLY_FRAME" val="{&quot;height&quot;:259.20000000000005,&quot;left&quot;:54,&quot;top&quot;:131.04000000000002,&quot;width&quot;:856.8}"/>
 </p:tagLst>
 </file>
 
 <file path=ppt/tags/tag12.xml><?xml version="1.0" encoding="utf-8"?>
+<p:tagLst xmlns:p="http://schemas.openxmlformats.org/presentationml/2006/main">
+  <p:tag name="KSO_WM_DIAGRAM_VIRTUALLY_FRAME" val="{&quot;height&quot;:259.20000000000005,&quot;left&quot;:54,&quot;top&quot;:131.04000000000002,&quot;width&quot;:856.8}"/>
+</p:tagLst>
+</file>
+
+<file path=ppt/tags/tag13.xml><?xml version="1.0" encoding="utf-8"?>
+<p:tagLst xmlns:p="http://schemas.openxmlformats.org/presentationml/2006/main">
+  <p:tag name="KSO_WM_DIAGRAM_VIRTUALLY_FRAME" val="{&quot;height&quot;:259.20000000000005,&quot;left&quot;:54,&quot;top&quot;:131.04000000000002,&quot;width&quot;:856.8}"/>
+</p:tagLst>
+</file>
+
+<file path=ppt/tags/tag14.xml><?xml version="1.0" encoding="utf-8"?>
+<p:tagLst xmlns:p="http://schemas.openxmlformats.org/presentationml/2006/main">
+  <p:tag name="KSO_WM_DIAGRAM_VIRTUALLY_FRAME" val="{&quot;height&quot;:259.20000000000005,&quot;left&quot;:54,&quot;top&quot;:131.04000000000002,&quot;width&quot;:856.8}"/>
+</p:tagLst>
+</file>
+
+<file path=ppt/tags/tag15.xml><?xml version="1.0" encoding="utf-8"?>
+<p:tagLst xmlns:p="http://schemas.openxmlformats.org/presentationml/2006/main">
+  <p:tag name="KSO_WM_DIAGRAM_VIRTUALLY_FRAME" val="{&quot;height&quot;:259.20000000000005,&quot;left&quot;:54,&quot;top&quot;:131.04000000000002,&quot;width&quot;:856.8}"/>
+</p:tagLst>
+</file>
+
+<file path=ppt/tags/tag16.xml><?xml version="1.0" encoding="utf-8"?>
+<p:tagLst xmlns:p="http://schemas.openxmlformats.org/presentationml/2006/main">
+  <p:tag name="KSO_WM_DIAGRAM_VIRTUALLY_FRAME" val="{&quot;height&quot;:259.20000000000005,&quot;left&quot;:54,&quot;top&quot;:131.04000000000002,&quot;width&quot;:856.8}"/>
+</p:tagLst>
+</file>
+
+<file path=ppt/tags/tag17.xml><?xml version="1.0" encoding="utf-8"?>
+<p:tagLst xmlns:p="http://schemas.openxmlformats.org/presentationml/2006/main">
+  <p:tag name="KSO_WM_DIAGRAM_VIRTUALLY_FRAME" val="{&quot;height&quot;:284.4,&quot;left&quot;:723.6,&quot;top&quot;:133.2,&quot;width&quot;:183.6}"/>
+</p:tagLst>
+</file>
+
+<file path=ppt/tags/tag18.xml><?xml version="1.0" encoding="utf-8"?>
+<p:tagLst xmlns:p="http://schemas.openxmlformats.org/presentationml/2006/main">
+  <p:tag name="KSO_WM_DIAGRAM_VIRTUALLY_FRAME" val="{&quot;height&quot;:284.4,&quot;left&quot;:723.6,&quot;top&quot;:133.2,&quot;width&quot;:183.6}"/>
+</p:tagLst>
+</file>
+
+<file path=ppt/tags/tag19.xml><?xml version="1.0" encoding="utf-8"?>
 <p:tagLst xmlns:p="http://schemas.openxmlformats.org/presentationml/2006/main">
   <p:tag name="KSO_WM_DIAGRAM_VIRTUALLY_FRAME" val="{&quot;height&quot;:298.79999999999995,&quot;left&quot;:788.4,&quot;top&quot;:138.24,&quot;width&quot;:138.96000000000004}"/>
 </p:tagLst>
@@ -12334,49 +11802,97 @@
 
 <file path=ppt/tags/tag2.xml><?xml version="1.0" encoding="utf-8"?>
 <p:tagLst xmlns:p="http://schemas.openxmlformats.org/presentationml/2006/main">
-  <p:tag name="KSO_WM_DIAGRAM_VIRTUALLY_FRAME" val="{&quot;height&quot;:284.4,&quot;left&quot;:723.6,&quot;top&quot;:133.2,&quot;width&quot;:183.6}"/>
+  <p:tag name="KSO_WM_DIAGRAM_VIRTUALLY_FRAME" val="{&quot;height&quot;:259.20000000000005,&quot;left&quot;:54,&quot;top&quot;:131.04000000000002,&quot;width&quot;:856.8}"/>
+</p:tagLst>
+</file>
+
+<file path=ppt/tags/tag20.xml><?xml version="1.0" encoding="utf-8"?>
+<p:tagLst xmlns:p="http://schemas.openxmlformats.org/presentationml/2006/main">
+  <p:tag name="KSO_WM_DIAGRAM_VIRTUALLY_FRAME" val="{&quot;height&quot;:298.79999999999995,&quot;left&quot;:788.4,&quot;top&quot;:138.24,&quot;width&quot;:138.96000000000004}"/>
+</p:tagLst>
+</file>
+
+<file path=ppt/tags/tag21.xml><?xml version="1.0" encoding="utf-8"?>
+<p:tagLst xmlns:p="http://schemas.openxmlformats.org/presentationml/2006/main">
+  <p:tag name="KSO_WM_DIAGRAM_VIRTUALLY_FRAME" val="{&quot;height&quot;:298.79999999999995,&quot;left&quot;:788.4,&quot;top&quot;:138.24,&quot;width&quot;:138.96000000000004}"/>
+</p:tagLst>
+</file>
+
+<file path=ppt/tags/tag22.xml><?xml version="1.0" encoding="utf-8"?>
+<p:tagLst xmlns:p="http://schemas.openxmlformats.org/presentationml/2006/main">
+  <p:tag name="KSO_WM_DIAGRAM_VIRTUALLY_FRAME" val="{&quot;height&quot;:298.79999999999995,&quot;left&quot;:788.4,&quot;top&quot;:138.24,&quot;width&quot;:138.96000000000004}"/>
+</p:tagLst>
+</file>
+
+<file path=ppt/tags/tag23.xml><?xml version="1.0" encoding="utf-8"?>
+<p:tagLst xmlns:p="http://schemas.openxmlformats.org/presentationml/2006/main">
+  <p:tag name="KSO_WM_DIAGRAM_VIRTUALLY_FRAME" val="{&quot;height&quot;:298.79999999999995,&quot;left&quot;:788.4,&quot;top&quot;:138.24,&quot;width&quot;:138.96000000000004}"/>
+</p:tagLst>
+</file>
+
+<file path=ppt/tags/tag24.xml><?xml version="1.0" encoding="utf-8"?>
+<p:tagLst xmlns:p="http://schemas.openxmlformats.org/presentationml/2006/main">
+  <p:tag name="KSO_WM_DIAGRAM_VIRTUALLY_FRAME" val="{&quot;height&quot;:298.79999999999995,&quot;left&quot;:788.4,&quot;top&quot;:138.24,&quot;width&quot;:138.96000000000004}"/>
+</p:tagLst>
+</file>
+
+<file path=ppt/tags/tag25.xml><?xml version="1.0" encoding="utf-8"?>
+<p:tagLst xmlns:p="http://schemas.openxmlformats.org/presentationml/2006/main">
+  <p:tag name="KSO_WM_DIAGRAM_VIRTUALLY_FRAME" val="{&quot;height&quot;:298.79999999999995,&quot;left&quot;:788.4,&quot;top&quot;:138.24,&quot;width&quot;:138.96000000000004}"/>
+</p:tagLst>
+</file>
+
+<file path=ppt/tags/tag26.xml><?xml version="1.0" encoding="utf-8"?>
+<p:tagLst xmlns:p="http://schemas.openxmlformats.org/presentationml/2006/main">
+  <p:tag name="KSO_WM_DIAGRAM_VIRTUALLY_FRAME" val="{&quot;height&quot;:298.79999999999995,&quot;left&quot;:788.4,&quot;top&quot;:138.24,&quot;width&quot;:138.96000000000004}"/>
+</p:tagLst>
+</file>
+
+<file path=ppt/tags/tag27.xml><?xml version="1.0" encoding="utf-8"?>
+<p:tagLst xmlns:p="http://schemas.openxmlformats.org/presentationml/2006/main">
+  <p:tag name="KSO_WM_DIAGRAM_VIRTUALLY_FRAME" val="{&quot;height&quot;:298.79999999999995,&quot;left&quot;:788.4,&quot;top&quot;:138.24,&quot;width&quot;:138.96000000000004}"/>
 </p:tagLst>
 </file>
 
 <file path=ppt/tags/tag3.xml><?xml version="1.0" encoding="utf-8"?>
 <p:tagLst xmlns:p="http://schemas.openxmlformats.org/presentationml/2006/main">
-  <p:tag name="KSO_WM_DIAGRAM_VIRTUALLY_FRAME" val="{&quot;height&quot;:284.4,&quot;left&quot;:723.6,&quot;top&quot;:133.2,&quot;width&quot;:183.6}"/>
+  <p:tag name="KSO_WM_DIAGRAM_VIRTUALLY_FRAME" val="{&quot;height&quot;:259.20000000000005,&quot;left&quot;:54,&quot;top&quot;:131.04000000000002,&quot;width&quot;:856.8}"/>
 </p:tagLst>
 </file>
 
 <file path=ppt/tags/tag4.xml><?xml version="1.0" encoding="utf-8"?>
 <p:tagLst xmlns:p="http://schemas.openxmlformats.org/presentationml/2006/main">
-  <p:tag name="KSO_WM_DIAGRAM_VIRTUALLY_FRAME" val="{&quot;height&quot;:298.79999999999995,&quot;left&quot;:788.4,&quot;top&quot;:138.24,&quot;width&quot;:138.96000000000004}"/>
+  <p:tag name="KSO_WM_DIAGRAM_VIRTUALLY_FRAME" val="{&quot;height&quot;:259.20000000000005,&quot;left&quot;:54,&quot;top&quot;:131.04000000000002,&quot;width&quot;:856.8}"/>
 </p:tagLst>
 </file>
 
 <file path=ppt/tags/tag5.xml><?xml version="1.0" encoding="utf-8"?>
 <p:tagLst xmlns:p="http://schemas.openxmlformats.org/presentationml/2006/main">
-  <p:tag name="KSO_WM_DIAGRAM_VIRTUALLY_FRAME" val="{&quot;height&quot;:298.79999999999995,&quot;left&quot;:788.4,&quot;top&quot;:138.24,&quot;width&quot;:138.96000000000004}"/>
+  <p:tag name="KSO_WM_DIAGRAM_VIRTUALLY_FRAME" val="{&quot;height&quot;:259.20000000000005,&quot;left&quot;:54,&quot;top&quot;:131.04000000000002,&quot;width&quot;:856.8}"/>
 </p:tagLst>
 </file>
 
 <file path=ppt/tags/tag6.xml><?xml version="1.0" encoding="utf-8"?>
 <p:tagLst xmlns:p="http://schemas.openxmlformats.org/presentationml/2006/main">
-  <p:tag name="KSO_WM_DIAGRAM_VIRTUALLY_FRAME" val="{&quot;height&quot;:298.79999999999995,&quot;left&quot;:788.4,&quot;top&quot;:138.24,&quot;width&quot;:138.96000000000004}"/>
+  <p:tag name="KSO_WM_DIAGRAM_VIRTUALLY_FRAME" val="{&quot;height&quot;:259.20000000000005,&quot;left&quot;:54,&quot;top&quot;:131.04000000000002,&quot;width&quot;:856.8}"/>
 </p:tagLst>
 </file>
 
 <file path=ppt/tags/tag7.xml><?xml version="1.0" encoding="utf-8"?>
 <p:tagLst xmlns:p="http://schemas.openxmlformats.org/presentationml/2006/main">
-  <p:tag name="KSO_WM_DIAGRAM_VIRTUALLY_FRAME" val="{&quot;height&quot;:298.79999999999995,&quot;left&quot;:788.4,&quot;top&quot;:138.24,&quot;width&quot;:138.96000000000004}"/>
+  <p:tag name="KSO_WM_DIAGRAM_VIRTUALLY_FRAME" val="{&quot;height&quot;:259.20000000000005,&quot;left&quot;:54,&quot;top&quot;:131.04000000000002,&quot;width&quot;:856.8}"/>
 </p:tagLst>
 </file>
 
 <file path=ppt/tags/tag8.xml><?xml version="1.0" encoding="utf-8"?>
 <p:tagLst xmlns:p="http://schemas.openxmlformats.org/presentationml/2006/main">
-  <p:tag name="KSO_WM_DIAGRAM_VIRTUALLY_FRAME" val="{&quot;height&quot;:298.79999999999995,&quot;left&quot;:788.4,&quot;top&quot;:138.24,&quot;width&quot;:138.96000000000004}"/>
+  <p:tag name="KSO_WM_DIAGRAM_VIRTUALLY_FRAME" val="{&quot;height&quot;:259.20000000000005,&quot;left&quot;:54,&quot;top&quot;:131.04000000000002,&quot;width&quot;:856.8}"/>
 </p:tagLst>
 </file>
 
 <file path=ppt/tags/tag9.xml><?xml version="1.0" encoding="utf-8"?>
 <p:tagLst xmlns:p="http://schemas.openxmlformats.org/presentationml/2006/main">
-  <p:tag name="KSO_WM_DIAGRAM_VIRTUALLY_FRAME" val="{&quot;height&quot;:298.79999999999995,&quot;left&quot;:788.4,&quot;top&quot;:138.24,&quot;width&quot;:138.96000000000004}"/>
+  <p:tag name="KSO_WM_DIAGRAM_VIRTUALLY_FRAME" val="{&quot;height&quot;:259.20000000000005,&quot;left&quot;:54,&quot;top&quot;:131.04000000000002,&quot;width&quot;:856.8}"/>
 </p:tagLst>
 </file>
 

--- a/benchmarks/eplb_rebalance/presentation/eplb_migration_batching.pptx
+++ b/benchmarks/eplb_rebalance/presentation/eplb_migration_batching.pptx
@@ -4828,8 +4828,8 @@
         </p:nvSpPr>
         <p:spPr>
           <a:xfrm>
-            <a:off x="576072" y="1097280"/>
-            <a:ext cx="3273552" cy="1734185"/>
+            <a:off x="576072" y="987552"/>
+            <a:ext cx="3767328" cy="2240280"/>
           </a:xfrm>
           <a:prstGeom prst="rect">
             <a:avLst/>
@@ -4837,51 +4837,25 @@
           <a:noFill/>
         </p:spPr>
         <p:txBody>
-          <a:bodyPr wrap="square" lIns="36576" tIns="36576" rIns="36576" bIns="36576" anchor="t">
+          <a:bodyPr wrap="square" lIns="128016" tIns="73152" rIns="128016" bIns="54864" anchor="ctr">
             <a:spAutoFit/>
           </a:bodyPr>
           <a:lstStyle/>
           <a:p>
             <a:pPr algn="l"/>
             <a:r>
-              <a:rPr sz="2700" b="1">
-                <a:solidFill>
-                  <a:srgbClr val="FFFFFF"/>
-                </a:solidFill>
-                <a:latin typeface="Aptos"/>
-              </a:rPr>
-              <a:t>Contention-Aware
-Expert Migration
-for MoE Serving</a:t>
+              <a:rPr sz="2200" b="1">
+                <a:solidFill>
+                  <a:srgbClr val="14345B"/>
+                </a:solidFill>
+                <a:latin typeface="Arial"/>
+              </a:rPr>
+              <a:t>Contention-Aware Expert
+Parallel Load Balancing in
+Mixture-of-Experts Serving
+in vLLM</a:t>
             </a:r>
             <a:endParaRPr sz="2700" b="1">
-              <a:solidFill>
-                <a:srgbClr val="FFFFFF"/>
-              </a:solidFill>
-              <a:latin typeface="Aptos"/>
-            </a:endParaRPr>
-          </a:p>
-          <a:p>
-            <a:pPr algn="l"/>
-            <a:r>
-              <a:rPr lang="en-US" sz="2700" b="1">
-                <a:solidFill>
-                  <a:srgbClr val="FFFFFF"/>
-                </a:solidFill>
-                <a:latin typeface="Aptos"/>
-              </a:rPr>
-              <a:t>in </a:t>
-            </a:r>
-            <a:r>
-              <a:rPr lang="en-US" sz="2700" b="1">
-                <a:solidFill>
-                  <a:srgbClr val="FFFFFF"/>
-                </a:solidFill>
-                <a:latin typeface="Aptos"/>
-              </a:rPr>
-              <a:t>vLLM</a:t>
-            </a:r>
-            <a:endParaRPr lang="en-US" sz="2700" b="1">
               <a:solidFill>
                 <a:srgbClr val="FFFFFF"/>
               </a:solidFill>
@@ -8160,13 +8134,100 @@
       </p:grpSp>
       <p:sp>
         <p:nvSpPr>
-          <p:cNvPr id="48" name="GreedyGraphNode0"/>
+          <p:cNvPr id="61" name="TextBox 9"/>
+          <p:cNvSpPr txBox="1"/>
+          <p:nvPr/>
+        </p:nvSpPr>
+        <p:spPr>
+          <a:xfrm>
+            <a:off x="1006475" y="3555683"/>
+            <a:ext cx="2980055" cy="248920"/>
+          </a:xfrm>
+          <a:prstGeom prst="rect">
+            <a:avLst/>
+          </a:prstGeom>
+          <a:noFill/>
+        </p:spPr>
+        <p:txBody>
+          <a:bodyPr wrap="square" lIns="36576" tIns="36576" rIns="36576" bIns="36576" anchor="ctr">
+            <a:spAutoFit/>
+          </a:bodyPr>
+          <a:lstStyle/>
+          <a:p>
+            <a:pPr algn="l">
+              <a:defRPr sz="1150"/>
+            </a:pPr>
+            <a:r>
+              <a:rPr sz="1150" b="1">
+                <a:solidFill>
+                  <a:srgbClr val="2D67A4"/>
+                </a:solidFill>
+                <a:latin typeface="Aptos"/>
+              </a:rPr>
+              <a:t>INPUT ORDER</a:t>
+            </a:r>
+            <a:r>
+              <a:rPr lang="en-US" sz="1150" b="1">
+                <a:solidFill>
+                  <a:srgbClr val="2D67A4"/>
+                </a:solidFill>
+                <a:latin typeface="Aptos"/>
+              </a:rPr>
+              <a:t>(for loop flows)</a:t>
+            </a:r>
+            <a:endParaRPr lang="en-US" sz="1150" b="1">
+              <a:solidFill>
+                <a:srgbClr val="2D67A4"/>
+              </a:solidFill>
+              <a:latin typeface="Aptos"/>
+            </a:endParaRPr>
+          </a:p>
+        </p:txBody>
+      </p:sp>
+      <p:sp>
+        <p:nvSpPr>
+          <p:cNvPr id="62" name="GreedyGraphTitle"/>
+          <p:cNvSpPr txBox="1"/>
+          <p:nvPr/>
+        </p:nvSpPr>
+        <p:spPr>
+          <a:xfrm>
+            <a:off x="4773168" y="4425696"/>
+            <a:ext cx="2377440" cy="274320"/>
+          </a:xfrm>
+          <a:prstGeom prst="rect">
+            <a:avLst/>
+          </a:prstGeom>
+          <a:noFill/>
+        </p:spPr>
+        <p:txBody>
+          <a:bodyPr wrap="square" lIns="128016" rIns="128016" tIns="73152" bIns="54864" anchor="ctr">
+            <a:spAutoFit/>
+          </a:bodyPr>
+          <a:lstStyle/>
+          <a:p>
+            <a:pPr algn="l"/>
+            <a:r>
+              <a:rPr sz="1150" b="1">
+                <a:solidFill>
+                  <a:srgbClr val="2F6FAE"/>
+                </a:solidFill>
+                <a:latin typeface="Arial"/>
+              </a:rPr>
+              <a:t>DIRECTED EXPERT TRANSFERS</a:t>
+            </a:r>
+          </a:p>
+        </p:txBody>
+      </p:sp>
+      <p:sp>
+        <p:nvSpPr>
+          <p:cNvPr id="63" name="GreedyGraphNode0"/>
           <p:cNvSpPr/>
           <p:nvPr/>
         </p:nvSpPr>
         <p:spPr>
           <a:xfrm>
-            <a:off x="1488440" y="1774317"/>
+            <a:off x="6446520" y="4690872"/>
             <a:ext cx="457200" cy="457200"/>
           </a:xfrm>
           <a:prstGeom prst="ellipse">
@@ -8196,7 +8257,7 @@
           </a:fontRef>
         </p:style>
         <p:txBody>
-          <a:bodyPr wrap="square" lIns="128016" tIns="73152" rIns="128016" bIns="54864" rtlCol="0" anchor="ctr"/>
+          <a:bodyPr rtlCol="0" anchor="ctr" wrap="square" lIns="128016" rIns="128016" tIns="73152" bIns="54864"/>
           <a:lstStyle/>
           <a:p>
             <a:pPr algn="ctr"/>
@@ -8205,28 +8266,22 @@
                 <a:solidFill>
                   <a:srgbClr val="14345B"/>
                 </a:solidFill>
-                <a:latin typeface="Arial" panose="020B0604020202020204"/>
+                <a:latin typeface="Arial"/>
               </a:rPr>
               <a:t>0</a:t>
             </a:r>
-            <a:endParaRPr sz="1300" b="1">
-              <a:solidFill>
-                <a:srgbClr val="14345B"/>
-              </a:solidFill>
-              <a:latin typeface="Arial" panose="020B0604020202020204"/>
-            </a:endParaRPr>
-          </a:p>
-        </p:txBody>
-      </p:sp>
-      <p:sp>
-        <p:nvSpPr>
-          <p:cNvPr id="49" name="GreedyGraphNode1"/>
+          </a:p>
+        </p:txBody>
+      </p:sp>
+      <p:sp>
+        <p:nvSpPr>
+          <p:cNvPr id="64" name="GreedyGraphNode1"/>
           <p:cNvSpPr/>
           <p:nvPr/>
         </p:nvSpPr>
         <p:spPr>
           <a:xfrm>
-            <a:off x="4185920" y="1774317"/>
+            <a:off x="9144000" y="4690872"/>
             <a:ext cx="457200" cy="457200"/>
           </a:xfrm>
           <a:prstGeom prst="ellipse">
@@ -8256,7 +8311,7 @@
           </a:fontRef>
         </p:style>
         <p:txBody>
-          <a:bodyPr wrap="square" lIns="128016" tIns="73152" rIns="128016" bIns="54864" rtlCol="0" anchor="ctr"/>
+          <a:bodyPr rtlCol="0" anchor="ctr" wrap="square" lIns="128016" rIns="128016" tIns="73152" bIns="54864"/>
           <a:lstStyle/>
           <a:p>
             <a:pPr algn="ctr"/>
@@ -8265,28 +8320,22 @@
                 <a:solidFill>
                   <a:srgbClr val="14345B"/>
                 </a:solidFill>
-                <a:latin typeface="Arial" panose="020B0604020202020204"/>
+                <a:latin typeface="Arial"/>
               </a:rPr>
               <a:t>1</a:t>
             </a:r>
-            <a:endParaRPr sz="1300" b="1">
-              <a:solidFill>
-                <a:srgbClr val="14345B"/>
-              </a:solidFill>
-              <a:latin typeface="Arial" panose="020B0604020202020204"/>
-            </a:endParaRPr>
-          </a:p>
-        </p:txBody>
-      </p:sp>
-      <p:sp>
-        <p:nvSpPr>
-          <p:cNvPr id="50" name="GreedyGraphNode2"/>
+          </a:p>
+        </p:txBody>
+      </p:sp>
+      <p:sp>
+        <p:nvSpPr>
+          <p:cNvPr id="65" name="GreedyGraphNode2"/>
           <p:cNvSpPr/>
           <p:nvPr/>
         </p:nvSpPr>
         <p:spPr>
           <a:xfrm>
-            <a:off x="4185920" y="2551557"/>
+            <a:off x="9144000" y="5468112"/>
             <a:ext cx="457200" cy="457200"/>
           </a:xfrm>
           <a:prstGeom prst="ellipse">
@@ -8316,7 +8365,7 @@
           </a:fontRef>
         </p:style>
         <p:txBody>
-          <a:bodyPr wrap="square" lIns="128016" tIns="73152" rIns="128016" bIns="54864" rtlCol="0" anchor="ctr"/>
+          <a:bodyPr rtlCol="0" anchor="ctr" wrap="square" lIns="128016" rIns="128016" tIns="73152" bIns="54864"/>
           <a:lstStyle/>
           <a:p>
             <a:pPr algn="ctr"/>
@@ -8325,28 +8374,22 @@
                 <a:solidFill>
                   <a:srgbClr val="14345B"/>
                 </a:solidFill>
-                <a:latin typeface="Arial" panose="020B0604020202020204"/>
+                <a:latin typeface="Arial"/>
               </a:rPr>
               <a:t>2</a:t>
             </a:r>
-            <a:endParaRPr sz="1300" b="1">
-              <a:solidFill>
-                <a:srgbClr val="14345B"/>
-              </a:solidFill>
-              <a:latin typeface="Arial" panose="020B0604020202020204"/>
-            </a:endParaRPr>
-          </a:p>
-        </p:txBody>
-      </p:sp>
-      <p:sp>
-        <p:nvSpPr>
-          <p:cNvPr id="51" name="GreedyGraphNode3"/>
+          </a:p>
+        </p:txBody>
+      </p:sp>
+      <p:sp>
+        <p:nvSpPr>
+          <p:cNvPr id="66" name="GreedyGraphNode3"/>
           <p:cNvSpPr/>
           <p:nvPr/>
         </p:nvSpPr>
         <p:spPr>
           <a:xfrm>
-            <a:off x="1488440" y="2551557"/>
+            <a:off x="6446520" y="5468112"/>
             <a:ext cx="457200" cy="457200"/>
           </a:xfrm>
           <a:prstGeom prst="ellipse">
@@ -8376,7 +8419,7 @@
           </a:fontRef>
         </p:style>
         <p:txBody>
-          <a:bodyPr wrap="square" lIns="128016" tIns="73152" rIns="128016" bIns="54864" rtlCol="0" anchor="ctr"/>
+          <a:bodyPr rtlCol="0" anchor="ctr" wrap="square" lIns="128016" rIns="128016" tIns="73152" bIns="54864"/>
           <a:lstStyle/>
           <a:p>
             <a:pPr algn="ctr"/>
@@ -8385,28 +8428,22 @@
                 <a:solidFill>
                   <a:srgbClr val="14345B"/>
                 </a:solidFill>
-                <a:latin typeface="Arial" panose="020B0604020202020204"/>
+                <a:latin typeface="Arial"/>
               </a:rPr>
               <a:t>3</a:t>
             </a:r>
-            <a:endParaRPr sz="1300" b="1">
-              <a:solidFill>
-                <a:srgbClr val="14345B"/>
-              </a:solidFill>
-              <a:latin typeface="Arial" panose="020B0604020202020204"/>
-            </a:endParaRPr>
           </a:p>
         </p:txBody>
       </p:sp>
       <p:cxnSp>
         <p:nvCxnSpPr>
-          <p:cNvPr id="52" name="GreedyGraphArrow"/>
+          <p:cNvPr id="67" name="GreedyGraphArrow"/>
           <p:cNvCxnSpPr/>
           <p:nvPr/>
         </p:nvCxnSpPr>
         <p:spPr>
           <a:xfrm>
-            <a:off x="1945640" y="2002917"/>
+            <a:off x="6903720" y="4919472"/>
             <a:ext cx="2240280" cy="0"/>
           </a:xfrm>
           <a:prstGeom prst="line">
@@ -8436,13 +8473,13 @@
       </p:cxnSp>
       <p:cxnSp>
         <p:nvCxnSpPr>
-          <p:cNvPr id="53" name="GreedyGraphArrow"/>
+          <p:cNvPr id="68" name="GreedyGraphArrow"/>
           <p:cNvCxnSpPr/>
           <p:nvPr/>
         </p:nvCxnSpPr>
         <p:spPr>
           <a:xfrm>
-            <a:off x="4414520" y="2231517"/>
+            <a:off x="9372600" y="5148072"/>
             <a:ext cx="0" cy="320040"/>
           </a:xfrm>
           <a:prstGeom prst="line">
@@ -8472,13 +8509,13 @@
       </p:cxnSp>
       <p:cxnSp>
         <p:nvCxnSpPr>
-          <p:cNvPr id="54" name="GreedyGraphArrow"/>
+          <p:cNvPr id="69" name="GreedyGraphArrow"/>
           <p:cNvCxnSpPr/>
           <p:nvPr/>
         </p:nvCxnSpPr>
         <p:spPr>
           <a:xfrm flipH="1">
-            <a:off x="1945640" y="2780157"/>
+            <a:off x="6903720" y="5696712"/>
             <a:ext cx="2240280" cy="0"/>
           </a:xfrm>
           <a:prstGeom prst="line">
@@ -8508,13 +8545,13 @@
       </p:cxnSp>
       <p:cxnSp>
         <p:nvCxnSpPr>
-          <p:cNvPr id="55" name="GreedyGraphArrow"/>
+          <p:cNvPr id="70" name="GreedyGraphArrow"/>
           <p:cNvCxnSpPr/>
           <p:nvPr/>
         </p:nvCxnSpPr>
         <p:spPr>
           <a:xfrm>
-            <a:off x="1717040" y="2231517"/>
+            <a:off x="6675120" y="5148072"/>
             <a:ext cx="0" cy="320040"/>
           </a:xfrm>
           <a:prstGeom prst="line">
@@ -8544,13 +8581,13 @@
       </p:cxnSp>
       <p:sp>
         <p:nvSpPr>
-          <p:cNvPr id="56" name="GreedyGraphLabel0"/>
+          <p:cNvPr id="71" name="GreedyGraphLabel0"/>
           <p:cNvSpPr txBox="1"/>
           <p:nvPr/>
         </p:nvSpPr>
         <p:spPr>
           <a:xfrm>
-            <a:off x="2539999" y="1728597"/>
+            <a:off x="7498079" y="4645152"/>
             <a:ext cx="1188720" cy="228600"/>
           </a:xfrm>
           <a:prstGeom prst="rect">
@@ -8559,7 +8596,7 @@
           <a:noFill/>
         </p:spPr>
         <p:txBody>
-          <a:bodyPr wrap="square" lIns="128016" tIns="73152" rIns="128016" bIns="54864" anchor="ctr">
+          <a:bodyPr wrap="square" lIns="128016" rIns="128016" tIns="73152" bIns="54864" anchor="ctr">
             <a:spAutoFit/>
           </a:bodyPr>
           <a:lstStyle/>
@@ -8572,28 +8609,22 @@
                 <a:solidFill>
                   <a:srgbClr val="14345B"/>
                 </a:solidFill>
-                <a:latin typeface="Arial" panose="020B0604020202020204"/>
+                <a:latin typeface="Arial"/>
               </a:rPr>
               <a:t>F₀  {E₁,E₇}</a:t>
             </a:r>
-            <a:endParaRPr sz="1150" b="1">
-              <a:solidFill>
-                <a:srgbClr val="14345B"/>
-              </a:solidFill>
-              <a:latin typeface="Arial" panose="020B0604020202020204"/>
-            </a:endParaRPr>
-          </a:p>
-        </p:txBody>
-      </p:sp>
-      <p:sp>
-        <p:nvSpPr>
-          <p:cNvPr id="57" name="GreedyGraphLabel1"/>
+          </a:p>
+        </p:txBody>
+      </p:sp>
+      <p:sp>
+        <p:nvSpPr>
+          <p:cNvPr id="72" name="GreedyGraphLabel1"/>
           <p:cNvSpPr txBox="1"/>
           <p:nvPr/>
         </p:nvSpPr>
         <p:spPr>
           <a:xfrm>
-            <a:off x="4281932" y="2273808"/>
+            <a:off x="9491472" y="5138928"/>
             <a:ext cx="960120" cy="228600"/>
           </a:xfrm>
           <a:prstGeom prst="rect">
@@ -8602,7 +8633,7 @@
           <a:noFill/>
         </p:spPr>
         <p:txBody>
-          <a:bodyPr wrap="square" lIns="128016" tIns="73152" rIns="128016" bIns="54864" anchor="ctr">
+          <a:bodyPr wrap="square" lIns="128016" rIns="128016" tIns="73152" bIns="54864" anchor="ctr">
             <a:spAutoFit/>
           </a:bodyPr>
           <a:lstStyle/>
@@ -8615,28 +8646,22 @@
                 <a:solidFill>
                   <a:srgbClr val="14345B"/>
                 </a:solidFill>
-                <a:latin typeface="Arial" panose="020B0604020202020204"/>
+                <a:latin typeface="Arial"/>
               </a:rPr>
               <a:t>F₂  {E₄}</a:t>
             </a:r>
-            <a:endParaRPr sz="1150" b="1">
-              <a:solidFill>
-                <a:srgbClr val="14345B"/>
-              </a:solidFill>
-              <a:latin typeface="Arial" panose="020B0604020202020204"/>
-            </a:endParaRPr>
-          </a:p>
-        </p:txBody>
-      </p:sp>
-      <p:sp>
-        <p:nvSpPr>
-          <p:cNvPr id="58" name="GreedyGraphLabel2"/>
+          </a:p>
+        </p:txBody>
+      </p:sp>
+      <p:sp>
+        <p:nvSpPr>
+          <p:cNvPr id="73" name="GreedyGraphLabel2"/>
           <p:cNvSpPr txBox="1"/>
           <p:nvPr/>
         </p:nvSpPr>
         <p:spPr>
           <a:xfrm>
-            <a:off x="2649728" y="2825877"/>
+            <a:off x="7607808" y="5742432"/>
             <a:ext cx="960120" cy="228600"/>
           </a:xfrm>
           <a:prstGeom prst="rect">
@@ -8645,7 +8670,7 @@
           <a:noFill/>
         </p:spPr>
         <p:txBody>
-          <a:bodyPr wrap="square" lIns="128016" tIns="73152" rIns="128016" bIns="54864" anchor="ctr">
+          <a:bodyPr wrap="square" lIns="128016" rIns="128016" tIns="73152" bIns="54864" anchor="ctr">
             <a:spAutoFit/>
           </a:bodyPr>
           <a:lstStyle/>
@@ -8658,28 +8683,22 @@
                 <a:solidFill>
                   <a:srgbClr val="14345B"/>
                 </a:solidFill>
-                <a:latin typeface="Arial" panose="020B0604020202020204"/>
+                <a:latin typeface="Arial"/>
               </a:rPr>
               <a:t>F₁  {E₃}</a:t>
             </a:r>
-            <a:endParaRPr sz="1150" b="1">
-              <a:solidFill>
-                <a:srgbClr val="14345B"/>
-              </a:solidFill>
-              <a:latin typeface="Arial" panose="020B0604020202020204"/>
-            </a:endParaRPr>
-          </a:p>
-        </p:txBody>
-      </p:sp>
-      <p:sp>
-        <p:nvSpPr>
-          <p:cNvPr id="59" name="GreedyGraphLabel3"/>
+          </a:p>
+        </p:txBody>
+      </p:sp>
+      <p:sp>
+        <p:nvSpPr>
+          <p:cNvPr id="74" name="GreedyGraphLabel3"/>
           <p:cNvSpPr txBox="1"/>
           <p:nvPr/>
         </p:nvSpPr>
         <p:spPr>
           <a:xfrm>
-            <a:off x="1631315" y="2245233"/>
+            <a:off x="5532120" y="5138928"/>
             <a:ext cx="960120" cy="228600"/>
           </a:xfrm>
           <a:prstGeom prst="rect">
@@ -8688,7 +8707,7 @@
           <a:noFill/>
         </p:spPr>
         <p:txBody>
-          <a:bodyPr wrap="square" lIns="128016" tIns="73152" rIns="128016" bIns="54864" anchor="ctr">
+          <a:bodyPr wrap="square" lIns="128016" rIns="128016" tIns="73152" bIns="54864" anchor="ctr">
             <a:spAutoFit/>
           </a:bodyPr>
           <a:lstStyle/>
@@ -8701,68 +8720,10 @@
                 <a:solidFill>
                   <a:srgbClr val="14345B"/>
                 </a:solidFill>
-                <a:latin typeface="Arial" panose="020B0604020202020204"/>
+                <a:latin typeface="Arial"/>
               </a:rPr>
               <a:t>F₃  {E₉}</a:t>
             </a:r>
-            <a:endParaRPr sz="1150" b="1">
-              <a:solidFill>
-                <a:srgbClr val="14345B"/>
-              </a:solidFill>
-              <a:latin typeface="Arial" panose="020B0604020202020204"/>
-            </a:endParaRPr>
-          </a:p>
-        </p:txBody>
-      </p:sp>
-      <p:sp>
-        <p:nvSpPr>
-          <p:cNvPr id="61" name="TextBox 9"/>
-          <p:cNvSpPr txBox="1"/>
-          <p:nvPr/>
-        </p:nvSpPr>
-        <p:spPr>
-          <a:xfrm>
-            <a:off x="1006475" y="3555683"/>
-            <a:ext cx="2980055" cy="248920"/>
-          </a:xfrm>
-          <a:prstGeom prst="rect">
-            <a:avLst/>
-          </a:prstGeom>
-          <a:noFill/>
-        </p:spPr>
-        <p:txBody>
-          <a:bodyPr wrap="square" lIns="36576" tIns="36576" rIns="36576" bIns="36576" anchor="ctr">
-            <a:spAutoFit/>
-          </a:bodyPr>
-          <a:lstStyle/>
-          <a:p>
-            <a:pPr algn="l">
-              <a:defRPr sz="1150"/>
-            </a:pPr>
-            <a:r>
-              <a:rPr sz="1150" b="1">
-                <a:solidFill>
-                  <a:srgbClr val="2D67A4"/>
-                </a:solidFill>
-                <a:latin typeface="Aptos"/>
-              </a:rPr>
-              <a:t>INPUT ORDER</a:t>
-            </a:r>
-            <a:r>
-              <a:rPr lang="en-US" sz="1150" b="1">
-                <a:solidFill>
-                  <a:srgbClr val="2D67A4"/>
-                </a:solidFill>
-                <a:latin typeface="Aptos"/>
-              </a:rPr>
-              <a:t>(for loop flows)</a:t>
-            </a:r>
-            <a:endParaRPr lang="en-US" sz="1150" b="1">
-              <a:solidFill>
-                <a:srgbClr val="2D67A4"/>
-              </a:solidFill>
-              <a:latin typeface="Aptos"/>
-            </a:endParaRPr>
           </a:p>
         </p:txBody>
       </p:sp>
@@ -16280,7 +16241,7 @@
       </p:cxnSp>
       <p:sp>
         <p:nvSpPr>
-          <p:cNvPr id="7" name="Rounded Rectangle 6"/>
+          <p:cNvPr id="24" name="Rounded Rectangle 23"/>
           <p:cNvSpPr/>
           <p:nvPr/>
         </p:nvSpPr>
@@ -16316,7 +16277,7 @@
           </a:fontRef>
         </p:style>
         <p:txBody>
-          <a:bodyPr wrap="square" lIns="128016" tIns="73152" rIns="128016" bIns="54864" rtlCol="0" anchor="ctr"/>
+          <a:bodyPr rtlCol="0" anchor="ctr" wrap="square" lIns="128016" rIns="128016" tIns="73152" bIns="54864"/>
           <a:lstStyle/>
           <a:p>
             <a:pPr algn="ctr"/>
@@ -16325,57 +16286,33 @@
                 <a:solidFill>
                   <a:srgbClr val="14345B"/>
                 </a:solidFill>
-                <a:latin typeface="Arial" panose="020B0604020202020204"/>
-              </a:rPr>
-              <a:t>PURPOSE   Is the added scheduler cost </a:t>
-            </a:r>
-            <a:r>
-              <a:rPr lang="en-US" sz="1700" b="1">
-                <a:solidFill>
-                  <a:srgbClr val="14345B"/>
-                </a:solidFill>
-                <a:latin typeface="Arial" panose="020B0604020202020204"/>
-              </a:rPr>
-              <a:t>less than</a:t>
-            </a:r>
-            <a:r>
-              <a:rPr sz="1700" b="1">
-                <a:solidFill>
-                  <a:srgbClr val="14345B"/>
-                </a:solidFill>
-                <a:latin typeface="Arial" panose="020B0604020202020204"/>
-              </a:rPr>
-              <a:t> the serving time saved?</a:t>
-            </a:r>
-            <a:endParaRPr sz="1700" b="1">
-              <a:solidFill>
-                <a:srgbClr val="14345B"/>
-              </a:solidFill>
-              <a:latin typeface="Arial" panose="020B0604020202020204"/>
-            </a:endParaRPr>
-          </a:p>
-        </p:txBody>
-      </p:sp>
-      <p:sp>
-        <p:nvSpPr>
-          <p:cNvPr id="8" name="Rounded Rectangle 7"/>
+                <a:latin typeface="Arial"/>
+              </a:rPr>
+              <a:t>PURPOSE   Is the added scheduler cost small compared with the serving time saved?</a:t>
+            </a:r>
+          </a:p>
+        </p:txBody>
+      </p:sp>
+      <p:sp>
+        <p:nvSpPr>
+          <p:cNvPr id="25" name="Rounded Rectangle 24"/>
           <p:cNvSpPr/>
           <p:nvPr/>
         </p:nvSpPr>
         <p:spPr>
           <a:xfrm>
-            <a:off x="640080" y="1536192"/>
-            <a:ext cx="10972800" cy="658368"/>
+            <a:off x="640080" y="2514600"/>
+            <a:ext cx="3154680" cy="2240280"/>
           </a:xfrm>
           <a:prstGeom prst="roundRect">
             <a:avLst/>
           </a:prstGeom>
           <a:solidFill>
-            <a:srgbClr val="E8F1FA"/>
+            <a:srgbClr val="FFFFFF"/>
           </a:solidFill>
-          <a:ln w="17780">
+          <a:ln w="20320">
             <a:solidFill>
-              <a:srgbClr val="2F6FAE"/>
+              <a:srgbClr val="7D48A1"/>
             </a:solidFill>
           </a:ln>
         </p:spPr>
@@ -16394,156 +16331,23 @@
           </a:fontRef>
         </p:style>
         <p:txBody>
-          <a:bodyPr wrap="square" lIns="128016" tIns="73152" rIns="128016" bIns="54864" rtlCol="0" anchor="ctr"/>
+          <a:bodyPr rtlCol="0" anchor="ctr"/>
           <a:lstStyle/>
           <a:p>
             <a:pPr algn="ctr"/>
-            <a:r>
-              <a:rPr sz="1700" b="1">
-                <a:solidFill>
-                  <a:srgbClr val="14345B"/>
-                </a:solidFill>
-                <a:latin typeface="Arial" panose="020B0604020202020204"/>
-              </a:rPr>
-              <a:t>PURPOSE   Is the</a:t>
-            </a:r>
-            <a:r>
-              <a:rPr sz="1700" b="1">
-                <a:ln/>
-                <a:solidFill>
-                  <a:schemeClr val="accent1"/>
-                </a:solidFill>
-                <a:effectLst>
-                  <a:outerShdw blurRad="38100" dist="25400" dir="5400000" algn="ctr" rotWithShape="0">
-                    <a:srgbClr val="6E747A">
-                      <a:alpha val="43000"/>
-                    </a:srgbClr>
-                  </a:outerShdw>
-                </a:effectLst>
-                <a:latin typeface="Arial" panose="020B0604020202020204"/>
-              </a:rPr>
-              <a:t> added scheduler cost</a:t>
-            </a:r>
-            <a:r>
-              <a:rPr sz="1700" b="1">
-                <a:solidFill>
-                  <a:srgbClr val="14345B"/>
-                </a:solidFill>
-                <a:latin typeface="Arial" panose="020B0604020202020204"/>
-              </a:rPr>
-              <a:t> small compared with </a:t>
-            </a:r>
-            <a:r>
-              <a:rPr sz="1700" b="1">
-                <a:ln/>
-                <a:solidFill>
-                  <a:schemeClr val="accent1"/>
-                </a:solidFill>
-                <a:effectLst>
-                  <a:outerShdw blurRad="38100" dist="25400" dir="5400000" algn="ctr" rotWithShape="0">
-                    <a:srgbClr val="6E747A">
-                      <a:alpha val="43000"/>
-                    </a:srgbClr>
-                  </a:outerShdw>
-                </a:effectLst>
-                <a:latin typeface="Arial" panose="020B0604020202020204"/>
-              </a:rPr>
-              <a:t>the serving time saved</a:t>
-            </a:r>
-            <a:r>
-              <a:rPr sz="1700" b="1">
-                <a:solidFill>
-                  <a:srgbClr val="14345B"/>
-                </a:solidFill>
-                <a:latin typeface="Arial" panose="020B0604020202020204"/>
-              </a:rPr>
-              <a:t>?</a:t>
-            </a:r>
-            <a:endParaRPr sz="1700" b="1">
-              <a:solidFill>
-                <a:srgbClr val="14345B"/>
-              </a:solidFill>
-              <a:latin typeface="Arial" panose="020B0604020202020204"/>
-            </a:endParaRPr>
-          </a:p>
-        </p:txBody>
-      </p:sp>
-      <p:cxnSp>
-        <p:nvCxnSpPr>
-          <p:cNvPr id="21" name="直接箭头连接符 20"/>
-          <p:cNvCxnSpPr/>
-          <p:nvPr/>
-        </p:nvCxnSpPr>
-        <p:spPr>
-          <a:xfrm>
-            <a:off x="1149350" y="5419090"/>
-            <a:ext cx="3220720" cy="0"/>
-          </a:xfrm>
-          <a:prstGeom prst="straightConnector1">
-            <a:avLst/>
-          </a:prstGeom>
-          <a:ln>
-            <a:tailEnd type="arrow"/>
-          </a:ln>
-        </p:spPr>
-        <p:style>
-          <a:lnRef idx="2">
-            <a:schemeClr val="accent1"/>
-          </a:lnRef>
-          <a:fillRef idx="0">
-            <a:schemeClr val="accent1"/>
-          </a:fillRef>
-          <a:effectRef idx="1">
-            <a:schemeClr val="accent1"/>
-          </a:effectRef>
-          <a:fontRef idx="minor">
-            <a:schemeClr val="tx1"/>
-          </a:fontRef>
-        </p:style>
-      </p:cxnSp>
-      <p:cxnSp>
-        <p:nvCxnSpPr>
-          <p:cNvPr id="22" name="直接箭头连接符 21"/>
-          <p:cNvCxnSpPr/>
-          <p:nvPr/>
-        </p:nvCxnSpPr>
-        <p:spPr>
-          <a:xfrm flipH="1" flipV="1">
-            <a:off x="1526540" y="3428365"/>
-            <a:ext cx="6350" cy="2331085"/>
-          </a:xfrm>
-          <a:prstGeom prst="straightConnector1">
-            <a:avLst/>
-          </a:prstGeom>
-          <a:ln>
-            <a:tailEnd type="arrow"/>
-          </a:ln>
-        </p:spPr>
-        <p:style>
-          <a:lnRef idx="2">
-            <a:schemeClr val="accent1"/>
-          </a:lnRef>
-          <a:fillRef idx="0">
-            <a:schemeClr val="accent1"/>
-          </a:fillRef>
-          <a:effectRef idx="1">
-            <a:schemeClr val="accent1"/>
-          </a:effectRef>
-          <a:fontRef idx="minor">
-            <a:schemeClr val="tx1"/>
-          </a:fontRef>
-        </p:style>
-      </p:cxnSp>
-      <p:sp>
-        <p:nvSpPr>
-          <p:cNvPr id="24" name="文本框 23"/>
+          </a:p>
+        </p:txBody>
+      </p:sp>
+      <p:sp>
+        <p:nvSpPr>
+          <p:cNvPr id="26" name="TextBox 25"/>
           <p:cNvSpPr txBox="1"/>
           <p:nvPr/>
         </p:nvSpPr>
         <p:spPr>
           <a:xfrm>
-            <a:off x="1798320" y="4439920"/>
-            <a:ext cx="2571750" cy="368300"/>
+            <a:off x="841247" y="2697480"/>
+            <a:ext cx="2743200" cy="384048"/>
           </a:xfrm>
           <a:prstGeom prst="rect">
             <a:avLst/>
@@ -16551,272 +16355,429 @@
           <a:noFill/>
         </p:spPr>
         <p:txBody>
-          <a:bodyPr wrap="square" rtlCol="0">
+          <a:bodyPr wrap="square" lIns="128016" rIns="128016" tIns="73152" bIns="54864" anchor="ctr">
             <a:spAutoFit/>
           </a:bodyPr>
-          <a:p>
-            <a:r>
-              <a:rPr lang="en-US" altLang="zh-CN">
-                <a:ln/>
-                <a:solidFill>
-                  <a:schemeClr val="tx1"/>
-                </a:solidFill>
-                <a:effectLst>
-                  <a:outerShdw blurRad="38100" dist="19050" dir="2700000" algn="tl" rotWithShape="0">
-                    <a:schemeClr val="dk1">
-                      <a:alpha val="40000"/>
-                    </a:schemeClr>
-                  </a:outerShdw>
-                </a:effectLst>
-              </a:rPr>
-              <a:t>Extra scheduler cost</a:t>
-            </a:r>
-            <a:endParaRPr lang="en-US" altLang="zh-CN">
-              <a:ln/>
-              <a:solidFill>
-                <a:schemeClr val="tx1"/>
-              </a:solidFill>
-              <a:effectLst>
-                <a:outerShdw blurRad="38100" dist="19050" dir="2700000" algn="tl" rotWithShape="0">
-                  <a:schemeClr val="dk1">
-                    <a:alpha val="40000"/>
-                  </a:schemeClr>
-                </a:outerShdw>
-              </a:effectLst>
-            </a:endParaRPr>
-          </a:p>
-        </p:txBody>
-      </p:sp>
-      <p:sp>
-        <p:nvSpPr>
-          <p:cNvPr id="25" name="矩形 24"/>
+          <a:lstStyle/>
+          <a:p>
+            <a:pPr algn="l"/>
+            <a:r>
+              <a:rPr sz="1500" b="1">
+                <a:solidFill>
+                  <a:srgbClr val="7D48A1"/>
+                </a:solidFill>
+                <a:latin typeface="Arial"/>
+              </a:rPr>
+              <a:t>1   PROFILE COST</a:t>
+            </a:r>
+          </a:p>
+        </p:txBody>
+      </p:sp>
+      <p:sp>
+        <p:nvSpPr>
+          <p:cNvPr id="27" name="TextBox 26"/>
+          <p:cNvSpPr txBox="1"/>
+          <p:nvPr/>
+        </p:nvSpPr>
+        <p:spPr>
+          <a:xfrm>
+            <a:off x="841247" y="3127248"/>
+            <a:ext cx="2743200" cy="1353312"/>
+          </a:xfrm>
+          <a:prstGeom prst="rect">
+            <a:avLst/>
+          </a:prstGeom>
+          <a:noFill/>
+        </p:spPr>
+        <p:txBody>
+          <a:bodyPr wrap="square" lIns="128016" rIns="128016" tIns="73152" bIns="54864" anchor="ctr">
+            <a:spAutoFit/>
+          </a:bodyPr>
+          <a:lstStyle/>
+          <a:p>
+            <a:pPr algn="l"/>
+            <a:r>
+              <a:rPr sz="1350" b="0">
+                <a:solidFill>
+                  <a:srgbClr val="1F3046"/>
+                </a:solidFill>
+                <a:latin typeface="Arial"/>
+              </a:rPr>
+              <a:t>Add an NVTX range around the cycle-wide greedy scheduler.
+Nsight Systems records every call on all four Ray workers.</a:t>
+            </a:r>
+          </a:p>
+        </p:txBody>
+      </p:sp>
+      <p:sp>
+        <p:nvSpPr>
+          <p:cNvPr id="28" name="Rounded Rectangle 27"/>
           <p:cNvSpPr/>
           <p:nvPr/>
         </p:nvSpPr>
         <p:spPr>
           <a:xfrm>
-            <a:off x="8750300" y="3931920"/>
-            <a:ext cx="408305" cy="1471295"/>
-          </a:xfrm>
-          <a:prstGeom prst="rect">
+            <a:off x="4517136" y="2514600"/>
+            <a:ext cx="3154680" cy="2240280"/>
+          </a:xfrm>
+          <a:prstGeom prst="roundRect">
             <a:avLst/>
           </a:prstGeom>
           <a:solidFill>
-            <a:schemeClr val="accent6"/>
+            <a:srgbClr val="FFFFFF"/>
           </a:solidFill>
+          <a:ln w="20320">
+            <a:solidFill>
+              <a:srgbClr val="E67E22"/>
+            </a:solidFill>
+          </a:ln>
         </p:spPr>
         <p:style>
-          <a:lnRef idx="0">
-            <a:srgbClr val="FFFFFF"/>
+          <a:lnRef idx="1">
+            <a:schemeClr val="accent1"/>
           </a:lnRef>
-          <a:fillRef idx="1">
+          <a:fillRef idx="3">
             <a:schemeClr val="accent1"/>
           </a:fillRef>
-          <a:effectRef idx="0">
-            <a:srgbClr val="FFFFFF"/>
+          <a:effectRef idx="2">
+            <a:schemeClr val="accent1"/>
           </a:effectRef>
           <a:fontRef idx="minor">
             <a:schemeClr val="lt1"/>
           </a:fontRef>
         </p:style>
         <p:txBody>
-          <a:bodyPr/>
-          <a:p>
-            <a:endParaRPr lang="zh-CN" altLang="en-US"/>
-          </a:p>
-        </p:txBody>
-      </p:sp>
-      <p:cxnSp>
-        <p:nvCxnSpPr>
-          <p:cNvPr id="26" name="直接箭头连接符 25"/>
-          <p:cNvCxnSpPr/>
-          <p:nvPr/>
-        </p:nvCxnSpPr>
-        <p:spPr>
-          <a:xfrm>
-            <a:off x="7446010" y="5408930"/>
-            <a:ext cx="3220720" cy="0"/>
-          </a:xfrm>
-          <a:prstGeom prst="straightConnector1">
-            <a:avLst/>
-          </a:prstGeom>
-          <a:ln>
-            <a:tailEnd type="arrow"/>
+          <a:bodyPr rtlCol="0" anchor="ctr"/>
+          <a:lstStyle/>
+          <a:p>
+            <a:pPr algn="ctr"/>
+          </a:p>
+        </p:txBody>
+      </p:sp>
+      <p:sp>
+        <p:nvSpPr>
+          <p:cNvPr id="29" name="TextBox 28"/>
+          <p:cNvSpPr txBox="1"/>
+          <p:nvPr/>
+        </p:nvSpPr>
+        <p:spPr>
+          <a:xfrm>
+            <a:off x="4718304" y="2697480"/>
+            <a:ext cx="2743200" cy="384048"/>
+          </a:xfrm>
+          <a:prstGeom prst="rect">
+            <a:avLst/>
+          </a:prstGeom>
+          <a:noFill/>
+        </p:spPr>
+        <p:txBody>
+          <a:bodyPr wrap="square" lIns="128016" rIns="128016" tIns="73152" bIns="54864" anchor="ctr">
+            <a:spAutoFit/>
+          </a:bodyPr>
+          <a:lstStyle/>
+          <a:p>
+            <a:pPr algn="l"/>
+            <a:r>
+              <a:rPr sz="1500" b="1">
+                <a:solidFill>
+                  <a:srgbClr val="E67E22"/>
+                </a:solidFill>
+                <a:latin typeface="Arial"/>
+              </a:rPr>
+              <a:t>2   AGGREGATE</a:t>
+            </a:r>
+          </a:p>
+        </p:txBody>
+      </p:sp>
+      <p:sp>
+        <p:nvSpPr>
+          <p:cNvPr id="30" name="TextBox 29"/>
+          <p:cNvSpPr txBox="1"/>
+          <p:nvPr/>
+        </p:nvSpPr>
+        <p:spPr>
+          <a:xfrm>
+            <a:off x="4718304" y="3127248"/>
+            <a:ext cx="2743200" cy="1353312"/>
+          </a:xfrm>
+          <a:prstGeom prst="rect">
+            <a:avLst/>
+          </a:prstGeom>
+          <a:noFill/>
+        </p:spPr>
+        <p:txBody>
+          <a:bodyPr wrap="square" lIns="128016" rIns="128016" tIns="73152" bIns="54864" anchor="ctr">
+            <a:spAutoFit/>
+          </a:bodyPr>
+          <a:lstStyle/>
+          <a:p>
+            <a:pPr algn="l"/>
+            <a:r>
+              <a:rPr sz="1350" b="0">
+                <a:solidFill>
+                  <a:srgbClr val="1F3046"/>
+                </a:solidFill>
+                <a:latin typeface="Arial"/>
+              </a:rPr>
+              <a:t>Each call builds schedules for all 48 MoE layers.
+Sum call time per rank and use the largest rank total.</a:t>
+            </a:r>
+          </a:p>
+        </p:txBody>
+      </p:sp>
+      <p:sp>
+        <p:nvSpPr>
+          <p:cNvPr id="31" name="Rounded Rectangle 30"/>
+          <p:cNvSpPr/>
+          <p:nvPr/>
+        </p:nvSpPr>
+        <p:spPr>
+          <a:xfrm>
+            <a:off x="8394192" y="2514600"/>
+            <a:ext cx="3154680" cy="2240280"/>
+          </a:xfrm>
+          <a:prstGeom prst="roundRect">
+            <a:avLst/>
+          </a:prstGeom>
+          <a:solidFill>
+            <a:srgbClr val="FFFFFF"/>
+          </a:solidFill>
+          <a:ln w="20320">
+            <a:solidFill>
+              <a:srgbClr val="138F5F"/>
+            </a:solidFill>
           </a:ln>
         </p:spPr>
         <p:style>
-          <a:lnRef idx="2">
+          <a:lnRef idx="1">
             <a:schemeClr val="accent1"/>
           </a:lnRef>
-          <a:fillRef idx="0">
+          <a:fillRef idx="3">
             <a:schemeClr val="accent1"/>
           </a:fillRef>
-          <a:effectRef idx="1">
+          <a:effectRef idx="2">
             <a:schemeClr val="accent1"/>
           </a:effectRef>
           <a:fontRef idx="minor">
-            <a:schemeClr val="tx1"/>
+            <a:schemeClr val="lt1"/>
           </a:fontRef>
         </p:style>
-      </p:cxnSp>
-      <p:cxnSp>
-        <p:nvCxnSpPr>
-          <p:cNvPr id="27" name="直接箭头连接符 26"/>
-          <p:cNvCxnSpPr/>
-          <p:nvPr/>
-        </p:nvCxnSpPr>
-        <p:spPr>
-          <a:xfrm flipH="1" flipV="1">
-            <a:off x="7823200" y="3418205"/>
-            <a:ext cx="6350" cy="2331085"/>
-          </a:xfrm>
-          <a:prstGeom prst="straightConnector1">
-            <a:avLst/>
-          </a:prstGeom>
+        <p:txBody>
+          <a:bodyPr rtlCol="0" anchor="ctr"/>
+          <a:lstStyle/>
+          <a:p>
+            <a:pPr algn="ctr"/>
+          </a:p>
+        </p:txBody>
+      </p:sp>
+      <p:sp>
+        <p:nvSpPr>
+          <p:cNvPr id="32" name="TextBox 31"/>
+          <p:cNvSpPr txBox="1"/>
+          <p:nvPr/>
+        </p:nvSpPr>
+        <p:spPr>
+          <a:xfrm>
+            <a:off x="8595360" y="2697480"/>
+            <a:ext cx="2743200" cy="384048"/>
+          </a:xfrm>
+          <a:prstGeom prst="rect">
+            <a:avLst/>
+          </a:prstGeom>
+          <a:noFill/>
+        </p:spPr>
+        <p:txBody>
+          <a:bodyPr wrap="square" lIns="128016" rIns="128016" tIns="73152" bIns="54864" anchor="ctr">
+            <a:spAutoFit/>
+          </a:bodyPr>
+          <a:lstStyle/>
+          <a:p>
+            <a:pPr algn="l"/>
+            <a:r>
+              <a:rPr sz="1500" b="1">
+                <a:solidFill>
+                  <a:srgbClr val="138F5F"/>
+                </a:solidFill>
+                <a:latin typeface="Arial"/>
+              </a:rPr>
+              <a:t>3   MEASURE BENEFIT</a:t>
+            </a:r>
+          </a:p>
+        </p:txBody>
+      </p:sp>
+      <p:sp>
+        <p:nvSpPr>
+          <p:cNvPr id="33" name="TextBox 32"/>
+          <p:cNvSpPr txBox="1"/>
+          <p:nvPr/>
+        </p:nvSpPr>
+        <p:spPr>
+          <a:xfrm>
+            <a:off x="8595360" y="3127248"/>
+            <a:ext cx="2743200" cy="1353312"/>
+          </a:xfrm>
+          <a:prstGeom prst="rect">
+            <a:avLst/>
+          </a:prstGeom>
+          <a:noFill/>
+        </p:spPr>
+        <p:txBody>
+          <a:bodyPr wrap="square" lIns="128016" rIns="128016" tIns="73152" bIns="54864" anchor="ctr">
+            <a:spAutoFit/>
+          </a:bodyPr>
+          <a:lstStyle/>
+          <a:p>
+            <a:pPr algn="l"/>
+            <a:r>
+              <a:rPr sz="1350" b="0">
+                <a:solidFill>
+                  <a:srgbClr val="1F3046"/>
+                </a:solidFill>
+                <a:latin typeface="Arial"/>
+              </a:rPr>
+              <a:t>Run a clean async E2E A/B with identical settings and no profiler.
+Saved time = batching OFF − batching ON.</a:t>
+            </a:r>
+          </a:p>
+        </p:txBody>
+      </p:sp>
+      <p:sp>
+        <p:nvSpPr>
+          <p:cNvPr id="34" name="Chevron 33"/>
+          <p:cNvSpPr/>
+          <p:nvPr/>
+        </p:nvSpPr>
+        <p:spPr>
+          <a:xfrm>
+            <a:off x="3950208" y="3310128"/>
+            <a:ext cx="384048" cy="502920"/>
+          </a:xfrm>
+          <a:prstGeom prst="chevron">
+            <a:avLst/>
+          </a:prstGeom>
+          <a:solidFill>
+            <a:srgbClr val="2F6FAE"/>
+          </a:solidFill>
           <a:ln>
-            <a:tailEnd type="arrow"/>
+            <a:noFill/>
           </a:ln>
         </p:spPr>
         <p:style>
-          <a:lnRef idx="2">
+          <a:lnRef idx="1">
             <a:schemeClr val="accent1"/>
           </a:lnRef>
-          <a:fillRef idx="0">
+          <a:fillRef idx="3">
             <a:schemeClr val="accent1"/>
           </a:fillRef>
-          <a:effectRef idx="1">
+          <a:effectRef idx="2">
             <a:schemeClr val="accent1"/>
           </a:effectRef>
           <a:fontRef idx="minor">
-            <a:schemeClr val="tx1"/>
+            <a:schemeClr val="lt1"/>
           </a:fontRef>
         </p:style>
-      </p:cxnSp>
-      <p:sp>
-        <p:nvSpPr>
-          <p:cNvPr id="28" name="文本框 27"/>
-          <p:cNvSpPr txBox="1"/>
-          <p:nvPr/>
-        </p:nvSpPr>
-        <p:spPr>
-          <a:xfrm>
-            <a:off x="8094980" y="3563620"/>
-            <a:ext cx="2571750" cy="368300"/>
-          </a:xfrm>
-          <a:prstGeom prst="rect">
-            <a:avLst/>
-          </a:prstGeom>
-          <a:noFill/>
-        </p:spPr>
-        <p:txBody>
-          <a:bodyPr wrap="square" rtlCol="0">
-            <a:spAutoFit/>
-          </a:bodyPr>
-          <a:p>
-            <a:r>
-              <a:rPr lang="en-US" altLang="zh-CN">
-                <a:ln/>
-                <a:solidFill>
-                  <a:schemeClr val="tx1"/>
-                </a:solidFill>
-                <a:effectLst>
-                  <a:outerShdw blurRad="38100" dist="19050" dir="2700000" algn="tl" rotWithShape="0">
-                    <a:schemeClr val="dk1">
-                      <a:alpha val="40000"/>
-                    </a:schemeClr>
-                  </a:outerShdw>
-                </a:effectLst>
-              </a:rPr>
-              <a:t>Saved serving time</a:t>
-            </a:r>
-            <a:endParaRPr lang="en-US" altLang="zh-CN">
-              <a:ln/>
-              <a:solidFill>
-                <a:schemeClr val="tx1"/>
-              </a:solidFill>
-              <a:effectLst>
-                <a:outerShdw blurRad="38100" dist="19050" dir="2700000" algn="tl" rotWithShape="0">
-                  <a:schemeClr val="dk1">
-                    <a:alpha val="40000"/>
-                  </a:schemeClr>
-                </a:outerShdw>
-              </a:effectLst>
-            </a:endParaRPr>
-          </a:p>
-        </p:txBody>
-      </p:sp>
-      <p:sp>
-        <p:nvSpPr>
-          <p:cNvPr id="29" name="文本框 28"/>
-          <p:cNvSpPr txBox="1"/>
-          <p:nvPr/>
-        </p:nvSpPr>
-        <p:spPr>
-          <a:xfrm>
-            <a:off x="5369560" y="3745865"/>
-            <a:ext cx="1567815" cy="1445260"/>
-          </a:xfrm>
-          <a:prstGeom prst="rect">
-            <a:avLst/>
-          </a:prstGeom>
-          <a:noFill/>
-        </p:spPr>
-        <p:txBody>
-          <a:bodyPr wrap="square" rtlCol="0">
-            <a:spAutoFit/>
-          </a:bodyPr>
-          <a:p>
-            <a:r>
-              <a:rPr lang="en-US" altLang="zh-CN" sz="8800">
-                <a:ln w="12700">
-                  <a:solidFill>
-                    <a:schemeClr val="accent1"/>
-                  </a:solidFill>
-                  <a:prstDash val="solid"/>
-                </a:ln>
-                <a:pattFill prst="pct50">
-                  <a:fgClr>
-                    <a:schemeClr val="accent1"/>
-                  </a:fgClr>
-                  <a:bgClr>
-                    <a:schemeClr val="accent1">
-                      <a:lumMod val="20000"/>
-                      <a:lumOff val="80000"/>
-                    </a:schemeClr>
-                  </a:bgClr>
-                </a:pattFill>
-                <a:effectLst>
-                  <a:outerShdw dist="38100" dir="2640000" algn="bl" rotWithShape="0">
-                    <a:schemeClr val="accent1"/>
-                  </a:outerShdw>
-                </a:effectLst>
-              </a:rPr>
-              <a:t>VS</a:t>
-            </a:r>
-            <a:endParaRPr lang="en-US" altLang="zh-CN" sz="8800">
-              <a:ln w="12700">
-                <a:solidFill>
-                  <a:schemeClr val="accent1"/>
-                </a:solidFill>
-                <a:prstDash val="solid"/>
-              </a:ln>
-              <a:pattFill prst="pct50">
-                <a:fgClr>
-                  <a:schemeClr val="accent1"/>
-                </a:fgClr>
-                <a:bgClr>
-                  <a:schemeClr val="accent1">
-                    <a:lumMod val="20000"/>
-                    <a:lumOff val="80000"/>
-                  </a:schemeClr>
-                </a:bgClr>
-              </a:pattFill>
-              <a:effectLst>
-                <a:outerShdw dist="38100" dir="2640000" algn="bl" rotWithShape="0">
-                  <a:schemeClr val="accent1"/>
-                </a:outerShdw>
-              </a:effectLst>
-            </a:endParaRPr>
+        <p:txBody>
+          <a:bodyPr rtlCol="0" anchor="ctr"/>
+          <a:lstStyle/>
+          <a:p>
+            <a:pPr algn="ctr"/>
+          </a:p>
+        </p:txBody>
+      </p:sp>
+      <p:sp>
+        <p:nvSpPr>
+          <p:cNvPr id="35" name="Chevron 34"/>
+          <p:cNvSpPr/>
+          <p:nvPr/>
+        </p:nvSpPr>
+        <p:spPr>
+          <a:xfrm>
+            <a:off x="7827264" y="3310128"/>
+            <a:ext cx="384048" cy="502920"/>
+          </a:xfrm>
+          <a:prstGeom prst="chevron">
+            <a:avLst/>
+          </a:prstGeom>
+          <a:solidFill>
+            <a:srgbClr val="2F6FAE"/>
+          </a:solidFill>
+          <a:ln>
+            <a:noFill/>
+          </a:ln>
+        </p:spPr>
+        <p:style>
+          <a:lnRef idx="1">
+            <a:schemeClr val="accent1"/>
+          </a:lnRef>
+          <a:fillRef idx="3">
+            <a:schemeClr val="accent1"/>
+          </a:fillRef>
+          <a:effectRef idx="2">
+            <a:schemeClr val="accent1"/>
+          </a:effectRef>
+          <a:fontRef idx="minor">
+            <a:schemeClr val="lt1"/>
+          </a:fontRef>
+        </p:style>
+        <p:txBody>
+          <a:bodyPr rtlCol="0" anchor="ctr"/>
+          <a:lstStyle/>
+          <a:p>
+            <a:pPr algn="ctr"/>
+          </a:p>
+        </p:txBody>
+      </p:sp>
+      <p:sp>
+        <p:nvSpPr>
+          <p:cNvPr id="36" name="Rounded Rectangle 35"/>
+          <p:cNvSpPr/>
+          <p:nvPr/>
+        </p:nvSpPr>
+        <p:spPr>
+          <a:xfrm>
+            <a:off x="868680" y="5120640"/>
+            <a:ext cx="10515600" cy="694944"/>
+          </a:xfrm>
+          <a:prstGeom prst="roundRect">
+            <a:avLst/>
+          </a:prstGeom>
+          <a:solidFill>
+            <a:srgbClr val="EEF7F2"/>
+          </a:solidFill>
+          <a:ln w="16510">
+            <a:solidFill>
+              <a:srgbClr val="138F5F"/>
+            </a:solidFill>
+          </a:ln>
+        </p:spPr>
+        <p:style>
+          <a:lnRef idx="1">
+            <a:schemeClr val="accent1"/>
+          </a:lnRef>
+          <a:fillRef idx="3">
+            <a:schemeClr val="accent1"/>
+          </a:fillRef>
+          <a:effectRef idx="2">
+            <a:schemeClr val="accent1"/>
+          </a:effectRef>
+          <a:fontRef idx="minor">
+            <a:schemeClr val="lt1"/>
+          </a:fontRef>
+        </p:style>
+        <p:txBody>
+          <a:bodyPr rtlCol="0" anchor="ctr" wrap="square" lIns="128016" rIns="128016" tIns="73152" bIns="54864"/>
+          <a:lstStyle/>
+          <a:p>
+            <a:pPr algn="ctr"/>
+            <a:r>
+              <a:rPr sz="1500" b="1">
+                <a:solidFill>
+                  <a:srgbClr val="14345B"/>
+                </a:solidFill>
+                <a:latin typeface="Arial"/>
+              </a:rPr>
+              <a:t>SEARCH IN TRACE   "eplb: schedule migration batches"   →   compare scheduler cost / serving time saved</a:t>
+            </a:r>
           </a:p>
         </p:txBody>
       </p:sp>
@@ -26264,7 +26225,7 @@
       </p:cxnSp>
       <p:sp>
         <p:nvSpPr>
-          <p:cNvPr id="7" name="Rounded Rectangle 6"/>
+          <p:cNvPr id="44" name="Rounded Rectangle 43"/>
           <p:cNvSpPr/>
           <p:nvPr/>
         </p:nvSpPr>
@@ -26309,7 +26270,7 @@
       </p:sp>
       <p:sp>
         <p:nvSpPr>
-          <p:cNvPr id="8" name="TextBox 7"/>
+          <p:cNvPr id="45" name="TextBox 44"/>
           <p:cNvSpPr txBox="1"/>
           <p:nvPr/>
         </p:nvSpPr>
@@ -26324,7 +26285,7 @@
           <a:noFill/>
         </p:spPr>
         <p:txBody>
-          <a:bodyPr wrap="square" lIns="128016" tIns="73152" rIns="128016" bIns="54864" anchor="ctr">
+          <a:bodyPr wrap="square" lIns="128016" rIns="128016" tIns="73152" bIns="54864" anchor="ctr">
             <a:spAutoFit/>
           </a:bodyPr>
           <a:lstStyle/>
@@ -26335,22 +26296,16 @@
                 <a:solidFill>
                   <a:srgbClr val="2F6FAE"/>
                 </a:solidFill>
-                <a:latin typeface="Arial" panose="020B0604020202020204"/>
+                <a:latin typeface="Arial"/>
               </a:rPr>
               <a:t>VARIABLES &amp; INPUTS</a:t>
             </a:r>
-            <a:endParaRPr sz="1200" b="1">
-              <a:solidFill>
-                <a:srgbClr val="2F6FAE"/>
-              </a:solidFill>
-              <a:latin typeface="Arial" panose="020B0604020202020204"/>
-            </a:endParaRPr>
-          </a:p>
-        </p:txBody>
-      </p:sp>
-      <p:sp>
-        <p:nvSpPr>
-          <p:cNvPr id="9" name="TextBox 8"/>
+          </a:p>
+        </p:txBody>
+      </p:sp>
+      <p:sp>
+        <p:nvSpPr>
+          <p:cNvPr id="46" name="TextBox 45"/>
           <p:cNvSpPr txBox="1"/>
           <p:nvPr/>
         </p:nvSpPr>
@@ -26365,7 +26320,7 @@
           <a:noFill/>
         </p:spPr>
         <p:txBody>
-          <a:bodyPr wrap="square" lIns="128016" tIns="73152" rIns="128016" bIns="54864" anchor="ctr">
+          <a:bodyPr wrap="square" lIns="128016" rIns="128016" tIns="73152" bIns="54864" anchor="ctr">
             <a:spAutoFit/>
           </a:bodyPr>
           <a:lstStyle/>
@@ -26376,130 +26331,73 @@
                 <a:solidFill>
                   <a:srgbClr val="7D48A1"/>
                 </a:solidFill>
-                <a:latin typeface="Arial" panose="020B0604020202020204"/>
+                <a:latin typeface="Arial"/>
               </a:rPr>
               <a:t>DECISION VARIABLES</a:t>
             </a:r>
-            <a:endParaRPr sz="1000" b="1">
-              <a:solidFill>
-                <a:srgbClr val="7D48A1"/>
-              </a:solidFill>
-              <a:latin typeface="Arial" panose="020B0604020202020204"/>
-            </a:endParaRPr>
-          </a:p>
-        </p:txBody>
-      </p:sp>
-      <mc:AlternateContent xmlns:mc="http://schemas.openxmlformats.org/markup-compatibility/2006">
-        <mc:Choice xmlns:a14="http://schemas.microsoft.com/office/drawing/2010/main" Requires="a14">
-          <p:sp>
-            <p:nvSpPr>
-              <p:cNvPr id="10" name="TextBox 9"/>
-              <p:cNvSpPr txBox="1"/>
-              <p:nvPr/>
-            </p:nvSpPr>
-            <p:spPr>
-              <a:xfrm>
-                <a:off x="667512" y="2249424"/>
-                <a:ext cx="1353312" cy="329184"/>
-              </a:xfrm>
-              <a:prstGeom prst="rect">
-                <a:avLst/>
-              </a:prstGeom>
-              <a:noFill/>
-            </p:spPr>
-            <p:txBody>
-              <a:bodyPr wrap="none" anchor="ctr">
-                <a:spAutoFit/>
-              </a:bodyPr>
-              <a:lstStyle/>
-              <a:p>
-                <a:pPr algn="ctr"/>
-                <a14:m>
-                  <m:oMathPara xmlns:m="http://schemas.openxmlformats.org/officeDocument/2006/math">
-                    <m:oMathParaPr>
-                      <m:jc m:val="center"/>
-                    </m:oMathParaPr>
-                    <m:oMath xmlns:m="http://schemas.openxmlformats.org/officeDocument/2006/math">
-                      <m:sSub>
-                        <m:sSubPr>
-                          <m:ctrlPr>
-                            <a:rPr/>
-                          </m:ctrlPr>
-                        </m:sSubPr>
-                        <m:e>
-                          <m:r>
-                            <a:rPr lang="en-US" sz="1300" dirty="0">
-                              <a:solidFill>
-                                <a:srgbClr val="14345B"/>
-                              </a:solidFill>
-                              <a:latin typeface="Cambria Math" panose="02040503050406030204"/>
-                            </a:rPr>
-                            <m:t>𝑥</m:t>
-                          </m:r>
-                        </m:e>
-                        <m:sub>
-                          <m:r>
-                            <a:rPr lang="en-US" sz="1300" dirty="0">
-                              <a:solidFill>
-                                <a:srgbClr val="14345B"/>
-                              </a:solidFill>
-                              <a:latin typeface="Cambria Math" panose="02040503050406030204"/>
-                            </a:rPr>
-                            <m:t>𝑝</m:t>
-                          </m:r>
-                          <m:r>
-                            <a:rPr lang="en-US" sz="1300" dirty="0">
-                              <a:solidFill>
-                                <a:srgbClr val="14345B"/>
-                              </a:solidFill>
-                              <a:latin typeface="Cambria Math" panose="02040503050406030204"/>
-                            </a:rPr>
-                            <m:t>,</m:t>
-                          </m:r>
-                          <m:r>
-                            <a:rPr lang="en-US" sz="1300" dirty="0">
-                              <a:solidFill>
-                                <a:srgbClr val="14345B"/>
-                              </a:solidFill>
-                              <a:latin typeface="Cambria Math" panose="02040503050406030204"/>
-                            </a:rPr>
-                            <m:t>𝑏</m:t>
-                          </m:r>
-                        </m:sub>
-                      </m:sSub>
+          </a:p>
+        </p:txBody>
+      </p:sp>
+      <p:sp>
+        <p:nvSpPr>
+          <p:cNvPr id="47" name="TextBox 46"/>
+          <p:cNvSpPr txBox="1"/>
+          <p:nvPr/>
+        </p:nvSpPr>
+        <p:spPr>
+          <a:xfrm>
+            <a:off x="667512" y="2249424"/>
+            <a:ext cx="1353312" cy="329184"/>
+          </a:xfrm>
+          <a:prstGeom prst="rect">
+            <a:avLst/>
+          </a:prstGeom>
+          <a:noFill/>
+        </p:spPr>
+        <p:txBody>
+          <a:bodyPr wrap="none" anchor="ctr">
+            <a:spAutoFit/>
+          </a:bodyPr>
+          <a:lstStyle/>
+          <a:p>
+            <a:pPr algn="ctr"/>
+            <a14:m xmlns:a14="http://schemas.microsoft.com/office/drawing/2010/main">
+              <m:oMathPara xmlns:m="http://schemas.openxmlformats.org/officeDocument/2006/math">
+                <m:oMathParaPr>
+                  <m:jc m:val="center"/>
+                </m:oMathParaPr>
+                <m:oMath>
+                  <m:sSub>
+                    <m:e>
                       <m:r>
                         <a:rPr lang="en-US" sz="1300" dirty="0">
                           <a:solidFill>
                             <a:srgbClr val="14345B"/>
                           </a:solidFill>
-                          <a:latin typeface="Cambria Math" panose="02040503050406030204"/>
+                          <a:latin typeface="Cambria Math"/>
                         </a:rPr>
-                        <m:t>∈</m:t>
+                        <m:t>x</m:t>
                       </m:r>
+                    </m:e>
+                    <m:sub>
                       <m:r>
                         <a:rPr lang="en-US" sz="1300" dirty="0">
                           <a:solidFill>
                             <a:srgbClr val="14345B"/>
                           </a:solidFill>
-                          <a:latin typeface="Cambria Math" panose="02040503050406030204"/>
+                          <a:latin typeface="Cambria Math"/>
                         </a:rPr>
-                        <m:t>{</m:t>
+                        <m:t>p</m:t>
                       </m:r>
                       <m:r>
+                        <m:rPr>
+                          <m:sty m:val="p"/>
+                        </m:rPr>
                         <a:rPr lang="en-US" sz="1300" dirty="0">
                           <a:solidFill>
                             <a:srgbClr val="14345B"/>
                           </a:solidFill>
-                          <a:latin typeface="Cambria Math" panose="02040503050406030204"/>
-                        </a:rPr>
-                        <m:t>0</m:t>
-                      </m:r>
-                      <m:r>
-                        <a:rPr lang="en-US" sz="1300" dirty="0">
-                          <a:solidFill>
-                            <a:srgbClr val="14345B"/>
-                          </a:solidFill>
-                          <a:latin typeface="Cambria Math" panose="02040503050406030204"/>
+                          <a:latin typeface="Cambria Math"/>
                         </a:rPr>
                         <m:t>,</m:t>
                       </m:r>
@@ -26508,199 +26406,634 @@
                           <a:solidFill>
                             <a:srgbClr val="14345B"/>
                           </a:solidFill>
-                          <a:latin typeface="Cambria Math" panose="02040503050406030204"/>
+                          <a:latin typeface="Cambria Math"/>
                         </a:rPr>
-                        <m:t>1</m:t>
+                        <m:t>b</m:t>
                       </m:r>
+                    </m:sub>
+                  </m:sSub>
+                  <m:r>
+                    <m:rPr>
+                      <m:sty m:val="p"/>
+                    </m:rPr>
+                    <a:rPr lang="en-US" sz="1300" dirty="0">
+                      <a:solidFill>
+                        <a:srgbClr val="14345B"/>
+                      </a:solidFill>
+                      <a:latin typeface="Cambria Math"/>
+                    </a:rPr>
+                    <m:t>∈</m:t>
+                  </m:r>
+                  <m:r>
+                    <m:rPr>
+                      <m:sty m:val="p"/>
+                    </m:rPr>
+                    <a:rPr lang="en-US" sz="1300" dirty="0">
+                      <a:solidFill>
+                        <a:srgbClr val="14345B"/>
+                      </a:solidFill>
+                      <a:latin typeface="Cambria Math"/>
+                    </a:rPr>
+                    <m:t>{</m:t>
+                  </m:r>
+                  <m:r>
+                    <a:rPr lang="en-US" sz="1300" dirty="0">
+                      <a:solidFill>
+                        <a:srgbClr val="14345B"/>
+                      </a:solidFill>
+                      <a:latin typeface="Cambria Math"/>
+                    </a:rPr>
+                    <m:t>0</m:t>
+                  </m:r>
+                  <m:r>
+                    <m:rPr>
+                      <m:sty m:val="p"/>
+                    </m:rPr>
+                    <a:rPr lang="en-US" sz="1300" dirty="0">
+                      <a:solidFill>
+                        <a:srgbClr val="14345B"/>
+                      </a:solidFill>
+                      <a:latin typeface="Cambria Math"/>
+                    </a:rPr>
+                    <m:t>,</m:t>
+                  </m:r>
+                  <m:r>
+                    <a:rPr lang="en-US" sz="1300" dirty="0">
+                      <a:solidFill>
+                        <a:srgbClr val="14345B"/>
+                      </a:solidFill>
+                      <a:latin typeface="Cambria Math"/>
+                    </a:rPr>
+                    <m:t>1</m:t>
+                  </m:r>
+                  <m:r>
+                    <m:rPr>
+                      <m:sty m:val="p"/>
+                    </m:rPr>
+                    <a:rPr lang="en-US" sz="1300" dirty="0">
+                      <a:solidFill>
+                        <a:srgbClr val="14345B"/>
+                      </a:solidFill>
+                      <a:latin typeface="Cambria Math"/>
+                    </a:rPr>
+                    <m:t>}</m:t>
+                  </m:r>
+                </m:oMath>
+              </m:oMathPara>
+            </a14:m>
+          </a:p>
+        </p:txBody>
+      </p:sp>
+      <p:sp>
+        <p:nvSpPr>
+          <p:cNvPr id="48" name="TextBox 47"/>
+          <p:cNvSpPr txBox="1"/>
+          <p:nvPr/>
+        </p:nvSpPr>
+        <p:spPr>
+          <a:xfrm>
+            <a:off x="1901952" y="2240280"/>
+            <a:ext cx="1344168" cy="365760"/>
+          </a:xfrm>
+          <a:prstGeom prst="rect">
+            <a:avLst/>
+          </a:prstGeom>
+          <a:noFill/>
+        </p:spPr>
+        <p:txBody>
+          <a:bodyPr wrap="square" lIns="128016" rIns="128016" tIns="73152" bIns="54864" anchor="ctr">
+            <a:spAutoFit/>
+          </a:bodyPr>
+          <a:lstStyle/>
+          <a:p>
+            <a:pPr algn="l"/>
+            <a:r>
+              <a:rPr sz="1080" b="0">
+                <a:solidFill>
+                  <a:srgbClr val="1F3046"/>
+                </a:solidFill>
+                <a:latin typeface="Arial"/>
+              </a:rPr>
+              <a:t>flow assignment</a:t>
+            </a:r>
+          </a:p>
+        </p:txBody>
+      </p:sp>
+      <p:sp>
+        <p:nvSpPr>
+          <p:cNvPr id="49" name="TextBox 48"/>
+          <p:cNvSpPr txBox="1"/>
+          <p:nvPr/>
+        </p:nvSpPr>
+        <p:spPr>
+          <a:xfrm>
+            <a:off x="667512" y="2770632"/>
+            <a:ext cx="1353312" cy="329184"/>
+          </a:xfrm>
+          <a:prstGeom prst="rect">
+            <a:avLst/>
+          </a:prstGeom>
+          <a:noFill/>
+        </p:spPr>
+        <p:txBody>
+          <a:bodyPr wrap="none" anchor="ctr">
+            <a:spAutoFit/>
+          </a:bodyPr>
+          <a:lstStyle/>
+          <a:p>
+            <a:pPr algn="ctr"/>
+            <a14:m xmlns:a14="http://schemas.microsoft.com/office/drawing/2010/main">
+              <m:oMathPara xmlns:m="http://schemas.openxmlformats.org/officeDocument/2006/math">
+                <m:oMathParaPr>
+                  <m:jc m:val="center"/>
+                </m:oMathParaPr>
+                <m:oMath>
+                  <m:sSub>
+                    <m:e>
                       <m:r>
                         <a:rPr lang="en-US" sz="1300" dirty="0">
                           <a:solidFill>
                             <a:srgbClr val="14345B"/>
                           </a:solidFill>
-                          <a:latin typeface="Cambria Math" panose="02040503050406030204"/>
+                          <a:latin typeface="Cambria Math"/>
                         </a:rPr>
-                        <m:t>}</m:t>
+                        <m:t>y</m:t>
                       </m:r>
-                    </m:oMath>
-                  </m:oMathPara>
-                </a14:m>
-              </a:p>
-            </p:txBody>
-          </p:sp>
-        </mc:Choice>
-        <mc:Fallback>
-          <p:sp>
-            <p:nvSpPr>
-              <p:cNvPr id="10" name="TextBox 9"/>
-              <p:cNvSpPr txBox="1">
-                <a:spLocks noRot="1" noChangeAspect="1" noMove="1" noResize="1" noEditPoints="1" noAdjustHandles="1" noChangeArrowheads="1" noChangeShapeType="1" noTextEdit="1"/>
-              </p:cNvSpPr>
-              <p:nvPr/>
-            </p:nvSpPr>
-            <p:spPr>
-              <a:xfrm>
-                <a:off x="667512" y="2249424"/>
-                <a:ext cx="1353312" cy="329184"/>
-              </a:xfrm>
-              <a:prstGeom prst="rect">
-                <a:avLst/>
-              </a:prstGeom>
-              <a:blipFill rotWithShape="1">
-                <a:blip r:embed="rId1"/>
-                <a:stretch>
-                  <a:fillRect l="-9" t="-2006" r="19" b="-2160"/>
-                </a:stretch>
-              </a:blipFill>
-            </p:spPr>
-            <p:txBody>
-              <a:bodyPr/>
-              <a:lstStyle/>
-              <a:p>
-                <a:r>
-                  <a:rPr lang="zh-CN" altLang="en-US">
-                    <a:noFill/>
-                  </a:rPr>
-                  <a:t> </a:t>
-                </a:r>
-              </a:p>
-            </p:txBody>
-          </p:sp>
-        </mc:Fallback>
-      </mc:AlternateContent>
-      <p:sp>
-        <p:nvSpPr>
-          <p:cNvPr id="11" name="TextBox 10"/>
-          <p:cNvSpPr txBox="1"/>
-          <p:nvPr/>
-        </p:nvSpPr>
-        <p:spPr>
-          <a:xfrm>
-            <a:off x="1901952" y="2240280"/>
-            <a:ext cx="1344168" cy="365760"/>
-          </a:xfrm>
-          <a:prstGeom prst="rect">
-            <a:avLst/>
-          </a:prstGeom>
-          <a:noFill/>
-        </p:spPr>
-        <p:txBody>
-          <a:bodyPr wrap="square" lIns="128016" tIns="73152" rIns="128016" bIns="54864" anchor="ctr">
-            <a:spAutoFit/>
-          </a:bodyPr>
-          <a:lstStyle/>
-          <a:p>
-            <a:pPr algn="l"/>
-            <a:r>
-              <a:rPr sz="1080" b="0">
-                <a:solidFill>
-                  <a:srgbClr val="1F3046"/>
-                </a:solidFill>
-                <a:latin typeface="Arial" panose="020B0604020202020204"/>
-              </a:rPr>
-              <a:t>flow assignment</a:t>
-            </a:r>
-            <a:endParaRPr sz="1080" b="0">
-              <a:solidFill>
-                <a:srgbClr val="1F3046"/>
-              </a:solidFill>
-              <a:latin typeface="Arial" panose="020B0604020202020204"/>
-            </a:endParaRPr>
-          </a:p>
-        </p:txBody>
-      </p:sp>
-      <mc:AlternateContent xmlns:mc="http://schemas.openxmlformats.org/markup-compatibility/2006">
-        <mc:Choice xmlns:a14="http://schemas.microsoft.com/office/drawing/2010/main" Requires="a14">
-          <p:sp>
-            <p:nvSpPr>
-              <p:cNvPr id="12" name="TextBox 11"/>
-              <p:cNvSpPr txBox="1"/>
-              <p:nvPr/>
-            </p:nvSpPr>
-            <p:spPr>
-              <a:xfrm>
-                <a:off x="667512" y="2770632"/>
-                <a:ext cx="1353312" cy="329184"/>
-              </a:xfrm>
-              <a:prstGeom prst="rect">
-                <a:avLst/>
-              </a:prstGeom>
-              <a:noFill/>
-            </p:spPr>
-            <p:txBody>
-              <a:bodyPr wrap="none" anchor="ctr">
-                <a:spAutoFit/>
-              </a:bodyPr>
-              <a:lstStyle/>
-              <a:p>
-                <a:pPr algn="ctr"/>
-                <a14:m>
-                  <m:oMathPara xmlns:m="http://schemas.openxmlformats.org/officeDocument/2006/math">
-                    <m:oMathParaPr>
-                      <m:jc m:val="center"/>
-                    </m:oMathParaPr>
-                    <m:oMath xmlns:m="http://schemas.openxmlformats.org/officeDocument/2006/math">
-                      <m:sSub>
-                        <m:sSubPr>
-                          <m:ctrlPr>
-                            <a:rPr/>
-                          </m:ctrlPr>
-                        </m:sSubPr>
-                        <m:e>
-                          <m:r>
-                            <a:rPr lang="en-US" sz="1300" dirty="0">
-                              <a:solidFill>
-                                <a:srgbClr val="14345B"/>
-                              </a:solidFill>
-                              <a:latin typeface="Cambria Math" panose="02040503050406030204"/>
-                            </a:rPr>
-                            <m:t>𝑦</m:t>
-                          </m:r>
-                        </m:e>
-                        <m:sub>
-                          <m:r>
-                            <a:rPr lang="en-US" sz="1300" dirty="0">
-                              <a:solidFill>
-                                <a:srgbClr val="14345B"/>
-                              </a:solidFill>
-                              <a:latin typeface="Cambria Math" panose="02040503050406030204"/>
-                            </a:rPr>
-                            <m:t>𝑏</m:t>
-                          </m:r>
-                        </m:sub>
-                      </m:sSub>
+                    </m:e>
+                    <m:sub>
                       <m:r>
                         <a:rPr lang="en-US" sz="1300" dirty="0">
                           <a:solidFill>
                             <a:srgbClr val="14345B"/>
                           </a:solidFill>
-                          <a:latin typeface="Cambria Math" panose="02040503050406030204"/>
+                          <a:latin typeface="Cambria Math"/>
                         </a:rPr>
-                        <m:t>∈</m:t>
+                        <m:t>b</m:t>
                       </m:r>
+                    </m:sub>
+                  </m:sSub>
+                  <m:r>
+                    <m:rPr>
+                      <m:sty m:val="p"/>
+                    </m:rPr>
+                    <a:rPr lang="en-US" sz="1300" dirty="0">
+                      <a:solidFill>
+                        <a:srgbClr val="14345B"/>
+                      </a:solidFill>
+                      <a:latin typeface="Cambria Math"/>
+                    </a:rPr>
+                    <m:t>∈</m:t>
+                  </m:r>
+                  <m:r>
+                    <m:rPr>
+                      <m:sty m:val="p"/>
+                    </m:rPr>
+                    <a:rPr lang="en-US" sz="1300" dirty="0">
+                      <a:solidFill>
+                        <a:srgbClr val="14345B"/>
+                      </a:solidFill>
+                      <a:latin typeface="Cambria Math"/>
+                    </a:rPr>
+                    <m:t>{</m:t>
+                  </m:r>
+                  <m:r>
+                    <a:rPr lang="en-US" sz="1300" dirty="0">
+                      <a:solidFill>
+                        <a:srgbClr val="14345B"/>
+                      </a:solidFill>
+                      <a:latin typeface="Cambria Math"/>
+                    </a:rPr>
+                    <m:t>0</m:t>
+                  </m:r>
+                  <m:r>
+                    <m:rPr>
+                      <m:sty m:val="p"/>
+                    </m:rPr>
+                    <a:rPr lang="en-US" sz="1300" dirty="0">
+                      <a:solidFill>
+                        <a:srgbClr val="14345B"/>
+                      </a:solidFill>
+                      <a:latin typeface="Cambria Math"/>
+                    </a:rPr>
+                    <m:t>,</m:t>
+                  </m:r>
+                  <m:r>
+                    <a:rPr lang="en-US" sz="1300" dirty="0">
+                      <a:solidFill>
+                        <a:srgbClr val="14345B"/>
+                      </a:solidFill>
+                      <a:latin typeface="Cambria Math"/>
+                    </a:rPr>
+                    <m:t>1</m:t>
+                  </m:r>
+                  <m:r>
+                    <m:rPr>
+                      <m:sty m:val="p"/>
+                    </m:rPr>
+                    <a:rPr lang="en-US" sz="1300" dirty="0">
+                      <a:solidFill>
+                        <a:srgbClr val="14345B"/>
+                      </a:solidFill>
+                      <a:latin typeface="Cambria Math"/>
+                    </a:rPr>
+                    <m:t>}</m:t>
+                  </m:r>
+                </m:oMath>
+              </m:oMathPara>
+            </a14:m>
+          </a:p>
+        </p:txBody>
+      </p:sp>
+      <p:sp>
+        <p:nvSpPr>
+          <p:cNvPr id="50" name="TextBox 49"/>
+          <p:cNvSpPr txBox="1"/>
+          <p:nvPr/>
+        </p:nvSpPr>
+        <p:spPr>
+          <a:xfrm>
+            <a:off x="1901952" y="2761488"/>
+            <a:ext cx="1344168" cy="365760"/>
+          </a:xfrm>
+          <a:prstGeom prst="rect">
+            <a:avLst/>
+          </a:prstGeom>
+          <a:noFill/>
+        </p:spPr>
+        <p:txBody>
+          <a:bodyPr wrap="square" lIns="128016" rIns="128016" tIns="73152" bIns="54864" anchor="ctr">
+            <a:spAutoFit/>
+          </a:bodyPr>
+          <a:lstStyle/>
+          <a:p>
+            <a:pPr algn="l"/>
+            <a:r>
+              <a:rPr sz="1080" b="0">
+                <a:solidFill>
+                  <a:srgbClr val="1F3046"/>
+                </a:solidFill>
+                <a:latin typeface="Arial"/>
+              </a:rPr>
+              <a:t>active-batch flag</a:t>
+            </a:r>
+          </a:p>
+        </p:txBody>
+      </p:sp>
+      <p:sp>
+        <p:nvSpPr>
+          <p:cNvPr id="51" name="TextBox 50"/>
+          <p:cNvSpPr txBox="1"/>
+          <p:nvPr/>
+        </p:nvSpPr>
+        <p:spPr>
+          <a:xfrm>
+            <a:off x="667512" y="3291839"/>
+            <a:ext cx="1353312" cy="329184"/>
+          </a:xfrm>
+          <a:prstGeom prst="rect">
+            <a:avLst/>
+          </a:prstGeom>
+          <a:noFill/>
+        </p:spPr>
+        <p:txBody>
+          <a:bodyPr wrap="none" anchor="ctr">
+            <a:spAutoFit/>
+          </a:bodyPr>
+          <a:lstStyle/>
+          <a:p>
+            <a:pPr algn="ctr"/>
+            <a14:m xmlns:a14="http://schemas.microsoft.com/office/drawing/2010/main">
+              <m:oMathPara xmlns:m="http://schemas.openxmlformats.org/officeDocument/2006/math">
+                <m:oMathParaPr>
+                  <m:jc m:val="center"/>
+                </m:oMathParaPr>
+                <m:oMath>
+                  <m:sSub>
+                    <m:e>
                       <m:r>
                         <a:rPr lang="en-US" sz="1300" dirty="0">
                           <a:solidFill>
                             <a:srgbClr val="14345B"/>
                           </a:solidFill>
-                          <a:latin typeface="Cambria Math" panose="02040503050406030204"/>
+                          <a:latin typeface="Cambria Math"/>
                         </a:rPr>
-                        <m:t>{</m:t>
+                        <m:t>T</m:t>
                       </m:r>
+                    </m:e>
+                    <m:sub>
+                      <m:r>
+                        <m:rPr>
+                          <m:sty m:val="p"/>
+                        </m:rPr>
+                        <a:rPr lang="en-US" sz="1300" dirty="0">
+                          <a:solidFill>
+                            <a:srgbClr val="14345B"/>
+                          </a:solidFill>
+                          <a:latin typeface="Cambria Math"/>
+                        </a:rPr>
+                        <m:t>i</m:t>
+                      </m:r>
+                      <m:r>
+                        <m:rPr>
+                          <m:sty m:val="p"/>
+                        </m:rPr>
+                        <a:rPr lang="en-US" sz="1300" dirty="0">
+                          <a:solidFill>
+                            <a:srgbClr val="14345B"/>
+                          </a:solidFill>
+                          <a:latin typeface="Cambria Math"/>
+                        </a:rPr>
+                        <m:t>n</m:t>
+                      </m:r>
+                      <m:r>
+                        <m:rPr>
+                          <m:sty m:val="p"/>
+                        </m:rPr>
+                        <a:rPr lang="en-US" sz="1300" dirty="0">
+                          <a:solidFill>
+                            <a:srgbClr val="14345B"/>
+                          </a:solidFill>
+                          <a:latin typeface="Cambria Math"/>
+                        </a:rPr>
+                        <m:t>f</m:t>
+                      </m:r>
+                      <m:r>
+                        <m:rPr>
+                          <m:sty m:val="p"/>
+                        </m:rPr>
+                        <a:rPr lang="en-US" sz="1300" dirty="0">
+                          <a:solidFill>
+                            <a:srgbClr val="14345B"/>
+                          </a:solidFill>
+                          <a:latin typeface="Cambria Math"/>
+                        </a:rPr>
+                        <m:t>e</m:t>
+                      </m:r>
+                      <m:r>
+                        <m:rPr>
+                          <m:sty m:val="p"/>
+                        </m:rPr>
+                        <a:rPr lang="en-US" sz="1300" dirty="0">
+                          <a:solidFill>
+                            <a:srgbClr val="14345B"/>
+                          </a:solidFill>
+                          <a:latin typeface="Cambria Math"/>
+                        </a:rPr>
+                        <m:t>r</m:t>
+                      </m:r>
+                    </m:sub>
+                  </m:sSub>
+                  <m:r>
+                    <m:rPr>
+                      <m:sty m:val="p"/>
+                    </m:rPr>
+                    <a:rPr lang="en-US" sz="1300" dirty="0">
+                      <a:solidFill>
+                        <a:srgbClr val="14345B"/>
+                      </a:solidFill>
+                      <a:latin typeface="Cambria Math"/>
+                    </a:rPr>
+                    <m:t>≥</m:t>
+                  </m:r>
+                  <m:r>
+                    <a:rPr lang="en-US" sz="1300" dirty="0">
+                      <a:solidFill>
+                        <a:srgbClr val="14345B"/>
+                      </a:solidFill>
+                      <a:latin typeface="Cambria Math"/>
+                    </a:rPr>
+                    <m:t>0</m:t>
+                  </m:r>
+                </m:oMath>
+              </m:oMathPara>
+            </a14:m>
+          </a:p>
+        </p:txBody>
+      </p:sp>
+      <p:sp>
+        <p:nvSpPr>
+          <p:cNvPr id="52" name="TextBox 51"/>
+          <p:cNvSpPr txBox="1"/>
+          <p:nvPr/>
+        </p:nvSpPr>
+        <p:spPr>
+          <a:xfrm>
+            <a:off x="1901952" y="3282696"/>
+            <a:ext cx="1344168" cy="365760"/>
+          </a:xfrm>
+          <a:prstGeom prst="rect">
+            <a:avLst/>
+          </a:prstGeom>
+          <a:noFill/>
+        </p:spPr>
+        <p:txBody>
+          <a:bodyPr wrap="square" lIns="128016" rIns="128016" tIns="73152" bIns="54864" anchor="ctr">
+            <a:spAutoFit/>
+          </a:bodyPr>
+          <a:lstStyle/>
+          <a:p>
+            <a:pPr algn="l"/>
+            <a:r>
+              <a:rPr sz="1080" b="0">
+                <a:solidFill>
+                  <a:srgbClr val="1F3046"/>
+                </a:solidFill>
+                <a:latin typeface="Arial"/>
+              </a:rPr>
+              <a:t>worst inference time</a:t>
+            </a:r>
+          </a:p>
+        </p:txBody>
+      </p:sp>
+      <p:sp>
+        <p:nvSpPr>
+          <p:cNvPr id="53" name="TextBox 52"/>
+          <p:cNvSpPr txBox="1"/>
+          <p:nvPr/>
+        </p:nvSpPr>
+        <p:spPr>
+          <a:xfrm>
+            <a:off x="786384" y="3840480"/>
+            <a:ext cx="2468880" cy="228600"/>
+          </a:xfrm>
+          <a:prstGeom prst="rect">
+            <a:avLst/>
+          </a:prstGeom>
+          <a:noFill/>
+        </p:spPr>
+        <p:txBody>
+          <a:bodyPr wrap="square" lIns="128016" rIns="128016" tIns="73152" bIns="54864" anchor="ctr">
+            <a:spAutoFit/>
+          </a:bodyPr>
+          <a:lstStyle/>
+          <a:p>
+            <a:pPr algn="l"/>
+            <a:r>
+              <a:rPr sz="1000" b="1">
+                <a:solidFill>
+                  <a:srgbClr val="E67E22"/>
+                </a:solidFill>
+                <a:latin typeface="Arial"/>
+              </a:rPr>
+              <a:t>KNOWN INPUTS</a:t>
+            </a:r>
+          </a:p>
+        </p:txBody>
+      </p:sp>
+      <p:sp>
+        <p:nvSpPr>
+          <p:cNvPr id="54" name="TextBox 53"/>
+          <p:cNvSpPr txBox="1"/>
+          <p:nvPr/>
+        </p:nvSpPr>
+        <p:spPr>
+          <a:xfrm>
+            <a:off x="749808" y="4114800"/>
+            <a:ext cx="960120" cy="274320"/>
+          </a:xfrm>
+          <a:prstGeom prst="rect">
+            <a:avLst/>
+          </a:prstGeom>
+          <a:noFill/>
+        </p:spPr>
+        <p:txBody>
+          <a:bodyPr wrap="none" anchor="ctr">
+            <a:spAutoFit/>
+          </a:bodyPr>
+          <a:lstStyle/>
+          <a:p>
+            <a:pPr algn="ctr"/>
+            <a14:m xmlns:a14="http://schemas.microsoft.com/office/drawing/2010/main">
+              <m:oMathPara xmlns:m="http://schemas.openxmlformats.org/officeDocument/2006/math">
+                <m:oMathParaPr>
+                  <m:jc m:val="center"/>
+                </m:oMathParaPr>
+                <m:oMath>
+                  <m:sSub>
+                    <m:e>
                       <m:r>
                         <a:rPr lang="en-US" sz="1300" dirty="0">
                           <a:solidFill>
                             <a:srgbClr val="14345B"/>
                           </a:solidFill>
-                          <a:latin typeface="Cambria Math" panose="02040503050406030204"/>
+                          <a:latin typeface="Cambria Math"/>
                         </a:rPr>
-                        <m:t>0</m:t>
+                        <m:t>w</m:t>
                       </m:r>
+                    </m:e>
+                    <m:sub>
                       <m:r>
                         <a:rPr lang="en-US" sz="1300" dirty="0">
                           <a:solidFill>
                             <a:srgbClr val="14345B"/>
                           </a:solidFill>
-                          <a:latin typeface="Cambria Math" panose="02040503050406030204"/>
+                          <a:latin typeface="Cambria Math"/>
+                        </a:rPr>
+                        <m:t>p</m:t>
+                      </m:r>
+                    </m:sub>
+                  </m:sSub>
+                </m:oMath>
+              </m:oMathPara>
+            </a14:m>
+          </a:p>
+        </p:txBody>
+      </p:sp>
+      <p:sp>
+        <p:nvSpPr>
+          <p:cNvPr id="55" name="TextBox 54"/>
+          <p:cNvSpPr txBox="1"/>
+          <p:nvPr/>
+        </p:nvSpPr>
+        <p:spPr>
+          <a:xfrm>
+            <a:off x="1600200" y="4114800"/>
+            <a:ext cx="1645920" cy="292608"/>
+          </a:xfrm>
+          <a:prstGeom prst="rect">
+            <a:avLst/>
+          </a:prstGeom>
+          <a:noFill/>
+        </p:spPr>
+        <p:txBody>
+          <a:bodyPr wrap="square" lIns="128016" rIns="128016" tIns="73152" bIns="54864" anchor="ctr">
+            <a:spAutoFit/>
+          </a:bodyPr>
+          <a:lstStyle/>
+          <a:p>
+            <a:pPr algn="l"/>
+            <a:r>
+              <a:rPr sz="980" b="0">
+                <a:solidFill>
+                  <a:srgbClr val="1F3046"/>
+                </a:solidFill>
+                <a:latin typeface="Arial"/>
+              </a:rPr>
+              <a:t>experts in flow p</a:t>
+            </a:r>
+          </a:p>
+        </p:txBody>
+      </p:sp>
+      <p:sp>
+        <p:nvSpPr>
+          <p:cNvPr id="56" name="TextBox 55"/>
+          <p:cNvSpPr txBox="1"/>
+          <p:nvPr/>
+        </p:nvSpPr>
+        <p:spPr>
+          <a:xfrm>
+            <a:off x="749808" y="4462272"/>
+            <a:ext cx="960120" cy="274320"/>
+          </a:xfrm>
+          <a:prstGeom prst="rect">
+            <a:avLst/>
+          </a:prstGeom>
+          <a:noFill/>
+        </p:spPr>
+        <p:txBody>
+          <a:bodyPr wrap="none" anchor="ctr">
+            <a:spAutoFit/>
+          </a:bodyPr>
+          <a:lstStyle/>
+          <a:p>
+            <a:pPr algn="ctr"/>
+            <a14:m xmlns:a14="http://schemas.microsoft.com/office/drawing/2010/main">
+              <m:oMathPara xmlns:m="http://schemas.openxmlformats.org/officeDocument/2006/math">
+                <m:oMathParaPr>
+                  <m:jc m:val="center"/>
+                </m:oMathParaPr>
+                <m:oMath>
+                  <m:sSub>
+                    <m:e>
+                      <m:r>
+                        <a:rPr lang="en-US" sz="1300" dirty="0">
+                          <a:solidFill>
+                            <a:srgbClr val="14345B"/>
+                          </a:solidFill>
+                          <a:latin typeface="Cambria Math"/>
+                        </a:rPr>
+                        <m:t>f</m:t>
+                      </m:r>
+                    </m:e>
+                    <m:sub>
+                      <m:r>
+                        <a:rPr lang="en-US" sz="1300" dirty="0">
+                          <a:solidFill>
+                            <a:srgbClr val="14345B"/>
+                          </a:solidFill>
+                          <a:latin typeface="Cambria Math"/>
+                        </a:rPr>
+                        <m:t>p</m:t>
+                      </m:r>
+                      <m:r>
+                        <m:rPr>
+                          <m:sty m:val="p"/>
+                        </m:rPr>
+                        <a:rPr lang="en-US" sz="1300" dirty="0">
+                          <a:solidFill>
+                            <a:srgbClr val="14345B"/>
+                          </a:solidFill>
+                          <a:latin typeface="Cambria Math"/>
                         </a:rPr>
                         <m:t>,</m:t>
                       </m:r>
@@ -26709,958 +27042,239 @@
                           <a:solidFill>
                             <a:srgbClr val="14345B"/>
                           </a:solidFill>
-                          <a:latin typeface="Cambria Math" panose="02040503050406030204"/>
+                          <a:latin typeface="Cambria Math"/>
                         </a:rPr>
-                        <m:t>1</m:t>
+                        <m:t>e</m:t>
                       </m:r>
+                    </m:sub>
+                  </m:sSub>
+                </m:oMath>
+              </m:oMathPara>
+            </a14:m>
+          </a:p>
+        </p:txBody>
+      </p:sp>
+      <p:sp>
+        <p:nvSpPr>
+          <p:cNvPr id="57" name="TextBox 56"/>
+          <p:cNvSpPr txBox="1"/>
+          <p:nvPr/>
+        </p:nvSpPr>
+        <p:spPr>
+          <a:xfrm>
+            <a:off x="1600200" y="4462272"/>
+            <a:ext cx="1645920" cy="292608"/>
+          </a:xfrm>
+          <a:prstGeom prst="rect">
+            <a:avLst/>
+          </a:prstGeom>
+          <a:noFill/>
+        </p:spPr>
+        <p:txBody>
+          <a:bodyPr wrap="square" lIns="128016" rIns="128016" tIns="73152" bIns="54864" anchor="ctr">
+            <a:spAutoFit/>
+          </a:bodyPr>
+          <a:lstStyle/>
+          <a:p>
+            <a:pPr algn="l"/>
+            <a:r>
+              <a:rPr sz="980" b="0">
+                <a:solidFill>
+                  <a:srgbClr val="1F3046"/>
+                </a:solidFill>
+                <a:latin typeface="Arial"/>
+              </a:rPr>
+              <a:t>fraction routed on link e</a:t>
+            </a:r>
+          </a:p>
+        </p:txBody>
+      </p:sp>
+      <p:sp>
+        <p:nvSpPr>
+          <p:cNvPr id="58" name="TextBox 57"/>
+          <p:cNvSpPr txBox="1"/>
+          <p:nvPr/>
+        </p:nvSpPr>
+        <p:spPr>
+          <a:xfrm>
+            <a:off x="749808" y="4809744"/>
+            <a:ext cx="960120" cy="274320"/>
+          </a:xfrm>
+          <a:prstGeom prst="rect">
+            <a:avLst/>
+          </a:prstGeom>
+          <a:noFill/>
+        </p:spPr>
+        <p:txBody>
+          <a:bodyPr wrap="none" anchor="ctr">
+            <a:spAutoFit/>
+          </a:bodyPr>
+          <a:lstStyle/>
+          <a:p>
+            <a:pPr algn="ctr"/>
+            <a14:m xmlns:a14="http://schemas.microsoft.com/office/drawing/2010/main">
+              <m:oMathPara xmlns:m="http://schemas.openxmlformats.org/officeDocument/2006/math">
+                <m:oMathParaPr>
+                  <m:jc m:val="center"/>
+                </m:oMathParaPr>
+                <m:oMath>
+                  <m:sSub>
+                    <m:e>
                       <m:r>
                         <a:rPr lang="en-US" sz="1300" dirty="0">
                           <a:solidFill>
                             <a:srgbClr val="14345B"/>
                           </a:solidFill>
-                          <a:latin typeface="Cambria Math" panose="02040503050406030204"/>
+                          <a:latin typeface="Cambria Math"/>
                         </a:rPr>
-                        <m:t>}</m:t>
+                        <m:t>C</m:t>
                       </m:r>
-                    </m:oMath>
-                  </m:oMathPara>
-                </a14:m>
-              </a:p>
-            </p:txBody>
-          </p:sp>
-        </mc:Choice>
-        <mc:Fallback>
-          <p:sp>
-            <p:nvSpPr>
-              <p:cNvPr id="12" name="TextBox 11"/>
-              <p:cNvSpPr txBox="1">
-                <a:spLocks noRot="1" noChangeAspect="1" noMove="1" noResize="1" noEditPoints="1" noAdjustHandles="1" noChangeArrowheads="1" noChangeShapeType="1" noTextEdit="1"/>
-              </p:cNvSpPr>
-              <p:nvPr/>
-            </p:nvSpPr>
-            <p:spPr>
-              <a:xfrm>
-                <a:off x="667512" y="2770632"/>
-                <a:ext cx="1353312" cy="329184"/>
-              </a:xfrm>
-              <a:prstGeom prst="rect">
-                <a:avLst/>
-              </a:prstGeom>
-              <a:blipFill rotWithShape="1">
-                <a:blip r:embed="rId2"/>
-                <a:stretch>
-                  <a:fillRect l="-9" t="-810" r="19" b="-1042"/>
-                </a:stretch>
-              </a:blipFill>
-            </p:spPr>
-            <p:txBody>
-              <a:bodyPr/>
-              <a:lstStyle/>
-              <a:p>
-                <a:r>
-                  <a:rPr lang="zh-CN" altLang="en-US">
-                    <a:noFill/>
-                  </a:rPr>
-                  <a:t> </a:t>
-                </a:r>
-              </a:p>
-            </p:txBody>
-          </p:sp>
-        </mc:Fallback>
-      </mc:AlternateContent>
-      <p:sp>
-        <p:nvSpPr>
-          <p:cNvPr id="13" name="TextBox 12"/>
-          <p:cNvSpPr txBox="1"/>
-          <p:nvPr/>
-        </p:nvSpPr>
-        <p:spPr>
-          <a:xfrm>
-            <a:off x="1901952" y="2761488"/>
-            <a:ext cx="1344168" cy="365760"/>
-          </a:xfrm>
-          <a:prstGeom prst="rect">
-            <a:avLst/>
-          </a:prstGeom>
-          <a:noFill/>
-        </p:spPr>
-        <p:txBody>
-          <a:bodyPr wrap="square" lIns="128016" tIns="73152" rIns="128016" bIns="54864" anchor="ctr">
-            <a:spAutoFit/>
-          </a:bodyPr>
-          <a:lstStyle/>
-          <a:p>
-            <a:pPr algn="l"/>
-            <a:r>
-              <a:rPr sz="1080" b="0">
-                <a:solidFill>
-                  <a:srgbClr val="1F3046"/>
-                </a:solidFill>
-                <a:latin typeface="Arial" panose="020B0604020202020204"/>
-              </a:rPr>
-              <a:t>active-batch flag</a:t>
-            </a:r>
-            <a:endParaRPr sz="1080" b="0">
-              <a:solidFill>
-                <a:srgbClr val="1F3046"/>
-              </a:solidFill>
-              <a:latin typeface="Arial" panose="020B0604020202020204"/>
-            </a:endParaRPr>
-          </a:p>
-        </p:txBody>
-      </p:sp>
-      <mc:AlternateContent xmlns:mc="http://schemas.openxmlformats.org/markup-compatibility/2006">
-        <mc:Choice xmlns:a14="http://schemas.microsoft.com/office/drawing/2010/main" Requires="a14">
-          <p:sp>
-            <p:nvSpPr>
-              <p:cNvPr id="14" name="TextBox 13"/>
-              <p:cNvSpPr txBox="1"/>
-              <p:nvPr/>
-            </p:nvSpPr>
-            <p:spPr>
-              <a:xfrm>
-                <a:off x="667512" y="3291839"/>
-                <a:ext cx="1353312" cy="329184"/>
-              </a:xfrm>
-              <a:prstGeom prst="rect">
-                <a:avLst/>
-              </a:prstGeom>
-              <a:noFill/>
-            </p:spPr>
-            <p:txBody>
-              <a:bodyPr wrap="none" anchor="ctr">
-                <a:spAutoFit/>
-              </a:bodyPr>
-              <a:lstStyle/>
-              <a:p>
-                <a:pPr algn="ctr"/>
-                <a14:m>
-                  <m:oMathPara xmlns:m="http://schemas.openxmlformats.org/officeDocument/2006/math">
-                    <m:oMathParaPr>
-                      <m:jc m:val="center"/>
-                    </m:oMathParaPr>
-                    <m:oMath xmlns:m="http://schemas.openxmlformats.org/officeDocument/2006/math">
-                      <m:sSub>
-                        <m:sSubPr>
-                          <m:ctrlPr>
-                            <a:rPr/>
-                          </m:ctrlPr>
-                        </m:sSubPr>
-                        <m:e>
-                          <m:r>
-                            <a:rPr lang="en-US" sz="1300" dirty="0">
-                              <a:solidFill>
-                                <a:srgbClr val="14345B"/>
-                              </a:solidFill>
-                              <a:latin typeface="Cambria Math" panose="02040503050406030204"/>
-                            </a:rPr>
-                            <m:t>𝑇</m:t>
-                          </m:r>
-                        </m:e>
-                        <m:sub>
-                          <m:r>
-                            <m:rPr>
-                              <m:sty m:val="p"/>
-                            </m:rPr>
-                            <a:rPr lang="en-US" sz="1300" dirty="0">
-                              <a:solidFill>
-                                <a:srgbClr val="14345B"/>
-                              </a:solidFill>
-                              <a:latin typeface="Cambria Math" panose="02040503050406030204"/>
-                            </a:rPr>
-                            <m:t>i</m:t>
-                          </m:r>
-                          <m:r>
-                            <m:rPr>
-                              <m:sty m:val="p"/>
-                            </m:rPr>
-                            <a:rPr lang="en-US" sz="1300" dirty="0">
-                              <a:solidFill>
-                                <a:srgbClr val="14345B"/>
-                              </a:solidFill>
-                              <a:latin typeface="Cambria Math" panose="02040503050406030204"/>
-                            </a:rPr>
-                            <m:t>n</m:t>
-                          </m:r>
-                          <m:r>
-                            <m:rPr>
-                              <m:sty m:val="p"/>
-                            </m:rPr>
-                            <a:rPr lang="en-US" sz="1300" dirty="0">
-                              <a:solidFill>
-                                <a:srgbClr val="14345B"/>
-                              </a:solidFill>
-                              <a:latin typeface="Cambria Math" panose="02040503050406030204"/>
-                            </a:rPr>
-                            <m:t>f</m:t>
-                          </m:r>
-                          <m:r>
-                            <m:rPr>
-                              <m:sty m:val="p"/>
-                            </m:rPr>
-                            <a:rPr lang="en-US" sz="1300" dirty="0">
-                              <a:solidFill>
-                                <a:srgbClr val="14345B"/>
-                              </a:solidFill>
-                              <a:latin typeface="Cambria Math" panose="02040503050406030204"/>
-                            </a:rPr>
-                            <m:t>e</m:t>
-                          </m:r>
-                          <m:r>
-                            <m:rPr>
-                              <m:sty m:val="p"/>
-                            </m:rPr>
-                            <a:rPr lang="en-US" sz="1300" dirty="0">
-                              <a:solidFill>
-                                <a:srgbClr val="14345B"/>
-                              </a:solidFill>
-                              <a:latin typeface="Cambria Math" panose="02040503050406030204"/>
-                            </a:rPr>
-                            <m:t>r</m:t>
-                          </m:r>
-                        </m:sub>
-                      </m:sSub>
+                    </m:e>
+                    <m:sub>
                       <m:r>
                         <a:rPr lang="en-US" sz="1300" dirty="0">
                           <a:solidFill>
                             <a:srgbClr val="14345B"/>
                           </a:solidFill>
-                          <a:latin typeface="Cambria Math" panose="02040503050406030204"/>
+                          <a:latin typeface="Cambria Math"/>
                         </a:rPr>
-                        <m:t>≥</m:t>
+                        <m:t>e</m:t>
                       </m:r>
+                    </m:sub>
+                  </m:sSub>
+                </m:oMath>
+              </m:oMathPara>
+            </a14:m>
+          </a:p>
+        </p:txBody>
+      </p:sp>
+      <p:sp>
+        <p:nvSpPr>
+          <p:cNvPr id="59" name="TextBox 58"/>
+          <p:cNvSpPr txBox="1"/>
+          <p:nvPr/>
+        </p:nvSpPr>
+        <p:spPr>
+          <a:xfrm>
+            <a:off x="1600200" y="4809744"/>
+            <a:ext cx="1645920" cy="292608"/>
+          </a:xfrm>
+          <a:prstGeom prst="rect">
+            <a:avLst/>
+          </a:prstGeom>
+          <a:noFill/>
+        </p:spPr>
+        <p:txBody>
+          <a:bodyPr wrap="square" lIns="128016" rIns="128016" tIns="73152" bIns="54864" anchor="ctr">
+            <a:spAutoFit/>
+          </a:bodyPr>
+          <a:lstStyle/>
+          <a:p>
+            <a:pPr algn="l"/>
+            <a:r>
+              <a:rPr sz="980" b="0">
+                <a:solidFill>
+                  <a:srgbClr val="1F3046"/>
+                </a:solidFill>
+                <a:latin typeface="Arial"/>
+              </a:rPr>
+              <a:t>capacity of link e</a:t>
+            </a:r>
+          </a:p>
+        </p:txBody>
+      </p:sp>
+      <p:sp>
+        <p:nvSpPr>
+          <p:cNvPr id="60" name="TextBox 59"/>
+          <p:cNvSpPr txBox="1"/>
+          <p:nvPr/>
+        </p:nvSpPr>
+        <p:spPr>
+          <a:xfrm>
+            <a:off x="749808" y="5157216"/>
+            <a:ext cx="960120" cy="274320"/>
+          </a:xfrm>
+          <a:prstGeom prst="rect">
+            <a:avLst/>
+          </a:prstGeom>
+          <a:noFill/>
+        </p:spPr>
+        <p:txBody>
+          <a:bodyPr wrap="none" anchor="ctr">
+            <a:spAutoFit/>
+          </a:bodyPr>
+          <a:lstStyle/>
+          <a:p>
+            <a:pPr algn="ctr"/>
+            <a14:m xmlns:a14="http://schemas.microsoft.com/office/drawing/2010/main">
+              <m:oMathPara xmlns:m="http://schemas.openxmlformats.org/officeDocument/2006/math">
+                <m:oMathParaPr>
+                  <m:jc m:val="center"/>
+                </m:oMathParaPr>
+                <m:oMath>
+                  <m:sSub>
+                    <m:e>
                       <m:r>
                         <a:rPr lang="en-US" sz="1300" dirty="0">
                           <a:solidFill>
                             <a:srgbClr val="14345B"/>
                           </a:solidFill>
-                          <a:latin typeface="Cambria Math" panose="02040503050406030204"/>
+                          <a:latin typeface="Cambria Math"/>
                         </a:rPr>
-                        <m:t>0</m:t>
+                        <m:t>T</m:t>
                       </m:r>
-                    </m:oMath>
-                  </m:oMathPara>
-                </a14:m>
-              </a:p>
-            </p:txBody>
-          </p:sp>
-        </mc:Choice>
-        <mc:Fallback>
-          <p:sp>
-            <p:nvSpPr>
-              <p:cNvPr id="14" name="TextBox 13"/>
-              <p:cNvSpPr txBox="1">
-                <a:spLocks noRot="1" noChangeAspect="1" noMove="1" noResize="1" noEditPoints="1" noAdjustHandles="1" noChangeArrowheads="1" noChangeShapeType="1" noTextEdit="1"/>
-              </p:cNvSpPr>
-              <p:nvPr/>
-            </p:nvSpPr>
-            <p:spPr>
-              <a:xfrm>
-                <a:off x="667512" y="3291839"/>
-                <a:ext cx="1353312" cy="329184"/>
-              </a:xfrm>
-              <a:prstGeom prst="rect">
-                <a:avLst/>
-              </a:prstGeom>
-              <a:blipFill rotWithShape="1">
-                <a:blip r:embed="rId3"/>
-                <a:stretch>
-                  <a:fillRect l="-9" t="-964" r="19" b="-888"/>
-                </a:stretch>
-              </a:blipFill>
-            </p:spPr>
-            <p:txBody>
-              <a:bodyPr/>
-              <a:lstStyle/>
-              <a:p>
-                <a:r>
-                  <a:rPr lang="zh-CN" altLang="en-US">
-                    <a:noFill/>
-                  </a:rPr>
-                  <a:t> </a:t>
-                </a:r>
-              </a:p>
-            </p:txBody>
-          </p:sp>
-        </mc:Fallback>
-      </mc:AlternateContent>
-      <p:sp>
-        <p:nvSpPr>
-          <p:cNvPr id="15" name="TextBox 14"/>
-          <p:cNvSpPr txBox="1"/>
-          <p:nvPr/>
-        </p:nvSpPr>
-        <p:spPr>
-          <a:xfrm>
-            <a:off x="1901952" y="3282696"/>
-            <a:ext cx="1344168" cy="365760"/>
-          </a:xfrm>
-          <a:prstGeom prst="rect">
-            <a:avLst/>
-          </a:prstGeom>
-          <a:noFill/>
-        </p:spPr>
-        <p:txBody>
-          <a:bodyPr wrap="square" lIns="128016" tIns="73152" rIns="128016" bIns="54864" anchor="ctr">
-            <a:spAutoFit/>
-          </a:bodyPr>
-          <a:lstStyle/>
-          <a:p>
-            <a:pPr algn="l"/>
-            <a:r>
-              <a:rPr sz="1080" b="0">
-                <a:solidFill>
-                  <a:srgbClr val="1F3046"/>
-                </a:solidFill>
-                <a:latin typeface="Arial" panose="020B0604020202020204"/>
-              </a:rPr>
-              <a:t>worst inference time</a:t>
-            </a:r>
-            <a:endParaRPr sz="1080" b="0">
-              <a:solidFill>
-                <a:srgbClr val="1F3046"/>
-              </a:solidFill>
-              <a:latin typeface="Arial" panose="020B0604020202020204"/>
-            </a:endParaRPr>
-          </a:p>
-        </p:txBody>
-      </p:sp>
-      <p:sp>
-        <p:nvSpPr>
-          <p:cNvPr id="16" name="TextBox 15"/>
-          <p:cNvSpPr txBox="1"/>
-          <p:nvPr/>
-        </p:nvSpPr>
-        <p:spPr>
-          <a:xfrm>
-            <a:off x="786384" y="3840480"/>
-            <a:ext cx="2468880" cy="228600"/>
-          </a:xfrm>
-          <a:prstGeom prst="rect">
-            <a:avLst/>
-          </a:prstGeom>
-          <a:noFill/>
-        </p:spPr>
-        <p:txBody>
-          <a:bodyPr wrap="square" lIns="128016" tIns="73152" rIns="128016" bIns="54864" anchor="ctr">
-            <a:spAutoFit/>
-          </a:bodyPr>
-          <a:lstStyle/>
-          <a:p>
-            <a:pPr algn="l"/>
-            <a:r>
-              <a:rPr sz="1000" b="1">
-                <a:solidFill>
-                  <a:srgbClr val="E67E22"/>
-                </a:solidFill>
-                <a:latin typeface="Arial" panose="020B0604020202020204"/>
-              </a:rPr>
-              <a:t>KNOWN INPUTS</a:t>
-            </a:r>
-            <a:endParaRPr sz="1000" b="1">
-              <a:solidFill>
-                <a:srgbClr val="E67E22"/>
-              </a:solidFill>
-              <a:latin typeface="Arial" panose="020B0604020202020204"/>
-            </a:endParaRPr>
-          </a:p>
-        </p:txBody>
-      </p:sp>
-      <mc:AlternateContent xmlns:mc="http://schemas.openxmlformats.org/markup-compatibility/2006">
-        <mc:Choice xmlns:a14="http://schemas.microsoft.com/office/drawing/2010/main" Requires="a14">
-          <p:sp>
-            <p:nvSpPr>
-              <p:cNvPr id="17" name="TextBox 16"/>
-              <p:cNvSpPr txBox="1"/>
-              <p:nvPr/>
-            </p:nvSpPr>
-            <p:spPr>
-              <a:xfrm>
-                <a:off x="749808" y="4114800"/>
-                <a:ext cx="960120" cy="274320"/>
-              </a:xfrm>
-              <a:prstGeom prst="rect">
-                <a:avLst/>
-              </a:prstGeom>
-              <a:noFill/>
-            </p:spPr>
-            <p:txBody>
-              <a:bodyPr wrap="none" anchor="ctr">
-                <a:spAutoFit/>
-              </a:bodyPr>
-              <a:lstStyle/>
-              <a:p>
-                <a:pPr algn="ctr"/>
-                <a14:m>
-                  <m:oMathPara xmlns:m="http://schemas.openxmlformats.org/officeDocument/2006/math">
-                    <m:oMathParaPr>
-                      <m:jc m:val="center"/>
-                    </m:oMathParaPr>
-                    <m:oMath xmlns:m="http://schemas.openxmlformats.org/officeDocument/2006/math">
-                      <m:sSub>
-                        <m:sSubPr>
-                          <m:ctrlPr>
-                            <a:rPr/>
-                          </m:ctrlPr>
-                        </m:sSubPr>
-                        <m:e>
-                          <m:r>
-                            <a:rPr lang="en-US" sz="1300" dirty="0">
-                              <a:solidFill>
-                                <a:srgbClr val="14345B"/>
-                              </a:solidFill>
-                              <a:latin typeface="Cambria Math" panose="02040503050406030204"/>
-                            </a:rPr>
-                            <m:t>𝑤</m:t>
-                          </m:r>
-                        </m:e>
-                        <m:sub>
-                          <m:r>
-                            <a:rPr lang="en-US" sz="1300" dirty="0">
-                              <a:solidFill>
-                                <a:srgbClr val="14345B"/>
-                              </a:solidFill>
-                              <a:latin typeface="Cambria Math" panose="02040503050406030204"/>
-                            </a:rPr>
-                            <m:t>𝑝</m:t>
-                          </m:r>
-                        </m:sub>
-                      </m:sSub>
-                    </m:oMath>
-                  </m:oMathPara>
-                </a14:m>
-              </a:p>
-            </p:txBody>
-          </p:sp>
-        </mc:Choice>
-        <mc:Fallback>
-          <p:sp>
-            <p:nvSpPr>
-              <p:cNvPr id="17" name="TextBox 16"/>
-              <p:cNvSpPr txBox="1">
-                <a:spLocks noRot="1" noChangeAspect="1" noMove="1" noResize="1" noEditPoints="1" noAdjustHandles="1" noChangeArrowheads="1" noChangeShapeType="1" noTextEdit="1"/>
-              </p:cNvSpPr>
-              <p:nvPr/>
-            </p:nvSpPr>
-            <p:spPr>
-              <a:xfrm>
-                <a:off x="749808" y="4114800"/>
-                <a:ext cx="960120" cy="274320"/>
-              </a:xfrm>
-              <a:prstGeom prst="rect">
-                <a:avLst/>
-              </a:prstGeom>
-              <a:blipFill rotWithShape="1">
-                <a:blip r:embed="rId4"/>
-                <a:stretch>
-                  <a:fillRect l="-53" t="-12269" r="53" b="-12731"/>
-                </a:stretch>
-              </a:blipFill>
-            </p:spPr>
-            <p:txBody>
-              <a:bodyPr/>
-              <a:lstStyle/>
-              <a:p>
-                <a:r>
-                  <a:rPr lang="zh-CN" altLang="en-US">
-                    <a:noFill/>
-                  </a:rPr>
-                  <a:t> </a:t>
-                </a:r>
-              </a:p>
-            </p:txBody>
-          </p:sp>
-        </mc:Fallback>
-      </mc:AlternateContent>
-      <p:sp>
-        <p:nvSpPr>
-          <p:cNvPr id="18" name="TextBox 17"/>
-          <p:cNvSpPr txBox="1"/>
-          <p:nvPr/>
-        </p:nvSpPr>
-        <p:spPr>
-          <a:xfrm>
-            <a:off x="1600200" y="4114800"/>
-            <a:ext cx="1645920" cy="292608"/>
-          </a:xfrm>
-          <a:prstGeom prst="rect">
-            <a:avLst/>
-          </a:prstGeom>
-          <a:noFill/>
-        </p:spPr>
-        <p:txBody>
-          <a:bodyPr wrap="square" lIns="128016" tIns="73152" rIns="128016" bIns="54864" anchor="ctr">
-            <a:spAutoFit/>
-          </a:bodyPr>
-          <a:lstStyle/>
-          <a:p>
-            <a:pPr algn="l"/>
-            <a:r>
-              <a:rPr sz="980" b="0">
-                <a:solidFill>
-                  <a:srgbClr val="1F3046"/>
-                </a:solidFill>
-                <a:latin typeface="Arial" panose="020B0604020202020204"/>
-              </a:rPr>
-              <a:t>experts in flow p</a:t>
-            </a:r>
-            <a:endParaRPr sz="980" b="0">
-              <a:solidFill>
-                <a:srgbClr val="1F3046"/>
-              </a:solidFill>
-              <a:latin typeface="Arial" panose="020B0604020202020204"/>
-            </a:endParaRPr>
-          </a:p>
-        </p:txBody>
-      </p:sp>
-      <mc:AlternateContent xmlns:mc="http://schemas.openxmlformats.org/markup-compatibility/2006">
-        <mc:Choice xmlns:a14="http://schemas.microsoft.com/office/drawing/2010/main" Requires="a14">
-          <p:sp>
-            <p:nvSpPr>
-              <p:cNvPr id="19" name="TextBox 18"/>
-              <p:cNvSpPr txBox="1"/>
-              <p:nvPr/>
-            </p:nvSpPr>
-            <p:spPr>
-              <a:xfrm>
-                <a:off x="749808" y="4462272"/>
-                <a:ext cx="960120" cy="274320"/>
-              </a:xfrm>
-              <a:prstGeom prst="rect">
-                <a:avLst/>
-              </a:prstGeom>
-              <a:noFill/>
-            </p:spPr>
-            <p:txBody>
-              <a:bodyPr wrap="none" anchor="ctr">
-                <a:spAutoFit/>
-              </a:bodyPr>
-              <a:lstStyle/>
-              <a:p>
-                <a:pPr algn="ctr"/>
-                <a14:m>
-                  <m:oMathPara xmlns:m="http://schemas.openxmlformats.org/officeDocument/2006/math">
-                    <m:oMathParaPr>
-                      <m:jc m:val="center"/>
-                    </m:oMathParaPr>
-                    <m:oMath xmlns:m="http://schemas.openxmlformats.org/officeDocument/2006/math">
-                      <m:sSub>
-                        <m:sSubPr>
-                          <m:ctrlPr>
-                            <a:rPr/>
-                          </m:ctrlPr>
-                        </m:sSubPr>
-                        <m:e>
-                          <m:r>
-                            <a:rPr lang="en-US" sz="1300" dirty="0">
-                              <a:solidFill>
-                                <a:srgbClr val="14345B"/>
-                              </a:solidFill>
-                              <a:latin typeface="Cambria Math" panose="02040503050406030204"/>
-                            </a:rPr>
-                            <m:t>𝑓</m:t>
-                          </m:r>
-                        </m:e>
-                        <m:sub>
-                          <m:r>
-                            <a:rPr lang="en-US" sz="1300" dirty="0">
-                              <a:solidFill>
-                                <a:srgbClr val="14345B"/>
-                              </a:solidFill>
-                              <a:latin typeface="Cambria Math" panose="02040503050406030204"/>
-                            </a:rPr>
-                            <m:t>𝑝</m:t>
-                          </m:r>
-                          <m:r>
-                            <a:rPr lang="en-US" sz="1300" dirty="0">
-                              <a:solidFill>
-                                <a:srgbClr val="14345B"/>
-                              </a:solidFill>
-                              <a:latin typeface="Cambria Math" panose="02040503050406030204"/>
-                            </a:rPr>
-                            <m:t>,</m:t>
-                          </m:r>
-                          <m:r>
-                            <a:rPr lang="en-US" sz="1300" dirty="0">
-                              <a:solidFill>
-                                <a:srgbClr val="14345B"/>
-                              </a:solidFill>
-                              <a:latin typeface="Cambria Math" panose="02040503050406030204"/>
-                            </a:rPr>
-                            <m:t>𝑒</m:t>
-                          </m:r>
-                        </m:sub>
-                      </m:sSub>
-                    </m:oMath>
-                  </m:oMathPara>
-                </a14:m>
-              </a:p>
-            </p:txBody>
-          </p:sp>
-        </mc:Choice>
-        <mc:Fallback>
-          <p:sp>
-            <p:nvSpPr>
-              <p:cNvPr id="19" name="TextBox 18"/>
-              <p:cNvSpPr txBox="1">
-                <a:spLocks noRot="1" noChangeAspect="1" noMove="1" noResize="1" noEditPoints="1" noAdjustHandles="1" noChangeArrowheads="1" noChangeShapeType="1" noTextEdit="1"/>
-              </p:cNvSpPr>
-              <p:nvPr/>
-            </p:nvSpPr>
-            <p:spPr>
-              <a:xfrm>
-                <a:off x="749808" y="4462272"/>
-                <a:ext cx="960120" cy="274320"/>
-              </a:xfrm>
-              <a:prstGeom prst="rect">
-                <a:avLst/>
-              </a:prstGeom>
-              <a:blipFill rotWithShape="1">
-                <a:blip r:embed="rId5"/>
-                <a:stretch>
-                  <a:fillRect l="-53" t="-12315" r="53" b="-12685"/>
-                </a:stretch>
-              </a:blipFill>
-            </p:spPr>
-            <p:txBody>
-              <a:bodyPr/>
-              <a:lstStyle/>
-              <a:p>
-                <a:r>
-                  <a:rPr lang="zh-CN" altLang="en-US">
-                    <a:noFill/>
-                  </a:rPr>
-                  <a:t> </a:t>
-                </a:r>
-              </a:p>
-            </p:txBody>
-          </p:sp>
-        </mc:Fallback>
-      </mc:AlternateContent>
-      <p:sp>
-        <p:nvSpPr>
-          <p:cNvPr id="20" name="TextBox 19"/>
-          <p:cNvSpPr txBox="1"/>
-          <p:nvPr/>
-        </p:nvSpPr>
-        <p:spPr>
-          <a:xfrm>
-            <a:off x="1600200" y="4462272"/>
-            <a:ext cx="1645920" cy="292608"/>
-          </a:xfrm>
-          <a:prstGeom prst="rect">
-            <a:avLst/>
-          </a:prstGeom>
-          <a:noFill/>
-        </p:spPr>
-        <p:txBody>
-          <a:bodyPr wrap="square" lIns="128016" tIns="73152" rIns="128016" bIns="54864" anchor="ctr">
-            <a:spAutoFit/>
-          </a:bodyPr>
-          <a:lstStyle/>
-          <a:p>
-            <a:pPr algn="l"/>
-            <a:r>
-              <a:rPr sz="980" b="0">
-                <a:solidFill>
-                  <a:srgbClr val="1F3046"/>
-                </a:solidFill>
-                <a:latin typeface="Arial" panose="020B0604020202020204"/>
-              </a:rPr>
-              <a:t>fraction routed on link e</a:t>
-            </a:r>
-            <a:endParaRPr sz="980" b="0">
-              <a:solidFill>
-                <a:srgbClr val="1F3046"/>
-              </a:solidFill>
-              <a:latin typeface="Arial" panose="020B0604020202020204"/>
-            </a:endParaRPr>
-          </a:p>
-        </p:txBody>
-      </p:sp>
-      <mc:AlternateContent xmlns:mc="http://schemas.openxmlformats.org/markup-compatibility/2006">
-        <mc:Choice xmlns:a14="http://schemas.microsoft.com/office/drawing/2010/main" Requires="a14">
-          <p:sp>
-            <p:nvSpPr>
-              <p:cNvPr id="21" name="TextBox 20"/>
-              <p:cNvSpPr txBox="1"/>
-              <p:nvPr/>
-            </p:nvSpPr>
-            <p:spPr>
-              <a:xfrm>
-                <a:off x="749808" y="4809744"/>
-                <a:ext cx="960120" cy="274320"/>
-              </a:xfrm>
-              <a:prstGeom prst="rect">
-                <a:avLst/>
-              </a:prstGeom>
-              <a:noFill/>
-            </p:spPr>
-            <p:txBody>
-              <a:bodyPr wrap="none" anchor="ctr">
-                <a:spAutoFit/>
-              </a:bodyPr>
-              <a:lstStyle/>
-              <a:p>
-                <a:pPr algn="ctr"/>
-                <a14:m>
-                  <m:oMathPara xmlns:m="http://schemas.openxmlformats.org/officeDocument/2006/math">
-                    <m:oMathParaPr>
-                      <m:jc m:val="center"/>
-                    </m:oMathParaPr>
-                    <m:oMath xmlns:m="http://schemas.openxmlformats.org/officeDocument/2006/math">
-                      <m:sSub>
-                        <m:sSubPr>
-                          <m:ctrlPr>
-                            <a:rPr/>
-                          </m:ctrlPr>
-                        </m:sSubPr>
-                        <m:e>
-                          <m:r>
-                            <a:rPr lang="en-US" sz="1300" dirty="0">
-                              <a:solidFill>
-                                <a:srgbClr val="14345B"/>
-                              </a:solidFill>
-                              <a:latin typeface="Cambria Math" panose="02040503050406030204"/>
-                            </a:rPr>
-                            <m:t>𝐶</m:t>
-                          </m:r>
-                        </m:e>
-                        <m:sub>
-                          <m:r>
-                            <a:rPr lang="en-US" sz="1300" dirty="0">
-                              <a:solidFill>
-                                <a:srgbClr val="14345B"/>
-                              </a:solidFill>
-                              <a:latin typeface="Cambria Math" panose="02040503050406030204"/>
-                            </a:rPr>
-                            <m:t>𝑒</m:t>
-                          </m:r>
-                        </m:sub>
-                      </m:sSub>
-                    </m:oMath>
-                  </m:oMathPara>
-                </a14:m>
-              </a:p>
-            </p:txBody>
-          </p:sp>
-        </mc:Choice>
-        <mc:Fallback>
-          <p:sp>
-            <p:nvSpPr>
-              <p:cNvPr id="21" name="TextBox 20"/>
-              <p:cNvSpPr txBox="1">
-                <a:spLocks noRot="1" noChangeAspect="1" noMove="1" noResize="1" noEditPoints="1" noAdjustHandles="1" noChangeArrowheads="1" noChangeShapeType="1" noTextEdit="1"/>
-              </p:cNvSpPr>
-              <p:nvPr/>
-            </p:nvSpPr>
-            <p:spPr>
-              <a:xfrm>
-                <a:off x="749808" y="4809744"/>
-                <a:ext cx="960120" cy="274320"/>
-              </a:xfrm>
-              <a:prstGeom prst="rect">
-                <a:avLst/>
-              </a:prstGeom>
-              <a:blipFill rotWithShape="1">
-                <a:blip r:embed="rId6"/>
-                <a:stretch>
-                  <a:fillRect l="-53" t="-10972" r="53" b="-11250"/>
-                </a:stretch>
-              </a:blipFill>
-            </p:spPr>
-            <p:txBody>
-              <a:bodyPr/>
-              <a:lstStyle/>
-              <a:p>
-                <a:r>
-                  <a:rPr lang="zh-CN" altLang="en-US">
-                    <a:noFill/>
-                  </a:rPr>
-                  <a:t> </a:t>
-                </a:r>
-              </a:p>
-            </p:txBody>
-          </p:sp>
-        </mc:Fallback>
-      </mc:AlternateContent>
-      <p:sp>
-        <p:nvSpPr>
-          <p:cNvPr id="22" name="TextBox 21"/>
-          <p:cNvSpPr txBox="1"/>
-          <p:nvPr/>
-        </p:nvSpPr>
-        <p:spPr>
-          <a:xfrm>
-            <a:off x="1600200" y="4809744"/>
-            <a:ext cx="1645920" cy="292608"/>
-          </a:xfrm>
-          <a:prstGeom prst="rect">
-            <a:avLst/>
-          </a:prstGeom>
-          <a:noFill/>
-        </p:spPr>
-        <p:txBody>
-          <a:bodyPr wrap="square" lIns="128016" tIns="73152" rIns="128016" bIns="54864" anchor="ctr">
-            <a:spAutoFit/>
-          </a:bodyPr>
-          <a:lstStyle/>
-          <a:p>
-            <a:pPr algn="l"/>
-            <a:r>
-              <a:rPr sz="980" b="0">
-                <a:solidFill>
-                  <a:srgbClr val="1F3046"/>
-                </a:solidFill>
-                <a:latin typeface="Arial" panose="020B0604020202020204"/>
-              </a:rPr>
-              <a:t>capacity of link e</a:t>
-            </a:r>
-            <a:endParaRPr sz="980" b="0">
-              <a:solidFill>
-                <a:srgbClr val="1F3046"/>
-              </a:solidFill>
-              <a:latin typeface="Arial" panose="020B0604020202020204"/>
-            </a:endParaRPr>
-          </a:p>
-        </p:txBody>
-      </p:sp>
-      <mc:AlternateContent xmlns:mc="http://schemas.openxmlformats.org/markup-compatibility/2006">
-        <mc:Choice xmlns:a14="http://schemas.microsoft.com/office/drawing/2010/main" Requires="a14">
-          <p:sp>
-            <p:nvSpPr>
-              <p:cNvPr id="23" name="TextBox 22"/>
-              <p:cNvSpPr txBox="1"/>
-              <p:nvPr/>
-            </p:nvSpPr>
-            <p:spPr>
-              <a:xfrm>
-                <a:off x="749808" y="5157216"/>
-                <a:ext cx="960120" cy="274320"/>
-              </a:xfrm>
-              <a:prstGeom prst="rect">
-                <a:avLst/>
-              </a:prstGeom>
-              <a:noFill/>
-            </p:spPr>
-            <p:txBody>
-              <a:bodyPr wrap="none" anchor="ctr">
-                <a:spAutoFit/>
-              </a:bodyPr>
-              <a:lstStyle/>
-              <a:p>
-                <a:pPr algn="ctr"/>
-                <a14:m>
-                  <m:oMathPara xmlns:m="http://schemas.openxmlformats.org/officeDocument/2006/math">
-                    <m:oMathParaPr>
-                      <m:jc m:val="center"/>
-                    </m:oMathParaPr>
-                    <m:oMath xmlns:m="http://schemas.openxmlformats.org/officeDocument/2006/math">
-                      <m:sSub>
-                        <m:sSubPr>
-                          <m:ctrlPr>
-                            <a:rPr/>
-                          </m:ctrlPr>
-                        </m:sSubPr>
-                        <m:e>
-                          <m:r>
-                            <a:rPr lang="en-US" sz="1300" dirty="0">
-                              <a:solidFill>
-                                <a:srgbClr val="14345B"/>
-                              </a:solidFill>
-                              <a:latin typeface="Cambria Math" panose="02040503050406030204"/>
-                            </a:rPr>
-                            <m:t>𝑇</m:t>
-                          </m:r>
-                        </m:e>
-                        <m:sub>
-                          <m:r>
-                            <a:rPr lang="en-US" sz="1300" dirty="0">
-                              <a:solidFill>
-                                <a:srgbClr val="14345B"/>
-                              </a:solidFill>
-                              <a:latin typeface="Cambria Math" panose="02040503050406030204"/>
-                            </a:rPr>
-                            <m:t>0</m:t>
-                          </m:r>
-                        </m:sub>
-                      </m:sSub>
+                    </m:e>
+                    <m:sub>
                       <m:r>
                         <a:rPr lang="en-US" sz="1300" dirty="0">
                           <a:solidFill>
                             <a:srgbClr val="14345B"/>
                           </a:solidFill>
-                          <a:latin typeface="Cambria Math" panose="02040503050406030204"/>
+                          <a:latin typeface="Cambria Math"/>
                         </a:rPr>
-                        <m:t>,</m:t>
+                        <m:t>0</m:t>
                       </m:r>
-                      <m:r>
-                        <a:rPr lang="en-US" sz="1300" dirty="0">
-                          <a:solidFill>
-                            <a:srgbClr val="14345B"/>
-                          </a:solidFill>
-                          <a:latin typeface="Cambria Math" panose="02040503050406030204"/>
-                        </a:rPr>
-                        <m:t> </m:t>
-                      </m:r>
-                      <m:r>
-                        <a:rPr lang="en-US" sz="1300" dirty="0">
-                          <a:solidFill>
-                            <a:srgbClr val="14345B"/>
-                          </a:solidFill>
-                          <a:latin typeface="Cambria Math" panose="02040503050406030204"/>
-                        </a:rPr>
-                        <m:t>𝜌</m:t>
-                      </m:r>
-                    </m:oMath>
-                  </m:oMathPara>
-                </a14:m>
-              </a:p>
-            </p:txBody>
-          </p:sp>
-        </mc:Choice>
-        <mc:Fallback>
-          <p:sp>
-            <p:nvSpPr>
-              <p:cNvPr id="23" name="TextBox 22"/>
-              <p:cNvSpPr txBox="1">
-                <a:spLocks noRot="1" noChangeAspect="1" noMove="1" noResize="1" noEditPoints="1" noAdjustHandles="1" noChangeArrowheads="1" noChangeShapeType="1" noTextEdit="1"/>
-              </p:cNvSpPr>
-              <p:nvPr/>
-            </p:nvSpPr>
-            <p:spPr>
-              <a:xfrm>
-                <a:off x="749808" y="5157216"/>
-                <a:ext cx="960120" cy="274320"/>
-              </a:xfrm>
-              <a:prstGeom prst="rect">
-                <a:avLst/>
-              </a:prstGeom>
-              <a:blipFill rotWithShape="1">
-                <a:blip r:embed="rId7"/>
-                <a:stretch>
-                  <a:fillRect l="-53" t="-11019" r="53" b="-11204"/>
-                </a:stretch>
-              </a:blipFill>
-            </p:spPr>
-            <p:txBody>
-              <a:bodyPr/>
-              <a:lstStyle/>
-              <a:p>
-                <a:r>
-                  <a:rPr lang="zh-CN" altLang="en-US">
-                    <a:noFill/>
-                  </a:rPr>
-                  <a:t> </a:t>
-                </a:r>
-              </a:p>
-            </p:txBody>
-          </p:sp>
-        </mc:Fallback>
-      </mc:AlternateContent>
-      <p:sp>
-        <p:nvSpPr>
-          <p:cNvPr id="24" name="TextBox 23"/>
+                    </m:sub>
+                  </m:sSub>
+                  <m:r>
+                    <m:rPr>
+                      <m:sty m:val="p"/>
+                    </m:rPr>
+                    <a:rPr lang="en-US" sz="1300" dirty="0">
+                      <a:solidFill>
+                        <a:srgbClr val="14345B"/>
+                      </a:solidFill>
+                      <a:latin typeface="Cambria Math"/>
+                    </a:rPr>
+                    <m:t>,</m:t>
+                  </m:r>
+                  <m:r>
+                    <a:rPr lang="en-US" sz="1300" dirty="0">
+                      <a:solidFill>
+                        <a:srgbClr val="14345B"/>
+                      </a:solidFill>
+                      <a:latin typeface="Cambria Math"/>
+                    </a:rPr>
+                    <m:t> </m:t>
+                  </m:r>
+                  <m:r>
+                    <a:rPr lang="en-US" sz="1300" dirty="0">
+                      <a:solidFill>
+                        <a:srgbClr val="14345B"/>
+                      </a:solidFill>
+                      <a:latin typeface="Cambria Math"/>
+                    </a:rPr>
+                    <m:t>ρ</m:t>
+                  </m:r>
+                </m:oMath>
+              </m:oMathPara>
+            </a14:m>
+          </a:p>
+        </p:txBody>
+      </p:sp>
+      <p:sp>
+        <p:nvSpPr>
+          <p:cNvPr id="61" name="TextBox 60"/>
           <p:cNvSpPr txBox="1"/>
           <p:nvPr/>
         </p:nvSpPr>
@@ -27675,7 +27289,7 @@
           <a:noFill/>
         </p:spPr>
         <p:txBody>
-          <a:bodyPr wrap="square" lIns="128016" tIns="73152" rIns="128016" bIns="54864" anchor="ctr">
+          <a:bodyPr wrap="square" lIns="128016" rIns="128016" tIns="73152" bIns="54864" anchor="ctr">
             <a:spAutoFit/>
           </a:bodyPr>
           <a:lstStyle/>
@@ -27686,22 +27300,16 @@
                 <a:solidFill>
                   <a:srgbClr val="1F3046"/>
                 </a:solidFill>
-                <a:latin typeface="Arial" panose="020B0604020202020204"/>
+                <a:latin typeface="Arial"/>
               </a:rPr>
               <a:t>baseline time; inference share</a:t>
             </a:r>
-            <a:endParaRPr sz="980" b="0">
-              <a:solidFill>
-                <a:srgbClr val="1F3046"/>
-              </a:solidFill>
-              <a:latin typeface="Arial" panose="020B0604020202020204"/>
-            </a:endParaRPr>
-          </a:p>
-        </p:txBody>
-      </p:sp>
-      <p:sp>
-        <p:nvSpPr>
-          <p:cNvPr id="25" name="TextBox 24"/>
+          </a:p>
+        </p:txBody>
+      </p:sp>
+      <p:sp>
+        <p:nvSpPr>
+          <p:cNvPr id="62" name="TextBox 61"/>
           <p:cNvSpPr txBox="1"/>
           <p:nvPr/>
         </p:nvSpPr>
@@ -27716,7 +27324,7 @@
           <a:noFill/>
         </p:spPr>
         <p:txBody>
-          <a:bodyPr wrap="square" lIns="128016" tIns="73152" rIns="128016" bIns="54864" anchor="ctr">
+          <a:bodyPr wrap="square" lIns="128016" rIns="128016" tIns="73152" bIns="54864" anchor="ctr">
             <a:spAutoFit/>
           </a:bodyPr>
           <a:lstStyle/>
@@ -27727,22 +27335,16 @@
                 <a:solidFill>
                   <a:srgbClr val="E67E22"/>
                 </a:solidFill>
-                <a:latin typeface="Arial" panose="020B0604020202020204"/>
+                <a:latin typeface="Arial"/>
               </a:rPr>
               <a:t>Tie-break: minimize active batches after fixing Tᵢₙfₑᵣ</a:t>
             </a:r>
-            <a:endParaRPr sz="950" b="1">
-              <a:solidFill>
-                <a:srgbClr val="E67E22"/>
-              </a:solidFill>
-              <a:latin typeface="Arial" panose="020B0604020202020204"/>
-            </a:endParaRPr>
-          </a:p>
-        </p:txBody>
-      </p:sp>
-      <p:sp>
-        <p:nvSpPr>
-          <p:cNvPr id="26" name="Rounded Rectangle 25"/>
+          </a:p>
+        </p:txBody>
+      </p:sp>
+      <p:sp>
+        <p:nvSpPr>
+          <p:cNvPr id="63" name="Rounded Rectangle 62"/>
           <p:cNvSpPr/>
           <p:nvPr/>
         </p:nvSpPr>
@@ -27787,7 +27389,7 @@
       </p:sp>
       <p:sp>
         <p:nvSpPr>
-          <p:cNvPr id="27" name="TextBox 26"/>
+          <p:cNvPr id="64" name="TextBox 63"/>
           <p:cNvSpPr txBox="1"/>
           <p:nvPr/>
         </p:nvSpPr>
@@ -27802,7 +27404,7 @@
           <a:noFill/>
         </p:spPr>
         <p:txBody>
-          <a:bodyPr wrap="square" lIns="128016" tIns="73152" rIns="128016" bIns="54864" anchor="ctr">
+          <a:bodyPr wrap="square" lIns="128016" rIns="128016" tIns="73152" bIns="54864" anchor="ctr">
             <a:spAutoFit/>
           </a:bodyPr>
           <a:lstStyle/>
@@ -27813,50 +27415,67 @@
                 <a:solidFill>
                   <a:srgbClr val="138F5F"/>
                 </a:solidFill>
-                <a:latin typeface="Arial" panose="020B0604020202020204"/>
+                <a:latin typeface="Arial"/>
               </a:rPr>
               <a:t>PRIMARY OBJECTIVE</a:t>
             </a:r>
-            <a:endParaRPr sz="1150" b="1">
-              <a:solidFill>
-                <a:srgbClr val="138F5F"/>
-              </a:solidFill>
-              <a:latin typeface="Arial" panose="020B0604020202020204"/>
-            </a:endParaRPr>
-          </a:p>
-        </p:txBody>
-      </p:sp>
-      <mc:AlternateContent xmlns:mc="http://schemas.openxmlformats.org/markup-compatibility/2006">
-        <mc:Choice xmlns:a14="http://schemas.microsoft.com/office/drawing/2010/main" Requires="a14">
-          <p:sp>
-            <p:nvSpPr>
-              <p:cNvPr id="28" name="TextBox 27"/>
-              <p:cNvSpPr txBox="1"/>
-              <p:nvPr/>
-            </p:nvSpPr>
-            <p:spPr>
-              <a:xfrm>
-                <a:off x="6492240" y="1591056"/>
-                <a:ext cx="3108960" cy="365760"/>
-              </a:xfrm>
-              <a:prstGeom prst="rect">
-                <a:avLst/>
-              </a:prstGeom>
-              <a:noFill/>
-            </p:spPr>
-            <p:txBody>
-              <a:bodyPr wrap="none" anchor="ctr">
-                <a:spAutoFit/>
-              </a:bodyPr>
-              <a:lstStyle/>
-              <a:p>
-                <a:pPr algn="ctr"/>
-                <a14:m>
-                  <m:oMathPara xmlns:m="http://schemas.openxmlformats.org/officeDocument/2006/math">
-                    <m:oMathParaPr>
-                      <m:jc m:val="center"/>
-                    </m:oMathParaPr>
-                    <m:oMath xmlns:m="http://schemas.openxmlformats.org/officeDocument/2006/math">
+          </a:p>
+        </p:txBody>
+      </p:sp>
+      <p:sp>
+        <p:nvSpPr>
+          <p:cNvPr id="65" name="TextBox 64"/>
+          <p:cNvSpPr txBox="1"/>
+          <p:nvPr/>
+        </p:nvSpPr>
+        <p:spPr>
+          <a:xfrm>
+            <a:off x="6492240" y="1591056"/>
+            <a:ext cx="3108960" cy="365760"/>
+          </a:xfrm>
+          <a:prstGeom prst="rect">
+            <a:avLst/>
+          </a:prstGeom>
+          <a:noFill/>
+        </p:spPr>
+        <p:txBody>
+          <a:bodyPr wrap="none" anchor="ctr">
+            <a:spAutoFit/>
+          </a:bodyPr>
+          <a:lstStyle/>
+          <a:p>
+            <a:pPr algn="ctr"/>
+            <a14:m xmlns:a14="http://schemas.microsoft.com/office/drawing/2010/main">
+              <m:oMathPara xmlns:m="http://schemas.openxmlformats.org/officeDocument/2006/math">
+                <m:oMathParaPr>
+                  <m:jc m:val="center"/>
+                </m:oMathParaPr>
+                <m:oMath>
+                  <m:r>
+                    <m:rPr>
+                      <m:sty m:val="p"/>
+                    </m:rPr>
+                    <a:rPr lang="en-US" sz="1700" dirty="0">
+                      <a:solidFill>
+                        <a:srgbClr val="1F3046"/>
+                      </a:solidFill>
+                      <a:latin typeface="Cambria Math"/>
+                    </a:rPr>
+                    <m:t>min</m:t>
+                  </m:r>
+                  <m:sSub>
+                    <m:e>
+                      <m:r>
+                        <a:rPr lang="en-US" sz="1700" dirty="0">
+                          <a:solidFill>
+                            <a:srgbClr val="1F3046"/>
+                          </a:solidFill>
+                          <a:latin typeface="Cambria Math"/>
+                        </a:rPr>
+                        <m:t>T</m:t>
+                      </m:r>
+                    </m:e>
+                    <m:sub>
                       <m:r>
                         <m:rPr>
                           <m:sty m:val="p"/>
@@ -27865,139 +27484,69 @@
                           <a:solidFill>
                             <a:srgbClr val="1F3046"/>
                           </a:solidFill>
-                          <a:latin typeface="Cambria Math" panose="02040503050406030204"/>
+                          <a:latin typeface="Cambria Math"/>
                         </a:rPr>
-                        <m:t>min</m:t>
+                        <m:t>i</m:t>
                       </m:r>
-                      <m:sSub>
-                        <m:sSubPr>
-                          <m:ctrlPr>
-                            <a:rPr/>
-                          </m:ctrlPr>
-                        </m:sSubPr>
-                        <m:e>
-                          <m:r>
-                            <a:rPr lang="en-US" sz="1700" dirty="0">
-                              <a:solidFill>
-                                <a:srgbClr val="1F3046"/>
-                              </a:solidFill>
-                              <a:latin typeface="Cambria Math" panose="02040503050406030204"/>
-                            </a:rPr>
-                            <m:t>𝑇</m:t>
-                          </m:r>
-                        </m:e>
-                        <m:sub>
-                          <m:r>
-                            <m:rPr>
-                              <m:sty m:val="p"/>
-                            </m:rPr>
-                            <a:rPr lang="en-US" sz="1700" dirty="0">
-                              <a:solidFill>
-                                <a:srgbClr val="1F3046"/>
-                              </a:solidFill>
-                              <a:latin typeface="Cambria Math" panose="02040503050406030204"/>
-                            </a:rPr>
-                            <m:t>i</m:t>
-                          </m:r>
-                          <m:r>
-                            <m:rPr>
-                              <m:sty m:val="p"/>
-                            </m:rPr>
-                            <a:rPr lang="en-US" sz="1700" dirty="0">
-                              <a:solidFill>
-                                <a:srgbClr val="1F3046"/>
-                              </a:solidFill>
-                              <a:latin typeface="Cambria Math" panose="02040503050406030204"/>
-                            </a:rPr>
-                            <m:t>n</m:t>
-                          </m:r>
-                          <m:r>
-                            <m:rPr>
-                              <m:sty m:val="p"/>
-                            </m:rPr>
-                            <a:rPr lang="en-US" sz="1700" dirty="0">
-                              <a:solidFill>
-                                <a:srgbClr val="1F3046"/>
-                              </a:solidFill>
-                              <a:latin typeface="Cambria Math" panose="02040503050406030204"/>
-                            </a:rPr>
-                            <m:t>f</m:t>
-                          </m:r>
-                          <m:r>
-                            <m:rPr>
-                              <m:sty m:val="p"/>
-                            </m:rPr>
-                            <a:rPr lang="en-US" sz="1700" dirty="0">
-                              <a:solidFill>
-                                <a:srgbClr val="1F3046"/>
-                              </a:solidFill>
-                              <a:latin typeface="Cambria Math" panose="02040503050406030204"/>
-                            </a:rPr>
-                            <m:t>e</m:t>
-                          </m:r>
-                          <m:r>
-                            <m:rPr>
-                              <m:sty m:val="p"/>
-                            </m:rPr>
-                            <a:rPr lang="en-US" sz="1700" dirty="0">
-                              <a:solidFill>
-                                <a:srgbClr val="1F3046"/>
-                              </a:solidFill>
-                              <a:latin typeface="Cambria Math" panose="02040503050406030204"/>
-                            </a:rPr>
-                            <m:t>r</m:t>
-                          </m:r>
-                        </m:sub>
-                      </m:sSub>
-                    </m:oMath>
-                  </m:oMathPara>
-                </a14:m>
-              </a:p>
-            </p:txBody>
-          </p:sp>
-        </mc:Choice>
-        <mc:Fallback>
-          <p:sp>
-            <p:nvSpPr>
-              <p:cNvPr id="28" name="TextBox 27"/>
-              <p:cNvSpPr txBox="1">
-                <a:spLocks noRot="1" noChangeAspect="1" noMove="1" noResize="1" noEditPoints="1" noAdjustHandles="1" noChangeArrowheads="1" noChangeShapeType="1" noTextEdit="1"/>
-              </p:cNvSpPr>
-              <p:nvPr/>
-            </p:nvSpPr>
-            <p:spPr>
-              <a:xfrm>
-                <a:off x="6492240" y="1591056"/>
-                <a:ext cx="3108960" cy="365760"/>
-              </a:xfrm>
-              <a:prstGeom prst="rect">
-                <a:avLst/>
-              </a:prstGeom>
-              <a:blipFill rotWithShape="1">
-                <a:blip r:embed="rId8"/>
-                <a:stretch>
-                  <a:fillRect t="-104" b="104"/>
-                </a:stretch>
-              </a:blipFill>
-            </p:spPr>
-            <p:txBody>
-              <a:bodyPr/>
-              <a:lstStyle/>
-              <a:p>
-                <a:r>
-                  <a:rPr lang="zh-CN" altLang="en-US">
-                    <a:noFill/>
-                  </a:rPr>
-                  <a:t> </a:t>
-                </a:r>
-              </a:p>
-            </p:txBody>
-          </p:sp>
-        </mc:Fallback>
-      </mc:AlternateContent>
-      <p:sp>
-        <p:nvSpPr>
-          <p:cNvPr id="29" name="Rounded Rectangle 28"/>
+                      <m:r>
+                        <m:rPr>
+                          <m:sty m:val="p"/>
+                        </m:rPr>
+                        <a:rPr lang="en-US" sz="1700" dirty="0">
+                          <a:solidFill>
+                            <a:srgbClr val="1F3046"/>
+                          </a:solidFill>
+                          <a:latin typeface="Cambria Math"/>
+                        </a:rPr>
+                        <m:t>n</m:t>
+                      </m:r>
+                      <m:r>
+                        <m:rPr>
+                          <m:sty m:val="p"/>
+                        </m:rPr>
+                        <a:rPr lang="en-US" sz="1700" dirty="0">
+                          <a:solidFill>
+                            <a:srgbClr val="1F3046"/>
+                          </a:solidFill>
+                          <a:latin typeface="Cambria Math"/>
+                        </a:rPr>
+                        <m:t>f</m:t>
+                      </m:r>
+                      <m:r>
+                        <m:rPr>
+                          <m:sty m:val="p"/>
+                        </m:rPr>
+                        <a:rPr lang="en-US" sz="1700" dirty="0">
+                          <a:solidFill>
+                            <a:srgbClr val="1F3046"/>
+                          </a:solidFill>
+                          <a:latin typeface="Cambria Math"/>
+                        </a:rPr>
+                        <m:t>e</m:t>
+                      </m:r>
+                      <m:r>
+                        <m:rPr>
+                          <m:sty m:val="p"/>
+                        </m:rPr>
+                        <a:rPr lang="en-US" sz="1700" dirty="0">
+                          <a:solidFill>
+                            <a:srgbClr val="1F3046"/>
+                          </a:solidFill>
+                          <a:latin typeface="Cambria Math"/>
+                        </a:rPr>
+                        <m:t>r</m:t>
+                      </m:r>
+                    </m:sub>
+                  </m:sSub>
+                </m:oMath>
+              </m:oMathPara>
+            </a14:m>
+          </a:p>
+        </p:txBody>
+      </p:sp>
+      <p:sp>
+        <p:nvSpPr>
+          <p:cNvPr id="66" name="Rounded Rectangle 65"/>
           <p:cNvSpPr/>
           <p:nvPr/>
         </p:nvSpPr>
@@ -28042,7 +27591,7 @@
       </p:sp>
       <p:sp>
         <p:nvSpPr>
-          <p:cNvPr id="30" name="TextBox 29"/>
+          <p:cNvPr id="67" name="TextBox 66"/>
           <p:cNvSpPr txBox="1"/>
           <p:nvPr/>
         </p:nvSpPr>
@@ -28057,7 +27606,7 @@
           <a:noFill/>
         </p:spPr>
         <p:txBody>
-          <a:bodyPr wrap="square" lIns="128016" tIns="73152" rIns="128016" bIns="54864" anchor="ctr">
+          <a:bodyPr wrap="square" lIns="128016" rIns="128016" tIns="73152" bIns="54864" anchor="ctr">
             <a:spAutoFit/>
           </a:bodyPr>
           <a:lstStyle/>
@@ -28068,163 +27617,697 @@
                 <a:solidFill>
                   <a:srgbClr val="2F6FAE"/>
                 </a:solidFill>
-                <a:latin typeface="Arial" panose="020B0604020202020204"/>
+                <a:latin typeface="Arial"/>
               </a:rPr>
               <a:t>1   Every flow runs exactly once</a:t>
             </a:r>
-            <a:endParaRPr sz="1070" b="1">
-              <a:solidFill>
-                <a:srgbClr val="2F6FAE"/>
-              </a:solidFill>
-              <a:latin typeface="Arial" panose="020B0604020202020204"/>
-            </a:endParaRPr>
-          </a:p>
-        </p:txBody>
-      </p:sp>
-      <mc:AlternateContent xmlns:mc="http://schemas.openxmlformats.org/markup-compatibility/2006">
-        <mc:Choice xmlns:a14="http://schemas.microsoft.com/office/drawing/2010/main" Requires="a14">
-          <p:sp>
-            <p:nvSpPr>
-              <p:cNvPr id="31" name="TextBox 30"/>
-              <p:cNvSpPr txBox="1"/>
-              <p:nvPr/>
-            </p:nvSpPr>
-            <p:spPr>
-              <a:xfrm>
-                <a:off x="6355080" y="2377440"/>
-                <a:ext cx="4800600" cy="457200"/>
-              </a:xfrm>
-              <a:prstGeom prst="rect">
-                <a:avLst/>
-              </a:prstGeom>
-              <a:noFill/>
-            </p:spPr>
-            <p:txBody>
-              <a:bodyPr wrap="none" anchor="ctr">
-                <a:spAutoFit/>
-              </a:bodyPr>
-              <a:lstStyle/>
-              <a:p>
-                <a:pPr algn="ctr"/>
-                <a14:m>
-                  <m:oMathPara xmlns:m="http://schemas.openxmlformats.org/officeDocument/2006/math">
-                    <m:oMathParaPr>
-                      <m:jc m:val="center"/>
-                    </m:oMathParaPr>
-                    <m:oMath xmlns:m="http://schemas.openxmlformats.org/officeDocument/2006/math">
-                      <m:nary>
-                        <m:naryPr>
-                          <m:chr m:val="∑"/>
-                          <m:limLoc m:val="undOvr"/>
-                          <m:supHide m:val="on"/>
-                          <m:ctrlPr>
-                            <a:rPr/>
-                          </m:ctrlPr>
-                        </m:naryPr>
+          </a:p>
+        </p:txBody>
+      </p:sp>
+      <p:sp>
+        <p:nvSpPr>
+          <p:cNvPr id="68" name="TextBox 67"/>
+          <p:cNvSpPr txBox="1"/>
+          <p:nvPr/>
+        </p:nvSpPr>
+        <p:spPr>
+          <a:xfrm>
+            <a:off x="6355080" y="2377440"/>
+            <a:ext cx="4800600" cy="457200"/>
+          </a:xfrm>
+          <a:prstGeom prst="rect">
+            <a:avLst/>
+          </a:prstGeom>
+          <a:noFill/>
+        </p:spPr>
+        <p:txBody>
+          <a:bodyPr wrap="none" anchor="ctr">
+            <a:spAutoFit/>
+          </a:bodyPr>
+          <a:lstStyle/>
+          <a:p>
+            <a:pPr algn="ctr"/>
+            <a14:m xmlns:a14="http://schemas.microsoft.com/office/drawing/2010/main">
+              <m:oMathPara xmlns:m="http://schemas.openxmlformats.org/officeDocument/2006/math">
+                <m:oMathParaPr>
+                  <m:jc m:val="center"/>
+                </m:oMathParaPr>
+                <m:oMath>
+                  <m:nary>
+                    <m:naryPr>
+                      <m:chr m:val="∑"/>
+                      <m:limLoc m:val="undOvr"/>
+                      <m:subHide m:val="off"/>
+                      <m:supHide m:val="on"/>
+                    </m:naryPr>
+                    <m:sub>
+                      <m:r>
+                        <a:rPr lang="en-US" sz="1400" dirty="0">
+                          <a:solidFill>
+                            <a:srgbClr val="1F3046"/>
+                          </a:solidFill>
+                          <a:latin typeface="Cambria Math"/>
+                        </a:rPr>
+                        <m:t>b</m:t>
+                      </m:r>
+                      <m:r>
+                        <m:rPr>
+                          <m:sty m:val="p"/>
+                        </m:rPr>
+                        <a:rPr lang="en-US" sz="1400" dirty="0">
+                          <a:solidFill>
+                            <a:srgbClr val="1F3046"/>
+                          </a:solidFill>
+                          <a:latin typeface="Cambria Math"/>
+                        </a:rPr>
+                        <m:t>∈</m:t>
+                      </m:r>
+                      <m:r>
+                        <a:rPr lang="en-US" sz="1400" dirty="0">
+                          <a:solidFill>
+                            <a:srgbClr val="1F3046"/>
+                          </a:solidFill>
+                          <a:latin typeface="Cambria Math"/>
+                        </a:rPr>
+                        <m:t>B</m:t>
+                      </m:r>
+                    </m:sub>
+                    <m:sup>
+                      <m:r>
+                        <a:rPr lang="en-US" sz="1400" dirty="0">
+                          <a:solidFill>
+                            <a:srgbClr val="1F3046"/>
+                          </a:solidFill>
+                          <a:latin typeface="Cambria Math"/>
+                        </a:rPr>
+                        <m:t/>
+                      </m:r>
+                    </m:sup>
+                    <m:e>
+                      <m:sSub>
+                        <m:e>
+                          <m:r>
+                            <a:rPr lang="en-US" sz="1400" dirty="0">
+                              <a:solidFill>
+                                <a:srgbClr val="1F3046"/>
+                              </a:solidFill>
+                              <a:latin typeface="Cambria Math"/>
+                            </a:rPr>
+                            <m:t>x</m:t>
+                          </m:r>
+                        </m:e>
                         <m:sub>
                           <m:r>
                             <a:rPr lang="en-US" sz="1400" dirty="0">
                               <a:solidFill>
                                 <a:srgbClr val="1F3046"/>
                               </a:solidFill>
-                              <a:latin typeface="Cambria Math" panose="02040503050406030204"/>
+                              <a:latin typeface="Cambria Math"/>
                             </a:rPr>
-                            <m:t>𝑏</m:t>
+                            <m:t>p</m:t>
+                          </m:r>
+                          <m:r>
+                            <m:rPr>
+                              <m:sty m:val="p"/>
+                            </m:rPr>
+                            <a:rPr lang="en-US" sz="1400" dirty="0">
+                              <a:solidFill>
+                                <a:srgbClr val="1F3046"/>
+                              </a:solidFill>
+                              <a:latin typeface="Cambria Math"/>
+                            </a:rPr>
+                            <m:t>,</m:t>
                           </m:r>
                           <m:r>
                             <a:rPr lang="en-US" sz="1400" dirty="0">
                               <a:solidFill>
                                 <a:srgbClr val="1F3046"/>
                               </a:solidFill>
-                              <a:latin typeface="Cambria Math" panose="02040503050406030204"/>
+                              <a:latin typeface="Cambria Math"/>
                             </a:rPr>
-                            <m:t>∈</m:t>
+                            <m:t>b</m:t>
                           </m:r>
+                        </m:sub>
+                      </m:sSub>
+                    </m:e>
+                  </m:nary>
+                  <m:r>
+                    <m:rPr>
+                      <m:sty m:val="p"/>
+                    </m:rPr>
+                    <a:rPr lang="en-US" sz="1400" dirty="0">
+                      <a:solidFill>
+                        <a:srgbClr val="1F3046"/>
+                      </a:solidFill>
+                      <a:latin typeface="Cambria Math"/>
+                    </a:rPr>
+                    <m:t>=</m:t>
+                  </m:r>
+                  <m:r>
+                    <a:rPr lang="en-US" sz="1400" dirty="0">
+                      <a:solidFill>
+                        <a:srgbClr val="1F3046"/>
+                      </a:solidFill>
+                      <a:latin typeface="Cambria Math"/>
+                    </a:rPr>
+                    <m:t>1</m:t>
+                  </m:r>
+                  <m:r>
+                    <m:rPr>
+                      <m:sty m:val="p"/>
+                    </m:rPr>
+                    <a:rPr lang="en-US" sz="1400" dirty="0">
+                      <a:solidFill>
+                        <a:srgbClr val="1F3046"/>
+                      </a:solidFill>
+                      <a:latin typeface="Cambria Math"/>
+                    </a:rPr>
+                    <m:t>,</m:t>
+                  </m:r>
+                  <m:r>
+                    <a:rPr lang="en-US" sz="1400" dirty="0">
+                      <a:solidFill>
+                        <a:srgbClr val="1F3046"/>
+                      </a:solidFill>
+                      <a:latin typeface="Cambria Math"/>
+                    </a:rPr>
+                    <m:t>  </m:t>
+                  </m:r>
+                  <m:r>
+                    <m:rPr>
+                      <m:sty m:val="p"/>
+                    </m:rPr>
+                    <a:rPr lang="en-US" sz="1400" dirty="0">
+                      <a:solidFill>
+                        <a:srgbClr val="1F3046"/>
+                      </a:solidFill>
+                      <a:latin typeface="Cambria Math"/>
+                    </a:rPr>
+                    <m:t>∀</m:t>
+                  </m:r>
+                  <m:r>
+                    <a:rPr lang="en-US" sz="1400" dirty="0">
+                      <a:solidFill>
+                        <a:srgbClr val="1F3046"/>
+                      </a:solidFill>
+                      <a:latin typeface="Cambria Math"/>
+                    </a:rPr>
+                    <m:t>p</m:t>
+                  </m:r>
+                  <m:r>
+                    <m:rPr>
+                      <m:sty m:val="p"/>
+                    </m:rPr>
+                    <a:rPr lang="en-US" sz="1400" dirty="0">
+                      <a:solidFill>
+                        <a:srgbClr val="1F3046"/>
+                      </a:solidFill>
+                      <a:latin typeface="Cambria Math"/>
+                    </a:rPr>
+                    <m:t>∈</m:t>
+                  </m:r>
+                  <m:r>
+                    <a:rPr lang="en-US" sz="1400" dirty="0">
+                      <a:solidFill>
+                        <a:srgbClr val="1F3046"/>
+                      </a:solidFill>
+                      <a:latin typeface="Cambria Math"/>
+                    </a:rPr>
+                    <m:t>P</m:t>
+                  </m:r>
+                </m:oMath>
+              </m:oMathPara>
+            </a14:m>
+          </a:p>
+        </p:txBody>
+      </p:sp>
+      <p:sp>
+        <p:nvSpPr>
+          <p:cNvPr id="69" name="Rounded Rectangle 68"/>
+          <p:cNvSpPr/>
+          <p:nvPr/>
+        </p:nvSpPr>
+        <p:spPr>
+          <a:xfrm>
+            <a:off x="3730752" y="3035808"/>
+            <a:ext cx="7772400" cy="640080"/>
+          </a:xfrm>
+          <a:prstGeom prst="roundRect">
+            <a:avLst/>
+          </a:prstGeom>
+          <a:solidFill>
+            <a:srgbClr val="FFFFFF"/>
+          </a:solidFill>
+          <a:ln w="17780">
+            <a:solidFill>
+              <a:srgbClr val="7D48A1"/>
+            </a:solidFill>
+          </a:ln>
+        </p:spPr>
+        <p:style>
+          <a:lnRef idx="1">
+            <a:schemeClr val="accent1"/>
+          </a:lnRef>
+          <a:fillRef idx="3">
+            <a:schemeClr val="accent1"/>
+          </a:fillRef>
+          <a:effectRef idx="2">
+            <a:schemeClr val="accent1"/>
+          </a:effectRef>
+          <a:fontRef idx="minor">
+            <a:schemeClr val="lt1"/>
+          </a:fontRef>
+        </p:style>
+        <p:txBody>
+          <a:bodyPr rtlCol="0" anchor="ctr"/>
+          <a:lstStyle/>
+          <a:p>
+            <a:pPr algn="ctr"/>
+          </a:p>
+        </p:txBody>
+      </p:sp>
+      <p:sp>
+        <p:nvSpPr>
+          <p:cNvPr id="70" name="TextBox 69"/>
+          <p:cNvSpPr txBox="1"/>
+          <p:nvPr/>
+        </p:nvSpPr>
+        <p:spPr>
+          <a:xfrm>
+            <a:off x="3913632" y="3108960"/>
+            <a:ext cx="2651760" cy="457200"/>
+          </a:xfrm>
+          <a:prstGeom prst="rect">
+            <a:avLst/>
+          </a:prstGeom>
+          <a:noFill/>
+        </p:spPr>
+        <p:txBody>
+          <a:bodyPr wrap="square" lIns="128016" rIns="128016" tIns="73152" bIns="54864" anchor="ctr">
+            <a:spAutoFit/>
+          </a:bodyPr>
+          <a:lstStyle/>
+          <a:p>
+            <a:pPr algn="l"/>
+            <a:r>
+              <a:rPr sz="1070" b="1">
+                <a:solidFill>
+                  <a:srgbClr val="7D48A1"/>
+                </a:solidFill>
+                <a:latin typeface="Arial"/>
+              </a:rPr>
+              <a:t>2   At most one peer per rank and batch</a:t>
+            </a:r>
+          </a:p>
+        </p:txBody>
+      </p:sp>
+      <p:sp>
+        <p:nvSpPr>
+          <p:cNvPr id="71" name="TextBox 70"/>
+          <p:cNvSpPr txBox="1"/>
+          <p:nvPr/>
+        </p:nvSpPr>
+        <p:spPr>
+          <a:xfrm>
+            <a:off x="6355080" y="3108960"/>
+            <a:ext cx="4800600" cy="457200"/>
+          </a:xfrm>
+          <a:prstGeom prst="rect">
+            <a:avLst/>
+          </a:prstGeom>
+          <a:noFill/>
+        </p:spPr>
+        <p:txBody>
+          <a:bodyPr wrap="none" anchor="ctr">
+            <a:spAutoFit/>
+          </a:bodyPr>
+          <a:lstStyle/>
+          <a:p>
+            <a:pPr algn="ctr"/>
+            <a14:m xmlns:a14="http://schemas.microsoft.com/office/drawing/2010/main">
+              <m:oMathPara xmlns:m="http://schemas.openxmlformats.org/officeDocument/2006/math">
+                <m:oMathParaPr>
+                  <m:jc m:val="center"/>
+                </m:oMathParaPr>
+                <m:oMath>
+                  <m:nary>
+                    <m:naryPr>
+                      <m:chr m:val="∑"/>
+                      <m:limLoc m:val="undOvr"/>
+                      <m:subHide m:val="off"/>
+                      <m:supHide m:val="on"/>
+                    </m:naryPr>
+                    <m:sub>
+                      <m:r>
+                        <a:rPr lang="en-US" sz="1300" dirty="0">
+                          <a:solidFill>
+                            <a:srgbClr val="1F3046"/>
+                          </a:solidFill>
+                          <a:latin typeface="Cambria Math"/>
+                        </a:rPr>
+                        <m:t>p</m:t>
+                      </m:r>
+                      <m:r>
+                        <m:rPr>
+                          <m:sty m:val="p"/>
+                        </m:rPr>
+                        <a:rPr lang="en-US" sz="1300" dirty="0">
+                          <a:solidFill>
+                            <a:srgbClr val="1F3046"/>
+                          </a:solidFill>
+                          <a:latin typeface="Cambria Math"/>
+                        </a:rPr>
+                        <m:t>:</m:t>
+                      </m:r>
+                      <m:r>
+                        <a:rPr lang="en-US" sz="1300" dirty="0">
+                          <a:solidFill>
+                            <a:srgbClr val="1F3046"/>
+                          </a:solidFill>
+                          <a:latin typeface="Cambria Math"/>
+                        </a:rPr>
+                        <m:t>r</m:t>
+                      </m:r>
+                      <m:r>
+                        <m:rPr>
+                          <m:sty m:val="p"/>
+                        </m:rPr>
+                        <a:rPr lang="en-US" sz="1300" dirty="0">
+                          <a:solidFill>
+                            <a:srgbClr val="1F3046"/>
+                          </a:solidFill>
+                          <a:latin typeface="Cambria Math"/>
+                        </a:rPr>
+                        <m:t>∈</m:t>
+                      </m:r>
+                      <m:r>
+                        <a:rPr lang="en-US" sz="1300" dirty="0">
+                          <a:solidFill>
+                            <a:srgbClr val="1F3046"/>
+                          </a:solidFill>
+                          <a:latin typeface="Cambria Math"/>
+                        </a:rPr>
+                        <m:t>p</m:t>
+                      </m:r>
+                    </m:sub>
+                    <m:sup>
+                      <m:r>
+                        <a:rPr lang="en-US" sz="1300" dirty="0">
+                          <a:solidFill>
+                            <a:srgbClr val="1F3046"/>
+                          </a:solidFill>
+                          <a:latin typeface="Cambria Math"/>
+                        </a:rPr>
+                        <m:t/>
+                      </m:r>
+                    </m:sup>
+                    <m:e>
+                      <m:sSub>
+                        <m:e>
                           <m:r>
-                            <a:rPr lang="en-US" sz="1400" dirty="0">
+                            <a:rPr lang="en-US" sz="1300" dirty="0">
                               <a:solidFill>
                                 <a:srgbClr val="1F3046"/>
                               </a:solidFill>
-                              <a:latin typeface="Cambria Math" panose="02040503050406030204"/>
+                              <a:latin typeface="Cambria Math"/>
                             </a:rPr>
-                            <m:t>𝐵</m:t>
+                            <m:t>x</m:t>
+                          </m:r>
+                        </m:e>
+                        <m:sub>
+                          <m:r>
+                            <a:rPr lang="en-US" sz="1300" dirty="0">
+                              <a:solidFill>
+                                <a:srgbClr val="1F3046"/>
+                              </a:solidFill>
+                              <a:latin typeface="Cambria Math"/>
+                            </a:rPr>
+                            <m:t>p</m:t>
+                          </m:r>
+                          <m:r>
+                            <m:rPr>
+                              <m:sty m:val="p"/>
+                            </m:rPr>
+                            <a:rPr lang="en-US" sz="1300" dirty="0">
+                              <a:solidFill>
+                                <a:srgbClr val="1F3046"/>
+                              </a:solidFill>
+                              <a:latin typeface="Cambria Math"/>
+                            </a:rPr>
+                            <m:t>,</m:t>
+                          </m:r>
+                          <m:r>
+                            <a:rPr lang="en-US" sz="1300" dirty="0">
+                              <a:solidFill>
+                                <a:srgbClr val="1F3046"/>
+                              </a:solidFill>
+                              <a:latin typeface="Cambria Math"/>
+                            </a:rPr>
+                            <m:t>b</m:t>
                           </m:r>
                         </m:sub>
-                        <m:sup/>
-                        <m:e>
-                          <m:sSub>
-                            <m:sSubPr>
-                              <m:ctrlPr>
-                                <a:rPr/>
-                              </m:ctrlPr>
-                            </m:sSubPr>
-                            <m:e>
-                              <m:r>
-                                <a:rPr lang="en-US" sz="1400" dirty="0">
-                                  <a:solidFill>
-                                    <a:srgbClr val="1F3046"/>
-                                  </a:solidFill>
-                                  <a:latin typeface="Cambria Math" panose="02040503050406030204"/>
-                                </a:rPr>
-                                <m:t>𝑥</m:t>
-                              </m:r>
-                            </m:e>
-                            <m:sub>
-                              <m:r>
-                                <a:rPr lang="en-US" sz="1400" dirty="0">
-                                  <a:solidFill>
-                                    <a:srgbClr val="1F3046"/>
-                                  </a:solidFill>
-                                  <a:latin typeface="Cambria Math" panose="02040503050406030204"/>
-                                </a:rPr>
-                                <m:t>𝑝</m:t>
-                              </m:r>
-                              <m:r>
-                                <a:rPr lang="en-US" sz="1400" dirty="0">
-                                  <a:solidFill>
-                                    <a:srgbClr val="1F3046"/>
-                                  </a:solidFill>
-                                  <a:latin typeface="Cambria Math" panose="02040503050406030204"/>
-                                </a:rPr>
-                                <m:t>,</m:t>
-                              </m:r>
-                              <m:r>
-                                <a:rPr lang="en-US" sz="1400" dirty="0">
-                                  <a:solidFill>
-                                    <a:srgbClr val="1F3046"/>
-                                  </a:solidFill>
-                                  <a:latin typeface="Cambria Math" panose="02040503050406030204"/>
-                                </a:rPr>
-                                <m:t>𝑏</m:t>
-                              </m:r>
-                            </m:sub>
-                          </m:sSub>
-                        </m:e>
-                      </m:nary>
+                      </m:sSub>
+                    </m:e>
+                  </m:nary>
+                  <m:r>
+                    <m:rPr>
+                      <m:sty m:val="p"/>
+                    </m:rPr>
+                    <a:rPr lang="en-US" sz="1300" dirty="0">
+                      <a:solidFill>
+                        <a:srgbClr val="1F3046"/>
+                      </a:solidFill>
+                      <a:latin typeface="Cambria Math"/>
+                    </a:rPr>
+                    <m:t>≤</m:t>
+                  </m:r>
+                  <m:r>
+                    <a:rPr lang="en-US" sz="1300" dirty="0">
+                      <a:solidFill>
+                        <a:srgbClr val="1F3046"/>
+                      </a:solidFill>
+                      <a:latin typeface="Cambria Math"/>
+                    </a:rPr>
+                    <m:t>1</m:t>
+                  </m:r>
+                  <m:r>
+                    <m:rPr>
+                      <m:sty m:val="p"/>
+                    </m:rPr>
+                    <a:rPr lang="en-US" sz="1300" dirty="0">
+                      <a:solidFill>
+                        <a:srgbClr val="1F3046"/>
+                      </a:solidFill>
+                      <a:latin typeface="Cambria Math"/>
+                    </a:rPr>
+                    <m:t>,</m:t>
+                  </m:r>
+                  <m:r>
+                    <a:rPr lang="en-US" sz="1300" dirty="0">
+                      <a:solidFill>
+                        <a:srgbClr val="1F3046"/>
+                      </a:solidFill>
+                      <a:latin typeface="Cambria Math"/>
+                    </a:rPr>
+                    <m:t>  </m:t>
+                  </m:r>
+                  <m:r>
+                    <m:rPr>
+                      <m:sty m:val="p"/>
+                    </m:rPr>
+                    <a:rPr lang="en-US" sz="1300" dirty="0">
+                      <a:solidFill>
+                        <a:srgbClr val="1F3046"/>
+                      </a:solidFill>
+                      <a:latin typeface="Cambria Math"/>
+                    </a:rPr>
+                    <m:t>∀</m:t>
+                  </m:r>
+                  <m:r>
+                    <a:rPr lang="en-US" sz="1300" dirty="0">
+                      <a:solidFill>
+                        <a:srgbClr val="1F3046"/>
+                      </a:solidFill>
+                      <a:latin typeface="Cambria Math"/>
+                    </a:rPr>
+                    <m:t>r</m:t>
+                  </m:r>
+                  <m:r>
+                    <m:rPr>
+                      <m:sty m:val="p"/>
+                    </m:rPr>
+                    <a:rPr lang="en-US" sz="1300" dirty="0">
+                      <a:solidFill>
+                        <a:srgbClr val="1F3046"/>
+                      </a:solidFill>
+                      <a:latin typeface="Cambria Math"/>
+                    </a:rPr>
+                    <m:t>,</m:t>
+                  </m:r>
+                  <m:r>
+                    <a:rPr lang="en-US" sz="1300" dirty="0">
+                      <a:solidFill>
+                        <a:srgbClr val="1F3046"/>
+                      </a:solidFill>
+                      <a:latin typeface="Cambria Math"/>
+                    </a:rPr>
+                    <m:t> </m:t>
+                  </m:r>
+                  <m:r>
+                    <a:rPr lang="en-US" sz="1300" dirty="0">
+                      <a:solidFill>
+                        <a:srgbClr val="1F3046"/>
+                      </a:solidFill>
+                      <a:latin typeface="Cambria Math"/>
+                    </a:rPr>
+                    <m:t>b</m:t>
+                  </m:r>
+                </m:oMath>
+              </m:oMathPara>
+            </a14:m>
+          </a:p>
+        </p:txBody>
+      </p:sp>
+      <p:sp>
+        <p:nvSpPr>
+          <p:cNvPr id="72" name="Rounded Rectangle 71"/>
+          <p:cNvSpPr/>
+          <p:nvPr/>
+        </p:nvSpPr>
+        <p:spPr>
+          <a:xfrm>
+            <a:off x="3730752" y="3767328"/>
+            <a:ext cx="7772400" cy="640080"/>
+          </a:xfrm>
+          <a:prstGeom prst="roundRect">
+            <a:avLst/>
+          </a:prstGeom>
+          <a:solidFill>
+            <a:srgbClr val="FFFFFF"/>
+          </a:solidFill>
+          <a:ln w="17780">
+            <a:solidFill>
+              <a:srgbClr val="138F5F"/>
+            </a:solidFill>
+          </a:ln>
+        </p:spPr>
+        <p:style>
+          <a:lnRef idx="1">
+            <a:schemeClr val="accent1"/>
+          </a:lnRef>
+          <a:fillRef idx="3">
+            <a:schemeClr val="accent1"/>
+          </a:fillRef>
+          <a:effectRef idx="2">
+            <a:schemeClr val="accent1"/>
+          </a:effectRef>
+          <a:fontRef idx="minor">
+            <a:schemeClr val="lt1"/>
+          </a:fontRef>
+        </p:style>
+        <p:txBody>
+          <a:bodyPr rtlCol="0" anchor="ctr"/>
+          <a:lstStyle/>
+          <a:p>
+            <a:pPr algn="ctr"/>
+          </a:p>
+        </p:txBody>
+      </p:sp>
+      <p:sp>
+        <p:nvSpPr>
+          <p:cNvPr id="73" name="TextBox 72"/>
+          <p:cNvSpPr txBox="1"/>
+          <p:nvPr/>
+        </p:nvSpPr>
+        <p:spPr>
+          <a:xfrm>
+            <a:off x="3913632" y="3840480"/>
+            <a:ext cx="2651760" cy="457200"/>
+          </a:xfrm>
+          <a:prstGeom prst="rect">
+            <a:avLst/>
+          </a:prstGeom>
+          <a:noFill/>
+        </p:spPr>
+        <p:txBody>
+          <a:bodyPr wrap="square" lIns="128016" rIns="128016" tIns="73152" bIns="54864" anchor="ctr">
+            <a:spAutoFit/>
+          </a:bodyPr>
+          <a:lstStyle/>
+          <a:p>
+            <a:pPr algn="l"/>
+            <a:r>
+              <a:rPr sz="1070" b="1">
+                <a:solidFill>
+                  <a:srgbClr val="138F5F"/>
+                </a:solidFill>
+                <a:latin typeface="Arial"/>
+              </a:rPr>
+              <a:t>3   Activate used batches; no gaps</a:t>
+            </a:r>
+          </a:p>
+        </p:txBody>
+      </p:sp>
+      <p:sp>
+        <p:nvSpPr>
+          <p:cNvPr id="74" name="TextBox 73"/>
+          <p:cNvSpPr txBox="1"/>
+          <p:nvPr/>
+        </p:nvSpPr>
+        <p:spPr>
+          <a:xfrm>
+            <a:off x="6355080" y="3840480"/>
+            <a:ext cx="4800600" cy="457200"/>
+          </a:xfrm>
+          <a:prstGeom prst="rect">
+            <a:avLst/>
+          </a:prstGeom>
+          <a:noFill/>
+        </p:spPr>
+        <p:txBody>
+          <a:bodyPr wrap="none" anchor="ctr">
+            <a:spAutoFit/>
+          </a:bodyPr>
+          <a:lstStyle/>
+          <a:p>
+            <a:pPr algn="ctr"/>
+            <a14:m xmlns:a14="http://schemas.microsoft.com/office/drawing/2010/main">
+              <m:oMathPara xmlns:m="http://schemas.openxmlformats.org/officeDocument/2006/math">
+                <m:oMathParaPr>
+                  <m:jc m:val="center"/>
+                </m:oMathParaPr>
+                <m:oMath>
+                  <m:sSub>
+                    <m:e>
                       <m:r>
                         <a:rPr lang="en-US" sz="1400" dirty="0">
                           <a:solidFill>
                             <a:srgbClr val="1F3046"/>
                           </a:solidFill>
-                          <a:latin typeface="Cambria Math" panose="02040503050406030204"/>
+                          <a:latin typeface="Cambria Math"/>
                         </a:rPr>
-                        <m:t>=</m:t>
+                        <m:t>x</m:t>
                       </m:r>
+                    </m:e>
+                    <m:sub>
                       <m:r>
                         <a:rPr lang="en-US" sz="1400" dirty="0">
                           <a:solidFill>
                             <a:srgbClr val="1F3046"/>
                           </a:solidFill>
-                          <a:latin typeface="Cambria Math" panose="02040503050406030204"/>
+                          <a:latin typeface="Cambria Math"/>
                         </a:rPr>
-                        <m:t>1</m:t>
+                        <m:t>p</m:t>
                       </m:r>
                       <m:r>
+                        <m:rPr>
+                          <m:sty m:val="p"/>
+                        </m:rPr>
                         <a:rPr lang="en-US" sz="1400" dirty="0">
                           <a:solidFill>
                             <a:srgbClr val="1F3046"/>
                           </a:solidFill>
-                          <a:latin typeface="Cambria Math" panose="02040503050406030204"/>
+                          <a:latin typeface="Cambria Math"/>
                         </a:rPr>
                         <m:t>,</m:t>
                       </m:r>
@@ -28233,34 +28316,348 @@
                           <a:solidFill>
                             <a:srgbClr val="1F3046"/>
                           </a:solidFill>
-                          <a:latin typeface="Cambria Math" panose="02040503050406030204"/>
+                          <a:latin typeface="Cambria Math"/>
                         </a:rPr>
-                        <m:t>  </m:t>
+                        <m:t>b</m:t>
+                      </m:r>
+                    </m:sub>
+                  </m:sSub>
+                  <m:r>
+                    <m:rPr>
+                      <m:sty m:val="p"/>
+                    </m:rPr>
+                    <a:rPr lang="en-US" sz="1400" dirty="0">
+                      <a:solidFill>
+                        <a:srgbClr val="1F3046"/>
+                      </a:solidFill>
+                      <a:latin typeface="Cambria Math"/>
+                    </a:rPr>
+                    <m:t>≤</m:t>
+                  </m:r>
+                  <m:sSub>
+                    <m:e>
+                      <m:r>
+                        <a:rPr lang="en-US" sz="1400" dirty="0">
+                          <a:solidFill>
+                            <a:srgbClr val="1F3046"/>
+                          </a:solidFill>
+                          <a:latin typeface="Cambria Math"/>
+                        </a:rPr>
+                        <m:t>y</m:t>
+                      </m:r>
+                    </m:e>
+                    <m:sub>
+                      <m:r>
+                        <a:rPr lang="en-US" sz="1400" dirty="0">
+                          <a:solidFill>
+                            <a:srgbClr val="1F3046"/>
+                          </a:solidFill>
+                          <a:latin typeface="Cambria Math"/>
+                        </a:rPr>
+                        <m:t>b</m:t>
+                      </m:r>
+                    </m:sub>
+                  </m:sSub>
+                  <m:r>
+                    <m:rPr>
+                      <m:sty m:val="p"/>
+                    </m:rPr>
+                    <a:rPr lang="en-US" sz="1400" dirty="0">
+                      <a:solidFill>
+                        <a:srgbClr val="1F3046"/>
+                      </a:solidFill>
+                      <a:latin typeface="Cambria Math"/>
+                    </a:rPr>
+                    <m:t>,</m:t>
+                  </m:r>
+                  <m:r>
+                    <a:rPr lang="en-US" sz="1400" dirty="0">
+                      <a:solidFill>
+                        <a:srgbClr val="1F3046"/>
+                      </a:solidFill>
+                      <a:latin typeface="Cambria Math"/>
+                    </a:rPr>
+                    <m:t>  </m:t>
+                  </m:r>
+                  <m:sSub>
+                    <m:e>
+                      <m:r>
+                        <a:rPr lang="en-US" sz="1400" dirty="0">
+                          <a:solidFill>
+                            <a:srgbClr val="1F3046"/>
+                          </a:solidFill>
+                          <a:latin typeface="Cambria Math"/>
+                        </a:rPr>
+                        <m:t>y</m:t>
+                      </m:r>
+                    </m:e>
+                    <m:sub>
+                      <m:r>
+                        <a:rPr lang="en-US" sz="1400" dirty="0">
+                          <a:solidFill>
+                            <a:srgbClr val="1F3046"/>
+                          </a:solidFill>
+                          <a:latin typeface="Cambria Math"/>
+                        </a:rPr>
+                        <m:t>b</m:t>
+                      </m:r>
+                    </m:sub>
+                  </m:sSub>
+                  <m:r>
+                    <m:rPr>
+                      <m:sty m:val="p"/>
+                    </m:rPr>
+                    <a:rPr lang="en-US" sz="1400" dirty="0">
+                      <a:solidFill>
+                        <a:srgbClr val="1F3046"/>
+                      </a:solidFill>
+                      <a:latin typeface="Cambria Math"/>
+                    </a:rPr>
+                    <m:t>≥</m:t>
+                  </m:r>
+                  <m:sSub>
+                    <m:e>
+                      <m:r>
+                        <a:rPr lang="en-US" sz="1400" dirty="0">
+                          <a:solidFill>
+                            <a:srgbClr val="1F3046"/>
+                          </a:solidFill>
+                          <a:latin typeface="Cambria Math"/>
+                        </a:rPr>
+                        <m:t>y</m:t>
+                      </m:r>
+                    </m:e>
+                    <m:sub>
+                      <m:r>
+                        <a:rPr lang="en-US" sz="1400" dirty="0">
+                          <a:solidFill>
+                            <a:srgbClr val="1F3046"/>
+                          </a:solidFill>
+                          <a:latin typeface="Cambria Math"/>
+                        </a:rPr>
+                        <m:t>b</m:t>
+                      </m:r>
+                      <m:r>
+                        <m:rPr>
+                          <m:sty m:val="p"/>
+                        </m:rPr>
+                        <a:rPr lang="en-US" sz="1400" dirty="0">
+                          <a:solidFill>
+                            <a:srgbClr val="1F3046"/>
+                          </a:solidFill>
+                          <a:latin typeface="Cambria Math"/>
+                        </a:rPr>
+                        <m:t>+</m:t>
                       </m:r>
                       <m:r>
                         <a:rPr lang="en-US" sz="1400" dirty="0">
                           <a:solidFill>
                             <a:srgbClr val="1F3046"/>
                           </a:solidFill>
-                          <a:latin typeface="Cambria Math" panose="02040503050406030204"/>
+                          <a:latin typeface="Cambria Math"/>
                         </a:rPr>
-                        <m:t>∀</m:t>
+                        <m:t>1</m:t>
+                      </m:r>
+                    </m:sub>
+                  </m:sSub>
+                </m:oMath>
+              </m:oMathPara>
+            </a14:m>
+          </a:p>
+        </p:txBody>
+      </p:sp>
+      <p:sp>
+        <p:nvSpPr>
+          <p:cNvPr id="75" name="Rounded Rectangle 74"/>
+          <p:cNvSpPr/>
+          <p:nvPr/>
+        </p:nvSpPr>
+        <p:spPr>
+          <a:xfrm>
+            <a:off x="3730752" y="4498848"/>
+            <a:ext cx="7772400" cy="640080"/>
+          </a:xfrm>
+          <a:prstGeom prst="roundRect">
+            <a:avLst/>
+          </a:prstGeom>
+          <a:solidFill>
+            <a:srgbClr val="FFFFFF"/>
+          </a:solidFill>
+          <a:ln w="17780">
+            <a:solidFill>
+              <a:srgbClr val="E67E22"/>
+            </a:solidFill>
+          </a:ln>
+        </p:spPr>
+        <p:style>
+          <a:lnRef idx="1">
+            <a:schemeClr val="accent1"/>
+          </a:lnRef>
+          <a:fillRef idx="3">
+            <a:schemeClr val="accent1"/>
+          </a:fillRef>
+          <a:effectRef idx="2">
+            <a:schemeClr val="accent1"/>
+          </a:effectRef>
+          <a:fontRef idx="minor">
+            <a:schemeClr val="lt1"/>
+          </a:fontRef>
+        </p:style>
+        <p:txBody>
+          <a:bodyPr rtlCol="0" anchor="ctr"/>
+          <a:lstStyle/>
+          <a:p>
+            <a:pPr algn="ctr"/>
+          </a:p>
+        </p:txBody>
+      </p:sp>
+      <p:sp>
+        <p:nvSpPr>
+          <p:cNvPr id="76" name="TextBox 75"/>
+          <p:cNvSpPr txBox="1"/>
+          <p:nvPr/>
+        </p:nvSpPr>
+        <p:spPr>
+          <a:xfrm>
+            <a:off x="3913632" y="4572000"/>
+            <a:ext cx="2651760" cy="457200"/>
+          </a:xfrm>
+          <a:prstGeom prst="rect">
+            <a:avLst/>
+          </a:prstGeom>
+          <a:noFill/>
+        </p:spPr>
+        <p:txBody>
+          <a:bodyPr wrap="square" lIns="128016" rIns="128016" tIns="73152" bIns="54864" anchor="ctr">
+            <a:spAutoFit/>
+          </a:bodyPr>
+          <a:lstStyle/>
+          <a:p>
+            <a:pPr algn="l"/>
+            <a:r>
+              <a:rPr sz="1070" b="1">
+                <a:solidFill>
+                  <a:srgbClr val="E67E22"/>
+                </a:solidFill>
+                <a:latin typeface="Arial"/>
+              </a:rPr>
+              <a:t>4   Migration load on each link</a:t>
+            </a:r>
+          </a:p>
+        </p:txBody>
+      </p:sp>
+      <p:sp>
+        <p:nvSpPr>
+          <p:cNvPr id="77" name="TextBox 76"/>
+          <p:cNvSpPr txBox="1"/>
+          <p:nvPr/>
+        </p:nvSpPr>
+        <p:spPr>
+          <a:xfrm>
+            <a:off x="6355080" y="4572000"/>
+            <a:ext cx="4800600" cy="457200"/>
+          </a:xfrm>
+          <a:prstGeom prst="rect">
+            <a:avLst/>
+          </a:prstGeom>
+          <a:noFill/>
+        </p:spPr>
+        <p:txBody>
+          <a:bodyPr wrap="none" anchor="ctr">
+            <a:spAutoFit/>
+          </a:bodyPr>
+          <a:lstStyle/>
+          <a:p>
+            <a:pPr algn="ctr"/>
+            <a14:m xmlns:a14="http://schemas.microsoft.com/office/drawing/2010/main">
+              <m:oMathPara xmlns:m="http://schemas.openxmlformats.org/officeDocument/2006/math">
+                <m:oMathParaPr>
+                  <m:jc m:val="center"/>
+                </m:oMathParaPr>
+                <m:oMath>
+                  <m:sSub>
+                    <m:e>
+                      <m:r>
+                        <a:rPr lang="en-US" sz="1400" dirty="0">
+                          <a:solidFill>
+                            <a:srgbClr val="1F3046"/>
+                          </a:solidFill>
+                          <a:latin typeface="Cambria Math"/>
+                        </a:rPr>
+                        <m:t>L</m:t>
+                      </m:r>
+                    </m:e>
+                    <m:sub>
+                      <m:r>
+                        <a:rPr lang="en-US" sz="1400" dirty="0">
+                          <a:solidFill>
+                            <a:srgbClr val="1F3046"/>
+                          </a:solidFill>
+                          <a:latin typeface="Cambria Math"/>
+                        </a:rPr>
+                        <m:t>e</m:t>
+                      </m:r>
+                      <m:r>
+                        <m:rPr>
+                          <m:sty m:val="p"/>
+                        </m:rPr>
+                        <a:rPr lang="en-US" sz="1400" dirty="0">
+                          <a:solidFill>
+                            <a:srgbClr val="1F3046"/>
+                          </a:solidFill>
+                          <a:latin typeface="Cambria Math"/>
+                        </a:rPr>
+                        <m:t>,</m:t>
                       </m:r>
                       <m:r>
                         <a:rPr lang="en-US" sz="1400" dirty="0">
                           <a:solidFill>
                             <a:srgbClr val="1F3046"/>
                           </a:solidFill>
-                          <a:latin typeface="Cambria Math" panose="02040503050406030204"/>
+                          <a:latin typeface="Cambria Math"/>
                         </a:rPr>
-                        <m:t>𝑝</m:t>
+                        <m:t>b</m:t>
                       </m:r>
+                    </m:sub>
+                  </m:sSub>
+                  <m:r>
+                    <m:rPr>
+                      <m:sty m:val="p"/>
+                    </m:rPr>
+                    <a:rPr lang="en-US" sz="1400" dirty="0">
+                      <a:solidFill>
+                        <a:srgbClr val="1F3046"/>
+                      </a:solidFill>
+                      <a:latin typeface="Cambria Math"/>
+                    </a:rPr>
+                    <m:t>=</m:t>
+                  </m:r>
+                  <m:nary>
+                    <m:naryPr>
+                      <m:chr m:val="∑"/>
+                      <m:limLoc m:val="undOvr"/>
+                      <m:subHide m:val="off"/>
+                      <m:supHide m:val="on"/>
+                    </m:naryPr>
+                    <m:sub>
                       <m:r>
                         <a:rPr lang="en-US" sz="1400" dirty="0">
                           <a:solidFill>
                             <a:srgbClr val="1F3046"/>
                           </a:solidFill>
-                          <a:latin typeface="Cambria Math" panose="02040503050406030204"/>
+                          <a:latin typeface="Cambria Math"/>
+                        </a:rPr>
+                        <m:t>p</m:t>
+                      </m:r>
+                      <m:r>
+                        <m:rPr>
+                          <m:sty m:val="p"/>
+                        </m:rPr>
+                        <a:rPr lang="en-US" sz="1400" dirty="0">
+                          <a:solidFill>
+                            <a:srgbClr val="1F3046"/>
+                          </a:solidFill>
+                          <a:latin typeface="Cambria Math"/>
                         </a:rPr>
                         <m:t>∈</m:t>
                       </m:r>
@@ -28269,416 +28666,154 @@
                           <a:solidFill>
                             <a:srgbClr val="1F3046"/>
                           </a:solidFill>
-                          <a:latin typeface="Cambria Math" panose="02040503050406030204"/>
+                          <a:latin typeface="Cambria Math"/>
                         </a:rPr>
-                        <m:t>𝑃</m:t>
+                        <m:t>P</m:t>
                       </m:r>
-                    </m:oMath>
-                  </m:oMathPara>
-                </a14:m>
-              </a:p>
-            </p:txBody>
-          </p:sp>
-        </mc:Choice>
-        <mc:Fallback>
-          <p:sp>
-            <p:nvSpPr>
-              <p:cNvPr id="31" name="TextBox 30"/>
-              <p:cNvSpPr txBox="1">
-                <a:spLocks noRot="1" noChangeAspect="1" noMove="1" noResize="1" noEditPoints="1" noAdjustHandles="1" noChangeArrowheads="1" noChangeShapeType="1" noTextEdit="1"/>
-              </p:cNvSpPr>
-              <p:nvPr/>
-            </p:nvSpPr>
-            <p:spPr>
-              <a:xfrm>
-                <a:off x="6355080" y="2377440"/>
-                <a:ext cx="4800600" cy="457200"/>
-              </a:xfrm>
-              <a:prstGeom prst="rect">
-                <a:avLst/>
-              </a:prstGeom>
-              <a:blipFill rotWithShape="1">
-                <a:blip r:embed="rId9"/>
-                <a:stretch>
-                  <a:fillRect t="-14167" b="-14444"/>
-                </a:stretch>
-              </a:blipFill>
-            </p:spPr>
-            <p:txBody>
-              <a:bodyPr/>
-              <a:lstStyle/>
-              <a:p>
-                <a:r>
-                  <a:rPr lang="zh-CN" altLang="en-US">
-                    <a:noFill/>
-                  </a:rPr>
-                  <a:t> </a:t>
-                </a:r>
-              </a:p>
-            </p:txBody>
-          </p:sp>
-        </mc:Fallback>
-      </mc:AlternateContent>
-      <p:sp>
-        <p:nvSpPr>
-          <p:cNvPr id="32" name="Rounded Rectangle 31"/>
-          <p:cNvSpPr/>
-          <p:nvPr/>
-        </p:nvSpPr>
-        <p:spPr>
-          <a:xfrm>
-            <a:off x="3730752" y="3035808"/>
-            <a:ext cx="7772400" cy="640080"/>
-          </a:xfrm>
-          <a:prstGeom prst="roundRect">
-            <a:avLst/>
-          </a:prstGeom>
-          <a:solidFill>
-            <a:srgbClr val="FFFFFF"/>
-          </a:solidFill>
-          <a:ln w="17780">
-            <a:solidFill>
-              <a:srgbClr val="7D48A1"/>
-            </a:solidFill>
-          </a:ln>
-        </p:spPr>
-        <p:style>
-          <a:lnRef idx="1">
-            <a:schemeClr val="accent1"/>
-          </a:lnRef>
-          <a:fillRef idx="3">
-            <a:schemeClr val="accent1"/>
-          </a:fillRef>
-          <a:effectRef idx="2">
-            <a:schemeClr val="accent1"/>
-          </a:effectRef>
-          <a:fontRef idx="minor">
-            <a:schemeClr val="lt1"/>
-          </a:fontRef>
-        </p:style>
-        <p:txBody>
-          <a:bodyPr rtlCol="0" anchor="ctr"/>
-          <a:lstStyle/>
-          <a:p>
-            <a:pPr algn="ctr"/>
-          </a:p>
-        </p:txBody>
-      </p:sp>
-      <p:sp>
-        <p:nvSpPr>
-          <p:cNvPr id="33" name="TextBox 32"/>
-          <p:cNvSpPr txBox="1"/>
-          <p:nvPr/>
-        </p:nvSpPr>
-        <p:spPr>
-          <a:xfrm>
-            <a:off x="3913632" y="3108960"/>
-            <a:ext cx="2651760" cy="457200"/>
-          </a:xfrm>
-          <a:prstGeom prst="rect">
-            <a:avLst/>
-          </a:prstGeom>
-          <a:noFill/>
-        </p:spPr>
-        <p:txBody>
-          <a:bodyPr wrap="square" lIns="128016" tIns="73152" rIns="128016" bIns="54864" anchor="ctr">
-            <a:spAutoFit/>
-          </a:bodyPr>
-          <a:lstStyle/>
-          <a:p>
-            <a:pPr algn="l"/>
-            <a:r>
-              <a:rPr sz="1070" b="1">
-                <a:solidFill>
-                  <a:srgbClr val="7D48A1"/>
-                </a:solidFill>
-                <a:latin typeface="Arial" panose="020B0604020202020204"/>
-              </a:rPr>
-              <a:t>2   At most one peer per rank and batch</a:t>
-            </a:r>
-            <a:endParaRPr sz="1070" b="1">
-              <a:solidFill>
-                <a:srgbClr val="7D48A1"/>
-              </a:solidFill>
-              <a:latin typeface="Arial" panose="020B0604020202020204"/>
-            </a:endParaRPr>
-          </a:p>
-        </p:txBody>
-      </p:sp>
-      <mc:AlternateContent xmlns:mc="http://schemas.openxmlformats.org/markup-compatibility/2006">
-        <mc:Choice xmlns:a14="http://schemas.microsoft.com/office/drawing/2010/main" Requires="a14">
-          <p:sp>
-            <p:nvSpPr>
-              <p:cNvPr id="34" name="TextBox 33"/>
-              <p:cNvSpPr txBox="1"/>
-              <p:nvPr/>
-            </p:nvSpPr>
-            <p:spPr>
-              <a:xfrm>
-                <a:off x="6355080" y="3108960"/>
-                <a:ext cx="4800600" cy="457200"/>
-              </a:xfrm>
-              <a:prstGeom prst="rect">
-                <a:avLst/>
-              </a:prstGeom>
-              <a:noFill/>
-            </p:spPr>
-            <p:txBody>
-              <a:bodyPr wrap="none" anchor="ctr">
-                <a:spAutoFit/>
-              </a:bodyPr>
-              <a:lstStyle/>
-              <a:p>
-                <a:pPr algn="ctr"/>
-                <a14:m>
-                  <m:oMathPara xmlns:m="http://schemas.openxmlformats.org/officeDocument/2006/math">
-                    <m:oMathParaPr>
-                      <m:jc m:val="center"/>
-                    </m:oMathParaPr>
-                    <m:oMath xmlns:m="http://schemas.openxmlformats.org/officeDocument/2006/math">
-                      <m:nary>
-                        <m:naryPr>
-                          <m:chr m:val="∑"/>
-                          <m:limLoc m:val="undOvr"/>
-                          <m:supHide m:val="on"/>
-                          <m:ctrlPr>
-                            <a:rPr/>
-                          </m:ctrlPr>
-                        </m:naryPr>
-                        <m:sub>
+                    </m:sub>
+                    <m:sup>
+                      <m:r>
+                        <a:rPr lang="en-US" sz="1400" dirty="0">
+                          <a:solidFill>
+                            <a:srgbClr val="1F3046"/>
+                          </a:solidFill>
+                          <a:latin typeface="Cambria Math"/>
+                        </a:rPr>
+                        <m:t/>
+                      </m:r>
+                    </m:sup>
+                    <m:e>
+                      <m:sSub>
+                        <m:e>
                           <m:r>
-                            <a:rPr lang="en-US" sz="1300" dirty="0">
+                            <a:rPr lang="en-US" sz="1400" dirty="0">
                               <a:solidFill>
                                 <a:srgbClr val="1F3046"/>
                               </a:solidFill>
-                              <a:latin typeface="Cambria Math" panose="02040503050406030204"/>
+                              <a:latin typeface="Cambria Math"/>
                             </a:rPr>
-                            <m:t>𝑝</m:t>
+                            <m:t>w</m:t>
                           </m:r>
+                        </m:e>
+                        <m:sub>
                           <m:r>
-                            <a:rPr lang="en-US" sz="1300" dirty="0">
+                            <a:rPr lang="en-US" sz="1400" dirty="0">
                               <a:solidFill>
                                 <a:srgbClr val="1F3046"/>
                               </a:solidFill>
-                              <a:latin typeface="Cambria Math" panose="02040503050406030204"/>
+                              <a:latin typeface="Cambria Math"/>
                             </a:rPr>
-                            <m:t>:</m:t>
-                          </m:r>
-                          <m:r>
-                            <a:rPr lang="en-US" sz="1300" dirty="0">
-                              <a:solidFill>
-                                <a:srgbClr val="1F3046"/>
-                              </a:solidFill>
-                              <a:latin typeface="Cambria Math" panose="02040503050406030204"/>
-                            </a:rPr>
-                            <m:t>𝑟</m:t>
-                          </m:r>
-                          <m:r>
-                            <a:rPr lang="en-US" sz="1300" dirty="0">
-                              <a:solidFill>
-                                <a:srgbClr val="1F3046"/>
-                              </a:solidFill>
-                              <a:latin typeface="Cambria Math" panose="02040503050406030204"/>
-                            </a:rPr>
-                            <m:t>∈</m:t>
-                          </m:r>
-                          <m:r>
-                            <a:rPr lang="en-US" sz="1300" dirty="0">
-                              <a:solidFill>
-                                <a:srgbClr val="1F3046"/>
-                              </a:solidFill>
-                              <a:latin typeface="Cambria Math" panose="02040503050406030204"/>
-                            </a:rPr>
-                            <m:t>𝑝</m:t>
+                            <m:t>p</m:t>
                           </m:r>
                         </m:sub>
-                        <m:sup/>
-                        <m:e>
-                          <m:sSub>
-                            <m:sSubPr>
-                              <m:ctrlPr>
-                                <a:rPr/>
-                              </m:ctrlPr>
-                            </m:sSubPr>
-                            <m:e>
-                              <m:r>
-                                <a:rPr lang="en-US" sz="1300" dirty="0">
-                                  <a:solidFill>
-                                    <a:srgbClr val="1F3046"/>
-                                  </a:solidFill>
-                                  <a:latin typeface="Cambria Math" panose="02040503050406030204"/>
-                                </a:rPr>
-                                <m:t>𝑥</m:t>
-                              </m:r>
-                            </m:e>
-                            <m:sub>
-                              <m:r>
-                                <a:rPr lang="en-US" sz="1300" dirty="0">
-                                  <a:solidFill>
-                                    <a:srgbClr val="1F3046"/>
-                                  </a:solidFill>
-                                  <a:latin typeface="Cambria Math" panose="02040503050406030204"/>
-                                </a:rPr>
-                                <m:t>𝑝</m:t>
-                              </m:r>
-                              <m:r>
-                                <a:rPr lang="en-US" sz="1300" dirty="0">
-                                  <a:solidFill>
-                                    <a:srgbClr val="1F3046"/>
-                                  </a:solidFill>
-                                  <a:latin typeface="Cambria Math" panose="02040503050406030204"/>
-                                </a:rPr>
-                                <m:t>,</m:t>
-                              </m:r>
-                              <m:r>
-                                <a:rPr lang="en-US" sz="1300" dirty="0">
-                                  <a:solidFill>
-                                    <a:srgbClr val="1F3046"/>
-                                  </a:solidFill>
-                                  <a:latin typeface="Cambria Math" panose="02040503050406030204"/>
-                                </a:rPr>
-                                <m:t>𝑏</m:t>
-                              </m:r>
-                            </m:sub>
-                          </m:sSub>
-                        </m:e>
-                      </m:nary>
+                      </m:sSub>
+                    </m:e>
+                  </m:nary>
+                  <m:sSub>
+                    <m:e>
                       <m:r>
-                        <a:rPr lang="en-US" sz="1300" dirty="0">
+                        <a:rPr lang="en-US" sz="1400" dirty="0">
                           <a:solidFill>
                             <a:srgbClr val="1F3046"/>
                           </a:solidFill>
-                          <a:latin typeface="Cambria Math" panose="02040503050406030204"/>
+                          <a:latin typeface="Cambria Math"/>
                         </a:rPr>
-                        <m:t>≤</m:t>
+                        <m:t>f</m:t>
                       </m:r>
+                    </m:e>
+                    <m:sub>
                       <m:r>
-                        <a:rPr lang="en-US" sz="1300" dirty="0">
+                        <a:rPr lang="en-US" sz="1400" dirty="0">
                           <a:solidFill>
                             <a:srgbClr val="1F3046"/>
                           </a:solidFill>
-                          <a:latin typeface="Cambria Math" panose="02040503050406030204"/>
+                          <a:latin typeface="Cambria Math"/>
                         </a:rPr>
-                        <m:t>1</m:t>
+                        <m:t>p</m:t>
                       </m:r>
                       <m:r>
-                        <a:rPr lang="en-US" sz="1300" dirty="0">
+                        <m:rPr>
+                          <m:sty m:val="p"/>
+                        </m:rPr>
+                        <a:rPr lang="en-US" sz="1400" dirty="0">
                           <a:solidFill>
                             <a:srgbClr val="1F3046"/>
                           </a:solidFill>
-                          <a:latin typeface="Cambria Math" panose="02040503050406030204"/>
+                          <a:latin typeface="Cambria Math"/>
                         </a:rPr>
                         <m:t>,</m:t>
                       </m:r>
                       <m:r>
-                        <a:rPr lang="en-US" sz="1300" dirty="0">
+                        <a:rPr lang="en-US" sz="1400" dirty="0">
                           <a:solidFill>
                             <a:srgbClr val="1F3046"/>
                           </a:solidFill>
-                          <a:latin typeface="Cambria Math" panose="02040503050406030204"/>
+                          <a:latin typeface="Cambria Math"/>
                         </a:rPr>
-                        <m:t>  </m:t>
+                        <m:t>e</m:t>
                       </m:r>
+                    </m:sub>
+                  </m:sSub>
+                  <m:sSub>
+                    <m:e>
                       <m:r>
-                        <a:rPr lang="en-US" sz="1300" dirty="0">
+                        <a:rPr lang="en-US" sz="1400" dirty="0">
                           <a:solidFill>
                             <a:srgbClr val="1F3046"/>
                           </a:solidFill>
-                          <a:latin typeface="Cambria Math" panose="02040503050406030204"/>
+                          <a:latin typeface="Cambria Math"/>
                         </a:rPr>
-                        <m:t>∀</m:t>
+                        <m:t>x</m:t>
                       </m:r>
+                    </m:e>
+                    <m:sub>
                       <m:r>
-                        <a:rPr lang="en-US" sz="1300" dirty="0">
+                        <a:rPr lang="en-US" sz="1400" dirty="0">
                           <a:solidFill>
                             <a:srgbClr val="1F3046"/>
                           </a:solidFill>
-                          <a:latin typeface="Cambria Math" panose="02040503050406030204"/>
+                          <a:latin typeface="Cambria Math"/>
                         </a:rPr>
-                        <m:t>𝑟</m:t>
+                        <m:t>p</m:t>
                       </m:r>
                       <m:r>
-                        <a:rPr lang="en-US" sz="1300" dirty="0">
+                        <m:rPr>
+                          <m:sty m:val="p"/>
+                        </m:rPr>
+                        <a:rPr lang="en-US" sz="1400" dirty="0">
                           <a:solidFill>
                             <a:srgbClr val="1F3046"/>
                           </a:solidFill>
-                          <a:latin typeface="Cambria Math" panose="02040503050406030204"/>
+                          <a:latin typeface="Cambria Math"/>
                         </a:rPr>
                         <m:t>,</m:t>
                       </m:r>
                       <m:r>
-                        <a:rPr lang="en-US" sz="1300" dirty="0">
+                        <a:rPr lang="en-US" sz="1400" dirty="0">
                           <a:solidFill>
                             <a:srgbClr val="1F3046"/>
                           </a:solidFill>
-                          <a:latin typeface="Cambria Math" panose="02040503050406030204"/>
+                          <a:latin typeface="Cambria Math"/>
                         </a:rPr>
-                        <m:t> </m:t>
+                        <m:t>b</m:t>
                       </m:r>
-                      <m:r>
-                        <a:rPr lang="en-US" sz="1300" dirty="0">
-                          <a:solidFill>
-                            <a:srgbClr val="1F3046"/>
-                          </a:solidFill>
-                          <a:latin typeface="Cambria Math" panose="02040503050406030204"/>
-                        </a:rPr>
-                        <m:t>𝑏</m:t>
-                      </m:r>
-                    </m:oMath>
-                  </m:oMathPara>
-                </a14:m>
-              </a:p>
-            </p:txBody>
-          </p:sp>
-        </mc:Choice>
-        <mc:Fallback>
-          <p:sp>
-            <p:nvSpPr>
-              <p:cNvPr id="34" name="TextBox 33"/>
-              <p:cNvSpPr txBox="1">
-                <a:spLocks noRot="1" noChangeAspect="1" noMove="1" noResize="1" noEditPoints="1" noAdjustHandles="1" noChangeArrowheads="1" noChangeShapeType="1" noTextEdit="1"/>
-              </p:cNvSpPr>
-              <p:nvPr/>
-            </p:nvSpPr>
-            <p:spPr>
-              <a:xfrm>
-                <a:off x="6355080" y="3108960"/>
-                <a:ext cx="4800600" cy="457200"/>
-              </a:xfrm>
-              <a:prstGeom prst="rect">
-                <a:avLst/>
-              </a:prstGeom>
-              <a:blipFill rotWithShape="1">
-                <a:blip r:embed="rId10"/>
-                <a:stretch>
-                  <a:fillRect t="-14167" b="-14444"/>
-                </a:stretch>
-              </a:blipFill>
-            </p:spPr>
-            <p:txBody>
-              <a:bodyPr/>
-              <a:lstStyle/>
-              <a:p>
-                <a:r>
-                  <a:rPr lang="zh-CN" altLang="en-US">
-                    <a:noFill/>
-                  </a:rPr>
-                  <a:t> </a:t>
-                </a:r>
-              </a:p>
-            </p:txBody>
-          </p:sp>
-        </mc:Fallback>
-      </mc:AlternateContent>
-      <p:sp>
-        <p:nvSpPr>
-          <p:cNvPr id="35" name="Rounded Rectangle 34"/>
+                    </m:sub>
+                  </m:sSub>
+                </m:oMath>
+              </m:oMathPara>
+            </a14:m>
+          </a:p>
+        </p:txBody>
+      </p:sp>
+      <p:sp>
+        <p:nvSpPr>
+          <p:cNvPr id="78" name="Rounded Rectangle 77"/>
           <p:cNvSpPr/>
           <p:nvPr/>
         </p:nvSpPr>
         <p:spPr>
           <a:xfrm>
-            <a:off x="3730752" y="3767328"/>
+            <a:off x="3730752" y="5230368"/>
             <a:ext cx="7772400" cy="640080"/>
           </a:xfrm>
           <a:prstGeom prst="roundRect">
@@ -28717,13 +28852,13 @@
       </p:sp>
       <p:sp>
         <p:nvSpPr>
-          <p:cNvPr id="36" name="TextBox 35"/>
+          <p:cNvPr id="79" name="TextBox 78"/>
           <p:cNvSpPr txBox="1"/>
           <p:nvPr/>
         </p:nvSpPr>
         <p:spPr>
           <a:xfrm>
-            <a:off x="3913632" y="3840480"/>
+            <a:off x="3913632" y="5303520"/>
             <a:ext cx="2651760" cy="457200"/>
           </a:xfrm>
           <a:prstGeom prst="rect">
@@ -28732,7 +28867,7 @@
           <a:noFill/>
         </p:spPr>
         <p:txBody>
-          <a:bodyPr wrap="square" lIns="128016" tIns="73152" rIns="128016" bIns="54864" anchor="ctr">
+          <a:bodyPr wrap="square" lIns="128016" rIns="128016" tIns="73152" bIns="54864" anchor="ctr">
             <a:spAutoFit/>
           </a:bodyPr>
           <a:lstStyle/>
@@ -28743,339 +28878,23 @@
                 <a:solidFill>
                   <a:srgbClr val="138F5F"/>
                 </a:solidFill>
-                <a:latin typeface="Arial" panose="020B0604020202020204"/>
-              </a:rPr>
-              <a:t>3   Activate used batches; no gaps</a:t>
-            </a:r>
-            <a:endParaRPr sz="1070" b="1">
-              <a:solidFill>
-                <a:srgbClr val="138F5F"/>
-              </a:solidFill>
-              <a:latin typeface="Arial" panose="020B0604020202020204"/>
-            </a:endParaRPr>
-          </a:p>
-        </p:txBody>
-      </p:sp>
-      <mc:AlternateContent xmlns:mc="http://schemas.openxmlformats.org/markup-compatibility/2006">
-        <mc:Choice xmlns:a14="http://schemas.microsoft.com/office/drawing/2010/main" Requires="a14">
-          <p:sp>
-            <p:nvSpPr>
-              <p:cNvPr id="37" name="TextBox 36"/>
-              <p:cNvSpPr txBox="1"/>
-              <p:nvPr/>
-            </p:nvSpPr>
-            <p:spPr>
-              <a:xfrm>
-                <a:off x="6355080" y="3840480"/>
-                <a:ext cx="4800600" cy="457200"/>
-              </a:xfrm>
-              <a:prstGeom prst="rect">
-                <a:avLst/>
-              </a:prstGeom>
-              <a:noFill/>
-            </p:spPr>
-            <p:txBody>
-              <a:bodyPr wrap="none" anchor="ctr">
-                <a:spAutoFit/>
-              </a:bodyPr>
-              <a:lstStyle/>
-              <a:p>
-                <a:pPr algn="ctr"/>
-                <a14:m>
-                  <m:oMathPara xmlns:m="http://schemas.openxmlformats.org/officeDocument/2006/math">
-                    <m:oMathParaPr>
-                      <m:jc m:val="center"/>
-                    </m:oMathParaPr>
-                    <m:oMath xmlns:m="http://schemas.openxmlformats.org/officeDocument/2006/math">
-                      <m:sSub>
-                        <m:sSubPr>
-                          <m:ctrlPr>
-                            <a:rPr/>
-                          </m:ctrlPr>
-                        </m:sSubPr>
-                        <m:e>
-                          <m:r>
-                            <a:rPr lang="en-US" sz="1400" dirty="0">
-                              <a:solidFill>
-                                <a:srgbClr val="1F3046"/>
-                              </a:solidFill>
-                              <a:latin typeface="Cambria Math" panose="02040503050406030204"/>
-                            </a:rPr>
-                            <m:t>𝑥</m:t>
-                          </m:r>
-                        </m:e>
-                        <m:sub>
-                          <m:r>
-                            <a:rPr lang="en-US" sz="1400" dirty="0">
-                              <a:solidFill>
-                                <a:srgbClr val="1F3046"/>
-                              </a:solidFill>
-                              <a:latin typeface="Cambria Math" panose="02040503050406030204"/>
-                            </a:rPr>
-                            <m:t>𝑝</m:t>
-                          </m:r>
-                          <m:r>
-                            <a:rPr lang="en-US" sz="1400" dirty="0">
-                              <a:solidFill>
-                                <a:srgbClr val="1F3046"/>
-                              </a:solidFill>
-                              <a:latin typeface="Cambria Math" panose="02040503050406030204"/>
-                            </a:rPr>
-                            <m:t>,</m:t>
-                          </m:r>
-                          <m:r>
-                            <a:rPr lang="en-US" sz="1400" dirty="0">
-                              <a:solidFill>
-                                <a:srgbClr val="1F3046"/>
-                              </a:solidFill>
-                              <a:latin typeface="Cambria Math" panose="02040503050406030204"/>
-                            </a:rPr>
-                            <m:t>𝑏</m:t>
-                          </m:r>
-                        </m:sub>
-                      </m:sSub>
-                      <m:r>
-                        <a:rPr lang="en-US" sz="1400" dirty="0">
-                          <a:solidFill>
-                            <a:srgbClr val="1F3046"/>
-                          </a:solidFill>
-                          <a:latin typeface="Cambria Math" panose="02040503050406030204"/>
-                        </a:rPr>
-                        <m:t>≤</m:t>
-                      </m:r>
-                      <m:sSub>
-                        <m:sSubPr>
-                          <m:ctrlPr>
-                            <a:rPr/>
-                          </m:ctrlPr>
-                        </m:sSubPr>
-                        <m:e>
-                          <m:r>
-                            <a:rPr lang="en-US" sz="1400" dirty="0">
-                              <a:solidFill>
-                                <a:srgbClr val="1F3046"/>
-                              </a:solidFill>
-                              <a:latin typeface="Cambria Math" panose="02040503050406030204"/>
-                            </a:rPr>
-                            <m:t>𝑦</m:t>
-                          </m:r>
-                        </m:e>
-                        <m:sub>
-                          <m:r>
-                            <a:rPr lang="en-US" sz="1400" dirty="0">
-                              <a:solidFill>
-                                <a:srgbClr val="1F3046"/>
-                              </a:solidFill>
-                              <a:latin typeface="Cambria Math" panose="02040503050406030204"/>
-                            </a:rPr>
-                            <m:t>𝑏</m:t>
-                          </m:r>
-                        </m:sub>
-                      </m:sSub>
-                      <m:r>
-                        <a:rPr lang="en-US" sz="1400" dirty="0">
-                          <a:solidFill>
-                            <a:srgbClr val="1F3046"/>
-                          </a:solidFill>
-                          <a:latin typeface="Cambria Math" panose="02040503050406030204"/>
-                        </a:rPr>
-                        <m:t>,</m:t>
-                      </m:r>
-                      <m:r>
-                        <a:rPr lang="en-US" sz="1400" dirty="0">
-                          <a:solidFill>
-                            <a:srgbClr val="1F3046"/>
-                          </a:solidFill>
-                          <a:latin typeface="Cambria Math" panose="02040503050406030204"/>
-                        </a:rPr>
-                        <m:t>  </m:t>
-                      </m:r>
-                      <m:sSub>
-                        <m:sSubPr>
-                          <m:ctrlPr>
-                            <a:rPr/>
-                          </m:ctrlPr>
-                        </m:sSubPr>
-                        <m:e>
-                          <m:r>
-                            <a:rPr lang="en-US" sz="1400" dirty="0">
-                              <a:solidFill>
-                                <a:srgbClr val="1F3046"/>
-                              </a:solidFill>
-                              <a:latin typeface="Cambria Math" panose="02040503050406030204"/>
-                            </a:rPr>
-                            <m:t>𝑦</m:t>
-                          </m:r>
-                        </m:e>
-                        <m:sub>
-                          <m:r>
-                            <a:rPr lang="en-US" sz="1400" dirty="0">
-                              <a:solidFill>
-                                <a:srgbClr val="1F3046"/>
-                              </a:solidFill>
-                              <a:latin typeface="Cambria Math" panose="02040503050406030204"/>
-                            </a:rPr>
-                            <m:t>𝑏</m:t>
-                          </m:r>
-                        </m:sub>
-                      </m:sSub>
-                      <m:r>
-                        <a:rPr lang="en-US" sz="1400" dirty="0">
-                          <a:solidFill>
-                            <a:srgbClr val="1F3046"/>
-                          </a:solidFill>
-                          <a:latin typeface="Cambria Math" panose="02040503050406030204"/>
-                        </a:rPr>
-                        <m:t>≥</m:t>
-                      </m:r>
-                      <m:sSub>
-                        <m:sSubPr>
-                          <m:ctrlPr>
-                            <a:rPr/>
-                          </m:ctrlPr>
-                        </m:sSubPr>
-                        <m:e>
-                          <m:r>
-                            <a:rPr lang="en-US" sz="1400" dirty="0">
-                              <a:solidFill>
-                                <a:srgbClr val="1F3046"/>
-                              </a:solidFill>
-                              <a:latin typeface="Cambria Math" panose="02040503050406030204"/>
-                            </a:rPr>
-                            <m:t>𝑦</m:t>
-                          </m:r>
-                        </m:e>
-                        <m:sub>
-                          <m:r>
-                            <a:rPr lang="en-US" sz="1400" dirty="0">
-                              <a:solidFill>
-                                <a:srgbClr val="1F3046"/>
-                              </a:solidFill>
-                              <a:latin typeface="Cambria Math" panose="02040503050406030204"/>
-                            </a:rPr>
-                            <m:t>𝑏</m:t>
-                          </m:r>
-                          <m:r>
-                            <a:rPr lang="en-US" sz="1400" dirty="0">
-                              <a:solidFill>
-                                <a:srgbClr val="1F3046"/>
-                              </a:solidFill>
-                              <a:latin typeface="Cambria Math" panose="02040503050406030204"/>
-                            </a:rPr>
-                            <m:t>+</m:t>
-                          </m:r>
-                          <m:r>
-                            <a:rPr lang="en-US" sz="1400" dirty="0">
-                              <a:solidFill>
-                                <a:srgbClr val="1F3046"/>
-                              </a:solidFill>
-                              <a:latin typeface="Cambria Math" panose="02040503050406030204"/>
-                            </a:rPr>
-                            <m:t>1</m:t>
-                          </m:r>
-                        </m:sub>
-                      </m:sSub>
-                    </m:oMath>
-                  </m:oMathPara>
-                </a14:m>
-              </a:p>
-            </p:txBody>
-          </p:sp>
-        </mc:Choice>
-        <mc:Fallback>
-          <p:sp>
-            <p:nvSpPr>
-              <p:cNvPr id="37" name="TextBox 36"/>
-              <p:cNvSpPr txBox="1">
-                <a:spLocks noRot="1" noChangeAspect="1" noMove="1" noResize="1" noEditPoints="1" noAdjustHandles="1" noChangeArrowheads="1" noChangeShapeType="1" noTextEdit="1"/>
-              </p:cNvSpPr>
-              <p:nvPr/>
-            </p:nvSpPr>
-            <p:spPr>
-              <a:xfrm>
-                <a:off x="6355080" y="3840480"/>
-                <a:ext cx="4800600" cy="457200"/>
-              </a:xfrm>
-              <a:prstGeom prst="rect">
-                <a:avLst/>
-              </a:prstGeom>
-              <a:blipFill rotWithShape="1">
-                <a:blip r:embed="rId11"/>
-                <a:stretch>
-                  <a:fillRect/>
-                </a:stretch>
-              </a:blipFill>
-            </p:spPr>
-            <p:txBody>
-              <a:bodyPr/>
-              <a:lstStyle/>
-              <a:p>
-                <a:r>
-                  <a:rPr lang="zh-CN" altLang="en-US">
-                    <a:noFill/>
-                  </a:rPr>
-                  <a:t> </a:t>
-                </a:r>
-              </a:p>
-            </p:txBody>
-          </p:sp>
-        </mc:Fallback>
-      </mc:AlternateContent>
-      <p:sp>
-        <p:nvSpPr>
-          <p:cNvPr id="38" name="Rounded Rectangle 37"/>
-          <p:cNvSpPr/>
-          <p:nvPr/>
-        </p:nvSpPr>
-        <p:spPr>
-          <a:xfrm>
-            <a:off x="3730752" y="4498848"/>
-            <a:ext cx="7772400" cy="640080"/>
-          </a:xfrm>
-          <a:prstGeom prst="roundRect">
-            <a:avLst/>
-          </a:prstGeom>
-          <a:solidFill>
-            <a:srgbClr val="FFFFFF"/>
-          </a:solidFill>
-          <a:ln w="17780">
-            <a:solidFill>
-              <a:srgbClr val="E67E22"/>
-            </a:solidFill>
-          </a:ln>
-        </p:spPr>
-        <p:style>
-          <a:lnRef idx="1">
-            <a:schemeClr val="accent1"/>
-          </a:lnRef>
-          <a:fillRef idx="3">
-            <a:schemeClr val="accent1"/>
-          </a:fillRef>
-          <a:effectRef idx="2">
-            <a:schemeClr val="accent1"/>
-          </a:effectRef>
-          <a:fontRef idx="minor">
-            <a:schemeClr val="lt1"/>
-          </a:fontRef>
-        </p:style>
-        <p:txBody>
-          <a:bodyPr rtlCol="0" anchor="ctr"/>
-          <a:lstStyle/>
-          <a:p>
-            <a:pPr algn="ctr"/>
-          </a:p>
-        </p:txBody>
-      </p:sp>
-      <p:sp>
-        <p:nvSpPr>
-          <p:cNvPr id="39" name="TextBox 38"/>
+                <a:latin typeface="Arial"/>
+              </a:rPr>
+              <a:t>5   Inference-time lower bound</a:t>
+            </a:r>
+          </a:p>
+        </p:txBody>
+      </p:sp>
+      <p:sp>
+        <p:nvSpPr>
+          <p:cNvPr id="80" name="TextBox 79"/>
           <p:cNvSpPr txBox="1"/>
           <p:nvPr/>
         </p:nvSpPr>
         <p:spPr>
           <a:xfrm>
-            <a:off x="3913632" y="4572000"/>
-            <a:ext cx="2651760" cy="457200"/>
+            <a:off x="6355080" y="5303520"/>
+            <a:ext cx="4800600" cy="457200"/>
           </a:xfrm>
           <a:prstGeom prst="rect">
             <a:avLst/>
@@ -29083,815 +28902,347 @@
           <a:noFill/>
         </p:spPr>
         <p:txBody>
-          <a:bodyPr wrap="square" lIns="128016" tIns="73152" rIns="128016" bIns="54864" anchor="ctr">
+          <a:bodyPr wrap="none" anchor="ctr">
             <a:spAutoFit/>
           </a:bodyPr>
           <a:lstStyle/>
           <a:p>
-            <a:pPr algn="l"/>
-            <a:r>
-              <a:rPr sz="1070" b="1">
-                <a:solidFill>
-                  <a:srgbClr val="E67E22"/>
-                </a:solidFill>
-                <a:latin typeface="Arial" panose="020B0604020202020204"/>
-              </a:rPr>
-              <a:t>4   Migration load on each link</a:t>
-            </a:r>
-            <a:endParaRPr sz="1070" b="1">
-              <a:solidFill>
-                <a:srgbClr val="E67E22"/>
-              </a:solidFill>
-              <a:latin typeface="Arial" panose="020B0604020202020204"/>
-            </a:endParaRPr>
-          </a:p>
-        </p:txBody>
-      </p:sp>
-      <mc:AlternateContent xmlns:mc="http://schemas.openxmlformats.org/markup-compatibility/2006">
-        <mc:Choice xmlns:a14="http://schemas.microsoft.com/office/drawing/2010/main" Requires="a14">
-          <p:sp>
-            <p:nvSpPr>
-              <p:cNvPr id="40" name="TextBox 39"/>
-              <p:cNvSpPr txBox="1"/>
-              <p:nvPr/>
-            </p:nvSpPr>
-            <p:spPr>
-              <a:xfrm>
-                <a:off x="6355080" y="4572000"/>
-                <a:ext cx="4800600" cy="457200"/>
-              </a:xfrm>
-              <a:prstGeom prst="rect">
-                <a:avLst/>
-              </a:prstGeom>
-              <a:noFill/>
-            </p:spPr>
-            <p:txBody>
-              <a:bodyPr wrap="none" anchor="ctr">
-                <a:spAutoFit/>
-              </a:bodyPr>
-              <a:lstStyle/>
-              <a:p>
-                <a:pPr algn="ctr"/>
-                <a14:m>
-                  <m:oMathPara xmlns:m="http://schemas.openxmlformats.org/officeDocument/2006/math">
-                    <m:oMathParaPr>
-                      <m:jc m:val="center"/>
-                    </m:oMathParaPr>
-                    <m:oMath xmlns:m="http://schemas.openxmlformats.org/officeDocument/2006/math">
-                      <m:sSub>
-                        <m:sSubPr>
-                          <m:ctrlPr>
-                            <a:rPr/>
-                          </m:ctrlPr>
-                        </m:sSubPr>
-                        <m:e>
-                          <m:r>
-                            <a:rPr lang="en-US" sz="1400" dirty="0">
-                              <a:solidFill>
-                                <a:srgbClr val="1F3046"/>
-                              </a:solidFill>
-                              <a:latin typeface="Cambria Math" panose="02040503050406030204"/>
-                            </a:rPr>
-                            <m:t>𝐿</m:t>
-                          </m:r>
-                        </m:e>
-                        <m:sub>
-                          <m:r>
-                            <a:rPr lang="en-US" sz="1400" dirty="0">
-                              <a:solidFill>
-                                <a:srgbClr val="1F3046"/>
-                              </a:solidFill>
-                              <a:latin typeface="Cambria Math" panose="02040503050406030204"/>
-                            </a:rPr>
-                            <m:t>𝑒</m:t>
-                          </m:r>
-                          <m:r>
-                            <a:rPr lang="en-US" sz="1400" dirty="0">
-                              <a:solidFill>
-                                <a:srgbClr val="1F3046"/>
-                              </a:solidFill>
-                              <a:latin typeface="Cambria Math" panose="02040503050406030204"/>
-                            </a:rPr>
-                            <m:t>,</m:t>
-                          </m:r>
-                          <m:r>
-                            <a:rPr lang="en-US" sz="1400" dirty="0">
-                              <a:solidFill>
-                                <a:srgbClr val="1F3046"/>
-                              </a:solidFill>
-                              <a:latin typeface="Cambria Math" panose="02040503050406030204"/>
-                            </a:rPr>
-                            <m:t>𝑏</m:t>
-                          </m:r>
-                        </m:sub>
-                      </m:sSub>
-                      <m:r>
-                        <a:rPr lang="en-US" sz="1400" dirty="0">
-                          <a:solidFill>
-                            <a:srgbClr val="1F3046"/>
-                          </a:solidFill>
-                          <a:latin typeface="Cambria Math" panose="02040503050406030204"/>
-                        </a:rPr>
-                        <m:t>=</m:t>
-                      </m:r>
-                      <m:nary>
-                        <m:naryPr>
-                          <m:chr m:val="∑"/>
-                          <m:limLoc m:val="undOvr"/>
-                          <m:supHide m:val="on"/>
-                          <m:ctrlPr>
-                            <a:rPr/>
-                          </m:ctrlPr>
-                        </m:naryPr>
-                        <m:sub>
-                          <m:r>
-                            <a:rPr lang="en-US" sz="1400" dirty="0">
-                              <a:solidFill>
-                                <a:srgbClr val="1F3046"/>
-                              </a:solidFill>
-                              <a:latin typeface="Cambria Math" panose="02040503050406030204"/>
-                            </a:rPr>
-                            <m:t>𝑝</m:t>
-                          </m:r>
-                          <m:r>
-                            <a:rPr lang="en-US" sz="1400" dirty="0">
-                              <a:solidFill>
-                                <a:srgbClr val="1F3046"/>
-                              </a:solidFill>
-                              <a:latin typeface="Cambria Math" panose="02040503050406030204"/>
-                            </a:rPr>
-                            <m:t>∈</m:t>
-                          </m:r>
-                          <m:r>
-                            <a:rPr lang="en-US" sz="1400" dirty="0">
-                              <a:solidFill>
-                                <a:srgbClr val="1F3046"/>
-                              </a:solidFill>
-                              <a:latin typeface="Cambria Math" panose="02040503050406030204"/>
-                            </a:rPr>
-                            <m:t>𝑃</m:t>
-                          </m:r>
-                        </m:sub>
-                        <m:sup/>
-                        <m:e>
-                          <m:sSub>
-                            <m:sSubPr>
-                              <m:ctrlPr>
-                                <a:rPr/>
-                              </m:ctrlPr>
-                            </m:sSubPr>
-                            <m:e>
-                              <m:r>
-                                <a:rPr lang="en-US" sz="1400" dirty="0">
-                                  <a:solidFill>
-                                    <a:srgbClr val="1F3046"/>
-                                  </a:solidFill>
-                                  <a:latin typeface="Cambria Math" panose="02040503050406030204"/>
-                                </a:rPr>
-                                <m:t>𝑤</m:t>
-                              </m:r>
-                            </m:e>
-                            <m:sub>
-                              <m:r>
-                                <a:rPr lang="en-US" sz="1400" dirty="0">
-                                  <a:solidFill>
-                                    <a:srgbClr val="1F3046"/>
-                                  </a:solidFill>
-                                  <a:latin typeface="Cambria Math" panose="02040503050406030204"/>
-                                </a:rPr>
-                                <m:t>𝑝</m:t>
-                              </m:r>
-                            </m:sub>
-                          </m:sSub>
-                        </m:e>
-                      </m:nary>
-                      <m:sSub>
-                        <m:sSubPr>
-                          <m:ctrlPr>
-                            <a:rPr/>
-                          </m:ctrlPr>
-                        </m:sSubPr>
-                        <m:e>
-                          <m:r>
-                            <a:rPr lang="en-US" sz="1400" dirty="0">
-                              <a:solidFill>
-                                <a:srgbClr val="1F3046"/>
-                              </a:solidFill>
-                              <a:latin typeface="Cambria Math" panose="02040503050406030204"/>
-                            </a:rPr>
-                            <m:t>𝑓</m:t>
-                          </m:r>
-                        </m:e>
-                        <m:sub>
-                          <m:r>
-                            <a:rPr lang="en-US" sz="1400" dirty="0">
-                              <a:solidFill>
-                                <a:srgbClr val="1F3046"/>
-                              </a:solidFill>
-                              <a:latin typeface="Cambria Math" panose="02040503050406030204"/>
-                            </a:rPr>
-                            <m:t>𝑝</m:t>
-                          </m:r>
-                          <m:r>
-                            <a:rPr lang="en-US" sz="1400" dirty="0">
-                              <a:solidFill>
-                                <a:srgbClr val="1F3046"/>
-                              </a:solidFill>
-                              <a:latin typeface="Cambria Math" panose="02040503050406030204"/>
-                            </a:rPr>
-                            <m:t>,</m:t>
-                          </m:r>
-                          <m:r>
-                            <a:rPr lang="en-US" sz="1400" dirty="0">
-                              <a:solidFill>
-                                <a:srgbClr val="1F3046"/>
-                              </a:solidFill>
-                              <a:latin typeface="Cambria Math" panose="02040503050406030204"/>
-                            </a:rPr>
-                            <m:t>𝑒</m:t>
-                          </m:r>
-                        </m:sub>
-                      </m:sSub>
-                      <m:sSub>
-                        <m:sSubPr>
-                          <m:ctrlPr>
-                            <a:rPr/>
-                          </m:ctrlPr>
-                        </m:sSubPr>
-                        <m:e>
-                          <m:r>
-                            <a:rPr lang="en-US" sz="1400" dirty="0">
-                              <a:solidFill>
-                                <a:srgbClr val="1F3046"/>
-                              </a:solidFill>
-                              <a:latin typeface="Cambria Math" panose="02040503050406030204"/>
-                            </a:rPr>
-                            <m:t>𝑥</m:t>
-                          </m:r>
-                        </m:e>
-                        <m:sub>
-                          <m:r>
-                            <a:rPr lang="en-US" sz="1400" dirty="0">
-                              <a:solidFill>
-                                <a:srgbClr val="1F3046"/>
-                              </a:solidFill>
-                              <a:latin typeface="Cambria Math" panose="02040503050406030204"/>
-                            </a:rPr>
-                            <m:t>𝑝</m:t>
-                          </m:r>
-                          <m:r>
-                            <a:rPr lang="en-US" sz="1400" dirty="0">
-                              <a:solidFill>
-                                <a:srgbClr val="1F3046"/>
-                              </a:solidFill>
-                              <a:latin typeface="Cambria Math" panose="02040503050406030204"/>
-                            </a:rPr>
-                            <m:t>,</m:t>
-                          </m:r>
-                          <m:r>
-                            <a:rPr lang="en-US" sz="1400" dirty="0">
-                              <a:solidFill>
-                                <a:srgbClr val="1F3046"/>
-                              </a:solidFill>
-                              <a:latin typeface="Cambria Math" panose="02040503050406030204"/>
-                            </a:rPr>
-                            <m:t>𝑏</m:t>
-                          </m:r>
-                        </m:sub>
-                      </m:sSub>
-                    </m:oMath>
-                  </m:oMathPara>
-                </a14:m>
-              </a:p>
-            </p:txBody>
-          </p:sp>
-        </mc:Choice>
-        <mc:Fallback>
-          <p:sp>
-            <p:nvSpPr>
-              <p:cNvPr id="40" name="TextBox 39"/>
-              <p:cNvSpPr txBox="1">
-                <a:spLocks noRot="1" noChangeAspect="1" noMove="1" noResize="1" noEditPoints="1" noAdjustHandles="1" noChangeArrowheads="1" noChangeShapeType="1" noTextEdit="1"/>
-              </p:cNvSpPr>
-              <p:nvPr/>
-            </p:nvSpPr>
-            <p:spPr>
-              <a:xfrm>
-                <a:off x="6355080" y="4572000"/>
-                <a:ext cx="4800600" cy="457200"/>
-              </a:xfrm>
-              <a:prstGeom prst="rect">
-                <a:avLst/>
-              </a:prstGeom>
-              <a:blipFill rotWithShape="1">
-                <a:blip r:embed="rId12"/>
-                <a:stretch>
-                  <a:fillRect t="-16528" b="-16806"/>
-                </a:stretch>
-              </a:blipFill>
-            </p:spPr>
-            <p:txBody>
-              <a:bodyPr/>
-              <a:lstStyle/>
-              <a:p>
-                <a:r>
-                  <a:rPr lang="zh-CN" altLang="en-US">
-                    <a:noFill/>
-                  </a:rPr>
-                  <a:t> </a:t>
-                </a:r>
-              </a:p>
-            </p:txBody>
-          </p:sp>
-        </mc:Fallback>
-      </mc:AlternateContent>
-      <p:sp>
-        <p:nvSpPr>
-          <p:cNvPr id="41" name="Rounded Rectangle 40"/>
-          <p:cNvSpPr/>
-          <p:nvPr/>
-        </p:nvSpPr>
-        <p:spPr>
-          <a:xfrm>
-            <a:off x="3730752" y="5230368"/>
-            <a:ext cx="7772400" cy="640080"/>
-          </a:xfrm>
-          <a:prstGeom prst="roundRect">
-            <a:avLst/>
-          </a:prstGeom>
-          <a:solidFill>
-            <a:srgbClr val="FFFFFF"/>
-          </a:solidFill>
-          <a:ln w="17780">
-            <a:solidFill>
-              <a:srgbClr val="138F5F"/>
-            </a:solidFill>
-          </a:ln>
-        </p:spPr>
-        <p:style>
-          <a:lnRef idx="1">
-            <a:schemeClr val="accent1"/>
-          </a:lnRef>
-          <a:fillRef idx="3">
-            <a:schemeClr val="accent1"/>
-          </a:fillRef>
-          <a:effectRef idx="2">
-            <a:schemeClr val="accent1"/>
-          </a:effectRef>
-          <a:fontRef idx="minor">
-            <a:schemeClr val="lt1"/>
-          </a:fontRef>
-        </p:style>
-        <p:txBody>
-          <a:bodyPr rtlCol="0" anchor="ctr"/>
-          <a:lstStyle/>
-          <a:p>
             <a:pPr algn="ctr"/>
-          </a:p>
-        </p:txBody>
-      </p:sp>
-      <p:sp>
-        <p:nvSpPr>
-          <p:cNvPr id="42" name="TextBox 41"/>
-          <p:cNvSpPr txBox="1"/>
-          <p:nvPr/>
-        </p:nvSpPr>
-        <p:spPr>
-          <a:xfrm>
-            <a:off x="3913632" y="5303520"/>
-            <a:ext cx="2651760" cy="457200"/>
-          </a:xfrm>
-          <a:prstGeom prst="rect">
-            <a:avLst/>
-          </a:prstGeom>
-          <a:noFill/>
-        </p:spPr>
-        <p:txBody>
-          <a:bodyPr wrap="square" lIns="128016" tIns="73152" rIns="128016" bIns="54864" anchor="ctr">
-            <a:spAutoFit/>
-          </a:bodyPr>
-          <a:lstStyle/>
-          <a:p>
-            <a:pPr algn="l"/>
-            <a:r>
-              <a:rPr sz="1070" b="1">
-                <a:solidFill>
-                  <a:srgbClr val="138F5F"/>
-                </a:solidFill>
-                <a:latin typeface="Arial" panose="020B0604020202020204"/>
-              </a:rPr>
-              <a:t>5   Inference-time lower bound</a:t>
-            </a:r>
-            <a:endParaRPr sz="1070" b="1">
-              <a:solidFill>
-                <a:srgbClr val="138F5F"/>
-              </a:solidFill>
-              <a:latin typeface="Arial" panose="020B0604020202020204"/>
-            </a:endParaRPr>
-          </a:p>
-        </p:txBody>
-      </p:sp>
-      <mc:AlternateContent xmlns:mc="http://schemas.openxmlformats.org/markup-compatibility/2006">
-        <mc:Choice xmlns:a14="http://schemas.microsoft.com/office/drawing/2010/main" Requires="a14">
-          <p:sp>
-            <p:nvSpPr>
-              <p:cNvPr id="43" name="TextBox 42"/>
-              <p:cNvSpPr txBox="1"/>
-              <p:nvPr/>
-            </p:nvSpPr>
-            <p:spPr>
-              <a:xfrm>
-                <a:off x="6355080" y="5303520"/>
-                <a:ext cx="4800600" cy="457200"/>
-              </a:xfrm>
-              <a:prstGeom prst="rect">
-                <a:avLst/>
-              </a:prstGeom>
-              <a:noFill/>
-            </p:spPr>
-            <p:txBody>
-              <a:bodyPr wrap="none" anchor="ctr">
-                <a:spAutoFit/>
-              </a:bodyPr>
-              <a:lstStyle/>
-              <a:p>
-                <a:pPr algn="ctr"/>
-                <a14:m>
-                  <m:oMathPara xmlns:m="http://schemas.openxmlformats.org/officeDocument/2006/math">
-                    <m:oMathParaPr>
-                      <m:jc m:val="center"/>
-                    </m:oMathParaPr>
-                    <m:oMath xmlns:m="http://schemas.openxmlformats.org/officeDocument/2006/math">
-                      <m:sSub>
-                        <m:sSubPr>
-                          <m:ctrlPr>
-                            <a:rPr/>
-                          </m:ctrlPr>
-                        </m:sSubPr>
-                        <m:e>
-                          <m:r>
-                            <a:rPr lang="en-US" sz="1200" dirty="0">
-                              <a:solidFill>
-                                <a:srgbClr val="1F3046"/>
-                              </a:solidFill>
-                              <a:latin typeface="Cambria Math" panose="02040503050406030204"/>
-                            </a:rPr>
-                            <m:t>𝑇</m:t>
-                          </m:r>
-                        </m:e>
-                        <m:sub>
-                          <m:r>
-                            <m:rPr>
-                              <m:sty m:val="p"/>
-                            </m:rPr>
-                            <a:rPr lang="en-US" sz="1200" dirty="0">
-                              <a:solidFill>
-                                <a:srgbClr val="1F3046"/>
-                              </a:solidFill>
-                              <a:latin typeface="Cambria Math" panose="02040503050406030204"/>
-                            </a:rPr>
-                            <m:t>i</m:t>
-                          </m:r>
-                          <m:r>
-                            <m:rPr>
-                              <m:sty m:val="p"/>
-                            </m:rPr>
-                            <a:rPr lang="en-US" sz="1200" dirty="0">
-                              <a:solidFill>
-                                <a:srgbClr val="1F3046"/>
-                              </a:solidFill>
-                              <a:latin typeface="Cambria Math" panose="02040503050406030204"/>
-                            </a:rPr>
-                            <m:t>n</m:t>
-                          </m:r>
-                          <m:r>
-                            <m:rPr>
-                              <m:sty m:val="p"/>
-                            </m:rPr>
-                            <a:rPr lang="en-US" sz="1200" dirty="0">
-                              <a:solidFill>
-                                <a:srgbClr val="1F3046"/>
-                              </a:solidFill>
-                              <a:latin typeface="Cambria Math" panose="02040503050406030204"/>
-                            </a:rPr>
-                            <m:t>f</m:t>
-                          </m:r>
-                          <m:r>
-                            <m:rPr>
-                              <m:sty m:val="p"/>
-                            </m:rPr>
-                            <a:rPr lang="en-US" sz="1200" dirty="0">
-                              <a:solidFill>
-                                <a:srgbClr val="1F3046"/>
-                              </a:solidFill>
-                              <a:latin typeface="Cambria Math" panose="02040503050406030204"/>
-                            </a:rPr>
-                            <m:t>e</m:t>
-                          </m:r>
-                          <m:r>
-                            <m:rPr>
-                              <m:sty m:val="p"/>
-                            </m:rPr>
-                            <a:rPr lang="en-US" sz="1200" dirty="0">
-                              <a:solidFill>
-                                <a:srgbClr val="1F3046"/>
-                              </a:solidFill>
-                              <a:latin typeface="Cambria Math" panose="02040503050406030204"/>
-                            </a:rPr>
-                            <m:t>r</m:t>
-                          </m:r>
-                        </m:sub>
-                      </m:sSub>
+            <a14:m xmlns:a14="http://schemas.microsoft.com/office/drawing/2010/main">
+              <m:oMathPara xmlns:m="http://schemas.openxmlformats.org/officeDocument/2006/math">
+                <m:oMathParaPr>
+                  <m:jc m:val="center"/>
+                </m:oMathParaPr>
+                <m:oMath>
+                  <m:sSub>
+                    <m:e>
                       <m:r>
                         <a:rPr lang="en-US" sz="1200" dirty="0">
                           <a:solidFill>
                             <a:srgbClr val="1F3046"/>
                           </a:solidFill>
-                          <a:latin typeface="Cambria Math" panose="02040503050406030204"/>
+                          <a:latin typeface="Cambria Math"/>
                         </a:rPr>
-                        <m:t>≥</m:t>
+                        <m:t>T</m:t>
                       </m:r>
-                      <m:sSub>
-                        <m:sSubPr>
-                          <m:ctrlPr>
-                            <a:rPr/>
-                          </m:ctrlPr>
-                        </m:sSubPr>
-                        <m:e>
-                          <m:r>
-                            <a:rPr lang="en-US" sz="1200" dirty="0">
-                              <a:solidFill>
-                                <a:srgbClr val="1F3046"/>
-                              </a:solidFill>
-                              <a:latin typeface="Cambria Math" panose="02040503050406030204"/>
-                            </a:rPr>
-                            <m:t>𝑇</m:t>
-                          </m:r>
-                        </m:e>
-                        <m:sub>
-                          <m:r>
-                            <a:rPr lang="en-US" sz="1200" dirty="0">
-                              <a:solidFill>
-                                <a:srgbClr val="1F3046"/>
-                              </a:solidFill>
-                              <a:latin typeface="Cambria Math" panose="02040503050406030204"/>
-                            </a:rPr>
-                            <m:t>0</m:t>
-                          </m:r>
-                        </m:sub>
-                      </m:sSub>
-                      <m:d>
-                        <m:dPr>
-                          <m:sepChr m:val=""/>
-                          <m:ctrlPr>
-                            <a:rPr/>
-                          </m:ctrlPr>
-                        </m:dPr>
-                        <m:e>
-                          <m:r>
-                            <a:rPr lang="en-US" sz="1200" dirty="0">
-                              <a:solidFill>
-                                <a:srgbClr val="1F3046"/>
-                              </a:solidFill>
-                              <a:latin typeface="Cambria Math" panose="02040503050406030204"/>
-                            </a:rPr>
-                            <m:t>1</m:t>
-                          </m:r>
-                          <m:r>
-                            <a:rPr lang="en-US" sz="1200" dirty="0">
-                              <a:solidFill>
-                                <a:srgbClr val="1F3046"/>
-                              </a:solidFill>
-                              <a:latin typeface="Cambria Math" panose="02040503050406030204"/>
-                            </a:rPr>
-                            <m:t>+</m:t>
-                          </m:r>
-                          <m:f>
-                            <m:fPr>
-                              <m:ctrlPr>
-                                <a:rPr/>
-                              </m:ctrlPr>
-                            </m:fPr>
-                            <m:num>
-                              <m:sSub>
-                                <m:sSubPr>
-                                  <m:ctrlPr>
-                                    <a:rPr/>
-                                  </m:ctrlPr>
-                                </m:sSubPr>
-                                <m:e>
-                                  <m:r>
-                                    <a:rPr lang="en-US" sz="1200" dirty="0">
-                                      <a:solidFill>
-                                        <a:srgbClr val="1F3046"/>
-                                      </a:solidFill>
-                                      <a:latin typeface="Cambria Math" panose="02040503050406030204"/>
-                                    </a:rPr>
-                                    <m:t>𝐿</m:t>
-                                  </m:r>
-                                </m:e>
-                                <m:sub>
-                                  <m:r>
-                                    <a:rPr lang="en-US" sz="1200" dirty="0">
-                                      <a:solidFill>
-                                        <a:srgbClr val="1F3046"/>
-                                      </a:solidFill>
-                                      <a:latin typeface="Cambria Math" panose="02040503050406030204"/>
-                                    </a:rPr>
-                                    <m:t>𝑒</m:t>
-                                  </m:r>
-                                  <m:r>
-                                    <a:rPr lang="en-US" sz="1200" dirty="0">
-                                      <a:solidFill>
-                                        <a:srgbClr val="1F3046"/>
-                                      </a:solidFill>
-                                      <a:latin typeface="Cambria Math" panose="02040503050406030204"/>
-                                    </a:rPr>
-                                    <m:t>,</m:t>
-                                  </m:r>
-                                  <m:r>
-                                    <a:rPr lang="en-US" sz="1200" dirty="0">
-                                      <a:solidFill>
-                                        <a:srgbClr val="1F3046"/>
-                                      </a:solidFill>
-                                      <a:latin typeface="Cambria Math" panose="02040503050406030204"/>
-                                    </a:rPr>
-                                    <m:t>𝑏</m:t>
-                                  </m:r>
-                                </m:sub>
-                              </m:sSub>
-                            </m:num>
-                            <m:den>
-                              <m:sSub>
-                                <m:sSubPr>
-                                  <m:ctrlPr>
-                                    <a:rPr/>
-                                  </m:ctrlPr>
-                                </m:sSubPr>
-                                <m:e>
-                                  <m:r>
-                                    <a:rPr lang="en-US" sz="1200" dirty="0">
-                                      <a:solidFill>
-                                        <a:srgbClr val="1F3046"/>
-                                      </a:solidFill>
-                                      <a:latin typeface="Cambria Math" panose="02040503050406030204"/>
-                                    </a:rPr>
-                                    <m:t>𝐶</m:t>
-                                  </m:r>
-                                </m:e>
-                                <m:sub>
-                                  <m:r>
-                                    <a:rPr lang="en-US" sz="1200" dirty="0">
-                                      <a:solidFill>
-                                        <a:srgbClr val="1F3046"/>
-                                      </a:solidFill>
-                                      <a:latin typeface="Cambria Math" panose="02040503050406030204"/>
-                                    </a:rPr>
-                                    <m:t>𝑒</m:t>
-                                  </m:r>
-                                </m:sub>
-                              </m:sSub>
-                              <m:d>
-                                <m:dPr>
-                                  <m:sepChr m:val=""/>
-                                  <m:ctrlPr>
-                                    <a:rPr/>
-                                  </m:ctrlPr>
-                                </m:dPr>
-                                <m:e>
-                                  <m:r>
-                                    <a:rPr lang="en-US" sz="1200" dirty="0">
-                                      <a:solidFill>
-                                        <a:srgbClr val="1F3046"/>
-                                      </a:solidFill>
-                                      <a:latin typeface="Cambria Math" panose="02040503050406030204"/>
-                                    </a:rPr>
-                                    <m:t>1</m:t>
-                                  </m:r>
-                                  <m:r>
-                                    <a:rPr lang="en-US" sz="1200" dirty="0">
-                                      <a:solidFill>
-                                        <a:srgbClr val="1F3046"/>
-                                      </a:solidFill>
-                                      <a:latin typeface="Cambria Math" panose="02040503050406030204"/>
-                                    </a:rPr>
-                                    <m:t>−</m:t>
-                                  </m:r>
-                                  <m:r>
-                                    <a:rPr lang="en-US" sz="1200" dirty="0">
-                                      <a:solidFill>
-                                        <a:srgbClr val="1F3046"/>
-                                      </a:solidFill>
-                                      <a:latin typeface="Cambria Math" panose="02040503050406030204"/>
-                                    </a:rPr>
-                                    <m:t>𝜌</m:t>
-                                  </m:r>
-                                </m:e>
-                              </m:d>
-                            </m:den>
-                          </m:f>
-                        </m:e>
-                      </m:d>
+                    </m:e>
+                    <m:sub>
+                      <m:r>
+                        <m:rPr>
+                          <m:sty m:val="p"/>
+                        </m:rPr>
+                        <a:rPr lang="en-US" sz="1200" dirty="0">
+                          <a:solidFill>
+                            <a:srgbClr val="1F3046"/>
+                          </a:solidFill>
+                          <a:latin typeface="Cambria Math"/>
+                        </a:rPr>
+                        <m:t>i</m:t>
+                      </m:r>
+                      <m:r>
+                        <m:rPr>
+                          <m:sty m:val="p"/>
+                        </m:rPr>
+                        <a:rPr lang="en-US" sz="1200" dirty="0">
+                          <a:solidFill>
+                            <a:srgbClr val="1F3046"/>
+                          </a:solidFill>
+                          <a:latin typeface="Cambria Math"/>
+                        </a:rPr>
+                        <m:t>n</m:t>
+                      </m:r>
+                      <m:r>
+                        <m:rPr>
+                          <m:sty m:val="p"/>
+                        </m:rPr>
+                        <a:rPr lang="en-US" sz="1200" dirty="0">
+                          <a:solidFill>
+                            <a:srgbClr val="1F3046"/>
+                          </a:solidFill>
+                          <a:latin typeface="Cambria Math"/>
+                        </a:rPr>
+                        <m:t>f</m:t>
+                      </m:r>
+                      <m:r>
+                        <m:rPr>
+                          <m:sty m:val="p"/>
+                        </m:rPr>
+                        <a:rPr lang="en-US" sz="1200" dirty="0">
+                          <a:solidFill>
+                            <a:srgbClr val="1F3046"/>
+                          </a:solidFill>
+                          <a:latin typeface="Cambria Math"/>
+                        </a:rPr>
+                        <m:t>e</m:t>
+                      </m:r>
+                      <m:r>
+                        <m:rPr>
+                          <m:sty m:val="p"/>
+                        </m:rPr>
+                        <a:rPr lang="en-US" sz="1200" dirty="0">
+                          <a:solidFill>
+                            <a:srgbClr val="1F3046"/>
+                          </a:solidFill>
+                          <a:latin typeface="Cambria Math"/>
+                        </a:rPr>
+                        <m:t>r</m:t>
+                      </m:r>
+                    </m:sub>
+                  </m:sSub>
+                  <m:r>
+                    <m:rPr>
+                      <m:sty m:val="p"/>
+                    </m:rPr>
+                    <a:rPr lang="en-US" sz="1200" dirty="0">
+                      <a:solidFill>
+                        <a:srgbClr val="1F3046"/>
+                      </a:solidFill>
+                      <a:latin typeface="Cambria Math"/>
+                    </a:rPr>
+                    <m:t>≥</m:t>
+                  </m:r>
+                  <m:sSub>
+                    <m:e>
                       <m:r>
                         <a:rPr lang="en-US" sz="1200" dirty="0">
                           <a:solidFill>
                             <a:srgbClr val="1F3046"/>
                           </a:solidFill>
-                          <a:latin typeface="Cambria Math" panose="02040503050406030204"/>
+                          <a:latin typeface="Cambria Math"/>
                         </a:rPr>
-                        <m:t>,</m:t>
+                        <m:t>T</m:t>
                       </m:r>
+                    </m:e>
+                    <m:sub>
                       <m:r>
                         <a:rPr lang="en-US" sz="1200" dirty="0">
                           <a:solidFill>
                             <a:srgbClr val="1F3046"/>
                           </a:solidFill>
-                          <a:latin typeface="Cambria Math" panose="02040503050406030204"/>
+                          <a:latin typeface="Cambria Math"/>
                         </a:rPr>
-                        <m:t> </m:t>
+                        <m:t>0</m:t>
                       </m:r>
+                    </m:sub>
+                  </m:sSub>
+                  <m:d>
+                    <m:dPr>
+                      <m:begChr m:val="("/>
+                      <m:endChr m:val=")"/>
+                      <m:sepChr m:val=""/>
+                      <m:grow/>
+                    </m:dPr>
+                    <m:e>
                       <m:r>
                         <a:rPr lang="en-US" sz="1200" dirty="0">
                           <a:solidFill>
                             <a:srgbClr val="1F3046"/>
                           </a:solidFill>
-                          <a:latin typeface="Cambria Math" panose="02040503050406030204"/>
+                          <a:latin typeface="Cambria Math"/>
                         </a:rPr>
-                        <m:t>∀</m:t>
+                        <m:t>1</m:t>
                       </m:r>
                       <m:r>
+                        <m:rPr>
+                          <m:sty m:val="p"/>
+                        </m:rPr>
                         <a:rPr lang="en-US" sz="1200" dirty="0">
                           <a:solidFill>
                             <a:srgbClr val="1F3046"/>
                           </a:solidFill>
-                          <a:latin typeface="Cambria Math" panose="02040503050406030204"/>
+                          <a:latin typeface="Cambria Math"/>
                         </a:rPr>
-                        <m:t>𝑒</m:t>
+                        <m:t>+</m:t>
                       </m:r>
-                      <m:r>
-                        <a:rPr lang="en-US" sz="1200" dirty="0">
-                          <a:solidFill>
-                            <a:srgbClr val="1F3046"/>
-                          </a:solidFill>
-                          <a:latin typeface="Cambria Math" panose="02040503050406030204"/>
-                        </a:rPr>
-                        <m:t>,</m:t>
-                      </m:r>
-                      <m:r>
-                        <a:rPr lang="en-US" sz="1200" dirty="0">
-                          <a:solidFill>
-                            <a:srgbClr val="1F3046"/>
-                          </a:solidFill>
-                          <a:latin typeface="Cambria Math" panose="02040503050406030204"/>
-                        </a:rPr>
-                        <m:t>𝑏</m:t>
-                      </m:r>
-                    </m:oMath>
-                  </m:oMathPara>
-                </a14:m>
-              </a:p>
-            </p:txBody>
-          </p:sp>
-        </mc:Choice>
-        <mc:Fallback>
-          <p:sp>
-            <p:nvSpPr>
-              <p:cNvPr id="43" name="TextBox 42"/>
-              <p:cNvSpPr txBox="1">
-                <a:spLocks noRot="1" noChangeAspect="1" noMove="1" noResize="1" noEditPoints="1" noAdjustHandles="1" noChangeArrowheads="1" noChangeShapeType="1" noTextEdit="1"/>
-              </p:cNvSpPr>
-              <p:nvPr/>
-            </p:nvSpPr>
-            <p:spPr>
-              <a:xfrm>
-                <a:off x="6355080" y="5303520"/>
-                <a:ext cx="4800600" cy="457200"/>
-              </a:xfrm>
-              <a:prstGeom prst="rect">
-                <a:avLst/>
-              </a:prstGeom>
-              <a:blipFill rotWithShape="1">
-                <a:blip r:embed="rId13"/>
-                <a:stretch>
-                  <a:fillRect t="-6806" b="-6944"/>
-                </a:stretch>
-              </a:blipFill>
-            </p:spPr>
-            <p:txBody>
-              <a:bodyPr/>
-              <a:lstStyle/>
-              <a:p>
-                <a:r>
-                  <a:rPr lang="zh-CN" altLang="en-US">
-                    <a:noFill/>
-                  </a:rPr>
-                  <a:t> </a:t>
-                </a:r>
-              </a:p>
-            </p:txBody>
-          </p:sp>
-        </mc:Fallback>
-      </mc:AlternateContent>
+                      <m:f>
+                        <m:fPr>
+                          <m:type m:val="bar"/>
+                        </m:fPr>
+                        <m:num>
+                          <m:sSub>
+                            <m:e>
+                              <m:r>
+                                <a:rPr lang="en-US" sz="1200" dirty="0">
+                                  <a:solidFill>
+                                    <a:srgbClr val="1F3046"/>
+                                  </a:solidFill>
+                                  <a:latin typeface="Cambria Math"/>
+                                </a:rPr>
+                                <m:t>L</m:t>
+                              </m:r>
+                            </m:e>
+                            <m:sub>
+                              <m:r>
+                                <a:rPr lang="en-US" sz="1200" dirty="0">
+                                  <a:solidFill>
+                                    <a:srgbClr val="1F3046"/>
+                                  </a:solidFill>
+                                  <a:latin typeface="Cambria Math"/>
+                                </a:rPr>
+                                <m:t>e</m:t>
+                              </m:r>
+                              <m:r>
+                                <m:rPr>
+                                  <m:sty m:val="p"/>
+                                </m:rPr>
+                                <a:rPr lang="en-US" sz="1200" dirty="0">
+                                  <a:solidFill>
+                                    <a:srgbClr val="1F3046"/>
+                                  </a:solidFill>
+                                  <a:latin typeface="Cambria Math"/>
+                                </a:rPr>
+                                <m:t>,</m:t>
+                              </m:r>
+                              <m:r>
+                                <a:rPr lang="en-US" sz="1200" dirty="0">
+                                  <a:solidFill>
+                                    <a:srgbClr val="1F3046"/>
+                                  </a:solidFill>
+                                  <a:latin typeface="Cambria Math"/>
+                                </a:rPr>
+                                <m:t>b</m:t>
+                              </m:r>
+                            </m:sub>
+                          </m:sSub>
+                        </m:num>
+                        <m:den>
+                          <m:sSub>
+                            <m:e>
+                              <m:r>
+                                <a:rPr lang="en-US" sz="1200" dirty="0">
+                                  <a:solidFill>
+                                    <a:srgbClr val="1F3046"/>
+                                  </a:solidFill>
+                                  <a:latin typeface="Cambria Math"/>
+                                </a:rPr>
+                                <m:t>C</m:t>
+                              </m:r>
+                            </m:e>
+                            <m:sub>
+                              <m:r>
+                                <a:rPr lang="en-US" sz="1200" dirty="0">
+                                  <a:solidFill>
+                                    <a:srgbClr val="1F3046"/>
+                                  </a:solidFill>
+                                  <a:latin typeface="Cambria Math"/>
+                                </a:rPr>
+                                <m:t>e</m:t>
+                              </m:r>
+                            </m:sub>
+                          </m:sSub>
+                          <m:d>
+                            <m:dPr>
+                              <m:begChr m:val="("/>
+                              <m:endChr m:val=")"/>
+                              <m:sepChr m:val=""/>
+                              <m:grow/>
+                            </m:dPr>
+                            <m:e>
+                              <m:r>
+                                <a:rPr lang="en-US" sz="1200" dirty="0">
+                                  <a:solidFill>
+                                    <a:srgbClr val="1F3046"/>
+                                  </a:solidFill>
+                                  <a:latin typeface="Cambria Math"/>
+                                </a:rPr>
+                                <m:t>1</m:t>
+                              </m:r>
+                              <m:r>
+                                <m:rPr>
+                                  <m:sty m:val="p"/>
+                                </m:rPr>
+                                <a:rPr lang="en-US" sz="1200" dirty="0">
+                                  <a:solidFill>
+                                    <a:srgbClr val="1F3046"/>
+                                  </a:solidFill>
+                                  <a:latin typeface="Cambria Math"/>
+                                </a:rPr>
+                                <m:t>−</m:t>
+                              </m:r>
+                              <m:r>
+                                <a:rPr lang="en-US" sz="1200" dirty="0">
+                                  <a:solidFill>
+                                    <a:srgbClr val="1F3046"/>
+                                  </a:solidFill>
+                                  <a:latin typeface="Cambria Math"/>
+                                </a:rPr>
+                                <m:t>ρ</m:t>
+                              </m:r>
+                            </m:e>
+                          </m:d>
+                        </m:den>
+                      </m:f>
+                    </m:e>
+                  </m:d>
+                  <m:r>
+                    <m:rPr>
+                      <m:sty m:val="p"/>
+                    </m:rPr>
+                    <a:rPr lang="en-US" sz="1200" dirty="0">
+                      <a:solidFill>
+                        <a:srgbClr val="1F3046"/>
+                      </a:solidFill>
+                      <a:latin typeface="Cambria Math"/>
+                    </a:rPr>
+                    <m:t>,</m:t>
+                  </m:r>
+                  <m:r>
+                    <a:rPr lang="en-US" sz="1200" dirty="0">
+                      <a:solidFill>
+                        <a:srgbClr val="1F3046"/>
+                      </a:solidFill>
+                      <a:latin typeface="Cambria Math"/>
+                    </a:rPr>
+                    <m:t> </m:t>
+                  </m:r>
+                  <m:r>
+                    <m:rPr>
+                      <m:sty m:val="p"/>
+                    </m:rPr>
+                    <a:rPr lang="en-US" sz="1200" dirty="0">
+                      <a:solidFill>
+                        <a:srgbClr val="1F3046"/>
+                      </a:solidFill>
+                      <a:latin typeface="Cambria Math"/>
+                    </a:rPr>
+                    <m:t>∀</m:t>
+                  </m:r>
+                  <m:r>
+                    <a:rPr lang="en-US" sz="1200" dirty="0">
+                      <a:solidFill>
+                        <a:srgbClr val="1F3046"/>
+                      </a:solidFill>
+                      <a:latin typeface="Cambria Math"/>
+                    </a:rPr>
+                    <m:t>e</m:t>
+                  </m:r>
+                  <m:r>
+                    <m:rPr>
+                      <m:sty m:val="p"/>
+                    </m:rPr>
+                    <a:rPr lang="en-US" sz="1200" dirty="0">
+                      <a:solidFill>
+                        <a:srgbClr val="1F3046"/>
+                      </a:solidFill>
+                      <a:latin typeface="Cambria Math"/>
+                    </a:rPr>
+                    <m:t>,</m:t>
+                  </m:r>
+                  <m:r>
+                    <a:rPr lang="en-US" sz="1200" dirty="0">
+                      <a:solidFill>
+                        <a:srgbClr val="1F3046"/>
+                      </a:solidFill>
+                      <a:latin typeface="Cambria Math"/>
+                    </a:rPr>
+                    <m:t>b</m:t>
+                  </m:r>
+                </m:oMath>
+              </m:oMathPara>
+            </a14:m>
+          </a:p>
+        </p:txBody>
+      </p:sp>
     </p:spTree>
   </p:cSld>
   <p:clrMapOvr>

--- a/benchmarks/eplb_rebalance/presentation/eplb_migration_batching.pptx
+++ b/benchmarks/eplb_rebalance/presentation/eplb_migration_batching.pptx
@@ -129,12 +129,12 @@
   <p:extLst>
     <p:ext uri="{EFAFB233-063F-42B5-8137-9DF3F51BA10A}">
       <p15:sldGuideLst xmlns:p15="http://schemas.microsoft.com/office/powerpoint/2012/main">
-        <p15:guide id="1" orient="horz" pos="2243" userDrawn="1">
+        <p15:guide id="1" orient="horz" pos="2240" userDrawn="1">
           <p15:clr>
             <a:srgbClr val="A4A3A4"/>
           </p15:clr>
         </p15:guide>
-        <p15:guide id="2" pos="2924" userDrawn="1">
+        <p15:guide id="2" pos="2891" userDrawn="1">
           <p15:clr>
             <a:srgbClr val="A4A3A4"/>
           </p15:clr>
@@ -4784,7 +4784,7 @@
         <p:spPr>
           <a:xfrm>
             <a:off x="0" y="0"/>
-            <a:ext cx="3977639" cy="6858000"/>
+            <a:ext cx="4314190" cy="6858000"/>
           </a:xfrm>
           <a:prstGeom prst="rect">
             <a:avLst/>
@@ -4839,27 +4839,47 @@
         <p:txBody>
           <a:bodyPr wrap="square" lIns="128016" tIns="73152" rIns="128016" bIns="54864" anchor="ctr">
             <a:spAutoFit/>
+            <a:scene3d>
+              <a:camera prst="orthographicFront"/>
+              <a:lightRig rig="threePt" dir="t"/>
+            </a:scene3d>
           </a:bodyPr>
           <a:lstStyle/>
           <a:p>
             <a:pPr algn="l"/>
             <a:r>
               <a:rPr sz="2200" b="1">
-                <a:solidFill>
-                  <a:srgbClr val="14345B"/>
-                </a:solidFill>
-                <a:latin typeface="Arial"/>
+                <a:ln/>
+                <a:solidFill>
+                  <a:schemeClr val="bg1"/>
+                </a:solidFill>
+                <a:effectLst>
+                  <a:outerShdw blurRad="38100" dist="25400" dir="5400000" algn="ctr" rotWithShape="0">
+                    <a:srgbClr val="6E747A">
+                      <a:alpha val="43000"/>
+                    </a:srgbClr>
+                  </a:outerShdw>
+                </a:effectLst>
+                <a:latin typeface="Arial" panose="020B0604020202020204"/>
               </a:rPr>
               <a:t>Contention-Aware Expert
 Parallel Load Balancing in
 Mixture-of-Experts Serving
 in vLLM</a:t>
             </a:r>
-            <a:endParaRPr sz="2700" b="1">
+            <a:endParaRPr sz="2200" b="1">
+              <a:ln/>
               <a:solidFill>
-                <a:srgbClr val="FFFFFF"/>
+                <a:schemeClr val="bg1"/>
               </a:solidFill>
-              <a:latin typeface="Aptos"/>
+              <a:effectLst>
+                <a:outerShdw blurRad="38100" dist="25400" dir="5400000" algn="ctr" rotWithShape="0">
+                  <a:srgbClr val="6E747A">
+                    <a:alpha val="43000"/>
+                  </a:srgbClr>
+                </a:outerShdw>
+              </a:effectLst>
+              <a:latin typeface="Arial" panose="020B0604020202020204"/>
             </a:endParaRPr>
           </a:p>
         </p:txBody>
@@ -6204,7 +6224,12 @@
             <p:ph type="sldNum" sz="quarter" idx="12"/>
           </p:nvPr>
         </p:nvSpPr>
-        <p:spPr/>
+        <p:spPr>
+          <a:xfrm>
+            <a:off x="9876790" y="6363970"/>
+            <a:ext cx="2133600" cy="365125"/>
+          </a:xfrm>
+        </p:spPr>
         <p:txBody>
           <a:bodyPr/>
           <a:p>
@@ -6414,8 +6439,8 @@
         </p:nvSpPr>
         <p:spPr>
           <a:xfrm>
-            <a:off x="814070" y="1541145"/>
-            <a:ext cx="4529455" cy="1670685"/>
+            <a:off x="662305" y="1541145"/>
+            <a:ext cx="4803775" cy="1706880"/>
           </a:xfrm>
           <a:prstGeom prst="roundRect">
             <a:avLst/>
@@ -7390,7 +7415,6 @@
               <a:pPr algn="l"/>
               <a:r>
                 <a:rPr sz="1200" b="1">
-                  <a:ln/>
                   <a:solidFill>
                     <a:schemeClr val="accent1"/>
                   </a:solidFill>
@@ -7406,7 +7430,6 @@
                 <a:t>Batch 0</a:t>
               </a:r>
               <a:endParaRPr sz="1200" b="1">
-                <a:ln/>
                 <a:solidFill>
                   <a:schemeClr val="accent1"/>
                 </a:solidFill>
@@ -7593,7 +7616,6 @@
               <a:pPr algn="l"/>
               <a:r>
                 <a:rPr sz="1200" b="1">
-                  <a:ln/>
                   <a:solidFill>
                     <a:schemeClr val="accent1"/>
                   </a:solidFill>
@@ -7609,7 +7631,6 @@
                 <a:t>Batch 0</a:t>
               </a:r>
               <a:endParaRPr sz="1200" b="1">
-                <a:ln/>
                 <a:solidFill>
                   <a:schemeClr val="accent1"/>
                 </a:solidFill>
@@ -7826,7 +7847,6 @@
               <a:pPr algn="l"/>
               <a:r>
                 <a:rPr sz="1200" b="1">
-                  <a:ln/>
                   <a:solidFill>
                     <a:schemeClr val="accent4"/>
                   </a:solidFill>
@@ -7836,7 +7856,6 @@
                 <a:t>Batch 1</a:t>
               </a:r>
               <a:endParaRPr sz="1200" b="1">
-                <a:ln/>
                 <a:solidFill>
                   <a:schemeClr val="accent4"/>
                 </a:solidFill>
@@ -7919,7 +7938,7 @@
         </p:nvGrpSpPr>
         <p:grpSpPr>
           <a:xfrm>
-            <a:off x="6121273" y="4928615"/>
+            <a:off x="6106033" y="4890515"/>
             <a:ext cx="4206240" cy="438912"/>
             <a:chOff x="4773168" y="3831335"/>
             <a:chExt cx="4206240" cy="438912"/>
@@ -8047,7 +8066,6 @@
               <a:pPr algn="l"/>
               <a:r>
                 <a:rPr sz="1200" b="1">
-                  <a:ln/>
                   <a:solidFill>
                     <a:schemeClr val="accent4"/>
                   </a:solidFill>
@@ -8057,7 +8075,6 @@
                 <a:t>Batch 1</a:t>
               </a:r>
               <a:endParaRPr sz="1200" b="1">
-                <a:ln/>
                 <a:solidFill>
                   <a:schemeClr val="accent4"/>
                 </a:solidFill>
@@ -8186,48 +8203,13 @@
       </p:sp>
       <p:sp>
         <p:nvSpPr>
-          <p:cNvPr id="62" name="GreedyGraphTitle"/>
-          <p:cNvSpPr txBox="1"/>
-          <p:nvPr/>
-        </p:nvSpPr>
-        <p:spPr>
-          <a:xfrm>
-            <a:off x="4773168" y="4425696"/>
-            <a:ext cx="2377440" cy="274320"/>
-          </a:xfrm>
-          <a:prstGeom prst="rect">
-            <a:avLst/>
-          </a:prstGeom>
-          <a:noFill/>
-        </p:spPr>
-        <p:txBody>
-          <a:bodyPr wrap="square" lIns="128016" rIns="128016" tIns="73152" bIns="54864" anchor="ctr">
-            <a:spAutoFit/>
-          </a:bodyPr>
-          <a:lstStyle/>
-          <a:p>
-            <a:pPr algn="l"/>
-            <a:r>
-              <a:rPr sz="1150" b="1">
-                <a:solidFill>
-                  <a:srgbClr val="2F6FAE"/>
-                </a:solidFill>
-                <a:latin typeface="Arial"/>
-              </a:rPr>
-              <a:t>DIRECTED EXPERT TRANSFERS</a:t>
-            </a:r>
-          </a:p>
-        </p:txBody>
-      </p:sp>
-      <p:sp>
-        <p:nvSpPr>
           <p:cNvPr id="63" name="GreedyGraphNode0"/>
           <p:cNvSpPr/>
           <p:nvPr/>
         </p:nvSpPr>
         <p:spPr>
           <a:xfrm>
-            <a:off x="6446520" y="4690872"/>
+            <a:off x="1592580" y="1879092"/>
             <a:ext cx="457200" cy="457200"/>
           </a:xfrm>
           <a:prstGeom prst="ellipse">
@@ -8257,7 +8239,7 @@
           </a:fontRef>
         </p:style>
         <p:txBody>
-          <a:bodyPr rtlCol="0" anchor="ctr" wrap="square" lIns="128016" rIns="128016" tIns="73152" bIns="54864"/>
+          <a:bodyPr wrap="square" lIns="128016" tIns="73152" rIns="128016" bIns="54864" rtlCol="0" anchor="ctr"/>
           <a:lstStyle/>
           <a:p>
             <a:pPr algn="ctr"/>
@@ -8266,10 +8248,16 @@
                 <a:solidFill>
                   <a:srgbClr val="14345B"/>
                 </a:solidFill>
-                <a:latin typeface="Arial"/>
+                <a:latin typeface="Arial" panose="020B0604020202020204"/>
               </a:rPr>
               <a:t>0</a:t>
             </a:r>
+            <a:endParaRPr sz="1300" b="1">
+              <a:solidFill>
+                <a:srgbClr val="14345B"/>
+              </a:solidFill>
+              <a:latin typeface="Arial" panose="020B0604020202020204"/>
+            </a:endParaRPr>
           </a:p>
         </p:txBody>
       </p:sp>
@@ -8281,7 +8269,7 @@
         </p:nvSpPr>
         <p:spPr>
           <a:xfrm>
-            <a:off x="9144000" y="4690872"/>
+            <a:off x="4290060" y="1879092"/>
             <a:ext cx="457200" cy="457200"/>
           </a:xfrm>
           <a:prstGeom prst="ellipse">
@@ -8311,7 +8299,7 @@
           </a:fontRef>
         </p:style>
         <p:txBody>
-          <a:bodyPr rtlCol="0" anchor="ctr" wrap="square" lIns="128016" rIns="128016" tIns="73152" bIns="54864"/>
+          <a:bodyPr wrap="square" lIns="128016" tIns="73152" rIns="128016" bIns="54864" rtlCol="0" anchor="ctr"/>
           <a:lstStyle/>
           <a:p>
             <a:pPr algn="ctr"/>
@@ -8320,10 +8308,16 @@
                 <a:solidFill>
                   <a:srgbClr val="14345B"/>
                 </a:solidFill>
-                <a:latin typeface="Arial"/>
+                <a:latin typeface="Arial" panose="020B0604020202020204"/>
               </a:rPr>
               <a:t>1</a:t>
             </a:r>
+            <a:endParaRPr sz="1300" b="1">
+              <a:solidFill>
+                <a:srgbClr val="14345B"/>
+              </a:solidFill>
+              <a:latin typeface="Arial" panose="020B0604020202020204"/>
+            </a:endParaRPr>
           </a:p>
         </p:txBody>
       </p:sp>
@@ -8335,7 +8329,7 @@
         </p:nvSpPr>
         <p:spPr>
           <a:xfrm>
-            <a:off x="9144000" y="5468112"/>
+            <a:off x="4290060" y="2656332"/>
             <a:ext cx="457200" cy="457200"/>
           </a:xfrm>
           <a:prstGeom prst="ellipse">
@@ -8365,7 +8359,7 @@
           </a:fontRef>
         </p:style>
         <p:txBody>
-          <a:bodyPr rtlCol="0" anchor="ctr" wrap="square" lIns="128016" rIns="128016" tIns="73152" bIns="54864"/>
+          <a:bodyPr wrap="square" lIns="128016" tIns="73152" rIns="128016" bIns="54864" rtlCol="0" anchor="ctr"/>
           <a:lstStyle/>
           <a:p>
             <a:pPr algn="ctr"/>
@@ -8374,10 +8368,16 @@
                 <a:solidFill>
                   <a:srgbClr val="14345B"/>
                 </a:solidFill>
-                <a:latin typeface="Arial"/>
+                <a:latin typeface="Arial" panose="020B0604020202020204"/>
               </a:rPr>
               <a:t>2</a:t>
             </a:r>
+            <a:endParaRPr sz="1300" b="1">
+              <a:solidFill>
+                <a:srgbClr val="14345B"/>
+              </a:solidFill>
+              <a:latin typeface="Arial" panose="020B0604020202020204"/>
+            </a:endParaRPr>
           </a:p>
         </p:txBody>
       </p:sp>
@@ -8389,7 +8389,7 @@
         </p:nvSpPr>
         <p:spPr>
           <a:xfrm>
-            <a:off x="6446520" y="5468112"/>
+            <a:off x="1592580" y="2656332"/>
             <a:ext cx="457200" cy="457200"/>
           </a:xfrm>
           <a:prstGeom prst="ellipse">
@@ -8419,7 +8419,7 @@
           </a:fontRef>
         </p:style>
         <p:txBody>
-          <a:bodyPr rtlCol="0" anchor="ctr" wrap="square" lIns="128016" rIns="128016" tIns="73152" bIns="54864"/>
+          <a:bodyPr wrap="square" lIns="128016" tIns="73152" rIns="128016" bIns="54864" rtlCol="0" anchor="ctr"/>
           <a:lstStyle/>
           <a:p>
             <a:pPr algn="ctr"/>
@@ -8428,10 +8428,16 @@
                 <a:solidFill>
                   <a:srgbClr val="14345B"/>
                 </a:solidFill>
-                <a:latin typeface="Arial"/>
+                <a:latin typeface="Arial" panose="020B0604020202020204"/>
               </a:rPr>
               <a:t>3</a:t>
             </a:r>
+            <a:endParaRPr sz="1300" b="1">
+              <a:solidFill>
+                <a:srgbClr val="14345B"/>
+              </a:solidFill>
+              <a:latin typeface="Arial" panose="020B0604020202020204"/>
+            </a:endParaRPr>
           </a:p>
         </p:txBody>
       </p:sp>
@@ -8443,7 +8449,7 @@
         </p:nvCxnSpPr>
         <p:spPr>
           <a:xfrm>
-            <a:off x="6903720" y="4919472"/>
+            <a:off x="2049780" y="2107692"/>
             <a:ext cx="2240280" cy="0"/>
           </a:xfrm>
           <a:prstGeom prst="line">
@@ -8479,7 +8485,7 @@
         </p:nvCxnSpPr>
         <p:spPr>
           <a:xfrm>
-            <a:off x="9372600" y="5148072"/>
+            <a:off x="4518660" y="2336292"/>
             <a:ext cx="0" cy="320040"/>
           </a:xfrm>
           <a:prstGeom prst="line">
@@ -8515,7 +8521,7 @@
         </p:nvCxnSpPr>
         <p:spPr>
           <a:xfrm flipH="1">
-            <a:off x="6903720" y="5696712"/>
+            <a:off x="2049780" y="2884932"/>
             <a:ext cx="2240280" cy="0"/>
           </a:xfrm>
           <a:prstGeom prst="line">
@@ -8551,7 +8557,7 @@
         </p:nvCxnSpPr>
         <p:spPr>
           <a:xfrm>
-            <a:off x="6675120" y="5148072"/>
+            <a:off x="1821180" y="2336292"/>
             <a:ext cx="0" cy="320040"/>
           </a:xfrm>
           <a:prstGeom prst="line">
@@ -8587,7 +8593,7 @@
         </p:nvSpPr>
         <p:spPr>
           <a:xfrm>
-            <a:off x="7498079" y="4645152"/>
+            <a:off x="2644139" y="1833372"/>
             <a:ext cx="1188720" cy="228600"/>
           </a:xfrm>
           <a:prstGeom prst="rect">
@@ -8596,7 +8602,7 @@
           <a:noFill/>
         </p:spPr>
         <p:txBody>
-          <a:bodyPr wrap="square" lIns="128016" rIns="128016" tIns="73152" bIns="54864" anchor="ctr">
+          <a:bodyPr wrap="square" lIns="128016" tIns="73152" rIns="128016" bIns="54864" anchor="ctr">
             <a:spAutoFit/>
           </a:bodyPr>
           <a:lstStyle/>
@@ -8609,10 +8615,16 @@
                 <a:solidFill>
                   <a:srgbClr val="14345B"/>
                 </a:solidFill>
-                <a:latin typeface="Arial"/>
+                <a:latin typeface="Arial" panose="020B0604020202020204"/>
               </a:rPr>
               <a:t>F₀  {E₁,E₇}</a:t>
             </a:r>
+            <a:endParaRPr sz="1150" b="1">
+              <a:solidFill>
+                <a:srgbClr val="14345B"/>
+              </a:solidFill>
+              <a:latin typeface="Arial" panose="020B0604020202020204"/>
+            </a:endParaRPr>
           </a:p>
         </p:txBody>
       </p:sp>
@@ -8624,7 +8636,7 @@
         </p:nvSpPr>
         <p:spPr>
           <a:xfrm>
-            <a:off x="9491472" y="5138928"/>
+            <a:off x="4424172" y="2327148"/>
             <a:ext cx="960120" cy="228600"/>
           </a:xfrm>
           <a:prstGeom prst="rect">
@@ -8633,7 +8645,7 @@
           <a:noFill/>
         </p:spPr>
         <p:txBody>
-          <a:bodyPr wrap="square" lIns="128016" rIns="128016" tIns="73152" bIns="54864" anchor="ctr">
+          <a:bodyPr wrap="square" lIns="128016" tIns="73152" rIns="128016" bIns="54864" anchor="ctr">
             <a:spAutoFit/>
           </a:bodyPr>
           <a:lstStyle/>
@@ -8646,10 +8658,16 @@
                 <a:solidFill>
                   <a:srgbClr val="14345B"/>
                 </a:solidFill>
-                <a:latin typeface="Arial"/>
+                <a:latin typeface="Arial" panose="020B0604020202020204"/>
               </a:rPr>
               <a:t>F₂  {E₄}</a:t>
             </a:r>
+            <a:endParaRPr sz="1150" b="1">
+              <a:solidFill>
+                <a:srgbClr val="14345B"/>
+              </a:solidFill>
+              <a:latin typeface="Arial" panose="020B0604020202020204"/>
+            </a:endParaRPr>
           </a:p>
         </p:txBody>
       </p:sp>
@@ -8661,7 +8679,7 @@
         </p:nvSpPr>
         <p:spPr>
           <a:xfrm>
-            <a:off x="7607808" y="5742432"/>
+            <a:off x="2753868" y="2930652"/>
             <a:ext cx="960120" cy="228600"/>
           </a:xfrm>
           <a:prstGeom prst="rect">
@@ -8670,7 +8688,7 @@
           <a:noFill/>
         </p:spPr>
         <p:txBody>
-          <a:bodyPr wrap="square" lIns="128016" rIns="128016" tIns="73152" bIns="54864" anchor="ctr">
+          <a:bodyPr wrap="square" lIns="128016" tIns="73152" rIns="128016" bIns="54864" anchor="ctr">
             <a:spAutoFit/>
           </a:bodyPr>
           <a:lstStyle/>
@@ -8683,10 +8701,16 @@
                 <a:solidFill>
                   <a:srgbClr val="14345B"/>
                 </a:solidFill>
-                <a:latin typeface="Arial"/>
+                <a:latin typeface="Arial" panose="020B0604020202020204"/>
               </a:rPr>
               <a:t>F₁  {E₃}</a:t>
             </a:r>
+            <a:endParaRPr sz="1150" b="1">
+              <a:solidFill>
+                <a:srgbClr val="14345B"/>
+              </a:solidFill>
+              <a:latin typeface="Arial" panose="020B0604020202020204"/>
+            </a:endParaRPr>
           </a:p>
         </p:txBody>
       </p:sp>
@@ -8698,7 +8722,7 @@
         </p:nvSpPr>
         <p:spPr>
           <a:xfrm>
-            <a:off x="5532120" y="5138928"/>
+            <a:off x="967740" y="2327148"/>
             <a:ext cx="960120" cy="228600"/>
           </a:xfrm>
           <a:prstGeom prst="rect">
@@ -8707,7 +8731,7 @@
           <a:noFill/>
         </p:spPr>
         <p:txBody>
-          <a:bodyPr wrap="square" lIns="128016" rIns="128016" tIns="73152" bIns="54864" anchor="ctr">
+          <a:bodyPr wrap="square" lIns="128016" tIns="73152" rIns="128016" bIns="54864" anchor="ctr">
             <a:spAutoFit/>
           </a:bodyPr>
           <a:lstStyle/>
@@ -8720,10 +8744,42 @@
                 <a:solidFill>
                   <a:srgbClr val="14345B"/>
                 </a:solidFill>
-                <a:latin typeface="Arial"/>
+                <a:latin typeface="Arial" panose="020B0604020202020204"/>
               </a:rPr>
               <a:t>F₃  {E₉}</a:t>
             </a:r>
+            <a:endParaRPr sz="1150" b="1">
+              <a:solidFill>
+                <a:srgbClr val="14345B"/>
+              </a:solidFill>
+              <a:latin typeface="Arial" panose="020B0604020202020204"/>
+            </a:endParaRPr>
+          </a:p>
+        </p:txBody>
+      </p:sp>
+      <p:sp>
+        <p:nvSpPr>
+          <p:cNvPr id="2" name="灯片编号占位符 1"/>
+          <p:cNvSpPr>
+            <a:spLocks noGrp="1"/>
+          </p:cNvSpPr>
+          <p:nvPr>
+            <p:ph type="sldNum" sz="quarter" idx="12"/>
+          </p:nvPr>
+        </p:nvSpPr>
+        <p:spPr>
+          <a:xfrm>
+            <a:off x="9884410" y="6374130"/>
+            <a:ext cx="2133600" cy="365125"/>
+          </a:xfrm>
+        </p:spPr>
+        <p:txBody>
+          <a:bodyPr/>
+          <a:p>
+            <a:fld id="{C1FF6DA9-008F-8B48-92A6-B652298478BF}" type="slidenum">
+              <a:rPr lang="en-US" smtClean="0"/>
+            </a:fld>
+            <a:endParaRPr lang="en-US"/>
           </a:p>
         </p:txBody>
       </p:sp>
@@ -11112,7 +11168,12 @@
             <p:ph type="sldNum" sz="quarter" idx="12"/>
           </p:nvPr>
         </p:nvSpPr>
-        <p:spPr/>
+        <p:spPr>
+          <a:xfrm>
+            <a:off x="9861550" y="6356350"/>
+            <a:ext cx="2133600" cy="365125"/>
+          </a:xfrm>
+        </p:spPr>
         <p:txBody>
           <a:bodyPr/>
           <a:p>
@@ -14566,7 +14627,12 @@
             <p:ph type="sldNum" sz="quarter" idx="12"/>
           </p:nvPr>
         </p:nvSpPr>
-        <p:spPr/>
+        <p:spPr>
+          <a:xfrm>
+            <a:off x="9892030" y="6356350"/>
+            <a:ext cx="2133600" cy="365125"/>
+          </a:xfrm>
+        </p:spPr>
         <p:txBody>
           <a:bodyPr/>
           <a:p>
@@ -15352,7 +15418,12 @@
             <p:ph type="sldNum" sz="quarter" idx="12"/>
           </p:nvPr>
         </p:nvSpPr>
-        <p:spPr/>
+        <p:spPr>
+          <a:xfrm>
+            <a:off x="9884410" y="6356350"/>
+            <a:ext cx="2133600" cy="365125"/>
+          </a:xfrm>
+        </p:spPr>
         <p:txBody>
           <a:bodyPr/>
           <a:p>
@@ -16052,7 +16123,12 @@
             <p:ph type="sldNum" sz="quarter" idx="12"/>
           </p:nvPr>
         </p:nvSpPr>
-        <p:spPr/>
+        <p:spPr>
+          <a:xfrm>
+            <a:off x="9893935" y="6372225"/>
+            <a:ext cx="2133600" cy="365125"/>
+          </a:xfrm>
+        </p:spPr>
         <p:txBody>
           <a:bodyPr/>
           <a:p>
@@ -16083,31 +16159,80 @@
       <p:grpSpPr/>
       <p:sp>
         <p:nvSpPr>
-          <p:cNvPr id="23" name="矩形 22"/>
+          <p:cNvPr id="15" name="单圆角矩形 14"/>
           <p:cNvSpPr/>
           <p:nvPr/>
         </p:nvSpPr>
         <p:spPr>
-          <a:xfrm>
-            <a:off x="2453640" y="4803775"/>
-            <a:ext cx="408305" cy="599440"/>
-          </a:xfrm>
-          <a:prstGeom prst="rect">
+          <a:xfrm flipH="1">
+            <a:off x="720725" y="2535555"/>
+            <a:ext cx="3909060" cy="3641725"/>
+          </a:xfrm>
+          <a:prstGeom prst="round1Rect">
             <a:avLst/>
           </a:prstGeom>
           <a:solidFill>
-            <a:schemeClr val="accent6"/>
+            <a:schemeClr val="bg1">
+              <a:lumMod val="95000"/>
+            </a:schemeClr>
           </a:solidFill>
+          <a:ln>
+            <a:noFill/>
+          </a:ln>
         </p:spPr>
         <p:style>
-          <a:lnRef idx="0">
-            <a:srgbClr val="FFFFFF"/>
+          <a:lnRef idx="1">
+            <a:schemeClr val="accent1"/>
           </a:lnRef>
-          <a:fillRef idx="1">
+          <a:fillRef idx="3">
             <a:schemeClr val="accent1"/>
           </a:fillRef>
-          <a:effectRef idx="0">
-            <a:srgbClr val="FFFFFF"/>
+          <a:effectRef idx="2">
+            <a:schemeClr val="accent1"/>
+          </a:effectRef>
+          <a:fontRef idx="minor">
+            <a:schemeClr val="lt1"/>
+          </a:fontRef>
+        </p:style>
+        <p:txBody>
+          <a:bodyPr/>
+          <a:p>
+            <a:endParaRPr lang="zh-CN" altLang="en-US"/>
+          </a:p>
+        </p:txBody>
+      </p:sp>
+      <p:sp>
+        <p:nvSpPr>
+          <p:cNvPr id="14" name="单圆角矩形 13"/>
+          <p:cNvSpPr/>
+          <p:nvPr/>
+        </p:nvSpPr>
+        <p:spPr>
+          <a:xfrm>
+            <a:off x="7284085" y="2535555"/>
+            <a:ext cx="4267200" cy="3641725"/>
+          </a:xfrm>
+          <a:prstGeom prst="round1Rect">
+            <a:avLst/>
+          </a:prstGeom>
+          <a:solidFill>
+            <a:schemeClr val="bg1">
+              <a:lumMod val="95000"/>
+            </a:schemeClr>
+          </a:solidFill>
+          <a:ln>
+            <a:noFill/>
+          </a:ln>
+        </p:spPr>
+        <p:style>
+          <a:lnRef idx="1">
+            <a:schemeClr val="accent1"/>
+          </a:lnRef>
+          <a:fillRef idx="3">
+            <a:schemeClr val="accent1"/>
+          </a:fillRef>
+          <a:effectRef idx="2">
+            <a:schemeClr val="accent1"/>
           </a:effectRef>
           <a:fontRef idx="minor">
             <a:schemeClr val="lt1"/>
@@ -16277,7 +16402,7 @@
           </a:fontRef>
         </p:style>
         <p:txBody>
-          <a:bodyPr rtlCol="0" anchor="ctr" wrap="square" lIns="128016" rIns="128016" tIns="73152" bIns="54864"/>
+          <a:bodyPr wrap="square" lIns="128016" tIns="73152" rIns="128016" bIns="54864" rtlCol="0" anchor="ctr"/>
           <a:lstStyle/>
           <a:p>
             <a:pPr algn="ctr"/>
@@ -16286,34 +16411,183 @@
                 <a:solidFill>
                   <a:srgbClr val="14345B"/>
                 </a:solidFill>
-                <a:latin typeface="Arial"/>
-              </a:rPr>
-              <a:t>PURPOSE   Is the added scheduler cost small compared with the serving time saved?</a:t>
-            </a:r>
-          </a:p>
-        </p:txBody>
-      </p:sp>
-      <p:sp>
-        <p:nvSpPr>
-          <p:cNvPr id="25" name="Rounded Rectangle 24"/>
+                <a:latin typeface="Arial" panose="020B0604020202020204"/>
+              </a:rPr>
+              <a:t>PURPOSE   Is </a:t>
+            </a:r>
+            <a:r>
+              <a:rPr sz="1700" b="1">
+                <a:ln/>
+                <a:solidFill>
+                  <a:schemeClr val="accent1"/>
+                </a:solidFill>
+                <a:effectLst>
+                  <a:outerShdw blurRad="38100" dist="25400" dir="5400000" algn="ctr" rotWithShape="0">
+                    <a:srgbClr val="6E747A">
+                      <a:alpha val="43000"/>
+                    </a:srgbClr>
+                  </a:outerShdw>
+                </a:effectLst>
+                <a:latin typeface="Arial" panose="020B0604020202020204"/>
+              </a:rPr>
+              <a:t>the added scheduler cost</a:t>
+            </a:r>
+            <a:r>
+              <a:rPr sz="1700" b="1">
+                <a:solidFill>
+                  <a:srgbClr val="14345B"/>
+                </a:solidFill>
+                <a:latin typeface="Arial" panose="020B0604020202020204"/>
+              </a:rPr>
+              <a:t> </a:t>
+            </a:r>
+            <a:r>
+              <a:rPr lang="en-US" sz="1700" b="1">
+                <a:solidFill>
+                  <a:srgbClr val="14345B"/>
+                </a:solidFill>
+                <a:latin typeface="Arial" panose="020B0604020202020204"/>
+              </a:rPr>
+              <a:t>&lt;</a:t>
+            </a:r>
+            <a:r>
+              <a:rPr sz="1700" b="1">
+                <a:solidFill>
+                  <a:srgbClr val="14345B"/>
+                </a:solidFill>
+                <a:latin typeface="Arial" panose="020B0604020202020204"/>
+              </a:rPr>
+              <a:t> </a:t>
+            </a:r>
+            <a:r>
+              <a:rPr sz="1700" b="1">
+                <a:ln/>
+                <a:solidFill>
+                  <a:schemeClr val="accent1"/>
+                </a:solidFill>
+                <a:effectLst>
+                  <a:outerShdw blurRad="38100" dist="25400" dir="5400000" algn="ctr" rotWithShape="0">
+                    <a:srgbClr val="6E747A">
+                      <a:alpha val="43000"/>
+                    </a:srgbClr>
+                  </a:outerShdw>
+                </a:effectLst>
+                <a:latin typeface="Arial" panose="020B0604020202020204"/>
+              </a:rPr>
+              <a:t>the serving time saved</a:t>
+            </a:r>
+            <a:r>
+              <a:rPr sz="1700" b="1">
+                <a:solidFill>
+                  <a:srgbClr val="14345B"/>
+                </a:solidFill>
+                <a:latin typeface="Arial" panose="020B0604020202020204"/>
+              </a:rPr>
+              <a:t>?</a:t>
+            </a:r>
+            <a:endParaRPr sz="1700" b="1">
+              <a:solidFill>
+                <a:srgbClr val="14345B"/>
+              </a:solidFill>
+              <a:latin typeface="Arial" panose="020B0604020202020204"/>
+            </a:endParaRPr>
+          </a:p>
+        </p:txBody>
+      </p:sp>
+      <p:cxnSp>
+        <p:nvCxnSpPr>
+          <p:cNvPr id="2" name="直接箭头连接符 1"/>
+          <p:cNvCxnSpPr/>
+          <p:nvPr/>
+        </p:nvCxnSpPr>
+        <p:spPr>
+          <a:xfrm flipV="1">
+            <a:off x="1498600" y="2861945"/>
+            <a:ext cx="0" cy="2958465"/>
+          </a:xfrm>
+          <a:prstGeom prst="straightConnector1">
+            <a:avLst/>
+          </a:prstGeom>
+          <a:ln>
+            <a:solidFill>
+              <a:schemeClr val="tx1"/>
+            </a:solidFill>
+            <a:tailEnd type="arrow"/>
+          </a:ln>
+        </p:spPr>
+        <p:style>
+          <a:lnRef idx="2">
+            <a:schemeClr val="accent1"/>
+          </a:lnRef>
+          <a:fillRef idx="0">
+            <a:schemeClr val="accent1"/>
+          </a:fillRef>
+          <a:effectRef idx="1">
+            <a:schemeClr val="accent1"/>
+          </a:effectRef>
+          <a:fontRef idx="minor">
+            <a:schemeClr val="tx1"/>
+          </a:fontRef>
+        </p:style>
+      </p:cxnSp>
+      <p:cxnSp>
+        <p:nvCxnSpPr>
+          <p:cNvPr id="5" name="直接箭头连接符 4"/>
+          <p:cNvCxnSpPr/>
+          <p:nvPr/>
+        </p:nvCxnSpPr>
+        <p:spPr>
+          <a:xfrm>
+            <a:off x="1164590" y="5594985"/>
+            <a:ext cx="3237865" cy="15240"/>
+          </a:xfrm>
+          <a:prstGeom prst="straightConnector1">
+            <a:avLst/>
+          </a:prstGeom>
+          <a:ln>
+            <a:solidFill>
+              <a:schemeClr val="tx1"/>
+            </a:solidFill>
+            <a:tailEnd type="arrow"/>
+          </a:ln>
+        </p:spPr>
+        <p:style>
+          <a:lnRef idx="2">
+            <a:schemeClr val="accent1"/>
+          </a:lnRef>
+          <a:fillRef idx="0">
+            <a:schemeClr val="accent1"/>
+          </a:fillRef>
+          <a:effectRef idx="1">
+            <a:schemeClr val="accent1"/>
+          </a:effectRef>
+          <a:fontRef idx="minor">
+            <a:schemeClr val="tx1"/>
+          </a:fontRef>
+        </p:style>
+      </p:cxnSp>
+      <p:sp>
+        <p:nvSpPr>
+          <p:cNvPr id="7" name="矩形 6"/>
           <p:cNvSpPr/>
           <p:nvPr/>
         </p:nvSpPr>
         <p:spPr>
           <a:xfrm>
-            <a:off x="640080" y="2514600"/>
-            <a:ext cx="3154680" cy="2240280"/>
-          </a:xfrm>
-          <a:prstGeom prst="roundRect">
+            <a:off x="2251710" y="4671060"/>
+            <a:ext cx="582295" cy="923925"/>
+          </a:xfrm>
+          <a:prstGeom prst="rect">
             <a:avLst/>
           </a:prstGeom>
           <a:solidFill>
-            <a:srgbClr val="FFFFFF"/>
+            <a:schemeClr val="tx2">
+              <a:lumMod val="40000"/>
+              <a:lumOff val="60000"/>
+            </a:schemeClr>
           </a:solidFill>
-          <a:ln w="20320">
-            <a:solidFill>
-              <a:srgbClr val="7D48A1"/>
-            </a:solidFill>
+          <a:ln>
+            <a:noFill/>
           </a:ln>
         </p:spPr>
         <p:style>
@@ -16331,23 +16605,22 @@
           </a:fontRef>
         </p:style>
         <p:txBody>
-          <a:bodyPr rtlCol="0" anchor="ctr"/>
-          <a:lstStyle/>
-          <a:p>
-            <a:pPr algn="ctr"/>
-          </a:p>
-        </p:txBody>
-      </p:sp>
-      <p:sp>
-        <p:nvSpPr>
-          <p:cNvPr id="26" name="TextBox 25"/>
+          <a:bodyPr/>
+          <a:p>
+            <a:endParaRPr lang="zh-CN" altLang="en-US"/>
+          </a:p>
+        </p:txBody>
+      </p:sp>
+      <p:sp>
+        <p:nvSpPr>
+          <p:cNvPr id="8" name="文本框 7"/>
           <p:cNvSpPr txBox="1"/>
           <p:nvPr/>
         </p:nvSpPr>
         <p:spPr>
           <a:xfrm>
-            <a:off x="841247" y="2697480"/>
-            <a:ext cx="2743200" cy="384048"/>
+            <a:off x="1633220" y="4316730"/>
+            <a:ext cx="2083435" cy="469265"/>
           </a:xfrm>
           <a:prstGeom prst="rect">
             <a:avLst/>
@@ -16355,81 +16628,117 @@
           <a:noFill/>
         </p:spPr>
         <p:txBody>
-          <a:bodyPr wrap="square" lIns="128016" rIns="128016" tIns="73152" bIns="54864" anchor="ctr">
-            <a:spAutoFit/>
+          <a:bodyPr wrap="square" rtlCol="0">
+            <a:noAutofit/>
           </a:bodyPr>
-          <a:lstStyle/>
-          <a:p>
-            <a:pPr algn="l"/>
-            <a:r>
-              <a:rPr sz="1500" b="1">
-                <a:solidFill>
-                  <a:srgbClr val="7D48A1"/>
-                </a:solidFill>
-                <a:latin typeface="Arial"/>
-              </a:rPr>
-              <a:t>1   PROFILE COST</a:t>
-            </a:r>
-          </a:p>
-        </p:txBody>
-      </p:sp>
-      <p:sp>
-        <p:nvSpPr>
-          <p:cNvPr id="27" name="TextBox 26"/>
-          <p:cNvSpPr txBox="1"/>
-          <p:nvPr/>
-        </p:nvSpPr>
-        <p:spPr>
-          <a:xfrm>
-            <a:off x="841247" y="3127248"/>
-            <a:ext cx="2743200" cy="1353312"/>
-          </a:xfrm>
-          <a:prstGeom prst="rect">
-            <a:avLst/>
-          </a:prstGeom>
-          <a:noFill/>
-        </p:spPr>
-        <p:txBody>
-          <a:bodyPr wrap="square" lIns="128016" rIns="128016" tIns="73152" bIns="54864" anchor="ctr">
-            <a:spAutoFit/>
-          </a:bodyPr>
-          <a:lstStyle/>
-          <a:p>
-            <a:pPr algn="l"/>
-            <a:r>
-              <a:rPr sz="1350" b="0">
-                <a:solidFill>
-                  <a:srgbClr val="1F3046"/>
-                </a:solidFill>
-                <a:latin typeface="Arial"/>
-              </a:rPr>
-              <a:t>Add an NVTX range around the cycle-wide greedy scheduler.
-Nsight Systems records every call on all four Ray workers.</a:t>
-            </a:r>
-          </a:p>
-        </p:txBody>
-      </p:sp>
-      <p:sp>
-        <p:nvSpPr>
-          <p:cNvPr id="28" name="Rounded Rectangle 27"/>
+          <a:p>
+            <a:r>
+              <a:rPr lang="en-US" altLang="zh-CN"/>
+              <a:t>Extra </a:t>
+            </a:r>
+            <a:r>
+              <a:rPr lang="en-US" altLang="zh-CN"/>
+              <a:t>schedule </a:t>
+            </a:r>
+            <a:r>
+              <a:rPr lang="en-US" altLang="zh-CN"/>
+              <a:t>time</a:t>
+            </a:r>
+            <a:endParaRPr lang="en-US" altLang="zh-CN"/>
+          </a:p>
+        </p:txBody>
+      </p:sp>
+      <p:cxnSp>
+        <p:nvCxnSpPr>
+          <p:cNvPr id="9" name="直接箭头连接符 8"/>
+          <p:cNvCxnSpPr/>
+          <p:nvPr/>
+        </p:nvCxnSpPr>
+        <p:spPr>
+          <a:xfrm flipV="1">
+            <a:off x="8078470" y="2877185"/>
+            <a:ext cx="0" cy="2958465"/>
+          </a:xfrm>
+          <a:prstGeom prst="straightConnector1">
+            <a:avLst/>
+          </a:prstGeom>
+          <a:ln>
+            <a:solidFill>
+              <a:schemeClr val="tx1"/>
+            </a:solidFill>
+            <a:tailEnd type="arrow"/>
+          </a:ln>
+        </p:spPr>
+        <p:style>
+          <a:lnRef idx="2">
+            <a:schemeClr val="accent1"/>
+          </a:lnRef>
+          <a:fillRef idx="0">
+            <a:schemeClr val="accent1"/>
+          </a:fillRef>
+          <a:effectRef idx="1">
+            <a:schemeClr val="accent1"/>
+          </a:effectRef>
+          <a:fontRef idx="minor">
+            <a:schemeClr val="tx1"/>
+          </a:fontRef>
+        </p:style>
+      </p:cxnSp>
+      <p:cxnSp>
+        <p:nvCxnSpPr>
+          <p:cNvPr id="10" name="直接箭头连接符 9"/>
+          <p:cNvCxnSpPr/>
+          <p:nvPr/>
+        </p:nvCxnSpPr>
+        <p:spPr>
+          <a:xfrm>
+            <a:off x="7744460" y="5610225"/>
+            <a:ext cx="3237865" cy="15240"/>
+          </a:xfrm>
+          <a:prstGeom prst="straightConnector1">
+            <a:avLst/>
+          </a:prstGeom>
+          <a:ln>
+            <a:solidFill>
+              <a:schemeClr val="tx1"/>
+            </a:solidFill>
+            <a:tailEnd type="arrow"/>
+          </a:ln>
+        </p:spPr>
+        <p:style>
+          <a:lnRef idx="2">
+            <a:schemeClr val="accent1"/>
+          </a:lnRef>
+          <a:fillRef idx="0">
+            <a:schemeClr val="accent1"/>
+          </a:fillRef>
+          <a:effectRef idx="1">
+            <a:schemeClr val="accent1"/>
+          </a:effectRef>
+          <a:fontRef idx="minor">
+            <a:schemeClr val="tx1"/>
+          </a:fontRef>
+        </p:style>
+      </p:cxnSp>
+      <p:sp>
+        <p:nvSpPr>
+          <p:cNvPr id="11" name="矩形 10"/>
           <p:cNvSpPr/>
           <p:nvPr/>
         </p:nvSpPr>
         <p:spPr>
           <a:xfrm>
-            <a:off x="4517136" y="2514600"/>
-            <a:ext cx="3154680" cy="2240280"/>
-          </a:xfrm>
-          <a:prstGeom prst="roundRect">
+            <a:off x="8831580" y="3646170"/>
+            <a:ext cx="582295" cy="1964055"/>
+          </a:xfrm>
+          <a:prstGeom prst="rect">
             <a:avLst/>
           </a:prstGeom>
           <a:solidFill>
-            <a:srgbClr val="FFFFFF"/>
+            <a:schemeClr val="accent1"/>
           </a:solidFill>
-          <a:ln w="20320">
-            <a:solidFill>
-              <a:srgbClr val="E67E22"/>
-            </a:solidFill>
+          <a:ln>
+            <a:noFill/>
           </a:ln>
         </p:spPr>
         <p:style>
@@ -16447,23 +16756,22 @@
           </a:fontRef>
         </p:style>
         <p:txBody>
-          <a:bodyPr rtlCol="0" anchor="ctr"/>
-          <a:lstStyle/>
-          <a:p>
-            <a:pPr algn="ctr"/>
-          </a:p>
-        </p:txBody>
-      </p:sp>
-      <p:sp>
-        <p:nvSpPr>
-          <p:cNvPr id="29" name="TextBox 28"/>
+          <a:bodyPr/>
+          <a:p>
+            <a:endParaRPr lang="zh-CN" altLang="en-US"/>
+          </a:p>
+        </p:txBody>
+      </p:sp>
+      <p:sp>
+        <p:nvSpPr>
+          <p:cNvPr id="12" name="文本框 11"/>
           <p:cNvSpPr txBox="1"/>
           <p:nvPr/>
         </p:nvSpPr>
         <p:spPr>
           <a:xfrm>
-            <a:off x="4718304" y="2697480"/>
-            <a:ext cx="2743200" cy="384048"/>
+            <a:off x="8213090" y="3337560"/>
+            <a:ext cx="2083435" cy="469265"/>
           </a:xfrm>
           <a:prstGeom prst="rect">
             <a:avLst/>
@@ -16471,313 +16779,98 @@
           <a:noFill/>
         </p:spPr>
         <p:txBody>
-          <a:bodyPr wrap="square" lIns="128016" rIns="128016" tIns="73152" bIns="54864" anchor="ctr">
+          <a:bodyPr wrap="square" rtlCol="0">
+            <a:noAutofit/>
+          </a:bodyPr>
+          <a:p>
+            <a:r>
+              <a:rPr lang="en-US" altLang="zh-CN"/>
+              <a:t>Saved serving </a:t>
+            </a:r>
+            <a:r>
+              <a:rPr lang="en-US" altLang="zh-CN"/>
+              <a:t>time</a:t>
+            </a:r>
+            <a:endParaRPr lang="en-US" altLang="zh-CN"/>
+          </a:p>
+        </p:txBody>
+      </p:sp>
+      <p:sp>
+        <p:nvSpPr>
+          <p:cNvPr id="13" name="文本框 12"/>
+          <p:cNvSpPr txBox="1"/>
+          <p:nvPr/>
+        </p:nvSpPr>
+        <p:spPr>
+          <a:xfrm>
+            <a:off x="5333365" y="3618230"/>
+            <a:ext cx="1524635" cy="1445260"/>
+          </a:xfrm>
+          <a:prstGeom prst="rect">
+            <a:avLst/>
+          </a:prstGeom>
+          <a:noFill/>
+        </p:spPr>
+        <p:txBody>
+          <a:bodyPr wrap="square" rtlCol="0">
             <a:spAutoFit/>
           </a:bodyPr>
-          <a:lstStyle/>
-          <a:p>
-            <a:pPr algn="l"/>
-            <a:r>
-              <a:rPr sz="1500" b="1">
-                <a:solidFill>
-                  <a:srgbClr val="E67E22"/>
-                </a:solidFill>
-                <a:latin typeface="Arial"/>
-              </a:rPr>
-              <a:t>2   AGGREGATE</a:t>
-            </a:r>
-          </a:p>
-        </p:txBody>
-      </p:sp>
-      <p:sp>
-        <p:nvSpPr>
-          <p:cNvPr id="30" name="TextBox 29"/>
-          <p:cNvSpPr txBox="1"/>
-          <p:nvPr/>
-        </p:nvSpPr>
-        <p:spPr>
-          <a:xfrm>
-            <a:off x="4718304" y="3127248"/>
-            <a:ext cx="2743200" cy="1353312"/>
-          </a:xfrm>
-          <a:prstGeom prst="rect">
-            <a:avLst/>
-          </a:prstGeom>
-          <a:noFill/>
-        </p:spPr>
-        <p:txBody>
-          <a:bodyPr wrap="square" lIns="128016" rIns="128016" tIns="73152" bIns="54864" anchor="ctr">
-            <a:spAutoFit/>
-          </a:bodyPr>
-          <a:lstStyle/>
-          <a:p>
-            <a:pPr algn="l"/>
-            <a:r>
-              <a:rPr sz="1350" b="0">
-                <a:solidFill>
-                  <a:srgbClr val="1F3046"/>
-                </a:solidFill>
-                <a:latin typeface="Arial"/>
-              </a:rPr>
-              <a:t>Each call builds schedules for all 48 MoE layers.
-Sum call time per rank and use the largest rank total.</a:t>
-            </a:r>
-          </a:p>
-        </p:txBody>
-      </p:sp>
-      <p:sp>
-        <p:nvSpPr>
-          <p:cNvPr id="31" name="Rounded Rectangle 30"/>
-          <p:cNvSpPr/>
-          <p:nvPr/>
-        </p:nvSpPr>
-        <p:spPr>
-          <a:xfrm>
-            <a:off x="8394192" y="2514600"/>
-            <a:ext cx="3154680" cy="2240280"/>
-          </a:xfrm>
-          <a:prstGeom prst="roundRect">
-            <a:avLst/>
-          </a:prstGeom>
-          <a:solidFill>
-            <a:srgbClr val="FFFFFF"/>
-          </a:solidFill>
-          <a:ln w="20320">
-            <a:solidFill>
-              <a:srgbClr val="138F5F"/>
-            </a:solidFill>
-          </a:ln>
-        </p:spPr>
-        <p:style>
-          <a:lnRef idx="1">
-            <a:schemeClr val="accent1"/>
-          </a:lnRef>
-          <a:fillRef idx="3">
-            <a:schemeClr val="accent1"/>
-          </a:fillRef>
-          <a:effectRef idx="2">
-            <a:schemeClr val="accent1"/>
-          </a:effectRef>
-          <a:fontRef idx="minor">
-            <a:schemeClr val="lt1"/>
-          </a:fontRef>
-        </p:style>
-        <p:txBody>
-          <a:bodyPr rtlCol="0" anchor="ctr"/>
-          <a:lstStyle/>
-          <a:p>
-            <a:pPr algn="ctr"/>
-          </a:p>
-        </p:txBody>
-      </p:sp>
-      <p:sp>
-        <p:nvSpPr>
-          <p:cNvPr id="32" name="TextBox 31"/>
-          <p:cNvSpPr txBox="1"/>
-          <p:nvPr/>
-        </p:nvSpPr>
-        <p:spPr>
-          <a:xfrm>
-            <a:off x="8595360" y="2697480"/>
-            <a:ext cx="2743200" cy="384048"/>
-          </a:xfrm>
-          <a:prstGeom prst="rect">
-            <a:avLst/>
-          </a:prstGeom>
-          <a:noFill/>
-        </p:spPr>
-        <p:txBody>
-          <a:bodyPr wrap="square" lIns="128016" rIns="128016" tIns="73152" bIns="54864" anchor="ctr">
-            <a:spAutoFit/>
-          </a:bodyPr>
-          <a:lstStyle/>
-          <a:p>
-            <a:pPr algn="l"/>
-            <a:r>
-              <a:rPr sz="1500" b="1">
-                <a:solidFill>
-                  <a:srgbClr val="138F5F"/>
-                </a:solidFill>
-                <a:latin typeface="Arial"/>
-              </a:rPr>
-              <a:t>3   MEASURE BENEFIT</a:t>
-            </a:r>
-          </a:p>
-        </p:txBody>
-      </p:sp>
-      <p:sp>
-        <p:nvSpPr>
-          <p:cNvPr id="33" name="TextBox 32"/>
-          <p:cNvSpPr txBox="1"/>
-          <p:nvPr/>
-        </p:nvSpPr>
-        <p:spPr>
-          <a:xfrm>
-            <a:off x="8595360" y="3127248"/>
-            <a:ext cx="2743200" cy="1353312"/>
-          </a:xfrm>
-          <a:prstGeom prst="rect">
-            <a:avLst/>
-          </a:prstGeom>
-          <a:noFill/>
-        </p:spPr>
-        <p:txBody>
-          <a:bodyPr wrap="square" lIns="128016" rIns="128016" tIns="73152" bIns="54864" anchor="ctr">
-            <a:spAutoFit/>
-          </a:bodyPr>
-          <a:lstStyle/>
-          <a:p>
-            <a:pPr algn="l"/>
-            <a:r>
-              <a:rPr sz="1350" b="0">
-                <a:solidFill>
-                  <a:srgbClr val="1F3046"/>
-                </a:solidFill>
-                <a:latin typeface="Arial"/>
-              </a:rPr>
-              <a:t>Run a clean async E2E A/B with identical settings and no profiler.
-Saved time = batching OFF − batching ON.</a:t>
-            </a:r>
-          </a:p>
-        </p:txBody>
-      </p:sp>
-      <p:sp>
-        <p:nvSpPr>
-          <p:cNvPr id="34" name="Chevron 33"/>
-          <p:cNvSpPr/>
-          <p:nvPr/>
-        </p:nvSpPr>
-        <p:spPr>
-          <a:xfrm>
-            <a:off x="3950208" y="3310128"/>
-            <a:ext cx="384048" cy="502920"/>
-          </a:xfrm>
-          <a:prstGeom prst="chevron">
-            <a:avLst/>
-          </a:prstGeom>
-          <a:solidFill>
-            <a:srgbClr val="2F6FAE"/>
-          </a:solidFill>
-          <a:ln>
-            <a:noFill/>
-          </a:ln>
-        </p:spPr>
-        <p:style>
-          <a:lnRef idx="1">
-            <a:schemeClr val="accent1"/>
-          </a:lnRef>
-          <a:fillRef idx="3">
-            <a:schemeClr val="accent1"/>
-          </a:fillRef>
-          <a:effectRef idx="2">
-            <a:schemeClr val="accent1"/>
-          </a:effectRef>
-          <a:fontRef idx="minor">
-            <a:schemeClr val="lt1"/>
-          </a:fontRef>
-        </p:style>
-        <p:txBody>
-          <a:bodyPr rtlCol="0" anchor="ctr"/>
-          <a:lstStyle/>
-          <a:p>
-            <a:pPr algn="ctr"/>
-          </a:p>
-        </p:txBody>
-      </p:sp>
-      <p:sp>
-        <p:nvSpPr>
-          <p:cNvPr id="35" name="Chevron 34"/>
-          <p:cNvSpPr/>
-          <p:nvPr/>
-        </p:nvSpPr>
-        <p:spPr>
-          <a:xfrm>
-            <a:off x="7827264" y="3310128"/>
-            <a:ext cx="384048" cy="502920"/>
-          </a:xfrm>
-          <a:prstGeom prst="chevron">
-            <a:avLst/>
-          </a:prstGeom>
-          <a:solidFill>
-            <a:srgbClr val="2F6FAE"/>
-          </a:solidFill>
-          <a:ln>
-            <a:noFill/>
-          </a:ln>
-        </p:spPr>
-        <p:style>
-          <a:lnRef idx="1">
-            <a:schemeClr val="accent1"/>
-          </a:lnRef>
-          <a:fillRef idx="3">
-            <a:schemeClr val="accent1"/>
-          </a:fillRef>
-          <a:effectRef idx="2">
-            <a:schemeClr val="accent1"/>
-          </a:effectRef>
-          <a:fontRef idx="minor">
-            <a:schemeClr val="lt1"/>
-          </a:fontRef>
-        </p:style>
-        <p:txBody>
-          <a:bodyPr rtlCol="0" anchor="ctr"/>
-          <a:lstStyle/>
-          <a:p>
-            <a:pPr algn="ctr"/>
-          </a:p>
-        </p:txBody>
-      </p:sp>
-      <p:sp>
-        <p:nvSpPr>
-          <p:cNvPr id="36" name="Rounded Rectangle 35"/>
-          <p:cNvSpPr/>
-          <p:nvPr/>
-        </p:nvSpPr>
-        <p:spPr>
-          <a:xfrm>
-            <a:off x="868680" y="5120640"/>
-            <a:ext cx="10515600" cy="694944"/>
-          </a:xfrm>
-          <a:prstGeom prst="roundRect">
-            <a:avLst/>
-          </a:prstGeom>
-          <a:solidFill>
-            <a:srgbClr val="EEF7F2"/>
-          </a:solidFill>
-          <a:ln w="16510">
-            <a:solidFill>
-              <a:srgbClr val="138F5F"/>
-            </a:solidFill>
-          </a:ln>
-        </p:spPr>
-        <p:style>
-          <a:lnRef idx="1">
-            <a:schemeClr val="accent1"/>
-          </a:lnRef>
-          <a:fillRef idx="3">
-            <a:schemeClr val="accent1"/>
-          </a:fillRef>
-          <a:effectRef idx="2">
-            <a:schemeClr val="accent1"/>
-          </a:effectRef>
-          <a:fontRef idx="minor">
-            <a:schemeClr val="lt1"/>
-          </a:fontRef>
-        </p:style>
-        <p:txBody>
-          <a:bodyPr rtlCol="0" anchor="ctr" wrap="square" lIns="128016" rIns="128016" tIns="73152" bIns="54864"/>
-          <a:lstStyle/>
-          <a:p>
-            <a:pPr algn="ctr"/>
-            <a:r>
-              <a:rPr sz="1500" b="1">
-                <a:solidFill>
-                  <a:srgbClr val="14345B"/>
-                </a:solidFill>
-                <a:latin typeface="Arial"/>
-              </a:rPr>
-              <a:t>SEARCH IN TRACE   "eplb: schedule migration batches"   →   compare scheduler cost / serving time saved</a:t>
-            </a:r>
+          <a:p>
+            <a:r>
+              <a:rPr lang="en-US" altLang="zh-CN" sz="8800" b="1" i="1">
+                <a:ln/>
+                <a:solidFill>
+                  <a:schemeClr val="accent1"/>
+                </a:solidFill>
+                <a:effectLst>
+                  <a:outerShdw blurRad="38100" dist="25400" dir="5400000" algn="ctr" rotWithShape="0">
+                    <a:srgbClr val="6E747A">
+                      <a:alpha val="43000"/>
+                    </a:srgbClr>
+                  </a:outerShdw>
+                </a:effectLst>
+              </a:rPr>
+              <a:t>VS</a:t>
+            </a:r>
+            <a:endParaRPr lang="en-US" altLang="zh-CN" sz="8800" b="1" i="1">
+              <a:ln/>
+              <a:solidFill>
+                <a:schemeClr val="accent1"/>
+              </a:solidFill>
+              <a:effectLst>
+                <a:outerShdw blurRad="38100" dist="25400" dir="5400000" algn="ctr" rotWithShape="0">
+                  <a:srgbClr val="6E747A">
+                    <a:alpha val="43000"/>
+                  </a:srgbClr>
+                </a:outerShdw>
+              </a:effectLst>
+            </a:endParaRPr>
+          </a:p>
+        </p:txBody>
+      </p:sp>
+      <p:sp>
+        <p:nvSpPr>
+          <p:cNvPr id="16" name="灯片编号占位符 15"/>
+          <p:cNvSpPr>
+            <a:spLocks noGrp="1"/>
+          </p:cNvSpPr>
+          <p:nvPr>
+            <p:ph type="sldNum" sz="quarter" idx="12"/>
+          </p:nvPr>
+        </p:nvSpPr>
+        <p:spPr>
+          <a:xfrm>
+            <a:off x="9931400" y="6356350"/>
+            <a:ext cx="2133600" cy="365125"/>
+          </a:xfrm>
+        </p:spPr>
+        <p:txBody>
+          <a:bodyPr/>
+          <a:p>
+            <a:fld id="{C1FF6DA9-008F-8B48-92A6-B652298478BF}" type="slidenum">
+              <a:rPr lang="en-US" smtClean="0"/>
+            </a:fld>
+            <a:endParaRPr lang="en-US"/>
           </a:p>
         </p:txBody>
       </p:sp>
@@ -19898,7 +19991,7 @@
         <p:spPr>
           <a:xfrm>
             <a:off x="5980430" y="6156325"/>
-            <a:ext cx="6000115" cy="559435"/>
+            <a:ext cx="5737860" cy="559435"/>
           </a:xfrm>
           <a:prstGeom prst="roundRect">
             <a:avLst/>
@@ -19959,7 +20052,12 @@
             <p:ph type="sldNum" sz="quarter" idx="12"/>
           </p:nvPr>
         </p:nvSpPr>
-        <p:spPr/>
+        <p:spPr>
+          <a:xfrm>
+            <a:off x="10057765" y="6417945"/>
+            <a:ext cx="2133600" cy="365125"/>
+          </a:xfrm>
+        </p:spPr>
         <p:txBody>
           <a:bodyPr/>
           <a:p>
@@ -20037,7 +20135,7 @@
         </p:nvSpPr>
         <p:spPr>
           <a:xfrm>
-            <a:off x="10671175" y="6401435"/>
+            <a:off x="10373360" y="6387465"/>
             <a:ext cx="1384300" cy="349250"/>
           </a:xfrm>
           <a:prstGeom prst="rect">
@@ -20302,7 +20400,12 @@
             <p:ph type="sldNum" sz="quarter" idx="12"/>
           </p:nvPr>
         </p:nvSpPr>
-        <p:spPr/>
+        <p:spPr>
+          <a:xfrm>
+            <a:off x="9998710" y="6387465"/>
+            <a:ext cx="2133600" cy="365125"/>
+          </a:xfrm>
+        </p:spPr>
         <p:txBody>
           <a:bodyPr/>
           <a:p>
@@ -21257,7 +21360,12 @@
             <p:ph type="sldNum" sz="quarter" idx="12"/>
           </p:nvPr>
         </p:nvSpPr>
-        <p:spPr/>
+        <p:spPr>
+          <a:xfrm>
+            <a:off x="9853295" y="6325235"/>
+            <a:ext cx="2133600" cy="365125"/>
+          </a:xfrm>
+        </p:spPr>
         <p:txBody>
           <a:bodyPr/>
           <a:p>
@@ -21632,7 +21740,12 @@
             <p:ph type="sldNum" sz="quarter" idx="12"/>
           </p:nvPr>
         </p:nvSpPr>
-        <p:spPr/>
+        <p:spPr>
+          <a:xfrm>
+            <a:off x="9884410" y="6356350"/>
+            <a:ext cx="2133600" cy="365125"/>
+          </a:xfrm>
+        </p:spPr>
         <p:txBody>
           <a:bodyPr/>
           <a:p>
@@ -22801,7 +22914,7 @@
           </a:solidFill>
           <a:ln w="12700">
             <a:solidFill>
-              <a:srgbClr val="1B8D60"/>
+              <a:schemeClr val="tx1"/>
             </a:solidFill>
           </a:ln>
         </p:spPr>
@@ -22977,7 +23090,7 @@
           </a:solidFill>
           <a:ln w="12700">
             <a:solidFill>
-              <a:srgbClr val="8153A0"/>
+              <a:schemeClr val="accent3"/>
             </a:solidFill>
           </a:ln>
         </p:spPr>
@@ -23153,7 +23266,7 @@
           </a:solidFill>
           <a:ln w="12700">
             <a:solidFill>
-              <a:srgbClr val="DD852A"/>
+              <a:schemeClr val="accent5"/>
             </a:solidFill>
           </a:ln>
         </p:spPr>
@@ -23681,7 +23794,7 @@
           </a:solidFill>
           <a:ln w="12700">
             <a:solidFill>
-              <a:srgbClr val="1B8D60"/>
+              <a:schemeClr val="tx1"/>
             </a:solidFill>
           </a:ln>
         </p:spPr>
@@ -24091,6 +24204,32 @@
                 </a:outerShdw>
               </a:effectLst>
             </a:endParaRPr>
+          </a:p>
+        </p:txBody>
+      </p:sp>
+      <p:sp>
+        <p:nvSpPr>
+          <p:cNvPr id="2" name="灯片编号占位符 1"/>
+          <p:cNvSpPr>
+            <a:spLocks noGrp="1"/>
+          </p:cNvSpPr>
+          <p:nvPr>
+            <p:ph type="sldNum" sz="quarter" idx="12"/>
+          </p:nvPr>
+        </p:nvSpPr>
+        <p:spPr>
+          <a:xfrm>
+            <a:off x="9946640" y="6356350"/>
+            <a:ext cx="2133600" cy="365125"/>
+          </a:xfrm>
+        </p:spPr>
+        <p:txBody>
+          <a:bodyPr/>
+          <a:p>
+            <a:fld id="{C1FF6DA9-008F-8B48-92A6-B652298478BF}" type="slidenum">
+              <a:rPr lang="en-US" smtClean="0"/>
+            </a:fld>
+            <a:endParaRPr lang="en-US"/>
           </a:p>
         </p:txBody>
       </p:sp>
@@ -24284,7 +24423,12 @@
             <p:ph type="sldNum" sz="quarter" idx="12"/>
           </p:nvPr>
         </p:nvSpPr>
-        <p:spPr/>
+        <p:spPr>
+          <a:xfrm>
+            <a:off x="9931400" y="6365875"/>
+            <a:ext cx="2133600" cy="365125"/>
+          </a:xfrm>
+        </p:spPr>
         <p:txBody>
           <a:bodyPr/>
           <a:p>
@@ -26075,7 +26219,12 @@
             <p:ph type="sldNum" sz="quarter" idx="12"/>
           </p:nvPr>
         </p:nvSpPr>
-        <p:spPr/>
+        <p:spPr>
+          <a:xfrm>
+            <a:off x="9948545" y="6356350"/>
+            <a:ext cx="2133600" cy="365125"/>
+          </a:xfrm>
+        </p:spPr>
         <p:txBody>
           <a:bodyPr/>
           <a:p>
@@ -26225,7 +26374,7 @@
       </p:cxnSp>
       <p:sp>
         <p:nvSpPr>
-          <p:cNvPr id="44" name="Rounded Rectangle 43"/>
+          <p:cNvPr id="7" name="Rounded Rectangle 6"/>
           <p:cNvSpPr/>
           <p:nvPr/>
         </p:nvSpPr>
@@ -26270,7 +26419,7 @@
       </p:sp>
       <p:sp>
         <p:nvSpPr>
-          <p:cNvPr id="45" name="TextBox 44"/>
+          <p:cNvPr id="8" name="TextBox 7"/>
           <p:cNvSpPr txBox="1"/>
           <p:nvPr/>
         </p:nvSpPr>
@@ -26285,7 +26434,7 @@
           <a:noFill/>
         </p:spPr>
         <p:txBody>
-          <a:bodyPr wrap="square" lIns="128016" rIns="128016" tIns="73152" bIns="54864" anchor="ctr">
+          <a:bodyPr wrap="square" lIns="128016" tIns="73152" rIns="128016" bIns="54864" anchor="ctr">
             <a:spAutoFit/>
           </a:bodyPr>
           <a:lstStyle/>
@@ -26296,16 +26445,22 @@
                 <a:solidFill>
                   <a:srgbClr val="2F6FAE"/>
                 </a:solidFill>
-                <a:latin typeface="Arial"/>
+                <a:latin typeface="Arial" panose="020B0604020202020204"/>
               </a:rPr>
               <a:t>VARIABLES &amp; INPUTS</a:t>
             </a:r>
-          </a:p>
-        </p:txBody>
-      </p:sp>
-      <p:sp>
-        <p:nvSpPr>
-          <p:cNvPr id="46" name="TextBox 45"/>
+            <a:endParaRPr sz="1200" b="1">
+              <a:solidFill>
+                <a:srgbClr val="2F6FAE"/>
+              </a:solidFill>
+              <a:latin typeface="Arial" panose="020B0604020202020204"/>
+            </a:endParaRPr>
+          </a:p>
+        </p:txBody>
+      </p:sp>
+      <p:sp>
+        <p:nvSpPr>
+          <p:cNvPr id="9" name="TextBox 8"/>
           <p:cNvSpPr txBox="1"/>
           <p:nvPr/>
         </p:nvSpPr>
@@ -26320,7 +26475,7 @@
           <a:noFill/>
         </p:spPr>
         <p:txBody>
-          <a:bodyPr wrap="square" lIns="128016" rIns="128016" tIns="73152" bIns="54864" anchor="ctr">
+          <a:bodyPr wrap="square" lIns="128016" tIns="73152" rIns="128016" bIns="54864" anchor="ctr">
             <a:spAutoFit/>
           </a:bodyPr>
           <a:lstStyle/>
@@ -26331,73 +26486,130 @@
                 <a:solidFill>
                   <a:srgbClr val="7D48A1"/>
                 </a:solidFill>
-                <a:latin typeface="Arial"/>
+                <a:latin typeface="Arial" panose="020B0604020202020204"/>
               </a:rPr>
               <a:t>DECISION VARIABLES</a:t>
             </a:r>
-          </a:p>
-        </p:txBody>
-      </p:sp>
-      <p:sp>
-        <p:nvSpPr>
-          <p:cNvPr id="47" name="TextBox 46"/>
-          <p:cNvSpPr txBox="1"/>
-          <p:nvPr/>
-        </p:nvSpPr>
-        <p:spPr>
-          <a:xfrm>
-            <a:off x="667512" y="2249424"/>
-            <a:ext cx="1353312" cy="329184"/>
-          </a:xfrm>
-          <a:prstGeom prst="rect">
-            <a:avLst/>
-          </a:prstGeom>
-          <a:noFill/>
-        </p:spPr>
-        <p:txBody>
-          <a:bodyPr wrap="none" anchor="ctr">
-            <a:spAutoFit/>
-          </a:bodyPr>
-          <a:lstStyle/>
-          <a:p>
-            <a:pPr algn="ctr"/>
-            <a14:m xmlns:a14="http://schemas.microsoft.com/office/drawing/2010/main">
-              <m:oMathPara xmlns:m="http://schemas.openxmlformats.org/officeDocument/2006/math">
-                <m:oMathParaPr>
-                  <m:jc m:val="center"/>
-                </m:oMathParaPr>
-                <m:oMath>
-                  <m:sSub>
-                    <m:e>
+            <a:endParaRPr sz="1000" b="1">
+              <a:solidFill>
+                <a:srgbClr val="7D48A1"/>
+              </a:solidFill>
+              <a:latin typeface="Arial" panose="020B0604020202020204"/>
+            </a:endParaRPr>
+          </a:p>
+        </p:txBody>
+      </p:sp>
+      <mc:AlternateContent xmlns:mc="http://schemas.openxmlformats.org/markup-compatibility/2006">
+        <mc:Choice xmlns:a14="http://schemas.microsoft.com/office/drawing/2010/main" Requires="a14">
+          <p:sp>
+            <p:nvSpPr>
+              <p:cNvPr id="10" name="TextBox 9"/>
+              <p:cNvSpPr txBox="1"/>
+              <p:nvPr/>
+            </p:nvSpPr>
+            <p:spPr>
+              <a:xfrm>
+                <a:off x="667512" y="2249424"/>
+                <a:ext cx="1353312" cy="329184"/>
+              </a:xfrm>
+              <a:prstGeom prst="rect">
+                <a:avLst/>
+              </a:prstGeom>
+              <a:noFill/>
+            </p:spPr>
+            <p:txBody>
+              <a:bodyPr wrap="none" anchor="ctr">
+                <a:spAutoFit/>
+              </a:bodyPr>
+              <a:lstStyle/>
+              <a:p>
+                <a:pPr algn="ctr"/>
+                <a14:m>
+                  <m:oMathPara xmlns:m="http://schemas.openxmlformats.org/officeDocument/2006/math">
+                    <m:oMathParaPr>
+                      <m:jc m:val="center"/>
+                    </m:oMathParaPr>
+                    <m:oMath xmlns:m="http://schemas.openxmlformats.org/officeDocument/2006/math">
+                      <m:sSub>
+                        <m:sSubPr>
+                          <m:ctrlPr>
+                            <a:rPr/>
+                          </m:ctrlPr>
+                        </m:sSubPr>
+                        <m:e>
+                          <m:r>
+                            <a:rPr lang="en-US" sz="1300" dirty="0">
+                              <a:solidFill>
+                                <a:srgbClr val="14345B"/>
+                              </a:solidFill>
+                              <a:latin typeface="Cambria Math" panose="02040503050406030204"/>
+                            </a:rPr>
+                            <m:t>𝑥</m:t>
+                          </m:r>
+                        </m:e>
+                        <m:sub>
+                          <m:r>
+                            <a:rPr lang="en-US" sz="1300" dirty="0">
+                              <a:solidFill>
+                                <a:srgbClr val="14345B"/>
+                              </a:solidFill>
+                              <a:latin typeface="Cambria Math" panose="02040503050406030204"/>
+                            </a:rPr>
+                            <m:t>𝑝</m:t>
+                          </m:r>
+                          <m:r>
+                            <a:rPr lang="en-US" sz="1300" dirty="0">
+                              <a:solidFill>
+                                <a:srgbClr val="14345B"/>
+                              </a:solidFill>
+                              <a:latin typeface="Cambria Math" panose="02040503050406030204"/>
+                            </a:rPr>
+                            <m:t>,</m:t>
+                          </m:r>
+                          <m:r>
+                            <a:rPr lang="en-US" sz="1300" dirty="0">
+                              <a:solidFill>
+                                <a:srgbClr val="14345B"/>
+                              </a:solidFill>
+                              <a:latin typeface="Cambria Math" panose="02040503050406030204"/>
+                            </a:rPr>
+                            <m:t>𝑏</m:t>
+                          </m:r>
+                        </m:sub>
+                      </m:sSub>
                       <m:r>
                         <a:rPr lang="en-US" sz="1300" dirty="0">
                           <a:solidFill>
                             <a:srgbClr val="14345B"/>
                           </a:solidFill>
-                          <a:latin typeface="Cambria Math"/>
+                          <a:latin typeface="Cambria Math" panose="02040503050406030204"/>
                         </a:rPr>
-                        <m:t>x</m:t>
+                        <m:t>∈</m:t>
                       </m:r>
-                    </m:e>
-                    <m:sub>
                       <m:r>
                         <a:rPr lang="en-US" sz="1300" dirty="0">
                           <a:solidFill>
                             <a:srgbClr val="14345B"/>
                           </a:solidFill>
-                          <a:latin typeface="Cambria Math"/>
+                          <a:latin typeface="Cambria Math" panose="02040503050406030204"/>
                         </a:rPr>
-                        <m:t>p</m:t>
+                        <m:t>{</m:t>
                       </m:r>
                       <m:r>
-                        <m:rPr>
-                          <m:sty m:val="p"/>
-                        </m:rPr>
                         <a:rPr lang="en-US" sz="1300" dirty="0">
                           <a:solidFill>
                             <a:srgbClr val="14345B"/>
                           </a:solidFill>
-                          <a:latin typeface="Cambria Math"/>
+                          <a:latin typeface="Cambria Math" panose="02040503050406030204"/>
+                        </a:rPr>
+                        <m:t>0</m:t>
+                      </m:r>
+                      <m:r>
+                        <a:rPr lang="en-US" sz="1300" dirty="0">
+                          <a:solidFill>
+                            <a:srgbClr val="14345B"/>
+                          </a:solidFill>
+                          <a:latin typeface="Cambria Math" panose="02040503050406030204"/>
                         </a:rPr>
                         <m:t>,</m:t>
                       </m:r>
@@ -26406,634 +26618,199 @@
                           <a:solidFill>
                             <a:srgbClr val="14345B"/>
                           </a:solidFill>
-                          <a:latin typeface="Cambria Math"/>
+                          <a:latin typeface="Cambria Math" panose="02040503050406030204"/>
                         </a:rPr>
-                        <m:t>b</m:t>
+                        <m:t>1</m:t>
                       </m:r>
-                    </m:sub>
-                  </m:sSub>
-                  <m:r>
-                    <m:rPr>
-                      <m:sty m:val="p"/>
-                    </m:rPr>
-                    <a:rPr lang="en-US" sz="1300" dirty="0">
-                      <a:solidFill>
-                        <a:srgbClr val="14345B"/>
-                      </a:solidFill>
-                      <a:latin typeface="Cambria Math"/>
-                    </a:rPr>
-                    <m:t>∈</m:t>
-                  </m:r>
-                  <m:r>
-                    <m:rPr>
-                      <m:sty m:val="p"/>
-                    </m:rPr>
-                    <a:rPr lang="en-US" sz="1300" dirty="0">
-                      <a:solidFill>
-                        <a:srgbClr val="14345B"/>
-                      </a:solidFill>
-                      <a:latin typeface="Cambria Math"/>
-                    </a:rPr>
-                    <m:t>{</m:t>
-                  </m:r>
-                  <m:r>
-                    <a:rPr lang="en-US" sz="1300" dirty="0">
-                      <a:solidFill>
-                        <a:srgbClr val="14345B"/>
-                      </a:solidFill>
-                      <a:latin typeface="Cambria Math"/>
-                    </a:rPr>
-                    <m:t>0</m:t>
-                  </m:r>
-                  <m:r>
-                    <m:rPr>
-                      <m:sty m:val="p"/>
-                    </m:rPr>
-                    <a:rPr lang="en-US" sz="1300" dirty="0">
-                      <a:solidFill>
-                        <a:srgbClr val="14345B"/>
-                      </a:solidFill>
-                      <a:latin typeface="Cambria Math"/>
-                    </a:rPr>
-                    <m:t>,</m:t>
-                  </m:r>
-                  <m:r>
-                    <a:rPr lang="en-US" sz="1300" dirty="0">
-                      <a:solidFill>
-                        <a:srgbClr val="14345B"/>
-                      </a:solidFill>
-                      <a:latin typeface="Cambria Math"/>
-                    </a:rPr>
-                    <m:t>1</m:t>
-                  </m:r>
-                  <m:r>
-                    <m:rPr>
-                      <m:sty m:val="p"/>
-                    </m:rPr>
-                    <a:rPr lang="en-US" sz="1300" dirty="0">
-                      <a:solidFill>
-                        <a:srgbClr val="14345B"/>
-                      </a:solidFill>
-                      <a:latin typeface="Cambria Math"/>
-                    </a:rPr>
-                    <m:t>}</m:t>
-                  </m:r>
-                </m:oMath>
-              </m:oMathPara>
-            </a14:m>
-          </a:p>
-        </p:txBody>
-      </p:sp>
-      <p:sp>
-        <p:nvSpPr>
-          <p:cNvPr id="48" name="TextBox 47"/>
-          <p:cNvSpPr txBox="1"/>
-          <p:nvPr/>
-        </p:nvSpPr>
-        <p:spPr>
-          <a:xfrm>
-            <a:off x="1901952" y="2240280"/>
-            <a:ext cx="1344168" cy="365760"/>
-          </a:xfrm>
-          <a:prstGeom prst="rect">
-            <a:avLst/>
-          </a:prstGeom>
-          <a:noFill/>
-        </p:spPr>
-        <p:txBody>
-          <a:bodyPr wrap="square" lIns="128016" rIns="128016" tIns="73152" bIns="54864" anchor="ctr">
-            <a:spAutoFit/>
-          </a:bodyPr>
-          <a:lstStyle/>
-          <a:p>
-            <a:pPr algn="l"/>
-            <a:r>
-              <a:rPr sz="1080" b="0">
-                <a:solidFill>
-                  <a:srgbClr val="1F3046"/>
-                </a:solidFill>
-                <a:latin typeface="Arial"/>
-              </a:rPr>
-              <a:t>flow assignment</a:t>
-            </a:r>
-          </a:p>
-        </p:txBody>
-      </p:sp>
-      <p:sp>
-        <p:nvSpPr>
-          <p:cNvPr id="49" name="TextBox 48"/>
-          <p:cNvSpPr txBox="1"/>
-          <p:nvPr/>
-        </p:nvSpPr>
-        <p:spPr>
-          <a:xfrm>
-            <a:off x="667512" y="2770632"/>
-            <a:ext cx="1353312" cy="329184"/>
-          </a:xfrm>
-          <a:prstGeom prst="rect">
-            <a:avLst/>
-          </a:prstGeom>
-          <a:noFill/>
-        </p:spPr>
-        <p:txBody>
-          <a:bodyPr wrap="none" anchor="ctr">
-            <a:spAutoFit/>
-          </a:bodyPr>
-          <a:lstStyle/>
-          <a:p>
-            <a:pPr algn="ctr"/>
-            <a14:m xmlns:a14="http://schemas.microsoft.com/office/drawing/2010/main">
-              <m:oMathPara xmlns:m="http://schemas.openxmlformats.org/officeDocument/2006/math">
-                <m:oMathParaPr>
-                  <m:jc m:val="center"/>
-                </m:oMathParaPr>
-                <m:oMath>
-                  <m:sSub>
-                    <m:e>
                       <m:r>
                         <a:rPr lang="en-US" sz="1300" dirty="0">
                           <a:solidFill>
                             <a:srgbClr val="14345B"/>
                           </a:solidFill>
-                          <a:latin typeface="Cambria Math"/>
+                          <a:latin typeface="Cambria Math" panose="02040503050406030204"/>
                         </a:rPr>
-                        <m:t>y</m:t>
+                        <m:t>}</m:t>
                       </m:r>
-                    </m:e>
-                    <m:sub>
+                    </m:oMath>
+                  </m:oMathPara>
+                </a14:m>
+              </a:p>
+            </p:txBody>
+          </p:sp>
+        </mc:Choice>
+        <mc:Fallback>
+          <p:sp>
+            <p:nvSpPr>
+              <p:cNvPr id="10" name="TextBox 9"/>
+              <p:cNvSpPr txBox="1">
+                <a:spLocks noRot="1" noChangeAspect="1" noMove="1" noResize="1" noEditPoints="1" noAdjustHandles="1" noChangeArrowheads="1" noChangeShapeType="1" noTextEdit="1"/>
+              </p:cNvSpPr>
+              <p:nvPr/>
+            </p:nvSpPr>
+            <p:spPr>
+              <a:xfrm>
+                <a:off x="667512" y="2249424"/>
+                <a:ext cx="1353312" cy="329184"/>
+              </a:xfrm>
+              <a:prstGeom prst="rect">
+                <a:avLst/>
+              </a:prstGeom>
+              <a:blipFill rotWithShape="1">
+                <a:blip r:embed="rId1"/>
+                <a:stretch>
+                  <a:fillRect l="-9" t="-2006" r="19" b="-2160"/>
+                </a:stretch>
+              </a:blipFill>
+            </p:spPr>
+            <p:txBody>
+              <a:bodyPr/>
+              <a:lstStyle/>
+              <a:p>
+                <a:r>
+                  <a:rPr lang="zh-CN" altLang="en-US">
+                    <a:noFill/>
+                  </a:rPr>
+                  <a:t> </a:t>
+                </a:r>
+              </a:p>
+            </p:txBody>
+          </p:sp>
+        </mc:Fallback>
+      </mc:AlternateContent>
+      <p:sp>
+        <p:nvSpPr>
+          <p:cNvPr id="11" name="TextBox 10"/>
+          <p:cNvSpPr txBox="1"/>
+          <p:nvPr/>
+        </p:nvSpPr>
+        <p:spPr>
+          <a:xfrm>
+            <a:off x="1901952" y="2240280"/>
+            <a:ext cx="1344168" cy="365760"/>
+          </a:xfrm>
+          <a:prstGeom prst="rect">
+            <a:avLst/>
+          </a:prstGeom>
+          <a:noFill/>
+        </p:spPr>
+        <p:txBody>
+          <a:bodyPr wrap="square" lIns="128016" tIns="73152" rIns="128016" bIns="54864" anchor="ctr">
+            <a:spAutoFit/>
+          </a:bodyPr>
+          <a:lstStyle/>
+          <a:p>
+            <a:pPr algn="l"/>
+            <a:r>
+              <a:rPr sz="1080" b="0">
+                <a:solidFill>
+                  <a:srgbClr val="1F3046"/>
+                </a:solidFill>
+                <a:latin typeface="Arial" panose="020B0604020202020204"/>
+              </a:rPr>
+              <a:t>flow assignment</a:t>
+            </a:r>
+            <a:endParaRPr sz="1080" b="0">
+              <a:solidFill>
+                <a:srgbClr val="1F3046"/>
+              </a:solidFill>
+              <a:latin typeface="Arial" panose="020B0604020202020204"/>
+            </a:endParaRPr>
+          </a:p>
+        </p:txBody>
+      </p:sp>
+      <mc:AlternateContent xmlns:mc="http://schemas.openxmlformats.org/markup-compatibility/2006">
+        <mc:Choice xmlns:a14="http://schemas.microsoft.com/office/drawing/2010/main" Requires="a14">
+          <p:sp>
+            <p:nvSpPr>
+              <p:cNvPr id="12" name="TextBox 11"/>
+              <p:cNvSpPr txBox="1"/>
+              <p:nvPr/>
+            </p:nvSpPr>
+            <p:spPr>
+              <a:xfrm>
+                <a:off x="667512" y="2770632"/>
+                <a:ext cx="1353312" cy="329184"/>
+              </a:xfrm>
+              <a:prstGeom prst="rect">
+                <a:avLst/>
+              </a:prstGeom>
+              <a:noFill/>
+            </p:spPr>
+            <p:txBody>
+              <a:bodyPr wrap="none" anchor="ctr">
+                <a:spAutoFit/>
+              </a:bodyPr>
+              <a:lstStyle/>
+              <a:p>
+                <a:pPr algn="ctr"/>
+                <a14:m>
+                  <m:oMathPara xmlns:m="http://schemas.openxmlformats.org/officeDocument/2006/math">
+                    <m:oMathParaPr>
+                      <m:jc m:val="center"/>
+                    </m:oMathParaPr>
+                    <m:oMath xmlns:m="http://schemas.openxmlformats.org/officeDocument/2006/math">
+                      <m:sSub>
+                        <m:sSubPr>
+                          <m:ctrlPr>
+                            <a:rPr/>
+                          </m:ctrlPr>
+                        </m:sSubPr>
+                        <m:e>
+                          <m:r>
+                            <a:rPr lang="en-US" sz="1300" dirty="0">
+                              <a:solidFill>
+                                <a:srgbClr val="14345B"/>
+                              </a:solidFill>
+                              <a:latin typeface="Cambria Math" panose="02040503050406030204"/>
+                            </a:rPr>
+                            <m:t>𝑦</m:t>
+                          </m:r>
+                        </m:e>
+                        <m:sub>
+                          <m:r>
+                            <a:rPr lang="en-US" sz="1300" dirty="0">
+                              <a:solidFill>
+                                <a:srgbClr val="14345B"/>
+                              </a:solidFill>
+                              <a:latin typeface="Cambria Math" panose="02040503050406030204"/>
+                            </a:rPr>
+                            <m:t>𝑏</m:t>
+                          </m:r>
+                        </m:sub>
+                      </m:sSub>
                       <m:r>
                         <a:rPr lang="en-US" sz="1300" dirty="0">
                           <a:solidFill>
                             <a:srgbClr val="14345B"/>
                           </a:solidFill>
-                          <a:latin typeface="Cambria Math"/>
+                          <a:latin typeface="Cambria Math" panose="02040503050406030204"/>
                         </a:rPr>
-                        <m:t>b</m:t>
+                        <m:t>∈</m:t>
                       </m:r>
-                    </m:sub>
-                  </m:sSub>
-                  <m:r>
-                    <m:rPr>
-                      <m:sty m:val="p"/>
-                    </m:rPr>
-                    <a:rPr lang="en-US" sz="1300" dirty="0">
-                      <a:solidFill>
-                        <a:srgbClr val="14345B"/>
-                      </a:solidFill>
-                      <a:latin typeface="Cambria Math"/>
-                    </a:rPr>
-                    <m:t>∈</m:t>
-                  </m:r>
-                  <m:r>
-                    <m:rPr>
-                      <m:sty m:val="p"/>
-                    </m:rPr>
-                    <a:rPr lang="en-US" sz="1300" dirty="0">
-                      <a:solidFill>
-                        <a:srgbClr val="14345B"/>
-                      </a:solidFill>
-                      <a:latin typeface="Cambria Math"/>
-                    </a:rPr>
-                    <m:t>{</m:t>
-                  </m:r>
-                  <m:r>
-                    <a:rPr lang="en-US" sz="1300" dirty="0">
-                      <a:solidFill>
-                        <a:srgbClr val="14345B"/>
-                      </a:solidFill>
-                      <a:latin typeface="Cambria Math"/>
-                    </a:rPr>
-                    <m:t>0</m:t>
-                  </m:r>
-                  <m:r>
-                    <m:rPr>
-                      <m:sty m:val="p"/>
-                    </m:rPr>
-                    <a:rPr lang="en-US" sz="1300" dirty="0">
-                      <a:solidFill>
-                        <a:srgbClr val="14345B"/>
-                      </a:solidFill>
-                      <a:latin typeface="Cambria Math"/>
-                    </a:rPr>
-                    <m:t>,</m:t>
-                  </m:r>
-                  <m:r>
-                    <a:rPr lang="en-US" sz="1300" dirty="0">
-                      <a:solidFill>
-                        <a:srgbClr val="14345B"/>
-                      </a:solidFill>
-                      <a:latin typeface="Cambria Math"/>
-                    </a:rPr>
-                    <m:t>1</m:t>
-                  </m:r>
-                  <m:r>
-                    <m:rPr>
-                      <m:sty m:val="p"/>
-                    </m:rPr>
-                    <a:rPr lang="en-US" sz="1300" dirty="0">
-                      <a:solidFill>
-                        <a:srgbClr val="14345B"/>
-                      </a:solidFill>
-                      <a:latin typeface="Cambria Math"/>
-                    </a:rPr>
-                    <m:t>}</m:t>
-                  </m:r>
-                </m:oMath>
-              </m:oMathPara>
-            </a14:m>
-          </a:p>
-        </p:txBody>
-      </p:sp>
-      <p:sp>
-        <p:nvSpPr>
-          <p:cNvPr id="50" name="TextBox 49"/>
-          <p:cNvSpPr txBox="1"/>
-          <p:nvPr/>
-        </p:nvSpPr>
-        <p:spPr>
-          <a:xfrm>
-            <a:off x="1901952" y="2761488"/>
-            <a:ext cx="1344168" cy="365760"/>
-          </a:xfrm>
-          <a:prstGeom prst="rect">
-            <a:avLst/>
-          </a:prstGeom>
-          <a:noFill/>
-        </p:spPr>
-        <p:txBody>
-          <a:bodyPr wrap="square" lIns="128016" rIns="128016" tIns="73152" bIns="54864" anchor="ctr">
-            <a:spAutoFit/>
-          </a:bodyPr>
-          <a:lstStyle/>
-          <a:p>
-            <a:pPr algn="l"/>
-            <a:r>
-              <a:rPr sz="1080" b="0">
-                <a:solidFill>
-                  <a:srgbClr val="1F3046"/>
-                </a:solidFill>
-                <a:latin typeface="Arial"/>
-              </a:rPr>
-              <a:t>active-batch flag</a:t>
-            </a:r>
-          </a:p>
-        </p:txBody>
-      </p:sp>
-      <p:sp>
-        <p:nvSpPr>
-          <p:cNvPr id="51" name="TextBox 50"/>
-          <p:cNvSpPr txBox="1"/>
-          <p:nvPr/>
-        </p:nvSpPr>
-        <p:spPr>
-          <a:xfrm>
-            <a:off x="667512" y="3291839"/>
-            <a:ext cx="1353312" cy="329184"/>
-          </a:xfrm>
-          <a:prstGeom prst="rect">
-            <a:avLst/>
-          </a:prstGeom>
-          <a:noFill/>
-        </p:spPr>
-        <p:txBody>
-          <a:bodyPr wrap="none" anchor="ctr">
-            <a:spAutoFit/>
-          </a:bodyPr>
-          <a:lstStyle/>
-          <a:p>
-            <a:pPr algn="ctr"/>
-            <a14:m xmlns:a14="http://schemas.microsoft.com/office/drawing/2010/main">
-              <m:oMathPara xmlns:m="http://schemas.openxmlformats.org/officeDocument/2006/math">
-                <m:oMathParaPr>
-                  <m:jc m:val="center"/>
-                </m:oMathParaPr>
-                <m:oMath>
-                  <m:sSub>
-                    <m:e>
                       <m:r>
                         <a:rPr lang="en-US" sz="1300" dirty="0">
                           <a:solidFill>
                             <a:srgbClr val="14345B"/>
                           </a:solidFill>
-                          <a:latin typeface="Cambria Math"/>
+                          <a:latin typeface="Cambria Math" panose="02040503050406030204"/>
                         </a:rPr>
-                        <m:t>T</m:t>
+                        <m:t>{</m:t>
                       </m:r>
-                    </m:e>
-                    <m:sub>
-                      <m:r>
-                        <m:rPr>
-                          <m:sty m:val="p"/>
-                        </m:rPr>
-                        <a:rPr lang="en-US" sz="1300" dirty="0">
-                          <a:solidFill>
-                            <a:srgbClr val="14345B"/>
-                          </a:solidFill>
-                          <a:latin typeface="Cambria Math"/>
-                        </a:rPr>
-                        <m:t>i</m:t>
-                      </m:r>
-                      <m:r>
-                        <m:rPr>
-                          <m:sty m:val="p"/>
-                        </m:rPr>
-                        <a:rPr lang="en-US" sz="1300" dirty="0">
-                          <a:solidFill>
-                            <a:srgbClr val="14345B"/>
-                          </a:solidFill>
-                          <a:latin typeface="Cambria Math"/>
-                        </a:rPr>
-                        <m:t>n</m:t>
-                      </m:r>
-                      <m:r>
-                        <m:rPr>
-                          <m:sty m:val="p"/>
-                        </m:rPr>
-                        <a:rPr lang="en-US" sz="1300" dirty="0">
-                          <a:solidFill>
-                            <a:srgbClr val="14345B"/>
-                          </a:solidFill>
-                          <a:latin typeface="Cambria Math"/>
-                        </a:rPr>
-                        <m:t>f</m:t>
-                      </m:r>
-                      <m:r>
-                        <m:rPr>
-                          <m:sty m:val="p"/>
-                        </m:rPr>
-                        <a:rPr lang="en-US" sz="1300" dirty="0">
-                          <a:solidFill>
-                            <a:srgbClr val="14345B"/>
-                          </a:solidFill>
-                          <a:latin typeface="Cambria Math"/>
-                        </a:rPr>
-                        <m:t>e</m:t>
-                      </m:r>
-                      <m:r>
-                        <m:rPr>
-                          <m:sty m:val="p"/>
-                        </m:rPr>
-                        <a:rPr lang="en-US" sz="1300" dirty="0">
-                          <a:solidFill>
-                            <a:srgbClr val="14345B"/>
-                          </a:solidFill>
-                          <a:latin typeface="Cambria Math"/>
-                        </a:rPr>
-                        <m:t>r</m:t>
-                      </m:r>
-                    </m:sub>
-                  </m:sSub>
-                  <m:r>
-                    <m:rPr>
-                      <m:sty m:val="p"/>
-                    </m:rPr>
-                    <a:rPr lang="en-US" sz="1300" dirty="0">
-                      <a:solidFill>
-                        <a:srgbClr val="14345B"/>
-                      </a:solidFill>
-                      <a:latin typeface="Cambria Math"/>
-                    </a:rPr>
-                    <m:t>≥</m:t>
-                  </m:r>
-                  <m:r>
-                    <a:rPr lang="en-US" sz="1300" dirty="0">
-                      <a:solidFill>
-                        <a:srgbClr val="14345B"/>
-                      </a:solidFill>
-                      <a:latin typeface="Cambria Math"/>
-                    </a:rPr>
-                    <m:t>0</m:t>
-                  </m:r>
-                </m:oMath>
-              </m:oMathPara>
-            </a14:m>
-          </a:p>
-        </p:txBody>
-      </p:sp>
-      <p:sp>
-        <p:nvSpPr>
-          <p:cNvPr id="52" name="TextBox 51"/>
-          <p:cNvSpPr txBox="1"/>
-          <p:nvPr/>
-        </p:nvSpPr>
-        <p:spPr>
-          <a:xfrm>
-            <a:off x="1901952" y="3282696"/>
-            <a:ext cx="1344168" cy="365760"/>
-          </a:xfrm>
-          <a:prstGeom prst="rect">
-            <a:avLst/>
-          </a:prstGeom>
-          <a:noFill/>
-        </p:spPr>
-        <p:txBody>
-          <a:bodyPr wrap="square" lIns="128016" rIns="128016" tIns="73152" bIns="54864" anchor="ctr">
-            <a:spAutoFit/>
-          </a:bodyPr>
-          <a:lstStyle/>
-          <a:p>
-            <a:pPr algn="l"/>
-            <a:r>
-              <a:rPr sz="1080" b="0">
-                <a:solidFill>
-                  <a:srgbClr val="1F3046"/>
-                </a:solidFill>
-                <a:latin typeface="Arial"/>
-              </a:rPr>
-              <a:t>worst inference time</a:t>
-            </a:r>
-          </a:p>
-        </p:txBody>
-      </p:sp>
-      <p:sp>
-        <p:nvSpPr>
-          <p:cNvPr id="53" name="TextBox 52"/>
-          <p:cNvSpPr txBox="1"/>
-          <p:nvPr/>
-        </p:nvSpPr>
-        <p:spPr>
-          <a:xfrm>
-            <a:off x="786384" y="3840480"/>
-            <a:ext cx="2468880" cy="228600"/>
-          </a:xfrm>
-          <a:prstGeom prst="rect">
-            <a:avLst/>
-          </a:prstGeom>
-          <a:noFill/>
-        </p:spPr>
-        <p:txBody>
-          <a:bodyPr wrap="square" lIns="128016" rIns="128016" tIns="73152" bIns="54864" anchor="ctr">
-            <a:spAutoFit/>
-          </a:bodyPr>
-          <a:lstStyle/>
-          <a:p>
-            <a:pPr algn="l"/>
-            <a:r>
-              <a:rPr sz="1000" b="1">
-                <a:solidFill>
-                  <a:srgbClr val="E67E22"/>
-                </a:solidFill>
-                <a:latin typeface="Arial"/>
-              </a:rPr>
-              <a:t>KNOWN INPUTS</a:t>
-            </a:r>
-          </a:p>
-        </p:txBody>
-      </p:sp>
-      <p:sp>
-        <p:nvSpPr>
-          <p:cNvPr id="54" name="TextBox 53"/>
-          <p:cNvSpPr txBox="1"/>
-          <p:nvPr/>
-        </p:nvSpPr>
-        <p:spPr>
-          <a:xfrm>
-            <a:off x="749808" y="4114800"/>
-            <a:ext cx="960120" cy="274320"/>
-          </a:xfrm>
-          <a:prstGeom prst="rect">
-            <a:avLst/>
-          </a:prstGeom>
-          <a:noFill/>
-        </p:spPr>
-        <p:txBody>
-          <a:bodyPr wrap="none" anchor="ctr">
-            <a:spAutoFit/>
-          </a:bodyPr>
-          <a:lstStyle/>
-          <a:p>
-            <a:pPr algn="ctr"/>
-            <a14:m xmlns:a14="http://schemas.microsoft.com/office/drawing/2010/main">
-              <m:oMathPara xmlns:m="http://schemas.openxmlformats.org/officeDocument/2006/math">
-                <m:oMathParaPr>
-                  <m:jc m:val="center"/>
-                </m:oMathParaPr>
-                <m:oMath>
-                  <m:sSub>
-                    <m:e>
                       <m:r>
                         <a:rPr lang="en-US" sz="1300" dirty="0">
                           <a:solidFill>
                             <a:srgbClr val="14345B"/>
                           </a:solidFill>
-                          <a:latin typeface="Cambria Math"/>
+                          <a:latin typeface="Cambria Math" panose="02040503050406030204"/>
                         </a:rPr>
-                        <m:t>w</m:t>
+                        <m:t>0</m:t>
                       </m:r>
-                    </m:e>
-                    <m:sub>
                       <m:r>
                         <a:rPr lang="en-US" sz="1300" dirty="0">
                           <a:solidFill>
                             <a:srgbClr val="14345B"/>
                           </a:solidFill>
-                          <a:latin typeface="Cambria Math"/>
-                        </a:rPr>
-                        <m:t>p</m:t>
-                      </m:r>
-                    </m:sub>
-                  </m:sSub>
-                </m:oMath>
-              </m:oMathPara>
-            </a14:m>
-          </a:p>
-        </p:txBody>
-      </p:sp>
-      <p:sp>
-        <p:nvSpPr>
-          <p:cNvPr id="55" name="TextBox 54"/>
-          <p:cNvSpPr txBox="1"/>
-          <p:nvPr/>
-        </p:nvSpPr>
-        <p:spPr>
-          <a:xfrm>
-            <a:off x="1600200" y="4114800"/>
-            <a:ext cx="1645920" cy="292608"/>
-          </a:xfrm>
-          <a:prstGeom prst="rect">
-            <a:avLst/>
-          </a:prstGeom>
-          <a:noFill/>
-        </p:spPr>
-        <p:txBody>
-          <a:bodyPr wrap="square" lIns="128016" rIns="128016" tIns="73152" bIns="54864" anchor="ctr">
-            <a:spAutoFit/>
-          </a:bodyPr>
-          <a:lstStyle/>
-          <a:p>
-            <a:pPr algn="l"/>
-            <a:r>
-              <a:rPr sz="980" b="0">
-                <a:solidFill>
-                  <a:srgbClr val="1F3046"/>
-                </a:solidFill>
-                <a:latin typeface="Arial"/>
-              </a:rPr>
-              <a:t>experts in flow p</a:t>
-            </a:r>
-          </a:p>
-        </p:txBody>
-      </p:sp>
-      <p:sp>
-        <p:nvSpPr>
-          <p:cNvPr id="56" name="TextBox 55"/>
-          <p:cNvSpPr txBox="1"/>
-          <p:nvPr/>
-        </p:nvSpPr>
-        <p:spPr>
-          <a:xfrm>
-            <a:off x="749808" y="4462272"/>
-            <a:ext cx="960120" cy="274320"/>
-          </a:xfrm>
-          <a:prstGeom prst="rect">
-            <a:avLst/>
-          </a:prstGeom>
-          <a:noFill/>
-        </p:spPr>
-        <p:txBody>
-          <a:bodyPr wrap="none" anchor="ctr">
-            <a:spAutoFit/>
-          </a:bodyPr>
-          <a:lstStyle/>
-          <a:p>
-            <a:pPr algn="ctr"/>
-            <a14:m xmlns:a14="http://schemas.microsoft.com/office/drawing/2010/main">
-              <m:oMathPara xmlns:m="http://schemas.openxmlformats.org/officeDocument/2006/math">
-                <m:oMathParaPr>
-                  <m:jc m:val="center"/>
-                </m:oMathParaPr>
-                <m:oMath>
-                  <m:sSub>
-                    <m:e>
-                      <m:r>
-                        <a:rPr lang="en-US" sz="1300" dirty="0">
-                          <a:solidFill>
-                            <a:srgbClr val="14345B"/>
-                          </a:solidFill>
-                          <a:latin typeface="Cambria Math"/>
-                        </a:rPr>
-                        <m:t>f</m:t>
-                      </m:r>
-                    </m:e>
-                    <m:sub>
-                      <m:r>
-                        <a:rPr lang="en-US" sz="1300" dirty="0">
-                          <a:solidFill>
-                            <a:srgbClr val="14345B"/>
-                          </a:solidFill>
-                          <a:latin typeface="Cambria Math"/>
-                        </a:rPr>
-                        <m:t>p</m:t>
-                      </m:r>
-                      <m:r>
-                        <m:rPr>
-                          <m:sty m:val="p"/>
-                        </m:rPr>
-                        <a:rPr lang="en-US" sz="1300" dirty="0">
-                          <a:solidFill>
-                            <a:srgbClr val="14345B"/>
-                          </a:solidFill>
-                          <a:latin typeface="Cambria Math"/>
+                          <a:latin typeface="Cambria Math" panose="02040503050406030204"/>
                         </a:rPr>
                         <m:t>,</m:t>
                       </m:r>
@@ -27042,239 +26819,958 @@
                           <a:solidFill>
                             <a:srgbClr val="14345B"/>
                           </a:solidFill>
-                          <a:latin typeface="Cambria Math"/>
+                          <a:latin typeface="Cambria Math" panose="02040503050406030204"/>
                         </a:rPr>
-                        <m:t>e</m:t>
+                        <m:t>1</m:t>
                       </m:r>
-                    </m:sub>
-                  </m:sSub>
-                </m:oMath>
-              </m:oMathPara>
-            </a14:m>
-          </a:p>
-        </p:txBody>
-      </p:sp>
-      <p:sp>
-        <p:nvSpPr>
-          <p:cNvPr id="57" name="TextBox 56"/>
-          <p:cNvSpPr txBox="1"/>
-          <p:nvPr/>
-        </p:nvSpPr>
-        <p:spPr>
-          <a:xfrm>
-            <a:off x="1600200" y="4462272"/>
-            <a:ext cx="1645920" cy="292608"/>
-          </a:xfrm>
-          <a:prstGeom prst="rect">
-            <a:avLst/>
-          </a:prstGeom>
-          <a:noFill/>
-        </p:spPr>
-        <p:txBody>
-          <a:bodyPr wrap="square" lIns="128016" rIns="128016" tIns="73152" bIns="54864" anchor="ctr">
-            <a:spAutoFit/>
-          </a:bodyPr>
-          <a:lstStyle/>
-          <a:p>
-            <a:pPr algn="l"/>
-            <a:r>
-              <a:rPr sz="980" b="0">
-                <a:solidFill>
-                  <a:srgbClr val="1F3046"/>
-                </a:solidFill>
-                <a:latin typeface="Arial"/>
-              </a:rPr>
-              <a:t>fraction routed on link e</a:t>
-            </a:r>
-          </a:p>
-        </p:txBody>
-      </p:sp>
-      <p:sp>
-        <p:nvSpPr>
-          <p:cNvPr id="58" name="TextBox 57"/>
-          <p:cNvSpPr txBox="1"/>
-          <p:nvPr/>
-        </p:nvSpPr>
-        <p:spPr>
-          <a:xfrm>
-            <a:off x="749808" y="4809744"/>
-            <a:ext cx="960120" cy="274320"/>
-          </a:xfrm>
-          <a:prstGeom prst="rect">
-            <a:avLst/>
-          </a:prstGeom>
-          <a:noFill/>
-        </p:spPr>
-        <p:txBody>
-          <a:bodyPr wrap="none" anchor="ctr">
-            <a:spAutoFit/>
-          </a:bodyPr>
-          <a:lstStyle/>
-          <a:p>
-            <a:pPr algn="ctr"/>
-            <a14:m xmlns:a14="http://schemas.microsoft.com/office/drawing/2010/main">
-              <m:oMathPara xmlns:m="http://schemas.openxmlformats.org/officeDocument/2006/math">
-                <m:oMathParaPr>
-                  <m:jc m:val="center"/>
-                </m:oMathParaPr>
-                <m:oMath>
-                  <m:sSub>
-                    <m:e>
                       <m:r>
                         <a:rPr lang="en-US" sz="1300" dirty="0">
                           <a:solidFill>
                             <a:srgbClr val="14345B"/>
                           </a:solidFill>
-                          <a:latin typeface="Cambria Math"/>
+                          <a:latin typeface="Cambria Math" panose="02040503050406030204"/>
                         </a:rPr>
-                        <m:t>C</m:t>
+                        <m:t>}</m:t>
                       </m:r>
-                    </m:e>
-                    <m:sub>
+                    </m:oMath>
+                  </m:oMathPara>
+                </a14:m>
+              </a:p>
+            </p:txBody>
+          </p:sp>
+        </mc:Choice>
+        <mc:Fallback>
+          <p:sp>
+            <p:nvSpPr>
+              <p:cNvPr id="12" name="TextBox 11"/>
+              <p:cNvSpPr txBox="1">
+                <a:spLocks noRot="1" noChangeAspect="1" noMove="1" noResize="1" noEditPoints="1" noAdjustHandles="1" noChangeArrowheads="1" noChangeShapeType="1" noTextEdit="1"/>
+              </p:cNvSpPr>
+              <p:nvPr/>
+            </p:nvSpPr>
+            <p:spPr>
+              <a:xfrm>
+                <a:off x="667512" y="2770632"/>
+                <a:ext cx="1353312" cy="329184"/>
+              </a:xfrm>
+              <a:prstGeom prst="rect">
+                <a:avLst/>
+              </a:prstGeom>
+              <a:blipFill rotWithShape="1">
+                <a:blip r:embed="rId2"/>
+                <a:stretch>
+                  <a:fillRect l="-9" t="-810" r="19" b="-1042"/>
+                </a:stretch>
+              </a:blipFill>
+            </p:spPr>
+            <p:txBody>
+              <a:bodyPr/>
+              <a:lstStyle/>
+              <a:p>
+                <a:r>
+                  <a:rPr lang="zh-CN" altLang="en-US">
+                    <a:noFill/>
+                  </a:rPr>
+                  <a:t> </a:t>
+                </a:r>
+              </a:p>
+            </p:txBody>
+          </p:sp>
+        </mc:Fallback>
+      </mc:AlternateContent>
+      <p:sp>
+        <p:nvSpPr>
+          <p:cNvPr id="13" name="TextBox 12"/>
+          <p:cNvSpPr txBox="1"/>
+          <p:nvPr/>
+        </p:nvSpPr>
+        <p:spPr>
+          <a:xfrm>
+            <a:off x="1901952" y="2761488"/>
+            <a:ext cx="1344168" cy="365760"/>
+          </a:xfrm>
+          <a:prstGeom prst="rect">
+            <a:avLst/>
+          </a:prstGeom>
+          <a:noFill/>
+        </p:spPr>
+        <p:txBody>
+          <a:bodyPr wrap="square" lIns="128016" tIns="73152" rIns="128016" bIns="54864" anchor="ctr">
+            <a:spAutoFit/>
+          </a:bodyPr>
+          <a:lstStyle/>
+          <a:p>
+            <a:pPr algn="l"/>
+            <a:r>
+              <a:rPr sz="1080" b="0">
+                <a:solidFill>
+                  <a:srgbClr val="1F3046"/>
+                </a:solidFill>
+                <a:latin typeface="Arial" panose="020B0604020202020204"/>
+              </a:rPr>
+              <a:t>active-batch flag</a:t>
+            </a:r>
+            <a:endParaRPr sz="1080" b="0">
+              <a:solidFill>
+                <a:srgbClr val="1F3046"/>
+              </a:solidFill>
+              <a:latin typeface="Arial" panose="020B0604020202020204"/>
+            </a:endParaRPr>
+          </a:p>
+        </p:txBody>
+      </p:sp>
+      <mc:AlternateContent xmlns:mc="http://schemas.openxmlformats.org/markup-compatibility/2006">
+        <mc:Choice xmlns:a14="http://schemas.microsoft.com/office/drawing/2010/main" Requires="a14">
+          <p:sp>
+            <p:nvSpPr>
+              <p:cNvPr id="14" name="TextBox 13"/>
+              <p:cNvSpPr txBox="1"/>
+              <p:nvPr/>
+            </p:nvSpPr>
+            <p:spPr>
+              <a:xfrm>
+                <a:off x="667512" y="3291839"/>
+                <a:ext cx="1353312" cy="329184"/>
+              </a:xfrm>
+              <a:prstGeom prst="rect">
+                <a:avLst/>
+              </a:prstGeom>
+              <a:noFill/>
+            </p:spPr>
+            <p:txBody>
+              <a:bodyPr wrap="none" anchor="ctr">
+                <a:spAutoFit/>
+              </a:bodyPr>
+              <a:lstStyle/>
+              <a:p>
+                <a:pPr algn="ctr"/>
+                <a14:m>
+                  <m:oMathPara xmlns:m="http://schemas.openxmlformats.org/officeDocument/2006/math">
+                    <m:oMathParaPr>
+                      <m:jc m:val="center"/>
+                    </m:oMathParaPr>
+                    <m:oMath xmlns:m="http://schemas.openxmlformats.org/officeDocument/2006/math">
+                      <m:sSub>
+                        <m:sSubPr>
+                          <m:ctrlPr>
+                            <a:rPr/>
+                          </m:ctrlPr>
+                        </m:sSubPr>
+                        <m:e>
+                          <m:r>
+                            <a:rPr lang="en-US" sz="1300" dirty="0">
+                              <a:solidFill>
+                                <a:srgbClr val="14345B"/>
+                              </a:solidFill>
+                              <a:latin typeface="Cambria Math" panose="02040503050406030204"/>
+                            </a:rPr>
+                            <m:t>𝑇</m:t>
+                          </m:r>
+                        </m:e>
+                        <m:sub>
+                          <m:r>
+                            <m:rPr>
+                              <m:sty m:val="p"/>
+                            </m:rPr>
+                            <a:rPr lang="en-US" sz="1300" dirty="0">
+                              <a:solidFill>
+                                <a:srgbClr val="14345B"/>
+                              </a:solidFill>
+                              <a:latin typeface="Cambria Math" panose="02040503050406030204"/>
+                            </a:rPr>
+                            <m:t>i</m:t>
+                          </m:r>
+                          <m:r>
+                            <m:rPr>
+                              <m:sty m:val="p"/>
+                            </m:rPr>
+                            <a:rPr lang="en-US" sz="1300" dirty="0">
+                              <a:solidFill>
+                                <a:srgbClr val="14345B"/>
+                              </a:solidFill>
+                              <a:latin typeface="Cambria Math" panose="02040503050406030204"/>
+                            </a:rPr>
+                            <m:t>n</m:t>
+                          </m:r>
+                          <m:r>
+                            <m:rPr>
+                              <m:sty m:val="p"/>
+                            </m:rPr>
+                            <a:rPr lang="en-US" sz="1300" dirty="0">
+                              <a:solidFill>
+                                <a:srgbClr val="14345B"/>
+                              </a:solidFill>
+                              <a:latin typeface="Cambria Math" panose="02040503050406030204"/>
+                            </a:rPr>
+                            <m:t>f</m:t>
+                          </m:r>
+                          <m:r>
+                            <m:rPr>
+                              <m:sty m:val="p"/>
+                            </m:rPr>
+                            <a:rPr lang="en-US" sz="1300" dirty="0">
+                              <a:solidFill>
+                                <a:srgbClr val="14345B"/>
+                              </a:solidFill>
+                              <a:latin typeface="Cambria Math" panose="02040503050406030204"/>
+                            </a:rPr>
+                            <m:t>e</m:t>
+                          </m:r>
+                          <m:r>
+                            <m:rPr>
+                              <m:sty m:val="p"/>
+                            </m:rPr>
+                            <a:rPr lang="en-US" sz="1300" dirty="0">
+                              <a:solidFill>
+                                <a:srgbClr val="14345B"/>
+                              </a:solidFill>
+                              <a:latin typeface="Cambria Math" panose="02040503050406030204"/>
+                            </a:rPr>
+                            <m:t>r</m:t>
+                          </m:r>
+                        </m:sub>
+                      </m:sSub>
                       <m:r>
                         <a:rPr lang="en-US" sz="1300" dirty="0">
                           <a:solidFill>
                             <a:srgbClr val="14345B"/>
                           </a:solidFill>
-                          <a:latin typeface="Cambria Math"/>
+                          <a:latin typeface="Cambria Math" panose="02040503050406030204"/>
                         </a:rPr>
-                        <m:t>e</m:t>
+                        <m:t>≥</m:t>
                       </m:r>
-                    </m:sub>
-                  </m:sSub>
-                </m:oMath>
-              </m:oMathPara>
-            </a14:m>
-          </a:p>
-        </p:txBody>
-      </p:sp>
-      <p:sp>
-        <p:nvSpPr>
-          <p:cNvPr id="59" name="TextBox 58"/>
-          <p:cNvSpPr txBox="1"/>
-          <p:nvPr/>
-        </p:nvSpPr>
-        <p:spPr>
-          <a:xfrm>
-            <a:off x="1600200" y="4809744"/>
-            <a:ext cx="1645920" cy="292608"/>
-          </a:xfrm>
-          <a:prstGeom prst="rect">
-            <a:avLst/>
-          </a:prstGeom>
-          <a:noFill/>
-        </p:spPr>
-        <p:txBody>
-          <a:bodyPr wrap="square" lIns="128016" rIns="128016" tIns="73152" bIns="54864" anchor="ctr">
-            <a:spAutoFit/>
-          </a:bodyPr>
-          <a:lstStyle/>
-          <a:p>
-            <a:pPr algn="l"/>
-            <a:r>
-              <a:rPr sz="980" b="0">
-                <a:solidFill>
-                  <a:srgbClr val="1F3046"/>
-                </a:solidFill>
-                <a:latin typeface="Arial"/>
-              </a:rPr>
-              <a:t>capacity of link e</a:t>
-            </a:r>
-          </a:p>
-        </p:txBody>
-      </p:sp>
-      <p:sp>
-        <p:nvSpPr>
-          <p:cNvPr id="60" name="TextBox 59"/>
-          <p:cNvSpPr txBox="1"/>
-          <p:nvPr/>
-        </p:nvSpPr>
-        <p:spPr>
-          <a:xfrm>
-            <a:off x="749808" y="5157216"/>
-            <a:ext cx="960120" cy="274320"/>
-          </a:xfrm>
-          <a:prstGeom prst="rect">
-            <a:avLst/>
-          </a:prstGeom>
-          <a:noFill/>
-        </p:spPr>
-        <p:txBody>
-          <a:bodyPr wrap="none" anchor="ctr">
-            <a:spAutoFit/>
-          </a:bodyPr>
-          <a:lstStyle/>
-          <a:p>
-            <a:pPr algn="ctr"/>
-            <a14:m xmlns:a14="http://schemas.microsoft.com/office/drawing/2010/main">
-              <m:oMathPara xmlns:m="http://schemas.openxmlformats.org/officeDocument/2006/math">
-                <m:oMathParaPr>
-                  <m:jc m:val="center"/>
-                </m:oMathParaPr>
-                <m:oMath>
-                  <m:sSub>
-                    <m:e>
                       <m:r>
                         <a:rPr lang="en-US" sz="1300" dirty="0">
                           <a:solidFill>
                             <a:srgbClr val="14345B"/>
                           </a:solidFill>
-                          <a:latin typeface="Cambria Math"/>
+                          <a:latin typeface="Cambria Math" panose="02040503050406030204"/>
                         </a:rPr>
-                        <m:t>T</m:t>
+                        <m:t>0</m:t>
                       </m:r>
-                    </m:e>
-                    <m:sub>
+                    </m:oMath>
+                  </m:oMathPara>
+                </a14:m>
+              </a:p>
+            </p:txBody>
+          </p:sp>
+        </mc:Choice>
+        <mc:Fallback>
+          <p:sp>
+            <p:nvSpPr>
+              <p:cNvPr id="14" name="TextBox 13"/>
+              <p:cNvSpPr txBox="1">
+                <a:spLocks noRot="1" noChangeAspect="1" noMove="1" noResize="1" noEditPoints="1" noAdjustHandles="1" noChangeArrowheads="1" noChangeShapeType="1" noTextEdit="1"/>
+              </p:cNvSpPr>
+              <p:nvPr/>
+            </p:nvSpPr>
+            <p:spPr>
+              <a:xfrm>
+                <a:off x="667512" y="3291839"/>
+                <a:ext cx="1353312" cy="329184"/>
+              </a:xfrm>
+              <a:prstGeom prst="rect">
+                <a:avLst/>
+              </a:prstGeom>
+              <a:blipFill rotWithShape="1">
+                <a:blip r:embed="rId3"/>
+                <a:stretch>
+                  <a:fillRect l="-9" t="-964" r="19" b="-888"/>
+                </a:stretch>
+              </a:blipFill>
+            </p:spPr>
+            <p:txBody>
+              <a:bodyPr/>
+              <a:lstStyle/>
+              <a:p>
+                <a:r>
+                  <a:rPr lang="zh-CN" altLang="en-US">
+                    <a:noFill/>
+                  </a:rPr>
+                  <a:t> </a:t>
+                </a:r>
+              </a:p>
+            </p:txBody>
+          </p:sp>
+        </mc:Fallback>
+      </mc:AlternateContent>
+      <p:sp>
+        <p:nvSpPr>
+          <p:cNvPr id="15" name="TextBox 14"/>
+          <p:cNvSpPr txBox="1"/>
+          <p:nvPr/>
+        </p:nvSpPr>
+        <p:spPr>
+          <a:xfrm>
+            <a:off x="1901952" y="3282696"/>
+            <a:ext cx="1344168" cy="365760"/>
+          </a:xfrm>
+          <a:prstGeom prst="rect">
+            <a:avLst/>
+          </a:prstGeom>
+          <a:noFill/>
+        </p:spPr>
+        <p:txBody>
+          <a:bodyPr wrap="square" lIns="128016" tIns="73152" rIns="128016" bIns="54864" anchor="ctr">
+            <a:spAutoFit/>
+          </a:bodyPr>
+          <a:lstStyle/>
+          <a:p>
+            <a:pPr algn="l"/>
+            <a:r>
+              <a:rPr sz="1080" b="0">
+                <a:solidFill>
+                  <a:srgbClr val="1F3046"/>
+                </a:solidFill>
+                <a:latin typeface="Arial" panose="020B0604020202020204"/>
+              </a:rPr>
+              <a:t>worst inference time</a:t>
+            </a:r>
+            <a:endParaRPr sz="1080" b="0">
+              <a:solidFill>
+                <a:srgbClr val="1F3046"/>
+              </a:solidFill>
+              <a:latin typeface="Arial" panose="020B0604020202020204"/>
+            </a:endParaRPr>
+          </a:p>
+        </p:txBody>
+      </p:sp>
+      <p:sp>
+        <p:nvSpPr>
+          <p:cNvPr id="16" name="TextBox 15"/>
+          <p:cNvSpPr txBox="1"/>
+          <p:nvPr/>
+        </p:nvSpPr>
+        <p:spPr>
+          <a:xfrm>
+            <a:off x="786384" y="3840480"/>
+            <a:ext cx="2468880" cy="228600"/>
+          </a:xfrm>
+          <a:prstGeom prst="rect">
+            <a:avLst/>
+          </a:prstGeom>
+          <a:noFill/>
+        </p:spPr>
+        <p:txBody>
+          <a:bodyPr wrap="square" lIns="128016" tIns="73152" rIns="128016" bIns="54864" anchor="ctr">
+            <a:spAutoFit/>
+          </a:bodyPr>
+          <a:lstStyle/>
+          <a:p>
+            <a:pPr algn="l"/>
+            <a:r>
+              <a:rPr sz="1000" b="1">
+                <a:solidFill>
+                  <a:srgbClr val="E67E22"/>
+                </a:solidFill>
+                <a:latin typeface="Arial" panose="020B0604020202020204"/>
+              </a:rPr>
+              <a:t>KNOWN INPUTS</a:t>
+            </a:r>
+            <a:endParaRPr sz="1000" b="1">
+              <a:solidFill>
+                <a:srgbClr val="E67E22"/>
+              </a:solidFill>
+              <a:latin typeface="Arial" panose="020B0604020202020204"/>
+            </a:endParaRPr>
+          </a:p>
+        </p:txBody>
+      </p:sp>
+      <mc:AlternateContent xmlns:mc="http://schemas.openxmlformats.org/markup-compatibility/2006">
+        <mc:Choice xmlns:a14="http://schemas.microsoft.com/office/drawing/2010/main" Requires="a14">
+          <p:sp>
+            <p:nvSpPr>
+              <p:cNvPr id="17" name="TextBox 16"/>
+              <p:cNvSpPr txBox="1"/>
+              <p:nvPr/>
+            </p:nvSpPr>
+            <p:spPr>
+              <a:xfrm>
+                <a:off x="749808" y="4114800"/>
+                <a:ext cx="960120" cy="274320"/>
+              </a:xfrm>
+              <a:prstGeom prst="rect">
+                <a:avLst/>
+              </a:prstGeom>
+              <a:noFill/>
+            </p:spPr>
+            <p:txBody>
+              <a:bodyPr wrap="none" anchor="ctr">
+                <a:spAutoFit/>
+              </a:bodyPr>
+              <a:lstStyle/>
+              <a:p>
+                <a:pPr algn="ctr"/>
+                <a14:m>
+                  <m:oMathPara xmlns:m="http://schemas.openxmlformats.org/officeDocument/2006/math">
+                    <m:oMathParaPr>
+                      <m:jc m:val="center"/>
+                    </m:oMathParaPr>
+                    <m:oMath xmlns:m="http://schemas.openxmlformats.org/officeDocument/2006/math">
+                      <m:sSub>
+                        <m:sSubPr>
+                          <m:ctrlPr>
+                            <a:rPr/>
+                          </m:ctrlPr>
+                        </m:sSubPr>
+                        <m:e>
+                          <m:r>
+                            <a:rPr lang="en-US" sz="1300" dirty="0">
+                              <a:solidFill>
+                                <a:srgbClr val="14345B"/>
+                              </a:solidFill>
+                              <a:latin typeface="Cambria Math" panose="02040503050406030204"/>
+                            </a:rPr>
+                            <m:t>𝑤</m:t>
+                          </m:r>
+                        </m:e>
+                        <m:sub>
+                          <m:r>
+                            <a:rPr lang="en-US" sz="1300" dirty="0">
+                              <a:solidFill>
+                                <a:srgbClr val="14345B"/>
+                              </a:solidFill>
+                              <a:latin typeface="Cambria Math" panose="02040503050406030204"/>
+                            </a:rPr>
+                            <m:t>𝑝</m:t>
+                          </m:r>
+                        </m:sub>
+                      </m:sSub>
+                    </m:oMath>
+                  </m:oMathPara>
+                </a14:m>
+              </a:p>
+            </p:txBody>
+          </p:sp>
+        </mc:Choice>
+        <mc:Fallback>
+          <p:sp>
+            <p:nvSpPr>
+              <p:cNvPr id="17" name="TextBox 16"/>
+              <p:cNvSpPr txBox="1">
+                <a:spLocks noRot="1" noChangeAspect="1" noMove="1" noResize="1" noEditPoints="1" noAdjustHandles="1" noChangeArrowheads="1" noChangeShapeType="1" noTextEdit="1"/>
+              </p:cNvSpPr>
+              <p:nvPr/>
+            </p:nvSpPr>
+            <p:spPr>
+              <a:xfrm>
+                <a:off x="749808" y="4114800"/>
+                <a:ext cx="960120" cy="274320"/>
+              </a:xfrm>
+              <a:prstGeom prst="rect">
+                <a:avLst/>
+              </a:prstGeom>
+              <a:blipFill rotWithShape="1">
+                <a:blip r:embed="rId4"/>
+                <a:stretch>
+                  <a:fillRect l="-53" t="-12269" r="53" b="-12731"/>
+                </a:stretch>
+              </a:blipFill>
+            </p:spPr>
+            <p:txBody>
+              <a:bodyPr/>
+              <a:lstStyle/>
+              <a:p>
+                <a:r>
+                  <a:rPr lang="zh-CN" altLang="en-US">
+                    <a:noFill/>
+                  </a:rPr>
+                  <a:t> </a:t>
+                </a:r>
+              </a:p>
+            </p:txBody>
+          </p:sp>
+        </mc:Fallback>
+      </mc:AlternateContent>
+      <p:sp>
+        <p:nvSpPr>
+          <p:cNvPr id="18" name="TextBox 17"/>
+          <p:cNvSpPr txBox="1"/>
+          <p:nvPr/>
+        </p:nvSpPr>
+        <p:spPr>
+          <a:xfrm>
+            <a:off x="1600200" y="4114800"/>
+            <a:ext cx="1645920" cy="292608"/>
+          </a:xfrm>
+          <a:prstGeom prst="rect">
+            <a:avLst/>
+          </a:prstGeom>
+          <a:noFill/>
+        </p:spPr>
+        <p:txBody>
+          <a:bodyPr wrap="square" lIns="128016" tIns="73152" rIns="128016" bIns="54864" anchor="ctr">
+            <a:spAutoFit/>
+          </a:bodyPr>
+          <a:lstStyle/>
+          <a:p>
+            <a:pPr algn="l"/>
+            <a:r>
+              <a:rPr sz="980" b="0">
+                <a:solidFill>
+                  <a:srgbClr val="1F3046"/>
+                </a:solidFill>
+                <a:latin typeface="Arial" panose="020B0604020202020204"/>
+              </a:rPr>
+              <a:t>experts in flow p</a:t>
+            </a:r>
+            <a:endParaRPr sz="980" b="0">
+              <a:solidFill>
+                <a:srgbClr val="1F3046"/>
+              </a:solidFill>
+              <a:latin typeface="Arial" panose="020B0604020202020204"/>
+            </a:endParaRPr>
+          </a:p>
+        </p:txBody>
+      </p:sp>
+      <mc:AlternateContent xmlns:mc="http://schemas.openxmlformats.org/markup-compatibility/2006">
+        <mc:Choice xmlns:a14="http://schemas.microsoft.com/office/drawing/2010/main" Requires="a14">
+          <p:sp>
+            <p:nvSpPr>
+              <p:cNvPr id="19" name="TextBox 18"/>
+              <p:cNvSpPr txBox="1"/>
+              <p:nvPr/>
+            </p:nvSpPr>
+            <p:spPr>
+              <a:xfrm>
+                <a:off x="749808" y="4462272"/>
+                <a:ext cx="960120" cy="274320"/>
+              </a:xfrm>
+              <a:prstGeom prst="rect">
+                <a:avLst/>
+              </a:prstGeom>
+              <a:noFill/>
+            </p:spPr>
+            <p:txBody>
+              <a:bodyPr wrap="none" anchor="ctr">
+                <a:spAutoFit/>
+              </a:bodyPr>
+              <a:lstStyle/>
+              <a:p>
+                <a:pPr algn="ctr"/>
+                <a14:m>
+                  <m:oMathPara xmlns:m="http://schemas.openxmlformats.org/officeDocument/2006/math">
+                    <m:oMathParaPr>
+                      <m:jc m:val="center"/>
+                    </m:oMathParaPr>
+                    <m:oMath xmlns:m="http://schemas.openxmlformats.org/officeDocument/2006/math">
+                      <m:sSub>
+                        <m:sSubPr>
+                          <m:ctrlPr>
+                            <a:rPr/>
+                          </m:ctrlPr>
+                        </m:sSubPr>
+                        <m:e>
+                          <m:r>
+                            <a:rPr lang="en-US" sz="1300" dirty="0">
+                              <a:solidFill>
+                                <a:srgbClr val="14345B"/>
+                              </a:solidFill>
+                              <a:latin typeface="Cambria Math" panose="02040503050406030204"/>
+                            </a:rPr>
+                            <m:t>𝑓</m:t>
+                          </m:r>
+                        </m:e>
+                        <m:sub>
+                          <m:r>
+                            <a:rPr lang="en-US" sz="1300" dirty="0">
+                              <a:solidFill>
+                                <a:srgbClr val="14345B"/>
+                              </a:solidFill>
+                              <a:latin typeface="Cambria Math" panose="02040503050406030204"/>
+                            </a:rPr>
+                            <m:t>𝑝</m:t>
+                          </m:r>
+                          <m:r>
+                            <a:rPr lang="en-US" sz="1300" dirty="0">
+                              <a:solidFill>
+                                <a:srgbClr val="14345B"/>
+                              </a:solidFill>
+                              <a:latin typeface="Cambria Math" panose="02040503050406030204"/>
+                            </a:rPr>
+                            <m:t>,</m:t>
+                          </m:r>
+                          <m:r>
+                            <a:rPr lang="en-US" sz="1300" dirty="0">
+                              <a:solidFill>
+                                <a:srgbClr val="14345B"/>
+                              </a:solidFill>
+                              <a:latin typeface="Cambria Math" panose="02040503050406030204"/>
+                            </a:rPr>
+                            <m:t>𝑒</m:t>
+                          </m:r>
+                        </m:sub>
+                      </m:sSub>
+                    </m:oMath>
+                  </m:oMathPara>
+                </a14:m>
+              </a:p>
+            </p:txBody>
+          </p:sp>
+        </mc:Choice>
+        <mc:Fallback>
+          <p:sp>
+            <p:nvSpPr>
+              <p:cNvPr id="19" name="TextBox 18"/>
+              <p:cNvSpPr txBox="1">
+                <a:spLocks noRot="1" noChangeAspect="1" noMove="1" noResize="1" noEditPoints="1" noAdjustHandles="1" noChangeArrowheads="1" noChangeShapeType="1" noTextEdit="1"/>
+              </p:cNvSpPr>
+              <p:nvPr/>
+            </p:nvSpPr>
+            <p:spPr>
+              <a:xfrm>
+                <a:off x="749808" y="4462272"/>
+                <a:ext cx="960120" cy="274320"/>
+              </a:xfrm>
+              <a:prstGeom prst="rect">
+                <a:avLst/>
+              </a:prstGeom>
+              <a:blipFill rotWithShape="1">
+                <a:blip r:embed="rId5"/>
+                <a:stretch>
+                  <a:fillRect l="-53" t="-12315" r="53" b="-12685"/>
+                </a:stretch>
+              </a:blipFill>
+            </p:spPr>
+            <p:txBody>
+              <a:bodyPr/>
+              <a:lstStyle/>
+              <a:p>
+                <a:r>
+                  <a:rPr lang="zh-CN" altLang="en-US">
+                    <a:noFill/>
+                  </a:rPr>
+                  <a:t> </a:t>
+                </a:r>
+              </a:p>
+            </p:txBody>
+          </p:sp>
+        </mc:Fallback>
+      </mc:AlternateContent>
+      <p:sp>
+        <p:nvSpPr>
+          <p:cNvPr id="20" name="TextBox 19"/>
+          <p:cNvSpPr txBox="1"/>
+          <p:nvPr/>
+        </p:nvSpPr>
+        <p:spPr>
+          <a:xfrm>
+            <a:off x="1600200" y="4462272"/>
+            <a:ext cx="1645920" cy="292608"/>
+          </a:xfrm>
+          <a:prstGeom prst="rect">
+            <a:avLst/>
+          </a:prstGeom>
+          <a:noFill/>
+        </p:spPr>
+        <p:txBody>
+          <a:bodyPr wrap="square" lIns="128016" tIns="73152" rIns="128016" bIns="54864" anchor="ctr">
+            <a:spAutoFit/>
+          </a:bodyPr>
+          <a:lstStyle/>
+          <a:p>
+            <a:pPr algn="l"/>
+            <a:r>
+              <a:rPr sz="980" b="0">
+                <a:solidFill>
+                  <a:srgbClr val="1F3046"/>
+                </a:solidFill>
+                <a:latin typeface="Arial" panose="020B0604020202020204"/>
+              </a:rPr>
+              <a:t>fraction routed on link e</a:t>
+            </a:r>
+            <a:endParaRPr sz="980" b="0">
+              <a:solidFill>
+                <a:srgbClr val="1F3046"/>
+              </a:solidFill>
+              <a:latin typeface="Arial" panose="020B0604020202020204"/>
+            </a:endParaRPr>
+          </a:p>
+        </p:txBody>
+      </p:sp>
+      <mc:AlternateContent xmlns:mc="http://schemas.openxmlformats.org/markup-compatibility/2006">
+        <mc:Choice xmlns:a14="http://schemas.microsoft.com/office/drawing/2010/main" Requires="a14">
+          <p:sp>
+            <p:nvSpPr>
+              <p:cNvPr id="21" name="TextBox 20"/>
+              <p:cNvSpPr txBox="1"/>
+              <p:nvPr/>
+            </p:nvSpPr>
+            <p:spPr>
+              <a:xfrm>
+                <a:off x="749808" y="4809744"/>
+                <a:ext cx="960120" cy="274320"/>
+              </a:xfrm>
+              <a:prstGeom prst="rect">
+                <a:avLst/>
+              </a:prstGeom>
+              <a:noFill/>
+            </p:spPr>
+            <p:txBody>
+              <a:bodyPr wrap="none" anchor="ctr">
+                <a:spAutoFit/>
+              </a:bodyPr>
+              <a:lstStyle/>
+              <a:p>
+                <a:pPr algn="ctr"/>
+                <a14:m>
+                  <m:oMathPara xmlns:m="http://schemas.openxmlformats.org/officeDocument/2006/math">
+                    <m:oMathParaPr>
+                      <m:jc m:val="center"/>
+                    </m:oMathParaPr>
+                    <m:oMath xmlns:m="http://schemas.openxmlformats.org/officeDocument/2006/math">
+                      <m:sSub>
+                        <m:sSubPr>
+                          <m:ctrlPr>
+                            <a:rPr/>
+                          </m:ctrlPr>
+                        </m:sSubPr>
+                        <m:e>
+                          <m:r>
+                            <a:rPr lang="en-US" sz="1300" dirty="0">
+                              <a:solidFill>
+                                <a:srgbClr val="14345B"/>
+                              </a:solidFill>
+                              <a:latin typeface="Cambria Math" panose="02040503050406030204"/>
+                            </a:rPr>
+                            <m:t>𝐶</m:t>
+                          </m:r>
+                        </m:e>
+                        <m:sub>
+                          <m:r>
+                            <a:rPr lang="en-US" sz="1300" dirty="0">
+                              <a:solidFill>
+                                <a:srgbClr val="14345B"/>
+                              </a:solidFill>
+                              <a:latin typeface="Cambria Math" panose="02040503050406030204"/>
+                            </a:rPr>
+                            <m:t>𝑒</m:t>
+                          </m:r>
+                        </m:sub>
+                      </m:sSub>
+                    </m:oMath>
+                  </m:oMathPara>
+                </a14:m>
+              </a:p>
+            </p:txBody>
+          </p:sp>
+        </mc:Choice>
+        <mc:Fallback>
+          <p:sp>
+            <p:nvSpPr>
+              <p:cNvPr id="21" name="TextBox 20"/>
+              <p:cNvSpPr txBox="1">
+                <a:spLocks noRot="1" noChangeAspect="1" noMove="1" noResize="1" noEditPoints="1" noAdjustHandles="1" noChangeArrowheads="1" noChangeShapeType="1" noTextEdit="1"/>
+              </p:cNvSpPr>
+              <p:nvPr/>
+            </p:nvSpPr>
+            <p:spPr>
+              <a:xfrm>
+                <a:off x="749808" y="4809744"/>
+                <a:ext cx="960120" cy="274320"/>
+              </a:xfrm>
+              <a:prstGeom prst="rect">
+                <a:avLst/>
+              </a:prstGeom>
+              <a:blipFill rotWithShape="1">
+                <a:blip r:embed="rId6"/>
+                <a:stretch>
+                  <a:fillRect l="-53" t="-10972" r="53" b="-11250"/>
+                </a:stretch>
+              </a:blipFill>
+            </p:spPr>
+            <p:txBody>
+              <a:bodyPr/>
+              <a:lstStyle/>
+              <a:p>
+                <a:r>
+                  <a:rPr lang="zh-CN" altLang="en-US">
+                    <a:noFill/>
+                  </a:rPr>
+                  <a:t> </a:t>
+                </a:r>
+              </a:p>
+            </p:txBody>
+          </p:sp>
+        </mc:Fallback>
+      </mc:AlternateContent>
+      <p:sp>
+        <p:nvSpPr>
+          <p:cNvPr id="22" name="TextBox 21"/>
+          <p:cNvSpPr txBox="1"/>
+          <p:nvPr/>
+        </p:nvSpPr>
+        <p:spPr>
+          <a:xfrm>
+            <a:off x="1600200" y="4809744"/>
+            <a:ext cx="1645920" cy="292608"/>
+          </a:xfrm>
+          <a:prstGeom prst="rect">
+            <a:avLst/>
+          </a:prstGeom>
+          <a:noFill/>
+        </p:spPr>
+        <p:txBody>
+          <a:bodyPr wrap="square" lIns="128016" tIns="73152" rIns="128016" bIns="54864" anchor="ctr">
+            <a:spAutoFit/>
+          </a:bodyPr>
+          <a:lstStyle/>
+          <a:p>
+            <a:pPr algn="l"/>
+            <a:r>
+              <a:rPr sz="980" b="0">
+                <a:solidFill>
+                  <a:srgbClr val="1F3046"/>
+                </a:solidFill>
+                <a:latin typeface="Arial" panose="020B0604020202020204"/>
+              </a:rPr>
+              <a:t>capacity of link e</a:t>
+            </a:r>
+            <a:endParaRPr sz="980" b="0">
+              <a:solidFill>
+                <a:srgbClr val="1F3046"/>
+              </a:solidFill>
+              <a:latin typeface="Arial" panose="020B0604020202020204"/>
+            </a:endParaRPr>
+          </a:p>
+        </p:txBody>
+      </p:sp>
+      <mc:AlternateContent xmlns:mc="http://schemas.openxmlformats.org/markup-compatibility/2006">
+        <mc:Choice xmlns:a14="http://schemas.microsoft.com/office/drawing/2010/main" Requires="a14">
+          <p:sp>
+            <p:nvSpPr>
+              <p:cNvPr id="23" name="TextBox 22"/>
+              <p:cNvSpPr txBox="1"/>
+              <p:nvPr/>
+            </p:nvSpPr>
+            <p:spPr>
+              <a:xfrm>
+                <a:off x="749808" y="5157216"/>
+                <a:ext cx="960120" cy="274320"/>
+              </a:xfrm>
+              <a:prstGeom prst="rect">
+                <a:avLst/>
+              </a:prstGeom>
+              <a:noFill/>
+            </p:spPr>
+            <p:txBody>
+              <a:bodyPr wrap="none" anchor="ctr">
+                <a:spAutoFit/>
+              </a:bodyPr>
+              <a:lstStyle/>
+              <a:p>
+                <a:pPr algn="ctr"/>
+                <a14:m>
+                  <m:oMathPara xmlns:m="http://schemas.openxmlformats.org/officeDocument/2006/math">
+                    <m:oMathParaPr>
+                      <m:jc m:val="center"/>
+                    </m:oMathParaPr>
+                    <m:oMath xmlns:m="http://schemas.openxmlformats.org/officeDocument/2006/math">
+                      <m:sSub>
+                        <m:sSubPr>
+                          <m:ctrlPr>
+                            <a:rPr/>
+                          </m:ctrlPr>
+                        </m:sSubPr>
+                        <m:e>
+                          <m:r>
+                            <a:rPr lang="en-US" sz="1300" dirty="0">
+                              <a:solidFill>
+                                <a:srgbClr val="14345B"/>
+                              </a:solidFill>
+                              <a:latin typeface="Cambria Math" panose="02040503050406030204"/>
+                            </a:rPr>
+                            <m:t>𝑇</m:t>
+                          </m:r>
+                        </m:e>
+                        <m:sub>
+                          <m:r>
+                            <a:rPr lang="en-US" sz="1300" dirty="0">
+                              <a:solidFill>
+                                <a:srgbClr val="14345B"/>
+                              </a:solidFill>
+                              <a:latin typeface="Cambria Math" panose="02040503050406030204"/>
+                            </a:rPr>
+                            <m:t>0</m:t>
+                          </m:r>
+                        </m:sub>
+                      </m:sSub>
                       <m:r>
                         <a:rPr lang="en-US" sz="1300" dirty="0">
                           <a:solidFill>
                             <a:srgbClr val="14345B"/>
                           </a:solidFill>
-                          <a:latin typeface="Cambria Math"/>
+                          <a:latin typeface="Cambria Math" panose="02040503050406030204"/>
                         </a:rPr>
-                        <m:t>0</m:t>
+                        <m:t>,</m:t>
                       </m:r>
-                    </m:sub>
-                  </m:sSub>
-                  <m:r>
-                    <m:rPr>
-                      <m:sty m:val="p"/>
-                    </m:rPr>
-                    <a:rPr lang="en-US" sz="1300" dirty="0">
-                      <a:solidFill>
-                        <a:srgbClr val="14345B"/>
-                      </a:solidFill>
-                      <a:latin typeface="Cambria Math"/>
-                    </a:rPr>
-                    <m:t>,</m:t>
-                  </m:r>
-                  <m:r>
-                    <a:rPr lang="en-US" sz="1300" dirty="0">
-                      <a:solidFill>
-                        <a:srgbClr val="14345B"/>
-                      </a:solidFill>
-                      <a:latin typeface="Cambria Math"/>
-                    </a:rPr>
-                    <m:t> </m:t>
-                  </m:r>
-                  <m:r>
-                    <a:rPr lang="en-US" sz="1300" dirty="0">
-                      <a:solidFill>
-                        <a:srgbClr val="14345B"/>
-                      </a:solidFill>
-                      <a:latin typeface="Cambria Math"/>
-                    </a:rPr>
-                    <m:t>ρ</m:t>
-                  </m:r>
-                </m:oMath>
-              </m:oMathPara>
-            </a14:m>
-          </a:p>
-        </p:txBody>
-      </p:sp>
-      <p:sp>
-        <p:nvSpPr>
-          <p:cNvPr id="61" name="TextBox 60"/>
+                      <m:r>
+                        <a:rPr lang="en-US" sz="1300" dirty="0">
+                          <a:solidFill>
+                            <a:srgbClr val="14345B"/>
+                          </a:solidFill>
+                          <a:latin typeface="Cambria Math" panose="02040503050406030204"/>
+                        </a:rPr>
+                        <m:t> </m:t>
+                      </m:r>
+                      <m:r>
+                        <a:rPr lang="en-US" sz="1300" dirty="0">
+                          <a:solidFill>
+                            <a:srgbClr val="14345B"/>
+                          </a:solidFill>
+                          <a:latin typeface="Cambria Math" panose="02040503050406030204"/>
+                        </a:rPr>
+                        <m:t>𝜌</m:t>
+                      </m:r>
+                    </m:oMath>
+                  </m:oMathPara>
+                </a14:m>
+              </a:p>
+            </p:txBody>
+          </p:sp>
+        </mc:Choice>
+        <mc:Fallback>
+          <p:sp>
+            <p:nvSpPr>
+              <p:cNvPr id="23" name="TextBox 22"/>
+              <p:cNvSpPr txBox="1">
+                <a:spLocks noRot="1" noChangeAspect="1" noMove="1" noResize="1" noEditPoints="1" noAdjustHandles="1" noChangeArrowheads="1" noChangeShapeType="1" noTextEdit="1"/>
+              </p:cNvSpPr>
+              <p:nvPr/>
+            </p:nvSpPr>
+            <p:spPr>
+              <a:xfrm>
+                <a:off x="749808" y="5157216"/>
+                <a:ext cx="960120" cy="274320"/>
+              </a:xfrm>
+              <a:prstGeom prst="rect">
+                <a:avLst/>
+              </a:prstGeom>
+              <a:blipFill rotWithShape="1">
+                <a:blip r:embed="rId7"/>
+                <a:stretch>
+                  <a:fillRect l="-53" t="-11019" r="53" b="-11204"/>
+                </a:stretch>
+              </a:blipFill>
+            </p:spPr>
+            <p:txBody>
+              <a:bodyPr/>
+              <a:lstStyle/>
+              <a:p>
+                <a:r>
+                  <a:rPr lang="zh-CN" altLang="en-US">
+                    <a:noFill/>
+                  </a:rPr>
+                  <a:t> </a:t>
+                </a:r>
+              </a:p>
+            </p:txBody>
+          </p:sp>
+        </mc:Fallback>
+      </mc:AlternateContent>
+      <p:sp>
+        <p:nvSpPr>
+          <p:cNvPr id="24" name="TextBox 23"/>
           <p:cNvSpPr txBox="1"/>
           <p:nvPr/>
         </p:nvSpPr>
@@ -27289,7 +27785,7 @@
           <a:noFill/>
         </p:spPr>
         <p:txBody>
-          <a:bodyPr wrap="square" lIns="128016" rIns="128016" tIns="73152" bIns="54864" anchor="ctr">
+          <a:bodyPr wrap="square" lIns="128016" tIns="73152" rIns="128016" bIns="54864" anchor="ctr">
             <a:spAutoFit/>
           </a:bodyPr>
           <a:lstStyle/>
@@ -27300,16 +27796,22 @@
                 <a:solidFill>
                   <a:srgbClr val="1F3046"/>
                 </a:solidFill>
-                <a:latin typeface="Arial"/>
+                <a:latin typeface="Arial" panose="020B0604020202020204"/>
               </a:rPr>
               <a:t>baseline time; inference share</a:t>
             </a:r>
-          </a:p>
-        </p:txBody>
-      </p:sp>
-      <p:sp>
-        <p:nvSpPr>
-          <p:cNvPr id="62" name="TextBox 61"/>
+            <a:endParaRPr sz="980" b="0">
+              <a:solidFill>
+                <a:srgbClr val="1F3046"/>
+              </a:solidFill>
+              <a:latin typeface="Arial" panose="020B0604020202020204"/>
+            </a:endParaRPr>
+          </a:p>
+        </p:txBody>
+      </p:sp>
+      <p:sp>
+        <p:nvSpPr>
+          <p:cNvPr id="25" name="TextBox 24"/>
           <p:cNvSpPr txBox="1"/>
           <p:nvPr/>
         </p:nvSpPr>
@@ -27324,7 +27826,7 @@
           <a:noFill/>
         </p:spPr>
         <p:txBody>
-          <a:bodyPr wrap="square" lIns="128016" rIns="128016" tIns="73152" bIns="54864" anchor="ctr">
+          <a:bodyPr wrap="square" lIns="128016" tIns="73152" rIns="128016" bIns="54864" anchor="ctr">
             <a:spAutoFit/>
           </a:bodyPr>
           <a:lstStyle/>
@@ -27335,16 +27837,22 @@
                 <a:solidFill>
                   <a:srgbClr val="E67E22"/>
                 </a:solidFill>
-                <a:latin typeface="Arial"/>
+                <a:latin typeface="Arial" panose="020B0604020202020204"/>
               </a:rPr>
               <a:t>Tie-break: minimize active batches after fixing Tᵢₙfₑᵣ</a:t>
             </a:r>
-          </a:p>
-        </p:txBody>
-      </p:sp>
-      <p:sp>
-        <p:nvSpPr>
-          <p:cNvPr id="63" name="Rounded Rectangle 62"/>
+            <a:endParaRPr sz="950" b="1">
+              <a:solidFill>
+                <a:srgbClr val="E67E22"/>
+              </a:solidFill>
+              <a:latin typeface="Arial" panose="020B0604020202020204"/>
+            </a:endParaRPr>
+          </a:p>
+        </p:txBody>
+      </p:sp>
+      <p:sp>
+        <p:nvSpPr>
+          <p:cNvPr id="26" name="Rounded Rectangle 25"/>
           <p:cNvSpPr/>
           <p:nvPr/>
         </p:nvSpPr>
@@ -27389,7 +27897,7 @@
       </p:sp>
       <p:sp>
         <p:nvSpPr>
-          <p:cNvPr id="64" name="TextBox 63"/>
+          <p:cNvPr id="27" name="TextBox 26"/>
           <p:cNvSpPr txBox="1"/>
           <p:nvPr/>
         </p:nvSpPr>
@@ -27404,7 +27912,7 @@
           <a:noFill/>
         </p:spPr>
         <p:txBody>
-          <a:bodyPr wrap="square" lIns="128016" rIns="128016" tIns="73152" bIns="54864" anchor="ctr">
+          <a:bodyPr wrap="square" lIns="128016" tIns="73152" rIns="128016" bIns="54864" anchor="ctr">
             <a:spAutoFit/>
           </a:bodyPr>
           <a:lstStyle/>
@@ -27415,67 +27923,50 @@
                 <a:solidFill>
                   <a:srgbClr val="138F5F"/>
                 </a:solidFill>
-                <a:latin typeface="Arial"/>
+                <a:latin typeface="Arial" panose="020B0604020202020204"/>
               </a:rPr>
               <a:t>PRIMARY OBJECTIVE</a:t>
             </a:r>
-          </a:p>
-        </p:txBody>
-      </p:sp>
-      <p:sp>
-        <p:nvSpPr>
-          <p:cNvPr id="65" name="TextBox 64"/>
-          <p:cNvSpPr txBox="1"/>
-          <p:nvPr/>
-        </p:nvSpPr>
-        <p:spPr>
-          <a:xfrm>
-            <a:off x="6492240" y="1591056"/>
-            <a:ext cx="3108960" cy="365760"/>
-          </a:xfrm>
-          <a:prstGeom prst="rect">
-            <a:avLst/>
-          </a:prstGeom>
-          <a:noFill/>
-        </p:spPr>
-        <p:txBody>
-          <a:bodyPr wrap="none" anchor="ctr">
-            <a:spAutoFit/>
-          </a:bodyPr>
-          <a:lstStyle/>
-          <a:p>
-            <a:pPr algn="ctr"/>
-            <a14:m xmlns:a14="http://schemas.microsoft.com/office/drawing/2010/main">
-              <m:oMathPara xmlns:m="http://schemas.openxmlformats.org/officeDocument/2006/math">
-                <m:oMathParaPr>
-                  <m:jc m:val="center"/>
-                </m:oMathParaPr>
-                <m:oMath>
-                  <m:r>
-                    <m:rPr>
-                      <m:sty m:val="p"/>
-                    </m:rPr>
-                    <a:rPr lang="en-US" sz="1700" dirty="0">
-                      <a:solidFill>
-                        <a:srgbClr val="1F3046"/>
-                      </a:solidFill>
-                      <a:latin typeface="Cambria Math"/>
-                    </a:rPr>
-                    <m:t>min</m:t>
-                  </m:r>
-                  <m:sSub>
-                    <m:e>
-                      <m:r>
-                        <a:rPr lang="en-US" sz="1700" dirty="0">
-                          <a:solidFill>
-                            <a:srgbClr val="1F3046"/>
-                          </a:solidFill>
-                          <a:latin typeface="Cambria Math"/>
-                        </a:rPr>
-                        <m:t>T</m:t>
-                      </m:r>
-                    </m:e>
-                    <m:sub>
+            <a:endParaRPr sz="1150" b="1">
+              <a:solidFill>
+                <a:srgbClr val="138F5F"/>
+              </a:solidFill>
+              <a:latin typeface="Arial" panose="020B0604020202020204"/>
+            </a:endParaRPr>
+          </a:p>
+        </p:txBody>
+      </p:sp>
+      <mc:AlternateContent xmlns:mc="http://schemas.openxmlformats.org/markup-compatibility/2006">
+        <mc:Choice xmlns:a14="http://schemas.microsoft.com/office/drawing/2010/main" Requires="a14">
+          <p:sp>
+            <p:nvSpPr>
+              <p:cNvPr id="28" name="TextBox 27"/>
+              <p:cNvSpPr txBox="1"/>
+              <p:nvPr/>
+            </p:nvSpPr>
+            <p:spPr>
+              <a:xfrm>
+                <a:off x="6492240" y="1591056"/>
+                <a:ext cx="3108960" cy="365760"/>
+              </a:xfrm>
+              <a:prstGeom prst="rect">
+                <a:avLst/>
+              </a:prstGeom>
+              <a:noFill/>
+            </p:spPr>
+            <p:txBody>
+              <a:bodyPr wrap="none" anchor="ctr">
+                <a:spAutoFit/>
+              </a:bodyPr>
+              <a:lstStyle/>
+              <a:p>
+                <a:pPr algn="ctr"/>
+                <a14:m>
+                  <m:oMathPara xmlns:m="http://schemas.openxmlformats.org/officeDocument/2006/math">
+                    <m:oMathParaPr>
+                      <m:jc m:val="center"/>
+                    </m:oMathParaPr>
+                    <m:oMath xmlns:m="http://schemas.openxmlformats.org/officeDocument/2006/math">
                       <m:r>
                         <m:rPr>
                           <m:sty m:val="p"/>
@@ -27484,69 +27975,139 @@
                           <a:solidFill>
                             <a:srgbClr val="1F3046"/>
                           </a:solidFill>
-                          <a:latin typeface="Cambria Math"/>
+                          <a:latin typeface="Cambria Math" panose="02040503050406030204"/>
                         </a:rPr>
-                        <m:t>i</m:t>
+                        <m:t>min</m:t>
                       </m:r>
-                      <m:r>
-                        <m:rPr>
-                          <m:sty m:val="p"/>
-                        </m:rPr>
-                        <a:rPr lang="en-US" sz="1700" dirty="0">
-                          <a:solidFill>
-                            <a:srgbClr val="1F3046"/>
-                          </a:solidFill>
-                          <a:latin typeface="Cambria Math"/>
-                        </a:rPr>
-                        <m:t>n</m:t>
-                      </m:r>
-                      <m:r>
-                        <m:rPr>
-                          <m:sty m:val="p"/>
-                        </m:rPr>
-                        <a:rPr lang="en-US" sz="1700" dirty="0">
-                          <a:solidFill>
-                            <a:srgbClr val="1F3046"/>
-                          </a:solidFill>
-                          <a:latin typeface="Cambria Math"/>
-                        </a:rPr>
-                        <m:t>f</m:t>
-                      </m:r>
-                      <m:r>
-                        <m:rPr>
-                          <m:sty m:val="p"/>
-                        </m:rPr>
-                        <a:rPr lang="en-US" sz="1700" dirty="0">
-                          <a:solidFill>
-                            <a:srgbClr val="1F3046"/>
-                          </a:solidFill>
-                          <a:latin typeface="Cambria Math"/>
-                        </a:rPr>
-                        <m:t>e</m:t>
-                      </m:r>
-                      <m:r>
-                        <m:rPr>
-                          <m:sty m:val="p"/>
-                        </m:rPr>
-                        <a:rPr lang="en-US" sz="1700" dirty="0">
-                          <a:solidFill>
-                            <a:srgbClr val="1F3046"/>
-                          </a:solidFill>
-                          <a:latin typeface="Cambria Math"/>
-                        </a:rPr>
-                        <m:t>r</m:t>
-                      </m:r>
-                    </m:sub>
-                  </m:sSub>
-                </m:oMath>
-              </m:oMathPara>
-            </a14:m>
-          </a:p>
-        </p:txBody>
-      </p:sp>
-      <p:sp>
-        <p:nvSpPr>
-          <p:cNvPr id="66" name="Rounded Rectangle 65"/>
+                      <m:sSub>
+                        <m:sSubPr>
+                          <m:ctrlPr>
+                            <a:rPr/>
+                          </m:ctrlPr>
+                        </m:sSubPr>
+                        <m:e>
+                          <m:r>
+                            <a:rPr lang="en-US" sz="1700" dirty="0">
+                              <a:solidFill>
+                                <a:srgbClr val="1F3046"/>
+                              </a:solidFill>
+                              <a:latin typeface="Cambria Math" panose="02040503050406030204"/>
+                            </a:rPr>
+                            <m:t>𝑇</m:t>
+                          </m:r>
+                        </m:e>
+                        <m:sub>
+                          <m:r>
+                            <m:rPr>
+                              <m:sty m:val="p"/>
+                            </m:rPr>
+                            <a:rPr lang="en-US" sz="1700" dirty="0">
+                              <a:solidFill>
+                                <a:srgbClr val="1F3046"/>
+                              </a:solidFill>
+                              <a:latin typeface="Cambria Math" panose="02040503050406030204"/>
+                            </a:rPr>
+                            <m:t>i</m:t>
+                          </m:r>
+                          <m:r>
+                            <m:rPr>
+                              <m:sty m:val="p"/>
+                            </m:rPr>
+                            <a:rPr lang="en-US" sz="1700" dirty="0">
+                              <a:solidFill>
+                                <a:srgbClr val="1F3046"/>
+                              </a:solidFill>
+                              <a:latin typeface="Cambria Math" panose="02040503050406030204"/>
+                            </a:rPr>
+                            <m:t>n</m:t>
+                          </m:r>
+                          <m:r>
+                            <m:rPr>
+                              <m:sty m:val="p"/>
+                            </m:rPr>
+                            <a:rPr lang="en-US" sz="1700" dirty="0">
+                              <a:solidFill>
+                                <a:srgbClr val="1F3046"/>
+                              </a:solidFill>
+                              <a:latin typeface="Cambria Math" panose="02040503050406030204"/>
+                            </a:rPr>
+                            <m:t>f</m:t>
+                          </m:r>
+                          <m:r>
+                            <m:rPr>
+                              <m:sty m:val="p"/>
+                            </m:rPr>
+                            <a:rPr lang="en-US" sz="1700" dirty="0">
+                              <a:solidFill>
+                                <a:srgbClr val="1F3046"/>
+                              </a:solidFill>
+                              <a:latin typeface="Cambria Math" panose="02040503050406030204"/>
+                            </a:rPr>
+                            <m:t>e</m:t>
+                          </m:r>
+                          <m:r>
+                            <m:rPr>
+                              <m:sty m:val="p"/>
+                            </m:rPr>
+                            <a:rPr lang="en-US" sz="1700" dirty="0">
+                              <a:solidFill>
+                                <a:srgbClr val="1F3046"/>
+                              </a:solidFill>
+                              <a:latin typeface="Cambria Math" panose="02040503050406030204"/>
+                            </a:rPr>
+                            <m:t>r</m:t>
+                          </m:r>
+                        </m:sub>
+                      </m:sSub>
+                    </m:oMath>
+                  </m:oMathPara>
+                </a14:m>
+              </a:p>
+            </p:txBody>
+          </p:sp>
+        </mc:Choice>
+        <mc:Fallback>
+          <p:sp>
+            <p:nvSpPr>
+              <p:cNvPr id="28" name="TextBox 27"/>
+              <p:cNvSpPr txBox="1">
+                <a:spLocks noRot="1" noChangeAspect="1" noMove="1" noResize="1" noEditPoints="1" noAdjustHandles="1" noChangeArrowheads="1" noChangeShapeType="1" noTextEdit="1"/>
+              </p:cNvSpPr>
+              <p:nvPr/>
+            </p:nvSpPr>
+            <p:spPr>
+              <a:xfrm>
+                <a:off x="6492240" y="1591056"/>
+                <a:ext cx="3108960" cy="365760"/>
+              </a:xfrm>
+              <a:prstGeom prst="rect">
+                <a:avLst/>
+              </a:prstGeom>
+              <a:blipFill rotWithShape="1">
+                <a:blip r:embed="rId8"/>
+                <a:stretch>
+                  <a:fillRect t="-104" b="104"/>
+                </a:stretch>
+              </a:blipFill>
+            </p:spPr>
+            <p:txBody>
+              <a:bodyPr/>
+              <a:lstStyle/>
+              <a:p>
+                <a:r>
+                  <a:rPr lang="zh-CN" altLang="en-US">
+                    <a:noFill/>
+                  </a:rPr>
+                  <a:t> </a:t>
+                </a:r>
+              </a:p>
+            </p:txBody>
+          </p:sp>
+        </mc:Fallback>
+      </mc:AlternateContent>
+      <p:sp>
+        <p:nvSpPr>
+          <p:cNvPr id="29" name="Rounded Rectangle 28"/>
           <p:cNvSpPr/>
           <p:nvPr/>
         </p:nvSpPr>
@@ -27591,7 +28152,7 @@
       </p:sp>
       <p:sp>
         <p:nvSpPr>
-          <p:cNvPr id="67" name="TextBox 66"/>
+          <p:cNvPr id="30" name="TextBox 29"/>
           <p:cNvSpPr txBox="1"/>
           <p:nvPr/>
         </p:nvSpPr>
@@ -27606,7 +28167,7 @@
           <a:noFill/>
         </p:spPr>
         <p:txBody>
-          <a:bodyPr wrap="square" lIns="128016" rIns="128016" tIns="73152" bIns="54864" anchor="ctr">
+          <a:bodyPr wrap="square" lIns="128016" tIns="73152" rIns="128016" bIns="54864" anchor="ctr">
             <a:spAutoFit/>
           </a:bodyPr>
           <a:lstStyle/>
@@ -27617,68 +28178,199 @@
                 <a:solidFill>
                   <a:srgbClr val="2F6FAE"/>
                 </a:solidFill>
-                <a:latin typeface="Arial"/>
+                <a:latin typeface="Arial" panose="020B0604020202020204"/>
               </a:rPr>
               <a:t>1   Every flow runs exactly once</a:t>
             </a:r>
-          </a:p>
-        </p:txBody>
-      </p:sp>
-      <p:sp>
-        <p:nvSpPr>
-          <p:cNvPr id="68" name="TextBox 67"/>
-          <p:cNvSpPr txBox="1"/>
-          <p:nvPr/>
-        </p:nvSpPr>
-        <p:spPr>
-          <a:xfrm>
-            <a:off x="6355080" y="2377440"/>
-            <a:ext cx="4800600" cy="457200"/>
-          </a:xfrm>
-          <a:prstGeom prst="rect">
-            <a:avLst/>
-          </a:prstGeom>
-          <a:noFill/>
-        </p:spPr>
-        <p:txBody>
-          <a:bodyPr wrap="none" anchor="ctr">
-            <a:spAutoFit/>
-          </a:bodyPr>
-          <a:lstStyle/>
-          <a:p>
-            <a:pPr algn="ctr"/>
-            <a14:m xmlns:a14="http://schemas.microsoft.com/office/drawing/2010/main">
-              <m:oMathPara xmlns:m="http://schemas.openxmlformats.org/officeDocument/2006/math">
-                <m:oMathParaPr>
-                  <m:jc m:val="center"/>
-                </m:oMathParaPr>
-                <m:oMath>
-                  <m:nary>
-                    <m:naryPr>
-                      <m:chr m:val="∑"/>
-                      <m:limLoc m:val="undOvr"/>
-                      <m:subHide m:val="off"/>
-                      <m:supHide m:val="on"/>
-                    </m:naryPr>
-                    <m:sub>
+            <a:endParaRPr sz="1070" b="1">
+              <a:solidFill>
+                <a:srgbClr val="2F6FAE"/>
+              </a:solidFill>
+              <a:latin typeface="Arial" panose="020B0604020202020204"/>
+            </a:endParaRPr>
+          </a:p>
+        </p:txBody>
+      </p:sp>
+      <mc:AlternateContent xmlns:mc="http://schemas.openxmlformats.org/markup-compatibility/2006">
+        <mc:Choice xmlns:a14="http://schemas.microsoft.com/office/drawing/2010/main" Requires="a14">
+          <p:sp>
+            <p:nvSpPr>
+              <p:cNvPr id="31" name="TextBox 30"/>
+              <p:cNvSpPr txBox="1"/>
+              <p:nvPr/>
+            </p:nvSpPr>
+            <p:spPr>
+              <a:xfrm>
+                <a:off x="6355080" y="2377440"/>
+                <a:ext cx="4800600" cy="457200"/>
+              </a:xfrm>
+              <a:prstGeom prst="rect">
+                <a:avLst/>
+              </a:prstGeom>
+              <a:noFill/>
+            </p:spPr>
+            <p:txBody>
+              <a:bodyPr wrap="none" anchor="ctr">
+                <a:spAutoFit/>
+              </a:bodyPr>
+              <a:lstStyle/>
+              <a:p>
+                <a:pPr algn="ctr"/>
+                <a14:m>
+                  <m:oMathPara xmlns:m="http://schemas.openxmlformats.org/officeDocument/2006/math">
+                    <m:oMathParaPr>
+                      <m:jc m:val="center"/>
+                    </m:oMathParaPr>
+                    <m:oMath xmlns:m="http://schemas.openxmlformats.org/officeDocument/2006/math">
+                      <m:nary>
+                        <m:naryPr>
+                          <m:chr m:val="∑"/>
+                          <m:limLoc m:val="undOvr"/>
+                          <m:supHide m:val="on"/>
+                          <m:ctrlPr>
+                            <a:rPr/>
+                          </m:ctrlPr>
+                        </m:naryPr>
+                        <m:sub>
+                          <m:r>
+                            <a:rPr lang="en-US" sz="1400" dirty="0">
+                              <a:solidFill>
+                                <a:srgbClr val="1F3046"/>
+                              </a:solidFill>
+                              <a:latin typeface="Cambria Math" panose="02040503050406030204"/>
+                            </a:rPr>
+                            <m:t>𝑏</m:t>
+                          </m:r>
+                          <m:r>
+                            <a:rPr lang="en-US" sz="1400" dirty="0">
+                              <a:solidFill>
+                                <a:srgbClr val="1F3046"/>
+                              </a:solidFill>
+                              <a:latin typeface="Cambria Math" panose="02040503050406030204"/>
+                            </a:rPr>
+                            <m:t>∈</m:t>
+                          </m:r>
+                          <m:r>
+                            <a:rPr lang="en-US" sz="1400" dirty="0">
+                              <a:solidFill>
+                                <a:srgbClr val="1F3046"/>
+                              </a:solidFill>
+                              <a:latin typeface="Cambria Math" panose="02040503050406030204"/>
+                            </a:rPr>
+                            <m:t>𝐵</m:t>
+                          </m:r>
+                        </m:sub>
+                        <m:sup/>
+                        <m:e>
+                          <m:sSub>
+                            <m:sSubPr>
+                              <m:ctrlPr>
+                                <a:rPr/>
+                              </m:ctrlPr>
+                            </m:sSubPr>
+                            <m:e>
+                              <m:r>
+                                <a:rPr lang="en-US" sz="1400" dirty="0">
+                                  <a:solidFill>
+                                    <a:srgbClr val="1F3046"/>
+                                  </a:solidFill>
+                                  <a:latin typeface="Cambria Math" panose="02040503050406030204"/>
+                                </a:rPr>
+                                <m:t>𝑥</m:t>
+                              </m:r>
+                            </m:e>
+                            <m:sub>
+                              <m:r>
+                                <a:rPr lang="en-US" sz="1400" dirty="0">
+                                  <a:solidFill>
+                                    <a:srgbClr val="1F3046"/>
+                                  </a:solidFill>
+                                  <a:latin typeface="Cambria Math" panose="02040503050406030204"/>
+                                </a:rPr>
+                                <m:t>𝑝</m:t>
+                              </m:r>
+                              <m:r>
+                                <a:rPr lang="en-US" sz="1400" dirty="0">
+                                  <a:solidFill>
+                                    <a:srgbClr val="1F3046"/>
+                                  </a:solidFill>
+                                  <a:latin typeface="Cambria Math" panose="02040503050406030204"/>
+                                </a:rPr>
+                                <m:t>,</m:t>
+                              </m:r>
+                              <m:r>
+                                <a:rPr lang="en-US" sz="1400" dirty="0">
+                                  <a:solidFill>
+                                    <a:srgbClr val="1F3046"/>
+                                  </a:solidFill>
+                                  <a:latin typeface="Cambria Math" panose="02040503050406030204"/>
+                                </a:rPr>
+                                <m:t>𝑏</m:t>
+                              </m:r>
+                            </m:sub>
+                          </m:sSub>
+                        </m:e>
+                      </m:nary>
                       <m:r>
                         <a:rPr lang="en-US" sz="1400" dirty="0">
                           <a:solidFill>
                             <a:srgbClr val="1F3046"/>
                           </a:solidFill>
-                          <a:latin typeface="Cambria Math"/>
+                          <a:latin typeface="Cambria Math" panose="02040503050406030204"/>
                         </a:rPr>
-                        <m:t>b</m:t>
+                        <m:t>=</m:t>
                       </m:r>
                       <m:r>
-                        <m:rPr>
-                          <m:sty m:val="p"/>
-                        </m:rPr>
                         <a:rPr lang="en-US" sz="1400" dirty="0">
                           <a:solidFill>
                             <a:srgbClr val="1F3046"/>
                           </a:solidFill>
-                          <a:latin typeface="Cambria Math"/>
+                          <a:latin typeface="Cambria Math" panose="02040503050406030204"/>
+                        </a:rPr>
+                        <m:t>1</m:t>
+                      </m:r>
+                      <m:r>
+                        <a:rPr lang="en-US" sz="1400" dirty="0">
+                          <a:solidFill>
+                            <a:srgbClr val="1F3046"/>
+                          </a:solidFill>
+                          <a:latin typeface="Cambria Math" panose="02040503050406030204"/>
+                        </a:rPr>
+                        <m:t>,</m:t>
+                      </m:r>
+                      <m:r>
+                        <a:rPr lang="en-US" sz="1400" dirty="0">
+                          <a:solidFill>
+                            <a:srgbClr val="1F3046"/>
+                          </a:solidFill>
+                          <a:latin typeface="Cambria Math" panose="02040503050406030204"/>
+                        </a:rPr>
+                        <m:t>  </m:t>
+                      </m:r>
+                      <m:r>
+                        <a:rPr lang="en-US" sz="1400" dirty="0">
+                          <a:solidFill>
+                            <a:srgbClr val="1F3046"/>
+                          </a:solidFill>
+                          <a:latin typeface="Cambria Math" panose="02040503050406030204"/>
+                        </a:rPr>
+                        <m:t>∀</m:t>
+                      </m:r>
+                      <m:r>
+                        <a:rPr lang="en-US" sz="1400" dirty="0">
+                          <a:solidFill>
+                            <a:srgbClr val="1F3046"/>
+                          </a:solidFill>
+                          <a:latin typeface="Cambria Math" panose="02040503050406030204"/>
+                        </a:rPr>
+                        <m:t>𝑝</m:t>
+                      </m:r>
+                      <m:r>
+                        <a:rPr lang="en-US" sz="1400" dirty="0">
+                          <a:solidFill>
+                            <a:srgbClr val="1F3046"/>
+                          </a:solidFill>
+                          <a:latin typeface="Cambria Math" panose="02040503050406030204"/>
                         </a:rPr>
                         <m:t>∈</m:t>
                       </m:r>
@@ -27687,33 +28379,539 @@
                           <a:solidFill>
                             <a:srgbClr val="1F3046"/>
                           </a:solidFill>
-                          <a:latin typeface="Cambria Math"/>
+                          <a:latin typeface="Cambria Math" panose="02040503050406030204"/>
                         </a:rPr>
-                        <m:t>B</m:t>
+                        <m:t>𝑃</m:t>
                       </m:r>
-                    </m:sub>
-                    <m:sup>
+                    </m:oMath>
+                  </m:oMathPara>
+                </a14:m>
+              </a:p>
+            </p:txBody>
+          </p:sp>
+        </mc:Choice>
+        <mc:Fallback>
+          <p:sp>
+            <p:nvSpPr>
+              <p:cNvPr id="31" name="TextBox 30"/>
+              <p:cNvSpPr txBox="1">
+                <a:spLocks noRot="1" noChangeAspect="1" noMove="1" noResize="1" noEditPoints="1" noAdjustHandles="1" noChangeArrowheads="1" noChangeShapeType="1" noTextEdit="1"/>
+              </p:cNvSpPr>
+              <p:nvPr/>
+            </p:nvSpPr>
+            <p:spPr>
+              <a:xfrm>
+                <a:off x="6355080" y="2377440"/>
+                <a:ext cx="4800600" cy="457200"/>
+              </a:xfrm>
+              <a:prstGeom prst="rect">
+                <a:avLst/>
+              </a:prstGeom>
+              <a:blipFill rotWithShape="1">
+                <a:blip r:embed="rId9"/>
+                <a:stretch>
+                  <a:fillRect t="-14167" b="-14444"/>
+                </a:stretch>
+              </a:blipFill>
+            </p:spPr>
+            <p:txBody>
+              <a:bodyPr/>
+              <a:lstStyle/>
+              <a:p>
+                <a:r>
+                  <a:rPr lang="zh-CN" altLang="en-US">
+                    <a:noFill/>
+                  </a:rPr>
+                  <a:t> </a:t>
+                </a:r>
+              </a:p>
+            </p:txBody>
+          </p:sp>
+        </mc:Fallback>
+      </mc:AlternateContent>
+      <p:sp>
+        <p:nvSpPr>
+          <p:cNvPr id="32" name="Rounded Rectangle 31"/>
+          <p:cNvSpPr/>
+          <p:nvPr/>
+        </p:nvSpPr>
+        <p:spPr>
+          <a:xfrm>
+            <a:off x="3730752" y="3035808"/>
+            <a:ext cx="7772400" cy="640080"/>
+          </a:xfrm>
+          <a:prstGeom prst="roundRect">
+            <a:avLst/>
+          </a:prstGeom>
+          <a:solidFill>
+            <a:srgbClr val="FFFFFF"/>
+          </a:solidFill>
+          <a:ln w="17780">
+            <a:solidFill>
+              <a:srgbClr val="7D48A1"/>
+            </a:solidFill>
+          </a:ln>
+        </p:spPr>
+        <p:style>
+          <a:lnRef idx="1">
+            <a:schemeClr val="accent1"/>
+          </a:lnRef>
+          <a:fillRef idx="3">
+            <a:schemeClr val="accent1"/>
+          </a:fillRef>
+          <a:effectRef idx="2">
+            <a:schemeClr val="accent1"/>
+          </a:effectRef>
+          <a:fontRef idx="minor">
+            <a:schemeClr val="lt1"/>
+          </a:fontRef>
+        </p:style>
+        <p:txBody>
+          <a:bodyPr rtlCol="0" anchor="ctr"/>
+          <a:lstStyle/>
+          <a:p>
+            <a:pPr algn="ctr"/>
+          </a:p>
+        </p:txBody>
+      </p:sp>
+      <p:sp>
+        <p:nvSpPr>
+          <p:cNvPr id="33" name="TextBox 32"/>
+          <p:cNvSpPr txBox="1"/>
+          <p:nvPr/>
+        </p:nvSpPr>
+        <p:spPr>
+          <a:xfrm>
+            <a:off x="3913632" y="3108960"/>
+            <a:ext cx="2651760" cy="457200"/>
+          </a:xfrm>
+          <a:prstGeom prst="rect">
+            <a:avLst/>
+          </a:prstGeom>
+          <a:noFill/>
+        </p:spPr>
+        <p:txBody>
+          <a:bodyPr wrap="square" lIns="128016" tIns="73152" rIns="128016" bIns="54864" anchor="ctr">
+            <a:spAutoFit/>
+          </a:bodyPr>
+          <a:lstStyle/>
+          <a:p>
+            <a:pPr algn="l"/>
+            <a:r>
+              <a:rPr sz="1070" b="1">
+                <a:solidFill>
+                  <a:srgbClr val="7D48A1"/>
+                </a:solidFill>
+                <a:latin typeface="Arial" panose="020B0604020202020204"/>
+              </a:rPr>
+              <a:t>2   At most one peer per rank and batch</a:t>
+            </a:r>
+            <a:endParaRPr sz="1070" b="1">
+              <a:solidFill>
+                <a:srgbClr val="7D48A1"/>
+              </a:solidFill>
+              <a:latin typeface="Arial" panose="020B0604020202020204"/>
+            </a:endParaRPr>
+          </a:p>
+        </p:txBody>
+      </p:sp>
+      <mc:AlternateContent xmlns:mc="http://schemas.openxmlformats.org/markup-compatibility/2006">
+        <mc:Choice xmlns:a14="http://schemas.microsoft.com/office/drawing/2010/main" Requires="a14">
+          <p:sp>
+            <p:nvSpPr>
+              <p:cNvPr id="34" name="TextBox 33"/>
+              <p:cNvSpPr txBox="1"/>
+              <p:nvPr/>
+            </p:nvSpPr>
+            <p:spPr>
+              <a:xfrm>
+                <a:off x="6355080" y="3108960"/>
+                <a:ext cx="4800600" cy="457200"/>
+              </a:xfrm>
+              <a:prstGeom prst="rect">
+                <a:avLst/>
+              </a:prstGeom>
+              <a:noFill/>
+            </p:spPr>
+            <p:txBody>
+              <a:bodyPr wrap="none" anchor="ctr">
+                <a:spAutoFit/>
+              </a:bodyPr>
+              <a:lstStyle/>
+              <a:p>
+                <a:pPr algn="ctr"/>
+                <a14:m>
+                  <m:oMathPara xmlns:m="http://schemas.openxmlformats.org/officeDocument/2006/math">
+                    <m:oMathParaPr>
+                      <m:jc m:val="center"/>
+                    </m:oMathParaPr>
+                    <m:oMath xmlns:m="http://schemas.openxmlformats.org/officeDocument/2006/math">
+                      <m:nary>
+                        <m:naryPr>
+                          <m:chr m:val="∑"/>
+                          <m:limLoc m:val="undOvr"/>
+                          <m:supHide m:val="on"/>
+                          <m:ctrlPr>
+                            <a:rPr/>
+                          </m:ctrlPr>
+                        </m:naryPr>
+                        <m:sub>
+                          <m:r>
+                            <a:rPr lang="en-US" sz="1300" dirty="0">
+                              <a:solidFill>
+                                <a:srgbClr val="1F3046"/>
+                              </a:solidFill>
+                              <a:latin typeface="Cambria Math" panose="02040503050406030204"/>
+                            </a:rPr>
+                            <m:t>𝑝</m:t>
+                          </m:r>
+                          <m:r>
+                            <a:rPr lang="en-US" sz="1300" dirty="0">
+                              <a:solidFill>
+                                <a:srgbClr val="1F3046"/>
+                              </a:solidFill>
+                              <a:latin typeface="Cambria Math" panose="02040503050406030204"/>
+                            </a:rPr>
+                            <m:t>:</m:t>
+                          </m:r>
+                          <m:r>
+                            <a:rPr lang="en-US" sz="1300" dirty="0">
+                              <a:solidFill>
+                                <a:srgbClr val="1F3046"/>
+                              </a:solidFill>
+                              <a:latin typeface="Cambria Math" panose="02040503050406030204"/>
+                            </a:rPr>
+                            <m:t>𝑟</m:t>
+                          </m:r>
+                          <m:r>
+                            <a:rPr lang="en-US" sz="1300" dirty="0">
+                              <a:solidFill>
+                                <a:srgbClr val="1F3046"/>
+                              </a:solidFill>
+                              <a:latin typeface="Cambria Math" panose="02040503050406030204"/>
+                            </a:rPr>
+                            <m:t>∈</m:t>
+                          </m:r>
+                          <m:r>
+                            <a:rPr lang="en-US" sz="1300" dirty="0">
+                              <a:solidFill>
+                                <a:srgbClr val="1F3046"/>
+                              </a:solidFill>
+                              <a:latin typeface="Cambria Math" panose="02040503050406030204"/>
+                            </a:rPr>
+                            <m:t>𝑝</m:t>
+                          </m:r>
+                        </m:sub>
+                        <m:sup/>
+                        <m:e>
+                          <m:sSub>
+                            <m:sSubPr>
+                              <m:ctrlPr>
+                                <a:rPr/>
+                              </m:ctrlPr>
+                            </m:sSubPr>
+                            <m:e>
+                              <m:r>
+                                <a:rPr lang="en-US" sz="1300" dirty="0">
+                                  <a:solidFill>
+                                    <a:srgbClr val="1F3046"/>
+                                  </a:solidFill>
+                                  <a:latin typeface="Cambria Math" panose="02040503050406030204"/>
+                                </a:rPr>
+                                <m:t>𝑥</m:t>
+                              </m:r>
+                            </m:e>
+                            <m:sub>
+                              <m:r>
+                                <a:rPr lang="en-US" sz="1300" dirty="0">
+                                  <a:solidFill>
+                                    <a:srgbClr val="1F3046"/>
+                                  </a:solidFill>
+                                  <a:latin typeface="Cambria Math" panose="02040503050406030204"/>
+                                </a:rPr>
+                                <m:t>𝑝</m:t>
+                              </m:r>
+                              <m:r>
+                                <a:rPr lang="en-US" sz="1300" dirty="0">
+                                  <a:solidFill>
+                                    <a:srgbClr val="1F3046"/>
+                                  </a:solidFill>
+                                  <a:latin typeface="Cambria Math" panose="02040503050406030204"/>
+                                </a:rPr>
+                                <m:t>,</m:t>
+                              </m:r>
+                              <m:r>
+                                <a:rPr lang="en-US" sz="1300" dirty="0">
+                                  <a:solidFill>
+                                    <a:srgbClr val="1F3046"/>
+                                  </a:solidFill>
+                                  <a:latin typeface="Cambria Math" panose="02040503050406030204"/>
+                                </a:rPr>
+                                <m:t>𝑏</m:t>
+                              </m:r>
+                            </m:sub>
+                          </m:sSub>
+                        </m:e>
+                      </m:nary>
                       <m:r>
-                        <a:rPr lang="en-US" sz="1400" dirty="0">
+                        <a:rPr lang="en-US" sz="1300" dirty="0">
                           <a:solidFill>
                             <a:srgbClr val="1F3046"/>
                           </a:solidFill>
-                          <a:latin typeface="Cambria Math"/>
+                          <a:latin typeface="Cambria Math" panose="02040503050406030204"/>
                         </a:rPr>
-                        <m:t/>
+                        <m:t>≤</m:t>
                       </m:r>
-                    </m:sup>
-                    <m:e>
+                      <m:r>
+                        <a:rPr lang="en-US" sz="1300" dirty="0">
+                          <a:solidFill>
+                            <a:srgbClr val="1F3046"/>
+                          </a:solidFill>
+                          <a:latin typeface="Cambria Math" panose="02040503050406030204"/>
+                        </a:rPr>
+                        <m:t>1</m:t>
+                      </m:r>
+                      <m:r>
+                        <a:rPr lang="en-US" sz="1300" dirty="0">
+                          <a:solidFill>
+                            <a:srgbClr val="1F3046"/>
+                          </a:solidFill>
+                          <a:latin typeface="Cambria Math" panose="02040503050406030204"/>
+                        </a:rPr>
+                        <m:t>,</m:t>
+                      </m:r>
+                      <m:r>
+                        <a:rPr lang="en-US" sz="1300" dirty="0">
+                          <a:solidFill>
+                            <a:srgbClr val="1F3046"/>
+                          </a:solidFill>
+                          <a:latin typeface="Cambria Math" panose="02040503050406030204"/>
+                        </a:rPr>
+                        <m:t>  </m:t>
+                      </m:r>
+                      <m:r>
+                        <a:rPr lang="en-US" sz="1300" dirty="0">
+                          <a:solidFill>
+                            <a:srgbClr val="1F3046"/>
+                          </a:solidFill>
+                          <a:latin typeface="Cambria Math" panose="02040503050406030204"/>
+                        </a:rPr>
+                        <m:t>∀</m:t>
+                      </m:r>
+                      <m:r>
+                        <a:rPr lang="en-US" sz="1300" dirty="0">
+                          <a:solidFill>
+                            <a:srgbClr val="1F3046"/>
+                          </a:solidFill>
+                          <a:latin typeface="Cambria Math" panose="02040503050406030204"/>
+                        </a:rPr>
+                        <m:t>𝑟</m:t>
+                      </m:r>
+                      <m:r>
+                        <a:rPr lang="en-US" sz="1300" dirty="0">
+                          <a:solidFill>
+                            <a:srgbClr val="1F3046"/>
+                          </a:solidFill>
+                          <a:latin typeface="Cambria Math" panose="02040503050406030204"/>
+                        </a:rPr>
+                        <m:t>,</m:t>
+                      </m:r>
+                      <m:r>
+                        <a:rPr lang="en-US" sz="1300" dirty="0">
+                          <a:solidFill>
+                            <a:srgbClr val="1F3046"/>
+                          </a:solidFill>
+                          <a:latin typeface="Cambria Math" panose="02040503050406030204"/>
+                        </a:rPr>
+                        <m:t> </m:t>
+                      </m:r>
+                      <m:r>
+                        <a:rPr lang="en-US" sz="1300" dirty="0">
+                          <a:solidFill>
+                            <a:srgbClr val="1F3046"/>
+                          </a:solidFill>
+                          <a:latin typeface="Cambria Math" panose="02040503050406030204"/>
+                        </a:rPr>
+                        <m:t>𝑏</m:t>
+                      </m:r>
+                    </m:oMath>
+                  </m:oMathPara>
+                </a14:m>
+              </a:p>
+            </p:txBody>
+          </p:sp>
+        </mc:Choice>
+        <mc:Fallback>
+          <p:sp>
+            <p:nvSpPr>
+              <p:cNvPr id="34" name="TextBox 33"/>
+              <p:cNvSpPr txBox="1">
+                <a:spLocks noRot="1" noChangeAspect="1" noMove="1" noResize="1" noEditPoints="1" noAdjustHandles="1" noChangeArrowheads="1" noChangeShapeType="1" noTextEdit="1"/>
+              </p:cNvSpPr>
+              <p:nvPr/>
+            </p:nvSpPr>
+            <p:spPr>
+              <a:xfrm>
+                <a:off x="6355080" y="3108960"/>
+                <a:ext cx="4800600" cy="457200"/>
+              </a:xfrm>
+              <a:prstGeom prst="rect">
+                <a:avLst/>
+              </a:prstGeom>
+              <a:blipFill rotWithShape="1">
+                <a:blip r:embed="rId10"/>
+                <a:stretch>
+                  <a:fillRect t="-14167" b="-14444"/>
+                </a:stretch>
+              </a:blipFill>
+            </p:spPr>
+            <p:txBody>
+              <a:bodyPr/>
+              <a:lstStyle/>
+              <a:p>
+                <a:r>
+                  <a:rPr lang="zh-CN" altLang="en-US">
+                    <a:noFill/>
+                  </a:rPr>
+                  <a:t> </a:t>
+                </a:r>
+              </a:p>
+            </p:txBody>
+          </p:sp>
+        </mc:Fallback>
+      </mc:AlternateContent>
+      <p:sp>
+        <p:nvSpPr>
+          <p:cNvPr id="35" name="Rounded Rectangle 34"/>
+          <p:cNvSpPr/>
+          <p:nvPr/>
+        </p:nvSpPr>
+        <p:spPr>
+          <a:xfrm>
+            <a:off x="3730752" y="3767328"/>
+            <a:ext cx="7772400" cy="640080"/>
+          </a:xfrm>
+          <a:prstGeom prst="roundRect">
+            <a:avLst/>
+          </a:prstGeom>
+          <a:solidFill>
+            <a:srgbClr val="FFFFFF"/>
+          </a:solidFill>
+          <a:ln w="17780">
+            <a:solidFill>
+              <a:srgbClr val="138F5F"/>
+            </a:solidFill>
+          </a:ln>
+        </p:spPr>
+        <p:style>
+          <a:lnRef idx="1">
+            <a:schemeClr val="accent1"/>
+          </a:lnRef>
+          <a:fillRef idx="3">
+            <a:schemeClr val="accent1"/>
+          </a:fillRef>
+          <a:effectRef idx="2">
+            <a:schemeClr val="accent1"/>
+          </a:effectRef>
+          <a:fontRef idx="minor">
+            <a:schemeClr val="lt1"/>
+          </a:fontRef>
+        </p:style>
+        <p:txBody>
+          <a:bodyPr rtlCol="0" anchor="ctr"/>
+          <a:lstStyle/>
+          <a:p>
+            <a:pPr algn="ctr"/>
+          </a:p>
+        </p:txBody>
+      </p:sp>
+      <p:sp>
+        <p:nvSpPr>
+          <p:cNvPr id="36" name="TextBox 35"/>
+          <p:cNvSpPr txBox="1"/>
+          <p:nvPr/>
+        </p:nvSpPr>
+        <p:spPr>
+          <a:xfrm>
+            <a:off x="3913632" y="3840480"/>
+            <a:ext cx="2651760" cy="457200"/>
+          </a:xfrm>
+          <a:prstGeom prst="rect">
+            <a:avLst/>
+          </a:prstGeom>
+          <a:noFill/>
+        </p:spPr>
+        <p:txBody>
+          <a:bodyPr wrap="square" lIns="128016" tIns="73152" rIns="128016" bIns="54864" anchor="ctr">
+            <a:spAutoFit/>
+          </a:bodyPr>
+          <a:lstStyle/>
+          <a:p>
+            <a:pPr algn="l"/>
+            <a:r>
+              <a:rPr sz="1070" b="1">
+                <a:solidFill>
+                  <a:srgbClr val="138F5F"/>
+                </a:solidFill>
+                <a:latin typeface="Arial" panose="020B0604020202020204"/>
+              </a:rPr>
+              <a:t>3   Activate used batches; no gaps</a:t>
+            </a:r>
+            <a:endParaRPr sz="1070" b="1">
+              <a:solidFill>
+                <a:srgbClr val="138F5F"/>
+              </a:solidFill>
+              <a:latin typeface="Arial" panose="020B0604020202020204"/>
+            </a:endParaRPr>
+          </a:p>
+        </p:txBody>
+      </p:sp>
+      <mc:AlternateContent xmlns:mc="http://schemas.openxmlformats.org/markup-compatibility/2006">
+        <mc:Choice xmlns:a14="http://schemas.microsoft.com/office/drawing/2010/main" Requires="a14">
+          <p:sp>
+            <p:nvSpPr>
+              <p:cNvPr id="37" name="TextBox 36"/>
+              <p:cNvSpPr txBox="1"/>
+              <p:nvPr/>
+            </p:nvSpPr>
+            <p:spPr>
+              <a:xfrm>
+                <a:off x="6355080" y="3840480"/>
+                <a:ext cx="4800600" cy="457200"/>
+              </a:xfrm>
+              <a:prstGeom prst="rect">
+                <a:avLst/>
+              </a:prstGeom>
+              <a:noFill/>
+            </p:spPr>
+            <p:txBody>
+              <a:bodyPr wrap="none" anchor="ctr">
+                <a:spAutoFit/>
+              </a:bodyPr>
+              <a:lstStyle/>
+              <a:p>
+                <a:pPr algn="ctr"/>
+                <a14:m>
+                  <m:oMathPara xmlns:m="http://schemas.openxmlformats.org/officeDocument/2006/math">
+                    <m:oMathParaPr>
+                      <m:jc m:val="center"/>
+                    </m:oMathParaPr>
+                    <m:oMath xmlns:m="http://schemas.openxmlformats.org/officeDocument/2006/math">
                       <m:sSub>
+                        <m:sSubPr>
+                          <m:ctrlPr>
+                            <a:rPr/>
+                          </m:ctrlPr>
+                        </m:sSubPr>
                         <m:e>
                           <m:r>
                             <a:rPr lang="en-US" sz="1400" dirty="0">
                               <a:solidFill>
                                 <a:srgbClr val="1F3046"/>
                               </a:solidFill>
-                              <a:latin typeface="Cambria Math"/>
+                              <a:latin typeface="Cambria Math" panose="02040503050406030204"/>
                             </a:rPr>
-                            <m:t>x</m:t>
+                            <m:t>𝑥</m:t>
                           </m:r>
                         </m:e>
                         <m:sub>
@@ -27722,19 +28920,16 @@
                               <a:solidFill>
                                 <a:srgbClr val="1F3046"/>
                               </a:solidFill>
-                              <a:latin typeface="Cambria Math"/>
+                              <a:latin typeface="Cambria Math" panose="02040503050406030204"/>
                             </a:rPr>
-                            <m:t>p</m:t>
+                            <m:t>𝑝</m:t>
                           </m:r>
                           <m:r>
-                            <m:rPr>
-                              <m:sty m:val="p"/>
-                            </m:rPr>
                             <a:rPr lang="en-US" sz="1400" dirty="0">
                               <a:solidFill>
                                 <a:srgbClr val="1F3046"/>
                               </a:solidFill>
-                              <a:latin typeface="Cambria Math"/>
+                              <a:latin typeface="Cambria Math" panose="02040503050406030204"/>
                             </a:rPr>
                             <m:t>,</m:t>
                           </m:r>
@@ -27743,113 +28938,208 @@
                               <a:solidFill>
                                 <a:srgbClr val="1F3046"/>
                               </a:solidFill>
-                              <a:latin typeface="Cambria Math"/>
+                              <a:latin typeface="Cambria Math" panose="02040503050406030204"/>
                             </a:rPr>
-                            <m:t>b</m:t>
+                            <m:t>𝑏</m:t>
                           </m:r>
                         </m:sub>
                       </m:sSub>
-                    </m:e>
-                  </m:nary>
-                  <m:r>
-                    <m:rPr>
-                      <m:sty m:val="p"/>
-                    </m:rPr>
-                    <a:rPr lang="en-US" sz="1400" dirty="0">
-                      <a:solidFill>
-                        <a:srgbClr val="1F3046"/>
-                      </a:solidFill>
-                      <a:latin typeface="Cambria Math"/>
-                    </a:rPr>
-                    <m:t>=</m:t>
-                  </m:r>
-                  <m:r>
-                    <a:rPr lang="en-US" sz="1400" dirty="0">
-                      <a:solidFill>
-                        <a:srgbClr val="1F3046"/>
-                      </a:solidFill>
-                      <a:latin typeface="Cambria Math"/>
-                    </a:rPr>
-                    <m:t>1</m:t>
-                  </m:r>
-                  <m:r>
-                    <m:rPr>
-                      <m:sty m:val="p"/>
-                    </m:rPr>
-                    <a:rPr lang="en-US" sz="1400" dirty="0">
-                      <a:solidFill>
-                        <a:srgbClr val="1F3046"/>
-                      </a:solidFill>
-                      <a:latin typeface="Cambria Math"/>
-                    </a:rPr>
-                    <m:t>,</m:t>
-                  </m:r>
-                  <m:r>
-                    <a:rPr lang="en-US" sz="1400" dirty="0">
-                      <a:solidFill>
-                        <a:srgbClr val="1F3046"/>
-                      </a:solidFill>
-                      <a:latin typeface="Cambria Math"/>
-                    </a:rPr>
-                    <m:t>  </m:t>
-                  </m:r>
-                  <m:r>
-                    <m:rPr>
-                      <m:sty m:val="p"/>
-                    </m:rPr>
-                    <a:rPr lang="en-US" sz="1400" dirty="0">
-                      <a:solidFill>
-                        <a:srgbClr val="1F3046"/>
-                      </a:solidFill>
-                      <a:latin typeface="Cambria Math"/>
-                    </a:rPr>
-                    <m:t>∀</m:t>
-                  </m:r>
-                  <m:r>
-                    <a:rPr lang="en-US" sz="1400" dirty="0">
-                      <a:solidFill>
-                        <a:srgbClr val="1F3046"/>
-                      </a:solidFill>
-                      <a:latin typeface="Cambria Math"/>
-                    </a:rPr>
-                    <m:t>p</m:t>
-                  </m:r>
-                  <m:r>
-                    <m:rPr>
-                      <m:sty m:val="p"/>
-                    </m:rPr>
-                    <a:rPr lang="en-US" sz="1400" dirty="0">
-                      <a:solidFill>
-                        <a:srgbClr val="1F3046"/>
-                      </a:solidFill>
-                      <a:latin typeface="Cambria Math"/>
-                    </a:rPr>
-                    <m:t>∈</m:t>
-                  </m:r>
-                  <m:r>
-                    <a:rPr lang="en-US" sz="1400" dirty="0">
-                      <a:solidFill>
-                        <a:srgbClr val="1F3046"/>
-                      </a:solidFill>
-                      <a:latin typeface="Cambria Math"/>
-                    </a:rPr>
-                    <m:t>P</m:t>
-                  </m:r>
-                </m:oMath>
-              </m:oMathPara>
-            </a14:m>
-          </a:p>
-        </p:txBody>
-      </p:sp>
-      <p:sp>
-        <p:nvSpPr>
-          <p:cNvPr id="69" name="Rounded Rectangle 68"/>
+                      <m:r>
+                        <a:rPr lang="en-US" sz="1400" dirty="0">
+                          <a:solidFill>
+                            <a:srgbClr val="1F3046"/>
+                          </a:solidFill>
+                          <a:latin typeface="Cambria Math" panose="02040503050406030204"/>
+                        </a:rPr>
+                        <m:t>≤</m:t>
+                      </m:r>
+                      <m:sSub>
+                        <m:sSubPr>
+                          <m:ctrlPr>
+                            <a:rPr/>
+                          </m:ctrlPr>
+                        </m:sSubPr>
+                        <m:e>
+                          <m:r>
+                            <a:rPr lang="en-US" sz="1400" dirty="0">
+                              <a:solidFill>
+                                <a:srgbClr val="1F3046"/>
+                              </a:solidFill>
+                              <a:latin typeface="Cambria Math" panose="02040503050406030204"/>
+                            </a:rPr>
+                            <m:t>𝑦</m:t>
+                          </m:r>
+                        </m:e>
+                        <m:sub>
+                          <m:r>
+                            <a:rPr lang="en-US" sz="1400" dirty="0">
+                              <a:solidFill>
+                                <a:srgbClr val="1F3046"/>
+                              </a:solidFill>
+                              <a:latin typeface="Cambria Math" panose="02040503050406030204"/>
+                            </a:rPr>
+                            <m:t>𝑏</m:t>
+                          </m:r>
+                        </m:sub>
+                      </m:sSub>
+                      <m:r>
+                        <a:rPr lang="en-US" sz="1400" dirty="0">
+                          <a:solidFill>
+                            <a:srgbClr val="1F3046"/>
+                          </a:solidFill>
+                          <a:latin typeface="Cambria Math" panose="02040503050406030204"/>
+                        </a:rPr>
+                        <m:t>,</m:t>
+                      </m:r>
+                      <m:r>
+                        <a:rPr lang="en-US" sz="1400" dirty="0">
+                          <a:solidFill>
+                            <a:srgbClr val="1F3046"/>
+                          </a:solidFill>
+                          <a:latin typeface="Cambria Math" panose="02040503050406030204"/>
+                        </a:rPr>
+                        <m:t>  </m:t>
+                      </m:r>
+                      <m:sSub>
+                        <m:sSubPr>
+                          <m:ctrlPr>
+                            <a:rPr/>
+                          </m:ctrlPr>
+                        </m:sSubPr>
+                        <m:e>
+                          <m:r>
+                            <a:rPr lang="en-US" sz="1400" dirty="0">
+                              <a:solidFill>
+                                <a:srgbClr val="1F3046"/>
+                              </a:solidFill>
+                              <a:latin typeface="Cambria Math" panose="02040503050406030204"/>
+                            </a:rPr>
+                            <m:t>𝑦</m:t>
+                          </m:r>
+                        </m:e>
+                        <m:sub>
+                          <m:r>
+                            <a:rPr lang="en-US" sz="1400" dirty="0">
+                              <a:solidFill>
+                                <a:srgbClr val="1F3046"/>
+                              </a:solidFill>
+                              <a:latin typeface="Cambria Math" panose="02040503050406030204"/>
+                            </a:rPr>
+                            <m:t>𝑏</m:t>
+                          </m:r>
+                        </m:sub>
+                      </m:sSub>
+                      <m:r>
+                        <a:rPr lang="en-US" sz="1400" dirty="0">
+                          <a:solidFill>
+                            <a:srgbClr val="1F3046"/>
+                          </a:solidFill>
+                          <a:latin typeface="Cambria Math" panose="02040503050406030204"/>
+                        </a:rPr>
+                        <m:t>≥</m:t>
+                      </m:r>
+                      <m:sSub>
+                        <m:sSubPr>
+                          <m:ctrlPr>
+                            <a:rPr/>
+                          </m:ctrlPr>
+                        </m:sSubPr>
+                        <m:e>
+                          <m:r>
+                            <a:rPr lang="en-US" sz="1400" dirty="0">
+                              <a:solidFill>
+                                <a:srgbClr val="1F3046"/>
+                              </a:solidFill>
+                              <a:latin typeface="Cambria Math" panose="02040503050406030204"/>
+                            </a:rPr>
+                            <m:t>𝑦</m:t>
+                          </m:r>
+                        </m:e>
+                        <m:sub>
+                          <m:r>
+                            <a:rPr lang="en-US" sz="1400" dirty="0">
+                              <a:solidFill>
+                                <a:srgbClr val="1F3046"/>
+                              </a:solidFill>
+                              <a:latin typeface="Cambria Math" panose="02040503050406030204"/>
+                            </a:rPr>
+                            <m:t>𝑏</m:t>
+                          </m:r>
+                          <m:r>
+                            <a:rPr lang="en-US" sz="1400" dirty="0">
+                              <a:solidFill>
+                                <a:srgbClr val="1F3046"/>
+                              </a:solidFill>
+                              <a:latin typeface="Cambria Math" panose="02040503050406030204"/>
+                            </a:rPr>
+                            <m:t>+</m:t>
+                          </m:r>
+                          <m:r>
+                            <a:rPr lang="en-US" sz="1400" dirty="0">
+                              <a:solidFill>
+                                <a:srgbClr val="1F3046"/>
+                              </a:solidFill>
+                              <a:latin typeface="Cambria Math" panose="02040503050406030204"/>
+                            </a:rPr>
+                            <m:t>1</m:t>
+                          </m:r>
+                        </m:sub>
+                      </m:sSub>
+                    </m:oMath>
+                  </m:oMathPara>
+                </a14:m>
+              </a:p>
+            </p:txBody>
+          </p:sp>
+        </mc:Choice>
+        <mc:Fallback>
+          <p:sp>
+            <p:nvSpPr>
+              <p:cNvPr id="37" name="TextBox 36"/>
+              <p:cNvSpPr txBox="1">
+                <a:spLocks noRot="1" noChangeAspect="1" noMove="1" noResize="1" noEditPoints="1" noAdjustHandles="1" noChangeArrowheads="1" noChangeShapeType="1" noTextEdit="1"/>
+              </p:cNvSpPr>
+              <p:nvPr/>
+            </p:nvSpPr>
+            <p:spPr>
+              <a:xfrm>
+                <a:off x="6355080" y="3840480"/>
+                <a:ext cx="4800600" cy="457200"/>
+              </a:xfrm>
+              <a:prstGeom prst="rect">
+                <a:avLst/>
+              </a:prstGeom>
+              <a:blipFill rotWithShape="1">
+                <a:blip r:embed="rId11"/>
+                <a:stretch>
+                  <a:fillRect/>
+                </a:stretch>
+              </a:blipFill>
+            </p:spPr>
+            <p:txBody>
+              <a:bodyPr/>
+              <a:lstStyle/>
+              <a:p>
+                <a:r>
+                  <a:rPr lang="zh-CN" altLang="en-US">
+                    <a:noFill/>
+                  </a:rPr>
+                  <a:t> </a:t>
+                </a:r>
+              </a:p>
+            </p:txBody>
+          </p:sp>
+        </mc:Fallback>
+      </mc:AlternateContent>
+      <p:sp>
+        <p:nvSpPr>
+          <p:cNvPr id="38" name="Rounded Rectangle 37"/>
           <p:cNvSpPr/>
           <p:nvPr/>
         </p:nvSpPr>
         <p:spPr>
           <a:xfrm>
-            <a:off x="3730752" y="3035808"/>
+            <a:off x="3730752" y="4498848"/>
             <a:ext cx="7772400" cy="640080"/>
           </a:xfrm>
           <a:prstGeom prst="roundRect">
@@ -27860,7 +29150,7 @@
           </a:solidFill>
           <a:ln w="17780">
             <a:solidFill>
-              <a:srgbClr val="7D48A1"/>
+              <a:srgbClr val="E67E22"/>
             </a:solidFill>
           </a:ln>
         </p:spPr>
@@ -27888,13 +29178,13 @@
       </p:sp>
       <p:sp>
         <p:nvSpPr>
-          <p:cNvPr id="70" name="TextBox 69"/>
+          <p:cNvPr id="39" name="TextBox 38"/>
           <p:cNvSpPr txBox="1"/>
           <p:nvPr/>
         </p:nvSpPr>
         <p:spPr>
           <a:xfrm>
-            <a:off x="3913632" y="3108960"/>
+            <a:off x="3913632" y="4572000"/>
             <a:ext cx="2651760" cy="457200"/>
           </a:xfrm>
           <a:prstGeom prst="rect">
@@ -27903,7 +29193,7 @@
           <a:noFill/>
         </p:spPr>
         <p:txBody>
-          <a:bodyPr wrap="square" lIns="128016" rIns="128016" tIns="73152" bIns="54864" anchor="ctr">
+          <a:bodyPr wrap="square" lIns="128016" tIns="73152" rIns="128016" bIns="54864" anchor="ctr">
             <a:spAutoFit/>
           </a:bodyPr>
           <a:lstStyle/>
@@ -27912,271 +29202,328 @@
             <a:r>
               <a:rPr sz="1070" b="1">
                 <a:solidFill>
-                  <a:srgbClr val="7D48A1"/>
-                </a:solidFill>
-                <a:latin typeface="Arial"/>
-              </a:rPr>
-              <a:t>2   At most one peer per rank and batch</a:t>
-            </a:r>
-          </a:p>
-        </p:txBody>
-      </p:sp>
-      <p:sp>
-        <p:nvSpPr>
-          <p:cNvPr id="71" name="TextBox 70"/>
-          <p:cNvSpPr txBox="1"/>
-          <p:nvPr/>
-        </p:nvSpPr>
-        <p:spPr>
-          <a:xfrm>
-            <a:off x="6355080" y="3108960"/>
-            <a:ext cx="4800600" cy="457200"/>
-          </a:xfrm>
-          <a:prstGeom prst="rect">
-            <a:avLst/>
-          </a:prstGeom>
-          <a:noFill/>
-        </p:spPr>
-        <p:txBody>
-          <a:bodyPr wrap="none" anchor="ctr">
-            <a:spAutoFit/>
-          </a:bodyPr>
-          <a:lstStyle/>
-          <a:p>
-            <a:pPr algn="ctr"/>
-            <a14:m xmlns:a14="http://schemas.microsoft.com/office/drawing/2010/main">
-              <m:oMathPara xmlns:m="http://schemas.openxmlformats.org/officeDocument/2006/math">
-                <m:oMathParaPr>
-                  <m:jc m:val="center"/>
-                </m:oMathParaPr>
-                <m:oMath>
-                  <m:nary>
-                    <m:naryPr>
-                      <m:chr m:val="∑"/>
-                      <m:limLoc m:val="undOvr"/>
-                      <m:subHide m:val="off"/>
-                      <m:supHide m:val="on"/>
-                    </m:naryPr>
-                    <m:sub>
-                      <m:r>
-                        <a:rPr lang="en-US" sz="1300" dirty="0">
-                          <a:solidFill>
-                            <a:srgbClr val="1F3046"/>
-                          </a:solidFill>
-                          <a:latin typeface="Cambria Math"/>
-                        </a:rPr>
-                        <m:t>p</m:t>
-                      </m:r>
-                      <m:r>
-                        <m:rPr>
-                          <m:sty m:val="p"/>
-                        </m:rPr>
-                        <a:rPr lang="en-US" sz="1300" dirty="0">
-                          <a:solidFill>
-                            <a:srgbClr val="1F3046"/>
-                          </a:solidFill>
-                          <a:latin typeface="Cambria Math"/>
-                        </a:rPr>
-                        <m:t>:</m:t>
-                      </m:r>
-                      <m:r>
-                        <a:rPr lang="en-US" sz="1300" dirty="0">
-                          <a:solidFill>
-                            <a:srgbClr val="1F3046"/>
-                          </a:solidFill>
-                          <a:latin typeface="Cambria Math"/>
-                        </a:rPr>
-                        <m:t>r</m:t>
-                      </m:r>
-                      <m:r>
-                        <m:rPr>
-                          <m:sty m:val="p"/>
-                        </m:rPr>
-                        <a:rPr lang="en-US" sz="1300" dirty="0">
-                          <a:solidFill>
-                            <a:srgbClr val="1F3046"/>
-                          </a:solidFill>
-                          <a:latin typeface="Cambria Math"/>
-                        </a:rPr>
-                        <m:t>∈</m:t>
-                      </m:r>
-                      <m:r>
-                        <a:rPr lang="en-US" sz="1300" dirty="0">
-                          <a:solidFill>
-                            <a:srgbClr val="1F3046"/>
-                          </a:solidFill>
-                          <a:latin typeface="Cambria Math"/>
-                        </a:rPr>
-                        <m:t>p</m:t>
-                      </m:r>
-                    </m:sub>
-                    <m:sup>
-                      <m:r>
-                        <a:rPr lang="en-US" sz="1300" dirty="0">
-                          <a:solidFill>
-                            <a:srgbClr val="1F3046"/>
-                          </a:solidFill>
-                          <a:latin typeface="Cambria Math"/>
-                        </a:rPr>
-                        <m:t/>
-                      </m:r>
-                    </m:sup>
-                    <m:e>
+                  <a:srgbClr val="E67E22"/>
+                </a:solidFill>
+                <a:latin typeface="Arial" panose="020B0604020202020204"/>
+              </a:rPr>
+              <a:t>4   Migration load on each link</a:t>
+            </a:r>
+            <a:endParaRPr sz="1070" b="1">
+              <a:solidFill>
+                <a:srgbClr val="E67E22"/>
+              </a:solidFill>
+              <a:latin typeface="Arial" panose="020B0604020202020204"/>
+            </a:endParaRPr>
+          </a:p>
+        </p:txBody>
+      </p:sp>
+      <mc:AlternateContent xmlns:mc="http://schemas.openxmlformats.org/markup-compatibility/2006">
+        <mc:Choice xmlns:a14="http://schemas.microsoft.com/office/drawing/2010/main" Requires="a14">
+          <p:sp>
+            <p:nvSpPr>
+              <p:cNvPr id="40" name="TextBox 39"/>
+              <p:cNvSpPr txBox="1"/>
+              <p:nvPr/>
+            </p:nvSpPr>
+            <p:spPr>
+              <a:xfrm>
+                <a:off x="6355080" y="4572000"/>
+                <a:ext cx="4800600" cy="457200"/>
+              </a:xfrm>
+              <a:prstGeom prst="rect">
+                <a:avLst/>
+              </a:prstGeom>
+              <a:noFill/>
+            </p:spPr>
+            <p:txBody>
+              <a:bodyPr wrap="none" anchor="ctr">
+                <a:spAutoFit/>
+              </a:bodyPr>
+              <a:lstStyle/>
+              <a:p>
+                <a:pPr algn="ctr"/>
+                <a14:m>
+                  <m:oMathPara xmlns:m="http://schemas.openxmlformats.org/officeDocument/2006/math">
+                    <m:oMathParaPr>
+                      <m:jc m:val="center"/>
+                    </m:oMathParaPr>
+                    <m:oMath xmlns:m="http://schemas.openxmlformats.org/officeDocument/2006/math">
                       <m:sSub>
+                        <m:sSubPr>
+                          <m:ctrlPr>
+                            <a:rPr/>
+                          </m:ctrlPr>
+                        </m:sSubPr>
                         <m:e>
                           <m:r>
-                            <a:rPr lang="en-US" sz="1300" dirty="0">
+                            <a:rPr lang="en-US" sz="1400" dirty="0">
                               <a:solidFill>
                                 <a:srgbClr val="1F3046"/>
                               </a:solidFill>
-                              <a:latin typeface="Cambria Math"/>
+                              <a:latin typeface="Cambria Math" panose="02040503050406030204"/>
                             </a:rPr>
-                            <m:t>x</m:t>
+                            <m:t>𝐿</m:t>
                           </m:r>
                         </m:e>
                         <m:sub>
                           <m:r>
-                            <a:rPr lang="en-US" sz="1300" dirty="0">
+                            <a:rPr lang="en-US" sz="1400" dirty="0">
                               <a:solidFill>
                                 <a:srgbClr val="1F3046"/>
                               </a:solidFill>
-                              <a:latin typeface="Cambria Math"/>
+                              <a:latin typeface="Cambria Math" panose="02040503050406030204"/>
                             </a:rPr>
-                            <m:t>p</m:t>
+                            <m:t>ℓ</m:t>
                           </m:r>
                           <m:r>
-                            <m:rPr>
-                              <m:sty m:val="p"/>
-                            </m:rPr>
-                            <a:rPr lang="en-US" sz="1300" dirty="0">
+                            <a:rPr lang="en-US" sz="1400" dirty="0">
                               <a:solidFill>
                                 <a:srgbClr val="1F3046"/>
                               </a:solidFill>
-                              <a:latin typeface="Cambria Math"/>
+                              <a:latin typeface="Cambria Math" panose="02040503050406030204"/>
                             </a:rPr>
                             <m:t>,</m:t>
                           </m:r>
                           <m:r>
-                            <a:rPr lang="en-US" sz="1300" dirty="0">
+                            <a:rPr lang="en-US" sz="1400" dirty="0">
                               <a:solidFill>
                                 <a:srgbClr val="1F3046"/>
                               </a:solidFill>
-                              <a:latin typeface="Cambria Math"/>
+                              <a:latin typeface="Cambria Math" panose="02040503050406030204"/>
                             </a:rPr>
-                            <m:t>b</m:t>
+                            <m:t>𝑏</m:t>
                           </m:r>
                         </m:sub>
                       </m:sSub>
-                    </m:e>
-                  </m:nary>
-                  <m:r>
-                    <m:rPr>
-                      <m:sty m:val="p"/>
-                    </m:rPr>
-                    <a:rPr lang="en-US" sz="1300" dirty="0">
-                      <a:solidFill>
-                        <a:srgbClr val="1F3046"/>
-                      </a:solidFill>
-                      <a:latin typeface="Cambria Math"/>
-                    </a:rPr>
-                    <m:t>≤</m:t>
-                  </m:r>
-                  <m:r>
-                    <a:rPr lang="en-US" sz="1300" dirty="0">
-                      <a:solidFill>
-                        <a:srgbClr val="1F3046"/>
-                      </a:solidFill>
-                      <a:latin typeface="Cambria Math"/>
-                    </a:rPr>
-                    <m:t>1</m:t>
-                  </m:r>
-                  <m:r>
-                    <m:rPr>
-                      <m:sty m:val="p"/>
-                    </m:rPr>
-                    <a:rPr lang="en-US" sz="1300" dirty="0">
-                      <a:solidFill>
-                        <a:srgbClr val="1F3046"/>
-                      </a:solidFill>
-                      <a:latin typeface="Cambria Math"/>
-                    </a:rPr>
-                    <m:t>,</m:t>
-                  </m:r>
-                  <m:r>
-                    <a:rPr lang="en-US" sz="1300" dirty="0">
-                      <a:solidFill>
-                        <a:srgbClr val="1F3046"/>
-                      </a:solidFill>
-                      <a:latin typeface="Cambria Math"/>
-                    </a:rPr>
-                    <m:t>  </m:t>
-                  </m:r>
-                  <m:r>
-                    <m:rPr>
-                      <m:sty m:val="p"/>
-                    </m:rPr>
-                    <a:rPr lang="en-US" sz="1300" dirty="0">
-                      <a:solidFill>
-                        <a:srgbClr val="1F3046"/>
-                      </a:solidFill>
-                      <a:latin typeface="Cambria Math"/>
-                    </a:rPr>
-                    <m:t>∀</m:t>
-                  </m:r>
-                  <m:r>
-                    <a:rPr lang="en-US" sz="1300" dirty="0">
-                      <a:solidFill>
-                        <a:srgbClr val="1F3046"/>
-                      </a:solidFill>
-                      <a:latin typeface="Cambria Math"/>
-                    </a:rPr>
-                    <m:t>r</m:t>
-                  </m:r>
-                  <m:r>
-                    <m:rPr>
-                      <m:sty m:val="p"/>
-                    </m:rPr>
-                    <a:rPr lang="en-US" sz="1300" dirty="0">
-                      <a:solidFill>
-                        <a:srgbClr val="1F3046"/>
-                      </a:solidFill>
-                      <a:latin typeface="Cambria Math"/>
-                    </a:rPr>
-                    <m:t>,</m:t>
-                  </m:r>
-                  <m:r>
-                    <a:rPr lang="en-US" sz="1300" dirty="0">
-                      <a:solidFill>
-                        <a:srgbClr val="1F3046"/>
-                      </a:solidFill>
-                      <a:latin typeface="Cambria Math"/>
-                    </a:rPr>
-                    <m:t> </m:t>
-                  </m:r>
-                  <m:r>
-                    <a:rPr lang="en-US" sz="1300" dirty="0">
-                      <a:solidFill>
-                        <a:srgbClr val="1F3046"/>
-                      </a:solidFill>
-                      <a:latin typeface="Cambria Math"/>
-                    </a:rPr>
-                    <m:t>b</m:t>
-                  </m:r>
-                </m:oMath>
-              </m:oMathPara>
-            </a14:m>
-          </a:p>
-        </p:txBody>
-      </p:sp>
-      <p:sp>
-        <p:nvSpPr>
-          <p:cNvPr id="72" name="Rounded Rectangle 71"/>
+                      <m:r>
+                        <a:rPr lang="en-US" sz="1400" dirty="0">
+                          <a:solidFill>
+                            <a:srgbClr val="1F3046"/>
+                          </a:solidFill>
+                          <a:latin typeface="Cambria Math" panose="02040503050406030204"/>
+                        </a:rPr>
+                        <m:t>=</m:t>
+                      </m:r>
+                      <m:nary>
+                        <m:naryPr>
+                          <m:chr m:val="∑"/>
+                          <m:limLoc m:val="undOvr"/>
+                          <m:supHide m:val="on"/>
+                          <m:ctrlPr>
+                            <a:rPr/>
+                          </m:ctrlPr>
+                        </m:naryPr>
+                        <m:sub>
+                          <m:r>
+                            <a:rPr lang="en-US" sz="1400" dirty="0">
+                              <a:solidFill>
+                                <a:srgbClr val="1F3046"/>
+                              </a:solidFill>
+                              <a:latin typeface="Cambria Math" panose="02040503050406030204"/>
+                            </a:rPr>
+                            <m:t>𝑝</m:t>
+                          </m:r>
+                          <m:r>
+                            <a:rPr lang="en-US" sz="1400" dirty="0">
+                              <a:solidFill>
+                                <a:srgbClr val="1F3046"/>
+                              </a:solidFill>
+                              <a:latin typeface="Cambria Math" panose="02040503050406030204"/>
+                            </a:rPr>
+                            <m:t>∈</m:t>
+                          </m:r>
+                          <m:r>
+                            <a:rPr lang="en-US" sz="1400" dirty="0">
+                              <a:solidFill>
+                                <a:srgbClr val="1F3046"/>
+                              </a:solidFill>
+                              <a:latin typeface="Cambria Math" panose="02040503050406030204"/>
+                            </a:rPr>
+                            <m:t>𝑃</m:t>
+                          </m:r>
+                        </m:sub>
+                        <m:sup/>
+                        <m:e>
+                          <m:sSub>
+                            <m:sSubPr>
+                              <m:ctrlPr>
+                                <a:rPr/>
+                              </m:ctrlPr>
+                            </m:sSubPr>
+                            <m:e>
+                              <m:r>
+                                <a:rPr lang="en-US" sz="1400" dirty="0">
+                                  <a:solidFill>
+                                    <a:srgbClr val="1F3046"/>
+                                  </a:solidFill>
+                                  <a:latin typeface="Cambria Math" panose="02040503050406030204"/>
+                                </a:rPr>
+                                <m:t>𝑤</m:t>
+                              </m:r>
+                            </m:e>
+                            <m:sub>
+                              <m:r>
+                                <a:rPr lang="en-US" sz="1400" dirty="0">
+                                  <a:solidFill>
+                                    <a:srgbClr val="1F3046"/>
+                                  </a:solidFill>
+                                  <a:latin typeface="Cambria Math" panose="02040503050406030204"/>
+                                </a:rPr>
+                                <m:t>𝑝</m:t>
+                              </m:r>
+                            </m:sub>
+                          </m:sSub>
+                        </m:e>
+                      </m:nary>
+                      <m:sSub>
+                        <m:sSubPr>
+                          <m:ctrlPr>
+                            <a:rPr/>
+                          </m:ctrlPr>
+                        </m:sSubPr>
+                        <m:e>
+                          <m:r>
+                            <a:rPr lang="en-US" sz="1400" dirty="0">
+                              <a:solidFill>
+                                <a:srgbClr val="1F3046"/>
+                              </a:solidFill>
+                              <a:latin typeface="Cambria Math" panose="02040503050406030204"/>
+                            </a:rPr>
+                            <m:t>𝑓</m:t>
+                          </m:r>
+                        </m:e>
+                        <m:sub>
+                          <m:r>
+                            <a:rPr lang="en-US" sz="1400" dirty="0">
+                              <a:solidFill>
+                                <a:srgbClr val="1F3046"/>
+                              </a:solidFill>
+                              <a:latin typeface="Cambria Math" panose="02040503050406030204"/>
+                            </a:rPr>
+                            <m:t>𝑝</m:t>
+                          </m:r>
+                          <m:r>
+                            <a:rPr lang="en-US" sz="1400" dirty="0">
+                              <a:solidFill>
+                                <a:srgbClr val="1F3046"/>
+                              </a:solidFill>
+                              <a:latin typeface="Cambria Math" panose="02040503050406030204"/>
+                            </a:rPr>
+                            <m:t>,</m:t>
+                          </m:r>
+                          <m:r>
+                            <a:rPr lang="en-US" sz="1400" dirty="0">
+                              <a:solidFill>
+                                <a:srgbClr val="1F3046"/>
+                              </a:solidFill>
+                              <a:latin typeface="Cambria Math" panose="02040503050406030204"/>
+                            </a:rPr>
+                            <m:t>ℓ</m:t>
+                          </m:r>
+                        </m:sub>
+                      </m:sSub>
+                      <m:sSub>
+                        <m:sSubPr>
+                          <m:ctrlPr>
+                            <a:rPr/>
+                          </m:ctrlPr>
+                        </m:sSubPr>
+                        <m:e>
+                          <m:r>
+                            <a:rPr lang="en-US" sz="1400" dirty="0">
+                              <a:solidFill>
+                                <a:srgbClr val="1F3046"/>
+                              </a:solidFill>
+                              <a:latin typeface="Cambria Math" panose="02040503050406030204"/>
+                            </a:rPr>
+                            <m:t>𝑥</m:t>
+                          </m:r>
+                        </m:e>
+                        <m:sub>
+                          <m:r>
+                            <a:rPr lang="en-US" sz="1400" dirty="0">
+                              <a:solidFill>
+                                <a:srgbClr val="1F3046"/>
+                              </a:solidFill>
+                              <a:latin typeface="Cambria Math" panose="02040503050406030204"/>
+                            </a:rPr>
+                            <m:t>𝑝</m:t>
+                          </m:r>
+                          <m:r>
+                            <a:rPr lang="en-US" sz="1400" dirty="0">
+                              <a:solidFill>
+                                <a:srgbClr val="1F3046"/>
+                              </a:solidFill>
+                              <a:latin typeface="Cambria Math" panose="02040503050406030204"/>
+                            </a:rPr>
+                            <m:t>,</m:t>
+                          </m:r>
+                          <m:r>
+                            <a:rPr lang="en-US" sz="1400" dirty="0">
+                              <a:solidFill>
+                                <a:srgbClr val="1F3046"/>
+                              </a:solidFill>
+                              <a:latin typeface="Cambria Math" panose="02040503050406030204"/>
+                            </a:rPr>
+                            <m:t>𝑏</m:t>
+                          </m:r>
+                        </m:sub>
+                      </m:sSub>
+                    </m:oMath>
+                  </m:oMathPara>
+                </a14:m>
+              </a:p>
+            </p:txBody>
+          </p:sp>
+        </mc:Choice>
+        <mc:Fallback>
+          <p:sp>
+            <p:nvSpPr>
+              <p:cNvPr id="40" name="TextBox 39"/>
+              <p:cNvSpPr txBox="1">
+                <a:spLocks noRot="1" noChangeAspect="1" noMove="1" noResize="1" noEditPoints="1" noAdjustHandles="1" noChangeArrowheads="1" noChangeShapeType="1" noTextEdit="1"/>
+              </p:cNvSpPr>
+              <p:nvPr/>
+            </p:nvSpPr>
+            <p:spPr>
+              <a:xfrm>
+                <a:off x="6355080" y="4572000"/>
+                <a:ext cx="4800600" cy="457200"/>
+              </a:xfrm>
+              <a:prstGeom prst="rect">
+                <a:avLst/>
+              </a:prstGeom>
+              <a:blipFill rotWithShape="1">
+                <a:blip r:embed="rId12"/>
+                <a:stretch>
+                  <a:fillRect t="-16528" b="-16806"/>
+                </a:stretch>
+              </a:blipFill>
+            </p:spPr>
+            <p:txBody>
+              <a:bodyPr/>
+              <a:lstStyle/>
+              <a:p>
+                <a:r>
+                  <a:rPr lang="zh-CN" altLang="en-US">
+                    <a:noFill/>
+                  </a:rPr>
+                  <a:t> </a:t>
+                </a:r>
+              </a:p>
+            </p:txBody>
+          </p:sp>
+        </mc:Fallback>
+      </mc:AlternateContent>
+      <p:sp>
+        <p:nvSpPr>
+          <p:cNvPr id="41" name="Rounded Rectangle 40"/>
           <p:cNvSpPr/>
           <p:nvPr/>
         </p:nvSpPr>
         <p:spPr>
           <a:xfrm>
-            <a:off x="3730752" y="3767328"/>
+            <a:off x="3730752" y="5230368"/>
             <a:ext cx="7772400" cy="640080"/>
           </a:xfrm>
           <a:prstGeom prst="roundRect">
@@ -28215,13 +29562,13 @@
       </p:sp>
       <p:sp>
         <p:nvSpPr>
-          <p:cNvPr id="73" name="TextBox 72"/>
+          <p:cNvPr id="42" name="TextBox 41"/>
           <p:cNvSpPr txBox="1"/>
           <p:nvPr/>
         </p:nvSpPr>
         <p:spPr>
           <a:xfrm>
-            <a:off x="3913632" y="3840480"/>
+            <a:off x="3913632" y="5303520"/>
             <a:ext cx="2651760" cy="457200"/>
           </a:xfrm>
           <a:prstGeom prst="rect">
@@ -28230,7 +29577,7 @@
           <a:noFill/>
         </p:spPr>
         <p:txBody>
-          <a:bodyPr wrap="square" lIns="128016" rIns="128016" tIns="73152" bIns="54864" anchor="ctr">
+          <a:bodyPr wrap="square" lIns="128016" tIns="73152" rIns="128016" bIns="54864" anchor="ctr">
             <a:spAutoFit/>
           </a:bodyPr>
           <a:lstStyle/>
@@ -28241,1005 +29588,443 @@
                 <a:solidFill>
                   <a:srgbClr val="138F5F"/>
                 </a:solidFill>
-                <a:latin typeface="Arial"/>
-              </a:rPr>
-              <a:t>3   Activate used batches; no gaps</a:t>
-            </a:r>
-          </a:p>
-        </p:txBody>
-      </p:sp>
-      <p:sp>
-        <p:nvSpPr>
-          <p:cNvPr id="74" name="TextBox 73"/>
-          <p:cNvSpPr txBox="1"/>
-          <p:nvPr/>
-        </p:nvSpPr>
-        <p:spPr>
-          <a:xfrm>
-            <a:off x="6355080" y="3840480"/>
-            <a:ext cx="4800600" cy="457200"/>
-          </a:xfrm>
-          <a:prstGeom prst="rect">
-            <a:avLst/>
-          </a:prstGeom>
-          <a:noFill/>
-        </p:spPr>
-        <p:txBody>
-          <a:bodyPr wrap="none" anchor="ctr">
-            <a:spAutoFit/>
-          </a:bodyPr>
-          <a:lstStyle/>
-          <a:p>
-            <a:pPr algn="ctr"/>
-            <a14:m xmlns:a14="http://schemas.microsoft.com/office/drawing/2010/main">
-              <m:oMathPara xmlns:m="http://schemas.openxmlformats.org/officeDocument/2006/math">
-                <m:oMathParaPr>
-                  <m:jc m:val="center"/>
-                </m:oMathParaPr>
-                <m:oMath>
-                  <m:sSub>
-                    <m:e>
-                      <m:r>
-                        <a:rPr lang="en-US" sz="1400" dirty="0">
-                          <a:solidFill>
-                            <a:srgbClr val="1F3046"/>
-                          </a:solidFill>
-                          <a:latin typeface="Cambria Math"/>
-                        </a:rPr>
-                        <m:t>x</m:t>
-                      </m:r>
-                    </m:e>
-                    <m:sub>
-                      <m:r>
-                        <a:rPr lang="en-US" sz="1400" dirty="0">
-                          <a:solidFill>
-                            <a:srgbClr val="1F3046"/>
-                          </a:solidFill>
-                          <a:latin typeface="Cambria Math"/>
-                        </a:rPr>
-                        <m:t>p</m:t>
-                      </m:r>
-                      <m:r>
-                        <m:rPr>
-                          <m:sty m:val="p"/>
-                        </m:rPr>
-                        <a:rPr lang="en-US" sz="1400" dirty="0">
-                          <a:solidFill>
-                            <a:srgbClr val="1F3046"/>
-                          </a:solidFill>
-                          <a:latin typeface="Cambria Math"/>
-                        </a:rPr>
-                        <m:t>,</m:t>
-                      </m:r>
-                      <m:r>
-                        <a:rPr lang="en-US" sz="1400" dirty="0">
-                          <a:solidFill>
-                            <a:srgbClr val="1F3046"/>
-                          </a:solidFill>
-                          <a:latin typeface="Cambria Math"/>
-                        </a:rPr>
-                        <m:t>b</m:t>
-                      </m:r>
-                    </m:sub>
-                  </m:sSub>
-                  <m:r>
-                    <m:rPr>
-                      <m:sty m:val="p"/>
-                    </m:rPr>
-                    <a:rPr lang="en-US" sz="1400" dirty="0">
-                      <a:solidFill>
-                        <a:srgbClr val="1F3046"/>
-                      </a:solidFill>
-                      <a:latin typeface="Cambria Math"/>
-                    </a:rPr>
-                    <m:t>≤</m:t>
-                  </m:r>
-                  <m:sSub>
-                    <m:e>
-                      <m:r>
-                        <a:rPr lang="en-US" sz="1400" dirty="0">
-                          <a:solidFill>
-                            <a:srgbClr val="1F3046"/>
-                          </a:solidFill>
-                          <a:latin typeface="Cambria Math"/>
-                        </a:rPr>
-                        <m:t>y</m:t>
-                      </m:r>
-                    </m:e>
-                    <m:sub>
-                      <m:r>
-                        <a:rPr lang="en-US" sz="1400" dirty="0">
-                          <a:solidFill>
-                            <a:srgbClr val="1F3046"/>
-                          </a:solidFill>
-                          <a:latin typeface="Cambria Math"/>
-                        </a:rPr>
-                        <m:t>b</m:t>
-                      </m:r>
-                    </m:sub>
-                  </m:sSub>
-                  <m:r>
-                    <m:rPr>
-                      <m:sty m:val="p"/>
-                    </m:rPr>
-                    <a:rPr lang="en-US" sz="1400" dirty="0">
-                      <a:solidFill>
-                        <a:srgbClr val="1F3046"/>
-                      </a:solidFill>
-                      <a:latin typeface="Cambria Math"/>
-                    </a:rPr>
-                    <m:t>,</m:t>
-                  </m:r>
-                  <m:r>
-                    <a:rPr lang="en-US" sz="1400" dirty="0">
-                      <a:solidFill>
-                        <a:srgbClr val="1F3046"/>
-                      </a:solidFill>
-                      <a:latin typeface="Cambria Math"/>
-                    </a:rPr>
-                    <m:t>  </m:t>
-                  </m:r>
-                  <m:sSub>
-                    <m:e>
-                      <m:r>
-                        <a:rPr lang="en-US" sz="1400" dirty="0">
-                          <a:solidFill>
-                            <a:srgbClr val="1F3046"/>
-                          </a:solidFill>
-                          <a:latin typeface="Cambria Math"/>
-                        </a:rPr>
-                        <m:t>y</m:t>
-                      </m:r>
-                    </m:e>
-                    <m:sub>
-                      <m:r>
-                        <a:rPr lang="en-US" sz="1400" dirty="0">
-                          <a:solidFill>
-                            <a:srgbClr val="1F3046"/>
-                          </a:solidFill>
-                          <a:latin typeface="Cambria Math"/>
-                        </a:rPr>
-                        <m:t>b</m:t>
-                      </m:r>
-                    </m:sub>
-                  </m:sSub>
-                  <m:r>
-                    <m:rPr>
-                      <m:sty m:val="p"/>
-                    </m:rPr>
-                    <a:rPr lang="en-US" sz="1400" dirty="0">
-                      <a:solidFill>
-                        <a:srgbClr val="1F3046"/>
-                      </a:solidFill>
-                      <a:latin typeface="Cambria Math"/>
-                    </a:rPr>
-                    <m:t>≥</m:t>
-                  </m:r>
-                  <m:sSub>
-                    <m:e>
-                      <m:r>
-                        <a:rPr lang="en-US" sz="1400" dirty="0">
-                          <a:solidFill>
-                            <a:srgbClr val="1F3046"/>
-                          </a:solidFill>
-                          <a:latin typeface="Cambria Math"/>
-                        </a:rPr>
-                        <m:t>y</m:t>
-                      </m:r>
-                    </m:e>
-                    <m:sub>
-                      <m:r>
-                        <a:rPr lang="en-US" sz="1400" dirty="0">
-                          <a:solidFill>
-                            <a:srgbClr val="1F3046"/>
-                          </a:solidFill>
-                          <a:latin typeface="Cambria Math"/>
-                        </a:rPr>
-                        <m:t>b</m:t>
-                      </m:r>
-                      <m:r>
-                        <m:rPr>
-                          <m:sty m:val="p"/>
-                        </m:rPr>
-                        <a:rPr lang="en-US" sz="1400" dirty="0">
-                          <a:solidFill>
-                            <a:srgbClr val="1F3046"/>
-                          </a:solidFill>
-                          <a:latin typeface="Cambria Math"/>
-                        </a:rPr>
-                        <m:t>+</m:t>
-                      </m:r>
-                      <m:r>
-                        <a:rPr lang="en-US" sz="1400" dirty="0">
-                          <a:solidFill>
-                            <a:srgbClr val="1F3046"/>
-                          </a:solidFill>
-                          <a:latin typeface="Cambria Math"/>
-                        </a:rPr>
-                        <m:t>1</m:t>
-                      </m:r>
-                    </m:sub>
-                  </m:sSub>
-                </m:oMath>
-              </m:oMathPara>
-            </a14:m>
-          </a:p>
-        </p:txBody>
-      </p:sp>
-      <p:sp>
-        <p:nvSpPr>
-          <p:cNvPr id="75" name="Rounded Rectangle 74"/>
-          <p:cNvSpPr/>
-          <p:nvPr/>
-        </p:nvSpPr>
-        <p:spPr>
-          <a:xfrm>
-            <a:off x="3730752" y="4498848"/>
-            <a:ext cx="7772400" cy="640080"/>
-          </a:xfrm>
-          <a:prstGeom prst="roundRect">
-            <a:avLst/>
-          </a:prstGeom>
-          <a:solidFill>
-            <a:srgbClr val="FFFFFF"/>
-          </a:solidFill>
-          <a:ln w="17780">
-            <a:solidFill>
-              <a:srgbClr val="E67E22"/>
-            </a:solidFill>
-          </a:ln>
-        </p:spPr>
-        <p:style>
-          <a:lnRef idx="1">
-            <a:schemeClr val="accent1"/>
-          </a:lnRef>
-          <a:fillRef idx="3">
-            <a:schemeClr val="accent1"/>
-          </a:fillRef>
-          <a:effectRef idx="2">
-            <a:schemeClr val="accent1"/>
-          </a:effectRef>
-          <a:fontRef idx="minor">
-            <a:schemeClr val="lt1"/>
-          </a:fontRef>
-        </p:style>
-        <p:txBody>
-          <a:bodyPr rtlCol="0" anchor="ctr"/>
-          <a:lstStyle/>
-          <a:p>
-            <a:pPr algn="ctr"/>
-          </a:p>
-        </p:txBody>
-      </p:sp>
-      <p:sp>
-        <p:nvSpPr>
-          <p:cNvPr id="76" name="TextBox 75"/>
-          <p:cNvSpPr txBox="1"/>
-          <p:nvPr/>
-        </p:nvSpPr>
-        <p:spPr>
-          <a:xfrm>
-            <a:off x="3913632" y="4572000"/>
-            <a:ext cx="2651760" cy="457200"/>
-          </a:xfrm>
-          <a:prstGeom prst="rect">
-            <a:avLst/>
-          </a:prstGeom>
-          <a:noFill/>
-        </p:spPr>
-        <p:txBody>
-          <a:bodyPr wrap="square" lIns="128016" rIns="128016" tIns="73152" bIns="54864" anchor="ctr">
-            <a:spAutoFit/>
-          </a:bodyPr>
-          <a:lstStyle/>
-          <a:p>
-            <a:pPr algn="l"/>
-            <a:r>
-              <a:rPr sz="1070" b="1">
-                <a:solidFill>
-                  <a:srgbClr val="E67E22"/>
-                </a:solidFill>
-                <a:latin typeface="Arial"/>
-              </a:rPr>
-              <a:t>4   Migration load on each link</a:t>
-            </a:r>
-          </a:p>
-        </p:txBody>
-      </p:sp>
-      <p:sp>
-        <p:nvSpPr>
-          <p:cNvPr id="77" name="TextBox 76"/>
-          <p:cNvSpPr txBox="1"/>
-          <p:nvPr/>
-        </p:nvSpPr>
-        <p:spPr>
-          <a:xfrm>
-            <a:off x="6355080" y="4572000"/>
-            <a:ext cx="4800600" cy="457200"/>
-          </a:xfrm>
-          <a:prstGeom prst="rect">
-            <a:avLst/>
-          </a:prstGeom>
-          <a:noFill/>
-        </p:spPr>
-        <p:txBody>
-          <a:bodyPr wrap="none" anchor="ctr">
-            <a:spAutoFit/>
-          </a:bodyPr>
-          <a:lstStyle/>
-          <a:p>
-            <a:pPr algn="ctr"/>
-            <a14:m xmlns:a14="http://schemas.microsoft.com/office/drawing/2010/main">
-              <m:oMathPara xmlns:m="http://schemas.openxmlformats.org/officeDocument/2006/math">
-                <m:oMathParaPr>
-                  <m:jc m:val="center"/>
-                </m:oMathParaPr>
-                <m:oMath>
-                  <m:sSub>
-                    <m:e>
-                      <m:r>
-                        <a:rPr lang="en-US" sz="1400" dirty="0">
-                          <a:solidFill>
-                            <a:srgbClr val="1F3046"/>
-                          </a:solidFill>
-                          <a:latin typeface="Cambria Math"/>
-                        </a:rPr>
-                        <m:t>L</m:t>
-                      </m:r>
-                    </m:e>
-                    <m:sub>
-                      <m:r>
-                        <a:rPr lang="en-US" sz="1400" dirty="0">
-                          <a:solidFill>
-                            <a:srgbClr val="1F3046"/>
-                          </a:solidFill>
-                          <a:latin typeface="Cambria Math"/>
-                        </a:rPr>
-                        <m:t>e</m:t>
-                      </m:r>
-                      <m:r>
-                        <m:rPr>
-                          <m:sty m:val="p"/>
-                        </m:rPr>
-                        <a:rPr lang="en-US" sz="1400" dirty="0">
-                          <a:solidFill>
-                            <a:srgbClr val="1F3046"/>
-                          </a:solidFill>
-                          <a:latin typeface="Cambria Math"/>
-                        </a:rPr>
-                        <m:t>,</m:t>
-                      </m:r>
-                      <m:r>
-                        <a:rPr lang="en-US" sz="1400" dirty="0">
-                          <a:solidFill>
-                            <a:srgbClr val="1F3046"/>
-                          </a:solidFill>
-                          <a:latin typeface="Cambria Math"/>
-                        </a:rPr>
-                        <m:t>b</m:t>
-                      </m:r>
-                    </m:sub>
-                  </m:sSub>
-                  <m:r>
-                    <m:rPr>
-                      <m:sty m:val="p"/>
-                    </m:rPr>
-                    <a:rPr lang="en-US" sz="1400" dirty="0">
-                      <a:solidFill>
-                        <a:srgbClr val="1F3046"/>
-                      </a:solidFill>
-                      <a:latin typeface="Cambria Math"/>
-                    </a:rPr>
-                    <m:t>=</m:t>
-                  </m:r>
-                  <m:nary>
-                    <m:naryPr>
-                      <m:chr m:val="∑"/>
-                      <m:limLoc m:val="undOvr"/>
-                      <m:subHide m:val="off"/>
-                      <m:supHide m:val="on"/>
-                    </m:naryPr>
-                    <m:sub>
-                      <m:r>
-                        <a:rPr lang="en-US" sz="1400" dirty="0">
-                          <a:solidFill>
-                            <a:srgbClr val="1F3046"/>
-                          </a:solidFill>
-                          <a:latin typeface="Cambria Math"/>
-                        </a:rPr>
-                        <m:t>p</m:t>
-                      </m:r>
-                      <m:r>
-                        <m:rPr>
-                          <m:sty m:val="p"/>
-                        </m:rPr>
-                        <a:rPr lang="en-US" sz="1400" dirty="0">
-                          <a:solidFill>
-                            <a:srgbClr val="1F3046"/>
-                          </a:solidFill>
-                          <a:latin typeface="Cambria Math"/>
-                        </a:rPr>
-                        <m:t>∈</m:t>
-                      </m:r>
-                      <m:r>
-                        <a:rPr lang="en-US" sz="1400" dirty="0">
-                          <a:solidFill>
-                            <a:srgbClr val="1F3046"/>
-                          </a:solidFill>
-                          <a:latin typeface="Cambria Math"/>
-                        </a:rPr>
-                        <m:t>P</m:t>
-                      </m:r>
-                    </m:sub>
-                    <m:sup>
-                      <m:r>
-                        <a:rPr lang="en-US" sz="1400" dirty="0">
-                          <a:solidFill>
-                            <a:srgbClr val="1F3046"/>
-                          </a:solidFill>
-                          <a:latin typeface="Cambria Math"/>
-                        </a:rPr>
-                        <m:t/>
-                      </m:r>
-                    </m:sup>
-                    <m:e>
+                <a:latin typeface="Arial" panose="020B0604020202020204"/>
+              </a:rPr>
+              <a:t>5   Inference-time lower bound</a:t>
+            </a:r>
+            <a:endParaRPr sz="1070" b="1">
+              <a:solidFill>
+                <a:srgbClr val="138F5F"/>
+              </a:solidFill>
+              <a:latin typeface="Arial" panose="020B0604020202020204"/>
+            </a:endParaRPr>
+          </a:p>
+        </p:txBody>
+      </p:sp>
+      <mc:AlternateContent xmlns:mc="http://schemas.openxmlformats.org/markup-compatibility/2006">
+        <mc:Choice xmlns:a14="http://schemas.microsoft.com/office/drawing/2010/main" Requires="a14">
+          <p:sp>
+            <p:nvSpPr>
+              <p:cNvPr id="43" name="TextBox 42"/>
+              <p:cNvSpPr txBox="1"/>
+              <p:nvPr/>
+            </p:nvSpPr>
+            <p:spPr>
+              <a:xfrm>
+                <a:off x="6355080" y="5303520"/>
+                <a:ext cx="4800600" cy="457200"/>
+              </a:xfrm>
+              <a:prstGeom prst="rect">
+                <a:avLst/>
+              </a:prstGeom>
+              <a:noFill/>
+            </p:spPr>
+            <p:txBody>
+              <a:bodyPr wrap="none" anchor="ctr">
+                <a:spAutoFit/>
+              </a:bodyPr>
+              <a:lstStyle/>
+              <a:p>
+                <a:pPr algn="ctr"/>
+                <a14:m>
+                  <m:oMathPara xmlns:m="http://schemas.openxmlformats.org/officeDocument/2006/math">
+                    <m:oMathParaPr>
+                      <m:jc m:val="center"/>
+                    </m:oMathParaPr>
+                    <m:oMath xmlns:m="http://schemas.openxmlformats.org/officeDocument/2006/math">
                       <m:sSub>
+                        <m:sSubPr>
+                          <m:ctrlPr>
+                            <a:rPr/>
+                          </m:ctrlPr>
+                        </m:sSubPr>
                         <m:e>
                           <m:r>
-                            <a:rPr lang="en-US" sz="1400" dirty="0">
+                            <a:rPr lang="en-US" sz="1200" dirty="0">
                               <a:solidFill>
                                 <a:srgbClr val="1F3046"/>
                               </a:solidFill>
-                              <a:latin typeface="Cambria Math"/>
+                              <a:latin typeface="Cambria Math" panose="02040503050406030204"/>
                             </a:rPr>
-                            <m:t>w</m:t>
+                            <m:t>𝑇</m:t>
                           </m:r>
                         </m:e>
                         <m:sub>
                           <m:r>
-                            <a:rPr lang="en-US" sz="1400" dirty="0">
+                            <m:rPr>
+                              <m:sty m:val="p"/>
+                            </m:rPr>
+                            <a:rPr lang="en-US" sz="1200" dirty="0">
                               <a:solidFill>
                                 <a:srgbClr val="1F3046"/>
                               </a:solidFill>
-                              <a:latin typeface="Cambria Math"/>
+                              <a:latin typeface="Cambria Math" panose="02040503050406030204"/>
                             </a:rPr>
-                            <m:t>p</m:t>
+                            <m:t>i</m:t>
+                          </m:r>
+                          <m:r>
+                            <m:rPr>
+                              <m:sty m:val="p"/>
+                            </m:rPr>
+                            <a:rPr lang="en-US" sz="1200" dirty="0">
+                              <a:solidFill>
+                                <a:srgbClr val="1F3046"/>
+                              </a:solidFill>
+                              <a:latin typeface="Cambria Math" panose="02040503050406030204"/>
+                            </a:rPr>
+                            <m:t>n</m:t>
+                          </m:r>
+                          <m:r>
+                            <m:rPr>
+                              <m:sty m:val="p"/>
+                            </m:rPr>
+                            <a:rPr lang="en-US" sz="1200" dirty="0">
+                              <a:solidFill>
+                                <a:srgbClr val="1F3046"/>
+                              </a:solidFill>
+                              <a:latin typeface="Cambria Math" panose="02040503050406030204"/>
+                            </a:rPr>
+                            <m:t>f</m:t>
+                          </m:r>
+                          <m:r>
+                            <m:rPr>
+                              <m:sty m:val="p"/>
+                            </m:rPr>
+                            <a:rPr lang="en-US" sz="1200" dirty="0">
+                              <a:solidFill>
+                                <a:srgbClr val="1F3046"/>
+                              </a:solidFill>
+                              <a:latin typeface="Cambria Math" panose="02040503050406030204"/>
+                            </a:rPr>
+                            <m:t>e</m:t>
+                          </m:r>
+                          <m:r>
+                            <m:rPr>
+                              <m:sty m:val="p"/>
+                            </m:rPr>
+                            <a:rPr lang="en-US" sz="1200" dirty="0">
+                              <a:solidFill>
+                                <a:srgbClr val="1F3046"/>
+                              </a:solidFill>
+                              <a:latin typeface="Cambria Math" panose="02040503050406030204"/>
+                            </a:rPr>
+                            <m:t>r</m:t>
                           </m:r>
                         </m:sub>
                       </m:sSub>
-                    </m:e>
-                  </m:nary>
-                  <m:sSub>
-                    <m:e>
-                      <m:r>
-                        <a:rPr lang="en-US" sz="1400" dirty="0">
-                          <a:solidFill>
-                            <a:srgbClr val="1F3046"/>
-                          </a:solidFill>
-                          <a:latin typeface="Cambria Math"/>
-                        </a:rPr>
-                        <m:t>f</m:t>
-                      </m:r>
-                    </m:e>
-                    <m:sub>
-                      <m:r>
-                        <a:rPr lang="en-US" sz="1400" dirty="0">
-                          <a:solidFill>
-                            <a:srgbClr val="1F3046"/>
-                          </a:solidFill>
-                          <a:latin typeface="Cambria Math"/>
-                        </a:rPr>
-                        <m:t>p</m:t>
-                      </m:r>
-                      <m:r>
-                        <m:rPr>
-                          <m:sty m:val="p"/>
-                        </m:rPr>
-                        <a:rPr lang="en-US" sz="1400" dirty="0">
-                          <a:solidFill>
-                            <a:srgbClr val="1F3046"/>
-                          </a:solidFill>
-                          <a:latin typeface="Cambria Math"/>
-                        </a:rPr>
-                        <m:t>,</m:t>
-                      </m:r>
-                      <m:r>
-                        <a:rPr lang="en-US" sz="1400" dirty="0">
-                          <a:solidFill>
-                            <a:srgbClr val="1F3046"/>
-                          </a:solidFill>
-                          <a:latin typeface="Cambria Math"/>
-                        </a:rPr>
-                        <m:t>e</m:t>
-                      </m:r>
-                    </m:sub>
-                  </m:sSub>
-                  <m:sSub>
-                    <m:e>
-                      <m:r>
-                        <a:rPr lang="en-US" sz="1400" dirty="0">
-                          <a:solidFill>
-                            <a:srgbClr val="1F3046"/>
-                          </a:solidFill>
-                          <a:latin typeface="Cambria Math"/>
-                        </a:rPr>
-                        <m:t>x</m:t>
-                      </m:r>
-                    </m:e>
-                    <m:sub>
-                      <m:r>
-                        <a:rPr lang="en-US" sz="1400" dirty="0">
-                          <a:solidFill>
-                            <a:srgbClr val="1F3046"/>
-                          </a:solidFill>
-                          <a:latin typeface="Cambria Math"/>
-                        </a:rPr>
-                        <m:t>p</m:t>
-                      </m:r>
-                      <m:r>
-                        <m:rPr>
-                          <m:sty m:val="p"/>
-                        </m:rPr>
-                        <a:rPr lang="en-US" sz="1400" dirty="0">
-                          <a:solidFill>
-                            <a:srgbClr val="1F3046"/>
-                          </a:solidFill>
-                          <a:latin typeface="Cambria Math"/>
-                        </a:rPr>
-                        <m:t>,</m:t>
-                      </m:r>
-                      <m:r>
-                        <a:rPr lang="en-US" sz="1400" dirty="0">
-                          <a:solidFill>
-                            <a:srgbClr val="1F3046"/>
-                          </a:solidFill>
-                          <a:latin typeface="Cambria Math"/>
-                        </a:rPr>
-                        <m:t>b</m:t>
-                      </m:r>
-                    </m:sub>
-                  </m:sSub>
-                </m:oMath>
-              </m:oMathPara>
-            </a14:m>
-          </a:p>
-        </p:txBody>
-      </p:sp>
-      <p:sp>
-        <p:nvSpPr>
-          <p:cNvPr id="78" name="Rounded Rectangle 77"/>
-          <p:cNvSpPr/>
-          <p:nvPr/>
-        </p:nvSpPr>
-        <p:spPr>
-          <a:xfrm>
-            <a:off x="3730752" y="5230368"/>
-            <a:ext cx="7772400" cy="640080"/>
-          </a:xfrm>
-          <a:prstGeom prst="roundRect">
-            <a:avLst/>
-          </a:prstGeom>
-          <a:solidFill>
-            <a:srgbClr val="FFFFFF"/>
-          </a:solidFill>
-          <a:ln w="17780">
-            <a:solidFill>
-              <a:srgbClr val="138F5F"/>
-            </a:solidFill>
-          </a:ln>
-        </p:spPr>
-        <p:style>
-          <a:lnRef idx="1">
-            <a:schemeClr val="accent1"/>
-          </a:lnRef>
-          <a:fillRef idx="3">
-            <a:schemeClr val="accent1"/>
-          </a:fillRef>
-          <a:effectRef idx="2">
-            <a:schemeClr val="accent1"/>
-          </a:effectRef>
-          <a:fontRef idx="minor">
-            <a:schemeClr val="lt1"/>
-          </a:fontRef>
-        </p:style>
-        <p:txBody>
-          <a:bodyPr rtlCol="0" anchor="ctr"/>
-          <a:lstStyle/>
-          <a:p>
-            <a:pPr algn="ctr"/>
-          </a:p>
-        </p:txBody>
-      </p:sp>
-      <p:sp>
-        <p:nvSpPr>
-          <p:cNvPr id="79" name="TextBox 78"/>
-          <p:cNvSpPr txBox="1"/>
-          <p:nvPr/>
-        </p:nvSpPr>
-        <p:spPr>
-          <a:xfrm>
-            <a:off x="3913632" y="5303520"/>
-            <a:ext cx="2651760" cy="457200"/>
-          </a:xfrm>
-          <a:prstGeom prst="rect">
-            <a:avLst/>
-          </a:prstGeom>
-          <a:noFill/>
-        </p:spPr>
-        <p:txBody>
-          <a:bodyPr wrap="square" lIns="128016" rIns="128016" tIns="73152" bIns="54864" anchor="ctr">
-            <a:spAutoFit/>
-          </a:bodyPr>
-          <a:lstStyle/>
-          <a:p>
-            <a:pPr algn="l"/>
-            <a:r>
-              <a:rPr sz="1070" b="1">
-                <a:solidFill>
-                  <a:srgbClr val="138F5F"/>
-                </a:solidFill>
-                <a:latin typeface="Arial"/>
-              </a:rPr>
-              <a:t>5   Inference-time lower bound</a:t>
-            </a:r>
-          </a:p>
-        </p:txBody>
-      </p:sp>
-      <p:sp>
-        <p:nvSpPr>
-          <p:cNvPr id="80" name="TextBox 79"/>
-          <p:cNvSpPr txBox="1"/>
-          <p:nvPr/>
-        </p:nvSpPr>
-        <p:spPr>
-          <a:xfrm>
-            <a:off x="6355080" y="5303520"/>
-            <a:ext cx="4800600" cy="457200"/>
-          </a:xfrm>
-          <a:prstGeom prst="rect">
-            <a:avLst/>
-          </a:prstGeom>
-          <a:noFill/>
-        </p:spPr>
-        <p:txBody>
-          <a:bodyPr wrap="none" anchor="ctr">
-            <a:spAutoFit/>
-          </a:bodyPr>
-          <a:lstStyle/>
-          <a:p>
-            <a:pPr algn="ctr"/>
-            <a14:m xmlns:a14="http://schemas.microsoft.com/office/drawing/2010/main">
-              <m:oMathPara xmlns:m="http://schemas.openxmlformats.org/officeDocument/2006/math">
-                <m:oMathParaPr>
-                  <m:jc m:val="center"/>
-                </m:oMathParaPr>
-                <m:oMath>
-                  <m:sSub>
-                    <m:e>
                       <m:r>
                         <a:rPr lang="en-US" sz="1200" dirty="0">
                           <a:solidFill>
                             <a:srgbClr val="1F3046"/>
                           </a:solidFill>
-                          <a:latin typeface="Cambria Math"/>
+                          <a:latin typeface="Cambria Math" panose="02040503050406030204"/>
                         </a:rPr>
-                        <m:t>T</m:t>
+                        <m:t>≥</m:t>
                       </m:r>
-                    </m:e>
-                    <m:sub>
-                      <m:r>
-                        <m:rPr>
-                          <m:sty m:val="p"/>
-                        </m:rPr>
-                        <a:rPr lang="en-US" sz="1200" dirty="0">
-                          <a:solidFill>
-                            <a:srgbClr val="1F3046"/>
-                          </a:solidFill>
-                          <a:latin typeface="Cambria Math"/>
-                        </a:rPr>
-                        <m:t>i</m:t>
-                      </m:r>
-                      <m:r>
-                        <m:rPr>
-                          <m:sty m:val="p"/>
-                        </m:rPr>
-                        <a:rPr lang="en-US" sz="1200" dirty="0">
-                          <a:solidFill>
-                            <a:srgbClr val="1F3046"/>
-                          </a:solidFill>
-                          <a:latin typeface="Cambria Math"/>
-                        </a:rPr>
-                        <m:t>n</m:t>
-                      </m:r>
-                      <m:r>
-                        <m:rPr>
-                          <m:sty m:val="p"/>
-                        </m:rPr>
-                        <a:rPr lang="en-US" sz="1200" dirty="0">
-                          <a:solidFill>
-                            <a:srgbClr val="1F3046"/>
-                          </a:solidFill>
-                          <a:latin typeface="Cambria Math"/>
-                        </a:rPr>
-                        <m:t>f</m:t>
-                      </m:r>
-                      <m:r>
-                        <m:rPr>
-                          <m:sty m:val="p"/>
-                        </m:rPr>
-                        <a:rPr lang="en-US" sz="1200" dirty="0">
-                          <a:solidFill>
-                            <a:srgbClr val="1F3046"/>
-                          </a:solidFill>
-                          <a:latin typeface="Cambria Math"/>
-                        </a:rPr>
-                        <m:t>e</m:t>
-                      </m:r>
-                      <m:r>
-                        <m:rPr>
-                          <m:sty m:val="p"/>
-                        </m:rPr>
-                        <a:rPr lang="en-US" sz="1200" dirty="0">
-                          <a:solidFill>
-                            <a:srgbClr val="1F3046"/>
-                          </a:solidFill>
-                          <a:latin typeface="Cambria Math"/>
-                        </a:rPr>
-                        <m:t>r</m:t>
-                      </m:r>
-                    </m:sub>
-                  </m:sSub>
-                  <m:r>
-                    <m:rPr>
-                      <m:sty m:val="p"/>
-                    </m:rPr>
-                    <a:rPr lang="en-US" sz="1200" dirty="0">
-                      <a:solidFill>
-                        <a:srgbClr val="1F3046"/>
-                      </a:solidFill>
-                      <a:latin typeface="Cambria Math"/>
-                    </a:rPr>
-                    <m:t>≥</m:t>
-                  </m:r>
-                  <m:sSub>
-                    <m:e>
+                      <m:sSub>
+                        <m:sSubPr>
+                          <m:ctrlPr>
+                            <a:rPr/>
+                          </m:ctrlPr>
+                        </m:sSubPr>
+                        <m:e>
+                          <m:r>
+                            <a:rPr lang="en-US" sz="1200" dirty="0">
+                              <a:solidFill>
+                                <a:srgbClr val="1F3046"/>
+                              </a:solidFill>
+                              <a:latin typeface="Cambria Math" panose="02040503050406030204"/>
+                            </a:rPr>
+                            <m:t>𝑇</m:t>
+                          </m:r>
+                        </m:e>
+                        <m:sub>
+                          <m:r>
+                            <a:rPr lang="en-US" sz="1200" dirty="0">
+                              <a:solidFill>
+                                <a:srgbClr val="1F3046"/>
+                              </a:solidFill>
+                              <a:latin typeface="Cambria Math" panose="02040503050406030204"/>
+                            </a:rPr>
+                            <m:t>0</m:t>
+                          </m:r>
+                        </m:sub>
+                      </m:sSub>
+                      <m:d>
+                        <m:dPr>
+                          <m:sepChr m:val=""/>
+                          <m:ctrlPr>
+                            <a:rPr/>
+                          </m:ctrlPr>
+                        </m:dPr>
+                        <m:e>
+                          <m:r>
+                            <a:rPr lang="en-US" sz="1200" dirty="0">
+                              <a:solidFill>
+                                <a:srgbClr val="1F3046"/>
+                              </a:solidFill>
+                              <a:latin typeface="Cambria Math" panose="02040503050406030204"/>
+                            </a:rPr>
+                            <m:t>1</m:t>
+                          </m:r>
+                          <m:r>
+                            <a:rPr lang="en-US" sz="1200" dirty="0">
+                              <a:solidFill>
+                                <a:srgbClr val="1F3046"/>
+                              </a:solidFill>
+                              <a:latin typeface="Cambria Math" panose="02040503050406030204"/>
+                            </a:rPr>
+                            <m:t>+</m:t>
+                          </m:r>
+                          <m:f>
+                            <m:fPr>
+                              <m:ctrlPr>
+                                <a:rPr/>
+                              </m:ctrlPr>
+                            </m:fPr>
+                            <m:num>
+                              <m:sSub>
+                                <m:sSubPr>
+                                  <m:ctrlPr>
+                                    <a:rPr/>
+                                  </m:ctrlPr>
+                                </m:sSubPr>
+                                <m:e>
+                                  <m:r>
+                                    <a:rPr lang="en-US" sz="1200" dirty="0">
+                                      <a:solidFill>
+                                        <a:srgbClr val="1F3046"/>
+                                      </a:solidFill>
+                                      <a:latin typeface="Cambria Math" panose="02040503050406030204"/>
+                                    </a:rPr>
+                                    <m:t>𝐿</m:t>
+                                  </m:r>
+                                </m:e>
+                                <m:sub>
+                                  <m:r>
+                                    <a:rPr lang="en-US" sz="1200" dirty="0">
+                                      <a:solidFill>
+                                        <a:srgbClr val="1F3046"/>
+                                      </a:solidFill>
+                                      <a:latin typeface="Cambria Math" panose="02040503050406030204"/>
+                                    </a:rPr>
+                                    <m:t>ℓ</m:t>
+                                  </m:r>
+                                  <m:r>
+                                    <a:rPr lang="en-US" sz="1200" dirty="0">
+                                      <a:solidFill>
+                                        <a:srgbClr val="1F3046"/>
+                                      </a:solidFill>
+                                      <a:latin typeface="Cambria Math" panose="02040503050406030204"/>
+                                    </a:rPr>
+                                    <m:t>,</m:t>
+                                  </m:r>
+                                  <m:r>
+                                    <a:rPr lang="en-US" sz="1200" dirty="0">
+                                      <a:solidFill>
+                                        <a:srgbClr val="1F3046"/>
+                                      </a:solidFill>
+                                      <a:latin typeface="Cambria Math" panose="02040503050406030204"/>
+                                    </a:rPr>
+                                    <m:t>𝑏</m:t>
+                                  </m:r>
+                                </m:sub>
+                              </m:sSub>
+                            </m:num>
+                            <m:den>
+                              <m:sSub>
+                                <m:sSubPr>
+                                  <m:ctrlPr>
+                                    <a:rPr/>
+                                  </m:ctrlPr>
+                                </m:sSubPr>
+                                <m:e>
+                                  <m:r>
+                                    <a:rPr lang="en-US" sz="1200" dirty="0">
+                                      <a:solidFill>
+                                        <a:srgbClr val="1F3046"/>
+                                      </a:solidFill>
+                                      <a:latin typeface="Cambria Math" panose="02040503050406030204"/>
+                                    </a:rPr>
+                                    <m:t>𝐶</m:t>
+                                  </m:r>
+                                </m:e>
+                                <m:sub>
+                                  <m:r>
+                                    <a:rPr lang="en-US" sz="1200" dirty="0">
+                                      <a:solidFill>
+                                        <a:srgbClr val="1F3046"/>
+                                      </a:solidFill>
+                                      <a:latin typeface="Cambria Math" panose="02040503050406030204"/>
+                                    </a:rPr>
+                                    <m:t>ℓ</m:t>
+                                  </m:r>
+                                </m:sub>
+                              </m:sSub>
+                              <m:d>
+                                <m:dPr>
+                                  <m:sepChr m:val=""/>
+                                  <m:ctrlPr>
+                                    <a:rPr/>
+                                  </m:ctrlPr>
+                                </m:dPr>
+                                <m:e>
+                                  <m:r>
+                                    <a:rPr lang="en-US" sz="1200" dirty="0">
+                                      <a:solidFill>
+                                        <a:srgbClr val="1F3046"/>
+                                      </a:solidFill>
+                                      <a:latin typeface="Cambria Math" panose="02040503050406030204"/>
+                                    </a:rPr>
+                                    <m:t>1</m:t>
+                                  </m:r>
+                                  <m:r>
+                                    <a:rPr lang="en-US" sz="1200" dirty="0">
+                                      <a:solidFill>
+                                        <a:srgbClr val="1F3046"/>
+                                      </a:solidFill>
+                                      <a:latin typeface="Cambria Math" panose="02040503050406030204"/>
+                                    </a:rPr>
+                                    <m:t>−</m:t>
+                                  </m:r>
+                                  <m:r>
+                                    <a:rPr lang="en-US" sz="1200" dirty="0">
+                                      <a:solidFill>
+                                        <a:srgbClr val="1F3046"/>
+                                      </a:solidFill>
+                                      <a:latin typeface="Cambria Math" panose="02040503050406030204"/>
+                                    </a:rPr>
+                                    <m:t>𝜌</m:t>
+                                  </m:r>
+                                </m:e>
+                              </m:d>
+                            </m:den>
+                          </m:f>
+                        </m:e>
+                      </m:d>
                       <m:r>
                         <a:rPr lang="en-US" sz="1200" dirty="0">
                           <a:solidFill>
                             <a:srgbClr val="1F3046"/>
                           </a:solidFill>
-                          <a:latin typeface="Cambria Math"/>
+                          <a:latin typeface="Cambria Math" panose="02040503050406030204"/>
                         </a:rPr>
-                        <m:t>T</m:t>
+                        <m:t>,</m:t>
                       </m:r>
-                    </m:e>
-                    <m:sub>
                       <m:r>
                         <a:rPr lang="en-US" sz="1200" dirty="0">
                           <a:solidFill>
                             <a:srgbClr val="1F3046"/>
                           </a:solidFill>
-                          <a:latin typeface="Cambria Math"/>
+                          <a:latin typeface="Cambria Math" panose="02040503050406030204"/>
                         </a:rPr>
-                        <m:t>0</m:t>
+                        <m:t> </m:t>
                       </m:r>
-                    </m:sub>
-                  </m:sSub>
-                  <m:d>
-                    <m:dPr>
-                      <m:begChr m:val="("/>
-                      <m:endChr m:val=")"/>
-                      <m:sepChr m:val=""/>
-                      <m:grow/>
-                    </m:dPr>
-                    <m:e>
                       <m:r>
                         <a:rPr lang="en-US" sz="1200" dirty="0">
                           <a:solidFill>
                             <a:srgbClr val="1F3046"/>
                           </a:solidFill>
-                          <a:latin typeface="Cambria Math"/>
+                          <a:latin typeface="Cambria Math" panose="02040503050406030204"/>
                         </a:rPr>
-                        <m:t>1</m:t>
+                        <m:t>∀</m:t>
                       </m:r>
                       <m:r>
-                        <m:rPr>
-                          <m:sty m:val="p"/>
-                        </m:rPr>
                         <a:rPr lang="en-US" sz="1200" dirty="0">
                           <a:solidFill>
                             <a:srgbClr val="1F3046"/>
                           </a:solidFill>
-                          <a:latin typeface="Cambria Math"/>
+                          <a:latin typeface="Cambria Math" panose="02040503050406030204"/>
                         </a:rPr>
-                        <m:t>+</m:t>
+                        <m:t>ℓ</m:t>
                       </m:r>
-                      <m:f>
-                        <m:fPr>
-                          <m:type m:val="bar"/>
-                        </m:fPr>
-                        <m:num>
-                          <m:sSub>
-                            <m:e>
-                              <m:r>
-                                <a:rPr lang="en-US" sz="1200" dirty="0">
-                                  <a:solidFill>
-                                    <a:srgbClr val="1F3046"/>
-                                  </a:solidFill>
-                                  <a:latin typeface="Cambria Math"/>
-                                </a:rPr>
-                                <m:t>L</m:t>
-                              </m:r>
-                            </m:e>
-                            <m:sub>
-                              <m:r>
-                                <a:rPr lang="en-US" sz="1200" dirty="0">
-                                  <a:solidFill>
-                                    <a:srgbClr val="1F3046"/>
-                                  </a:solidFill>
-                                  <a:latin typeface="Cambria Math"/>
-                                </a:rPr>
-                                <m:t>e</m:t>
-                              </m:r>
-                              <m:r>
-                                <m:rPr>
-                                  <m:sty m:val="p"/>
-                                </m:rPr>
-                                <a:rPr lang="en-US" sz="1200" dirty="0">
-                                  <a:solidFill>
-                                    <a:srgbClr val="1F3046"/>
-                                  </a:solidFill>
-                                  <a:latin typeface="Cambria Math"/>
-                                </a:rPr>
-                                <m:t>,</m:t>
-                              </m:r>
-                              <m:r>
-                                <a:rPr lang="en-US" sz="1200" dirty="0">
-                                  <a:solidFill>
-                                    <a:srgbClr val="1F3046"/>
-                                  </a:solidFill>
-                                  <a:latin typeface="Cambria Math"/>
-                                </a:rPr>
-                                <m:t>b</m:t>
-                              </m:r>
-                            </m:sub>
-                          </m:sSub>
-                        </m:num>
-                        <m:den>
-                          <m:sSub>
-                            <m:e>
-                              <m:r>
-                                <a:rPr lang="en-US" sz="1200" dirty="0">
-                                  <a:solidFill>
-                                    <a:srgbClr val="1F3046"/>
-                                  </a:solidFill>
-                                  <a:latin typeface="Cambria Math"/>
-                                </a:rPr>
-                                <m:t>C</m:t>
-                              </m:r>
-                            </m:e>
-                            <m:sub>
-                              <m:r>
-                                <a:rPr lang="en-US" sz="1200" dirty="0">
-                                  <a:solidFill>
-                                    <a:srgbClr val="1F3046"/>
-                                  </a:solidFill>
-                                  <a:latin typeface="Cambria Math"/>
-                                </a:rPr>
-                                <m:t>e</m:t>
-                              </m:r>
-                            </m:sub>
-                          </m:sSub>
-                          <m:d>
-                            <m:dPr>
-                              <m:begChr m:val="("/>
-                              <m:endChr m:val=")"/>
-                              <m:sepChr m:val=""/>
-                              <m:grow/>
-                            </m:dPr>
-                            <m:e>
-                              <m:r>
-                                <a:rPr lang="en-US" sz="1200" dirty="0">
-                                  <a:solidFill>
-                                    <a:srgbClr val="1F3046"/>
-                                  </a:solidFill>
-                                  <a:latin typeface="Cambria Math"/>
-                                </a:rPr>
-                                <m:t>1</m:t>
-                              </m:r>
-                              <m:r>
-                                <m:rPr>
-                                  <m:sty m:val="p"/>
-                                </m:rPr>
-                                <a:rPr lang="en-US" sz="1200" dirty="0">
-                                  <a:solidFill>
-                                    <a:srgbClr val="1F3046"/>
-                                  </a:solidFill>
-                                  <a:latin typeface="Cambria Math"/>
-                                </a:rPr>
-                                <m:t>−</m:t>
-                              </m:r>
-                              <m:r>
-                                <a:rPr lang="en-US" sz="1200" dirty="0">
-                                  <a:solidFill>
-                                    <a:srgbClr val="1F3046"/>
-                                  </a:solidFill>
-                                  <a:latin typeface="Cambria Math"/>
-                                </a:rPr>
-                                <m:t>ρ</m:t>
-                              </m:r>
-                            </m:e>
-                          </m:d>
-                        </m:den>
-                      </m:f>
-                    </m:e>
-                  </m:d>
-                  <m:r>
-                    <m:rPr>
-                      <m:sty m:val="p"/>
-                    </m:rPr>
-                    <a:rPr lang="en-US" sz="1200" dirty="0">
-                      <a:solidFill>
-                        <a:srgbClr val="1F3046"/>
-                      </a:solidFill>
-                      <a:latin typeface="Cambria Math"/>
-                    </a:rPr>
-                    <m:t>,</m:t>
-                  </m:r>
-                  <m:r>
-                    <a:rPr lang="en-US" sz="1200" dirty="0">
-                      <a:solidFill>
-                        <a:srgbClr val="1F3046"/>
-                      </a:solidFill>
-                      <a:latin typeface="Cambria Math"/>
-                    </a:rPr>
-                    <m:t> </m:t>
-                  </m:r>
-                  <m:r>
-                    <m:rPr>
-                      <m:sty m:val="p"/>
-                    </m:rPr>
-                    <a:rPr lang="en-US" sz="1200" dirty="0">
-                      <a:solidFill>
-                        <a:srgbClr val="1F3046"/>
-                      </a:solidFill>
-                      <a:latin typeface="Cambria Math"/>
-                    </a:rPr>
-                    <m:t>∀</m:t>
-                  </m:r>
-                  <m:r>
-                    <a:rPr lang="en-US" sz="1200" dirty="0">
-                      <a:solidFill>
-                        <a:srgbClr val="1F3046"/>
-                      </a:solidFill>
-                      <a:latin typeface="Cambria Math"/>
-                    </a:rPr>
-                    <m:t>e</m:t>
-                  </m:r>
-                  <m:r>
-                    <m:rPr>
-                      <m:sty m:val="p"/>
-                    </m:rPr>
-                    <a:rPr lang="en-US" sz="1200" dirty="0">
-                      <a:solidFill>
-                        <a:srgbClr val="1F3046"/>
-                      </a:solidFill>
-                      <a:latin typeface="Cambria Math"/>
-                    </a:rPr>
-                    <m:t>,</m:t>
-                  </m:r>
-                  <m:r>
-                    <a:rPr lang="en-US" sz="1200" dirty="0">
-                      <a:solidFill>
-                        <a:srgbClr val="1F3046"/>
-                      </a:solidFill>
-                      <a:latin typeface="Cambria Math"/>
-                    </a:rPr>
-                    <m:t>b</m:t>
-                  </m:r>
-                </m:oMath>
-              </m:oMathPara>
-            </a14:m>
+                      <m:r>
+                        <a:rPr lang="en-US" sz="1200" dirty="0">
+                          <a:solidFill>
+                            <a:srgbClr val="1F3046"/>
+                          </a:solidFill>
+                          <a:latin typeface="Cambria Math" panose="02040503050406030204"/>
+                        </a:rPr>
+                        <m:t>,</m:t>
+                      </m:r>
+                      <m:r>
+                        <a:rPr lang="en-US" sz="1200" dirty="0">
+                          <a:solidFill>
+                            <a:srgbClr val="1F3046"/>
+                          </a:solidFill>
+                          <a:latin typeface="Cambria Math" panose="02040503050406030204"/>
+                        </a:rPr>
+                        <m:t>𝑏</m:t>
+                      </m:r>
+                    </m:oMath>
+                  </m:oMathPara>
+                </a14:m>
+              </a:p>
+            </p:txBody>
+          </p:sp>
+        </mc:Choice>
+        <mc:Fallback>
+          <p:sp>
+            <p:nvSpPr>
+              <p:cNvPr id="43" name="TextBox 42"/>
+              <p:cNvSpPr txBox="1">
+                <a:spLocks noRot="1" noChangeAspect="1" noMove="1" noResize="1" noEditPoints="1" noAdjustHandles="1" noChangeArrowheads="1" noChangeShapeType="1" noTextEdit="1"/>
+              </p:cNvSpPr>
+              <p:nvPr/>
+            </p:nvSpPr>
+            <p:spPr>
+              <a:xfrm>
+                <a:off x="6355080" y="5303520"/>
+                <a:ext cx="4800600" cy="457200"/>
+              </a:xfrm>
+              <a:prstGeom prst="rect">
+                <a:avLst/>
+              </a:prstGeom>
+              <a:blipFill rotWithShape="1">
+                <a:blip r:embed="rId13"/>
+                <a:stretch>
+                  <a:fillRect t="-6806" b="-6944"/>
+                </a:stretch>
+              </a:blipFill>
+            </p:spPr>
+            <p:txBody>
+              <a:bodyPr/>
+              <a:lstStyle/>
+              <a:p>
+                <a:r>
+                  <a:rPr lang="zh-CN" altLang="en-US">
+                    <a:noFill/>
+                  </a:rPr>
+                  <a:t> </a:t>
+                </a:r>
+              </a:p>
+            </p:txBody>
+          </p:sp>
+        </mc:Fallback>
+      </mc:AlternateContent>
+      <p:sp>
+        <p:nvSpPr>
+          <p:cNvPr id="2" name="灯片编号占位符 1"/>
+          <p:cNvSpPr>
+            <a:spLocks noGrp="1"/>
+          </p:cNvSpPr>
+          <p:nvPr>
+            <p:ph type="sldNum" sz="quarter" idx="12"/>
+          </p:nvPr>
+        </p:nvSpPr>
+        <p:spPr>
+          <a:xfrm>
+            <a:off x="9939020" y="6356350"/>
+            <a:ext cx="2133600" cy="365125"/>
+          </a:xfrm>
+        </p:spPr>
+        <p:txBody>
+          <a:bodyPr/>
+          <a:p>
+            <a:fld id="{C1FF6DA9-008F-8B48-92A6-B652298478BF}" type="slidenum">
+              <a:rPr lang="en-US" smtClean="0"/>
+            </a:fld>
+            <a:endParaRPr lang="en-US"/>
           </a:p>
         </p:txBody>
       </p:sp>
@@ -29599,7 +30384,12 @@
             <p:ph type="sldNum" sz="quarter" idx="12"/>
           </p:nvPr>
         </p:nvSpPr>
-        <p:spPr/>
+        <p:spPr>
+          <a:xfrm>
+            <a:off x="10001250" y="6384925"/>
+            <a:ext cx="2133600" cy="365125"/>
+          </a:xfrm>
+        </p:spPr>
         <p:txBody>
           <a:bodyPr/>
           <a:p>
@@ -30316,7 +31106,12 @@
             <p:ph type="sldNum" sz="quarter" idx="12"/>
           </p:nvPr>
         </p:nvSpPr>
-        <p:spPr/>
+        <p:spPr>
+          <a:xfrm>
+            <a:off x="9899650" y="6356350"/>
+            <a:ext cx="2133600" cy="365125"/>
+          </a:xfrm>
+        </p:spPr>
         <p:txBody>
           <a:bodyPr/>
           <a:p>

--- a/benchmarks/eplb_rebalance/presentation/eplb_migration_batching.pptx
+++ b/benchmarks/eplb_rebalance/presentation/eplb_migration_batching.pptx
@@ -4849,7 +4849,6 @@
             <a:pPr algn="l"/>
             <a:r>
               <a:rPr sz="2200" b="1">
-                <a:ln/>
                 <a:solidFill>
                   <a:schemeClr val="bg1"/>
                 </a:solidFill>
@@ -4868,7 +4867,6 @@
 in vLLM</a:t>
             </a:r>
             <a:endParaRPr sz="2200" b="1">
-              <a:ln/>
               <a:solidFill>
                 <a:schemeClr val="bg1"/>
               </a:solidFill>
@@ -16417,7 +16415,6 @@
             </a:r>
             <a:r>
               <a:rPr sz="1700" b="1">
-                <a:ln/>
                 <a:solidFill>
                   <a:schemeClr val="accent1"/>
                 </a:solidFill>
@@ -16461,7 +16458,6 @@
             </a:r>
             <a:r>
               <a:rPr sz="1700" b="1">
-                <a:ln/>
                 <a:solidFill>
                   <a:schemeClr val="accent1"/>
                 </a:solidFill>
@@ -16818,7 +16814,6 @@
           <a:p>
             <a:r>
               <a:rPr lang="en-US" altLang="zh-CN" sz="8800" b="1" i="1">
-                <a:ln/>
                 <a:solidFill>
                   <a:schemeClr val="accent1"/>
                 </a:solidFill>
@@ -16833,7 +16828,6 @@
               <a:t>VS</a:t>
             </a:r>
             <a:endParaRPr lang="en-US" altLang="zh-CN" sz="8800" b="1" i="1">
-              <a:ln/>
               <a:solidFill>
                 <a:schemeClr val="accent1"/>
               </a:solidFill>
@@ -27143,7 +27137,7 @@
         </p:nvSpPr>
         <p:spPr>
           <a:xfrm>
-            <a:off x="786384" y="3840480"/>
+            <a:off x="786384" y="3954780"/>
             <a:ext cx="2468880" cy="228600"/>
           </a:xfrm>
           <a:prstGeom prst="rect">
@@ -27186,7 +27180,7 @@
             </p:nvSpPr>
             <p:spPr>
               <a:xfrm>
-                <a:off x="749808" y="4114800"/>
+                <a:off x="749808" y="4286250"/>
                 <a:ext cx="960120" cy="274320"/>
               </a:xfrm>
               <a:prstGeom prst="rect">
@@ -27254,7 +27248,7 @@
             </p:nvSpPr>
             <p:spPr>
               <a:xfrm>
-                <a:off x="749808" y="4114800"/>
+                <a:off x="749808" y="4286250"/>
                 <a:ext cx="960120" cy="274320"/>
               </a:xfrm>
               <a:prstGeom prst="rect">
@@ -27290,7 +27284,7 @@
         </p:nvSpPr>
         <p:spPr>
           <a:xfrm>
-            <a:off x="1600200" y="4114800"/>
+            <a:off x="1600200" y="4286250"/>
             <a:ext cx="1645920" cy="292608"/>
           </a:xfrm>
           <a:prstGeom prst="rect">
@@ -27333,7 +27327,7 @@
             </p:nvSpPr>
             <p:spPr>
               <a:xfrm>
-                <a:off x="749808" y="4462272"/>
+                <a:off x="749808" y="4633722"/>
                 <a:ext cx="960120" cy="274320"/>
               </a:xfrm>
               <a:prstGeom prst="rect">
@@ -27419,7 +27413,7 @@
             </p:nvSpPr>
             <p:spPr>
               <a:xfrm>
-                <a:off x="749808" y="4462272"/>
+                <a:off x="749808" y="4633722"/>
                 <a:ext cx="960120" cy="274320"/>
               </a:xfrm>
               <a:prstGeom prst="rect">
@@ -27455,7 +27449,7 @@
         </p:nvSpPr>
         <p:spPr>
           <a:xfrm>
-            <a:off x="1600200" y="4462272"/>
+            <a:off x="1600200" y="4633722"/>
             <a:ext cx="1645920" cy="292608"/>
           </a:xfrm>
           <a:prstGeom prst="rect">
@@ -27498,7 +27492,7 @@
             </p:nvSpPr>
             <p:spPr>
               <a:xfrm>
-                <a:off x="749808" y="4809744"/>
+                <a:off x="749808" y="4981194"/>
                 <a:ext cx="960120" cy="274320"/>
               </a:xfrm>
               <a:prstGeom prst="rect">
@@ -27566,7 +27560,7 @@
             </p:nvSpPr>
             <p:spPr>
               <a:xfrm>
-                <a:off x="749808" y="4809744"/>
+                <a:off x="749808" y="4981194"/>
                 <a:ext cx="960120" cy="274320"/>
               </a:xfrm>
               <a:prstGeom prst="rect">
@@ -27602,7 +27596,7 @@
         </p:nvSpPr>
         <p:spPr>
           <a:xfrm>
-            <a:off x="1600200" y="4809744"/>
+            <a:off x="1600200" y="4981194"/>
             <a:ext cx="1645920" cy="292608"/>
           </a:xfrm>
           <a:prstGeom prst="rect">
@@ -27645,7 +27639,7 @@
             </p:nvSpPr>
             <p:spPr>
               <a:xfrm>
-                <a:off x="749808" y="5157216"/>
+                <a:off x="749808" y="5328666"/>
                 <a:ext cx="960120" cy="274320"/>
               </a:xfrm>
               <a:prstGeom prst="rect">
@@ -27740,7 +27734,7 @@
             </p:nvSpPr>
             <p:spPr>
               <a:xfrm>
-                <a:off x="749808" y="5157216"/>
+                <a:off x="749808" y="5328666"/>
                 <a:ext cx="960120" cy="274320"/>
               </a:xfrm>
               <a:prstGeom prst="rect">
@@ -27776,7 +27770,7 @@
         </p:nvSpPr>
         <p:spPr>
           <a:xfrm>
-            <a:off x="1600200" y="5157216"/>
+            <a:off x="1600200" y="5328666"/>
             <a:ext cx="1645920" cy="292608"/>
           </a:xfrm>
           <a:prstGeom prst="rect">
@@ -27803,47 +27797,6 @@
             <a:endParaRPr sz="980" b="0">
               <a:solidFill>
                 <a:srgbClr val="1F3046"/>
-              </a:solidFill>
-              <a:latin typeface="Arial" panose="020B0604020202020204"/>
-            </a:endParaRPr>
-          </a:p>
-        </p:txBody>
-      </p:sp>
-      <p:sp>
-        <p:nvSpPr>
-          <p:cNvPr id="25" name="TextBox 24"/>
-          <p:cNvSpPr txBox="1"/>
-          <p:nvPr/>
-        </p:nvSpPr>
-        <p:spPr>
-          <a:xfrm>
-            <a:off x="749808" y="5532120"/>
-            <a:ext cx="2523744" cy="292608"/>
-          </a:xfrm>
-          <a:prstGeom prst="rect">
-            <a:avLst/>
-          </a:prstGeom>
-          <a:noFill/>
-        </p:spPr>
-        <p:txBody>
-          <a:bodyPr wrap="square" lIns="128016" tIns="73152" rIns="128016" bIns="54864" anchor="ctr">
-            <a:spAutoFit/>
-          </a:bodyPr>
-          <a:lstStyle/>
-          <a:p>
-            <a:pPr algn="ctr"/>
-            <a:r>
-              <a:rPr sz="950" b="1">
-                <a:solidFill>
-                  <a:srgbClr val="E67E22"/>
-                </a:solidFill>
-                <a:latin typeface="Arial" panose="020B0604020202020204"/>
-              </a:rPr>
-              <a:t>Tie-break: minimize active batches after fixing Tᵢₙfₑᵣ</a:t>
-            </a:r>
-            <a:endParaRPr sz="950" b="1">
-              <a:solidFill>
-                <a:srgbClr val="E67E22"/>
               </a:solidFill>
               <a:latin typeface="Arial" panose="020B0604020202020204"/>
             </a:endParaRPr>
@@ -29227,8 +29180,8 @@
             </p:nvSpPr>
             <p:spPr>
               <a:xfrm>
-                <a:off x="6355080" y="4572000"/>
-                <a:ext cx="4800600" cy="457200"/>
+                <a:off x="7814310" y="4447223"/>
+                <a:ext cx="1882140" cy="706755"/>
               </a:xfrm>
               <a:prstGeom prst="rect">
                 <a:avLst/>
@@ -29273,16 +29226,7 @@
                               </a:solidFill>
                               <a:latin typeface="Cambria Math" panose="02040503050406030204"/>
                             </a:rPr>
-                            <m:t>ℓ</m:t>
-                          </m:r>
-                          <m:r>
-                            <a:rPr lang="en-US" sz="1400" dirty="0">
-                              <a:solidFill>
-                                <a:srgbClr val="1F3046"/>
-                              </a:solidFill>
-                              <a:latin typeface="Cambria Math" panose="02040503050406030204"/>
-                            </a:rPr>
-                            <m:t>,</m:t>
+                            <m:t>ℓ,</m:t>
                           </m:r>
                           <m:r>
                             <a:rPr lang="en-US" sz="1400" dirty="0">
@@ -29408,17 +29352,10 @@
                                 <a:srgbClr val="1F3046"/>
                               </a:solidFill>
                               <a:latin typeface="Cambria Math" panose="02040503050406030204"/>
+                              <a:ea typeface="MS Mincho" charset="0"/>
+                              <a:cs typeface="Cambria Math" panose="02040503050406030204"/>
                             </a:rPr>
-                            <m:t>,</m:t>
-                          </m:r>
-                          <m:r>
-                            <a:rPr lang="en-US" sz="1400" dirty="0">
-                              <a:solidFill>
-                                <a:srgbClr val="1F3046"/>
-                              </a:solidFill>
-                              <a:latin typeface="Cambria Math" panose="02040503050406030204"/>
-                            </a:rPr>
-                            <m:t>ℓ</m:t>
+                            <m:t>,e</m:t>
                           </m:r>
                         </m:sub>
                       </m:sSub>
@@ -29487,8 +29424,8 @@
             </p:nvSpPr>
             <p:spPr>
               <a:xfrm>
-                <a:off x="6355080" y="4572000"/>
-                <a:ext cx="4800600" cy="457200"/>
+                <a:off x="7814310" y="4447223"/>
+                <a:ext cx="1882140" cy="706755"/>
               </a:xfrm>
               <a:prstGeom prst="rect">
                 <a:avLst/>
@@ -29496,7 +29433,7 @@
               <a:blipFill rotWithShape="1">
                 <a:blip r:embed="rId12"/>
                 <a:stretch>
-                  <a:fillRect t="-16528" b="-16806"/>
+                  <a:fillRect t="-45" b="45"/>
                 </a:stretch>
               </a:blipFill>
             </p:spPr>
@@ -29611,8 +29548,8 @@
             </p:nvSpPr>
             <p:spPr>
               <a:xfrm>
-                <a:off x="6355080" y="5303520"/>
-                <a:ext cx="4800600" cy="457200"/>
+                <a:off x="7424738" y="5223828"/>
+                <a:ext cx="2661285" cy="616585"/>
               </a:xfrm>
               <a:prstGeom prst="rect">
                 <a:avLst/>
@@ -29802,13 +29739,16 @@
                                 </m:e>
                                 <m:sub>
                                   <m:r>
+                                    <m:rPr>
+                                      <m:sty m:val="p"/>
+                                    </m:rPr>
                                     <a:rPr lang="en-US" sz="1200" dirty="0">
                                       <a:solidFill>
                                         <a:srgbClr val="1F3046"/>
                                       </a:solidFill>
                                       <a:latin typeface="Cambria Math" panose="02040503050406030204"/>
                                     </a:rPr>
-                                    <m:t>ℓ</m:t>
+                                    <m:t>e</m:t>
                                   </m:r>
                                   <m:r>
                                     <a:rPr lang="en-US" sz="1200" dirty="0">
@@ -29851,13 +29791,16 @@
                                 </m:e>
                                 <m:sub>
                                   <m:r>
+                                    <m:rPr>
+                                      <m:sty m:val="p"/>
+                                    </m:rPr>
                                     <a:rPr lang="en-US" sz="1200" dirty="0">
                                       <a:solidFill>
                                         <a:srgbClr val="1F3046"/>
                                       </a:solidFill>
                                       <a:latin typeface="Cambria Math" panose="02040503050406030204"/>
                                     </a:rPr>
-                                    <m:t>ℓ</m:t>
+                                    <m:t>e</m:t>
                                   </m:r>
                                 </m:sub>
                               </m:sSub>
@@ -29930,13 +29873,16 @@
                         <m:t>∀</m:t>
                       </m:r>
                       <m:r>
+                        <m:rPr>
+                          <m:sty m:val="p"/>
+                        </m:rPr>
                         <a:rPr lang="en-US" sz="1200" dirty="0">
                           <a:solidFill>
                             <a:srgbClr val="1F3046"/>
                           </a:solidFill>
                           <a:latin typeface="Cambria Math" panose="02040503050406030204"/>
                         </a:rPr>
-                        <m:t>ℓ</m:t>
+                        <m:t>e</m:t>
                       </m:r>
                       <m:r>
                         <a:rPr lang="en-US" sz="1200" dirty="0">
@@ -29974,8 +29920,8 @@
             </p:nvSpPr>
             <p:spPr>
               <a:xfrm>
-                <a:off x="6355080" y="5303520"/>
-                <a:ext cx="4800600" cy="457200"/>
+                <a:off x="7424738" y="5223828"/>
+                <a:ext cx="2661285" cy="616585"/>
               </a:xfrm>
               <a:prstGeom prst="rect">
                 <a:avLst/>
@@ -29983,7 +29929,7 @@
               <a:blipFill rotWithShape="1">
                 <a:blip r:embed="rId13"/>
                 <a:stretch>
-                  <a:fillRect t="-6806" b="-6944"/>
+                  <a:fillRect l="-12" t="-51" r="12" b="51"/>
                 </a:stretch>
               </a:blipFill>
             </p:spPr>
